--- a/docs/digest-zh.pptx
+++ b/docs/digest-zh.pptx
@@ -2450,7 +2450,7 @@
                 <a:ea typeface="Microsoft JhengHei" pitchFamily="34" charset="-122"/>
                 <a:cs typeface="Microsoft JhengHei" pitchFamily="34" charset="-120"/>
               </a:rPr>
-              <a:t>評估uHCC的組合療法</a:t>
+              <a:t>TACE 與 PD-1 抑制劑聯合</a:t>
             </a:r>
             <a:endParaRPr lang="en-US" sz="1800" dirty="0"/>
           </a:p>
@@ -2471,7 +2471,7 @@
                 <a:ea typeface="Microsoft JhengHei" pitchFamily="34" charset="-122"/>
                 <a:cs typeface="Microsoft JhengHei" pitchFamily="34" charset="-120"/>
               </a:rPr>
-              <a:t>使用肝動脈化療栓塞(TACE)</a:t>
+              <a:t>針對 uHCC 患者的第二期試驗</a:t>
             </a:r>
             <a:endParaRPr lang="en-US" sz="1800" dirty="0"/>
           </a:p>
@@ -2492,49 +2492,7 @@
                 <a:ea typeface="Microsoft JhengHei" pitchFamily="34" charset="-122"/>
                 <a:cs typeface="Microsoft JhengHei" pitchFamily="34" charset="-120"/>
               </a:rPr>
-              <a:t>加入PD-1抑制劑以提高療效</a:t>
-            </a:r>
-            <a:endParaRPr lang="en-US" sz="1800" dirty="0"/>
-          </a:p>
-          <a:p>
-            <a:pPr marL="342900" indent="-342900">
-              <a:spcAft>
-                <a:spcPts val="800"/>
-              </a:spcAft>
-              <a:buSzPct val="100000"/>
-              <a:buChar char="•"/>
-            </a:pPr>
-            <a:r>
-              <a:rPr lang="en-US" sz="1800" dirty="0">
-                <a:solidFill>
-                  <a:srgbClr val="333333"/>
-                </a:solidFill>
-                <a:latin typeface="Microsoft JhengHei" pitchFamily="34" charset="0"/>
-                <a:ea typeface="Microsoft JhengHei" pitchFamily="34" charset="-122"/>
-                <a:cs typeface="Microsoft JhengHei" pitchFamily="34" charset="-120"/>
-              </a:rPr>
-              <a:t>第二期臨床試驗顯示潛力</a:t>
-            </a:r>
-            <a:endParaRPr lang="en-US" sz="1800" dirty="0"/>
-          </a:p>
-          <a:p>
-            <a:pPr marL="342900" indent="-342900">
-              <a:spcAft>
-                <a:spcPts val="800"/>
-              </a:spcAft>
-              <a:buSzPct val="100000"/>
-              <a:buChar char="•"/>
-            </a:pPr>
-            <a:r>
-              <a:rPr lang="en-US" sz="1800" dirty="0">
-                <a:solidFill>
-                  <a:srgbClr val="333333"/>
-                </a:solidFill>
-                <a:latin typeface="Microsoft JhengHei" pitchFamily="34" charset="0"/>
-                <a:ea typeface="Microsoft JhengHei" pitchFamily="34" charset="-122"/>
-                <a:cs typeface="Microsoft JhengHei" pitchFamily="34" charset="-120"/>
-              </a:rPr>
-              <a:t>結果顯示改善病人預後</a:t>
+              <a:t>評估與單獨 TACE 的療效</a:t>
             </a:r>
             <a:endParaRPr lang="en-US" sz="1800" dirty="0"/>
           </a:p>
@@ -2813,7 +2771,7 @@
                 <a:ea typeface="Microsoft JhengHei" pitchFamily="34" charset="-122"/>
                 <a:cs typeface="Microsoft JhengHei" pitchFamily="34" charset="-120"/>
               </a:rPr>
-              <a:t>Atez+Bev 在 Dur+Tre 後有效。</a:t>
+              <a:t>Atez+Bev 在 HCC 中 ORR 為 25%。</a:t>
             </a:r>
             <a:endParaRPr lang="en-US" sz="1800" dirty="0"/>
           </a:p>
@@ -2834,7 +2792,7 @@
                 <a:ea typeface="Microsoft JhengHei" pitchFamily="34" charset="-122"/>
                 <a:cs typeface="Microsoft JhengHei" pitchFamily="34" charset="-120"/>
               </a:rPr>
-              <a:t>客觀反應率為 25.0%。</a:t>
+              <a:t>75% DCR 顯示良好疾病控制。</a:t>
             </a:r>
             <a:endParaRPr lang="en-US" sz="1800" dirty="0"/>
           </a:p>
@@ -2855,7 +2813,7 @@
                 <a:ea typeface="Microsoft JhengHei" pitchFamily="34" charset="-122"/>
                 <a:cs typeface="Microsoft JhengHei" pitchFamily="34" charset="-120"/>
               </a:rPr>
-              <a:t>疾病控制率達 75.0%。</a:t>
+              <a:t>不良事件在兩種療法間不同。</a:t>
             </a:r>
             <a:endParaRPr lang="en-US" sz="1800" dirty="0"/>
           </a:p>
@@ -2876,7 +2834,7 @@
                 <a:ea typeface="Microsoft JhengHei" pitchFamily="34" charset="-122"/>
                 <a:cs typeface="Microsoft JhengHei" pitchFamily="34" charset="-120"/>
               </a:rPr>
-              <a:t>不良事件在治療間不同。</a:t>
+              <a:t>先前的 Dur+Tre 可能增強免疫反應。</a:t>
             </a:r>
             <a:endParaRPr lang="en-US" sz="1800" dirty="0"/>
           </a:p>
@@ -2897,7 +2855,7 @@
                 <a:ea typeface="Microsoft JhengHei" pitchFamily="34" charset="-122"/>
                 <a:cs typeface="Microsoft JhengHei" pitchFamily="34" charset="-120"/>
               </a:rPr>
-              <a:t>先前的 Dur+Tre 可能增強免疫反應。</a:t>
+              <a:t>序列治療是一個可行選擇。</a:t>
             </a:r>
             <a:endParaRPr lang="en-US" sz="1800" dirty="0"/>
           </a:p>
@@ -3176,7 +3134,7 @@
                 <a:ea typeface="Microsoft JhengHei" pitchFamily="34" charset="-122"/>
                 <a:cs typeface="Microsoft JhengHei" pitchFamily="34" charset="-120"/>
               </a:rPr>
-              <a:t>放射治療與局部消融比較</a:t>
+              <a:t>局部消融療法包括RFA和微波消融。</a:t>
             </a:r>
             <a:endParaRPr lang="en-US" sz="1800" dirty="0"/>
           </a:p>
@@ -3197,7 +3155,7 @@
                 <a:ea typeface="Microsoft JhengHei" pitchFamily="34" charset="-122"/>
                 <a:cs typeface="Microsoft JhengHei" pitchFamily="34" charset="-120"/>
               </a:rPr>
-              <a:t>聚焦肝細胞癌治療</a:t>
+              <a:t>EBRT與局部消融結果不同。</a:t>
             </a:r>
             <a:endParaRPr lang="en-US" sz="1800" dirty="0"/>
           </a:p>
@@ -3218,49 +3176,7 @@
                 <a:ea typeface="Microsoft JhengHei" pitchFamily="34" charset="-122"/>
                 <a:cs typeface="Microsoft JhengHei" pitchFamily="34" charset="-120"/>
               </a:rPr>
-              <a:t>評估局部無進展生存期</a:t>
-            </a:r>
-            <a:endParaRPr lang="en-US" sz="1800" dirty="0"/>
-          </a:p>
-          <a:p>
-            <a:pPr marL="342900" indent="-342900">
-              <a:spcAft>
-                <a:spcPts val="800"/>
-              </a:spcAft>
-              <a:buSzPct val="100000"/>
-              <a:buChar char="•"/>
-            </a:pPr>
-            <a:r>
-              <a:rPr lang="en-US" sz="1800" dirty="0">
-                <a:solidFill>
-                  <a:srgbClr val="333333"/>
-                </a:solidFill>
-                <a:latin typeface="Microsoft JhengHei" pitchFamily="34" charset="0"/>
-                <a:ea typeface="Microsoft JhengHei" pitchFamily="34" charset="-122"/>
-                <a:cs typeface="Microsoft JhengHei" pitchFamily="34" charset="-120"/>
-              </a:rPr>
-              <a:t>包含射頻與微波消融</a:t>
-            </a:r>
-            <a:endParaRPr lang="en-US" sz="1800" dirty="0"/>
-          </a:p>
-          <a:p>
-            <a:pPr marL="342900" indent="-342900">
-              <a:spcAft>
-                <a:spcPts val="800"/>
-              </a:spcAft>
-              <a:buSzPct val="100000"/>
-              <a:buChar char="•"/>
-            </a:pPr>
-            <a:r>
-              <a:rPr lang="en-US" sz="1800" dirty="0">
-                <a:solidFill>
-                  <a:srgbClr val="333333"/>
-                </a:solidFill>
-                <a:latin typeface="Microsoft JhengHei" pitchFamily="34" charset="0"/>
-                <a:ea typeface="Microsoft JhengHei" pitchFamily="34" charset="-122"/>
-                <a:cs typeface="Microsoft JhengHei" pitchFamily="34" charset="-120"/>
-              </a:rPr>
-              <a:t>進行系統性回顧與統合分析</a:t>
+              <a:t>系統評估局部無進展生存率。</a:t>
             </a:r>
             <a:endParaRPr lang="en-US" sz="1800" dirty="0"/>
           </a:p>
@@ -3533,7 +3449,7 @@
                   <a:srgbClr val="FFFFFF"/>
                 </a:solidFill>
               </a:rPr>
-              <a:t>1. **免疫療法的潛力**  </a:t>
+              <a:t>1. **免疫治療的潛力**  </a:t>
             </a:r>
             <a:endParaRPr lang="en-US" sz="1200" dirty="0"/>
           </a:p>
@@ -3550,7 +3466,7 @@
                   <a:srgbClr val="FFFFFF"/>
                 </a:solidFill>
               </a:rPr>
-              <a:t>   The integration of immune therapy with traditional treatments such as surgery and local ablation has shown promising results in enhancing therapeutic outcomes for HCC patients.  </a:t>
+              <a:t>   **The Potential of Immunotherapy**  </a:t>
             </a:r>
             <a:endParaRPr lang="en-US" sz="1200" dirty="0"/>
           </a:p>
@@ -3567,7 +3483,7 @@
                   <a:srgbClr val="FFFFFF"/>
                 </a:solidFill>
               </a:rPr>
-              <a:t>   免疫療法與傳統治療（如手術和局部消融）的結合顯示出改善肝癌患者療效的潛力。</a:t>
+              <a:t>   免疫治療在晚期肝細胞癌（HCC）中顯示出顯著的療效，尤其在早期階段的應用仍需進一步探索。  </a:t>
             </a:r>
             <a:endParaRPr lang="en-US" sz="1200" dirty="0"/>
           </a:p>
@@ -3578,6 +3494,14 @@
               </a:lnSpc>
               <a:buNone/>
             </a:pPr>
+            <a:r>
+              <a:rPr lang="en-US" sz="1200" dirty="0">
+                <a:solidFill>
+                  <a:srgbClr val="FFFFFF"/>
+                </a:solidFill>
+              </a:rPr>
+              <a:t>   Immunotherapy has shown significant efficacy in advanced hepatocellular carcinoma (HCC), particularly its application in earlier stages remains to be further explored.</a:t>
+            </a:r>
             <a:endParaRPr lang="en-US" sz="1200" dirty="0"/>
           </a:p>
           <a:p>
@@ -3587,6 +3511,15 @@
               </a:lnSpc>
               <a:buNone/>
             </a:pPr>
+            <a:endParaRPr lang="en-US" sz="1200" dirty="0"/>
+          </a:p>
+          <a:p>
+            <a:pPr indent="0" marL="0">
+              <a:lnSpc>
+                <a:spcPct val="160000"/>
+              </a:lnSpc>
+              <a:buNone/>
+            </a:pPr>
             <a:r>
               <a:rPr lang="en-US" sz="1200" dirty="0">
                 <a:solidFill>
@@ -3610,7 +3543,7 @@
                   <a:srgbClr val="FFFFFF"/>
                 </a:solidFill>
               </a:rPr>
-              <a:t>   Neoadjuvant therapies, including stereotactic body radiation therapy combined with immune therapy, can favorably remodel the tumor microenvironment, potentially improving patient responses.  </a:t>
+              <a:t>   **Remodeling of Tumor Microenvironment**  </a:t>
             </a:r>
             <a:endParaRPr lang="en-US" sz="1200" dirty="0"/>
           </a:p>
@@ -3627,7 +3560,7 @@
                   <a:srgbClr val="FFFFFF"/>
                 </a:solidFill>
               </a:rPr>
-              <a:t>   新輔助療法（如立體定向體部放射治療結合免疫療法）能夠有利地重塑腫瘤微環境，可能改善患者的反應。</a:t>
+              <a:t>   新的療法如新輔助立體定向放射治療結合免疫治療能有效重塑HCC的腫瘤微環境，增強治療反應。  </a:t>
             </a:r>
             <a:endParaRPr lang="en-US" sz="1200" dirty="0"/>
           </a:p>
@@ -3638,6 +3571,14 @@
               </a:lnSpc>
               <a:buNone/>
             </a:pPr>
+            <a:r>
+              <a:rPr lang="en-US" sz="1200" dirty="0">
+                <a:solidFill>
+                  <a:srgbClr val="FFFFFF"/>
+                </a:solidFill>
+              </a:rPr>
+              <a:t>   Novel therapies such as neoadjuvant stereotactic body radiation therapy combined with immunotherapy can effectively remodel the HCC tumor microenvironment, enhancing treatment responses.</a:t>
+            </a:r>
             <a:endParaRPr lang="en-US" sz="1200" dirty="0"/>
           </a:p>
           <a:p>
@@ -3647,6 +3588,15 @@
               </a:lnSpc>
               <a:buNone/>
             </a:pPr>
+            <a:endParaRPr lang="en-US" sz="1200" dirty="0"/>
+          </a:p>
+          <a:p>
+            <a:pPr indent="0" marL="0">
+              <a:lnSpc>
+                <a:spcPct val="160000"/>
+              </a:lnSpc>
+              <a:buNone/>
+            </a:pPr>
             <a:r>
               <a:rPr lang="en-US" sz="1200" dirty="0">
                 <a:solidFill>
@@ -3670,7 +3620,7 @@
                   <a:srgbClr val="FFFFFF"/>
                 </a:solidFill>
               </a:rPr>
-              <a:t>   Cancer-associated fibroblasts (CAFs) play a crucial role in promoting immunosuppression in HCC, highlighting the need to target these cells for effective therapy.  </a:t>
+              <a:t>   **Role of Cancer-Associated Fibroblasts**  </a:t>
             </a:r>
             <a:endParaRPr lang="en-US" sz="1200" dirty="0"/>
           </a:p>
@@ -3687,7 +3637,7 @@
                   <a:srgbClr val="FFFFFF"/>
                 </a:solidFill>
               </a:rPr>
-              <a:t>   癌症相關成纖維細胞（CAFs）在促進肝癌的免疫抑制中扮演關鍵角色，強調了針對這些細胞的治療需求。</a:t>
+              <a:t>   癌症相關成纖維細胞（CAFs）在HCC中促進免疫抑制，揭示了其作為潛在治療靶點的重要性。  </a:t>
             </a:r>
             <a:endParaRPr lang="en-US" sz="1200" dirty="0"/>
           </a:p>
@@ -3698,6 +3648,14 @@
               </a:lnSpc>
               <a:buNone/>
             </a:pPr>
+            <a:r>
+              <a:rPr lang="en-US" sz="1200" dirty="0">
+                <a:solidFill>
+                  <a:srgbClr val="FFFFFF"/>
+                </a:solidFill>
+              </a:rPr>
+              <a:t>   Cancer-associated fibroblasts (CAFs) promote immunosuppression in HCC, highlighting their importance as potential therapeutic targets.</a:t>
+            </a:r>
             <a:endParaRPr lang="en-US" sz="1200" dirty="0"/>
           </a:p>
           <a:p>
@@ -3707,6 +3665,15 @@
               </a:lnSpc>
               <a:buNone/>
             </a:pPr>
+            <a:endParaRPr lang="en-US" sz="1200" dirty="0"/>
+          </a:p>
+          <a:p>
+            <a:pPr indent="0" marL="0">
+              <a:lnSpc>
+                <a:spcPct val="160000"/>
+              </a:lnSpc>
+              <a:buNone/>
+            </a:pPr>
             <a:r>
               <a:rPr lang="en-US" sz="1200" dirty="0">
                 <a:solidFill>
@@ -3730,7 +3697,7 @@
                   <a:srgbClr val="FFFFFF"/>
                 </a:solidFill>
               </a:rPr>
-              <a:t>   Despite effective surgical interventions, postoperative recurrence remains a significant challenge, necessitating further research into mechanisms and preventive strategies.  </a:t>
+              <a:t>   **Challenges of Postoperative Recurrence**  </a:t>
             </a:r>
             <a:endParaRPr lang="en-US" sz="1200" dirty="0"/>
           </a:p>
@@ -3747,7 +3714,7 @@
                   <a:srgbClr val="FFFFFF"/>
                 </a:solidFill>
               </a:rPr>
-              <a:t>   儘管手術干預有效，術後復發仍然是一個重大挑戰，需要進一步研究其機制和預防策略。</a:t>
+              <a:t>   雖然手術切除對早期HCC有效，但術後復發仍是主要的臨床挑戰，需深入研究其機制。  </a:t>
             </a:r>
             <a:endParaRPr lang="en-US" sz="1200" dirty="0"/>
           </a:p>
@@ -3758,6 +3725,14 @@
               </a:lnSpc>
               <a:buNone/>
             </a:pPr>
+            <a:r>
+              <a:rPr lang="en-US" sz="1200" dirty="0">
+                <a:solidFill>
+                  <a:srgbClr val="FFFFFF"/>
+                </a:solidFill>
+              </a:rPr>
+              <a:t>   While surgical resection is effective for early-stage HCC, postoperative recurrence remains a major clinical challenge that requires deeper investigation into its mechanisms.</a:t>
+            </a:r>
             <a:endParaRPr lang="en-US" sz="1200" dirty="0"/>
           </a:p>
           <a:p>
@@ -3767,13 +3742,22 @@
               </a:lnSpc>
               <a:buNone/>
             </a:pPr>
+            <a:endParaRPr lang="en-US" sz="1200" dirty="0"/>
+          </a:p>
+          <a:p>
+            <a:pPr indent="0" marL="0">
+              <a:lnSpc>
+                <a:spcPct val="160000"/>
+              </a:lnSpc>
+              <a:buNone/>
+            </a:pPr>
             <a:r>
               <a:rPr lang="en-US" sz="1200" dirty="0">
                 <a:solidFill>
                   <a:srgbClr val="FFFFFF"/>
                 </a:solidFill>
               </a:rPr>
-              <a:t>5. **多模態治療的必要性**  </a:t>
+              <a:t>5. **多模態治療策略的必要性**  </a:t>
             </a:r>
             <a:endParaRPr lang="en-US" sz="1200" dirty="0"/>
           </a:p>
@@ -3790,7 +3774,7 @@
                   <a:srgbClr val="FFFFFF"/>
                 </a:solidFill>
               </a:rPr>
-              <a:t>   The combination of various treatment modalities, including immunotherapy, local ablation, and systemic therapies, is essential for improving outcomes in advanced HCC cases.  </a:t>
+              <a:t>   **Necessity of Multimodal Treatment Strategies**  </a:t>
             </a:r>
             <a:endParaRPr lang="en-US" sz="1200" dirty="0"/>
           </a:p>
@@ -3807,7 +3791,7 @@
                   <a:srgbClr val="FFFFFF"/>
                 </a:solidFill>
               </a:rPr>
-              <a:t>   結合各種治療模式，包括免疫療法、局部消融和全身療法，對於改善晚期肝癌病例的療效至關重要。</a:t>
+              <a:t>   對於不可切除的中晚期HCC，結合局部消融、化療和免疫治療的多模態策略顯示出潛在的療效。  </a:t>
             </a:r>
             <a:endParaRPr lang="en-US" sz="1200" dirty="0"/>
           </a:p>
@@ -3818,6 +3802,14 @@
               </a:lnSpc>
               <a:buNone/>
             </a:pPr>
+            <a:r>
+              <a:rPr lang="en-US" sz="1200" dirty="0">
+                <a:solidFill>
+                  <a:srgbClr val="FFFFFF"/>
+                </a:solidFill>
+              </a:rPr>
+              <a:t>   For unresectable intermediate-advanced HCC, multimodal strategies combining local ablation, chemotherapy, and immunotherapy show potential efficacy.</a:t>
+            </a:r>
             <a:endParaRPr lang="en-US" sz="1200" dirty="0"/>
           </a:p>
           <a:p>
@@ -3827,6 +3819,15 @@
               </a:lnSpc>
               <a:buNone/>
             </a:pPr>
+            <a:endParaRPr lang="en-US" sz="1200" dirty="0"/>
+          </a:p>
+          <a:p>
+            <a:pPr indent="0" marL="0">
+              <a:lnSpc>
+                <a:spcPct val="160000"/>
+              </a:lnSpc>
+              <a:buNone/>
+            </a:pPr>
             <a:r>
               <a:rPr lang="en-US" sz="1200" dirty="0">
                 <a:solidFill>
@@ -3859,7 +3860,7 @@
                   <a:srgbClr val="FFFFFF"/>
                 </a:solidFill>
               </a:rPr>
-              <a:t>1. **早期階段的免疫療法應用**  </a:t>
+              <a:t>1. **早期階段免疫治療的最佳化**  </a:t>
             </a:r>
             <a:endParaRPr lang="en-US" sz="1200" dirty="0"/>
           </a:p>
@@ -3876,7 +3877,7 @@
                   <a:srgbClr val="FFFFFF"/>
                 </a:solidFill>
               </a:rPr>
-              <a:t>   Investigating the optimal use of immune therapy in early-stage HCC will be crucial for maximizing patient benefits and reducing recurrence rates.  </a:t>
+              <a:t>   **Optimization of Immunotherapy in Early Stages**  </a:t>
             </a:r>
             <a:endParaRPr lang="en-US" sz="1200" dirty="0"/>
           </a:p>
@@ -3893,7 +3894,7 @@
                   <a:srgbClr val="FFFFFF"/>
                 </a:solidFill>
               </a:rPr>
-              <a:t>   研究免疫療法在早期肝癌中的最佳應用對於最大化患者利益和降低復發率至關重要。</a:t>
+              <a:t>   需進一步研究如何在早期肝細胞癌中最佳化免疫治療的使用，以提高療效。  </a:t>
             </a:r>
             <a:endParaRPr lang="en-US" sz="1200" dirty="0"/>
           </a:p>
@@ -3904,6 +3905,14 @@
               </a:lnSpc>
               <a:buNone/>
             </a:pPr>
+            <a:r>
+              <a:rPr lang="en-US" sz="1200" dirty="0">
+                <a:solidFill>
+                  <a:srgbClr val="FFFFFF"/>
+                </a:solidFill>
+              </a:rPr>
+              <a:t>   Further research is needed to optimize the use of immunotherapy in early-stage hepatocellular carcinoma to enhance efficacy.</a:t>
+            </a:r>
             <a:endParaRPr lang="en-US" sz="1200" dirty="0"/>
           </a:p>
           <a:p>
@@ -3913,13 +3922,22 @@
               </a:lnSpc>
               <a:buNone/>
             </a:pPr>
+            <a:endParaRPr lang="en-US" sz="1200" dirty="0"/>
+          </a:p>
+          <a:p>
+            <a:pPr indent="0" marL="0">
+              <a:lnSpc>
+                <a:spcPct val="160000"/>
+              </a:lnSpc>
+              <a:buNone/>
+            </a:pPr>
             <a:r>
               <a:rPr lang="en-US" sz="1200" dirty="0">
                 <a:solidFill>
                   <a:srgbClr val="FFFFFF"/>
                 </a:solidFill>
               </a:rPr>
-              <a:t>2. **腫瘤微環境的深入研究**  </a:t>
+              <a:t>2. **腫瘤微環境的深入分析**  </a:t>
             </a:r>
             <a:endParaRPr lang="en-US" sz="1200" dirty="0"/>
           </a:p>
@@ -3936,7 +3954,7 @@
                   <a:srgbClr val="FFFFFF"/>
                 </a:solidFill>
               </a:rPr>
-              <a:t>   Further exploration of the tumor microenvironment, particularly the role of CAFs and other immune cells, will provide insights into new therapeutic targets.  </a:t>
+              <a:t>   **In-depth Analysis of Tumor Microenvironment**  </a:t>
             </a:r>
             <a:endParaRPr lang="en-US" sz="1200" dirty="0"/>
           </a:p>
@@ -3953,7 +3971,7 @@
                   <a:srgbClr val="FFFFFF"/>
                 </a:solidFill>
               </a:rPr>
-              <a:t>   深入研究腫瘤微環境，特別是CAFs和其他免疫細胞的角色，將提供新的治療靶點的見解。</a:t>
+              <a:t>   對腫瘤微環境的組成及其對免疫反應的影響進行深入研究，以開發新療法。  </a:t>
             </a:r>
             <a:endParaRPr lang="en-US" sz="1200" dirty="0"/>
           </a:p>
@@ -3964,6 +3982,14 @@
               </a:lnSpc>
               <a:buNone/>
             </a:pPr>
+            <a:r>
+              <a:rPr lang="en-US" sz="1200" dirty="0">
+                <a:solidFill>
+                  <a:srgbClr val="FFFFFF"/>
+                </a:solidFill>
+              </a:rPr>
+              <a:t>   In-depth studies on the composition of the tumor microenvironment and its impact on immune responses are essential for developing new therapies.</a:t>
+            </a:r>
             <a:endParaRPr lang="en-US" sz="1200" dirty="0"/>
           </a:p>
           <a:p>
@@ -3973,13 +3999,22 @@
               </a:lnSpc>
               <a:buNone/>
             </a:pPr>
+            <a:endParaRPr lang="en-US" sz="1200" dirty="0"/>
+          </a:p>
+          <a:p>
+            <a:pPr indent="0" marL="0">
+              <a:lnSpc>
+                <a:spcPct val="160000"/>
+              </a:lnSpc>
+              <a:buNone/>
+            </a:pPr>
             <a:r>
               <a:rPr lang="en-US" sz="1200" dirty="0">
                 <a:solidFill>
                   <a:srgbClr val="FFFFFF"/>
                 </a:solidFill>
               </a:rPr>
-              <a:t>3. **新輔助療法的臨床試驗**  </a:t>
+              <a:t>3. **癌症相關成纖維細胞的代謝調控**  </a:t>
             </a:r>
             <a:endParaRPr lang="en-US" sz="1200" dirty="0"/>
           </a:p>
@@ -3996,7 +4031,7 @@
                   <a:srgbClr val="FFFFFF"/>
                 </a:solidFill>
               </a:rPr>
-              <a:t>   Conducting more clinical trials on neoadjuvant therapies that combine radiation and immunotherapy could yield valuable data on their efficacy and safety.  </a:t>
+              <a:t>   **Metabolic Regulation of Cancer-Associated Fibroblasts**  </a:t>
             </a:r>
             <a:endParaRPr lang="en-US" sz="1200" dirty="0"/>
           </a:p>
@@ -4013,7 +4048,7 @@
                   <a:srgbClr val="FFFFFF"/>
                 </a:solidFill>
               </a:rPr>
-              <a:t>   開展更多關於結合放射治療和免疫療法的新輔助療法的臨床試驗，可能會產生有價值的療效和安全性數據。</a:t>
+              <a:t>   探索癌症相關成纖維細胞的代謝調控機制，以尋找新的免疫治療靶點。  </a:t>
             </a:r>
             <a:endParaRPr lang="en-US" sz="1200" dirty="0"/>
           </a:p>
@@ -4024,6 +4059,14 @@
               </a:lnSpc>
               <a:buNone/>
             </a:pPr>
+            <a:r>
+              <a:rPr lang="en-US" sz="1200" dirty="0">
+                <a:solidFill>
+                  <a:srgbClr val="FFFFFF"/>
+                </a:solidFill>
+              </a:rPr>
+              <a:t>   Exploring the metabolic regulatory mechanisms of cancer-associated fibroblasts to identify new immunotherapeutic targets is crucial.</a:t>
+            </a:r>
             <a:endParaRPr lang="en-US" sz="1200" dirty="0"/>
           </a:p>
           <a:p>
@@ -4033,13 +4076,22 @@
               </a:lnSpc>
               <a:buNone/>
             </a:pPr>
+            <a:endParaRPr lang="en-US" sz="1200" dirty="0"/>
+          </a:p>
+          <a:p>
+            <a:pPr indent="0" marL="0">
+              <a:lnSpc>
+                <a:spcPct val="160000"/>
+              </a:lnSpc>
+              <a:buNone/>
+            </a:pPr>
             <a:r>
               <a:rPr lang="en-US" sz="1200" dirty="0">
                 <a:solidFill>
                   <a:srgbClr val="FFFFFF"/>
                 </a:solidFill>
               </a:rPr>
-              <a:t>4. **個體化治療策略的發展**  </a:t>
+              <a:t>4. **多模態治療的臨床試驗**  </a:t>
             </a:r>
             <a:endParaRPr lang="en-US" sz="1200" dirty="0"/>
           </a:p>
@@ -4056,7 +4108,7 @@
                   <a:srgbClr val="FFFFFF"/>
                 </a:solidFill>
               </a:rPr>
-              <a:t>   Developing personalized treatment strategies based on genetic and molecular profiling of HCC tumors will enhance treatment efficacy and reduce adverse effects.  </a:t>
+              <a:t>   **Clinical Trials on Multimodal Treatments**  </a:t>
             </a:r>
             <a:endParaRPr lang="en-US" sz="1200" dirty="0"/>
           </a:p>
@@ -4073,7 +4125,7 @@
                   <a:srgbClr val="FFFFFF"/>
                 </a:solidFill>
               </a:rPr>
-              <a:t>   根據肝癌腫瘤的基因和分子特徵發展個體化治療策略，將提高治療效果並減少不良反應。</a:t>
+              <a:t>   設計針對不可切除HCC的多模態治療的臨床試驗，以評估其安全性和有效性。  </a:t>
             </a:r>
             <a:endParaRPr lang="en-US" sz="1200" dirty="0"/>
           </a:p>
@@ -4084,6 +4136,14 @@
               </a:lnSpc>
               <a:buNone/>
             </a:pPr>
+            <a:r>
+              <a:rPr lang="en-US" sz="1200" dirty="0">
+                <a:solidFill>
+                  <a:srgbClr val="FFFFFF"/>
+                </a:solidFill>
+              </a:rPr>
+              <a:t>   Designing clinical trials for multimodal treatments targeting unresectable HCC to evaluate their safety and efficacy is essential.</a:t>
+            </a:r>
             <a:endParaRPr lang="en-US" sz="1200" dirty="0"/>
           </a:p>
           <a:p>
@@ -4093,13 +4153,22 @@
               </a:lnSpc>
               <a:buNone/>
             </a:pPr>
+            <a:endParaRPr lang="en-US" sz="1200" dirty="0"/>
+          </a:p>
+          <a:p>
+            <a:pPr indent="0" marL="0">
+              <a:lnSpc>
+                <a:spcPct val="160000"/>
+              </a:lnSpc>
+              <a:buNone/>
+            </a:pPr>
             <a:r>
               <a:rPr lang="en-US" sz="1200" dirty="0">
                 <a:solidFill>
                   <a:srgbClr val="FFFFFF"/>
                 </a:solidFill>
               </a:rPr>
-              <a:t>5. **多模態治療的整合研究**  </a:t>
+              <a:t>5. **個體化治療策略的發展**  </a:t>
             </a:r>
             <a:endParaRPr lang="en-US" sz="1200" dirty="0"/>
           </a:p>
@@ -4116,7 +4185,7 @@
                   <a:srgbClr val="FFFFFF"/>
                 </a:solidFill>
               </a:rPr>
-              <a:t>   Future studies should focus on the integration of multimodal therapies, assessing their synergistic effects and optimizing treatment protocols for HCC.  </a:t>
+              <a:t>   **Development of Personalized Treatment Strategies**  </a:t>
             </a:r>
             <a:endParaRPr lang="en-US" sz="1200" dirty="0"/>
           </a:p>
@@ -4133,7 +4202,24 @@
                   <a:srgbClr val="FFFFFF"/>
                 </a:solidFill>
               </a:rPr>
-              <a:t>   未來的研究應專注於多模態治療的整合，評估其協同效應並優化肝癌的治療方案。</a:t>
+              <a:t>   基於患者的基因組學和腫瘤特徵，發展個體化的治療策略以提高治療效果。  </a:t>
+            </a:r>
+            <a:endParaRPr lang="en-US" sz="1200" dirty="0"/>
+          </a:p>
+          <a:p>
+            <a:pPr indent="0" marL="0">
+              <a:lnSpc>
+                <a:spcPct val="160000"/>
+              </a:lnSpc>
+              <a:buNone/>
+            </a:pPr>
+            <a:r>
+              <a:rPr lang="en-US" sz="1200" dirty="0">
+                <a:solidFill>
+                  <a:srgbClr val="FFFFFF"/>
+                </a:solidFill>
+              </a:rPr>
+              <a:t>   Developing personalized treatment strategies based on patient genomics and tumor characteristics to improve treatment outcomes is vital.</a:t>
             </a:r>
             <a:endParaRPr lang="en-US" sz="1200" dirty="0"/>
           </a:p>
@@ -4973,7 +5059,7 @@
                 <a:ea typeface="Microsoft JhengHei" pitchFamily="34" charset="-122"/>
                 <a:cs typeface="Microsoft JhengHei" pitchFamily="34" charset="-120"/>
               </a:rPr>
-              <a:t>統一框架理解肝癌</a:t>
+              <a:t>癌症標誌指導治療策略。</a:t>
             </a:r>
             <a:endParaRPr lang="en-US" sz="1800" dirty="0"/>
           </a:p>
@@ -4994,7 +5080,7 @@
                 <a:ea typeface="Microsoft JhengHei" pitchFamily="34" charset="-122"/>
                 <a:cs typeface="Microsoft JhengHei" pitchFamily="34" charset="-120"/>
               </a:rPr>
-              <a:t>HCC展現免疫逃逸特徵</a:t>
+              <a:t>HCC具免疫逃逸特徵。</a:t>
             </a:r>
             <a:endParaRPr lang="en-US" sz="1800" dirty="0"/>
           </a:p>
@@ -5015,7 +5101,7 @@
                 <a:ea typeface="Microsoft JhengHei" pitchFamily="34" charset="-122"/>
                 <a:cs typeface="Microsoft JhengHei" pitchFamily="34" charset="-120"/>
               </a:rPr>
-              <a:t>免疫治療改善晚期HCC預後</a:t>
+              <a:t>免疫療法改善晚期HCC預後。</a:t>
             </a:r>
             <a:endParaRPr lang="en-US" sz="1800" dirty="0"/>
           </a:p>
@@ -5036,7 +5122,7 @@
                 <a:ea typeface="Microsoft JhengHei" pitchFamily="34" charset="-122"/>
                 <a:cs typeface="Microsoft JhengHei" pitchFamily="34" charset="-120"/>
               </a:rPr>
-              <a:t>iCCA有獨特特徵與靶向治療</a:t>
+              <a:t>iCCA有獨特基因變異可精準治療。</a:t>
             </a:r>
             <a:endParaRPr lang="en-US" sz="1800" dirty="0"/>
           </a:p>
@@ -5057,7 +5143,7 @@
                 <a:ea typeface="Microsoft JhengHei" pitchFamily="34" charset="-122"/>
                 <a:cs typeface="Microsoft JhengHei" pitchFamily="34" charset="-120"/>
               </a:rPr>
-              <a:t>新策略可能提升肝癌治療</a:t>
+              <a:t>未來策略可提升肝癌管理。</a:t>
             </a:r>
             <a:endParaRPr lang="en-US" sz="1800" dirty="0"/>
           </a:p>
@@ -5336,7 +5422,7 @@
                 <a:ea typeface="Microsoft JhengHei" pitchFamily="34" charset="-122"/>
                 <a:cs typeface="Microsoft JhengHei" pitchFamily="34" charset="-120"/>
               </a:rPr>
-              <a:t>測試新輔助SBRT加免疫療法</a:t>
+              <a:t>測試新輔助SBRT加免疫治療</a:t>
             </a:r>
             <a:endParaRPr lang="en-US" sz="1800" dirty="0"/>
           </a:p>
@@ -5357,7 +5443,7 @@
                 <a:ea typeface="Microsoft JhengHei" pitchFamily="34" charset="-122"/>
                 <a:cs typeface="Microsoft JhengHei" pitchFamily="34" charset="-120"/>
               </a:rPr>
-              <a:t>安全性以不良事件評估</a:t>
+              <a:t>8名可切除HCC患者的初步研究</a:t>
             </a:r>
             <a:endParaRPr lang="en-US" sz="1800" dirty="0"/>
           </a:p>
@@ -5378,7 +5464,7 @@
                 <a:ea typeface="Microsoft JhengHei" pitchFamily="34" charset="-122"/>
                 <a:cs typeface="Microsoft JhengHei" pitchFamily="34" charset="-120"/>
               </a:rPr>
-              <a:t>一名患者達到完全病理反應</a:t>
+              <a:t>安全性指標：僅一例3級不良事件</a:t>
             </a:r>
             <a:endParaRPr lang="en-US" sz="1800" dirty="0"/>
           </a:p>
@@ -5399,7 +5485,7 @@
                 <a:ea typeface="Microsoft JhengHei" pitchFamily="34" charset="-122"/>
                 <a:cs typeface="Microsoft JhengHei" pitchFamily="34" charset="-120"/>
               </a:rPr>
-              <a:t>所有切除患者隨訪無復發</a:t>
+              <a:t>所有切除患者均達R0切除</a:t>
             </a:r>
             <a:endParaRPr lang="en-US" sz="1800" dirty="0"/>
           </a:p>
@@ -5720,7 +5806,7 @@
                 <a:ea typeface="Microsoft JhengHei" pitchFamily="34" charset="-122"/>
                 <a:cs typeface="Microsoft JhengHei" pitchFamily="34" charset="-120"/>
               </a:rPr>
-              <a:t>使用小鼠模型研究HCC</a:t>
+              <a:t>研究在小鼠HCC模型中進行</a:t>
             </a:r>
             <a:endParaRPr lang="en-US" sz="1800" dirty="0"/>
           </a:p>
@@ -6020,7 +6106,7 @@
                 <a:ea typeface="Microsoft JhengHei" pitchFamily="34" charset="-122"/>
                 <a:cs typeface="Microsoft JhengHei" pitchFamily="34" charset="-120"/>
               </a:rPr>
-              <a:t>Lactobacillus johnsonii 增強 CD8+ T 細胞擴展。</a:t>
+              <a:t>Lactobacillus johnsonii 增強 CD8+ T 細胞擴增。</a:t>
             </a:r>
             <a:endParaRPr lang="en-US" sz="1800" dirty="0"/>
           </a:p>
@@ -6041,7 +6127,7 @@
                 <a:ea typeface="Microsoft JhengHei" pitchFamily="34" charset="-122"/>
                 <a:cs typeface="Microsoft JhengHei" pitchFamily="34" charset="-120"/>
               </a:rPr>
-              <a:t>較高水平與無病生存相關。</a:t>
+              <a:t>較高 Lactobacillus 水準預測無病生存期。</a:t>
             </a:r>
             <a:endParaRPr lang="en-US" sz="1800" dirty="0"/>
           </a:p>
@@ -6062,7 +6148,7 @@
                 <a:ea typeface="Microsoft JhengHei" pitchFamily="34" charset="-122"/>
                 <a:cs typeface="Microsoft JhengHei" pitchFamily="34" charset="-120"/>
               </a:rPr>
-              <a:t>Nicotinic acid 活化 NF-κB 路徑。</a:t>
+              <a:t>Nicotinic acid 激活 T 細胞 NF-κB 路徑。</a:t>
             </a:r>
             <a:endParaRPr lang="en-US" sz="1800" dirty="0"/>
           </a:p>
@@ -6083,7 +6169,7 @@
                 <a:ea typeface="Microsoft JhengHei" pitchFamily="34" charset="-122"/>
                 <a:cs typeface="Microsoft JhengHei" pitchFamily="34" charset="-120"/>
               </a:rPr>
-              <a:t>聯合療法抑制腫瘤生長。</a:t>
+              <a:t>聯合療法減少腫瘤生長與復發。</a:t>
             </a:r>
             <a:endParaRPr lang="en-US" sz="1800" dirty="0"/>
           </a:p>
@@ -6104,7 +6190,7 @@
                 <a:ea typeface="Microsoft JhengHei" pitchFamily="34" charset="-122"/>
                 <a:cs typeface="Microsoft JhengHei" pitchFamily="34" charset="-120"/>
               </a:rPr>
-              <a:t>CD8+ T 細胞對療效至關重要。</a:t>
+              <a:t>CD8+ T 細胞對 L. johnsonii 效能至關重要。</a:t>
             </a:r>
             <a:endParaRPr lang="en-US" sz="1800" dirty="0"/>
           </a:p>
@@ -6383,7 +6469,7 @@
                 <a:ea typeface="Microsoft JhengHei" pitchFamily="34" charset="-122"/>
                 <a:cs typeface="Microsoft JhengHei" pitchFamily="34" charset="-120"/>
               </a:rPr>
-              <a:t>CAFs 驅動 HCC 免疫抑制。</a:t>
+              <a:t>CAFs 促進 HCC 的免疫抑制。</a:t>
             </a:r>
             <a:endParaRPr lang="en-US" sz="1800" dirty="0"/>
           </a:p>
@@ -6425,7 +6511,7 @@
                 <a:ea typeface="Microsoft JhengHei" pitchFamily="34" charset="-122"/>
                 <a:cs typeface="Microsoft JhengHei" pitchFamily="34" charset="-120"/>
               </a:rPr>
-              <a:t>ANGPTL4 增強腫瘤免疫逃逸。</a:t>
+              <a:t>ANGPTL4 增加 PD-L1 表達。</a:t>
             </a:r>
             <a:endParaRPr lang="en-US" sz="1800" dirty="0"/>
           </a:p>
@@ -6467,7 +6553,7 @@
                 <a:ea typeface="Microsoft JhengHei" pitchFamily="34" charset="-122"/>
                 <a:cs typeface="Microsoft JhengHei" pitchFamily="34" charset="-120"/>
               </a:rPr>
-              <a:t>聯合療法提升抗 PD-L1 效果。</a:t>
+              <a:t>聯合療法改善免疫治療效果。</a:t>
             </a:r>
             <a:endParaRPr lang="en-US" sz="1800" dirty="0"/>
           </a:p>
@@ -6746,7 +6832,7 @@
                 <a:ea typeface="Microsoft JhengHei" pitchFamily="34" charset="-122"/>
                 <a:cs typeface="Microsoft JhengHei" pitchFamily="34" charset="-120"/>
               </a:rPr>
-              <a:t>Fc區域影響PD-1療法療效。</a:t>
+              <a:t>Fc區域影響PD-1療法效果。</a:t>
             </a:r>
             <a:endParaRPr lang="en-US" sz="1800" dirty="0"/>
           </a:p>
@@ -6767,7 +6853,7 @@
                 <a:ea typeface="Microsoft JhengHei" pitchFamily="34" charset="-122"/>
                 <a:cs typeface="Microsoft JhengHei" pitchFamily="34" charset="-120"/>
               </a:rPr>
-              <a:t>肝臟中CD8 T細胞選擇性耗竭。</a:t>
+              <a:t>肝臟中PD-1+ CD8 T細胞耗竭。</a:t>
             </a:r>
             <a:endParaRPr lang="en-US" sz="1800" dirty="0"/>
           </a:p>
@@ -6788,7 +6874,7 @@
                 <a:ea typeface="Microsoft JhengHei" pitchFamily="34" charset="-122"/>
                 <a:cs typeface="Microsoft JhengHei" pitchFamily="34" charset="-120"/>
               </a:rPr>
-              <a:t>Fc依賴性機制通過FcγR III。</a:t>
+              <a:t>病毒滴度受Fc依賴性影響。</a:t>
             </a:r>
             <a:endParaRPr lang="en-US" sz="1800" dirty="0"/>
           </a:p>
@@ -6830,7 +6916,7 @@
                 <a:ea typeface="Microsoft JhengHei" pitchFamily="34" charset="-122"/>
                 <a:cs typeface="Microsoft JhengHei" pitchFamily="34" charset="-120"/>
               </a:rPr>
-              <a:t>對肝癌治療的啟示。</a:t>
+              <a:t>對肝癌療法的啟示。</a:t>
             </a:r>
             <a:endParaRPr lang="en-US" sz="1800" dirty="0"/>
           </a:p>
@@ -7109,7 +7195,7 @@
                 <a:ea typeface="Microsoft JhengHei" pitchFamily="34" charset="-122"/>
                 <a:cs typeface="Microsoft JhengHei" pitchFamily="34" charset="-120"/>
               </a:rPr>
-              <a:t>針對PVTT的HCC II期研究</a:t>
+              <a:t>針對PVTT的HCC二期研究</a:t>
             </a:r>
             <a:endParaRPr lang="en-US" sz="1800" dirty="0"/>
           </a:p>
@@ -7130,7 +7216,7 @@
                 <a:ea typeface="Microsoft JhengHei" pitchFamily="34" charset="-122"/>
                 <a:cs typeface="Microsoft JhengHei" pitchFamily="34" charset="-120"/>
               </a:rPr>
-              <a:t>HAIC結合lenvatinib與PD-1</a:t>
+              <a:t>HAIC結合lenvatinib和PD-1抑制劑</a:t>
             </a:r>
             <a:endParaRPr lang="en-US" sz="1800" dirty="0"/>
           </a:p>
@@ -7151,7 +7237,7 @@
                 <a:ea typeface="Microsoft JhengHei" pitchFamily="34" charset="-122"/>
                 <a:cs typeface="Microsoft JhengHei" pitchFamily="34" charset="-120"/>
               </a:rPr>
-              <a:t>療效優於標準療法</a:t>
+              <a:t>與lenvatinib和PD-1單獨療法比較</a:t>
             </a:r>
             <a:endParaRPr lang="en-US" sz="1800" dirty="0"/>
           </a:p>
@@ -7172,7 +7258,7 @@
                 <a:ea typeface="Microsoft JhengHei" pitchFamily="34" charset="-122"/>
                 <a:cs typeface="Microsoft JhengHei" pitchFamily="34" charset="-120"/>
               </a:rPr>
-              <a:t>具治癒潛力的策略</a:t>
+              <a:t>從不良預後到治癒策略</a:t>
             </a:r>
             <a:endParaRPr lang="en-US" sz="1800" dirty="0"/>
           </a:p>
@@ -7193,7 +7279,7 @@
                 <a:ea typeface="Microsoft JhengHei" pitchFamily="34" charset="-122"/>
                 <a:cs typeface="Microsoft JhengHei" pitchFamily="34" charset="-120"/>
               </a:rPr>
-              <a:t>聚焦於晚期肝細胞癌</a:t>
+              <a:t>改善患者預後的潛力</a:t>
             </a:r>
             <a:endParaRPr lang="en-US" sz="1800" dirty="0"/>
           </a:p>

--- a/docs/digest-zh.pptx
+++ b/docs/digest-zh.pptx
@@ -19,9 +19,10 @@
     <p:sldId id="267" r:id="rId13"/>
     <p:sldId id="268" r:id="rId14"/>
     <p:sldId id="269" r:id="rId15"/>
+    <p:sldId id="270" r:id="rId16"/>
   </p:sldIdLst>
   <p:notesMasterIdLst>
-    <p:notesMasterId r:id="rId16"/>
+    <p:notesMasterId r:id="rId17"/>
   </p:notesMasterIdLst>
   <p:sldSz cx="12192000" cy="6858000"/>
   <p:notesSz cx="6858000" cy="12192000"/>
@@ -979,6 +980,94 @@
             <a:fld id="{F7021451-1387-4CA6-816F-3879F97B5CBC}" type="slidenum">
               <a:rPr lang="en-US"/>
               <a:t>14</a:t>
+            </a:fld>
+            <a:endParaRPr lang="en-US"/>
+          </a:p>
+        </p:txBody>
+      </p:sp>
+    </p:spTree>
+    <p:extLst>
+      <p:ext uri="{BB962C8B-B14F-4D97-AF65-F5344CB8AC3E}">
+        <p14:creationId xmlns:p14="http://schemas.microsoft.com/office/powerpoint/2010/main" val="1024086991"/>
+      </p:ext>
+    </p:extLst>
+  </p:cSld>
+  <p:clrMapOvr>
+    <a:masterClrMapping/>
+  </p:clrMapOvr>
+</p:notes>
+</file>
+
+<file path=ppt/notesSlides/notesSlide15.xml><?xml version="1.0" encoding="utf-8"?>
+<p:notes xmlns:a="http://schemas.openxmlformats.org/drawingml/2006/main" xmlns:r="http://schemas.openxmlformats.org/officeDocument/2006/relationships" xmlns:p="http://schemas.openxmlformats.org/presentationml/2006/main">
+  <p:cSld>
+    <p:spTree>
+      <p:nvGrpSpPr>
+        <p:cNvPr id="1" name=""/>
+        <p:cNvGrpSpPr/>
+        <p:nvPr/>
+      </p:nvGrpSpPr>
+      <p:grpSpPr>
+        <a:xfrm>
+          <a:off x="0" y="0"/>
+          <a:ext cx="0" cy="0"/>
+          <a:chOff x="0" y="0"/>
+          <a:chExt cx="0" cy="0"/>
+        </a:xfrm>
+      </p:grpSpPr>
+      <p:sp>
+        <p:nvSpPr>
+          <p:cNvPr id="2" name="Slide Image Placeholder 1"/>
+          <p:cNvSpPr>
+            <a:spLocks noGrp="1" noRot="1" noChangeAspect="1"/>
+          </p:cNvSpPr>
+          <p:nvPr>
+            <p:ph type="sldImg"/>
+          </p:nvPr>
+        </p:nvSpPr>
+        <p:spPr/>
+      </p:sp>
+      <p:sp>
+        <p:nvSpPr>
+          <p:cNvPr id="3" name="Notes Placeholder 2"/>
+          <p:cNvSpPr>
+            <a:spLocks noGrp="1"/>
+          </p:cNvSpPr>
+          <p:nvPr>
+            <p:ph type="body" idx="1"/>
+          </p:nvPr>
+        </p:nvSpPr>
+        <p:spPr/>
+        <p:txBody>
+          <a:bodyPr/>
+          <a:lstStyle/>
+          <a:p>
+            <a:r>
+              <a:rPr lang="en-US" dirty="0"/>
+              <a:t/>
+            </a:r>
+            <a:endParaRPr lang="en-US" dirty="0"/>
+          </a:p>
+        </p:txBody>
+      </p:sp>
+      <p:sp>
+        <p:nvSpPr>
+          <p:cNvPr id="4" name="Slide Number Placeholder 3"/>
+          <p:cNvSpPr>
+            <a:spLocks noGrp="1"/>
+          </p:cNvSpPr>
+          <p:nvPr>
+            <p:ph type="sldNum" sz="quarter" idx="10"/>
+          </p:nvPr>
+        </p:nvSpPr>
+        <p:spPr/>
+        <p:txBody>
+          <a:bodyPr/>
+          <a:lstStyle/>
+          <a:p>
+            <a:fld id="{F7021451-1387-4CA6-816F-3879F97B5CBC}" type="slidenum">
+              <a:rPr lang="en-US"/>
+              <a:t>15</a:t>
             </a:fld>
             <a:endParaRPr lang="en-US"/>
           </a:p>
@@ -2450,7 +2539,7 @@
                 <a:ea typeface="Microsoft JhengHei" pitchFamily="34" charset="-122"/>
                 <a:cs typeface="Microsoft JhengHei" pitchFamily="34" charset="-120"/>
               </a:rPr>
-              <a:t>TACE 與 PD-1 抑制劑聯合</a:t>
+              <a:t>針對不可切除HCC的組合療法</a:t>
             </a:r>
             <a:endParaRPr lang="en-US" sz="1800" dirty="0"/>
           </a:p>
@@ -2471,7 +2560,7 @@
                 <a:ea typeface="Microsoft JhengHei" pitchFamily="34" charset="-122"/>
                 <a:cs typeface="Microsoft JhengHei" pitchFamily="34" charset="-120"/>
               </a:rPr>
-              <a:t>針對 uHCC 患者的第二期試驗</a:t>
+              <a:t>使用肝動脈化療栓塞(TACE)</a:t>
             </a:r>
             <a:endParaRPr lang="en-US" sz="1800" dirty="0"/>
           </a:p>
@@ -2492,7 +2581,49 @@
                 <a:ea typeface="Microsoft JhengHei" pitchFamily="34" charset="-122"/>
                 <a:cs typeface="Microsoft JhengHei" pitchFamily="34" charset="-120"/>
               </a:rPr>
-              <a:t>評估與單獨 TACE 的療效</a:t>
+              <a:t>PD-1抑制劑提高療效</a:t>
+            </a:r>
+            <a:endParaRPr lang="en-US" sz="1800" dirty="0"/>
+          </a:p>
+          <a:p>
+            <a:pPr marL="342900" indent="-342900">
+              <a:spcAft>
+                <a:spcPts val="800"/>
+              </a:spcAft>
+              <a:buSzPct val="100000"/>
+              <a:buChar char="•"/>
+            </a:pPr>
+            <a:r>
+              <a:rPr lang="en-US" sz="1800" dirty="0">
+                <a:solidFill>
+                  <a:srgbClr val="333333"/>
+                </a:solidFill>
+                <a:latin typeface="Microsoft JhengHei" pitchFamily="34" charset="0"/>
+                <a:ea typeface="Microsoft JhengHei" pitchFamily="34" charset="-122"/>
+                <a:cs typeface="Microsoft JhengHei" pitchFamily="34" charset="-120"/>
+              </a:rPr>
+              <a:t>第二期試驗顯示良好結果</a:t>
+            </a:r>
+            <a:endParaRPr lang="en-US" sz="1800" dirty="0"/>
+          </a:p>
+          <a:p>
+            <a:pPr marL="342900" indent="-342900">
+              <a:spcAft>
+                <a:spcPts val="800"/>
+              </a:spcAft>
+              <a:buSzPct val="100000"/>
+              <a:buChar char="•"/>
+            </a:pPr>
+            <a:r>
+              <a:rPr lang="en-US" sz="1800" dirty="0">
+                <a:solidFill>
+                  <a:srgbClr val="333333"/>
+                </a:solidFill>
+                <a:latin typeface="Microsoft JhengHei" pitchFamily="34" charset="0"/>
+                <a:ea typeface="Microsoft JhengHei" pitchFamily="34" charset="-122"/>
+                <a:cs typeface="Microsoft JhengHei" pitchFamily="34" charset="-120"/>
+              </a:rPr>
+              <a:t>轉化為可切除疾病的潛力</a:t>
             </a:r>
             <a:endParaRPr lang="en-US" sz="1800" dirty="0"/>
           </a:p>
@@ -2771,7 +2902,7 @@
                 <a:ea typeface="Microsoft JhengHei" pitchFamily="34" charset="-122"/>
                 <a:cs typeface="Microsoft JhengHei" pitchFamily="34" charset="-120"/>
               </a:rPr>
-              <a:t>Atez+Bev 在 HCC 中 ORR 為 25%。</a:t>
+              <a:t>Atez+Bev 在 Dur+Tre 後有效</a:t>
             </a:r>
             <a:endParaRPr lang="en-US" sz="1800" dirty="0"/>
           </a:p>
@@ -2792,7 +2923,7 @@
                 <a:ea typeface="Microsoft JhengHei" pitchFamily="34" charset="-122"/>
                 <a:cs typeface="Microsoft JhengHei" pitchFamily="34" charset="-120"/>
               </a:rPr>
-              <a:t>75% DCR 顯示良好疾病控制。</a:t>
+              <a:t>ORR 25% 和 DCR 75% 表現</a:t>
             </a:r>
             <a:endParaRPr lang="en-US" sz="1800" dirty="0"/>
           </a:p>
@@ -2813,7 +2944,7 @@
                 <a:ea typeface="Microsoft JhengHei" pitchFamily="34" charset="-122"/>
                 <a:cs typeface="Microsoft JhengHei" pitchFamily="34" charset="-120"/>
               </a:rPr>
-              <a:t>不良事件在兩種療法間不同。</a:t>
+              <a:t>安全性特徵兩者不同</a:t>
             </a:r>
             <a:endParaRPr lang="en-US" sz="1800" dirty="0"/>
           </a:p>
@@ -2834,7 +2965,7 @@
                 <a:ea typeface="Microsoft JhengHei" pitchFamily="34" charset="-122"/>
                 <a:cs typeface="Microsoft JhengHei" pitchFamily="34" charset="-120"/>
               </a:rPr>
-              <a:t>先前的 Dur+Tre 可能增強免疫反應。</a:t>
+              <a:t>Dur+Tre 可能增強免疫反應</a:t>
             </a:r>
             <a:endParaRPr lang="en-US" sz="1800" dirty="0"/>
           </a:p>
@@ -2855,7 +2986,7 @@
                 <a:ea typeface="Microsoft JhengHei" pitchFamily="34" charset="-122"/>
                 <a:cs typeface="Microsoft JhengHei" pitchFamily="34" charset="-120"/>
               </a:rPr>
-              <a:t>序列治療是一個可行選擇。</a:t>
+              <a:t>常見不良事件為瘙癢</a:t>
             </a:r>
             <a:endParaRPr lang="en-US" sz="1800" dirty="0"/>
           </a:p>
@@ -3134,7 +3265,7 @@
                 <a:ea typeface="Microsoft JhengHei" pitchFamily="34" charset="-122"/>
                 <a:cs typeface="Microsoft JhengHei" pitchFamily="34" charset="-120"/>
               </a:rPr>
-              <a:t>局部消融療法包括RFA和微波消融。</a:t>
+              <a:t>局部消融療法包括 RFA 和微波消融。</a:t>
             </a:r>
             <a:endParaRPr lang="en-US" sz="1800" dirty="0"/>
           </a:p>
@@ -3155,7 +3286,7 @@
                 <a:ea typeface="Microsoft JhengHei" pitchFamily="34" charset="-122"/>
                 <a:cs typeface="Microsoft JhengHei" pitchFamily="34" charset="-120"/>
               </a:rPr>
-              <a:t>EBRT與局部消融結果不同。</a:t>
+              <a:t>EBRT 與局部消融治療比較 HCC。</a:t>
             </a:r>
             <a:endParaRPr lang="en-US" sz="1800" dirty="0"/>
           </a:p>
@@ -3176,7 +3307,7 @@
                 <a:ea typeface="Microsoft JhengHei" pitchFamily="34" charset="-122"/>
                 <a:cs typeface="Microsoft JhengHei" pitchFamily="34" charset="-120"/>
               </a:rPr>
-              <a:t>系統評估局部無進展生存率。</a:t>
+              <a:t>Meta 分析顯示局部無進展生存優勢。</a:t>
             </a:r>
             <a:endParaRPr lang="en-US" sz="1800" dirty="0"/>
           </a:p>
@@ -3313,41 +3444,24 @@
           <a:ln/>
         </p:spPr>
         <p:txBody>
-          <a:bodyPr wrap="square" rtlCol="0" anchor="ctr"/>
-          <a:lstStyle/>
-          <a:p>
-            <a:pPr indent="0" marL="0">
-              <a:buNone/>
-            </a:pPr>
-            <a:r>
-              <a:rPr lang="en-US" sz="3000" b="1" dirty="0">
+          <a:bodyPr wrap="square" lIns="0" tIns="0" rIns="0" bIns="0" rtlCol="0" anchor="ctr"/>
+          <a:lstStyle/>
+          <a:p>
+            <a:pPr indent="0" marL="0">
+              <a:buNone/>
+            </a:pPr>
+            <a:r>
+              <a:rPr lang="en-US" sz="2400" b="1" dirty="0">
                 <a:solidFill>
                   <a:srgbClr val="FFFFFF"/>
                 </a:solidFill>
-                <a:latin typeface="Arial" pitchFamily="34" charset="0"/>
-                <a:ea typeface="Arial" pitchFamily="34" charset="-122"/>
-                <a:cs typeface="Arial" pitchFamily="34" charset="-120"/>
-              </a:rPr>
-              <a:t>Overall Insights</a:t>
-            </a:r>
-            <a:endParaRPr lang="en-US" sz="3000" dirty="0"/>
-          </a:p>
-          <a:p>
-            <a:pPr indent="0" marL="0">
-              <a:buNone/>
-            </a:pPr>
-            <a:r>
-              <a:rPr lang="en-US" sz="3000" b="1" dirty="0">
-                <a:solidFill>
-                  <a:srgbClr val="FFFFFF"/>
-                </a:solidFill>
-                <a:latin typeface="Arial" pitchFamily="34" charset="0"/>
-                <a:ea typeface="Arial" pitchFamily="34" charset="-122"/>
-                <a:cs typeface="Arial" pitchFamily="34" charset="-120"/>
-              </a:rPr>
-              <a:t>&amp; Future Directions</a:t>
-            </a:r>
-            <a:endParaRPr lang="en-US" sz="3000" dirty="0"/>
+                <a:latin typeface="Microsoft JhengHei" pitchFamily="34" charset="0"/>
+                <a:ea typeface="Microsoft JhengHei" pitchFamily="34" charset="-122"/>
+                <a:cs typeface="Microsoft JhengHei" pitchFamily="34" charset="-120"/>
+              </a:rPr>
+              <a:t>綜合啟示與未來研究方向 (1/2)</a:t>
+            </a:r>
+            <a:endParaRPr lang="en-US" sz="2400" dirty="0"/>
           </a:p>
         </p:txBody>
       </p:sp>
@@ -3359,8 +3473,8 @@
         </p:nvSpPr>
         <p:spPr>
           <a:xfrm>
-            <a:off x="731520" y="2286000"/>
-            <a:ext cx="10058400" cy="0"/>
+            <a:off x="731520" y="1463040"/>
+            <a:ext cx="10515600" cy="0"/>
           </a:xfrm>
           <a:prstGeom prst="rect">
             <a:avLst/>
@@ -3369,51 +3483,12 @@
           <a:ln/>
         </p:spPr>
         <p:txBody>
-          <a:bodyPr wrap="square" lIns="0" tIns="0" rIns="0" bIns="0" rtlCol="0" anchor="ctr"/>
-          <a:lstStyle/>
-          <a:p>
-            <a:pPr indent="0" marL="0">
-              <a:buNone/>
-            </a:pPr>
-            <a:r>
-              <a:rPr lang="en-US" sz="1400" dirty="0">
-                <a:solidFill>
-                  <a:srgbClr val="888888"/>
-                </a:solidFill>
-                <a:latin typeface="Microsoft JhengHei" pitchFamily="34" charset="0"/>
-                <a:ea typeface="Microsoft JhengHei" pitchFamily="34" charset="-122"/>
-                <a:cs typeface="Microsoft JhengHei" pitchFamily="34" charset="-120"/>
-              </a:rPr>
-              <a:t>綜合啟示與未來研究方向</a:t>
-            </a:r>
-            <a:endParaRPr lang="en-US" sz="1400" dirty="0"/>
-          </a:p>
-        </p:txBody>
-      </p:sp>
-      <p:sp>
-        <p:nvSpPr>
-          <p:cNvPr id="5" name="Text 3"/>
-          <p:cNvSpPr/>
-          <p:nvPr/>
-        </p:nvSpPr>
-        <p:spPr>
-          <a:xfrm>
-            <a:off x="731520" y="2926080"/>
-            <a:ext cx="10515600" cy="0"/>
-          </a:xfrm>
-          <a:prstGeom prst="rect">
-            <a:avLst/>
-          </a:prstGeom>
-          <a:noFill/>
-          <a:ln/>
-        </p:spPr>
-        <p:txBody>
           <a:bodyPr wrap="square" rtlCol="0" anchor="ctr"/>
           <a:lstStyle/>
           <a:p>
             <a:pPr indent="0" marL="0">
               <a:lnSpc>
-                <a:spcPct val="160000"/>
+                <a:spcPct val="150000"/>
               </a:lnSpc>
               <a:buNone/>
             </a:pPr>
@@ -3430,7 +3505,7 @@
           <a:p>
             <a:pPr indent="0" marL="0">
               <a:lnSpc>
-                <a:spcPct val="160000"/>
+                <a:spcPct val="150000"/>
               </a:lnSpc>
               <a:buNone/>
             </a:pPr>
@@ -3439,7 +3514,7 @@
           <a:p>
             <a:pPr indent="0" marL="0">
               <a:lnSpc>
-                <a:spcPct val="160000"/>
+                <a:spcPct val="150000"/>
               </a:lnSpc>
               <a:buNone/>
             </a:pPr>
@@ -3456,7 +3531,7 @@
           <a:p>
             <a:pPr indent="0" marL="0">
               <a:lnSpc>
-                <a:spcPct val="160000"/>
+                <a:spcPct val="150000"/>
               </a:lnSpc>
               <a:buNone/>
             </a:pPr>
@@ -3473,7 +3548,7 @@
           <a:p>
             <a:pPr indent="0" marL="0">
               <a:lnSpc>
-                <a:spcPct val="160000"/>
+                <a:spcPct val="150000"/>
               </a:lnSpc>
               <a:buNone/>
             </a:pPr>
@@ -3483,14 +3558,14 @@
                   <a:srgbClr val="FFFFFF"/>
                 </a:solidFill>
               </a:rPr>
-              <a:t>   免疫治療在晚期肝細胞癌（HCC）中顯示出顯著的療效，尤其在早期階段的應用仍需進一步探索。  </a:t>
+              <a:t>   免疫治療在晚期肝細胞癌（HCC）中的應用顯著改善了治療選擇，但在早期階段的最佳使用仍需進一步探索。  </a:t>
             </a:r>
             <a:endParaRPr lang="en-US" sz="1200" dirty="0"/>
           </a:p>
           <a:p>
             <a:pPr indent="0" marL="0">
               <a:lnSpc>
-                <a:spcPct val="160000"/>
+                <a:spcPct val="150000"/>
               </a:lnSpc>
               <a:buNone/>
             </a:pPr>
@@ -3500,14 +3575,14 @@
                   <a:srgbClr val="FFFFFF"/>
                 </a:solidFill>
               </a:rPr>
-              <a:t>   Immunotherapy has shown significant efficacy in advanced hepatocellular carcinoma (HCC), particularly its application in earlier stages remains to be further explored.</a:t>
+              <a:t>   Immunotherapy has significantly improved treatment options for advanced hepatocellular carcinoma (HCC), yet optimal usage in earlier stages remains to be fully explored.</a:t>
             </a:r>
             <a:endParaRPr lang="en-US" sz="1200" dirty="0"/>
           </a:p>
           <a:p>
             <a:pPr indent="0" marL="0">
               <a:lnSpc>
-                <a:spcPct val="160000"/>
+                <a:spcPct val="150000"/>
               </a:lnSpc>
               <a:buNone/>
             </a:pPr>
@@ -3516,7 +3591,7 @@
           <a:p>
             <a:pPr indent="0" marL="0">
               <a:lnSpc>
-                <a:spcPct val="160000"/>
+                <a:spcPct val="150000"/>
               </a:lnSpc>
               <a:buNone/>
             </a:pPr>
@@ -3533,7 +3608,7 @@
           <a:p>
             <a:pPr indent="0" marL="0">
               <a:lnSpc>
-                <a:spcPct val="160000"/>
+                <a:spcPct val="150000"/>
               </a:lnSpc>
               <a:buNone/>
             </a:pPr>
@@ -3550,7 +3625,7 @@
           <a:p>
             <a:pPr indent="0" marL="0">
               <a:lnSpc>
-                <a:spcPct val="160000"/>
+                <a:spcPct val="150000"/>
               </a:lnSpc>
               <a:buNone/>
             </a:pPr>
@@ -3560,14 +3635,14 @@
                   <a:srgbClr val="FFFFFF"/>
                 </a:solidFill>
               </a:rPr>
-              <a:t>   新的療法如新輔助立體定向放射治療結合免疫治療能有效重塑HCC的腫瘤微環境，增強治療反應。  </a:t>
+              <a:t>   新的研究顯示，術前立體定向放射治療結合免疫治療能有效改變HCC的腫瘤微環境，促進治療效果。  </a:t>
             </a:r>
             <a:endParaRPr lang="en-US" sz="1200" dirty="0"/>
           </a:p>
           <a:p>
             <a:pPr indent="0" marL="0">
               <a:lnSpc>
-                <a:spcPct val="160000"/>
+                <a:spcPct val="150000"/>
               </a:lnSpc>
               <a:buNone/>
             </a:pPr>
@@ -3577,14 +3652,14 @@
                   <a:srgbClr val="FFFFFF"/>
                 </a:solidFill>
               </a:rPr>
-              <a:t>   Novel therapies such as neoadjuvant stereotactic body radiation therapy combined with immunotherapy can effectively remodel the HCC tumor microenvironment, enhancing treatment responses.</a:t>
+              <a:t>   Recent studies indicate that neoadjuvant stereotactic body radiation therapy combined with immunotherapy can effectively remodel the tumor microenvironment in HCC, enhancing treatment efficacy.</a:t>
             </a:r>
             <a:endParaRPr lang="en-US" sz="1200" dirty="0"/>
           </a:p>
           <a:p>
             <a:pPr indent="0" marL="0">
               <a:lnSpc>
-                <a:spcPct val="160000"/>
+                <a:spcPct val="150000"/>
               </a:lnSpc>
               <a:buNone/>
             </a:pPr>
@@ -3593,7 +3668,7 @@
           <a:p>
             <a:pPr indent="0" marL="0">
               <a:lnSpc>
-                <a:spcPct val="160000"/>
+                <a:spcPct val="150000"/>
               </a:lnSpc>
               <a:buNone/>
             </a:pPr>
@@ -3610,7 +3685,7 @@
           <a:p>
             <a:pPr indent="0" marL="0">
               <a:lnSpc>
-                <a:spcPct val="160000"/>
+                <a:spcPct val="150000"/>
               </a:lnSpc>
               <a:buNone/>
             </a:pPr>
@@ -3627,7 +3702,7 @@
           <a:p>
             <a:pPr indent="0" marL="0">
               <a:lnSpc>
-                <a:spcPct val="160000"/>
+                <a:spcPct val="150000"/>
               </a:lnSpc>
               <a:buNone/>
             </a:pPr>
@@ -3637,14 +3712,14 @@
                   <a:srgbClr val="FFFFFF"/>
                 </a:solidFill>
               </a:rPr>
-              <a:t>   癌症相關成纖維細胞（CAFs）在HCC中促進免疫抑制，揭示了其作為潛在治療靶點的重要性。  </a:t>
+              <a:t>   癌症相關成纖維細胞（CAFs）在HCC中推動免疫抑制，理解其代謝調控對開發新療法至關重要。  </a:t>
             </a:r>
             <a:endParaRPr lang="en-US" sz="1200" dirty="0"/>
           </a:p>
           <a:p>
             <a:pPr indent="0" marL="0">
               <a:lnSpc>
-                <a:spcPct val="160000"/>
+                <a:spcPct val="150000"/>
               </a:lnSpc>
               <a:buNone/>
             </a:pPr>
@@ -3654,14 +3729,14 @@
                   <a:srgbClr val="FFFFFF"/>
                 </a:solidFill>
               </a:rPr>
-              <a:t>   Cancer-associated fibroblasts (CAFs) promote immunosuppression in HCC, highlighting their importance as potential therapeutic targets.</a:t>
+              <a:t>   Cancer-associated fibroblasts (CAFs) drive immunosuppression in HCC, and understanding their metabolic regulation is crucial for developing new therapeutic strategies.</a:t>
             </a:r>
             <a:endParaRPr lang="en-US" sz="1200" dirty="0"/>
           </a:p>
           <a:p>
             <a:pPr indent="0" marL="0">
               <a:lnSpc>
-                <a:spcPct val="160000"/>
+                <a:spcPct val="150000"/>
               </a:lnSpc>
               <a:buNone/>
             </a:pPr>
@@ -3670,7 +3745,7 @@
           <a:p>
             <a:pPr indent="0" marL="0">
               <a:lnSpc>
-                <a:spcPct val="160000"/>
+                <a:spcPct val="150000"/>
               </a:lnSpc>
               <a:buNone/>
             </a:pPr>
@@ -3687,7 +3762,7 @@
           <a:p>
             <a:pPr indent="0" marL="0">
               <a:lnSpc>
-                <a:spcPct val="160000"/>
+                <a:spcPct val="150000"/>
               </a:lnSpc>
               <a:buNone/>
             </a:pPr>
@@ -3704,7 +3779,7 @@
           <a:p>
             <a:pPr indent="0" marL="0">
               <a:lnSpc>
-                <a:spcPct val="160000"/>
+                <a:spcPct val="150000"/>
               </a:lnSpc>
               <a:buNone/>
             </a:pPr>
@@ -3714,14 +3789,14 @@
                   <a:srgbClr val="FFFFFF"/>
                 </a:solidFill>
               </a:rPr>
-              <a:t>   雖然手術切除對早期HCC有效，但術後復發仍是主要的臨床挑戰，需深入研究其機制。  </a:t>
+              <a:t>   雖然外科切除是早期HCC的有效干預措施，但術後復發仍然是主要的臨床挑戰。  </a:t>
             </a:r>
             <a:endParaRPr lang="en-US" sz="1200" dirty="0"/>
           </a:p>
           <a:p>
             <a:pPr indent="0" marL="0">
               <a:lnSpc>
-                <a:spcPct val="160000"/>
+                <a:spcPct val="150000"/>
               </a:lnSpc>
               <a:buNone/>
             </a:pPr>
@@ -3731,14 +3806,14 @@
                   <a:srgbClr val="FFFFFF"/>
                 </a:solidFill>
               </a:rPr>
-              <a:t>   While surgical resection is effective for early-stage HCC, postoperative recurrence remains a major clinical challenge that requires deeper investigation into its mechanisms.</a:t>
+              <a:t>   While surgical resection is an effective intervention for early-stage HCC, postoperative recurrence remains a significant clinical challenge.</a:t>
             </a:r>
             <a:endParaRPr lang="en-US" sz="1200" dirty="0"/>
           </a:p>
           <a:p>
             <a:pPr indent="0" marL="0">
               <a:lnSpc>
-                <a:spcPct val="160000"/>
+                <a:spcPct val="150000"/>
               </a:lnSpc>
               <a:buNone/>
             </a:pPr>
@@ -3747,7 +3822,7 @@
           <a:p>
             <a:pPr indent="0" marL="0">
               <a:lnSpc>
-                <a:spcPct val="160000"/>
+                <a:spcPct val="150000"/>
               </a:lnSpc>
               <a:buNone/>
             </a:pPr>
@@ -3757,14 +3832,14 @@
                   <a:srgbClr val="FFFFFF"/>
                 </a:solidFill>
               </a:rPr>
-              <a:t>5. **多模態治療策略的必要性**  </a:t>
+              <a:t>5. **多模式治療的前景**  </a:t>
             </a:r>
             <a:endParaRPr lang="en-US" sz="1200" dirty="0"/>
           </a:p>
           <a:p>
             <a:pPr indent="0" marL="0">
               <a:lnSpc>
-                <a:spcPct val="160000"/>
+                <a:spcPct val="150000"/>
               </a:lnSpc>
               <a:buNone/>
             </a:pPr>
@@ -3774,14 +3849,14 @@
                   <a:srgbClr val="FFFFFF"/>
                 </a:solidFill>
               </a:rPr>
-              <a:t>   **Necessity of Multimodal Treatment Strategies**  </a:t>
+              <a:t>   **Prospects of Multimodal Therapy**  </a:t>
             </a:r>
             <a:endParaRPr lang="en-US" sz="1200" dirty="0"/>
           </a:p>
           <a:p>
             <a:pPr indent="0" marL="0">
               <a:lnSpc>
-                <a:spcPct val="160000"/>
+                <a:spcPct val="150000"/>
               </a:lnSpc>
               <a:buNone/>
             </a:pPr>
@@ -3791,14 +3866,14 @@
                   <a:srgbClr val="FFFFFF"/>
                 </a:solidFill>
               </a:rPr>
-              <a:t>   對於不可切除的中晚期HCC，結合局部消融、化療和免疫治療的多模態策略顯示出潛在的療效。  </a:t>
+              <a:t>   結合不同治療方法（如TACE、免疫治療和局部消融）可能為不可切除的HCC提供更佳的治療結果。  </a:t>
             </a:r>
             <a:endParaRPr lang="en-US" sz="1200" dirty="0"/>
           </a:p>
           <a:p>
             <a:pPr indent="0" marL="0">
               <a:lnSpc>
-                <a:spcPct val="160000"/>
+                <a:spcPct val="150000"/>
               </a:lnSpc>
               <a:buNone/>
             </a:pPr>
@@ -3808,418 +3883,7 @@
                   <a:srgbClr val="FFFFFF"/>
                 </a:solidFill>
               </a:rPr>
-              <a:t>   For unresectable intermediate-advanced HCC, multimodal strategies combining local ablation, chemotherapy, and immunotherapy show potential efficacy.</a:t>
-            </a:r>
-            <a:endParaRPr lang="en-US" sz="1200" dirty="0"/>
-          </a:p>
-          <a:p>
-            <a:pPr indent="0" marL="0">
-              <a:lnSpc>
-                <a:spcPct val="160000"/>
-              </a:lnSpc>
-              <a:buNone/>
-            </a:pPr>
-            <a:endParaRPr lang="en-US" sz="1200" dirty="0"/>
-          </a:p>
-          <a:p>
-            <a:pPr indent="0" marL="0">
-              <a:lnSpc>
-                <a:spcPct val="160000"/>
-              </a:lnSpc>
-              <a:buNone/>
-            </a:pPr>
-            <a:r>
-              <a:rPr lang="en-US" sz="1200" dirty="0">
-                <a:solidFill>
-                  <a:srgbClr val="FFFFFF"/>
-                </a:solidFill>
-              </a:rPr>
-              <a:t>### 未來研究方向 (Future Research Directions)</a:t>
-            </a:r>
-            <a:endParaRPr lang="en-US" sz="1200" dirty="0"/>
-          </a:p>
-          <a:p>
-            <a:pPr indent="0" marL="0">
-              <a:lnSpc>
-                <a:spcPct val="160000"/>
-              </a:lnSpc>
-              <a:buNone/>
-            </a:pPr>
-            <a:endParaRPr lang="en-US" sz="1200" dirty="0"/>
-          </a:p>
-          <a:p>
-            <a:pPr indent="0" marL="0">
-              <a:lnSpc>
-                <a:spcPct val="160000"/>
-              </a:lnSpc>
-              <a:buNone/>
-            </a:pPr>
-            <a:r>
-              <a:rPr lang="en-US" sz="1200" dirty="0">
-                <a:solidFill>
-                  <a:srgbClr val="FFFFFF"/>
-                </a:solidFill>
-              </a:rPr>
-              <a:t>1. **早期階段免疫治療的最佳化**  </a:t>
-            </a:r>
-            <a:endParaRPr lang="en-US" sz="1200" dirty="0"/>
-          </a:p>
-          <a:p>
-            <a:pPr indent="0" marL="0">
-              <a:lnSpc>
-                <a:spcPct val="160000"/>
-              </a:lnSpc>
-              <a:buNone/>
-            </a:pPr>
-            <a:r>
-              <a:rPr lang="en-US" sz="1200" dirty="0">
-                <a:solidFill>
-                  <a:srgbClr val="FFFFFF"/>
-                </a:solidFill>
-              </a:rPr>
-              <a:t>   **Optimization of Immunotherapy in Early Stages**  </a:t>
-            </a:r>
-            <a:endParaRPr lang="en-US" sz="1200" dirty="0"/>
-          </a:p>
-          <a:p>
-            <a:pPr indent="0" marL="0">
-              <a:lnSpc>
-                <a:spcPct val="160000"/>
-              </a:lnSpc>
-              <a:buNone/>
-            </a:pPr>
-            <a:r>
-              <a:rPr lang="en-US" sz="1200" dirty="0">
-                <a:solidFill>
-                  <a:srgbClr val="FFFFFF"/>
-                </a:solidFill>
-              </a:rPr>
-              <a:t>   需進一步研究如何在早期肝細胞癌中最佳化免疫治療的使用，以提高療效。  </a:t>
-            </a:r>
-            <a:endParaRPr lang="en-US" sz="1200" dirty="0"/>
-          </a:p>
-          <a:p>
-            <a:pPr indent="0" marL="0">
-              <a:lnSpc>
-                <a:spcPct val="160000"/>
-              </a:lnSpc>
-              <a:buNone/>
-            </a:pPr>
-            <a:r>
-              <a:rPr lang="en-US" sz="1200" dirty="0">
-                <a:solidFill>
-                  <a:srgbClr val="FFFFFF"/>
-                </a:solidFill>
-              </a:rPr>
-              <a:t>   Further research is needed to optimize the use of immunotherapy in early-stage hepatocellular carcinoma to enhance efficacy.</a:t>
-            </a:r>
-            <a:endParaRPr lang="en-US" sz="1200" dirty="0"/>
-          </a:p>
-          <a:p>
-            <a:pPr indent="0" marL="0">
-              <a:lnSpc>
-                <a:spcPct val="160000"/>
-              </a:lnSpc>
-              <a:buNone/>
-            </a:pPr>
-            <a:endParaRPr lang="en-US" sz="1200" dirty="0"/>
-          </a:p>
-          <a:p>
-            <a:pPr indent="0" marL="0">
-              <a:lnSpc>
-                <a:spcPct val="160000"/>
-              </a:lnSpc>
-              <a:buNone/>
-            </a:pPr>
-            <a:r>
-              <a:rPr lang="en-US" sz="1200" dirty="0">
-                <a:solidFill>
-                  <a:srgbClr val="FFFFFF"/>
-                </a:solidFill>
-              </a:rPr>
-              <a:t>2. **腫瘤微環境的深入分析**  </a:t>
-            </a:r>
-            <a:endParaRPr lang="en-US" sz="1200" dirty="0"/>
-          </a:p>
-          <a:p>
-            <a:pPr indent="0" marL="0">
-              <a:lnSpc>
-                <a:spcPct val="160000"/>
-              </a:lnSpc>
-              <a:buNone/>
-            </a:pPr>
-            <a:r>
-              <a:rPr lang="en-US" sz="1200" dirty="0">
-                <a:solidFill>
-                  <a:srgbClr val="FFFFFF"/>
-                </a:solidFill>
-              </a:rPr>
-              <a:t>   **In-depth Analysis of Tumor Microenvironment**  </a:t>
-            </a:r>
-            <a:endParaRPr lang="en-US" sz="1200" dirty="0"/>
-          </a:p>
-          <a:p>
-            <a:pPr indent="0" marL="0">
-              <a:lnSpc>
-                <a:spcPct val="160000"/>
-              </a:lnSpc>
-              <a:buNone/>
-            </a:pPr>
-            <a:r>
-              <a:rPr lang="en-US" sz="1200" dirty="0">
-                <a:solidFill>
-                  <a:srgbClr val="FFFFFF"/>
-                </a:solidFill>
-              </a:rPr>
-              <a:t>   對腫瘤微環境的組成及其對免疫反應的影響進行深入研究，以開發新療法。  </a:t>
-            </a:r>
-            <a:endParaRPr lang="en-US" sz="1200" dirty="0"/>
-          </a:p>
-          <a:p>
-            <a:pPr indent="0" marL="0">
-              <a:lnSpc>
-                <a:spcPct val="160000"/>
-              </a:lnSpc>
-              <a:buNone/>
-            </a:pPr>
-            <a:r>
-              <a:rPr lang="en-US" sz="1200" dirty="0">
-                <a:solidFill>
-                  <a:srgbClr val="FFFFFF"/>
-                </a:solidFill>
-              </a:rPr>
-              <a:t>   In-depth studies on the composition of the tumor microenvironment and its impact on immune responses are essential for developing new therapies.</a:t>
-            </a:r>
-            <a:endParaRPr lang="en-US" sz="1200" dirty="0"/>
-          </a:p>
-          <a:p>
-            <a:pPr indent="0" marL="0">
-              <a:lnSpc>
-                <a:spcPct val="160000"/>
-              </a:lnSpc>
-              <a:buNone/>
-            </a:pPr>
-            <a:endParaRPr lang="en-US" sz="1200" dirty="0"/>
-          </a:p>
-          <a:p>
-            <a:pPr indent="0" marL="0">
-              <a:lnSpc>
-                <a:spcPct val="160000"/>
-              </a:lnSpc>
-              <a:buNone/>
-            </a:pPr>
-            <a:r>
-              <a:rPr lang="en-US" sz="1200" dirty="0">
-                <a:solidFill>
-                  <a:srgbClr val="FFFFFF"/>
-                </a:solidFill>
-              </a:rPr>
-              <a:t>3. **癌症相關成纖維細胞的代謝調控**  </a:t>
-            </a:r>
-            <a:endParaRPr lang="en-US" sz="1200" dirty="0"/>
-          </a:p>
-          <a:p>
-            <a:pPr indent="0" marL="0">
-              <a:lnSpc>
-                <a:spcPct val="160000"/>
-              </a:lnSpc>
-              <a:buNone/>
-            </a:pPr>
-            <a:r>
-              <a:rPr lang="en-US" sz="1200" dirty="0">
-                <a:solidFill>
-                  <a:srgbClr val="FFFFFF"/>
-                </a:solidFill>
-              </a:rPr>
-              <a:t>   **Metabolic Regulation of Cancer-Associated Fibroblasts**  </a:t>
-            </a:r>
-            <a:endParaRPr lang="en-US" sz="1200" dirty="0"/>
-          </a:p>
-          <a:p>
-            <a:pPr indent="0" marL="0">
-              <a:lnSpc>
-                <a:spcPct val="160000"/>
-              </a:lnSpc>
-              <a:buNone/>
-            </a:pPr>
-            <a:r>
-              <a:rPr lang="en-US" sz="1200" dirty="0">
-                <a:solidFill>
-                  <a:srgbClr val="FFFFFF"/>
-                </a:solidFill>
-              </a:rPr>
-              <a:t>   探索癌症相關成纖維細胞的代謝調控機制，以尋找新的免疫治療靶點。  </a:t>
-            </a:r>
-            <a:endParaRPr lang="en-US" sz="1200" dirty="0"/>
-          </a:p>
-          <a:p>
-            <a:pPr indent="0" marL="0">
-              <a:lnSpc>
-                <a:spcPct val="160000"/>
-              </a:lnSpc>
-              <a:buNone/>
-            </a:pPr>
-            <a:r>
-              <a:rPr lang="en-US" sz="1200" dirty="0">
-                <a:solidFill>
-                  <a:srgbClr val="FFFFFF"/>
-                </a:solidFill>
-              </a:rPr>
-              <a:t>   Exploring the metabolic regulatory mechanisms of cancer-associated fibroblasts to identify new immunotherapeutic targets is crucial.</a:t>
-            </a:r>
-            <a:endParaRPr lang="en-US" sz="1200" dirty="0"/>
-          </a:p>
-          <a:p>
-            <a:pPr indent="0" marL="0">
-              <a:lnSpc>
-                <a:spcPct val="160000"/>
-              </a:lnSpc>
-              <a:buNone/>
-            </a:pPr>
-            <a:endParaRPr lang="en-US" sz="1200" dirty="0"/>
-          </a:p>
-          <a:p>
-            <a:pPr indent="0" marL="0">
-              <a:lnSpc>
-                <a:spcPct val="160000"/>
-              </a:lnSpc>
-              <a:buNone/>
-            </a:pPr>
-            <a:r>
-              <a:rPr lang="en-US" sz="1200" dirty="0">
-                <a:solidFill>
-                  <a:srgbClr val="FFFFFF"/>
-                </a:solidFill>
-              </a:rPr>
-              <a:t>4. **多模態治療的臨床試驗**  </a:t>
-            </a:r>
-            <a:endParaRPr lang="en-US" sz="1200" dirty="0"/>
-          </a:p>
-          <a:p>
-            <a:pPr indent="0" marL="0">
-              <a:lnSpc>
-                <a:spcPct val="160000"/>
-              </a:lnSpc>
-              <a:buNone/>
-            </a:pPr>
-            <a:r>
-              <a:rPr lang="en-US" sz="1200" dirty="0">
-                <a:solidFill>
-                  <a:srgbClr val="FFFFFF"/>
-                </a:solidFill>
-              </a:rPr>
-              <a:t>   **Clinical Trials on Multimodal Treatments**  </a:t>
-            </a:r>
-            <a:endParaRPr lang="en-US" sz="1200" dirty="0"/>
-          </a:p>
-          <a:p>
-            <a:pPr indent="0" marL="0">
-              <a:lnSpc>
-                <a:spcPct val="160000"/>
-              </a:lnSpc>
-              <a:buNone/>
-            </a:pPr>
-            <a:r>
-              <a:rPr lang="en-US" sz="1200" dirty="0">
-                <a:solidFill>
-                  <a:srgbClr val="FFFFFF"/>
-                </a:solidFill>
-              </a:rPr>
-              <a:t>   設計針對不可切除HCC的多模態治療的臨床試驗，以評估其安全性和有效性。  </a:t>
-            </a:r>
-            <a:endParaRPr lang="en-US" sz="1200" dirty="0"/>
-          </a:p>
-          <a:p>
-            <a:pPr indent="0" marL="0">
-              <a:lnSpc>
-                <a:spcPct val="160000"/>
-              </a:lnSpc>
-              <a:buNone/>
-            </a:pPr>
-            <a:r>
-              <a:rPr lang="en-US" sz="1200" dirty="0">
-                <a:solidFill>
-                  <a:srgbClr val="FFFFFF"/>
-                </a:solidFill>
-              </a:rPr>
-              <a:t>   Designing clinical trials for multimodal treatments targeting unresectable HCC to evaluate their safety and efficacy is essential.</a:t>
-            </a:r>
-            <a:endParaRPr lang="en-US" sz="1200" dirty="0"/>
-          </a:p>
-          <a:p>
-            <a:pPr indent="0" marL="0">
-              <a:lnSpc>
-                <a:spcPct val="160000"/>
-              </a:lnSpc>
-              <a:buNone/>
-            </a:pPr>
-            <a:endParaRPr lang="en-US" sz="1200" dirty="0"/>
-          </a:p>
-          <a:p>
-            <a:pPr indent="0" marL="0">
-              <a:lnSpc>
-                <a:spcPct val="160000"/>
-              </a:lnSpc>
-              <a:buNone/>
-            </a:pPr>
-            <a:r>
-              <a:rPr lang="en-US" sz="1200" dirty="0">
-                <a:solidFill>
-                  <a:srgbClr val="FFFFFF"/>
-                </a:solidFill>
-              </a:rPr>
-              <a:t>5. **個體化治療策略的發展**  </a:t>
-            </a:r>
-            <a:endParaRPr lang="en-US" sz="1200" dirty="0"/>
-          </a:p>
-          <a:p>
-            <a:pPr indent="0" marL="0">
-              <a:lnSpc>
-                <a:spcPct val="160000"/>
-              </a:lnSpc>
-              <a:buNone/>
-            </a:pPr>
-            <a:r>
-              <a:rPr lang="en-US" sz="1200" dirty="0">
-                <a:solidFill>
-                  <a:srgbClr val="FFFFFF"/>
-                </a:solidFill>
-              </a:rPr>
-              <a:t>   **Development of Personalized Treatment Strategies**  </a:t>
-            </a:r>
-            <a:endParaRPr lang="en-US" sz="1200" dirty="0"/>
-          </a:p>
-          <a:p>
-            <a:pPr indent="0" marL="0">
-              <a:lnSpc>
-                <a:spcPct val="160000"/>
-              </a:lnSpc>
-              <a:buNone/>
-            </a:pPr>
-            <a:r>
-              <a:rPr lang="en-US" sz="1200" dirty="0">
-                <a:solidFill>
-                  <a:srgbClr val="FFFFFF"/>
-                </a:solidFill>
-              </a:rPr>
-              <a:t>   基於患者的基因組學和腫瘤特徵，發展個體化的治療策略以提高治療效果。  </a:t>
-            </a:r>
-            <a:endParaRPr lang="en-US" sz="1200" dirty="0"/>
-          </a:p>
-          <a:p>
-            <a:pPr indent="0" marL="0">
-              <a:lnSpc>
-                <a:spcPct val="160000"/>
-              </a:lnSpc>
-              <a:buNone/>
-            </a:pPr>
-            <a:r>
-              <a:rPr lang="en-US" sz="1200" dirty="0">
-                <a:solidFill>
-                  <a:srgbClr val="FFFFFF"/>
-                </a:solidFill>
-              </a:rPr>
-              <a:t>   Developing personalized treatment strategies based on patient genomics and tumor characteristics to improve treatment outcomes is vital.</a:t>
+              <a:t>   Combining various treatment modalities (such as TACE, immunotherapy, and local ablation) may offer better outcomes for unresectable HCC.</a:t>
             </a:r>
             <a:endParaRPr lang="en-US" sz="1200" dirty="0"/>
           </a:p>
@@ -4236,6 +3900,537 @@
 <file path=ppt/slides/slide14.xml><?xml version="1.0" encoding="utf-8"?>
 <p:sld xmlns:a="http://schemas.openxmlformats.org/drawingml/2006/main" xmlns:r="http://schemas.openxmlformats.org/officeDocument/2006/relationships" xmlns:p="http://schemas.openxmlformats.org/presentationml/2006/main">
   <p:cSld name="Slide 14">
+    <p:bg>
+      <p:bgPr>
+        <a:solidFill>
+          <a:srgbClr val="7F1D1D"/>
+        </a:solidFill>
+      </p:bgPr>
+    </p:bg>
+    <p:spTree>
+      <p:nvGrpSpPr>
+        <p:cNvPr id="1" name=""/>
+        <p:cNvGrpSpPr/>
+        <p:nvPr/>
+      </p:nvGrpSpPr>
+      <p:grpSpPr>
+        <a:xfrm>
+          <a:off x="0" y="0"/>
+          <a:ext cx="0" cy="0"/>
+          <a:chOff x="0" y="0"/>
+          <a:chExt cx="0" cy="0"/>
+        </a:xfrm>
+      </p:grpSpPr>
+      <p:sp>
+        <p:nvSpPr>
+          <p:cNvPr id="2" name="Text 0"/>
+          <p:cNvSpPr/>
+          <p:nvPr/>
+        </p:nvSpPr>
+        <p:spPr>
+          <a:xfrm>
+            <a:off x="731520" y="365760"/>
+            <a:ext cx="5486400" cy="0"/>
+          </a:xfrm>
+          <a:prstGeom prst="rect">
+            <a:avLst/>
+          </a:prstGeom>
+          <a:noFill/>
+          <a:ln/>
+        </p:spPr>
+        <p:txBody>
+          <a:bodyPr wrap="square" lIns="0" tIns="0" rIns="0" bIns="0" rtlCol="0" anchor="ctr"/>
+          <a:lstStyle/>
+          <a:p>
+            <a:pPr indent="0" marL="0">
+              <a:buNone/>
+            </a:pPr>
+            <a:r>
+              <a:rPr lang="en-US" sz="900" spc="600" kern="0" dirty="0">
+                <a:solidFill>
+                  <a:srgbClr val="888888"/>
+                </a:solidFill>
+              </a:rPr>
+              <a:t>綜合啟示</a:t>
+            </a:r>
+            <a:endParaRPr lang="en-US" sz="900" dirty="0"/>
+          </a:p>
+        </p:txBody>
+      </p:sp>
+      <p:sp>
+        <p:nvSpPr>
+          <p:cNvPr id="3" name="Text 1"/>
+          <p:cNvSpPr/>
+          <p:nvPr/>
+        </p:nvSpPr>
+        <p:spPr>
+          <a:xfrm>
+            <a:off x="731520" y="822960"/>
+            <a:ext cx="10058400" cy="0"/>
+          </a:xfrm>
+          <a:prstGeom prst="rect">
+            <a:avLst/>
+          </a:prstGeom>
+          <a:noFill/>
+          <a:ln/>
+        </p:spPr>
+        <p:txBody>
+          <a:bodyPr wrap="square" lIns="0" tIns="0" rIns="0" bIns="0" rtlCol="0" anchor="ctr"/>
+          <a:lstStyle/>
+          <a:p>
+            <a:pPr indent="0" marL="0">
+              <a:buNone/>
+            </a:pPr>
+            <a:r>
+              <a:rPr lang="en-US" sz="2400" b="1" dirty="0">
+                <a:solidFill>
+                  <a:srgbClr val="FFFFFF"/>
+                </a:solidFill>
+                <a:latin typeface="Microsoft JhengHei" pitchFamily="34" charset="0"/>
+                <a:ea typeface="Microsoft JhengHei" pitchFamily="34" charset="-122"/>
+                <a:cs typeface="Microsoft JhengHei" pitchFamily="34" charset="-120"/>
+              </a:rPr>
+              <a:t>綜合啟示與未來研究方向 (2/2)</a:t>
+            </a:r>
+            <a:endParaRPr lang="en-US" sz="2400" dirty="0"/>
+          </a:p>
+        </p:txBody>
+      </p:sp>
+      <p:sp>
+        <p:nvSpPr>
+          <p:cNvPr id="4" name="Text 2"/>
+          <p:cNvSpPr/>
+          <p:nvPr/>
+        </p:nvSpPr>
+        <p:spPr>
+          <a:xfrm>
+            <a:off x="731520" y="1463040"/>
+            <a:ext cx="10515600" cy="0"/>
+          </a:xfrm>
+          <a:prstGeom prst="rect">
+            <a:avLst/>
+          </a:prstGeom>
+          <a:noFill/>
+          <a:ln/>
+        </p:spPr>
+        <p:txBody>
+          <a:bodyPr wrap="square" rtlCol="0" anchor="ctr"/>
+          <a:lstStyle/>
+          <a:p>
+            <a:pPr indent="0" marL="0">
+              <a:lnSpc>
+                <a:spcPct val="150000"/>
+              </a:lnSpc>
+              <a:buNone/>
+            </a:pPr>
+            <a:r>
+              <a:rPr lang="en-US" sz="1200" dirty="0">
+                <a:solidFill>
+                  <a:srgbClr val="FFFFFF"/>
+                </a:solidFill>
+              </a:rPr>
+              <a:t>### 未來研究方向 (Future Research Directions)</a:t>
+            </a:r>
+            <a:endParaRPr lang="en-US" sz="1200" dirty="0"/>
+          </a:p>
+          <a:p>
+            <a:pPr indent="0" marL="0">
+              <a:lnSpc>
+                <a:spcPct val="150000"/>
+              </a:lnSpc>
+              <a:buNone/>
+            </a:pPr>
+            <a:endParaRPr lang="en-US" sz="1200" dirty="0"/>
+          </a:p>
+          <a:p>
+            <a:pPr indent="0" marL="0">
+              <a:lnSpc>
+                <a:spcPct val="150000"/>
+              </a:lnSpc>
+              <a:buNone/>
+            </a:pPr>
+            <a:r>
+              <a:rPr lang="en-US" sz="1200" dirty="0">
+                <a:solidFill>
+                  <a:srgbClr val="FFFFFF"/>
+                </a:solidFill>
+              </a:rPr>
+              <a:t>1. **早期階段免疫治療的最佳化**  </a:t>
+            </a:r>
+            <a:endParaRPr lang="en-US" sz="1200" dirty="0"/>
+          </a:p>
+          <a:p>
+            <a:pPr indent="0" marL="0">
+              <a:lnSpc>
+                <a:spcPct val="150000"/>
+              </a:lnSpc>
+              <a:buNone/>
+            </a:pPr>
+            <a:r>
+              <a:rPr lang="en-US" sz="1200" dirty="0">
+                <a:solidFill>
+                  <a:srgbClr val="FFFFFF"/>
+                </a:solidFill>
+              </a:rPr>
+              <a:t>   **Optimization of Immunotherapy in Early Stages**  </a:t>
+            </a:r>
+            <a:endParaRPr lang="en-US" sz="1200" dirty="0"/>
+          </a:p>
+          <a:p>
+            <a:pPr indent="0" marL="0">
+              <a:lnSpc>
+                <a:spcPct val="150000"/>
+              </a:lnSpc>
+              <a:buNone/>
+            </a:pPr>
+            <a:r>
+              <a:rPr lang="en-US" sz="1200" dirty="0">
+                <a:solidFill>
+                  <a:srgbClr val="FFFFFF"/>
+                </a:solidFill>
+              </a:rPr>
+              <a:t>   需要進一步研究以確定免疫治療在早期HCC中的最佳使用時機和方式。  </a:t>
+            </a:r>
+            <a:endParaRPr lang="en-US" sz="1200" dirty="0"/>
+          </a:p>
+          <a:p>
+            <a:pPr indent="0" marL="0">
+              <a:lnSpc>
+                <a:spcPct val="150000"/>
+              </a:lnSpc>
+              <a:buNone/>
+            </a:pPr>
+            <a:r>
+              <a:rPr lang="en-US" sz="1200" dirty="0">
+                <a:solidFill>
+                  <a:srgbClr val="FFFFFF"/>
+                </a:solidFill>
+              </a:rPr>
+              <a:t>   Further studies are needed to determine the optimal timing and methods for immunotherapy in early-stage HCC.</a:t>
+            </a:r>
+            <a:endParaRPr lang="en-US" sz="1200" dirty="0"/>
+          </a:p>
+          <a:p>
+            <a:pPr indent="0" marL="0">
+              <a:lnSpc>
+                <a:spcPct val="150000"/>
+              </a:lnSpc>
+              <a:buNone/>
+            </a:pPr>
+            <a:endParaRPr lang="en-US" sz="1200" dirty="0"/>
+          </a:p>
+          <a:p>
+            <a:pPr indent="0" marL="0">
+              <a:lnSpc>
+                <a:spcPct val="150000"/>
+              </a:lnSpc>
+              <a:buNone/>
+            </a:pPr>
+            <a:r>
+              <a:rPr lang="en-US" sz="1200" dirty="0">
+                <a:solidFill>
+                  <a:srgbClr val="FFFFFF"/>
+                </a:solidFill>
+              </a:rPr>
+              <a:t>2. **腫瘤微環境的深入分析**  </a:t>
+            </a:r>
+            <a:endParaRPr lang="en-US" sz="1200" dirty="0"/>
+          </a:p>
+          <a:p>
+            <a:pPr indent="0" marL="0">
+              <a:lnSpc>
+                <a:spcPct val="150000"/>
+              </a:lnSpc>
+              <a:buNone/>
+            </a:pPr>
+            <a:r>
+              <a:rPr lang="en-US" sz="1200" dirty="0">
+                <a:solidFill>
+                  <a:srgbClr val="FFFFFF"/>
+                </a:solidFill>
+              </a:rPr>
+              <a:t>   **In-Depth Analysis of Tumor Microenvironment**  </a:t>
+            </a:r>
+            <a:endParaRPr lang="en-US" sz="1200" dirty="0"/>
+          </a:p>
+          <a:p>
+            <a:pPr indent="0" marL="0">
+              <a:lnSpc>
+                <a:spcPct val="150000"/>
+              </a:lnSpc>
+              <a:buNone/>
+            </a:pPr>
+            <a:r>
+              <a:rPr lang="en-US" sz="1200" dirty="0">
+                <a:solidFill>
+                  <a:srgbClr val="FFFFFF"/>
+                </a:solidFill>
+              </a:rPr>
+              <a:t>   研究腫瘤微環境中不同細胞類型的相互作用及其對免疫治療反應的影響。  </a:t>
+            </a:r>
+            <a:endParaRPr lang="en-US" sz="1200" dirty="0"/>
+          </a:p>
+          <a:p>
+            <a:pPr indent="0" marL="0">
+              <a:lnSpc>
+                <a:spcPct val="150000"/>
+              </a:lnSpc>
+              <a:buNone/>
+            </a:pPr>
+            <a:r>
+              <a:rPr lang="en-US" sz="1200" dirty="0">
+                <a:solidFill>
+                  <a:srgbClr val="FFFFFF"/>
+                </a:solidFill>
+              </a:rPr>
+              <a:t>   Investigate the interactions of different cell types within the tumor microenvironment and their impact on responses to immunotherapy.</a:t>
+            </a:r>
+            <a:endParaRPr lang="en-US" sz="1200" dirty="0"/>
+          </a:p>
+          <a:p>
+            <a:pPr indent="0" marL="0">
+              <a:lnSpc>
+                <a:spcPct val="150000"/>
+              </a:lnSpc>
+              <a:buNone/>
+            </a:pPr>
+            <a:endParaRPr lang="en-US" sz="1200" dirty="0"/>
+          </a:p>
+          <a:p>
+            <a:pPr indent="0" marL="0">
+              <a:lnSpc>
+                <a:spcPct val="150000"/>
+              </a:lnSpc>
+              <a:buNone/>
+            </a:pPr>
+            <a:r>
+              <a:rPr lang="en-US" sz="1200" dirty="0">
+                <a:solidFill>
+                  <a:srgbClr val="FFFFFF"/>
+                </a:solidFill>
+              </a:rPr>
+              <a:t>3. **新型治療靶點的發掘**  </a:t>
+            </a:r>
+            <a:endParaRPr lang="en-US" sz="1200" dirty="0"/>
+          </a:p>
+          <a:p>
+            <a:pPr indent="0" marL="0">
+              <a:lnSpc>
+                <a:spcPct val="150000"/>
+              </a:lnSpc>
+              <a:buNone/>
+            </a:pPr>
+            <a:r>
+              <a:rPr lang="en-US" sz="1200" dirty="0">
+                <a:solidFill>
+                  <a:srgbClr val="FFFFFF"/>
+                </a:solidFill>
+              </a:rPr>
+              <a:t>   **Discovery of Novel Therapeutic Targets**  </a:t>
+            </a:r>
+            <a:endParaRPr lang="en-US" sz="1200" dirty="0"/>
+          </a:p>
+          <a:p>
+            <a:pPr indent="0" marL="0">
+              <a:lnSpc>
+                <a:spcPct val="150000"/>
+              </a:lnSpc>
+              <a:buNone/>
+            </a:pPr>
+            <a:r>
+              <a:rPr lang="en-US" sz="1200" dirty="0">
+                <a:solidFill>
+                  <a:srgbClr val="FFFFFF"/>
+                </a:solidFill>
+              </a:rPr>
+              <a:t>   探索癌症相關成纖維細胞及其代謝途徑作為新療法的潛在靶點。  </a:t>
+            </a:r>
+            <a:endParaRPr lang="en-US" sz="1200" dirty="0"/>
+          </a:p>
+          <a:p>
+            <a:pPr indent="0" marL="0">
+              <a:lnSpc>
+                <a:spcPct val="150000"/>
+              </a:lnSpc>
+              <a:buNone/>
+            </a:pPr>
+            <a:r>
+              <a:rPr lang="en-US" sz="1200" dirty="0">
+                <a:solidFill>
+                  <a:srgbClr val="FFFFFF"/>
+                </a:solidFill>
+              </a:rPr>
+              <a:t>   Explore cancer-associated fibroblasts and their metabolic pathways as potential novel therapeutic targets.</a:t>
+            </a:r>
+            <a:endParaRPr lang="en-US" sz="1200" dirty="0"/>
+          </a:p>
+          <a:p>
+            <a:pPr indent="0" marL="0">
+              <a:lnSpc>
+                <a:spcPct val="150000"/>
+              </a:lnSpc>
+              <a:buNone/>
+            </a:pPr>
+            <a:endParaRPr lang="en-US" sz="1200" dirty="0"/>
+          </a:p>
+          <a:p>
+            <a:pPr indent="0" marL="0">
+              <a:lnSpc>
+                <a:spcPct val="150000"/>
+              </a:lnSpc>
+              <a:buNone/>
+            </a:pPr>
+            <a:r>
+              <a:rPr lang="en-US" sz="1200" dirty="0">
+                <a:solidFill>
+                  <a:srgbClr val="FFFFFF"/>
+                </a:solidFill>
+              </a:rPr>
+              <a:t>4. **多模式治療的臨床試驗**  </a:t>
+            </a:r>
+            <a:endParaRPr lang="en-US" sz="1200" dirty="0"/>
+          </a:p>
+          <a:p>
+            <a:pPr indent="0" marL="0">
+              <a:lnSpc>
+                <a:spcPct val="150000"/>
+              </a:lnSpc>
+              <a:buNone/>
+            </a:pPr>
+            <a:r>
+              <a:rPr lang="en-US" sz="1200" dirty="0">
+                <a:solidFill>
+                  <a:srgbClr val="FFFFFF"/>
+                </a:solidFill>
+              </a:rPr>
+              <a:t>   **Clinical Trials for Multimodal Therapies**  </a:t>
+            </a:r>
+            <a:endParaRPr lang="en-US" sz="1200" dirty="0"/>
+          </a:p>
+          <a:p>
+            <a:pPr indent="0" marL="0">
+              <a:lnSpc>
+                <a:spcPct val="150000"/>
+              </a:lnSpc>
+              <a:buNone/>
+            </a:pPr>
+            <a:r>
+              <a:rPr lang="en-US" sz="1200" dirty="0">
+                <a:solidFill>
+                  <a:srgbClr val="FFFFFF"/>
+                </a:solidFill>
+              </a:rPr>
+              <a:t>   設計臨床試驗以評估多種治療組合在不可切除HCC中的療效和安全性。  </a:t>
+            </a:r>
+            <a:endParaRPr lang="en-US" sz="1200" dirty="0"/>
+          </a:p>
+          <a:p>
+            <a:pPr indent="0" marL="0">
+              <a:lnSpc>
+                <a:spcPct val="150000"/>
+              </a:lnSpc>
+              <a:buNone/>
+            </a:pPr>
+            <a:r>
+              <a:rPr lang="en-US" sz="1200" dirty="0">
+                <a:solidFill>
+                  <a:srgbClr val="FFFFFF"/>
+                </a:solidFill>
+              </a:rPr>
+              <a:t>   Design clinical trials to assess the efficacy and safety of various treatment combinations in unresectable HCC.</a:t>
+            </a:r>
+            <a:endParaRPr lang="en-US" sz="1200" dirty="0"/>
+          </a:p>
+          <a:p>
+            <a:pPr indent="0" marL="0">
+              <a:lnSpc>
+                <a:spcPct val="150000"/>
+              </a:lnSpc>
+              <a:buNone/>
+            </a:pPr>
+            <a:endParaRPr lang="en-US" sz="1200" dirty="0"/>
+          </a:p>
+          <a:p>
+            <a:pPr indent="0" marL="0">
+              <a:lnSpc>
+                <a:spcPct val="150000"/>
+              </a:lnSpc>
+              <a:buNone/>
+            </a:pPr>
+            <a:r>
+              <a:rPr lang="en-US" sz="1200" dirty="0">
+                <a:solidFill>
+                  <a:srgbClr val="FFFFFF"/>
+                </a:solidFill>
+              </a:rPr>
+              <a:t>5. **個體化治療策略的發展**  </a:t>
+            </a:r>
+            <a:endParaRPr lang="en-US" sz="1200" dirty="0"/>
+          </a:p>
+          <a:p>
+            <a:pPr indent="0" marL="0">
+              <a:lnSpc>
+                <a:spcPct val="150000"/>
+              </a:lnSpc>
+              <a:buNone/>
+            </a:pPr>
+            <a:r>
+              <a:rPr lang="en-US" sz="1200" dirty="0">
+                <a:solidFill>
+                  <a:srgbClr val="FFFFFF"/>
+                </a:solidFill>
+              </a:rPr>
+              <a:t>   **Development of Personalized Treatment Strategies**  </a:t>
+            </a:r>
+            <a:endParaRPr lang="en-US" sz="1200" dirty="0"/>
+          </a:p>
+          <a:p>
+            <a:pPr indent="0" marL="0">
+              <a:lnSpc>
+                <a:spcPct val="150000"/>
+              </a:lnSpc>
+              <a:buNone/>
+            </a:pPr>
+            <a:r>
+              <a:rPr lang="en-US" sz="1200" dirty="0">
+                <a:solidFill>
+                  <a:srgbClr val="FFFFFF"/>
+                </a:solidFill>
+              </a:rPr>
+              <a:t>   研究個體化治療策略，以根據患者的腫瘤特徵和免疫狀態調整治療方案。  </a:t>
+            </a:r>
+            <a:endParaRPr lang="en-US" sz="1200" dirty="0"/>
+          </a:p>
+          <a:p>
+            <a:pPr indent="0" marL="0">
+              <a:lnSpc>
+                <a:spcPct val="150000"/>
+              </a:lnSpc>
+              <a:buNone/>
+            </a:pPr>
+            <a:r>
+              <a:rPr lang="en-US" sz="1200" dirty="0">
+                <a:solidFill>
+                  <a:srgbClr val="FFFFFF"/>
+                </a:solidFill>
+              </a:rPr>
+              <a:t>   Investigate personalized treatment strategies that tailor therapeutic approaches based on individual tumor characteristics and immune status.</a:t>
+            </a:r>
+            <a:endParaRPr lang="en-US" sz="1200" dirty="0"/>
+          </a:p>
+        </p:txBody>
+      </p:sp>
+    </p:spTree>
+  </p:cSld>
+  <p:clrMapOvr>
+    <a:masterClrMapping/>
+  </p:clrMapOvr>
+</p:sld>
+</file>
+
+<file path=ppt/slides/slide15.xml><?xml version="1.0" encoding="utf-8"?>
+<p:sld xmlns:a="http://schemas.openxmlformats.org/drawingml/2006/main" xmlns:r="http://schemas.openxmlformats.org/officeDocument/2006/relationships" xmlns:p="http://schemas.openxmlformats.org/presentationml/2006/main">
+  <p:cSld name="Slide 15">
     <p:bg>
       <p:bgPr>
         <a:solidFill>
@@ -5059,7 +5254,7 @@
                 <a:ea typeface="Microsoft JhengHei" pitchFamily="34" charset="-122"/>
                 <a:cs typeface="Microsoft JhengHei" pitchFamily="34" charset="-120"/>
               </a:rPr>
-              <a:t>癌症標誌指導治療策略。</a:t>
+              <a:t>癌症特徵指導治療策略。</a:t>
             </a:r>
             <a:endParaRPr lang="en-US" sz="1800" dirty="0"/>
           </a:p>
@@ -5080,7 +5275,7 @@
                 <a:ea typeface="Microsoft JhengHei" pitchFamily="34" charset="-122"/>
                 <a:cs typeface="Microsoft JhengHei" pitchFamily="34" charset="-120"/>
               </a:rPr>
-              <a:t>HCC具免疫逃逸特徵。</a:t>
+              <a:t>HCC展現獨特免疫逃逸特徵。</a:t>
             </a:r>
             <a:endParaRPr lang="en-US" sz="1800" dirty="0"/>
           </a:p>
@@ -5101,49 +5296,7 @@
                 <a:ea typeface="Microsoft JhengHei" pitchFamily="34" charset="-122"/>
                 <a:cs typeface="Microsoft JhengHei" pitchFamily="34" charset="-120"/>
               </a:rPr>
-              <a:t>免疫療法改善晚期HCC預後。</a:t>
-            </a:r>
-            <a:endParaRPr lang="en-US" sz="1800" dirty="0"/>
-          </a:p>
-          <a:p>
-            <a:pPr marL="342900" indent="-342900">
-              <a:spcAft>
-                <a:spcPts val="800"/>
-              </a:spcAft>
-              <a:buSzPct val="100000"/>
-              <a:buChar char="•"/>
-            </a:pPr>
-            <a:r>
-              <a:rPr lang="en-US" sz="1800" dirty="0">
-                <a:solidFill>
-                  <a:srgbClr val="333333"/>
-                </a:solidFill>
-                <a:latin typeface="Microsoft JhengHei" pitchFamily="34" charset="0"/>
-                <a:ea typeface="Microsoft JhengHei" pitchFamily="34" charset="-122"/>
-                <a:cs typeface="Microsoft JhengHei" pitchFamily="34" charset="-120"/>
-              </a:rPr>
-              <a:t>iCCA有獨特基因變異可精準治療。</a:t>
-            </a:r>
-            <a:endParaRPr lang="en-US" sz="1800" dirty="0"/>
-          </a:p>
-          <a:p>
-            <a:pPr marL="342900" indent="-342900">
-              <a:spcAft>
-                <a:spcPts val="800"/>
-              </a:spcAft>
-              <a:buSzPct val="100000"/>
-              <a:buChar char="•"/>
-            </a:pPr>
-            <a:r>
-              <a:rPr lang="en-US" sz="1800" dirty="0">
-                <a:solidFill>
-                  <a:srgbClr val="333333"/>
-                </a:solidFill>
-                <a:latin typeface="Microsoft JhengHei" pitchFamily="34" charset="0"/>
-                <a:ea typeface="Microsoft JhengHei" pitchFamily="34" charset="-122"/>
-                <a:cs typeface="Microsoft JhengHei" pitchFamily="34" charset="-120"/>
-              </a:rPr>
-              <a:t>未來策略可提升肝癌管理。</a:t>
+              <a:t>iCCA有獨特基因變異。</a:t>
             </a:r>
             <a:endParaRPr lang="en-US" sz="1800" dirty="0"/>
           </a:p>
@@ -5422,7 +5575,7 @@
                 <a:ea typeface="Microsoft JhengHei" pitchFamily="34" charset="-122"/>
                 <a:cs typeface="Microsoft JhengHei" pitchFamily="34" charset="-120"/>
               </a:rPr>
-              <a:t>測試新輔助SBRT加免疫治療</a:t>
+              <a:t>測試新輔助SBRT和免疫治療</a:t>
             </a:r>
             <a:endParaRPr lang="en-US" sz="1800" dirty="0"/>
           </a:p>
@@ -5443,7 +5596,7 @@
                 <a:ea typeface="Microsoft JhengHei" pitchFamily="34" charset="-122"/>
                 <a:cs typeface="Microsoft JhengHei" pitchFamily="34" charset="-120"/>
               </a:rPr>
-              <a:t>8名可切除HCC患者的初步研究</a:t>
+              <a:t>8名HCC患者的初步研究</a:t>
             </a:r>
             <a:endParaRPr lang="en-US" sz="1800" dirty="0"/>
           </a:p>
@@ -5464,7 +5617,7 @@
                 <a:ea typeface="Microsoft JhengHei" pitchFamily="34" charset="-122"/>
                 <a:cs typeface="Microsoft JhengHei" pitchFamily="34" charset="-120"/>
               </a:rPr>
-              <a:t>安全性指標：僅一例3級不良事件</a:t>
+              <a:t>安全性高，副作用少</a:t>
             </a:r>
             <a:endParaRPr lang="en-US" sz="1800" dirty="0"/>
           </a:p>
@@ -5485,7 +5638,7 @@
                 <a:ea typeface="Microsoft JhengHei" pitchFamily="34" charset="-122"/>
                 <a:cs typeface="Microsoft JhengHei" pitchFamily="34" charset="-120"/>
               </a:rPr>
-              <a:t>所有切除患者均達R0切除</a:t>
+              <a:t>顯著的免疫浸潤現象</a:t>
             </a:r>
             <a:endParaRPr lang="en-US" sz="1800" dirty="0"/>
           </a:p>
@@ -5506,7 +5659,7 @@
                 <a:ea typeface="Microsoft JhengHei" pitchFamily="34" charset="-122"/>
                 <a:cs typeface="Microsoft JhengHei" pitchFamily="34" charset="-120"/>
               </a:rPr>
-              <a:t>觀察到抗癌免疫浸潤增加</a:t>
+              <a:t>所有切除患者無復發</a:t>
             </a:r>
             <a:endParaRPr lang="en-US" sz="1800" dirty="0"/>
           </a:p>
@@ -5806,7 +5959,7 @@
                 <a:ea typeface="Microsoft JhengHei" pitchFamily="34" charset="-122"/>
                 <a:cs typeface="Microsoft JhengHei" pitchFamily="34" charset="-120"/>
               </a:rPr>
-              <a:t>研究在小鼠HCC模型中進行</a:t>
+              <a:t>使用小鼠模型研究HCC</a:t>
             </a:r>
             <a:endParaRPr lang="en-US" sz="1800" dirty="0"/>
           </a:p>
@@ -6127,7 +6280,7 @@
                 <a:ea typeface="Microsoft JhengHei" pitchFamily="34" charset="-122"/>
                 <a:cs typeface="Microsoft JhengHei" pitchFamily="34" charset="-120"/>
               </a:rPr>
-              <a:t>較高 Lactobacillus 水準預測無病生存期。</a:t>
+              <a:t>較高水平與無病生存相關。</a:t>
             </a:r>
             <a:endParaRPr lang="en-US" sz="1800" dirty="0"/>
           </a:p>
@@ -6148,7 +6301,7 @@
                 <a:ea typeface="Microsoft JhengHei" pitchFamily="34" charset="-122"/>
                 <a:cs typeface="Microsoft JhengHei" pitchFamily="34" charset="-120"/>
               </a:rPr>
-              <a:t>Nicotinic acid 激活 T 細胞 NF-κB 路徑。</a:t>
+              <a:t>Nicotinic acid 激活 NF-κB 通路。</a:t>
             </a:r>
             <a:endParaRPr lang="en-US" sz="1800" dirty="0"/>
           </a:p>
@@ -6169,7 +6322,7 @@
                 <a:ea typeface="Microsoft JhengHei" pitchFamily="34" charset="-122"/>
                 <a:cs typeface="Microsoft JhengHei" pitchFamily="34" charset="-120"/>
               </a:rPr>
-              <a:t>聯合療法減少腫瘤生長與復發。</a:t>
+              <a:t>聯合療法減少腫瘤復發。</a:t>
             </a:r>
             <a:endParaRPr lang="en-US" sz="1800" dirty="0"/>
           </a:p>
@@ -6190,7 +6343,7 @@
                 <a:ea typeface="Microsoft JhengHei" pitchFamily="34" charset="-122"/>
                 <a:cs typeface="Microsoft JhengHei" pitchFamily="34" charset="-120"/>
               </a:rPr>
-              <a:t>CD8+ T 細胞對 L. johnsonii 效能至關重要。</a:t>
+              <a:t>CD8+ T 細胞對療效至關重要。</a:t>
             </a:r>
             <a:endParaRPr lang="en-US" sz="1800" dirty="0"/>
           </a:p>
@@ -6469,7 +6622,7 @@
                 <a:ea typeface="Microsoft JhengHei" pitchFamily="34" charset="-122"/>
                 <a:cs typeface="Microsoft JhengHei" pitchFamily="34" charset="-120"/>
               </a:rPr>
-              <a:t>CAFs 促進 HCC 的免疫抑制。</a:t>
+              <a:t>CAFs 促進 HCC 免疫抑制。</a:t>
             </a:r>
             <a:endParaRPr lang="en-US" sz="1800" dirty="0"/>
           </a:p>
@@ -6511,7 +6664,7 @@
                 <a:ea typeface="Microsoft JhengHei" pitchFamily="34" charset="-122"/>
                 <a:cs typeface="Microsoft JhengHei" pitchFamily="34" charset="-120"/>
               </a:rPr>
-              <a:t>ANGPTL4 增加 PD-L1 表達。</a:t>
+              <a:t>ANGPTL4 增強腫瘤免疫逃逸。</a:t>
             </a:r>
             <a:endParaRPr lang="en-US" sz="1800" dirty="0"/>
           </a:p>
@@ -6553,7 +6706,7 @@
                 <a:ea typeface="Microsoft JhengHei" pitchFamily="34" charset="-122"/>
                 <a:cs typeface="Microsoft JhengHei" pitchFamily="34" charset="-120"/>
               </a:rPr>
-              <a:t>聯合療法改善免疫治療效果。</a:t>
+              <a:t>與抗 PD-L1 治療協同作用。</a:t>
             </a:r>
             <a:endParaRPr lang="en-US" sz="1800" dirty="0"/>
           </a:p>
@@ -6853,7 +7006,7 @@
                 <a:ea typeface="Microsoft JhengHei" pitchFamily="34" charset="-122"/>
                 <a:cs typeface="Microsoft JhengHei" pitchFamily="34" charset="-120"/>
               </a:rPr>
-              <a:t>肝臟中PD-1+ CD8 T細胞耗竭。</a:t>
+              <a:t>耗竭病毒特異性CD8 T細胞。</a:t>
             </a:r>
             <a:endParaRPr lang="en-US" sz="1800" dirty="0"/>
           </a:p>
@@ -6874,49 +7027,7 @@
                 <a:ea typeface="Microsoft JhengHei" pitchFamily="34" charset="-122"/>
                 <a:cs typeface="Microsoft JhengHei" pitchFamily="34" charset="-120"/>
               </a:rPr>
-              <a:t>病毒滴度受Fc依賴性影響。</a:t>
-            </a:r>
-            <a:endParaRPr lang="en-US" sz="1800" dirty="0"/>
-          </a:p>
-          <a:p>
-            <a:pPr marL="342900" indent="-342900">
-              <a:spcAft>
-                <a:spcPts val="800"/>
-              </a:spcAft>
-              <a:buSzPct val="100000"/>
-              <a:buChar char="•"/>
-            </a:pPr>
-            <a:r>
-              <a:rPr lang="en-US" sz="1800" dirty="0">
-                <a:solidFill>
-                  <a:srgbClr val="333333"/>
-                </a:solidFill>
-                <a:latin typeface="Microsoft JhengHei" pitchFamily="34" charset="0"/>
-                <a:ea typeface="Microsoft JhengHei" pitchFamily="34" charset="-122"/>
-                <a:cs typeface="Microsoft JhengHei" pitchFamily="34" charset="-120"/>
-              </a:rPr>
               <a:t>吞噬細胞介導T細胞耗竭。</a:t>
-            </a:r>
-            <a:endParaRPr lang="en-US" sz="1800" dirty="0"/>
-          </a:p>
-          <a:p>
-            <a:pPr marL="342900" indent="-342900">
-              <a:spcAft>
-                <a:spcPts val="800"/>
-              </a:spcAft>
-              <a:buSzPct val="100000"/>
-              <a:buChar char="•"/>
-            </a:pPr>
-            <a:r>
-              <a:rPr lang="en-US" sz="1800" dirty="0">
-                <a:solidFill>
-                  <a:srgbClr val="333333"/>
-                </a:solidFill>
-                <a:latin typeface="Microsoft JhengHei" pitchFamily="34" charset="0"/>
-                <a:ea typeface="Microsoft JhengHei" pitchFamily="34" charset="-122"/>
-                <a:cs typeface="Microsoft JhengHei" pitchFamily="34" charset="-120"/>
-              </a:rPr>
-              <a:t>對肝癌療法的啟示。</a:t>
             </a:r>
             <a:endParaRPr lang="en-US" sz="1800" dirty="0"/>
           </a:p>
@@ -7195,7 +7306,7 @@
                 <a:ea typeface="Microsoft JhengHei" pitchFamily="34" charset="-122"/>
                 <a:cs typeface="Microsoft JhengHei" pitchFamily="34" charset="-120"/>
               </a:rPr>
-              <a:t>針對PVTT的HCC二期研究</a:t>
+              <a:t>針對PVTT的HCC II期研究</a:t>
             </a:r>
             <a:endParaRPr lang="en-US" sz="1800" dirty="0"/>
           </a:p>
@@ -7216,7 +7327,7 @@
                 <a:ea typeface="Microsoft JhengHei" pitchFamily="34" charset="-122"/>
                 <a:cs typeface="Microsoft JhengHei" pitchFamily="34" charset="-120"/>
               </a:rPr>
-              <a:t>HAIC結合lenvatinib和PD-1抑制劑</a:t>
+              <a:t>HAIC結合lenvatinib和PD-1</a:t>
             </a:r>
             <a:endParaRPr lang="en-US" sz="1800" dirty="0"/>
           </a:p>
@@ -7237,7 +7348,7 @@
                 <a:ea typeface="Microsoft JhengHei" pitchFamily="34" charset="-122"/>
                 <a:cs typeface="Microsoft JhengHei" pitchFamily="34" charset="-120"/>
               </a:rPr>
-              <a:t>與lenvatinib和PD-1單獨療法比較</a:t>
+              <a:t>優於單一療法的結果</a:t>
             </a:r>
             <a:endParaRPr lang="en-US" sz="1800" dirty="0"/>
           </a:p>
@@ -7258,7 +7369,7 @@
                 <a:ea typeface="Microsoft JhengHei" pitchFamily="34" charset="-122"/>
                 <a:cs typeface="Microsoft JhengHei" pitchFamily="34" charset="-120"/>
               </a:rPr>
-              <a:t>從不良預後到治癒策略</a:t>
+              <a:t>具治癒意圖的潛力</a:t>
             </a:r>
             <a:endParaRPr lang="en-US" sz="1800" dirty="0"/>
           </a:p>
@@ -7279,7 +7390,7 @@
                 <a:ea typeface="Microsoft JhengHei" pitchFamily="34" charset="-122"/>
                 <a:cs typeface="Microsoft JhengHei" pitchFamily="34" charset="-120"/>
               </a:rPr>
-              <a:t>改善患者預後的潛力</a:t>
+              <a:t>聚焦於晚期肝細胞癌</a:t>
             </a:r>
             <a:endParaRPr lang="en-US" sz="1800" dirty="0"/>
           </a:p>

--- a/docs/digest-zh.pptx
+++ b/docs/digest-zh.pptx
@@ -2581,7 +2581,7 @@
                 <a:ea typeface="Microsoft JhengHei" pitchFamily="34" charset="-122"/>
                 <a:cs typeface="Microsoft JhengHei" pitchFamily="34" charset="-120"/>
               </a:rPr>
-              <a:t>PD-1抑制劑提高療效</a:t>
+              <a:t>PD-1抑制劑提升治療效果</a:t>
             </a:r>
             <a:endParaRPr lang="en-US" sz="1800" dirty="0"/>
           </a:p>
@@ -2623,7 +2623,7 @@
                 <a:ea typeface="Microsoft JhengHei" pitchFamily="34" charset="-122"/>
                 <a:cs typeface="Microsoft JhengHei" pitchFamily="34" charset="-120"/>
               </a:rPr>
-              <a:t>轉化為可切除疾病的潛力</a:t>
+              <a:t>有潛力轉為手術選項</a:t>
             </a:r>
             <a:endParaRPr lang="en-US" sz="1800" dirty="0"/>
           </a:p>
@@ -2902,7 +2902,7 @@
                 <a:ea typeface="Microsoft JhengHei" pitchFamily="34" charset="-122"/>
                 <a:cs typeface="Microsoft JhengHei" pitchFamily="34" charset="-120"/>
               </a:rPr>
-              <a:t>Atez+Bev 在 Dur+Tre 後有效</a:t>
+              <a:t>Atez+Bev 在 HCC 患者中 ORR 為 25%。</a:t>
             </a:r>
             <a:endParaRPr lang="en-US" sz="1800" dirty="0"/>
           </a:p>
@@ -2923,7 +2923,7 @@
                 <a:ea typeface="Microsoft JhengHei" pitchFamily="34" charset="-122"/>
                 <a:cs typeface="Microsoft JhengHei" pitchFamily="34" charset="-120"/>
               </a:rPr>
-              <a:t>ORR 25% 和 DCR 75% 表現</a:t>
+              <a:t>75% DCR 顯示疾病控制良好。</a:t>
             </a:r>
             <a:endParaRPr lang="en-US" sz="1800" dirty="0"/>
           </a:p>
@@ -2944,7 +2944,7 @@
                 <a:ea typeface="Microsoft JhengHei" pitchFamily="34" charset="-122"/>
                 <a:cs typeface="Microsoft JhengHei" pitchFamily="34" charset="-120"/>
               </a:rPr>
-              <a:t>安全性特徵兩者不同</a:t>
+              <a:t>先前 Dur+Tre 可能增強免疫反應。</a:t>
             </a:r>
             <a:endParaRPr lang="en-US" sz="1800" dirty="0"/>
           </a:p>
@@ -2965,7 +2965,7 @@
                 <a:ea typeface="Microsoft JhengHei" pitchFamily="34" charset="-122"/>
                 <a:cs typeface="Microsoft JhengHei" pitchFamily="34" charset="-120"/>
               </a:rPr>
-              <a:t>Dur+Tre 可能增強免疫反應</a:t>
+              <a:t>常見不良事件包括瘙癢和蛋白尿。</a:t>
             </a:r>
             <a:endParaRPr lang="en-US" sz="1800" dirty="0"/>
           </a:p>
@@ -2986,7 +2986,7 @@
                 <a:ea typeface="Microsoft JhengHei" pitchFamily="34" charset="-122"/>
                 <a:cs typeface="Microsoft JhengHei" pitchFamily="34" charset="-120"/>
               </a:rPr>
-              <a:t>常見不良事件為瘙癢</a:t>
+              <a:t>序列療法提供新治療選擇。</a:t>
             </a:r>
             <a:endParaRPr lang="en-US" sz="1800" dirty="0"/>
           </a:p>
@@ -3265,7 +3265,7 @@
                 <a:ea typeface="Microsoft JhengHei" pitchFamily="34" charset="-122"/>
                 <a:cs typeface="Microsoft JhengHei" pitchFamily="34" charset="-120"/>
               </a:rPr>
-              <a:t>局部消融療法包括 RFA 和微波消融。</a:t>
+              <a:t>放射治療與局部消融比較</a:t>
             </a:r>
             <a:endParaRPr lang="en-US" sz="1800" dirty="0"/>
           </a:p>
@@ -3286,7 +3286,7 @@
                 <a:ea typeface="Microsoft JhengHei" pitchFamily="34" charset="-122"/>
                 <a:cs typeface="Microsoft JhengHei" pitchFamily="34" charset="-120"/>
               </a:rPr>
-              <a:t>EBRT 與局部消融治療比較 HCC。</a:t>
+              <a:t>針對肝細胞癌治療</a:t>
             </a:r>
             <a:endParaRPr lang="en-US" sz="1800" dirty="0"/>
           </a:p>
@@ -3307,7 +3307,49 @@
                 <a:ea typeface="Microsoft JhengHei" pitchFamily="34" charset="-122"/>
                 <a:cs typeface="Microsoft JhengHei" pitchFamily="34" charset="-120"/>
               </a:rPr>
-              <a:t>Meta 分析顯示局部無進展生存優勢。</a:t>
+              <a:t>評估局部無進展生存期</a:t>
+            </a:r>
+            <a:endParaRPr lang="en-US" sz="1800" dirty="0"/>
+          </a:p>
+          <a:p>
+            <a:pPr marL="342900" indent="-342900">
+              <a:spcAft>
+                <a:spcPts val="800"/>
+              </a:spcAft>
+              <a:buSzPct val="100000"/>
+              <a:buChar char="•"/>
+            </a:pPr>
+            <a:r>
+              <a:rPr lang="en-US" sz="1800" dirty="0">
+                <a:solidFill>
+                  <a:srgbClr val="333333"/>
+                </a:solidFill>
+                <a:latin typeface="Microsoft JhengHei" pitchFamily="34" charset="0"/>
+                <a:ea typeface="Microsoft JhengHei" pitchFamily="34" charset="-122"/>
+                <a:cs typeface="Microsoft JhengHei" pitchFamily="34" charset="-120"/>
+              </a:rPr>
+              <a:t>包含射頻與微波消融</a:t>
+            </a:r>
+            <a:endParaRPr lang="en-US" sz="1800" dirty="0"/>
+          </a:p>
+          <a:p>
+            <a:pPr marL="342900" indent="-342900">
+              <a:spcAft>
+                <a:spcPts val="800"/>
+              </a:spcAft>
+              <a:buSzPct val="100000"/>
+              <a:buChar char="•"/>
+            </a:pPr>
+            <a:r>
+              <a:rPr lang="en-US" sz="1800" dirty="0">
+                <a:solidFill>
+                  <a:srgbClr val="333333"/>
+                </a:solidFill>
+                <a:latin typeface="Microsoft JhengHei" pitchFamily="34" charset="0"/>
+                <a:ea typeface="Microsoft JhengHei" pitchFamily="34" charset="-122"/>
+                <a:cs typeface="Microsoft JhengHei" pitchFamily="34" charset="-120"/>
+              </a:rPr>
+              <a:t>進行系統性回顧與統合分析</a:t>
             </a:r>
             <a:endParaRPr lang="en-US" sz="1800" dirty="0"/>
           </a:p>
@@ -3524,7 +3566,7 @@
                   <a:srgbClr val="FFFFFF"/>
                 </a:solidFill>
               </a:rPr>
-              <a:t>1. **免疫治療的潛力**  </a:t>
+              <a:t>1. **免疫療法的潛力**  </a:t>
             </a:r>
             <a:endParaRPr lang="en-US" sz="1200" dirty="0"/>
           </a:p>
@@ -3541,7 +3583,7 @@
                   <a:srgbClr val="FFFFFF"/>
                 </a:solidFill>
               </a:rPr>
-              <a:t>   **The Potential of Immunotherapy**  </a:t>
+              <a:t>   Immunotherapy has shown significant promise in enhancing treatment outcomes for hepatocellular carcinoma (HCC), particularly in advanced stages.  </a:t>
             </a:r>
             <a:endParaRPr lang="en-US" sz="1200" dirty="0"/>
           </a:p>
@@ -3558,7 +3600,7 @@
                   <a:srgbClr val="FFFFFF"/>
                 </a:solidFill>
               </a:rPr>
-              <a:t>   免疫治療在晚期肝細胞癌（HCC）中的應用顯著改善了治療選擇，但在早期階段的最佳使用仍需進一步探索。  </a:t>
+              <a:t>   免疫療法在改善肝細胞癌（HCC）治療結果方面顯示出顯著潛力，特別是在晚期階段。</a:t>
             </a:r>
             <a:endParaRPr lang="en-US" sz="1200" dirty="0"/>
           </a:p>
@@ -3569,14 +3611,6 @@
               </a:lnSpc>
               <a:buNone/>
             </a:pPr>
-            <a:r>
-              <a:rPr lang="en-US" sz="1200" dirty="0">
-                <a:solidFill>
-                  <a:srgbClr val="FFFFFF"/>
-                </a:solidFill>
-              </a:rPr>
-              <a:t>   Immunotherapy has significantly improved treatment options for advanced hepatocellular carcinoma (HCC), yet optimal usage in earlier stages remains to be fully explored.</a:t>
-            </a:r>
             <a:endParaRPr lang="en-US" sz="1200" dirty="0"/>
           </a:p>
           <a:p>
@@ -3586,6 +3620,14 @@
               </a:lnSpc>
               <a:buNone/>
             </a:pPr>
+            <a:r>
+              <a:rPr lang="en-US" sz="1200" dirty="0">
+                <a:solidFill>
+                  <a:srgbClr val="FFFFFF"/>
+                </a:solidFill>
+              </a:rPr>
+              <a:t>2. **腫瘤微環境的重塑**  </a:t>
+            </a:r>
             <a:endParaRPr lang="en-US" sz="1200" dirty="0"/>
           </a:p>
           <a:p>
@@ -3601,7 +3643,7 @@
                   <a:srgbClr val="FFFFFF"/>
                 </a:solidFill>
               </a:rPr>
-              <a:t>2. **腫瘤微環境的重塑**  </a:t>
+              <a:t>   Neoadjuvant therapies, including stereotactic body radiation therapy combined with immune therapy, can favorably remodel the tumor microenvironment, promoting a more effective immune response.  </a:t>
             </a:r>
             <a:endParaRPr lang="en-US" sz="1200" dirty="0"/>
           </a:p>
@@ -3618,7 +3660,7 @@
                   <a:srgbClr val="FFFFFF"/>
                 </a:solidFill>
               </a:rPr>
-              <a:t>   **Remodeling of Tumor Microenvironment**  </a:t>
+              <a:t>   新輔助療法，包括立體定向體部放射療法結合免疫療法，可以有利於重塑腫瘤微環境，促進更有效的免疫反應。</a:t>
             </a:r>
             <a:endParaRPr lang="en-US" sz="1200" dirty="0"/>
           </a:p>
@@ -3629,14 +3671,6 @@
               </a:lnSpc>
               <a:buNone/>
             </a:pPr>
-            <a:r>
-              <a:rPr lang="en-US" sz="1200" dirty="0">
-                <a:solidFill>
-                  <a:srgbClr val="FFFFFF"/>
-                </a:solidFill>
-              </a:rPr>
-              <a:t>   新的研究顯示，術前立體定向放射治療結合免疫治療能有效改變HCC的腫瘤微環境，促進治療效果。  </a:t>
-            </a:r>
             <a:endParaRPr lang="en-US" sz="1200" dirty="0"/>
           </a:p>
           <a:p>
@@ -3652,7 +3686,7 @@
                   <a:srgbClr val="FFFFFF"/>
                 </a:solidFill>
               </a:rPr>
-              <a:t>   Recent studies indicate that neoadjuvant stereotactic body radiation therapy combined with immunotherapy can effectively remodel the tumor microenvironment in HCC, enhancing treatment efficacy.</a:t>
+              <a:t>3. **癌症相關成纖維細胞的角色**  </a:t>
             </a:r>
             <a:endParaRPr lang="en-US" sz="1200" dirty="0"/>
           </a:p>
@@ -3663,6 +3697,14 @@
               </a:lnSpc>
               <a:buNone/>
             </a:pPr>
+            <a:r>
+              <a:rPr lang="en-US" sz="1200" dirty="0">
+                <a:solidFill>
+                  <a:srgbClr val="FFFFFF"/>
+                </a:solidFill>
+              </a:rPr>
+              <a:t>   Cancer-associated fibroblasts (CAFs) play a crucial role in tumor immunosuppression through metabolic pathways, indicating potential therapeutic targets for enhancing immunotherapy efficacy.  </a:t>
+            </a:r>
             <a:endParaRPr lang="en-US" sz="1200" dirty="0"/>
           </a:p>
           <a:p>
@@ -3678,7 +3720,7 @@
                   <a:srgbClr val="FFFFFF"/>
                 </a:solidFill>
               </a:rPr>
-              <a:t>3. **癌症相關成纖維細胞的角色**  </a:t>
+              <a:t>   癌症相關成纖維細胞（CAFs）在腫瘤免疫抑制中扮演關鍵角色，透過代謝途徑顯示出增強免疫療法療效的潛在治療靶點。</a:t>
             </a:r>
             <a:endParaRPr lang="en-US" sz="1200" dirty="0"/>
           </a:p>
@@ -3689,14 +3731,6 @@
               </a:lnSpc>
               <a:buNone/>
             </a:pPr>
-            <a:r>
-              <a:rPr lang="en-US" sz="1200" dirty="0">
-                <a:solidFill>
-                  <a:srgbClr val="FFFFFF"/>
-                </a:solidFill>
-              </a:rPr>
-              <a:t>   **Role of Cancer-Associated Fibroblasts**  </a:t>
-            </a:r>
             <a:endParaRPr lang="en-US" sz="1200" dirty="0"/>
           </a:p>
           <a:p>
@@ -3712,7 +3746,7 @@
                   <a:srgbClr val="FFFFFF"/>
                 </a:solidFill>
               </a:rPr>
-              <a:t>   癌症相關成纖維細胞（CAFs）在HCC中推動免疫抑制，理解其代謝調控對開發新療法至關重要。  </a:t>
+              <a:t>4. **手術後復發的挑戰**  </a:t>
             </a:r>
             <a:endParaRPr lang="en-US" sz="1200" dirty="0"/>
           </a:p>
@@ -3729,7 +3763,7 @@
                   <a:srgbClr val="FFFFFF"/>
                 </a:solidFill>
               </a:rPr>
-              <a:t>   Cancer-associated fibroblasts (CAFs) drive immunosuppression in HCC, and understanding their metabolic regulation is crucial for developing new therapeutic strategies.</a:t>
+              <a:t>   Despite the effectiveness of surgical resection for early-stage HCC, postoperative recurrence remains a significant clinical challenge that necessitates further investigation into underlying mechanisms.  </a:t>
             </a:r>
             <a:endParaRPr lang="en-US" sz="1200" dirty="0"/>
           </a:p>
@@ -3740,6 +3774,14 @@
               </a:lnSpc>
               <a:buNone/>
             </a:pPr>
+            <a:r>
+              <a:rPr lang="en-US" sz="1200" dirty="0">
+                <a:solidFill>
+                  <a:srgbClr val="FFFFFF"/>
+                </a:solidFill>
+              </a:rPr>
+              <a:t>   儘管手術切除對早期HCC有效，但術後復發仍然是一個重大臨床挑戰，需進一步研究其潛在機制。</a:t>
+            </a:r>
             <a:endParaRPr lang="en-US" sz="1200" dirty="0"/>
           </a:p>
           <a:p>
@@ -3749,14 +3791,6 @@
               </a:lnSpc>
               <a:buNone/>
             </a:pPr>
-            <a:r>
-              <a:rPr lang="en-US" sz="1200" dirty="0">
-                <a:solidFill>
-                  <a:srgbClr val="FFFFFF"/>
-                </a:solidFill>
-              </a:rPr>
-              <a:t>4. **手術後復發的挑戰**  </a:t>
-            </a:r>
             <a:endParaRPr lang="en-US" sz="1200" dirty="0"/>
           </a:p>
           <a:p>
@@ -3772,7 +3806,7 @@
                   <a:srgbClr val="FFFFFF"/>
                 </a:solidFill>
               </a:rPr>
-              <a:t>   **Challenges of Postoperative Recurrence**  </a:t>
+              <a:t>5. **多模式治療的前景**  </a:t>
             </a:r>
             <a:endParaRPr lang="en-US" sz="1200" dirty="0"/>
           </a:p>
@@ -3789,101 +3823,7 @@
                   <a:srgbClr val="FFFFFF"/>
                 </a:solidFill>
               </a:rPr>
-              <a:t>   雖然外科切除是早期HCC的有效干預措施，但術後復發仍然是主要的臨床挑戰。  </a:t>
-            </a:r>
-            <a:endParaRPr lang="en-US" sz="1200" dirty="0"/>
-          </a:p>
-          <a:p>
-            <a:pPr indent="0" marL="0">
-              <a:lnSpc>
-                <a:spcPct val="150000"/>
-              </a:lnSpc>
-              <a:buNone/>
-            </a:pPr>
-            <a:r>
-              <a:rPr lang="en-US" sz="1200" dirty="0">
-                <a:solidFill>
-                  <a:srgbClr val="FFFFFF"/>
-                </a:solidFill>
-              </a:rPr>
-              <a:t>   While surgical resection is an effective intervention for early-stage HCC, postoperative recurrence remains a significant clinical challenge.</a:t>
-            </a:r>
-            <a:endParaRPr lang="en-US" sz="1200" dirty="0"/>
-          </a:p>
-          <a:p>
-            <a:pPr indent="0" marL="0">
-              <a:lnSpc>
-                <a:spcPct val="150000"/>
-              </a:lnSpc>
-              <a:buNone/>
-            </a:pPr>
-            <a:endParaRPr lang="en-US" sz="1200" dirty="0"/>
-          </a:p>
-          <a:p>
-            <a:pPr indent="0" marL="0">
-              <a:lnSpc>
-                <a:spcPct val="150000"/>
-              </a:lnSpc>
-              <a:buNone/>
-            </a:pPr>
-            <a:r>
-              <a:rPr lang="en-US" sz="1200" dirty="0">
-                <a:solidFill>
-                  <a:srgbClr val="FFFFFF"/>
-                </a:solidFill>
-              </a:rPr>
-              <a:t>5. **多模式治療的前景**  </a:t>
-            </a:r>
-            <a:endParaRPr lang="en-US" sz="1200" dirty="0"/>
-          </a:p>
-          <a:p>
-            <a:pPr indent="0" marL="0">
-              <a:lnSpc>
-                <a:spcPct val="150000"/>
-              </a:lnSpc>
-              <a:buNone/>
-            </a:pPr>
-            <a:r>
-              <a:rPr lang="en-US" sz="1200" dirty="0">
-                <a:solidFill>
-                  <a:srgbClr val="FFFFFF"/>
-                </a:solidFill>
-              </a:rPr>
-              <a:t>   **Prospects of Multimodal Therapy**  </a:t>
-            </a:r>
-            <a:endParaRPr lang="en-US" sz="1200" dirty="0"/>
-          </a:p>
-          <a:p>
-            <a:pPr indent="0" marL="0">
-              <a:lnSpc>
-                <a:spcPct val="150000"/>
-              </a:lnSpc>
-              <a:buNone/>
-            </a:pPr>
-            <a:r>
-              <a:rPr lang="en-US" sz="1200" dirty="0">
-                <a:solidFill>
-                  <a:srgbClr val="FFFFFF"/>
-                </a:solidFill>
-              </a:rPr>
-              <a:t>   結合不同治療方法（如TACE、免疫治療和局部消融）可能為不可切除的HCC提供更佳的治療結果。  </a:t>
-            </a:r>
-            <a:endParaRPr lang="en-US" sz="1200" dirty="0"/>
-          </a:p>
-          <a:p>
-            <a:pPr indent="0" marL="0">
-              <a:lnSpc>
-                <a:spcPct val="150000"/>
-              </a:lnSpc>
-              <a:buNone/>
-            </a:pPr>
-            <a:r>
-              <a:rPr lang="en-US" sz="1200" dirty="0">
-                <a:solidFill>
-                  <a:srgbClr val="FFFFFF"/>
-                </a:solidFill>
-              </a:rPr>
-              <a:t>   Combining various treatment modalities (such as TACE, immunotherapy, and local ablation) may offer better outcomes for unresectable HCC.</a:t>
+              <a:t>   Combining various treatment modalities, such as transarterial chemoembolization with immune checkpoint inhibitors, shows potential in improving outcomes for patients with unresectable HCC.</a:t>
             </a:r>
             <a:endParaRPr lang="en-US" sz="1200" dirty="0"/>
           </a:p>
@@ -4029,7 +3969,7 @@
                   <a:srgbClr val="FFFFFF"/>
                 </a:solidFill>
               </a:rPr>
-              <a:t>### 未來研究方向 (Future Research Directions)</a:t>
+              <a:t>結合多種治療方式，如經動脈化療栓塞與免疫檢查點抑制劑，顯示出改善不可切除HCC患者預後的潛力。</a:t>
             </a:r>
             <a:endParaRPr lang="en-US" sz="1200" dirty="0"/>
           </a:p>
@@ -4055,7 +3995,7 @@
                   <a:srgbClr val="FFFFFF"/>
                 </a:solidFill>
               </a:rPr>
-              <a:t>1. **早期階段免疫治療的最佳化**  </a:t>
+              <a:t>### 未來研究方向 (Future Research Directions)</a:t>
             </a:r>
             <a:endParaRPr lang="en-US" sz="1200" dirty="0"/>
           </a:p>
@@ -4066,14 +4006,6 @@
               </a:lnSpc>
               <a:buNone/>
             </a:pPr>
-            <a:r>
-              <a:rPr lang="en-US" sz="1200" dirty="0">
-                <a:solidFill>
-                  <a:srgbClr val="FFFFFF"/>
-                </a:solidFill>
-              </a:rPr>
-              <a:t>   **Optimization of Immunotherapy in Early Stages**  </a:t>
-            </a:r>
             <a:endParaRPr lang="en-US" sz="1200" dirty="0"/>
           </a:p>
           <a:p>
@@ -4089,7 +4021,7 @@
                   <a:srgbClr val="FFFFFF"/>
                 </a:solidFill>
               </a:rPr>
-              <a:t>   需要進一步研究以確定免疫治療在早期HCC中的最佳使用時機和方式。  </a:t>
+              <a:t>1. **早期階段的免疫療法應用**  </a:t>
             </a:r>
             <a:endParaRPr lang="en-US" sz="1200" dirty="0"/>
           </a:p>
@@ -4106,7 +4038,7 @@
                   <a:srgbClr val="FFFFFF"/>
                 </a:solidFill>
               </a:rPr>
-              <a:t>   Further studies are needed to determine the optimal timing and methods for immunotherapy in early-stage HCC.</a:t>
+              <a:t>   Investigate optimal strategies for integrating immunotherapy in earlier stages of HCC to improve patient outcomes.  </a:t>
             </a:r>
             <a:endParaRPr lang="en-US" sz="1200" dirty="0"/>
           </a:p>
@@ -4117,6 +4049,14 @@
               </a:lnSpc>
               <a:buNone/>
             </a:pPr>
+            <a:r>
+              <a:rPr lang="en-US" sz="1200" dirty="0">
+                <a:solidFill>
+                  <a:srgbClr val="FFFFFF"/>
+                </a:solidFill>
+              </a:rPr>
+              <a:t>   探討在HCC早期階段整合免疫療法的最佳策略，以改善患者預後。</a:t>
+            </a:r>
             <a:endParaRPr lang="en-US" sz="1200" dirty="0"/>
           </a:p>
           <a:p>
@@ -4126,14 +4066,6 @@
               </a:lnSpc>
               <a:buNone/>
             </a:pPr>
-            <a:r>
-              <a:rPr lang="en-US" sz="1200" dirty="0">
-                <a:solidFill>
-                  <a:srgbClr val="FFFFFF"/>
-                </a:solidFill>
-              </a:rPr>
-              <a:t>2. **腫瘤微環境的深入分析**  </a:t>
-            </a:r>
             <a:endParaRPr lang="en-US" sz="1200" dirty="0"/>
           </a:p>
           <a:p>
@@ -4149,7 +4081,7 @@
                   <a:srgbClr val="FFFFFF"/>
                 </a:solidFill>
               </a:rPr>
-              <a:t>   **In-Depth Analysis of Tumor Microenvironment**  </a:t>
+              <a:t>2. **腫瘤微環境的深入研究**  </a:t>
             </a:r>
             <a:endParaRPr lang="en-US" sz="1200" dirty="0"/>
           </a:p>
@@ -4166,7 +4098,7 @@
                   <a:srgbClr val="FFFFFF"/>
                 </a:solidFill>
               </a:rPr>
-              <a:t>   研究腫瘤微環境中不同細胞類型的相互作用及其對免疫治療反應的影響。  </a:t>
+              <a:t>   Further explore the mechanisms by which the tumor microenvironment influences immune response and therapy resistance in HCC.  </a:t>
             </a:r>
             <a:endParaRPr lang="en-US" sz="1200" dirty="0"/>
           </a:p>
@@ -4183,7 +4115,7 @@
                   <a:srgbClr val="FFFFFF"/>
                 </a:solidFill>
               </a:rPr>
-              <a:t>   Investigate the interactions of different cell types within the tumor microenvironment and their impact on responses to immunotherapy.</a:t>
+              <a:t>   進一步研究腫瘤微環境如何影響HCC中的免疫反應和療法抵抗的機制。</a:t>
             </a:r>
             <a:endParaRPr lang="en-US" sz="1200" dirty="0"/>
           </a:p>
@@ -4209,7 +4141,7 @@
                   <a:srgbClr val="FFFFFF"/>
                 </a:solidFill>
               </a:rPr>
-              <a:t>3. **新型治療靶點的發掘**  </a:t>
+              <a:t>3. **CAFs的代謝調控**  </a:t>
             </a:r>
             <a:endParaRPr lang="en-US" sz="1200" dirty="0"/>
           </a:p>
@@ -4226,7 +4158,7 @@
                   <a:srgbClr val="FFFFFF"/>
                 </a:solidFill>
               </a:rPr>
-              <a:t>   **Discovery of Novel Therapeutic Targets**  </a:t>
+              <a:t>   Elucidate the metabolic pathways of cancer-associated fibroblasts and their impact on immunosuppression to identify new therapeutic targets.  </a:t>
             </a:r>
             <a:endParaRPr lang="en-US" sz="1200" dirty="0"/>
           </a:p>
@@ -4243,7 +4175,7 @@
                   <a:srgbClr val="FFFFFF"/>
                 </a:solidFill>
               </a:rPr>
-              <a:t>   探索癌症相關成纖維細胞及其代謝途徑作為新療法的潛在靶點。  </a:t>
+              <a:t>   阐明癌症相關成纖維細胞的代謝途徑及其對免疫抑制的影響，以識別新的治療靶點。</a:t>
             </a:r>
             <a:endParaRPr lang="en-US" sz="1200" dirty="0"/>
           </a:p>
@@ -4254,14 +4186,6 @@
               </a:lnSpc>
               <a:buNone/>
             </a:pPr>
-            <a:r>
-              <a:rPr lang="en-US" sz="1200" dirty="0">
-                <a:solidFill>
-                  <a:srgbClr val="FFFFFF"/>
-                </a:solidFill>
-              </a:rPr>
-              <a:t>   Explore cancer-associated fibroblasts and their metabolic pathways as potential novel therapeutic targets.</a:t>
-            </a:r>
             <a:endParaRPr lang="en-US" sz="1200" dirty="0"/>
           </a:p>
           <a:p>
@@ -4271,6 +4195,14 @@
               </a:lnSpc>
               <a:buNone/>
             </a:pPr>
+            <a:r>
+              <a:rPr lang="en-US" sz="1200" dirty="0">
+                <a:solidFill>
+                  <a:srgbClr val="FFFFFF"/>
+                </a:solidFill>
+              </a:rPr>
+              <a:t>4. **多模式治療的臨床試驗**  </a:t>
+            </a:r>
             <a:endParaRPr lang="en-US" sz="1200" dirty="0"/>
           </a:p>
           <a:p>
@@ -4286,7 +4218,7 @@
                   <a:srgbClr val="FFFFFF"/>
                 </a:solidFill>
               </a:rPr>
-              <a:t>4. **多模式治療的臨床試驗**  </a:t>
+              <a:t>   Conduct clinical trials to evaluate the efficacy and safety of combination therapies involving immunotherapy and local ablative techniques for HCC.  </a:t>
             </a:r>
             <a:endParaRPr lang="en-US" sz="1200" dirty="0"/>
           </a:p>
@@ -4303,7 +4235,7 @@
                   <a:srgbClr val="FFFFFF"/>
                 </a:solidFill>
               </a:rPr>
-              <a:t>   **Clinical Trials for Multimodal Therapies**  </a:t>
+              <a:t>   進行臨床試驗以評估結合免疫療法和局部消融技術的療效和安全性。</a:t>
             </a:r>
             <a:endParaRPr lang="en-US" sz="1200" dirty="0"/>
           </a:p>
@@ -4314,14 +4246,6 @@
               </a:lnSpc>
               <a:buNone/>
             </a:pPr>
-            <a:r>
-              <a:rPr lang="en-US" sz="1200" dirty="0">
-                <a:solidFill>
-                  <a:srgbClr val="FFFFFF"/>
-                </a:solidFill>
-              </a:rPr>
-              <a:t>   設計臨床試驗以評估多種治療組合在不可切除HCC中的療效和安全性。  </a:t>
-            </a:r>
             <a:endParaRPr lang="en-US" sz="1200" dirty="0"/>
           </a:p>
           <a:p>
@@ -4337,7 +4261,7 @@
                   <a:srgbClr val="FFFFFF"/>
                 </a:solidFill>
               </a:rPr>
-              <a:t>   Design clinical trials to assess the efficacy and safety of various treatment combinations in unresectable HCC.</a:t>
+              <a:t>5. **術後復發的預防策略**  </a:t>
             </a:r>
             <a:endParaRPr lang="en-US" sz="1200" dirty="0"/>
           </a:p>
@@ -4348,6 +4272,14 @@
               </a:lnSpc>
               <a:buNone/>
             </a:pPr>
+            <a:r>
+              <a:rPr lang="en-US" sz="1200" dirty="0">
+                <a:solidFill>
+                  <a:srgbClr val="FFFFFF"/>
+                </a:solidFill>
+              </a:rPr>
+              <a:t>   Develop and test strategies to prevent postoperative recurrence in HCC patients, focusing on adjuvant therapies that enhance immune response.  </a:t>
+            </a:r>
             <a:endParaRPr lang="en-US" sz="1200" dirty="0"/>
           </a:p>
           <a:p>
@@ -4363,58 +4295,7 @@
                   <a:srgbClr val="FFFFFF"/>
                 </a:solidFill>
               </a:rPr>
-              <a:t>5. **個體化治療策略的發展**  </a:t>
-            </a:r>
-            <a:endParaRPr lang="en-US" sz="1200" dirty="0"/>
-          </a:p>
-          <a:p>
-            <a:pPr indent="0" marL="0">
-              <a:lnSpc>
-                <a:spcPct val="150000"/>
-              </a:lnSpc>
-              <a:buNone/>
-            </a:pPr>
-            <a:r>
-              <a:rPr lang="en-US" sz="1200" dirty="0">
-                <a:solidFill>
-                  <a:srgbClr val="FFFFFF"/>
-                </a:solidFill>
-              </a:rPr>
-              <a:t>   **Development of Personalized Treatment Strategies**  </a:t>
-            </a:r>
-            <a:endParaRPr lang="en-US" sz="1200" dirty="0"/>
-          </a:p>
-          <a:p>
-            <a:pPr indent="0" marL="0">
-              <a:lnSpc>
-                <a:spcPct val="150000"/>
-              </a:lnSpc>
-              <a:buNone/>
-            </a:pPr>
-            <a:r>
-              <a:rPr lang="en-US" sz="1200" dirty="0">
-                <a:solidFill>
-                  <a:srgbClr val="FFFFFF"/>
-                </a:solidFill>
-              </a:rPr>
-              <a:t>   研究個體化治療策略，以根據患者的腫瘤特徵和免疫狀態調整治療方案。  </a:t>
-            </a:r>
-            <a:endParaRPr lang="en-US" sz="1200" dirty="0"/>
-          </a:p>
-          <a:p>
-            <a:pPr indent="0" marL="0">
-              <a:lnSpc>
-                <a:spcPct val="150000"/>
-              </a:lnSpc>
-              <a:buNone/>
-            </a:pPr>
-            <a:r>
-              <a:rPr lang="en-US" sz="1200" dirty="0">
-                <a:solidFill>
-                  <a:srgbClr val="FFFFFF"/>
-                </a:solidFill>
-              </a:rPr>
-              <a:t>   Investigate personalized treatment strategies that tailor therapeutic approaches based on individual tumor characteristics and immune status.</a:t>
+              <a:t>   開發和測試預防HCC患者術後復發的策略，重點在於增強免疫反應的輔助療法。</a:t>
             </a:r>
             <a:endParaRPr lang="en-US" sz="1200" dirty="0"/>
           </a:p>
@@ -5254,7 +5135,7 @@
                 <a:ea typeface="Microsoft JhengHei" pitchFamily="34" charset="-122"/>
                 <a:cs typeface="Microsoft JhengHei" pitchFamily="34" charset="-120"/>
               </a:rPr>
-              <a:t>癌症特徵指導治療策略。</a:t>
+              <a:t>癌症特徵指導肝癌理解。</a:t>
             </a:r>
             <a:endParaRPr lang="en-US" sz="1800" dirty="0"/>
           </a:p>
@@ -5296,7 +5177,49 @@
                 <a:ea typeface="Microsoft JhengHei" pitchFamily="34" charset="-122"/>
                 <a:cs typeface="Microsoft JhengHei" pitchFamily="34" charset="-120"/>
               </a:rPr>
-              <a:t>iCCA有獨特基因變異。</a:t>
+              <a:t>免疫治療改善晚期HCC預後。</a:t>
+            </a:r>
+            <a:endParaRPr lang="en-US" sz="1800" dirty="0"/>
+          </a:p>
+          <a:p>
+            <a:pPr marL="342900" indent="-342900">
+              <a:spcAft>
+                <a:spcPts val="800"/>
+              </a:spcAft>
+              <a:buSzPct val="100000"/>
+              <a:buChar char="•"/>
+            </a:pPr>
+            <a:r>
+              <a:rPr lang="en-US" sz="1800" dirty="0">
+                <a:solidFill>
+                  <a:srgbClr val="333333"/>
+                </a:solidFill>
+                <a:latin typeface="Microsoft JhengHei" pitchFamily="34" charset="0"/>
+                <a:ea typeface="Microsoft JhengHei" pitchFamily="34" charset="-122"/>
+                <a:cs typeface="Microsoft JhengHei" pitchFamily="34" charset="-120"/>
+              </a:rPr>
+              <a:t>iCCA具有獨特基因變異。</a:t>
+            </a:r>
+            <a:endParaRPr lang="en-US" sz="1800" dirty="0"/>
+          </a:p>
+          <a:p>
+            <a:pPr marL="342900" indent="-342900">
+              <a:spcAft>
+                <a:spcPts val="800"/>
+              </a:spcAft>
+              <a:buSzPct val="100000"/>
+              <a:buChar char="•"/>
+            </a:pPr>
+            <a:r>
+              <a:rPr lang="en-US" sz="1800" dirty="0">
+                <a:solidFill>
+                  <a:srgbClr val="333333"/>
+                </a:solidFill>
+                <a:latin typeface="Microsoft JhengHei" pitchFamily="34" charset="0"/>
+                <a:ea typeface="Microsoft JhengHei" pitchFamily="34" charset="-122"/>
+                <a:cs typeface="Microsoft JhengHei" pitchFamily="34" charset="-120"/>
+              </a:rPr>
+              <a:t>精準醫療針對iCCA突變。</a:t>
             </a:r>
             <a:endParaRPr lang="en-US" sz="1800" dirty="0"/>
           </a:p>
@@ -5575,7 +5498,7 @@
                 <a:ea typeface="Microsoft JhengHei" pitchFamily="34" charset="-122"/>
                 <a:cs typeface="Microsoft JhengHei" pitchFamily="34" charset="-120"/>
               </a:rPr>
-              <a:t>測試新輔助SBRT和免疫治療</a:t>
+              <a:t>新輔助SBRT與免疫療法結合</a:t>
             </a:r>
             <a:endParaRPr lang="en-US" sz="1800" dirty="0"/>
           </a:p>
@@ -5596,7 +5519,7 @@
                 <a:ea typeface="Microsoft JhengHei" pitchFamily="34" charset="-122"/>
                 <a:cs typeface="Microsoft JhengHei" pitchFamily="34" charset="-120"/>
               </a:rPr>
-              <a:t>8名HCC患者的初步研究</a:t>
+              <a:t>8名患者的初步研究，評估安全性</a:t>
             </a:r>
             <a:endParaRPr lang="en-US" sz="1800" dirty="0"/>
           </a:p>
@@ -5617,7 +5540,7 @@
                 <a:ea typeface="Microsoft JhengHei" pitchFamily="34" charset="-122"/>
                 <a:cs typeface="Microsoft JhengHei" pitchFamily="34" charset="-120"/>
               </a:rPr>
-              <a:t>安全性高，副作用少</a:t>
+              <a:t>1名患者出現3級治療相關不良事件</a:t>
             </a:r>
             <a:endParaRPr lang="en-US" sz="1800" dirty="0"/>
           </a:p>
@@ -5638,7 +5561,7 @@
                 <a:ea typeface="Microsoft JhengHei" pitchFamily="34" charset="-122"/>
                 <a:cs typeface="Microsoft JhengHei" pitchFamily="34" charset="-120"/>
               </a:rPr>
-              <a:t>顯著的免疫浸潤現象</a:t>
+              <a:t>所有切除患者達到R0切除</a:t>
             </a:r>
             <a:endParaRPr lang="en-US" sz="1800" dirty="0"/>
           </a:p>
@@ -5659,7 +5582,7 @@
                 <a:ea typeface="Microsoft JhengHei" pitchFamily="34" charset="-122"/>
                 <a:cs typeface="Microsoft JhengHei" pitchFamily="34" charset="-120"/>
               </a:rPr>
-              <a:t>所有切除患者無復發</a:t>
+              <a:t>治療後觀察到免疫浸潤增加</a:t>
             </a:r>
             <a:endParaRPr lang="en-US" sz="1800" dirty="0"/>
           </a:p>
@@ -5959,7 +5882,7 @@
                 <a:ea typeface="Microsoft JhengHei" pitchFamily="34" charset="-122"/>
                 <a:cs typeface="Microsoft JhengHei" pitchFamily="34" charset="-120"/>
               </a:rPr>
-              <a:t>使用小鼠模型研究HCC</a:t>
+              <a:t>新輔助療效保持不變</a:t>
             </a:r>
             <a:endParaRPr lang="en-US" sz="1800" dirty="0"/>
           </a:p>
@@ -5980,7 +5903,7 @@
                 <a:ea typeface="Microsoft JhengHei" pitchFamily="34" charset="-122"/>
                 <a:cs typeface="Microsoft JhengHei" pitchFamily="34" charset="-120"/>
               </a:rPr>
-              <a:t>新輔助療效保持不變</a:t>
+              <a:t>使用小鼠模型進行研究</a:t>
             </a:r>
             <a:endParaRPr lang="en-US" sz="1800" dirty="0"/>
           </a:p>
@@ -6259,7 +6182,7 @@
                 <a:ea typeface="Microsoft JhengHei" pitchFamily="34" charset="-122"/>
                 <a:cs typeface="Microsoft JhengHei" pitchFamily="34" charset="-120"/>
               </a:rPr>
-              <a:t>Lactobacillus johnsonii 增強 CD8+ T 細胞擴增。</a:t>
+              <a:t>Lactobacillus johnsonii 增加 IFNγ+PD-1+CD8+ T 細胞。</a:t>
             </a:r>
             <a:endParaRPr lang="en-US" sz="1800" dirty="0"/>
           </a:p>
@@ -6280,7 +6203,7 @@
                 <a:ea typeface="Microsoft JhengHei" pitchFamily="34" charset="-122"/>
                 <a:cs typeface="Microsoft JhengHei" pitchFamily="34" charset="-120"/>
               </a:rPr>
-              <a:t>較高水平與無病生存相關。</a:t>
+              <a:t>Nicotinic acid 促進 T 細胞擴展與功能。</a:t>
             </a:r>
             <a:endParaRPr lang="en-US" sz="1800" dirty="0"/>
           </a:p>
@@ -6301,49 +6224,7 @@
                 <a:ea typeface="Microsoft JhengHei" pitchFamily="34" charset="-122"/>
                 <a:cs typeface="Microsoft JhengHei" pitchFamily="34" charset="-120"/>
               </a:rPr>
-              <a:t>Nicotinic acid 激活 NF-κB 通路。</a:t>
-            </a:r>
-            <a:endParaRPr lang="en-US" sz="1800" dirty="0"/>
-          </a:p>
-          <a:p>
-            <a:pPr marL="342900" indent="-342900">
-              <a:spcAft>
-                <a:spcPts val="800"/>
-              </a:spcAft>
-              <a:buSzPct val="100000"/>
-              <a:buChar char="•"/>
-            </a:pPr>
-            <a:r>
-              <a:rPr lang="en-US" sz="1800" dirty="0">
-                <a:solidFill>
-                  <a:srgbClr val="333333"/>
-                </a:solidFill>
-                <a:latin typeface="Microsoft JhengHei" pitchFamily="34" charset="0"/>
-                <a:ea typeface="Microsoft JhengHei" pitchFamily="34" charset="-122"/>
-                <a:cs typeface="Microsoft JhengHei" pitchFamily="34" charset="-120"/>
-              </a:rPr>
-              <a:t>聯合療法減少腫瘤復發。</a:t>
-            </a:r>
-            <a:endParaRPr lang="en-US" sz="1800" dirty="0"/>
-          </a:p>
-          <a:p>
-            <a:pPr marL="342900" indent="-342900">
-              <a:spcAft>
-                <a:spcPts val="800"/>
-              </a:spcAft>
-              <a:buSzPct val="100000"/>
-              <a:buChar char="•"/>
-            </a:pPr>
-            <a:r>
-              <a:rPr lang="en-US" sz="1800" dirty="0">
-                <a:solidFill>
-                  <a:srgbClr val="333333"/>
-                </a:solidFill>
-                <a:latin typeface="Microsoft JhengHei" pitchFamily="34" charset="0"/>
-                <a:ea typeface="Microsoft JhengHei" pitchFamily="34" charset="-122"/>
-                <a:cs typeface="Microsoft JhengHei" pitchFamily="34" charset="-120"/>
-              </a:rPr>
-              <a:t>CD8+ T 細胞對療效至關重要。</a:t>
+              <a:t>L. johnsonii 激活 NF-κB 路徑以增強免疫反應。</a:t>
             </a:r>
             <a:endParaRPr lang="en-US" sz="1800" dirty="0"/>
           </a:p>
@@ -6622,7 +6503,7 @@
                 <a:ea typeface="Microsoft JhengHei" pitchFamily="34" charset="-122"/>
                 <a:cs typeface="Microsoft JhengHei" pitchFamily="34" charset="-120"/>
               </a:rPr>
-              <a:t>CAFs 促進 HCC 免疫抑制。</a:t>
+              <a:t>CAFs 驅動 HCC 免疫抑制。</a:t>
             </a:r>
             <a:endParaRPr lang="en-US" sz="1800" dirty="0"/>
           </a:p>
@@ -6664,7 +6545,7 @@
                 <a:ea typeface="Microsoft JhengHei" pitchFamily="34" charset="-122"/>
                 <a:cs typeface="Microsoft JhengHei" pitchFamily="34" charset="-120"/>
               </a:rPr>
-              <a:t>ANGPTL4 增強腫瘤免疫逃逸。</a:t>
+              <a:t>ANGPTL4 增強 PD-L1 表達。</a:t>
             </a:r>
             <a:endParaRPr lang="en-US" sz="1800" dirty="0"/>
           </a:p>
@@ -6706,7 +6587,7 @@
                 <a:ea typeface="Microsoft JhengHei" pitchFamily="34" charset="-122"/>
                 <a:cs typeface="Microsoft JhengHei" pitchFamily="34" charset="-120"/>
               </a:rPr>
-              <a:t>與抗 PD-L1 治療協同作用。</a:t>
+              <a:t>療法與抗 PD-L1 治療協同作用。</a:t>
             </a:r>
             <a:endParaRPr lang="en-US" sz="1800" dirty="0"/>
           </a:p>
@@ -7006,7 +6887,7 @@
                 <a:ea typeface="Microsoft JhengHei" pitchFamily="34" charset="-122"/>
                 <a:cs typeface="Microsoft JhengHei" pitchFamily="34" charset="-120"/>
               </a:rPr>
-              <a:t>耗竭病毒特異性CD8 T細胞。</a:t>
+              <a:t>觀察到病毒特異性CD8 T細胞耗竭。</a:t>
             </a:r>
             <a:endParaRPr lang="en-US" sz="1800" dirty="0"/>
           </a:p>
@@ -7027,7 +6908,49 @@
                 <a:ea typeface="Microsoft JhengHei" pitchFamily="34" charset="-122"/>
                 <a:cs typeface="Microsoft JhengHei" pitchFamily="34" charset="-120"/>
               </a:rPr>
-              <a:t>吞噬細胞介導T細胞耗竭。</a:t>
+              <a:t>激活FcγR III介導T細胞耗竭。</a:t>
+            </a:r>
+            <a:endParaRPr lang="en-US" sz="1800" dirty="0"/>
+          </a:p>
+          <a:p>
+            <a:pPr marL="342900" indent="-342900">
+              <a:spcAft>
+                <a:spcPts val="800"/>
+              </a:spcAft>
+              <a:buSzPct val="100000"/>
+              <a:buChar char="•"/>
+            </a:pPr>
+            <a:r>
+              <a:rPr lang="en-US" sz="1800" dirty="0">
+                <a:solidFill>
+                  <a:srgbClr val="333333"/>
+                </a:solidFill>
+                <a:latin typeface="Microsoft JhengHei" pitchFamily="34" charset="0"/>
+                <a:ea typeface="Microsoft JhengHei" pitchFamily="34" charset="-122"/>
+                <a:cs typeface="Microsoft JhengHei" pitchFamily="34" charset="-120"/>
+              </a:rPr>
+              <a:t>吞噬細胞是關鍵效應細胞。</a:t>
+            </a:r>
+            <a:endParaRPr lang="en-US" sz="1800" dirty="0"/>
+          </a:p>
+          <a:p>
+            <a:pPr marL="342900" indent="-342900">
+              <a:spcAft>
+                <a:spcPts val="800"/>
+              </a:spcAft>
+              <a:buSzPct val="100000"/>
+              <a:buChar char="•"/>
+            </a:pPr>
+            <a:r>
+              <a:rPr lang="en-US" sz="1800" dirty="0">
+                <a:solidFill>
+                  <a:srgbClr val="333333"/>
+                </a:solidFill>
+                <a:latin typeface="Microsoft JhengHei" pitchFamily="34" charset="0"/>
+                <a:ea typeface="Microsoft JhengHei" pitchFamily="34" charset="-122"/>
+                <a:cs typeface="Microsoft JhengHei" pitchFamily="34" charset="-120"/>
+              </a:rPr>
+              <a:t>Fc完整抗體可能妨礙肝癌治療。</a:t>
             </a:r>
             <a:endParaRPr lang="en-US" sz="1800" dirty="0"/>
           </a:p>
@@ -7348,7 +7271,7 @@
                 <a:ea typeface="Microsoft JhengHei" pitchFamily="34" charset="-122"/>
                 <a:cs typeface="Microsoft JhengHei" pitchFamily="34" charset="-120"/>
               </a:rPr>
-              <a:t>優於單一療法的結果</a:t>
+              <a:t>較單一療法有改善效果</a:t>
             </a:r>
             <a:endParaRPr lang="en-US" sz="1800" dirty="0"/>
           </a:p>
@@ -7369,7 +7292,7 @@
                 <a:ea typeface="Microsoft JhengHei" pitchFamily="34" charset="-122"/>
                 <a:cs typeface="Microsoft JhengHei" pitchFamily="34" charset="-120"/>
               </a:rPr>
-              <a:t>具治癒意圖的潛力</a:t>
+              <a:t>專注於治癒性策略</a:t>
             </a:r>
             <a:endParaRPr lang="en-US" sz="1800" dirty="0"/>
           </a:p>
@@ -7390,7 +7313,7 @@
                 <a:ea typeface="Microsoft JhengHei" pitchFamily="34" charset="-122"/>
                 <a:cs typeface="Microsoft JhengHei" pitchFamily="34" charset="-120"/>
               </a:rPr>
-              <a:t>聚焦於晚期肝細胞癌</a:t>
+              <a:t>解決HCC的預後不良問題</a:t>
             </a:r>
             <a:endParaRPr lang="en-US" sz="1800" dirty="0"/>
           </a:p>

--- a/docs/digest-zh.pptx
+++ b/docs/digest-zh.pptx
@@ -2539,7 +2539,7 @@
                 <a:ea typeface="Microsoft JhengHei" pitchFamily="34" charset="-122"/>
                 <a:cs typeface="Microsoft JhengHei" pitchFamily="34" charset="-120"/>
               </a:rPr>
-              <a:t>針對不可切除HCC的組合療法</a:t>
+              <a:t>針對不可切除的HCC的組合療法</a:t>
             </a:r>
             <a:endParaRPr lang="en-US" sz="1800" dirty="0"/>
           </a:p>
@@ -2560,7 +2560,7 @@
                 <a:ea typeface="Microsoft JhengHei" pitchFamily="34" charset="-122"/>
                 <a:cs typeface="Microsoft JhengHei" pitchFamily="34" charset="-120"/>
               </a:rPr>
-              <a:t>使用肝動脈化療栓塞(TACE)</a:t>
+              <a:t>經動脈化療栓塞與PD-1抑制劑</a:t>
             </a:r>
             <a:endParaRPr lang="en-US" sz="1800" dirty="0"/>
           </a:p>
@@ -2581,57 +2581,51 @@
                 <a:ea typeface="Microsoft JhengHei" pitchFamily="34" charset="-122"/>
                 <a:cs typeface="Microsoft JhengHei" pitchFamily="34" charset="-120"/>
               </a:rPr>
-              <a:t>PD-1抑制劑提升治療效果</a:t>
+              <a:t>第二期試驗結果顯示療效</a:t>
             </a:r>
             <a:endParaRPr lang="en-US" sz="1800" dirty="0"/>
           </a:p>
-          <a:p>
-            <a:pPr marL="342900" indent="-342900">
-              <a:spcAft>
-                <a:spcPts val="800"/>
-              </a:spcAft>
-              <a:buSzPct val="100000"/>
-              <a:buChar char="•"/>
-            </a:pPr>
-            <a:r>
-              <a:rPr lang="en-US" sz="1800" dirty="0">
-                <a:solidFill>
-                  <a:srgbClr val="333333"/>
-                </a:solidFill>
-                <a:latin typeface="Microsoft JhengHei" pitchFamily="34" charset="0"/>
-                <a:ea typeface="Microsoft JhengHei" pitchFamily="34" charset="-122"/>
-                <a:cs typeface="Microsoft JhengHei" pitchFamily="34" charset="-120"/>
-              </a:rPr>
-              <a:t>第二期試驗顯示良好結果</a:t>
-            </a:r>
-            <a:endParaRPr lang="en-US" sz="1800" dirty="0"/>
-          </a:p>
-          <a:p>
-            <a:pPr marL="342900" indent="-342900">
-              <a:spcAft>
-                <a:spcPts val="800"/>
-              </a:spcAft>
-              <a:buSzPct val="100000"/>
-              <a:buChar char="•"/>
-            </a:pPr>
-            <a:r>
-              <a:rPr lang="en-US" sz="1800" dirty="0">
-                <a:solidFill>
-                  <a:srgbClr val="333333"/>
-                </a:solidFill>
-                <a:latin typeface="Microsoft JhengHei" pitchFamily="34" charset="0"/>
-                <a:ea typeface="Microsoft JhengHei" pitchFamily="34" charset="-122"/>
-                <a:cs typeface="Microsoft JhengHei" pitchFamily="34" charset="-120"/>
-              </a:rPr>
-              <a:t>有潛力轉為手術選項</a:t>
-            </a:r>
-            <a:endParaRPr lang="en-US" sz="1800" dirty="0"/>
-          </a:p>
-        </p:txBody>
-      </p:sp>
-      <p:sp>
-        <p:nvSpPr>
-          <p:cNvPr id="7" name="Text 5">
+        </p:txBody>
+      </p:sp>
+      <p:sp>
+        <p:nvSpPr>
+          <p:cNvPr id="7" name="Text 5"/>
+          <p:cNvSpPr/>
+          <p:nvPr/>
+        </p:nvSpPr>
+        <p:spPr>
+          <a:xfrm>
+            <a:off x="731520" y="5852160"/>
+            <a:ext cx="10058400" cy="0"/>
+          </a:xfrm>
+          <a:prstGeom prst="rect">
+            <a:avLst/>
+          </a:prstGeom>
+          <a:noFill/>
+          <a:ln/>
+        </p:spPr>
+        <p:txBody>
+          <a:bodyPr wrap="square" lIns="0" tIns="0" rIns="0" bIns="0" rtlCol="0" anchor="ctr"/>
+          <a:lstStyle/>
+          <a:p>
+            <a:pPr indent="0" marL="0">
+              <a:buNone/>
+            </a:pPr>
+            <a:r>
+              <a:rPr lang="en-US" sz="800" dirty="0">
+                <a:solidFill>
+                  <a:srgbClr val="888888"/>
+                </a:solidFill>
+              </a:rPr>
+              <a:t>X Zhang, H Cai, W Peng. … and Targeted Therapy. 2026</a:t>
+            </a:r>
+            <a:endParaRPr lang="en-US" sz="800" dirty="0"/>
+          </a:p>
+        </p:txBody>
+      </p:sp>
+      <p:sp>
+        <p:nvSpPr>
+          <p:cNvPr id="8" name="Text 6">
             <a:hlinkClick r:id="rId2" tooltip=""/>
           </p:cNvPr>
           <p:cNvSpPr/>
@@ -2902,7 +2896,7 @@
                 <a:ea typeface="Microsoft JhengHei" pitchFamily="34" charset="-122"/>
                 <a:cs typeface="Microsoft JhengHei" pitchFamily="34" charset="-120"/>
               </a:rPr>
-              <a:t>Atez+Bev 在 HCC 患者中 ORR 為 25%。</a:t>
+              <a:t>Atez+Bev 在 Dur+Tre 後有效</a:t>
             </a:r>
             <a:endParaRPr lang="en-US" sz="1800" dirty="0"/>
           </a:p>
@@ -2923,7 +2917,7 @@
                 <a:ea typeface="Microsoft JhengHei" pitchFamily="34" charset="-122"/>
                 <a:cs typeface="Microsoft JhengHei" pitchFamily="34" charset="-120"/>
               </a:rPr>
-              <a:t>75% DCR 顯示疾病控制良好。</a:t>
+              <a:t>客觀反應率為 25.0%</a:t>
             </a:r>
             <a:endParaRPr lang="en-US" sz="1800" dirty="0"/>
           </a:p>
@@ -2944,57 +2938,51 @@
                 <a:ea typeface="Microsoft JhengHei" pitchFamily="34" charset="-122"/>
                 <a:cs typeface="Microsoft JhengHei" pitchFamily="34" charset="-120"/>
               </a:rPr>
-              <a:t>先前 Dur+Tre 可能增強免疫反應。</a:t>
+              <a:t>不良事件在兩組不同</a:t>
             </a:r>
             <a:endParaRPr lang="en-US" sz="1800" dirty="0"/>
           </a:p>
-          <a:p>
-            <a:pPr marL="342900" indent="-342900">
-              <a:spcAft>
-                <a:spcPts val="800"/>
-              </a:spcAft>
-              <a:buSzPct val="100000"/>
-              <a:buChar char="•"/>
-            </a:pPr>
-            <a:r>
-              <a:rPr lang="en-US" sz="1800" dirty="0">
-                <a:solidFill>
-                  <a:srgbClr val="333333"/>
-                </a:solidFill>
-                <a:latin typeface="Microsoft JhengHei" pitchFamily="34" charset="0"/>
-                <a:ea typeface="Microsoft JhengHei" pitchFamily="34" charset="-122"/>
-                <a:cs typeface="Microsoft JhengHei" pitchFamily="34" charset="-120"/>
-              </a:rPr>
-              <a:t>常見不良事件包括瘙癢和蛋白尿。</a:t>
-            </a:r>
-            <a:endParaRPr lang="en-US" sz="1800" dirty="0"/>
-          </a:p>
-          <a:p>
-            <a:pPr marL="342900" indent="-342900">
-              <a:spcAft>
-                <a:spcPts val="800"/>
-              </a:spcAft>
-              <a:buSzPct val="100000"/>
-              <a:buChar char="•"/>
-            </a:pPr>
-            <a:r>
-              <a:rPr lang="en-US" sz="1800" dirty="0">
-                <a:solidFill>
-                  <a:srgbClr val="333333"/>
-                </a:solidFill>
-                <a:latin typeface="Microsoft JhengHei" pitchFamily="34" charset="0"/>
-                <a:ea typeface="Microsoft JhengHei" pitchFamily="34" charset="-122"/>
-                <a:cs typeface="Microsoft JhengHei" pitchFamily="34" charset="-120"/>
-              </a:rPr>
-              <a:t>序列療法提供新治療選擇。</a:t>
-            </a:r>
-            <a:endParaRPr lang="en-US" sz="1800" dirty="0"/>
-          </a:p>
-        </p:txBody>
-      </p:sp>
-      <p:sp>
-        <p:nvSpPr>
-          <p:cNvPr id="7" name="Text 5">
+        </p:txBody>
+      </p:sp>
+      <p:sp>
+        <p:nvSpPr>
+          <p:cNvPr id="7" name="Text 5"/>
+          <p:cNvSpPr/>
+          <p:nvPr/>
+        </p:nvSpPr>
+        <p:spPr>
+          <a:xfrm>
+            <a:off x="731520" y="5852160"/>
+            <a:ext cx="10058400" cy="0"/>
+          </a:xfrm>
+          <a:prstGeom prst="rect">
+            <a:avLst/>
+          </a:prstGeom>
+          <a:noFill/>
+          <a:ln/>
+        </p:spPr>
+        <p:txBody>
+          <a:bodyPr wrap="square" lIns="0" tIns="0" rIns="0" bIns="0" rtlCol="0" anchor="ctr"/>
+          <a:lstStyle/>
+          <a:p>
+            <a:pPr indent="0" marL="0">
+              <a:buNone/>
+            </a:pPr>
+            <a:r>
+              <a:rPr lang="en-US" sz="800" dirty="0">
+                <a:solidFill>
+                  <a:srgbClr val="888888"/>
+                </a:solidFill>
+              </a:rPr>
+              <a:t>Uchikawa Shinsuke, Kawaoka Tomokazu, Tanaka Aiko et al.. Internal medicine (Tokyo, Japan). 2026-04-16 DOI: 10.2169/internalmedicine.6021-25</a:t>
+            </a:r>
+            <a:endParaRPr lang="en-US" sz="800" dirty="0"/>
+          </a:p>
+        </p:txBody>
+      </p:sp>
+      <p:sp>
+        <p:nvSpPr>
+          <p:cNvPr id="8" name="Text 6">
             <a:hlinkClick r:id="rId2" tooltip=""/>
           </p:cNvPr>
           <p:cNvSpPr/>
@@ -3307,7 +3295,7 @@
                 <a:ea typeface="Microsoft JhengHei" pitchFamily="34" charset="-122"/>
                 <a:cs typeface="Microsoft JhengHei" pitchFamily="34" charset="-120"/>
               </a:rPr>
-              <a:t>評估局部無進展生存期</a:t>
+              <a:t>分析局部無進展生存期</a:t>
             </a:r>
             <a:endParaRPr lang="en-US" sz="1800" dirty="0"/>
           </a:p>
@@ -3357,7 +3345,43 @@
       </p:sp>
       <p:sp>
         <p:nvSpPr>
-          <p:cNvPr id="7" name="Text 5">
+          <p:cNvPr id="7" name="Text 5"/>
+          <p:cNvSpPr/>
+          <p:nvPr/>
+        </p:nvSpPr>
+        <p:spPr>
+          <a:xfrm>
+            <a:off x="731520" y="5852160"/>
+            <a:ext cx="10058400" cy="0"/>
+          </a:xfrm>
+          <a:prstGeom prst="rect">
+            <a:avLst/>
+          </a:prstGeom>
+          <a:noFill/>
+          <a:ln/>
+        </p:spPr>
+        <p:txBody>
+          <a:bodyPr wrap="square" lIns="0" tIns="0" rIns="0" bIns="0" rtlCol="0" anchor="ctr"/>
+          <a:lstStyle/>
+          <a:p>
+            <a:pPr indent="0" marL="0">
+              <a:buNone/>
+            </a:pPr>
+            <a:r>
+              <a:rPr lang="en-US" sz="800" dirty="0">
+                <a:solidFill>
+                  <a:srgbClr val="888888"/>
+                </a:solidFill>
+              </a:rPr>
+              <a:t>SH Bae, SH Choi, SM Yoon. Journal of Clinical …. 2026</a:t>
+            </a:r>
+            <a:endParaRPr lang="en-US" sz="800" dirty="0"/>
+          </a:p>
+        </p:txBody>
+      </p:sp>
+      <p:sp>
+        <p:nvSpPr>
+          <p:cNvPr id="8" name="Text 6">
             <a:hlinkClick r:id="rId2" tooltip=""/>
           </p:cNvPr>
           <p:cNvSpPr/>
@@ -3566,7 +3590,7 @@
                   <a:srgbClr val="FFFFFF"/>
                 </a:solidFill>
               </a:rPr>
-              <a:t>1. **免疫療法的潛力**  </a:t>
+              <a:t>1. **免疫治療的潛力**  </a:t>
             </a:r>
             <a:endParaRPr lang="en-US" sz="1200" dirty="0"/>
           </a:p>
@@ -3583,7 +3607,7 @@
                   <a:srgbClr val="FFFFFF"/>
                 </a:solidFill>
               </a:rPr>
-              <a:t>   Immunotherapy has shown significant promise in enhancing treatment outcomes for hepatocellular carcinoma (HCC), particularly in advanced stages.  </a:t>
+              <a:t>   The integration of immune therapy with traditional treatments, such as surgical resection and local ablation, shows promise in enhancing patient outcomes in hepatocellular carcinoma (HCC).  </a:t>
             </a:r>
             <a:endParaRPr lang="en-US" sz="1200" dirty="0"/>
           </a:p>
@@ -3600,7 +3624,7 @@
                   <a:srgbClr val="FFFFFF"/>
                 </a:solidFill>
               </a:rPr>
-              <a:t>   免疫療法在改善肝細胞癌（HCC）治療結果方面顯示出顯著潛力，特別是在晚期階段。</a:t>
+              <a:t>   免疫治療與傳統療法（如手術切除和局部消融）的結合顯示出改善肝細胞癌（HCC）患者預後的潛力。</a:t>
             </a:r>
             <a:endParaRPr lang="en-US" sz="1200" dirty="0"/>
           </a:p>
@@ -3643,7 +3667,7 @@
                   <a:srgbClr val="FFFFFF"/>
                 </a:solidFill>
               </a:rPr>
-              <a:t>   Neoadjuvant therapies, including stereotactic body radiation therapy combined with immune therapy, can favorably remodel the tumor microenvironment, promoting a more effective immune response.  </a:t>
+              <a:t>   Neoadjuvant therapies that remodel the tumor microenvironment can significantly improve the efficacy of subsequent immune treatments, suggesting a need for early intervention strategies.  </a:t>
             </a:r>
             <a:endParaRPr lang="en-US" sz="1200" dirty="0"/>
           </a:p>
@@ -3660,7 +3684,7 @@
                   <a:srgbClr val="FFFFFF"/>
                 </a:solidFill>
               </a:rPr>
-              <a:t>   新輔助療法，包括立體定向體部放射療法結合免疫療法，可以有利於重塑腫瘤微環境，促進更有效的免疫反應。</a:t>
+              <a:t>   重塑腫瘤微環境的術前療法可以顯著提高隨後免疫治療的療效，這表明需要早期介入策略。</a:t>
             </a:r>
             <a:endParaRPr lang="en-US" sz="1200" dirty="0"/>
           </a:p>
@@ -3703,7 +3727,7 @@
                   <a:srgbClr val="FFFFFF"/>
                 </a:solidFill>
               </a:rPr>
-              <a:t>   Cancer-associated fibroblasts (CAFs) play a crucial role in tumor immunosuppression through metabolic pathways, indicating potential therapeutic targets for enhancing immunotherapy efficacy.  </a:t>
+              <a:t>   Cancer-associated fibroblasts (CAFs) play a crucial role in promoting immunosuppression in HCC, highlighting the importance of targeting these cells to enhance immune responses.  </a:t>
             </a:r>
             <a:endParaRPr lang="en-US" sz="1200" dirty="0"/>
           </a:p>
@@ -3720,7 +3744,7 @@
                   <a:srgbClr val="FFFFFF"/>
                 </a:solidFill>
               </a:rPr>
-              <a:t>   癌症相關成纖維細胞（CAFs）在腫瘤免疫抑制中扮演關鍵角色，透過代謝途徑顯示出增強免疫療法療效的潛在治療靶點。</a:t>
+              <a:t>   癌症相關成纖維細胞（CAFs）在促進HCC中的免疫抑制方面扮演著關鍵角色，強調了針對這些細胞以增強免疫反應的重要性。</a:t>
             </a:r>
             <a:endParaRPr lang="en-US" sz="1200" dirty="0"/>
           </a:p>
@@ -3746,7 +3770,7 @@
                   <a:srgbClr val="FFFFFF"/>
                 </a:solidFill>
               </a:rPr>
-              <a:t>4. **手術後復發的挑戰**  </a:t>
+              <a:t>4. **病毒特異性T細胞的耗竭**  </a:t>
             </a:r>
             <a:endParaRPr lang="en-US" sz="1200" dirty="0"/>
           </a:p>
@@ -3763,7 +3787,7 @@
                   <a:srgbClr val="FFFFFF"/>
                 </a:solidFill>
               </a:rPr>
-              <a:t>   Despite the effectiveness of surgical resection for early-stage HCC, postoperative recurrence remains a significant clinical challenge that necessitates further investigation into underlying mechanisms.  </a:t>
+              <a:t>   The selective depletion of virus-specific CD8 T cells during PD-1 therapy underscores the complexity of immune responses in chronic infections and their implications for HCC treatment.  </a:t>
             </a:r>
             <a:endParaRPr lang="en-US" sz="1200" dirty="0"/>
           </a:p>
@@ -3780,7 +3804,7 @@
                   <a:srgbClr val="FFFFFF"/>
                 </a:solidFill>
               </a:rPr>
-              <a:t>   儘管手術切除對早期HCC有效，但術後復發仍然是一個重大臨床挑戰，需進一步研究其潛在機制。</a:t>
+              <a:t>   在PD-1治療過程中病毒特異性CD8 T細胞的選擇性耗竭突顯了慢性感染中免疫反應的複雜性及其對HCC治療的影響。</a:t>
             </a:r>
             <a:endParaRPr lang="en-US" sz="1200" dirty="0"/>
           </a:p>
@@ -3806,7 +3830,7 @@
                   <a:srgbClr val="FFFFFF"/>
                 </a:solidFill>
               </a:rPr>
-              <a:t>5. **多模式治療的前景**  </a:t>
+              <a:t>5. **多模式療法的必要性**  </a:t>
             </a:r>
             <a:endParaRPr lang="en-US" sz="1200" dirty="0"/>
           </a:p>
@@ -3823,7 +3847,7 @@
                   <a:srgbClr val="FFFFFF"/>
                 </a:solidFill>
               </a:rPr>
-              <a:t>   Combining various treatment modalities, such as transarterial chemoembolization with immune checkpoint inhibitors, shows potential in improving outcomes for patients with unresectable HCC.</a:t>
+              <a:t>   The combination of various treatment modalities, such as transarterial chemoembolization (TACE) with immune inhibitors, indicates a shift towards more comprehensive treatment approaches for unresectable HCC.</a:t>
             </a:r>
             <a:endParaRPr lang="en-US" sz="1200" dirty="0"/>
           </a:p>
@@ -3969,7 +3993,7 @@
                   <a:srgbClr val="FFFFFF"/>
                 </a:solidFill>
               </a:rPr>
-              <a:t>結合多種治療方式，如經動脈化療栓塞與免疫檢查點抑制劑，顯示出改善不可切除HCC患者預後的潛力。</a:t>
+              <a:t>將各種治療模式結合使用（如將經動脈化療栓塞（TACE）與免疫抑制劑結合）表明了對無法切除的HCC採取更全面治療方法的趨勢。</a:t>
             </a:r>
             <a:endParaRPr lang="en-US" sz="1200" dirty="0"/>
           </a:p>
@@ -4021,7 +4045,7 @@
                   <a:srgbClr val="FFFFFF"/>
                 </a:solidFill>
               </a:rPr>
-              <a:t>1. **早期階段的免疫療法應用**  </a:t>
+              <a:t>1. **早期免疫治療的優化**  </a:t>
             </a:r>
             <a:endParaRPr lang="en-US" sz="1200" dirty="0"/>
           </a:p>
@@ -4038,7 +4062,7 @@
                   <a:srgbClr val="FFFFFF"/>
                 </a:solidFill>
               </a:rPr>
-              <a:t>   Investigate optimal strategies for integrating immunotherapy in earlier stages of HCC to improve patient outcomes.  </a:t>
+              <a:t>   Future studies should focus on optimizing the timing and combination of immune therapies in early-stage HCC to maximize treatment efficacy.  </a:t>
             </a:r>
             <a:endParaRPr lang="en-US" sz="1200" dirty="0"/>
           </a:p>
@@ -4055,7 +4079,7 @@
                   <a:srgbClr val="FFFFFF"/>
                 </a:solidFill>
               </a:rPr>
-              <a:t>   探討在HCC早期階段整合免疫療法的最佳策略，以改善患者預後。</a:t>
+              <a:t>   未來的研究應集中於優化早期HCC中免疫治療的時機和組合，以最大化治療效果。</a:t>
             </a:r>
             <a:endParaRPr lang="en-US" sz="1200" dirty="0"/>
           </a:p>
@@ -4081,7 +4105,7 @@
                   <a:srgbClr val="FFFFFF"/>
                 </a:solidFill>
               </a:rPr>
-              <a:t>2. **腫瘤微環境的深入研究**  </a:t>
+              <a:t>2. **癌症相關成纖維細胞的靶向治療**  </a:t>
             </a:r>
             <a:endParaRPr lang="en-US" sz="1200" dirty="0"/>
           </a:p>
@@ -4098,7 +4122,7 @@
                   <a:srgbClr val="FFFFFF"/>
                 </a:solidFill>
               </a:rPr>
-              <a:t>   Further explore the mechanisms by which the tumor microenvironment influences immune response and therapy resistance in HCC.  </a:t>
+              <a:t>   Investigating targeted therapies against CAFs and their metabolic pathways may provide new avenues for enhancing anti-tumor immunity in HCC.  </a:t>
             </a:r>
             <a:endParaRPr lang="en-US" sz="1200" dirty="0"/>
           </a:p>
@@ -4115,7 +4139,7 @@
                   <a:srgbClr val="FFFFFF"/>
                 </a:solidFill>
               </a:rPr>
-              <a:t>   進一步研究腫瘤微環境如何影響HCC中的免疫反應和療法抵抗的機制。</a:t>
+              <a:t>   研究針對CAFs及其代謝途徑的靶向療法可能為增強HCC中的抗腫瘤免疫提供新的途徑。</a:t>
             </a:r>
             <a:endParaRPr lang="en-US" sz="1200" dirty="0"/>
           </a:p>
@@ -4141,7 +4165,7 @@
                   <a:srgbClr val="FFFFFF"/>
                 </a:solidFill>
               </a:rPr>
-              <a:t>3. **CAFs的代謝調控**  </a:t>
+              <a:t>3. **多模式療法的臨床試驗**  </a:t>
             </a:r>
             <a:endParaRPr lang="en-US" sz="1200" dirty="0"/>
           </a:p>
@@ -4158,7 +4182,7 @@
                   <a:srgbClr val="FFFFFF"/>
                 </a:solidFill>
               </a:rPr>
-              <a:t>   Elucidate the metabolic pathways of cancer-associated fibroblasts and their impact on immunosuppression to identify new therapeutic targets.  </a:t>
+              <a:t>   Conducting clinical trials that evaluate the efficacy of combined therapies, including immune checkpoint inhibitors and local ablation techniques, is essential for establishing best practices.  </a:t>
             </a:r>
             <a:endParaRPr lang="en-US" sz="1200" dirty="0"/>
           </a:p>
@@ -4175,7 +4199,7 @@
                   <a:srgbClr val="FFFFFF"/>
                 </a:solidFill>
               </a:rPr>
-              <a:t>   阐明癌症相關成纖維細胞的代謝途徑及其對免疫抑制的影響，以識別新的治療靶點。</a:t>
+              <a:t>   開展評估包括免疫檢查點抑制劑和局部消融技術的聯合療法有效性的臨床試驗對於建立最佳實踐至關重要。</a:t>
             </a:r>
             <a:endParaRPr lang="en-US" sz="1200" dirty="0"/>
           </a:p>
@@ -4201,7 +4225,7 @@
                   <a:srgbClr val="FFFFFF"/>
                 </a:solidFill>
               </a:rPr>
-              <a:t>4. **多模式治療的臨床試驗**  </a:t>
+              <a:t>4. **腫瘤微環境的深入研究**  </a:t>
             </a:r>
             <a:endParaRPr lang="en-US" sz="1200" dirty="0"/>
           </a:p>
@@ -4218,7 +4242,7 @@
                   <a:srgbClr val="FFFFFF"/>
                 </a:solidFill>
               </a:rPr>
-              <a:t>   Conduct clinical trials to evaluate the efficacy and safety of combination therapies involving immunotherapy and local ablative techniques for HCC.  </a:t>
+              <a:t>   Further research into the tumor microenvironment and its interactions with immune cells can unveil new therapeutic targets and strategies for HCC treatment.  </a:t>
             </a:r>
             <a:endParaRPr lang="en-US" sz="1200" dirty="0"/>
           </a:p>
@@ -4235,7 +4259,7 @@
                   <a:srgbClr val="FFFFFF"/>
                 </a:solidFill>
               </a:rPr>
-              <a:t>   進行臨床試驗以評估結合免疫療法和局部消融技術的療效和安全性。</a:t>
+              <a:t>   對腫瘤微環境及其與免疫細胞的相互作用的深入研究可以揭示HCC治療的新療法靶點和策略。</a:t>
             </a:r>
             <a:endParaRPr lang="en-US" sz="1200" dirty="0"/>
           </a:p>
@@ -4261,7 +4285,7 @@
                   <a:srgbClr val="FFFFFF"/>
                 </a:solidFill>
               </a:rPr>
-              <a:t>5. **術後復發的預防策略**  </a:t>
+              <a:t>5. **長期療效與耐藥性研究**  </a:t>
             </a:r>
             <a:endParaRPr lang="en-US" sz="1200" dirty="0"/>
           </a:p>
@@ -4278,7 +4302,7 @@
                   <a:srgbClr val="FFFFFF"/>
                 </a:solidFill>
               </a:rPr>
-              <a:t>   Develop and test strategies to prevent postoperative recurrence in HCC patients, focusing on adjuvant therapies that enhance immune response.  </a:t>
+              <a:t>   Investigating the long-term effects and potential resistance mechanisms associated with current immunotherapies will be crucial for improving patient outcomes in HCC.  </a:t>
             </a:r>
             <a:endParaRPr lang="en-US" sz="1200" dirty="0"/>
           </a:p>
@@ -4295,7 +4319,7 @@
                   <a:srgbClr val="FFFFFF"/>
                 </a:solidFill>
               </a:rPr>
-              <a:t>   開發和測試預防HCC患者術後復發的策略，重點在於增強免疫反應的輔助療法。</a:t>
+              <a:t>   研究目前免疫療法的長期效果及潛在的耐藥機制對於改善HCC患者的預後至關重要。</a:t>
             </a:r>
             <a:endParaRPr lang="en-US" sz="1200" dirty="0"/>
           </a:p>
@@ -5219,7 +5243,7 @@
                 <a:ea typeface="Microsoft JhengHei" pitchFamily="34" charset="-122"/>
                 <a:cs typeface="Microsoft JhengHei" pitchFamily="34" charset="-120"/>
               </a:rPr>
-              <a:t>精準醫療針對iCCA突變。</a:t>
+              <a:t>精準醫療惠及iCCA患者。</a:t>
             </a:r>
             <a:endParaRPr lang="en-US" sz="1800" dirty="0"/>
           </a:p>
@@ -5227,7 +5251,43 @@
       </p:sp>
       <p:sp>
         <p:nvSpPr>
-          <p:cNvPr id="7" name="Text 5">
+          <p:cNvPr id="7" name="Text 5"/>
+          <p:cNvSpPr/>
+          <p:nvPr/>
+        </p:nvSpPr>
+        <p:spPr>
+          <a:xfrm>
+            <a:off x="731520" y="5852160"/>
+            <a:ext cx="10058400" cy="0"/>
+          </a:xfrm>
+          <a:prstGeom prst="rect">
+            <a:avLst/>
+          </a:prstGeom>
+          <a:noFill/>
+          <a:ln/>
+        </p:spPr>
+        <p:txBody>
+          <a:bodyPr wrap="square" lIns="0" tIns="0" rIns="0" bIns="0" rtlCol="0" anchor="ctr"/>
+          <a:lstStyle/>
+          <a:p>
+            <a:pPr indent="0" marL="0">
+              <a:buNone/>
+            </a:pPr>
+            <a:r>
+              <a:rPr lang="en-US" sz="800" dirty="0">
+                <a:solidFill>
+                  <a:srgbClr val="888888"/>
+                </a:solidFill>
+              </a:rPr>
+              <a:t>Llovet Josep M, Pinyol Roser, Affo Silvia et al.. Cell. 2026-04-17 DOI: 10.1016/j.cell.2026.03.001</a:t>
+            </a:r>
+            <a:endParaRPr lang="en-US" sz="800" dirty="0"/>
+          </a:p>
+        </p:txBody>
+      </p:sp>
+      <p:sp>
+        <p:nvSpPr>
+          <p:cNvPr id="8" name="Text 6">
             <a:hlinkClick r:id="rId2" tooltip=""/>
           </p:cNvPr>
           <p:cNvSpPr/>
@@ -5498,7 +5558,7 @@
                 <a:ea typeface="Microsoft JhengHei" pitchFamily="34" charset="-122"/>
                 <a:cs typeface="Microsoft JhengHei" pitchFamily="34" charset="-120"/>
               </a:rPr>
-              <a:t>新輔助SBRT與免疫療法結合</a:t>
+              <a:t>測試新輔助SBRT加免疫療法</a:t>
             </a:r>
             <a:endParaRPr lang="en-US" sz="1800" dirty="0"/>
           </a:p>
@@ -5519,7 +5579,7 @@
                 <a:ea typeface="Microsoft JhengHei" pitchFamily="34" charset="-122"/>
                 <a:cs typeface="Microsoft JhengHei" pitchFamily="34" charset="-120"/>
               </a:rPr>
-              <a:t>8名患者的初步研究，評估安全性</a:t>
+              <a:t>進行8名患者的初步研究</a:t>
             </a:r>
             <a:endParaRPr lang="en-US" sz="1800" dirty="0"/>
           </a:p>
@@ -5540,7 +5600,7 @@
                 <a:ea typeface="Microsoft JhengHei" pitchFamily="34" charset="-122"/>
                 <a:cs typeface="Microsoft JhengHei" pitchFamily="34" charset="-120"/>
               </a:rPr>
-              <a:t>1名患者出現3級治療相關不良事件</a:t>
+              <a:t>安全性端點：低級別3-4不良事件</a:t>
             </a:r>
             <a:endParaRPr lang="en-US" sz="1800" dirty="0"/>
           </a:p>
@@ -5561,7 +5621,7 @@
                 <a:ea typeface="Microsoft JhengHei" pitchFamily="34" charset="-122"/>
                 <a:cs typeface="Microsoft JhengHei" pitchFamily="34" charset="-120"/>
               </a:rPr>
-              <a:t>所有切除患者達到R0切除</a:t>
+              <a:t>所有切除患者無復發</a:t>
             </a:r>
             <a:endParaRPr lang="en-US" sz="1800" dirty="0"/>
           </a:p>
@@ -5582,7 +5642,7 @@
                 <a:ea typeface="Microsoft JhengHei" pitchFamily="34" charset="-122"/>
                 <a:cs typeface="Microsoft JhengHei" pitchFamily="34" charset="-120"/>
               </a:rPr>
-              <a:t>治療後觀察到免疫浸潤增加</a:t>
+              <a:t>觀察到增強抗癌免疫浸潤</a:t>
             </a:r>
             <a:endParaRPr lang="en-US" sz="1800" dirty="0"/>
           </a:p>
@@ -5590,7 +5650,43 @@
       </p:sp>
       <p:sp>
         <p:nvSpPr>
-          <p:cNvPr id="7" name="Text 5">
+          <p:cNvPr id="7" name="Text 5"/>
+          <p:cNvSpPr/>
+          <p:nvPr/>
+        </p:nvSpPr>
+        <p:spPr>
+          <a:xfrm>
+            <a:off x="731520" y="5852160"/>
+            <a:ext cx="10058400" cy="0"/>
+          </a:xfrm>
+          <a:prstGeom prst="rect">
+            <a:avLst/>
+          </a:prstGeom>
+          <a:noFill/>
+          <a:ln/>
+        </p:spPr>
+        <p:txBody>
+          <a:bodyPr wrap="square" lIns="0" tIns="0" rIns="0" bIns="0" rtlCol="0" anchor="ctr"/>
+          <a:lstStyle/>
+          <a:p>
+            <a:pPr indent="0" marL="0">
+              <a:buNone/>
+            </a:pPr>
+            <a:r>
+              <a:rPr lang="en-US" sz="800" dirty="0">
+                <a:solidFill>
+                  <a:srgbClr val="888888"/>
+                </a:solidFill>
+              </a:rPr>
+              <a:t>Cosner Zoe, Guo Zhoubo, Nawrocki Cole et al.. Clinical cancer research : an official journal of the American Association for Cancer Research. 2026-04-15 DOI: 10.1158/1078-0432.CCR-25-4779</a:t>
+            </a:r>
+            <a:endParaRPr lang="en-US" sz="800" dirty="0"/>
+          </a:p>
+        </p:txBody>
+      </p:sp>
+      <p:sp>
+        <p:nvSpPr>
+          <p:cNvPr id="8" name="Text 6">
             <a:hlinkClick r:id="rId2" tooltip=""/>
           </p:cNvPr>
           <p:cNvSpPr/>
@@ -5882,7 +5978,7 @@
                 <a:ea typeface="Microsoft JhengHei" pitchFamily="34" charset="-122"/>
                 <a:cs typeface="Microsoft JhengHei" pitchFamily="34" charset="-120"/>
               </a:rPr>
-              <a:t>新輔助療效保持不變</a:t>
+              <a:t>使用小鼠模型進行研究</a:t>
             </a:r>
             <a:endParaRPr lang="en-US" sz="1800" dirty="0"/>
           </a:p>
@@ -5903,7 +5999,7 @@
                 <a:ea typeface="Microsoft JhengHei" pitchFamily="34" charset="-122"/>
                 <a:cs typeface="Microsoft JhengHei" pitchFamily="34" charset="-120"/>
               </a:rPr>
-              <a:t>使用小鼠模型進行研究</a:t>
+              <a:t>新輔助療效保持不變</a:t>
             </a:r>
             <a:endParaRPr lang="en-US" sz="1800" dirty="0"/>
           </a:p>
@@ -5911,7 +6007,43 @@
       </p:sp>
       <p:sp>
         <p:nvSpPr>
-          <p:cNvPr id="7" name="Text 5">
+          <p:cNvPr id="7" name="Text 5"/>
+          <p:cNvSpPr/>
+          <p:nvPr/>
+        </p:nvSpPr>
+        <p:spPr>
+          <a:xfrm>
+            <a:off x="731520" y="5852160"/>
+            <a:ext cx="10058400" cy="0"/>
+          </a:xfrm>
+          <a:prstGeom prst="rect">
+            <a:avLst/>
+          </a:prstGeom>
+          <a:noFill/>
+          <a:ln/>
+        </p:spPr>
+        <p:txBody>
+          <a:bodyPr wrap="square" lIns="0" tIns="0" rIns="0" bIns="0" rtlCol="0" anchor="ctr"/>
+          <a:lstStyle/>
+          <a:p>
+            <a:pPr indent="0" marL="0">
+              <a:buNone/>
+            </a:pPr>
+            <a:r>
+              <a:rPr lang="en-US" sz="800" dirty="0">
+                <a:solidFill>
+                  <a:srgbClr val="888888"/>
+                </a:solidFill>
+              </a:rPr>
+              <a:t>Bouguerra Roqiya, El Hajji Sofia, Wassmer Charles-Henri et al.. Hepatology (Baltimore, Md.). 2026-04-16 DOI: 10.1097/HEP.0000000000001731</a:t>
+            </a:r>
+            <a:endParaRPr lang="en-US" sz="800" dirty="0"/>
+          </a:p>
+        </p:txBody>
+      </p:sp>
+      <p:sp>
+        <p:nvSpPr>
+          <p:cNvPr id="8" name="Text 6">
             <a:hlinkClick r:id="rId2" tooltip=""/>
           </p:cNvPr>
           <p:cNvSpPr/>
@@ -6182,7 +6314,7 @@
                 <a:ea typeface="Microsoft JhengHei" pitchFamily="34" charset="-122"/>
                 <a:cs typeface="Microsoft JhengHei" pitchFamily="34" charset="-120"/>
               </a:rPr>
-              <a:t>Lactobacillus johnsonii 增加 IFNγ+PD-1+CD8+ T 細胞。</a:t>
+              <a:t>Lactobacillus johnsonii 增強 CD8+ T 細胞擴增。</a:t>
             </a:r>
             <a:endParaRPr lang="en-US" sz="1800" dirty="0"/>
           </a:p>
@@ -6203,7 +6335,7 @@
                 <a:ea typeface="Microsoft JhengHei" pitchFamily="34" charset="-122"/>
                 <a:cs typeface="Microsoft JhengHei" pitchFamily="34" charset="-120"/>
               </a:rPr>
-              <a:t>Nicotinic acid 促進 T 細胞擴展與功能。</a:t>
+              <a:t>高 Lactobacillus 與無復發生存相關。</a:t>
             </a:r>
             <a:endParaRPr lang="en-US" sz="1800" dirty="0"/>
           </a:p>
@@ -6224,15 +6356,93 @@
                 <a:ea typeface="Microsoft JhengHei" pitchFamily="34" charset="-122"/>
                 <a:cs typeface="Microsoft JhengHei" pitchFamily="34" charset="-120"/>
               </a:rPr>
-              <a:t>L. johnsonii 激活 NF-κB 路徑以增強免疫反應。</a:t>
+              <a:t>Nicotinic acid 促進 T 細胞 NF-κB 活化。</a:t>
             </a:r>
             <a:endParaRPr lang="en-US" sz="1800" dirty="0"/>
           </a:p>
-        </p:txBody>
-      </p:sp>
-      <p:sp>
-        <p:nvSpPr>
-          <p:cNvPr id="7" name="Text 5">
+          <a:p>
+            <a:pPr marL="342900" indent="-342900">
+              <a:spcAft>
+                <a:spcPts val="800"/>
+              </a:spcAft>
+              <a:buSzPct val="100000"/>
+              <a:buChar char="•"/>
+            </a:pPr>
+            <a:r>
+              <a:rPr lang="en-US" sz="1800" dirty="0">
+                <a:solidFill>
+                  <a:srgbClr val="333333"/>
+                </a:solidFill>
+                <a:latin typeface="Microsoft JhengHei" pitchFamily="34" charset="0"/>
+                <a:ea typeface="Microsoft JhengHei" pitchFamily="34" charset="-122"/>
+                <a:cs typeface="Microsoft JhengHei" pitchFamily="34" charset="-120"/>
+              </a:rPr>
+              <a:t>聯合療法有效減少腫瘤復發。</a:t>
+            </a:r>
+            <a:endParaRPr lang="en-US" sz="1800" dirty="0"/>
+          </a:p>
+          <a:p>
+            <a:pPr marL="342900" indent="-342900">
+              <a:spcAft>
+                <a:spcPts val="800"/>
+              </a:spcAft>
+              <a:buSzPct val="100000"/>
+              <a:buChar char="•"/>
+            </a:pPr>
+            <a:r>
+              <a:rPr lang="en-US" sz="1800" dirty="0">
+                <a:solidFill>
+                  <a:srgbClr val="333333"/>
+                </a:solidFill>
+                <a:latin typeface="Microsoft JhengHei" pitchFamily="34" charset="0"/>
+                <a:ea typeface="Microsoft JhengHei" pitchFamily="34" charset="-122"/>
+                <a:cs typeface="Microsoft JhengHei" pitchFamily="34" charset="-120"/>
+              </a:rPr>
+              <a:t>CD8+ T 細胞對抗腫瘤療效至關重要。</a:t>
+            </a:r>
+            <a:endParaRPr lang="en-US" sz="1800" dirty="0"/>
+          </a:p>
+        </p:txBody>
+      </p:sp>
+      <p:sp>
+        <p:nvSpPr>
+          <p:cNvPr id="7" name="Text 5"/>
+          <p:cNvSpPr/>
+          <p:nvPr/>
+        </p:nvSpPr>
+        <p:spPr>
+          <a:xfrm>
+            <a:off x="731520" y="5852160"/>
+            <a:ext cx="10058400" cy="0"/>
+          </a:xfrm>
+          <a:prstGeom prst="rect">
+            <a:avLst/>
+          </a:prstGeom>
+          <a:noFill/>
+          <a:ln/>
+        </p:spPr>
+        <p:txBody>
+          <a:bodyPr wrap="square" lIns="0" tIns="0" rIns="0" bIns="0" rtlCol="0" anchor="ctr"/>
+          <a:lstStyle/>
+          <a:p>
+            <a:pPr indent="0" marL="0">
+              <a:buNone/>
+            </a:pPr>
+            <a:r>
+              <a:rPr lang="en-US" sz="800" dirty="0">
+                <a:solidFill>
+                  <a:srgbClr val="888888"/>
+                </a:solidFill>
+              </a:rPr>
+              <a:t>Liu Qianshi, Liu Yiqiang, Zhou Yue et al.. Cancer research. 2026-04-15 DOI: 10.1158/0008-5472.CAN-25-0346</a:t>
+            </a:r>
+            <a:endParaRPr lang="en-US" sz="800" dirty="0"/>
+          </a:p>
+        </p:txBody>
+      </p:sp>
+      <p:sp>
+        <p:nvSpPr>
+          <p:cNvPr id="8" name="Text 6">
             <a:hlinkClick r:id="rId2" tooltip=""/>
           </p:cNvPr>
           <p:cNvSpPr/>
@@ -6545,7 +6755,7 @@
                 <a:ea typeface="Microsoft JhengHei" pitchFamily="34" charset="-122"/>
                 <a:cs typeface="Microsoft JhengHei" pitchFamily="34" charset="-120"/>
               </a:rPr>
-              <a:t>ANGPTL4 增強 PD-L1 表達。</a:t>
+              <a:t>ANGPTL4 增強 PD-L1 免疫逃逸。</a:t>
             </a:r>
             <a:endParaRPr lang="en-US" sz="1800" dirty="0"/>
           </a:p>
@@ -6587,7 +6797,7 @@
                 <a:ea typeface="Microsoft JhengHei" pitchFamily="34" charset="-122"/>
                 <a:cs typeface="Microsoft JhengHei" pitchFamily="34" charset="-120"/>
               </a:rPr>
-              <a:t>療法與抗 PD-L1 治療協同作用。</a:t>
+              <a:t>HCC 免疫治療的新策略。</a:t>
             </a:r>
             <a:endParaRPr lang="en-US" sz="1800" dirty="0"/>
           </a:p>
@@ -6595,7 +6805,43 @@
       </p:sp>
       <p:sp>
         <p:nvSpPr>
-          <p:cNvPr id="7" name="Text 5">
+          <p:cNvPr id="7" name="Text 5"/>
+          <p:cNvSpPr/>
+          <p:nvPr/>
+        </p:nvSpPr>
+        <p:spPr>
+          <a:xfrm>
+            <a:off x="731520" y="5852160"/>
+            <a:ext cx="10058400" cy="0"/>
+          </a:xfrm>
+          <a:prstGeom prst="rect">
+            <a:avLst/>
+          </a:prstGeom>
+          <a:noFill/>
+          <a:ln/>
+        </p:spPr>
+        <p:txBody>
+          <a:bodyPr wrap="square" lIns="0" tIns="0" rIns="0" bIns="0" rtlCol="0" anchor="ctr"/>
+          <a:lstStyle/>
+          <a:p>
+            <a:pPr indent="0" marL="0">
+              <a:buNone/>
+            </a:pPr>
+            <a:r>
+              <a:rPr lang="en-US" sz="800" dirty="0">
+                <a:solidFill>
+                  <a:srgbClr val="888888"/>
+                </a:solidFill>
+              </a:rPr>
+              <a:t>Lu Shounan, Ke Shanjia, Yu Hongjun et al.. Advanced science (Weinheim, Baden-Wurttemberg, Germany). 2026-04-14 DOI: 10.1002/advs.202521418</a:t>
+            </a:r>
+            <a:endParaRPr lang="en-US" sz="800" dirty="0"/>
+          </a:p>
+        </p:txBody>
+      </p:sp>
+      <p:sp>
+        <p:nvSpPr>
+          <p:cNvPr id="8" name="Text 6">
             <a:hlinkClick r:id="rId2" tooltip=""/>
           </p:cNvPr>
           <p:cNvSpPr/>
@@ -6887,7 +7133,7 @@
                 <a:ea typeface="Microsoft JhengHei" pitchFamily="34" charset="-122"/>
                 <a:cs typeface="Microsoft JhengHei" pitchFamily="34" charset="-120"/>
               </a:rPr>
-              <a:t>觀察到病毒特異性CD8 T細胞耗竭。</a:t>
+              <a:t>觀察到PD-1+ CD8 T細胞耗竭。</a:t>
             </a:r>
             <a:endParaRPr lang="en-US" sz="1800" dirty="0"/>
           </a:p>
@@ -6908,7 +7154,7 @@
                 <a:ea typeface="Microsoft JhengHei" pitchFamily="34" charset="-122"/>
                 <a:cs typeface="Microsoft JhengHei" pitchFamily="34" charset="-120"/>
               </a:rPr>
-              <a:t>激活FcγR III介導T細胞耗竭。</a:t>
+              <a:t>FcγR III介導T細胞耗竭。</a:t>
             </a:r>
             <a:endParaRPr lang="en-US" sz="1800" dirty="0"/>
           </a:p>
@@ -6929,7 +7175,7 @@
                 <a:ea typeface="Microsoft JhengHei" pitchFamily="34" charset="-122"/>
                 <a:cs typeface="Microsoft JhengHei" pitchFamily="34" charset="-120"/>
               </a:rPr>
-              <a:t>吞噬細胞是關鍵效應細胞。</a:t>
+              <a:t>吞噬細胞是主要效應細胞。</a:t>
             </a:r>
             <a:endParaRPr lang="en-US" sz="1800" dirty="0"/>
           </a:p>
@@ -6950,7 +7196,7 @@
                 <a:ea typeface="Microsoft JhengHei" pitchFamily="34" charset="-122"/>
                 <a:cs typeface="Microsoft JhengHei" pitchFamily="34" charset="-120"/>
               </a:rPr>
-              <a:t>Fc完整抗體可能妨礙肝癌治療。</a:t>
+              <a:t>研究影響肝癌治療策略。</a:t>
             </a:r>
             <a:endParaRPr lang="en-US" sz="1800" dirty="0"/>
           </a:p>
@@ -6958,7 +7204,43 @@
       </p:sp>
       <p:sp>
         <p:nvSpPr>
-          <p:cNvPr id="7" name="Text 5">
+          <p:cNvPr id="7" name="Text 5"/>
+          <p:cNvSpPr/>
+          <p:nvPr/>
+        </p:nvSpPr>
+        <p:spPr>
+          <a:xfrm>
+            <a:off x="731520" y="5852160"/>
+            <a:ext cx="10058400" cy="0"/>
+          </a:xfrm>
+          <a:prstGeom prst="rect">
+            <a:avLst/>
+          </a:prstGeom>
+          <a:noFill/>
+          <a:ln/>
+        </p:spPr>
+        <p:txBody>
+          <a:bodyPr wrap="square" lIns="0" tIns="0" rIns="0" bIns="0" rtlCol="0" anchor="ctr"/>
+          <a:lstStyle/>
+          <a:p>
+            <a:pPr indent="0" marL="0">
+              <a:buNone/>
+            </a:pPr>
+            <a:r>
+              <a:rPr lang="en-US" sz="800" dirty="0">
+                <a:solidFill>
+                  <a:srgbClr val="888888"/>
+                </a:solidFill>
+              </a:rPr>
+              <a:t>Hashimoto Masao, Nasti Tahseen H, Jin Hyun-Tak et al.. Proceedings of the National Academy of Sciences of the United States of America. 2026-04-08 DOI: 10.1073/pnas.2427192123</a:t>
+            </a:r>
+            <a:endParaRPr lang="en-US" sz="800" dirty="0"/>
+          </a:p>
+        </p:txBody>
+      </p:sp>
+      <p:sp>
+        <p:nvSpPr>
+          <p:cNvPr id="8" name="Text 6">
             <a:hlinkClick r:id="rId2" tooltip=""/>
           </p:cNvPr>
           <p:cNvSpPr/>
@@ -7250,7 +7532,7 @@
                 <a:ea typeface="Microsoft JhengHei" pitchFamily="34" charset="-122"/>
                 <a:cs typeface="Microsoft JhengHei" pitchFamily="34" charset="-120"/>
               </a:rPr>
-              <a:t>HAIC結合lenvatinib和PD-1</a:t>
+              <a:t>HAIC聯合lenvatinib和PD-1</a:t>
             </a:r>
             <a:endParaRPr lang="en-US" sz="1800" dirty="0"/>
           </a:p>
@@ -7271,7 +7553,7 @@
                 <a:ea typeface="Microsoft JhengHei" pitchFamily="34" charset="-122"/>
                 <a:cs typeface="Microsoft JhengHei" pitchFamily="34" charset="-120"/>
               </a:rPr>
-              <a:t>較單一療法有改善效果</a:t>
+              <a:t>療效優於標準治療</a:t>
             </a:r>
             <a:endParaRPr lang="en-US" sz="1800" dirty="0"/>
           </a:p>
@@ -7313,7 +7595,7 @@
                 <a:ea typeface="Microsoft JhengHei" pitchFamily="34" charset="-122"/>
                 <a:cs typeface="Microsoft JhengHei" pitchFamily="34" charset="-120"/>
               </a:rPr>
-              <a:t>解決HCC的預後不良問題</a:t>
+              <a:t>治療模式可能改變</a:t>
             </a:r>
             <a:endParaRPr lang="en-US" sz="1800" dirty="0"/>
           </a:p>
@@ -7321,7 +7603,43 @@
       </p:sp>
       <p:sp>
         <p:nvSpPr>
-          <p:cNvPr id="7" name="Text 5">
+          <p:cNvPr id="7" name="Text 5"/>
+          <p:cNvSpPr/>
+          <p:nvPr/>
+        </p:nvSpPr>
+        <p:spPr>
+          <a:xfrm>
+            <a:off x="731520" y="5852160"/>
+            <a:ext cx="10058400" cy="0"/>
+          </a:xfrm>
+          <a:prstGeom prst="rect">
+            <a:avLst/>
+          </a:prstGeom>
+          <a:noFill/>
+          <a:ln/>
+        </p:spPr>
+        <p:txBody>
+          <a:bodyPr wrap="square" lIns="0" tIns="0" rIns="0" bIns="0" rtlCol="0" anchor="ctr"/>
+          <a:lstStyle/>
+          <a:p>
+            <a:pPr indent="0" marL="0">
+              <a:buNone/>
+            </a:pPr>
+            <a:r>
+              <a:rPr lang="en-US" sz="800" dirty="0">
+                <a:solidFill>
+                  <a:srgbClr val="888888"/>
+                </a:solidFill>
+              </a:rPr>
+              <a:t>L Marzi, R Sacco, L Siciliani. …. 2026</a:t>
+            </a:r>
+            <a:endParaRPr lang="en-US" sz="800" dirty="0"/>
+          </a:p>
+        </p:txBody>
+      </p:sp>
+      <p:sp>
+        <p:nvSpPr>
+          <p:cNvPr id="8" name="Text 6">
             <a:hlinkClick r:id="rId2" tooltip=""/>
           </p:cNvPr>
           <p:cNvSpPr/>

--- a/docs/digest-zh.pptx
+++ b/docs/digest-zh.pptx
@@ -2269,7 +2269,7 @@
                   <a:srgbClr val="888888"/>
                 </a:solidFill>
               </a:rPr>
-              <a:t>2026-04-12 — 2026-04-19</a:t>
+              <a:t>2026-04-13 — 2026-04-20</a:t>
             </a:r>
             <a:endParaRPr lang="en-US" sz="1400" dirty="0"/>
           </a:p>
@@ -2460,7 +2460,7 @@
                   </a:extLst>
                 </a:hlinkClick>
               </a:rPr>
-              <a:t>… plus transarterial chemoembolization and PD-1 inhibitors as conversion therapies for unresectable intermediate-advanced hepatocellular carcinoma: a phase 2 trial …</a:t>
+              <a:t>Prognostic nutritional index and the survival of patients with hepatocellular carcinoma on immune checkpoint inhibitors: a meta-analysis</a:t>
             </a:r>
             <a:endParaRPr lang="en-US" sz="2400" dirty="0"/>
           </a:p>
@@ -2496,7 +2496,7 @@
                   <a:srgbClr val="888888"/>
                 </a:solidFill>
               </a:rPr>
-              <a:t>… and Targeted Therapy  ·  RCT Phase 2</a:t>
+              <a:t>BMC cancer  ·  Meta-Analysis</a:t>
             </a:r>
             <a:endParaRPr lang="en-US" sz="1000" dirty="0"/>
           </a:p>
@@ -2539,7 +2539,7 @@
                 <a:ea typeface="Microsoft JhengHei" pitchFamily="34" charset="-122"/>
                 <a:cs typeface="Microsoft JhengHei" pitchFamily="34" charset="-120"/>
               </a:rPr>
-              <a:t>針對不可切除的HCC的組合療法</a:t>
+              <a:t>預後營養指數(PNI)影響生存</a:t>
             </a:r>
             <a:endParaRPr lang="en-US" sz="1800" dirty="0"/>
           </a:p>
@@ -2560,7 +2560,7 @@
                 <a:ea typeface="Microsoft JhengHei" pitchFamily="34" charset="-122"/>
                 <a:cs typeface="Microsoft JhengHei" pitchFamily="34" charset="-120"/>
               </a:rPr>
-              <a:t>經動脈化療栓塞與PD-1抑制劑</a:t>
+              <a:t>HCC患者免疫治療的綜合分析</a:t>
             </a:r>
             <a:endParaRPr lang="en-US" sz="1800" dirty="0"/>
           </a:p>
@@ -2581,7 +2581,7 @@
                 <a:ea typeface="Microsoft JhengHei" pitchFamily="34" charset="-122"/>
                 <a:cs typeface="Microsoft JhengHei" pitchFamily="34" charset="-120"/>
               </a:rPr>
-              <a:t>第二期試驗結果顯示療效</a:t>
+              <a:t>營養狀態與免疫反應相關</a:t>
             </a:r>
             <a:endParaRPr lang="en-US" sz="1800" dirty="0"/>
           </a:p>
@@ -2617,7 +2617,7 @@
                   <a:srgbClr val="888888"/>
                 </a:solidFill>
               </a:rPr>
-              <a:t>X Zhang, H Cai, W Peng. … and Targeted Therapy. 2026</a:t>
+              <a:t>J Fu, W Peng, J Jiang. BMC cancer. 2026</a:t>
             </a:r>
             <a:endParaRPr lang="en-US" sz="800" dirty="0"/>
           </a:p>
@@ -2817,7 +2817,7 @@
                   </a:extLst>
                 </a:hlinkClick>
               </a:rPr>
-              <a:t>The Efficacy and Safety of Atezolizumab Plus Bevacizumab after Durvalumab Plus Tremelimumab for the Treatment of Hepatocellular Carcinoma.</a:t>
+              <a:t>Radiotherapy versus local ablation therapy for the treatment of hepatocellular carcinoma: A systematic review and meta-analysis.</a:t>
             </a:r>
             <a:endParaRPr lang="en-US" sz="2400" dirty="0"/>
           </a:p>
@@ -2853,7 +2853,7 @@
                   <a:srgbClr val="888888"/>
                 </a:solidFill>
               </a:rPr>
-              <a:t>Internal medicine (Tokyo, Japan)  ·  Retrospective Study  ·  🌏 Asia</a:t>
+              <a:t>Journal of Clinical …  ·  Meta-Analysis</a:t>
             </a:r>
             <a:endParaRPr lang="en-US" sz="1000" dirty="0"/>
           </a:p>
@@ -2896,7 +2896,7 @@
                 <a:ea typeface="Microsoft JhengHei" pitchFamily="34" charset="-122"/>
                 <a:cs typeface="Microsoft JhengHei" pitchFamily="34" charset="-120"/>
               </a:rPr>
-              <a:t>Atez+Bev 在 Dur+Tre 後有效</a:t>
+              <a:t>放射治療與局部消融比較</a:t>
             </a:r>
             <a:endParaRPr lang="en-US" sz="1800" dirty="0"/>
           </a:p>
@@ -2917,7 +2917,7 @@
                 <a:ea typeface="Microsoft JhengHei" pitchFamily="34" charset="-122"/>
                 <a:cs typeface="Microsoft JhengHei" pitchFamily="34" charset="-120"/>
               </a:rPr>
-              <a:t>客觀反應率為 25.0%</a:t>
+              <a:t>聚焦肝細胞癌治療</a:t>
             </a:r>
             <a:endParaRPr lang="en-US" sz="1800" dirty="0"/>
           </a:p>
@@ -2938,7 +2938,49 @@
                 <a:ea typeface="Microsoft JhengHei" pitchFamily="34" charset="-122"/>
                 <a:cs typeface="Microsoft JhengHei" pitchFamily="34" charset="-120"/>
               </a:rPr>
-              <a:t>不良事件在兩組不同</a:t>
+              <a:t>分析局部無進展生存期</a:t>
+            </a:r>
+            <a:endParaRPr lang="en-US" sz="1800" dirty="0"/>
+          </a:p>
+          <a:p>
+            <a:pPr marL="342900" indent="-342900">
+              <a:spcAft>
+                <a:spcPts val="800"/>
+              </a:spcAft>
+              <a:buSzPct val="100000"/>
+              <a:buChar char="•"/>
+            </a:pPr>
+            <a:r>
+              <a:rPr lang="en-US" sz="1800" dirty="0">
+                <a:solidFill>
+                  <a:srgbClr val="333333"/>
+                </a:solidFill>
+                <a:latin typeface="Microsoft JhengHei" pitchFamily="34" charset="0"/>
+                <a:ea typeface="Microsoft JhengHei" pitchFamily="34" charset="-122"/>
+                <a:cs typeface="Microsoft JhengHei" pitchFamily="34" charset="-120"/>
+              </a:rPr>
+              <a:t>包含射頻與微波消融</a:t>
+            </a:r>
+            <a:endParaRPr lang="en-US" sz="1800" dirty="0"/>
+          </a:p>
+          <a:p>
+            <a:pPr marL="342900" indent="-342900">
+              <a:spcAft>
+                <a:spcPts val="800"/>
+              </a:spcAft>
+              <a:buSzPct val="100000"/>
+              <a:buChar char="•"/>
+            </a:pPr>
+            <a:r>
+              <a:rPr lang="en-US" sz="1800" dirty="0">
+                <a:solidFill>
+                  <a:srgbClr val="333333"/>
+                </a:solidFill>
+                <a:latin typeface="Microsoft JhengHei" pitchFamily="34" charset="0"/>
+                <a:ea typeface="Microsoft JhengHei" pitchFamily="34" charset="-122"/>
+                <a:cs typeface="Microsoft JhengHei" pitchFamily="34" charset="-120"/>
+              </a:rPr>
+              <a:t>進行系統性回顧與綜合分析</a:t>
             </a:r>
             <a:endParaRPr lang="en-US" sz="1800" dirty="0"/>
           </a:p>
@@ -2974,7 +3016,7 @@
                   <a:srgbClr val="888888"/>
                 </a:solidFill>
               </a:rPr>
-              <a:t>Uchikawa Shinsuke, Kawaoka Tomokazu, Tanaka Aiko et al.. Internal medicine (Tokyo, Japan). 2026-04-16 DOI: 10.2169/internalmedicine.6021-25</a:t>
+              <a:t>SH Bae, SH Choi, SM Yoon. Journal of Clinical …. 2026</a:t>
             </a:r>
             <a:endParaRPr lang="en-US" sz="800" dirty="0"/>
           </a:p>
@@ -3174,7 +3216,7 @@
                   </a:extLst>
                 </a:hlinkClick>
               </a:rPr>
-              <a:t>Radiotherapy versus local ablation therapy for the treatment of hepatocellular carcinoma: A systematic review and meta-analysis.</a:t>
+              <a:t>… on interventional therapy and immune checkpoint inhibitors (ICIs) in patients with intermediate-and advanced-stage hepatocellular carcinoma: a systematic review …</a:t>
             </a:r>
             <a:endParaRPr lang="en-US" sz="2400" dirty="0"/>
           </a:p>
@@ -3210,7 +3252,7 @@
                   <a:srgbClr val="888888"/>
                 </a:solidFill>
               </a:rPr>
-              <a:t>Journal of Clinical …  ·  Meta-Analysis</a:t>
+              <a:t>… , Immunotherapy  ·  Systematic Review</a:t>
             </a:r>
             <a:endParaRPr lang="en-US" sz="1000" dirty="0"/>
           </a:p>
@@ -3253,7 +3295,7 @@
                 <a:ea typeface="Microsoft JhengHei" pitchFamily="34" charset="-122"/>
                 <a:cs typeface="Microsoft JhengHei" pitchFamily="34" charset="-120"/>
               </a:rPr>
-              <a:t>放射治療與局部消融比較</a:t>
+              <a:t>聯合療法顯示出希望的結果。</a:t>
             </a:r>
             <a:endParaRPr lang="en-US" sz="1800" dirty="0"/>
           </a:p>
@@ -3274,7 +3316,7 @@
                 <a:ea typeface="Microsoft JhengHei" pitchFamily="34" charset="-122"/>
                 <a:cs typeface="Microsoft JhengHei" pitchFamily="34" charset="-120"/>
               </a:rPr>
-              <a:t>針對肝細胞癌治療</a:t>
+              <a:t>ICIs 增強 HCC 的免疫反應。</a:t>
             </a:r>
             <a:endParaRPr lang="en-US" sz="1800" dirty="0"/>
           </a:p>
@@ -3295,49 +3337,7 @@
                 <a:ea typeface="Microsoft JhengHei" pitchFamily="34" charset="-122"/>
                 <a:cs typeface="Microsoft JhengHei" pitchFamily="34" charset="-120"/>
               </a:rPr>
-              <a:t>分析局部無進展生存期</a:t>
-            </a:r>
-            <a:endParaRPr lang="en-US" sz="1800" dirty="0"/>
-          </a:p>
-          <a:p>
-            <a:pPr marL="342900" indent="-342900">
-              <a:spcAft>
-                <a:spcPts val="800"/>
-              </a:spcAft>
-              <a:buSzPct val="100000"/>
-              <a:buChar char="•"/>
-            </a:pPr>
-            <a:r>
-              <a:rPr lang="en-US" sz="1800" dirty="0">
-                <a:solidFill>
-                  <a:srgbClr val="333333"/>
-                </a:solidFill>
-                <a:latin typeface="Microsoft JhengHei" pitchFamily="34" charset="0"/>
-                <a:ea typeface="Microsoft JhengHei" pitchFamily="34" charset="-122"/>
-                <a:cs typeface="Microsoft JhengHei" pitchFamily="34" charset="-120"/>
-              </a:rPr>
-              <a:t>包含射頻與微波消融</a:t>
-            </a:r>
-            <a:endParaRPr lang="en-US" sz="1800" dirty="0"/>
-          </a:p>
-          <a:p>
-            <a:pPr marL="342900" indent="-342900">
-              <a:spcAft>
-                <a:spcPts val="800"/>
-              </a:spcAft>
-              <a:buSzPct val="100000"/>
-              <a:buChar char="•"/>
-            </a:pPr>
-            <a:r>
-              <a:rPr lang="en-US" sz="1800" dirty="0">
-                <a:solidFill>
-                  <a:srgbClr val="333333"/>
-                </a:solidFill>
-                <a:latin typeface="Microsoft JhengHei" pitchFamily="34" charset="0"/>
-                <a:ea typeface="Microsoft JhengHei" pitchFamily="34" charset="-122"/>
-                <a:cs typeface="Microsoft JhengHei" pitchFamily="34" charset="-120"/>
-              </a:rPr>
-              <a:t>進行系統性回顧與統合分析</a:t>
+              <a:t>介入療法改善患者預後。</a:t>
             </a:r>
             <a:endParaRPr lang="en-US" sz="1800" dirty="0"/>
           </a:p>
@@ -3373,7 +3373,7 @@
                   <a:srgbClr val="888888"/>
                 </a:solidFill>
               </a:rPr>
-              <a:t>SH Bae, SH Choi, SM Yoon. Journal of Clinical …. 2026</a:t>
+              <a:t>J Su, Y Su, R Mai. … , Immunotherapy. 2026</a:t>
             </a:r>
             <a:endParaRPr lang="en-US" sz="800" dirty="0"/>
           </a:p>
@@ -3590,7 +3590,7 @@
                   <a:srgbClr val="FFFFFF"/>
                 </a:solidFill>
               </a:rPr>
-              <a:t>1. **免疫治療的潛力**  </a:t>
+              <a:t>1. **癌症的標誌與治療的關聯性**  </a:t>
             </a:r>
             <a:endParaRPr lang="en-US" sz="1200" dirty="0"/>
           </a:p>
@@ -3607,7 +3607,7 @@
                   <a:srgbClr val="FFFFFF"/>
                 </a:solidFill>
               </a:rPr>
-              <a:t>   The integration of immune therapy with traditional treatments, such as surgical resection and local ablation, shows promise in enhancing patient outcomes in hepatocellular carcinoma (HCC).  </a:t>
+              <a:t>   The hallmarks of cancer provide a comprehensive framework for understanding hepatocellular carcinoma (HCC) and guiding therapeutic strategies.  </a:t>
             </a:r>
             <a:endParaRPr lang="en-US" sz="1200" dirty="0"/>
           </a:p>
@@ -3624,7 +3624,7 @@
                   <a:srgbClr val="FFFFFF"/>
                 </a:solidFill>
               </a:rPr>
-              <a:t>   免疫治療與傳統療法（如手術切除和局部消融）的結合顯示出改善肝細胞癌（HCC）患者預後的潛力。</a:t>
+              <a:t>   癌症的標誌為理解肝細胞癌（HCC）及指導治療策略提供了全面的框架。</a:t>
             </a:r>
             <a:endParaRPr lang="en-US" sz="1200" dirty="0"/>
           </a:p>
@@ -3650,7 +3650,7 @@
                   <a:srgbClr val="FFFFFF"/>
                 </a:solidFill>
               </a:rPr>
-              <a:t>2. **腫瘤微環境的重塑**  </a:t>
+              <a:t>2. **免疫治療的潛力與挑戰**  </a:t>
             </a:r>
             <a:endParaRPr lang="en-US" sz="1200" dirty="0"/>
           </a:p>
@@ -3667,7 +3667,7 @@
                   <a:srgbClr val="FFFFFF"/>
                 </a:solidFill>
               </a:rPr>
-              <a:t>   Neoadjuvant therapies that remodel the tumor microenvironment can significantly improve the efficacy of subsequent immune treatments, suggesting a need for early intervention strategies.  </a:t>
+              <a:t>   Neoadjuvant immune therapy shows promise in remodeling the tumor microenvironment, yet its optimal application in early-stage HCC remains to be established.  </a:t>
             </a:r>
             <a:endParaRPr lang="en-US" sz="1200" dirty="0"/>
           </a:p>
@@ -3684,7 +3684,7 @@
                   <a:srgbClr val="FFFFFF"/>
                 </a:solidFill>
               </a:rPr>
-              <a:t>   重塑腫瘤微環境的術前療法可以顯著提高隨後免疫治療的療效，這表明需要早期介入策略。</a:t>
+              <a:t>   新輔助免疫治療在重塑腫瘤微環境方面顯示出潛力，但其在早期HCC中的最佳應用仍需確立。</a:t>
             </a:r>
             <a:endParaRPr lang="en-US" sz="1200" dirty="0"/>
           </a:p>
@@ -3727,7 +3727,7 @@
                   <a:srgbClr val="FFFFFF"/>
                 </a:solidFill>
               </a:rPr>
-              <a:t>   Cancer-associated fibroblasts (CAFs) play a crucial role in promoting immunosuppression in HCC, highlighting the importance of targeting these cells to enhance immune responses.  </a:t>
+              <a:t>   Cancer-associated fibroblasts (CAFs) are crucial in promoting immunosuppression in HCC through metabolic pathways, highlighting new therapeutic targets.  </a:t>
             </a:r>
             <a:endParaRPr lang="en-US" sz="1200" dirty="0"/>
           </a:p>
@@ -3744,7 +3744,7 @@
                   <a:srgbClr val="FFFFFF"/>
                 </a:solidFill>
               </a:rPr>
-              <a:t>   癌症相關成纖維細胞（CAFs）在促進HCC中的免疫抑制方面扮演著關鍵角色，強調了針對這些細胞以增強免疫反應的重要性。</a:t>
+              <a:t>   癌症相關成纖維細胞（CAFs）在HCC中透過代謝途徑促進免疫抑制，突顯了新的治療靶點。</a:t>
             </a:r>
             <a:endParaRPr lang="en-US" sz="1200" dirty="0"/>
           </a:p>
@@ -3770,7 +3770,7 @@
                   <a:srgbClr val="FFFFFF"/>
                 </a:solidFill>
               </a:rPr>
-              <a:t>4. **病毒特異性T細胞的耗竭**  </a:t>
+              <a:t>4. **手術後復發的挑戰**  </a:t>
             </a:r>
             <a:endParaRPr lang="en-US" sz="1200" dirty="0"/>
           </a:p>
@@ -3787,7 +3787,7 @@
                   <a:srgbClr val="FFFFFF"/>
                 </a:solidFill>
               </a:rPr>
-              <a:t>   The selective depletion of virus-specific CD8 T cells during PD-1 therapy underscores the complexity of immune responses in chronic infections and their implications for HCC treatment.  </a:t>
+              <a:t>   Postoperative recurrence in HCC remains a significant clinical challenge, necessitating further exploration of underlying mechanisms and therapeutic strategies.  </a:t>
             </a:r>
             <a:endParaRPr lang="en-US" sz="1200" dirty="0"/>
           </a:p>
@@ -3804,7 +3804,7 @@
                   <a:srgbClr val="FFFFFF"/>
                 </a:solidFill>
               </a:rPr>
-              <a:t>   在PD-1治療過程中病毒特異性CD8 T細胞的選擇性耗竭突顯了慢性感染中免疫反應的複雜性及其對HCC治療的影響。</a:t>
+              <a:t>   HCC的手術後復發仍然是一個重大臨床挑戰，需要進一步探索其潛在機制和治療策略。</a:t>
             </a:r>
             <a:endParaRPr lang="en-US" sz="1200" dirty="0"/>
           </a:p>
@@ -3830,7 +3830,7 @@
                   <a:srgbClr val="FFFFFF"/>
                 </a:solidFill>
               </a:rPr>
-              <a:t>5. **多模式療法的必要性**  </a:t>
+              <a:t>5. **結合治療的前景**  </a:t>
             </a:r>
             <a:endParaRPr lang="en-US" sz="1200" dirty="0"/>
           </a:p>
@@ -3847,7 +3847,7 @@
                   <a:srgbClr val="FFFFFF"/>
                 </a:solidFill>
               </a:rPr>
-              <a:t>   The combination of various treatment modalities, such as transarterial chemoembolization (TACE) with immune inhibitors, indicates a shift towards more comprehensive treatment approaches for unresectable HCC.</a:t>
+              <a:t>   Combining interventional therapies with immune checkpoint inhibitors may enhance treatment outcomes in advanced HCC, warranting further investigation.</a:t>
             </a:r>
             <a:endParaRPr lang="en-US" sz="1200" dirty="0"/>
           </a:p>
@@ -3993,7 +3993,7 @@
                   <a:srgbClr val="FFFFFF"/>
                 </a:solidFill>
               </a:rPr>
-              <a:t>將各種治療模式結合使用（如將經動脈化療栓塞（TACE）與免疫抑制劑結合）表明了對無法切除的HCC採取更全面治療方法的趨勢。</a:t>
+              <a:t>將介入治療與免疫檢查點抑制劑結合可能提高晚期HCC的治療效果，值得進一步研究。</a:t>
             </a:r>
             <a:endParaRPr lang="en-US" sz="1200" dirty="0"/>
           </a:p>
@@ -4045,7 +4045,7 @@
                   <a:srgbClr val="FFFFFF"/>
                 </a:solidFill>
               </a:rPr>
-              <a:t>1. **早期免疫治療的優化**  </a:t>
+              <a:t>1. **早期階段免疫治療的最佳化**  </a:t>
             </a:r>
             <a:endParaRPr lang="en-US" sz="1200" dirty="0"/>
           </a:p>
@@ -4062,7 +4062,7 @@
                   <a:srgbClr val="FFFFFF"/>
                 </a:solidFill>
               </a:rPr>
-              <a:t>   Future studies should focus on optimizing the timing and combination of immune therapies in early-stage HCC to maximize treatment efficacy.  </a:t>
+              <a:t>   Investigate the optimal timing and combinations of immune therapies in early-stage HCC to maximize patient outcomes.  </a:t>
             </a:r>
             <a:endParaRPr lang="en-US" sz="1200" dirty="0"/>
           </a:p>
@@ -4079,7 +4079,7 @@
                   <a:srgbClr val="FFFFFF"/>
                 </a:solidFill>
               </a:rPr>
-              <a:t>   未來的研究應集中於優化早期HCC中免疫治療的時機和組合，以最大化治療效果。</a:t>
+              <a:t>   探討早期HCC中免疫治療的最佳時機和組合，以最大化患者的治療效果。</a:t>
             </a:r>
             <a:endParaRPr lang="en-US" sz="1200" dirty="0"/>
           </a:p>
@@ -4105,7 +4105,7 @@
                   <a:srgbClr val="FFFFFF"/>
                 </a:solidFill>
               </a:rPr>
-              <a:t>2. **癌症相關成纖維細胞的靶向治療**  </a:t>
+              <a:t>2. **靶向癌症相關成纖維細胞的療法**  </a:t>
             </a:r>
             <a:endParaRPr lang="en-US" sz="1200" dirty="0"/>
           </a:p>
@@ -4122,7 +4122,7 @@
                   <a:srgbClr val="FFFFFF"/>
                 </a:solidFill>
               </a:rPr>
-              <a:t>   Investigating targeted therapies against CAFs and their metabolic pathways may provide new avenues for enhancing anti-tumor immunity in HCC.  </a:t>
+              <a:t>   Develop targeted therapies against CAFs to mitigate their immunosuppressive effects in HCC and improve treatment efficacy.  </a:t>
             </a:r>
             <a:endParaRPr lang="en-US" sz="1200" dirty="0"/>
           </a:p>
@@ -4139,7 +4139,7 @@
                   <a:srgbClr val="FFFFFF"/>
                 </a:solidFill>
               </a:rPr>
-              <a:t>   研究針對CAFs及其代謝途徑的靶向療法可能為增強HCC中的抗腫瘤免疫提供新的途徑。</a:t>
+              <a:t>   開發針對CAFs的靶向療法，以減少其在HCC中的免疫抑制作用，並提高治療效果。</a:t>
             </a:r>
             <a:endParaRPr lang="en-US" sz="1200" dirty="0"/>
           </a:p>
@@ -4165,7 +4165,7 @@
                   <a:srgbClr val="FFFFFF"/>
                 </a:solidFill>
               </a:rPr>
-              <a:t>3. **多模式療法的臨床試驗**  </a:t>
+              <a:t>3. **探索腫瘤微環境的調控**  </a:t>
             </a:r>
             <a:endParaRPr lang="en-US" sz="1200" dirty="0"/>
           </a:p>
@@ -4182,7 +4182,7 @@
                   <a:srgbClr val="FFFFFF"/>
                 </a:solidFill>
               </a:rPr>
-              <a:t>   Conducting clinical trials that evaluate the efficacy of combined therapies, including immune checkpoint inhibitors and local ablation techniques, is essential for establishing best practices.  </a:t>
+              <a:t>   Further research on the tumor microenvironment's role in HCC progression and response to therapies, focusing on metabolic and immune interactions.  </a:t>
             </a:r>
             <a:endParaRPr lang="en-US" sz="1200" dirty="0"/>
           </a:p>
@@ -4199,7 +4199,7 @@
                   <a:srgbClr val="FFFFFF"/>
                 </a:solidFill>
               </a:rPr>
-              <a:t>   開展評估包括免疫檢查點抑制劑和局部消融技術的聯合療法有效性的臨床試驗對於建立最佳實踐至關重要。</a:t>
+              <a:t>   進一步研究腫瘤微環境在HCC進展和治療反應中的作用，重點關注代謝和免疫相互作用。</a:t>
             </a:r>
             <a:endParaRPr lang="en-US" sz="1200" dirty="0"/>
           </a:p>
@@ -4225,7 +4225,7 @@
                   <a:srgbClr val="FFFFFF"/>
                 </a:solidFill>
               </a:rPr>
-              <a:t>4. **腫瘤微環境的深入研究**  </a:t>
+              <a:t>4. **多模態治療策略的評估**  </a:t>
             </a:r>
             <a:endParaRPr lang="en-US" sz="1200" dirty="0"/>
           </a:p>
@@ -4242,7 +4242,7 @@
                   <a:srgbClr val="FFFFFF"/>
                 </a:solidFill>
               </a:rPr>
-              <a:t>   Further research into the tumor microenvironment and its interactions with immune cells can unveil new therapeutic targets and strategies for HCC treatment.  </a:t>
+              <a:t>   Evaluate the efficacy of multimodal treatment strategies combining surgery, ablation, and immunotherapy in improving survival rates in HCC.  </a:t>
             </a:r>
             <a:endParaRPr lang="en-US" sz="1200" dirty="0"/>
           </a:p>
@@ -4259,7 +4259,7 @@
                   <a:srgbClr val="FFFFFF"/>
                 </a:solidFill>
               </a:rPr>
-              <a:t>   對腫瘤微環境及其與免疫細胞的相互作用的深入研究可以揭示HCC治療的新療法靶點和策略。</a:t>
+              <a:t>   評估結合手術、消融和免疫治療的多模態治療策略在提高HCC生存率方面的有效性。</a:t>
             </a:r>
             <a:endParaRPr lang="en-US" sz="1200" dirty="0"/>
           </a:p>
@@ -4285,7 +4285,7 @@
                   <a:srgbClr val="FFFFFF"/>
                 </a:solidFill>
               </a:rPr>
-              <a:t>5. **長期療效與耐藥性研究**  </a:t>
+              <a:t>5. **個體化治療的發展**  </a:t>
             </a:r>
             <a:endParaRPr lang="en-US" sz="1200" dirty="0"/>
           </a:p>
@@ -4302,7 +4302,7 @@
                   <a:srgbClr val="FFFFFF"/>
                 </a:solidFill>
               </a:rPr>
-              <a:t>   Investigating the long-term effects and potential resistance mechanisms associated with current immunotherapies will be crucial for improving patient outcomes in HCC.  </a:t>
+              <a:t>   Explore personalized medicine approaches based on genetic and immunological profiling to tailor therapies for HCC patients.  </a:t>
             </a:r>
             <a:endParaRPr lang="en-US" sz="1200" dirty="0"/>
           </a:p>
@@ -4319,7 +4319,7 @@
                   <a:srgbClr val="FFFFFF"/>
                 </a:solidFill>
               </a:rPr>
-              <a:t>   研究目前免疫療法的長期效果及潛在的耐藥機制對於改善HCC患者的預後至關重要。</a:t>
+              <a:t>   探索基於基因和免疫學特徵的個體化治療方法，以為HCC患者量身定制療法。</a:t>
             </a:r>
             <a:endParaRPr lang="en-US" sz="1200" dirty="0"/>
           </a:p>
@@ -4814,7 +4814,7 @@
                 <a:ea typeface="Arial" pitchFamily="34" charset="-122"/>
                 <a:cs typeface="Arial" pitchFamily="34" charset="-120"/>
               </a:rPr>
-              <a:t>Immunotherapy in Hepatocellular Carcinoma with Portal Vein Tumour Thrombosis: Fr…</a:t>
+              <a:t>… plus transarterial chemoembolization and PD-1 inhibitors as conversion therapi…</a:t>
             </a:r>
             <a:endParaRPr lang="en-US" sz="1400" dirty="0"/>
           </a:p>
@@ -4851,7 +4851,7 @@
                 <a:ea typeface="Arial" pitchFamily="34" charset="-122"/>
                 <a:cs typeface="Arial" pitchFamily="34" charset="-120"/>
               </a:rPr>
-              <a:t>… plus transarterial chemoembolization and PD-1 inhibitors as conversion therapi…</a:t>
+              <a:t>Prognostic nutritional index and the survival of patients with hepatocellular ca…</a:t>
             </a:r>
             <a:endParaRPr lang="en-US" sz="1400" dirty="0"/>
           </a:p>
@@ -4888,7 +4888,7 @@
                 <a:ea typeface="Arial" pitchFamily="34" charset="-122"/>
                 <a:cs typeface="Arial" pitchFamily="34" charset="-120"/>
               </a:rPr>
-              <a:t>The Efficacy and Safety of Atezolizumab Plus Bevacizumab after Durvalumab Plus T…</a:t>
+              <a:t>Radiotherapy versus local ablation therapy for the treatment of hepatocellular c…</a:t>
             </a:r>
             <a:endParaRPr lang="en-US" sz="1400" dirty="0"/>
           </a:p>
@@ -4925,7 +4925,7 @@
                 <a:ea typeface="Arial" pitchFamily="34" charset="-122"/>
                 <a:cs typeface="Arial" pitchFamily="34" charset="-120"/>
               </a:rPr>
-              <a:t>Radiotherapy versus local ablation therapy for the treatment of hepatocellular c…</a:t>
+              <a:t>… on interventional therapy and immune checkpoint inhibitors (ICIs) in patients …</a:t>
             </a:r>
             <a:endParaRPr lang="en-US" sz="1400" dirty="0"/>
           </a:p>
@@ -5180,7 +5180,7 @@
                 <a:ea typeface="Microsoft JhengHei" pitchFamily="34" charset="-122"/>
                 <a:cs typeface="Microsoft JhengHei" pitchFamily="34" charset="-120"/>
               </a:rPr>
-              <a:t>HCC展現獨特免疫逃逸特徵。</a:t>
+              <a:t>HCC顯示獨特增殖信號。</a:t>
             </a:r>
             <a:endParaRPr lang="en-US" sz="1800" dirty="0"/>
           </a:p>
@@ -5201,7 +5201,7 @@
                 <a:ea typeface="Microsoft JhengHei" pitchFamily="34" charset="-122"/>
                 <a:cs typeface="Microsoft JhengHei" pitchFamily="34" charset="-120"/>
               </a:rPr>
-              <a:t>免疫治療改善晚期HCC預後。</a:t>
+              <a:t>免疫治療改善晚期HCC結果。</a:t>
             </a:r>
             <a:endParaRPr lang="en-US" sz="1800" dirty="0"/>
           </a:p>
@@ -5243,7 +5243,7 @@
                 <a:ea typeface="Microsoft JhengHei" pitchFamily="34" charset="-122"/>
                 <a:cs typeface="Microsoft JhengHei" pitchFamily="34" charset="-120"/>
               </a:rPr>
-              <a:t>精準醫療惠及iCCA患者。</a:t>
+              <a:t>精準醫療針對iCCA突變。</a:t>
             </a:r>
             <a:endParaRPr lang="en-US" sz="1800" dirty="0"/>
           </a:p>
@@ -5558,7 +5558,7 @@
                 <a:ea typeface="Microsoft JhengHei" pitchFamily="34" charset="-122"/>
                 <a:cs typeface="Microsoft JhengHei" pitchFamily="34" charset="-120"/>
               </a:rPr>
-              <a:t>測試新輔助SBRT加免疫療法</a:t>
+              <a:t>採用新輔助SBRT加免疫療法。</a:t>
             </a:r>
             <a:endParaRPr lang="en-US" sz="1800" dirty="0"/>
           </a:p>
@@ -5579,7 +5579,7 @@
                 <a:ea typeface="Microsoft JhengHei" pitchFamily="34" charset="-122"/>
                 <a:cs typeface="Microsoft JhengHei" pitchFamily="34" charset="-120"/>
               </a:rPr>
-              <a:t>進行8名患者的初步研究</a:t>
+              <a:t>8名可切除HCC患者的初步研究。</a:t>
             </a:r>
             <a:endParaRPr lang="en-US" sz="1800" dirty="0"/>
           </a:p>
@@ -5600,7 +5600,7 @@
                 <a:ea typeface="Microsoft JhengHei" pitchFamily="34" charset="-122"/>
                 <a:cs typeface="Microsoft JhengHei" pitchFamily="34" charset="-120"/>
               </a:rPr>
-              <a:t>安全性端點：低級別3-4不良事件</a:t>
+              <a:t>安全性確認，低級別3不良事件。</a:t>
             </a:r>
             <a:endParaRPr lang="en-US" sz="1800" dirty="0"/>
           </a:p>
@@ -5621,7 +5621,7 @@
                 <a:ea typeface="Microsoft JhengHei" pitchFamily="34" charset="-122"/>
                 <a:cs typeface="Microsoft JhengHei" pitchFamily="34" charset="-120"/>
               </a:rPr>
-              <a:t>所有切除患者無復發</a:t>
+              <a:t>所有患者均達到R0手術切除。</a:t>
             </a:r>
             <a:endParaRPr lang="en-US" sz="1800" dirty="0"/>
           </a:p>
@@ -5642,7 +5642,7 @@
                 <a:ea typeface="Microsoft JhengHei" pitchFamily="34" charset="-122"/>
                 <a:cs typeface="Microsoft JhengHei" pitchFamily="34" charset="-120"/>
               </a:rPr>
-              <a:t>觀察到增強抗癌免疫浸潤</a:t>
+              <a:t>治療後觀察到顯著免疫重塑。</a:t>
             </a:r>
             <a:endParaRPr lang="en-US" sz="1800" dirty="0"/>
           </a:p>
@@ -5978,7 +5978,7 @@
                 <a:ea typeface="Microsoft JhengHei" pitchFamily="34" charset="-122"/>
                 <a:cs typeface="Microsoft JhengHei" pitchFamily="34" charset="-120"/>
               </a:rPr>
-              <a:t>使用小鼠模型進行研究</a:t>
+              <a:t>輔助治療效果不同</a:t>
             </a:r>
             <a:endParaRPr lang="en-US" sz="1800" dirty="0"/>
           </a:p>
@@ -6314,7 +6314,7 @@
                 <a:ea typeface="Microsoft JhengHei" pitchFamily="34" charset="-122"/>
                 <a:cs typeface="Microsoft JhengHei" pitchFamily="34" charset="-120"/>
               </a:rPr>
-              <a:t>Lactobacillus johnsonii 增強 CD8+ T 細胞擴增。</a:t>
+              <a:t>Lactobacillus johnsonii 增加 IFNγ+PD-1+CD8+ T 細胞。</a:t>
             </a:r>
             <a:endParaRPr lang="en-US" sz="1800" dirty="0"/>
           </a:p>
@@ -6335,7 +6335,7 @@
                 <a:ea typeface="Microsoft JhengHei" pitchFamily="34" charset="-122"/>
                 <a:cs typeface="Microsoft JhengHei" pitchFamily="34" charset="-120"/>
               </a:rPr>
-              <a:t>高 Lactobacillus 與無復發生存相關。</a:t>
+              <a:t>尼古丁酸擴展細胞毒性 T 細胞。</a:t>
             </a:r>
             <a:endParaRPr lang="en-US" sz="1800" dirty="0"/>
           </a:p>
@@ -6356,49 +6356,7 @@
                 <a:ea typeface="Microsoft JhengHei" pitchFamily="34" charset="-122"/>
                 <a:cs typeface="Microsoft JhengHei" pitchFamily="34" charset="-120"/>
               </a:rPr>
-              <a:t>Nicotinic acid 促進 T 細胞 NF-κB 活化。</a:t>
-            </a:r>
-            <a:endParaRPr lang="en-US" sz="1800" dirty="0"/>
-          </a:p>
-          <a:p>
-            <a:pPr marL="342900" indent="-342900">
-              <a:spcAft>
-                <a:spcPts val="800"/>
-              </a:spcAft>
-              <a:buSzPct val="100000"/>
-              <a:buChar char="•"/>
-            </a:pPr>
-            <a:r>
-              <a:rPr lang="en-US" sz="1800" dirty="0">
-                <a:solidFill>
-                  <a:srgbClr val="333333"/>
-                </a:solidFill>
-                <a:latin typeface="Microsoft JhengHei" pitchFamily="34" charset="0"/>
-                <a:ea typeface="Microsoft JhengHei" pitchFamily="34" charset="-122"/>
-                <a:cs typeface="Microsoft JhengHei" pitchFamily="34" charset="-120"/>
-              </a:rPr>
-              <a:t>聯合療法有效減少腫瘤復發。</a:t>
-            </a:r>
-            <a:endParaRPr lang="en-US" sz="1800" dirty="0"/>
-          </a:p>
-          <a:p>
-            <a:pPr marL="342900" indent="-342900">
-              <a:spcAft>
-                <a:spcPts val="800"/>
-              </a:spcAft>
-              <a:buSzPct val="100000"/>
-              <a:buChar char="•"/>
-            </a:pPr>
-            <a:r>
-              <a:rPr lang="en-US" sz="1800" dirty="0">
-                <a:solidFill>
-                  <a:srgbClr val="333333"/>
-                </a:solidFill>
-                <a:latin typeface="Microsoft JhengHei" pitchFamily="34" charset="0"/>
-                <a:ea typeface="Microsoft JhengHei" pitchFamily="34" charset="-122"/>
-                <a:cs typeface="Microsoft JhengHei" pitchFamily="34" charset="-120"/>
-              </a:rPr>
-              <a:t>CD8+ T 細胞對抗腫瘤療效至關重要。</a:t>
+              <a:t>聯合療法顯著降低腫瘤復發。</a:t>
             </a:r>
             <a:endParaRPr lang="en-US" sz="1800" dirty="0"/>
           </a:p>
@@ -6713,7 +6671,7 @@
                 <a:ea typeface="Microsoft JhengHei" pitchFamily="34" charset="-122"/>
                 <a:cs typeface="Microsoft JhengHei" pitchFamily="34" charset="-120"/>
               </a:rPr>
-              <a:t>CAFs 驅動 HCC 免疫抑制。</a:t>
+              <a:t>CAFs 促進 HCC 的免疫抑制。</a:t>
             </a:r>
             <a:endParaRPr lang="en-US" sz="1800" dirty="0"/>
           </a:p>
@@ -6755,49 +6713,7 @@
                 <a:ea typeface="Microsoft JhengHei" pitchFamily="34" charset="-122"/>
                 <a:cs typeface="Microsoft JhengHei" pitchFamily="34" charset="-120"/>
               </a:rPr>
-              <a:t>ANGPTL4 增強 PD-L1 免疫逃逸。</a:t>
-            </a:r>
-            <a:endParaRPr lang="en-US" sz="1800" dirty="0"/>
-          </a:p>
-          <a:p>
-            <a:pPr marL="342900" indent="-342900">
-              <a:spcAft>
-                <a:spcPts val="800"/>
-              </a:spcAft>
-              <a:buSzPct val="100000"/>
-              <a:buChar char="•"/>
-            </a:pPr>
-            <a:r>
-              <a:rPr lang="en-US" sz="1800" dirty="0">
-                <a:solidFill>
-                  <a:srgbClr val="333333"/>
-                </a:solidFill>
-                <a:latin typeface="Microsoft JhengHei" pitchFamily="34" charset="0"/>
-                <a:ea typeface="Microsoft JhengHei" pitchFamily="34" charset="-122"/>
-                <a:cs typeface="Microsoft JhengHei" pitchFamily="34" charset="-120"/>
-              </a:rPr>
-              <a:t>靶向 NNMT-ANGPTL4 恢復 T 細胞活性。</a:t>
-            </a:r>
-            <a:endParaRPr lang="en-US" sz="1800" dirty="0"/>
-          </a:p>
-          <a:p>
-            <a:pPr marL="342900" indent="-342900">
-              <a:spcAft>
-                <a:spcPts val="800"/>
-              </a:spcAft>
-              <a:buSzPct val="100000"/>
-              <a:buChar char="•"/>
-            </a:pPr>
-            <a:r>
-              <a:rPr lang="en-US" sz="1800" dirty="0">
-                <a:solidFill>
-                  <a:srgbClr val="333333"/>
-                </a:solidFill>
-                <a:latin typeface="Microsoft JhengHei" pitchFamily="34" charset="0"/>
-                <a:ea typeface="Microsoft JhengHei" pitchFamily="34" charset="-122"/>
-                <a:cs typeface="Microsoft JhengHei" pitchFamily="34" charset="-120"/>
-              </a:rPr>
-              <a:t>HCC 免疫治療的新策略。</a:t>
+              <a:t>ANGPTL4 增強腫瘤免疫逃逸。</a:t>
             </a:r>
             <a:endParaRPr lang="en-US" sz="1800" dirty="0"/>
           </a:p>
@@ -7133,7 +7049,7 @@
                 <a:ea typeface="Microsoft JhengHei" pitchFamily="34" charset="-122"/>
                 <a:cs typeface="Microsoft JhengHei" pitchFamily="34" charset="-120"/>
               </a:rPr>
-              <a:t>觀察到PD-1+ CD8 T細胞耗竭。</a:t>
+              <a:t>選擇性耗竭病毒特異性CD8 T細胞。</a:t>
             </a:r>
             <a:endParaRPr lang="en-US" sz="1800" dirty="0"/>
           </a:p>
@@ -7154,7 +7070,7 @@
                 <a:ea typeface="Microsoft JhengHei" pitchFamily="34" charset="-122"/>
                 <a:cs typeface="Microsoft JhengHei" pitchFamily="34" charset="-120"/>
               </a:rPr>
-              <a:t>FcγR III介導T細胞耗竭。</a:t>
+              <a:t>耗竭由激活性FcγR III介導。</a:t>
             </a:r>
             <a:endParaRPr lang="en-US" sz="1800" dirty="0"/>
           </a:p>
@@ -7175,7 +7091,7 @@
                 <a:ea typeface="Microsoft JhengHei" pitchFamily="34" charset="-122"/>
                 <a:cs typeface="Microsoft JhengHei" pitchFamily="34" charset="-120"/>
               </a:rPr>
-              <a:t>吞噬細胞是主要效應細胞。</a:t>
+              <a:t>吞噬細胞是關鍵效應細胞。</a:t>
             </a:r>
             <a:endParaRPr lang="en-US" sz="1800" dirty="0"/>
           </a:p>
@@ -7196,7 +7112,7 @@
                 <a:ea typeface="Microsoft JhengHei" pitchFamily="34" charset="-122"/>
                 <a:cs typeface="Microsoft JhengHei" pitchFamily="34" charset="-120"/>
               </a:rPr>
-              <a:t>研究影響肝癌治療策略。</a:t>
+              <a:t>對肝癌治療的啟示。</a:t>
             </a:r>
             <a:endParaRPr lang="en-US" sz="1800" dirty="0"/>
           </a:p>
@@ -7432,7 +7348,7 @@
                   </a:extLst>
                 </a:hlinkClick>
               </a:rPr>
-              <a:t>Immunotherapy in Hepatocellular Carcinoma with Portal Vein Tumour Thrombosis: From Poor Prognosis to Curative-Intent Strategies</a:t>
+              <a:t>… plus transarterial chemoembolization and PD-1 inhibitors as conversion therapies for unresectable intermediate-advanced hepatocellular carcinoma: a phase 2 trial …</a:t>
             </a:r>
             <a:endParaRPr lang="en-US" sz="2400" dirty="0"/>
           </a:p>
@@ -7468,7 +7384,7 @@
                   <a:srgbClr val="888888"/>
                 </a:solidFill>
               </a:rPr>
-              <a:t>…  ·  RCT Phase 2</a:t>
+              <a:t>… and Targeted Therapy  ·  RCT Phase 2</a:t>
             </a:r>
             <a:endParaRPr lang="en-US" sz="1000" dirty="0"/>
           </a:p>
@@ -7511,7 +7427,7 @@
                 <a:ea typeface="Microsoft JhengHei" pitchFamily="34" charset="-122"/>
                 <a:cs typeface="Microsoft JhengHei" pitchFamily="34" charset="-120"/>
               </a:rPr>
-              <a:t>針對PVTT的HCC II期研究</a:t>
+              <a:t>針對不可切除HCC的組合療法</a:t>
             </a:r>
             <a:endParaRPr lang="en-US" sz="1800" dirty="0"/>
           </a:p>
@@ -7532,7 +7448,7 @@
                 <a:ea typeface="Microsoft JhengHei" pitchFamily="34" charset="-122"/>
                 <a:cs typeface="Microsoft JhengHei" pitchFamily="34" charset="-120"/>
               </a:rPr>
-              <a:t>HAIC聯合lenvatinib和PD-1</a:t>
+              <a:t>經動脈化療栓塞與PD-1抑制劑</a:t>
             </a:r>
             <a:endParaRPr lang="en-US" sz="1800" dirty="0"/>
           </a:p>
@@ -7553,49 +7469,7 @@
                 <a:ea typeface="Microsoft JhengHei" pitchFamily="34" charset="-122"/>
                 <a:cs typeface="Microsoft JhengHei" pitchFamily="34" charset="-120"/>
               </a:rPr>
-              <a:t>療效優於標準治療</a:t>
-            </a:r>
-            <a:endParaRPr lang="en-US" sz="1800" dirty="0"/>
-          </a:p>
-          <a:p>
-            <a:pPr marL="342900" indent="-342900">
-              <a:spcAft>
-                <a:spcPts val="800"/>
-              </a:spcAft>
-              <a:buSzPct val="100000"/>
-              <a:buChar char="•"/>
-            </a:pPr>
-            <a:r>
-              <a:rPr lang="en-US" sz="1800" dirty="0">
-                <a:solidFill>
-                  <a:srgbClr val="333333"/>
-                </a:solidFill>
-                <a:latin typeface="Microsoft JhengHei" pitchFamily="34" charset="0"/>
-                <a:ea typeface="Microsoft JhengHei" pitchFamily="34" charset="-122"/>
-                <a:cs typeface="Microsoft JhengHei" pitchFamily="34" charset="-120"/>
-              </a:rPr>
-              <a:t>專注於治癒性策略</a:t>
-            </a:r>
-            <a:endParaRPr lang="en-US" sz="1800" dirty="0"/>
-          </a:p>
-          <a:p>
-            <a:pPr marL="342900" indent="-342900">
-              <a:spcAft>
-                <a:spcPts val="800"/>
-              </a:spcAft>
-              <a:buSzPct val="100000"/>
-              <a:buChar char="•"/>
-            </a:pPr>
-            <a:r>
-              <a:rPr lang="en-US" sz="1800" dirty="0">
-                <a:solidFill>
-                  <a:srgbClr val="333333"/>
-                </a:solidFill>
-                <a:latin typeface="Microsoft JhengHei" pitchFamily="34" charset="0"/>
-                <a:ea typeface="Microsoft JhengHei" pitchFamily="34" charset="-122"/>
-                <a:cs typeface="Microsoft JhengHei" pitchFamily="34" charset="-120"/>
-              </a:rPr>
-              <a:t>治療模式可能改變</a:t>
+              <a:t>第二期試驗顯示良好結果</a:t>
             </a:r>
             <a:endParaRPr lang="en-US" sz="1800" dirty="0"/>
           </a:p>
@@ -7631,7 +7505,7 @@
                   <a:srgbClr val="888888"/>
                 </a:solidFill>
               </a:rPr>
-              <a:t>L Marzi, R Sacco, L Siciliani. …. 2026</a:t>
+              <a:t>X Zhang, H Cai, W Peng. … and Targeted Therapy. 2026</a:t>
             </a:r>
             <a:endParaRPr lang="en-US" sz="800" dirty="0"/>
           </a:p>

--- a/docs/digest-zh.pptx
+++ b/docs/digest-zh.pptx
@@ -2269,7 +2269,7 @@
                   <a:srgbClr val="888888"/>
                 </a:solidFill>
               </a:rPr>
-              <a:t>2026-04-13 — 2026-04-20</a:t>
+              <a:t>2026-04-20 — 2026-04-27</a:t>
             </a:r>
             <a:endParaRPr lang="en-US" sz="1400" dirty="0"/>
           </a:p>
@@ -2460,7 +2460,7 @@
                   </a:extLst>
                 </a:hlinkClick>
               </a:rPr>
-              <a:t>Prognostic nutritional index and the survival of patients with hepatocellular carcinoma on immune checkpoint inhibitors: a meta-analysis</a:t>
+              <a:t>Radiotherapy versus local ablation therapy for the treatment of hepatocellular carcinoma: A systematic review and meta-analysis.</a:t>
             </a:r>
             <a:endParaRPr lang="en-US" sz="2400" dirty="0"/>
           </a:p>
@@ -2496,7 +2496,7 @@
                   <a:srgbClr val="888888"/>
                 </a:solidFill>
               </a:rPr>
-              <a:t>BMC cancer  ·  Meta-Analysis</a:t>
+              <a:t>Journal of Clinical …  ·  Meta-Analysis</a:t>
             </a:r>
             <a:endParaRPr lang="en-US" sz="1000" dirty="0"/>
           </a:p>
@@ -2539,7 +2539,7 @@
                 <a:ea typeface="Microsoft JhengHei" pitchFamily="34" charset="-122"/>
                 <a:cs typeface="Microsoft JhengHei" pitchFamily="34" charset="-120"/>
               </a:rPr>
-              <a:t>預後營養指數(PNI)影響生存</a:t>
+              <a:t>放射治療與局部消融比較</a:t>
             </a:r>
             <a:endParaRPr lang="en-US" sz="1800" dirty="0"/>
           </a:p>
@@ -2560,7 +2560,7 @@
                 <a:ea typeface="Microsoft JhengHei" pitchFamily="34" charset="-122"/>
                 <a:cs typeface="Microsoft JhengHei" pitchFamily="34" charset="-120"/>
               </a:rPr>
-              <a:t>HCC患者免疫治療的綜合分析</a:t>
+              <a:t>針對肝細胞癌（HCC）治療</a:t>
             </a:r>
             <a:endParaRPr lang="en-US" sz="1800" dirty="0"/>
           </a:p>
@@ -2581,7 +2581,49 @@
                 <a:ea typeface="Microsoft JhengHei" pitchFamily="34" charset="-122"/>
                 <a:cs typeface="Microsoft JhengHei" pitchFamily="34" charset="-120"/>
               </a:rPr>
-              <a:t>營養狀態與免疫反應相關</a:t>
+              <a:t>評估局部無進展生存期</a:t>
+            </a:r>
+            <a:endParaRPr lang="en-US" sz="1800" dirty="0"/>
+          </a:p>
+          <a:p>
+            <a:pPr marL="342900" indent="-342900">
+              <a:spcAft>
+                <a:spcPts val="800"/>
+              </a:spcAft>
+              <a:buSzPct val="100000"/>
+              <a:buChar char="•"/>
+            </a:pPr>
+            <a:r>
+              <a:rPr lang="en-US" sz="1800" dirty="0">
+                <a:solidFill>
+                  <a:srgbClr val="333333"/>
+                </a:solidFill>
+                <a:latin typeface="Microsoft JhengHei" pitchFamily="34" charset="0"/>
+                <a:ea typeface="Microsoft JhengHei" pitchFamily="34" charset="-122"/>
+                <a:cs typeface="Microsoft JhengHei" pitchFamily="34" charset="-120"/>
+              </a:rPr>
+              <a:t>包括射頻與微波消融</a:t>
+            </a:r>
+            <a:endParaRPr lang="en-US" sz="1800" dirty="0"/>
+          </a:p>
+          <a:p>
+            <a:pPr marL="342900" indent="-342900">
+              <a:spcAft>
+                <a:spcPts val="800"/>
+              </a:spcAft>
+              <a:buSzPct val="100000"/>
+              <a:buChar char="•"/>
+            </a:pPr>
+            <a:r>
+              <a:rPr lang="en-US" sz="1800" dirty="0">
+                <a:solidFill>
+                  <a:srgbClr val="333333"/>
+                </a:solidFill>
+                <a:latin typeface="Microsoft JhengHei" pitchFamily="34" charset="0"/>
+                <a:ea typeface="Microsoft JhengHei" pitchFamily="34" charset="-122"/>
+                <a:cs typeface="Microsoft JhengHei" pitchFamily="34" charset="-120"/>
+              </a:rPr>
+              <a:t>進行系統性回顧與統合分析</a:t>
             </a:r>
             <a:endParaRPr lang="en-US" sz="1800" dirty="0"/>
           </a:p>
@@ -2617,7 +2659,7 @@
                   <a:srgbClr val="888888"/>
                 </a:solidFill>
               </a:rPr>
-              <a:t>J Fu, W Peng, J Jiang. BMC cancer. 2026</a:t>
+              <a:t>SH Bae, SH Choi, SM Yoon. Journal of Clinical …. 2026</a:t>
             </a:r>
             <a:endParaRPr lang="en-US" sz="800" dirty="0"/>
           </a:p>
@@ -2817,7 +2859,7 @@
                   </a:extLst>
                 </a:hlinkClick>
               </a:rPr>
-              <a:t>Radiotherapy versus local ablation therapy for the treatment of hepatocellular carcinoma: A systematic review and meta-analysis.</a:t>
+              <a:t>… on interventional therapy and immune checkpoint inhibitors (ICIs) in patients with intermediate-and advanced-stage hepatocellular carcinoma: a systematic review …</a:t>
             </a:r>
             <a:endParaRPr lang="en-US" sz="2400" dirty="0"/>
           </a:p>
@@ -2853,7 +2895,7 @@
                   <a:srgbClr val="888888"/>
                 </a:solidFill>
               </a:rPr>
-              <a:t>Journal of Clinical …  ·  Meta-Analysis</a:t>
+              <a:t>… , Immunotherapy  ·  Systematic Review</a:t>
             </a:r>
             <a:endParaRPr lang="en-US" sz="1000" dirty="0"/>
           </a:p>
@@ -2896,7 +2938,7 @@
                 <a:ea typeface="Microsoft JhengHei" pitchFamily="34" charset="-122"/>
                 <a:cs typeface="Microsoft JhengHei" pitchFamily="34" charset="-120"/>
               </a:rPr>
-              <a:t>放射治療與局部消融比較</a:t>
+              <a:t>聯合療法在HCC中顯示潛力。</a:t>
             </a:r>
             <a:endParaRPr lang="en-US" sz="1800" dirty="0"/>
           </a:p>
@@ -2917,7 +2959,7 @@
                 <a:ea typeface="Microsoft JhengHei" pitchFamily="34" charset="-122"/>
                 <a:cs typeface="Microsoft JhengHei" pitchFamily="34" charset="-120"/>
               </a:rPr>
-              <a:t>聚焦肝細胞癌治療</a:t>
+              <a:t>介入療法增強ICI療效。</a:t>
             </a:r>
             <a:endParaRPr lang="en-US" sz="1800" dirty="0"/>
           </a:p>
@@ -2938,49 +2980,7 @@
                 <a:ea typeface="Microsoft JhengHei" pitchFamily="34" charset="-122"/>
                 <a:cs typeface="Microsoft JhengHei" pitchFamily="34" charset="-120"/>
               </a:rPr>
-              <a:t>分析局部無進展生存期</a:t>
-            </a:r>
-            <a:endParaRPr lang="en-US" sz="1800" dirty="0"/>
-          </a:p>
-          <a:p>
-            <a:pPr marL="342900" indent="-342900">
-              <a:spcAft>
-                <a:spcPts val="800"/>
-              </a:spcAft>
-              <a:buSzPct val="100000"/>
-              <a:buChar char="•"/>
-            </a:pPr>
-            <a:r>
-              <a:rPr lang="en-US" sz="1800" dirty="0">
-                <a:solidFill>
-                  <a:srgbClr val="333333"/>
-                </a:solidFill>
-                <a:latin typeface="Microsoft JhengHei" pitchFamily="34" charset="0"/>
-                <a:ea typeface="Microsoft JhengHei" pitchFamily="34" charset="-122"/>
-                <a:cs typeface="Microsoft JhengHei" pitchFamily="34" charset="-120"/>
-              </a:rPr>
-              <a:t>包含射頻與微波消融</a:t>
-            </a:r>
-            <a:endParaRPr lang="en-US" sz="1800" dirty="0"/>
-          </a:p>
-          <a:p>
-            <a:pPr marL="342900" indent="-342900">
-              <a:spcAft>
-                <a:spcPts val="800"/>
-              </a:spcAft>
-              <a:buSzPct val="100000"/>
-              <a:buChar char="•"/>
-            </a:pPr>
-            <a:r>
-              <a:rPr lang="en-US" sz="1800" dirty="0">
-                <a:solidFill>
-                  <a:srgbClr val="333333"/>
-                </a:solidFill>
-                <a:latin typeface="Microsoft JhengHei" pitchFamily="34" charset="0"/>
-                <a:ea typeface="Microsoft JhengHei" pitchFamily="34" charset="-122"/>
-                <a:cs typeface="Microsoft JhengHei" pitchFamily="34" charset="-120"/>
-              </a:rPr>
-              <a:t>進行系統性回顧與綜合分析</a:t>
+              <a:t>需要更多全面的臨床試驗。</a:t>
             </a:r>
             <a:endParaRPr lang="en-US" sz="1800" dirty="0"/>
           </a:p>
@@ -3016,7 +3016,7 @@
                   <a:srgbClr val="888888"/>
                 </a:solidFill>
               </a:rPr>
-              <a:t>SH Bae, SH Choi, SM Yoon. Journal of Clinical …. 2026</a:t>
+              <a:t>J Su, Y Su, R Mai. … , Immunotherapy. 2026</a:t>
             </a:r>
             <a:endParaRPr lang="en-US" sz="800" dirty="0"/>
           </a:p>
@@ -3216,7 +3216,7 @@
                   </a:extLst>
                 </a:hlinkClick>
               </a:rPr>
-              <a:t>… on interventional therapy and immune checkpoint inhibitors (ICIs) in patients with intermediate-and advanced-stage hepatocellular carcinoma: a systematic review …</a:t>
+              <a:t>Comparative efficacy and safety of immune checkpoint inhibitor–based strategies in advanced hepatocellular carcinoma: a systematic review and network meta …</a:t>
             </a:r>
             <a:endParaRPr lang="en-US" sz="2400" dirty="0"/>
           </a:p>
@@ -3252,7 +3252,7 @@
                   <a:srgbClr val="888888"/>
                 </a:solidFill>
               </a:rPr>
-              <a:t>… , Immunotherapy  ·  Systematic Review</a:t>
+              <a:t>… Journal of Surgery  ·  Systematic Review</a:t>
             </a:r>
             <a:endParaRPr lang="en-US" sz="1000" dirty="0"/>
           </a:p>
@@ -3295,7 +3295,7 @@
                 <a:ea typeface="Microsoft JhengHei" pitchFamily="34" charset="-122"/>
                 <a:cs typeface="Microsoft JhengHei" pitchFamily="34" charset="-120"/>
               </a:rPr>
-              <a:t>聯合療法顯示出希望的結果。</a:t>
+              <a:t>免疫檢查點抑制劑顯示潛力。</a:t>
             </a:r>
             <a:endParaRPr lang="en-US" sz="1800" dirty="0"/>
           </a:p>
@@ -3316,7 +3316,7 @@
                 <a:ea typeface="Microsoft JhengHei" pitchFamily="34" charset="-122"/>
                 <a:cs typeface="Microsoft JhengHei" pitchFamily="34" charset="-120"/>
               </a:rPr>
-              <a:t>ICIs 增強 HCC 的免疫反應。</a:t>
+              <a:t>聯合療法改善治療效果。</a:t>
             </a:r>
             <a:endParaRPr lang="en-US" sz="1800" dirty="0"/>
           </a:p>
@@ -3337,7 +3337,7 @@
                 <a:ea typeface="Microsoft JhengHei" pitchFamily="34" charset="-122"/>
                 <a:cs typeface="Microsoft JhengHei" pitchFamily="34" charset="-120"/>
               </a:rPr>
-              <a:t>介入療法改善患者預後。</a:t>
+              <a:t>安全性在策略間有所不同。</a:t>
             </a:r>
             <a:endParaRPr lang="en-US" sz="1800" dirty="0"/>
           </a:p>
@@ -3373,7 +3373,7 @@
                   <a:srgbClr val="888888"/>
                 </a:solidFill>
               </a:rPr>
-              <a:t>J Su, Y Su, R Mai. … , Immunotherapy. 2026</a:t>
+              <a:t>X Yu, X Zhang, O Jiang. … Journal of Surgery. 2026</a:t>
             </a:r>
             <a:endParaRPr lang="en-US" sz="800" dirty="0"/>
           </a:p>
@@ -3590,7 +3590,7 @@
                   <a:srgbClr val="FFFFFF"/>
                 </a:solidFill>
               </a:rPr>
-              <a:t>1. **癌症的標誌與治療的關聯性**  </a:t>
+              <a:t>1. **免疫療法的長期生存潛力**  </a:t>
             </a:r>
             <a:endParaRPr lang="en-US" sz="1200" dirty="0"/>
           </a:p>
@@ -3607,7 +3607,7 @@
                   <a:srgbClr val="FFFFFF"/>
                 </a:solidFill>
               </a:rPr>
-              <a:t>   The hallmarks of cancer provide a comprehensive framework for understanding hepatocellular carcinoma (HCC) and guiding therapeutic strategies.  </a:t>
+              <a:t>   Immunotherapy has demonstrated the potential for long-term survival and even cure in advanced hepatocellular carcinoma (HCC), as evidenced by recent studies utilizing mixture cure models (MCMs).  </a:t>
             </a:r>
             <a:endParaRPr lang="en-US" sz="1200" dirty="0"/>
           </a:p>
@@ -3624,7 +3624,7 @@
                   <a:srgbClr val="FFFFFF"/>
                 </a:solidFill>
               </a:rPr>
-              <a:t>   癌症的標誌為理解肝細胞癌（HCC）及指導治療策略提供了全面的框架。</a:t>
+              <a:t>   免疫療法在晚期肝細胞癌（HCC）中顯示出長期生存甚至治癒的潛力，這一點在最近利用混合治癒模型（MCMs）的研究中得到了證實。</a:t>
             </a:r>
             <a:endParaRPr lang="en-US" sz="1200" dirty="0"/>
           </a:p>
@@ -3650,7 +3650,7 @@
                   <a:srgbClr val="FFFFFF"/>
                 </a:solidFill>
               </a:rPr>
-              <a:t>2. **免疫治療的潛力與挑戰**  </a:t>
+              <a:t>2. **個性化治療策略的必要性**  </a:t>
             </a:r>
             <a:endParaRPr lang="en-US" sz="1200" dirty="0"/>
           </a:p>
@@ -3667,7 +3667,7 @@
                   <a:srgbClr val="FFFFFF"/>
                 </a:solidFill>
               </a:rPr>
-              <a:t>   Neoadjuvant immune therapy shows promise in remodeling the tumor microenvironment, yet its optimal application in early-stage HCC remains to be established.  </a:t>
+              <a:t>   The era of immunotherapy necessitates personalized treatment strategies for HCC, as recurrence rates remain high despite curative intent in early-stage cases.  </a:t>
             </a:r>
             <a:endParaRPr lang="en-US" sz="1200" dirty="0"/>
           </a:p>
@@ -3684,7 +3684,7 @@
                   <a:srgbClr val="FFFFFF"/>
                 </a:solidFill>
               </a:rPr>
-              <a:t>   新輔助免疫治療在重塑腫瘤微環境方面顯示出潛力，但其在早期HCC中的最佳應用仍需確立。</a:t>
+              <a:t>   免疫療法的時代要求為HCC制定個性化的治療策略，因為儘管早期病例有治癒意圖，但復發率仍然很高。</a:t>
             </a:r>
             <a:endParaRPr lang="en-US" sz="1200" dirty="0"/>
           </a:p>
@@ -3710,7 +3710,7 @@
                   <a:srgbClr val="FFFFFF"/>
                 </a:solidFill>
               </a:rPr>
-              <a:t>3. **癌症相關成纖維細胞的角色**  </a:t>
+              <a:t>3. **局部療法與免疫檢查點抑制劑的結合**  </a:t>
             </a:r>
             <a:endParaRPr lang="en-US" sz="1200" dirty="0"/>
           </a:p>
@@ -3727,7 +3727,7 @@
                   <a:srgbClr val="FFFFFF"/>
                 </a:solidFill>
               </a:rPr>
-              <a:t>   Cancer-associated fibroblasts (CAFs) are crucial in promoting immunosuppression in HCC through metabolic pathways, highlighting new therapeutic targets.  </a:t>
+              <a:t>   Combining local therapies, such as stereotactic body radiotherapy, with immune checkpoint inhibitors shows promising results in advanced HCC, enhancing treatment efficacy.  </a:t>
             </a:r>
             <a:endParaRPr lang="en-US" sz="1200" dirty="0"/>
           </a:p>
@@ -3744,7 +3744,7 @@
                   <a:srgbClr val="FFFFFF"/>
                 </a:solidFill>
               </a:rPr>
-              <a:t>   癌症相關成纖維細胞（CAFs）在HCC中透過代謝途徑促進免疫抑制，突顯了新的治療靶點。</a:t>
+              <a:t>   將局部療法（如立體定向體放療）與免疫檢查點抑制劑結合，顯示出在晚期HCC中的良好效果，增強了治療的有效性。</a:t>
             </a:r>
             <a:endParaRPr lang="en-US" sz="1200" dirty="0"/>
           </a:p>
@@ -3770,7 +3770,7 @@
                   <a:srgbClr val="FFFFFF"/>
                 </a:solidFill>
               </a:rPr>
-              <a:t>4. **手術後復發的挑戰**  </a:t>
+              <a:t>4. **時間因素對免疫療法的影響**  </a:t>
             </a:r>
             <a:endParaRPr lang="en-US" sz="1200" dirty="0"/>
           </a:p>
@@ -3787,7 +3787,7 @@
                   <a:srgbClr val="FFFFFF"/>
                 </a:solidFill>
               </a:rPr>
-              <a:t>   Postoperative recurrence in HCC remains a significant clinical challenge, necessitating further exploration of underlying mechanisms and therapeutic strategies.  </a:t>
+              <a:t>   The timing of immune checkpoint inhibitor administration may influence clinical outcomes, highlighting the importance of circadian rhythms in treatment efficacy.  </a:t>
             </a:r>
             <a:endParaRPr lang="en-US" sz="1200" dirty="0"/>
           </a:p>
@@ -3804,7 +3804,7 @@
                   <a:srgbClr val="FFFFFF"/>
                 </a:solidFill>
               </a:rPr>
-              <a:t>   HCC的手術後復發仍然是一個重大臨床挑戰，需要進一步探索其潛在機制和治療策略。</a:t>
+              <a:t>   免疫檢查點抑制劑的給藥時間可能會影響臨床結果，強調了生物節律在治療效果中的重要性。</a:t>
             </a:r>
             <a:endParaRPr lang="en-US" sz="1200" dirty="0"/>
           </a:p>
@@ -3830,7 +3830,7 @@
                   <a:srgbClr val="FFFFFF"/>
                 </a:solidFill>
               </a:rPr>
-              <a:t>5. **結合治療的前景**  </a:t>
+              <a:t>5. **營養指標與預後關聯**  </a:t>
             </a:r>
             <a:endParaRPr lang="en-US" sz="1200" dirty="0"/>
           </a:p>
@@ -3847,7 +3847,7 @@
                   <a:srgbClr val="FFFFFF"/>
                 </a:solidFill>
               </a:rPr>
-              <a:t>   Combining interventional therapies with immune checkpoint inhibitors may enhance treatment outcomes in advanced HCC, warranting further investigation.</a:t>
+              <a:t>   The prognostic nutritional index has been associated with survival outcomes in HCC patients treated with immune checkpoint inhibitors, suggesting that nutritional status may play a role in treatment efficacy.</a:t>
             </a:r>
             <a:endParaRPr lang="en-US" sz="1200" dirty="0"/>
           </a:p>
@@ -3993,7 +3993,7 @@
                   <a:srgbClr val="FFFFFF"/>
                 </a:solidFill>
               </a:rPr>
-              <a:t>將介入治療與免疫檢查點抑制劑結合可能提高晚期HCC的治療效果，值得進一步研究。</a:t>
+              <a:t>預後營養指數與接受免疫檢查點抑制劑治療的HCC患者的生存結果相關，這表明營養狀況可能在治療效果中扮演角色。</a:t>
             </a:r>
             <a:endParaRPr lang="en-US" sz="1200" dirty="0"/>
           </a:p>
@@ -4045,7 +4045,7 @@
                   <a:srgbClr val="FFFFFF"/>
                 </a:solidFill>
               </a:rPr>
-              <a:t>1. **早期階段免疫治療的最佳化**  </a:t>
+              <a:t>1. **混合治癒模型的應用**  </a:t>
             </a:r>
             <a:endParaRPr lang="en-US" sz="1200" dirty="0"/>
           </a:p>
@@ -4062,7 +4062,7 @@
                   <a:srgbClr val="FFFFFF"/>
                 </a:solidFill>
               </a:rPr>
-              <a:t>   Investigate the optimal timing and combinations of immune therapies in early-stage HCC to maximize patient outcomes.  </a:t>
+              <a:t>   Further studies should apply mixture cure models in HCC to better estimate the fraction of long-term survivors and identify predictors of cure.  </a:t>
             </a:r>
             <a:endParaRPr lang="en-US" sz="1200" dirty="0"/>
           </a:p>
@@ -4079,7 +4079,7 @@
                   <a:srgbClr val="FFFFFF"/>
                 </a:solidFill>
               </a:rPr>
-              <a:t>   探討早期HCC中免疫治療的最佳時機和組合，以最大化患者的治療效果。</a:t>
+              <a:t>   進一步的研究應在HCC中應用混合治癒模型，以更好地估計長期生存者的比例並識別治癒的預測因子。</a:t>
             </a:r>
             <a:endParaRPr lang="en-US" sz="1200" dirty="0"/>
           </a:p>
@@ -4105,7 +4105,7 @@
                   <a:srgbClr val="FFFFFF"/>
                 </a:solidFill>
               </a:rPr>
-              <a:t>2. **靶向癌症相關成纖維細胞的療法**  </a:t>
+              <a:t>2. **個性化治療的臨床試驗**  </a:t>
             </a:r>
             <a:endParaRPr lang="en-US" sz="1200" dirty="0"/>
           </a:p>
@@ -4122,7 +4122,7 @@
                   <a:srgbClr val="FFFFFF"/>
                 </a:solidFill>
               </a:rPr>
-              <a:t>   Develop targeted therapies against CAFs to mitigate their immunosuppressive effects in HCC and improve treatment efficacy.  </a:t>
+              <a:t>   Large-scale clinical trials focusing on personalized treatment approaches in HCC patients receiving immunotherapy are needed to establish optimal strategies.  </a:t>
             </a:r>
             <a:endParaRPr lang="en-US" sz="1200" dirty="0"/>
           </a:p>
@@ -4139,7 +4139,7 @@
                   <a:srgbClr val="FFFFFF"/>
                 </a:solidFill>
               </a:rPr>
-              <a:t>   開發針對CAFs的靶向療法，以減少其在HCC中的免疫抑制作用，並提高治療效果。</a:t>
+              <a:t>   需要針對接受免疫療法的HCC患者進行大規模臨床試驗，專注於個性化治療方法，以確立最佳策略。</a:t>
             </a:r>
             <a:endParaRPr lang="en-US" sz="1200" dirty="0"/>
           </a:p>
@@ -4165,7 +4165,7 @@
                   <a:srgbClr val="FFFFFF"/>
                 </a:solidFill>
               </a:rPr>
-              <a:t>3. **探索腫瘤微環境的調控**  </a:t>
+              <a:t>3. **時間因素的機制研究**  </a:t>
             </a:r>
             <a:endParaRPr lang="en-US" sz="1200" dirty="0"/>
           </a:p>
@@ -4182,7 +4182,7 @@
                   <a:srgbClr val="FFFFFF"/>
                 </a:solidFill>
               </a:rPr>
-              <a:t>   Further research on the tumor microenvironment's role in HCC progression and response to therapies, focusing on metabolic and immune interactions.  </a:t>
+              <a:t>   Investigating the biological mechanisms behind the time-of-day effects on immune checkpoint inhibitor efficacy could lead to optimized treatment schedules.  </a:t>
             </a:r>
             <a:endParaRPr lang="en-US" sz="1200" dirty="0"/>
           </a:p>
@@ -4199,7 +4199,7 @@
                   <a:srgbClr val="FFFFFF"/>
                 </a:solidFill>
               </a:rPr>
-              <a:t>   進一步研究腫瘤微環境在HCC進展和治療反應中的作用，重點關注代謝和免疫相互作用。</a:t>
+              <a:t>   研究時間因素對免疫檢查點抑制劑療效的生物學機制，可能會導致最佳治療時間表的制定。</a:t>
             </a:r>
             <a:endParaRPr lang="en-US" sz="1200" dirty="0"/>
           </a:p>
@@ -4225,7 +4225,7 @@
                   <a:srgbClr val="FFFFFF"/>
                 </a:solidFill>
               </a:rPr>
-              <a:t>4. **多模態治療策略的評估**  </a:t>
+              <a:t>4. **營養干預的臨床應用**  </a:t>
             </a:r>
             <a:endParaRPr lang="en-US" sz="1200" dirty="0"/>
           </a:p>
@@ -4242,7 +4242,7 @@
                   <a:srgbClr val="FFFFFF"/>
                 </a:solidFill>
               </a:rPr>
-              <a:t>   Evaluate the efficacy of multimodal treatment strategies combining surgery, ablation, and immunotherapy in improving survival rates in HCC.  </a:t>
+              <a:t>   Exploring the role of nutritional interventions in conjunction with immunotherapy may enhance treatment outcomes for HCC patients.  </a:t>
             </a:r>
             <a:endParaRPr lang="en-US" sz="1200" dirty="0"/>
           </a:p>
@@ -4259,7 +4259,7 @@
                   <a:srgbClr val="FFFFFF"/>
                 </a:solidFill>
               </a:rPr>
-              <a:t>   評估結合手術、消融和免疫治療的多模態治療策略在提高HCC生存率方面的有效性。</a:t>
+              <a:t>   探索營養干預與免疫療法結合的作用，可能會改善HCC患者的治療結果。</a:t>
             </a:r>
             <a:endParaRPr lang="en-US" sz="1200" dirty="0"/>
           </a:p>
@@ -4285,7 +4285,7 @@
                   <a:srgbClr val="FFFFFF"/>
                 </a:solidFill>
               </a:rPr>
-              <a:t>5. **個體化治療的發展**  </a:t>
+              <a:t>5. **局部療法的最佳化**  </a:t>
             </a:r>
             <a:endParaRPr lang="en-US" sz="1200" dirty="0"/>
           </a:p>
@@ -4302,7 +4302,7 @@
                   <a:srgbClr val="FFFFFF"/>
                 </a:solidFill>
               </a:rPr>
-              <a:t>   Explore personalized medicine approaches based on genetic and immunological profiling to tailor therapies for HCC patients.  </a:t>
+              <a:t>   Future research should focus on optimizing the combination of local ablative therapies with immunotherapy to maximize patient benefits in HCC treatment.  </a:t>
             </a:r>
             <a:endParaRPr lang="en-US" sz="1200" dirty="0"/>
           </a:p>
@@ -4319,7 +4319,7 @@
                   <a:srgbClr val="FFFFFF"/>
                 </a:solidFill>
               </a:rPr>
-              <a:t>   探索基於基因和免疫學特徵的個體化治療方法，以為HCC患者量身定制療法。</a:t>
+              <a:t>   未來的研究應專注於優化局部消融療法與免疫療法的結合，以最大化HCC治療中的患者受益。</a:t>
             </a:r>
             <a:endParaRPr lang="en-US" sz="1200" dirty="0"/>
           </a:p>
@@ -4592,7 +4592,7 @@
                 <a:ea typeface="Arial" pitchFamily="34" charset="-122"/>
                 <a:cs typeface="Arial" pitchFamily="34" charset="-120"/>
               </a:rPr>
-              <a:t>Hallmarks of liver cancer: Therapeutic implications.</a:t>
+              <a:t>Long-term survival and cure fraction in patients with advanced hepatocellular ca…</a:t>
             </a:r>
             <a:endParaRPr lang="en-US" sz="1400" dirty="0"/>
           </a:p>
@@ -4629,7 +4629,7 @@
                 <a:ea typeface="Arial" pitchFamily="34" charset="-122"/>
                 <a:cs typeface="Arial" pitchFamily="34" charset="-120"/>
               </a:rPr>
-              <a:t>Neoadjuvant stereotactic body radiation therapy plus immune therapy favorably re…</a:t>
+              <a:t>Optimal treatment selection for hepatocellular carcinoma in the era of immunothe…</a:t>
             </a:r>
             <a:endParaRPr lang="en-US" sz="1400" dirty="0"/>
           </a:p>
@@ -4666,7 +4666,7 @@
                 <a:ea typeface="Arial" pitchFamily="34" charset="-122"/>
                 <a:cs typeface="Arial" pitchFamily="34" charset="-120"/>
               </a:rPr>
-              <a:t>Erratum: Hepatectomy alters adjuvant anti-PD-1 action in a mouse model of HCC bu…</a:t>
+              <a:t>Pembrolizumab and stereotactic body radiotherapy combined in advanced hepatocell…</a:t>
             </a:r>
             <a:endParaRPr lang="en-US" sz="1400" dirty="0"/>
           </a:p>
@@ -4703,7 +4703,7 @@
                 <a:ea typeface="Arial" pitchFamily="34" charset="-122"/>
                 <a:cs typeface="Arial" pitchFamily="34" charset="-120"/>
               </a:rPr>
-              <a:t>Intratumoral Lactobacillus johnsonii Enhances Sensitivity to PD-1 Blockade by In…</a:t>
+              <a:t>Multicentre prospective trial of abbreviated MRI using gadoxetic acid versus CT …</a:t>
             </a:r>
             <a:endParaRPr lang="en-US" sz="1400" dirty="0"/>
           </a:p>
@@ -4740,7 +4740,7 @@
                 <a:ea typeface="Arial" pitchFamily="34" charset="-122"/>
                 <a:cs typeface="Arial" pitchFamily="34" charset="-120"/>
               </a:rPr>
-              <a:t>Cancer-Associated Fibroblasts Promote Tumor Immunosuppression in Hepatocellular …</a:t>
+              <a:t>Time-of-day of first checkpoint inhibitor dose influences clinical outcomes and …</a:t>
             </a:r>
             <a:endParaRPr lang="en-US" sz="1400" dirty="0"/>
           </a:p>
@@ -4777,7 +4777,7 @@
                 <a:ea typeface="Arial" pitchFamily="34" charset="-122"/>
                 <a:cs typeface="Arial" pitchFamily="34" charset="-120"/>
               </a:rPr>
-              <a:t>Selective depletion of virus-specific CD8 T cells from the liver after PD-1 ther…</a:t>
+              <a:t>Cost-effectiveness analysis of atezolizumab and bevacizumab as first-line system…</a:t>
             </a:r>
             <a:endParaRPr lang="en-US" sz="1400" dirty="0"/>
           </a:p>
@@ -4814,7 +4814,7 @@
                 <a:ea typeface="Arial" pitchFamily="34" charset="-122"/>
                 <a:cs typeface="Arial" pitchFamily="34" charset="-120"/>
               </a:rPr>
-              <a:t>… plus transarterial chemoembolization and PD-1 inhibitors as conversion therapi…</a:t>
+              <a:t>Prognostic nutritional index and the survival of patients with hepatocellular ca…</a:t>
             </a:r>
             <a:endParaRPr lang="en-US" sz="1400" dirty="0"/>
           </a:p>
@@ -4851,7 +4851,7 @@
                 <a:ea typeface="Arial" pitchFamily="34" charset="-122"/>
                 <a:cs typeface="Arial" pitchFamily="34" charset="-120"/>
               </a:rPr>
-              <a:t>Prognostic nutritional index and the survival of patients with hepatocellular ca…</a:t>
+              <a:t>Radiotherapy versus local ablation therapy for the treatment of hepatocellular c…</a:t>
             </a:r>
             <a:endParaRPr lang="en-US" sz="1400" dirty="0"/>
           </a:p>
@@ -4888,7 +4888,7 @@
                 <a:ea typeface="Arial" pitchFamily="34" charset="-122"/>
                 <a:cs typeface="Arial" pitchFamily="34" charset="-120"/>
               </a:rPr>
-              <a:t>Radiotherapy versus local ablation therapy for the treatment of hepatocellular c…</a:t>
+              <a:t>… on interventional therapy and immune checkpoint inhibitors (ICIs) in patients …</a:t>
             </a:r>
             <a:endParaRPr lang="en-US" sz="1400" dirty="0"/>
           </a:p>
@@ -4925,7 +4925,7 @@
                 <a:ea typeface="Arial" pitchFamily="34" charset="-122"/>
                 <a:cs typeface="Arial" pitchFamily="34" charset="-120"/>
               </a:rPr>
-              <a:t>… on interventional therapy and immune checkpoint inhibitors (ICIs) in patients …</a:t>
+              <a:t>Comparative efficacy and safety of immune checkpoint inhibitor–based strategies …</a:t>
             </a:r>
             <a:endParaRPr lang="en-US" sz="1400" dirty="0"/>
           </a:p>
@@ -5080,7 +5080,7 @@
                   </a:extLst>
                 </a:hlinkClick>
               </a:rPr>
-              <a:t>Hallmarks of liver cancer: Therapeutic implications.</a:t>
+              <a:t>Long-term survival and cure fraction in patients with advanced hepatocellular carcinoma under immunotherapy in randomized controlled trials and real-world data.</a:t>
             </a:r>
             <a:endParaRPr lang="en-US" sz="2400" dirty="0"/>
           </a:p>
@@ -5116,7 +5116,7 @@
                   <a:srgbClr val="888888"/>
                 </a:solidFill>
               </a:rPr>
-              <a:t>Cell  ·  IF 45.5  ·  Review</a:t>
+              <a:t>Clinical cancer research : an official journal of the American Association for Cancer Research  ·  IF 11.5  ·  RCT Phase 3  ·  🌏 Asia</a:t>
             </a:r>
             <a:endParaRPr lang="en-US" sz="1000" dirty="0"/>
           </a:p>
@@ -5159,7 +5159,7 @@
                 <a:ea typeface="Microsoft JhengHei" pitchFamily="34" charset="-122"/>
                 <a:cs typeface="Microsoft JhengHei" pitchFamily="34" charset="-120"/>
               </a:rPr>
-              <a:t>癌症特徵指導肝癌理解。</a:t>
+              <a:t>ICIs可促進HCC的長期生存。</a:t>
             </a:r>
             <a:endParaRPr lang="en-US" sz="1800" dirty="0"/>
           </a:p>
@@ -5180,7 +5180,7 @@
                 <a:ea typeface="Microsoft JhengHei" pitchFamily="34" charset="-122"/>
                 <a:cs typeface="Microsoft JhengHei" pitchFamily="34" charset="-120"/>
               </a:rPr>
-              <a:t>HCC顯示獨特增殖信號。</a:t>
+              <a:t>MCMs估算長期存活與治癒比例。</a:t>
             </a:r>
             <a:endParaRPr lang="en-US" sz="1800" dirty="0"/>
           </a:p>
@@ -5201,7 +5201,7 @@
                 <a:ea typeface="Microsoft JhengHei" pitchFamily="34" charset="-122"/>
                 <a:cs typeface="Microsoft JhengHei" pitchFamily="34" charset="-120"/>
               </a:rPr>
-              <a:t>免疫治療改善晚期HCC結果。</a:t>
+              <a:t>長期生存率介於10-15%。</a:t>
             </a:r>
             <a:endParaRPr lang="en-US" sz="1800" dirty="0"/>
           </a:p>
@@ -5222,7 +5222,7 @@
                 <a:ea typeface="Microsoft JhengHei" pitchFamily="34" charset="-122"/>
                 <a:cs typeface="Microsoft JhengHei" pitchFamily="34" charset="-120"/>
               </a:rPr>
-              <a:t>iCCA具有獨特基因變異。</a:t>
+              <a:t>治癒比例介於7-9%。</a:t>
             </a:r>
             <a:endParaRPr lang="en-US" sz="1800" dirty="0"/>
           </a:p>
@@ -5243,7 +5243,7 @@
                 <a:ea typeface="Microsoft JhengHei" pitchFamily="34" charset="-122"/>
                 <a:cs typeface="Microsoft JhengHei" pitchFamily="34" charset="-120"/>
               </a:rPr>
-              <a:t>精準醫療針對iCCA突變。</a:t>
+              <a:t>ALBI分數和C型肝炎預測結果。</a:t>
             </a:r>
             <a:endParaRPr lang="en-US" sz="1800" dirty="0"/>
           </a:p>
@@ -5279,7 +5279,7 @@
                   <a:srgbClr val="888888"/>
                 </a:solidFill>
               </a:rPr>
-              <a:t>Llovet Josep M, Pinyol Roser, Affo Silvia et al.. Cell. 2026-04-17 DOI: 10.1016/j.cell.2026.03.001</a:t>
+              <a:t>Campani Claudia, Shim Ju Hyun, Bouattour Mohamed et al.. Clinical cancer research : an official journal of the American Association for Cancer Research. 2026-04-20 DOI: 10.1158/1078-0432.CCR-25-4943</a:t>
             </a:r>
             <a:endParaRPr lang="en-US" sz="800" dirty="0"/>
           </a:p>
@@ -5479,7 +5479,7 @@
                   </a:extLst>
                 </a:hlinkClick>
               </a:rPr>
-              <a:t>Neoadjuvant stereotactic body radiation therapy plus immune therapy favorably remodels the hepatocellular carcinoma tumor microenvironment.</a:t>
+              <a:t>Optimal treatment selection for hepatocellular carcinoma in the era of immunotherapy.</a:t>
             </a:r>
             <a:endParaRPr lang="en-US" sz="2400" dirty="0"/>
           </a:p>
@@ -5515,7 +5515,7 @@
                   <a:srgbClr val="888888"/>
                 </a:solidFill>
               </a:rPr>
-              <a:t>Clinical cancer research : an official journal of the American Association for Cancer Research  ·  IF 11.5  ·  Prospective Study</a:t>
+              <a:t>Journal of gastroenterology  ·  RCT Phase 3  ·  🌏 Asia</a:t>
             </a:r>
             <a:endParaRPr lang="en-US" sz="1000" dirty="0"/>
           </a:p>
@@ -5558,7 +5558,7 @@
                 <a:ea typeface="Microsoft JhengHei" pitchFamily="34" charset="-122"/>
                 <a:cs typeface="Microsoft JhengHei" pitchFamily="34" charset="-120"/>
               </a:rPr>
-              <a:t>採用新輔助SBRT加免疫療法。</a:t>
+              <a:t>免疫治療重塑HCC管理策略。</a:t>
             </a:r>
             <a:endParaRPr lang="en-US" sz="1800" dirty="0"/>
           </a:p>
@@ -5579,7 +5579,7 @@
                 <a:ea typeface="Microsoft JhengHei" pitchFamily="34" charset="-122"/>
                 <a:cs typeface="Microsoft JhengHei" pitchFamily="34" charset="-120"/>
               </a:rPr>
-              <a:t>8名可切除HCC患者的初步研究。</a:t>
+              <a:t>早期HCC復發率仍然高。</a:t>
             </a:r>
             <a:endParaRPr lang="en-US" sz="1800" dirty="0"/>
           </a:p>
@@ -5600,7 +5600,7 @@
                 <a:ea typeface="Microsoft JhengHei" pitchFamily="34" charset="-122"/>
                 <a:cs typeface="Microsoft JhengHei" pitchFamily="34" charset="-120"/>
               </a:rPr>
-              <a:t>安全性確認，低級別3不良事件。</a:t>
+              <a:t>AI模型有效預測切除後復發。</a:t>
             </a:r>
             <a:endParaRPr lang="en-US" sz="1800" dirty="0"/>
           </a:p>
@@ -5621,7 +5621,7 @@
                 <a:ea typeface="Microsoft JhengHei" pitchFamily="34" charset="-122"/>
                 <a:cs typeface="Microsoft JhengHei" pitchFamily="34" charset="-120"/>
               </a:rPr>
-              <a:t>所有患者均達到R0手術切除。</a:t>
+              <a:t>TACE聯合TKI改善治療效果。</a:t>
             </a:r>
             <a:endParaRPr lang="en-US" sz="1800" dirty="0"/>
           </a:p>
@@ -5642,7 +5642,7 @@
                 <a:ea typeface="Microsoft JhengHei" pitchFamily="34" charset="-122"/>
                 <a:cs typeface="Microsoft JhengHei" pitchFamily="34" charset="-120"/>
               </a:rPr>
-              <a:t>治療後觀察到顯著免疫重塑。</a:t>
+              <a:t>新興生物標記提升免疫治療選擇。</a:t>
             </a:r>
             <a:endParaRPr lang="en-US" sz="1800" dirty="0"/>
           </a:p>
@@ -5678,7 +5678,7 @@
                   <a:srgbClr val="888888"/>
                 </a:solidFill>
               </a:rPr>
-              <a:t>Cosner Zoe, Guo Zhoubo, Nawrocki Cole et al.. Clinical cancer research : an official journal of the American Association for Cancer Research. 2026-04-15 DOI: 10.1158/1078-0432.CCR-25-4779</a:t>
+              <a:t>Chi Chen-Ta, Huang Yi-Hsiang. Journal of gastroenterology. 2026-04-20 DOI: 10.1007/s00535-026-02411-7</a:t>
             </a:r>
             <a:endParaRPr lang="en-US" sz="800" dirty="0"/>
           </a:p>
@@ -5878,7 +5878,7 @@
                   </a:extLst>
                 </a:hlinkClick>
               </a:rPr>
-              <a:t>Erratum: Hepatectomy alters adjuvant anti-PD-1 action in a mouse model of HCC but does not compromise neoadjuvant efficacy.</a:t>
+              <a:t>Pembrolizumab and stereotactic body radiotherapy combined in advanced hepatocellular carcinoma post sorafenib–A phase II trial (PEMRAD)</a:t>
             </a:r>
             <a:endParaRPr lang="en-US" sz="2400" dirty="0"/>
           </a:p>
@@ -5914,7 +5914,7 @@
                   <a:srgbClr val="888888"/>
                 </a:solidFill>
               </a:rPr>
-              <a:t>Hepatology (Baltimore, Md.)  ·  IF 12.9  ·  Basic Research</a:t>
+              <a:t>JHEP Reports  ·  IF 7.8  ·  RCT Phase 2</a:t>
             </a:r>
             <a:endParaRPr lang="en-US" sz="1000" dirty="0"/>
           </a:p>
@@ -5957,7 +5957,7 @@
                 <a:ea typeface="Microsoft JhengHei" pitchFamily="34" charset="-122"/>
                 <a:cs typeface="Microsoft JhengHei" pitchFamily="34" charset="-120"/>
               </a:rPr>
-              <a:t>肝切除影響抗PD-1療法</a:t>
+              <a:t>結合 pembrolizumab 與 SBRT</a:t>
             </a:r>
             <a:endParaRPr lang="en-US" sz="1800" dirty="0"/>
           </a:p>
@@ -5978,7 +5978,7 @@
                 <a:ea typeface="Microsoft JhengHei" pitchFamily="34" charset="-122"/>
                 <a:cs typeface="Microsoft JhengHei" pitchFamily="34" charset="-120"/>
               </a:rPr>
-              <a:t>輔助治療效果不同</a:t>
+              <a:t>針對晚期 HCC 的二期試驗</a:t>
             </a:r>
             <a:endParaRPr lang="en-US" sz="1800" dirty="0"/>
           </a:p>
@@ -5999,7 +5999,7 @@
                 <a:ea typeface="Microsoft JhengHei" pitchFamily="34" charset="-122"/>
                 <a:cs typeface="Microsoft JhengHei" pitchFamily="34" charset="-120"/>
               </a:rPr>
-              <a:t>新輔助療效保持不變</a:t>
+              <a:t>評估索拉非尼後療效</a:t>
             </a:r>
             <a:endParaRPr lang="en-US" sz="1800" dirty="0"/>
           </a:p>
@@ -6035,7 +6035,7 @@
                   <a:srgbClr val="888888"/>
                 </a:solidFill>
               </a:rPr>
-              <a:t>Bouguerra Roqiya, El Hajji Sofia, Wassmer Charles-Henri et al.. Hepatology (Baltimore, Md.). 2026-04-16 DOI: 10.1097/HEP.0000000000001731</a:t>
+              <a:t>GM O'Kane, A Mesci, RW Jang. JHEP Reports. 2026</a:t>
             </a:r>
             <a:endParaRPr lang="en-US" sz="800" dirty="0"/>
           </a:p>
@@ -6235,7 +6235,7 @@
                   </a:extLst>
                 </a:hlinkClick>
               </a:rPr>
-              <a:t>Intratumoral Lactobacillus johnsonii Enhances Sensitivity to PD-1 Blockade by Inducing CD8+ T-cell Expansion in Hepatocellular Carcinoma.</a:t>
+              <a:t>Multicentre prospective trial of abbreviated MRI using gadoxetic acid versus CT for detection of late recurrent HCC (AMRICT): study protocol.</a:t>
             </a:r>
             <a:endParaRPr lang="en-US" sz="2400" dirty="0"/>
           </a:p>
@@ -6271,7 +6271,7 @@
                   <a:srgbClr val="888888"/>
                 </a:solidFill>
               </a:rPr>
-              <a:t>Cancer research  ·  IF 12.7  ·  Basic Research</a:t>
+              <a:t>BMJ open  ·  Prospective Study  ·  🌏 Asia</a:t>
             </a:r>
             <a:endParaRPr lang="en-US" sz="1000" dirty="0"/>
           </a:p>
@@ -6314,7 +6314,7 @@
                 <a:ea typeface="Microsoft JhengHei" pitchFamily="34" charset="-122"/>
                 <a:cs typeface="Microsoft JhengHei" pitchFamily="34" charset="-120"/>
               </a:rPr>
-              <a:t>Lactobacillus johnsonii 增加 IFNγ+PD-1+CD8+ T 細胞。</a:t>
+              <a:t>HCC 治療後常見晚期復發。</a:t>
             </a:r>
             <a:endParaRPr lang="en-US" sz="1800" dirty="0"/>
           </a:p>
@@ -6335,7 +6335,7 @@
                 <a:ea typeface="Microsoft JhengHei" pitchFamily="34" charset="-122"/>
                 <a:cs typeface="Microsoft JhengHei" pitchFamily="34" charset="-120"/>
               </a:rPr>
-              <a:t>尼古丁酸擴展細胞毒性 T 細胞。</a:t>
+              <a:t>試驗比較 HBP-AMRI 與 multiphasic CECT。</a:t>
             </a:r>
             <a:endParaRPr lang="en-US" sz="1800" dirty="0"/>
           </a:p>
@@ -6356,7 +6356,49 @@
                 <a:ea typeface="Microsoft JhengHei" pitchFamily="34" charset="-122"/>
                 <a:cs typeface="Microsoft JhengHei" pitchFamily="34" charset="-120"/>
               </a:rPr>
-              <a:t>聯合療法顯著降低腫瘤復發。</a:t>
+              <a:t>將招募 455 名參與者進行影像檢查。</a:t>
+            </a:r>
+            <a:endParaRPr lang="en-US" sz="1800" dirty="0"/>
+          </a:p>
+          <a:p>
+            <a:pPr marL="342900" indent="-342900">
+              <a:spcAft>
+                <a:spcPts val="800"/>
+              </a:spcAft>
+              <a:buSzPct val="100000"/>
+              <a:buChar char="•"/>
+            </a:pPr>
+            <a:r>
+              <a:rPr lang="en-US" sz="1800" dirty="0">
+                <a:solidFill>
+                  <a:srgbClr val="333333"/>
+                </a:solidFill>
+                <a:latin typeface="Microsoft JhengHei" pitchFamily="34" charset="0"/>
+                <a:ea typeface="Microsoft JhengHei" pitchFamily="34" charset="-122"/>
+                <a:cs typeface="Microsoft JhengHei" pitchFamily="34" charset="-120"/>
+              </a:rPr>
+              <a:t>主要終點：HCC 檢出率。</a:t>
+            </a:r>
+            <a:endParaRPr lang="en-US" sz="1800" dirty="0"/>
+          </a:p>
+          <a:p>
+            <a:pPr marL="342900" indent="-342900">
+              <a:spcAft>
+                <a:spcPts val="800"/>
+              </a:spcAft>
+              <a:buSzPct val="100000"/>
+              <a:buChar char="•"/>
+            </a:pPr>
+            <a:r>
+              <a:rPr lang="en-US" sz="1800" dirty="0">
+                <a:solidFill>
+                  <a:srgbClr val="333333"/>
+                </a:solidFill>
+                <a:latin typeface="Microsoft JhengHei" pitchFamily="34" charset="0"/>
+                <a:ea typeface="Microsoft JhengHei" pitchFamily="34" charset="-122"/>
+                <a:cs typeface="Microsoft JhengHei" pitchFamily="34" charset="-120"/>
+              </a:rPr>
+              <a:t>研究已獲多個機構批准。</a:t>
             </a:r>
             <a:endParaRPr lang="en-US" sz="1800" dirty="0"/>
           </a:p>
@@ -6392,7 +6434,7 @@
                   <a:srgbClr val="888888"/>
                 </a:solidFill>
               </a:rPr>
-              <a:t>Liu Qianshi, Liu Yiqiang, Zhou Yue et al.. Cancer research. 2026-04-15 DOI: 10.1158/0008-5472.CAN-25-0346</a:t>
+              <a:t>Park Hyo Jung, Lee Dong Ho, Chang Won et al.. BMJ open. 2026-04-24 DOI: 10.1136/bmjopen-2026-116809</a:t>
             </a:r>
             <a:endParaRPr lang="en-US" sz="800" dirty="0"/>
           </a:p>
@@ -6592,7 +6634,7 @@
                   </a:extLst>
                 </a:hlinkClick>
               </a:rPr>
-              <a:t>Cancer-Associated Fibroblasts Promote Tumor Immunosuppression in Hepatocellular Carcinoma via the NNMT-ANGPTL4 Axis.</a:t>
+              <a:t>Time-of-day of first checkpoint inhibitor dose influences clinical outcomes and immune responses in hepatocellular carcinoma.</a:t>
             </a:r>
             <a:endParaRPr lang="en-US" sz="2400" dirty="0"/>
           </a:p>
@@ -6628,7 +6670,7 @@
                   <a:srgbClr val="888888"/>
                 </a:solidFill>
               </a:rPr>
-              <a:t>Advanced science (Weinheim, Baden-Wurttemberg, Germany)  ·  Basic Research  ·  🌏 Asia</a:t>
+              <a:t>Journal for immunotherapy of cancer  ·  IF 10.9  ·  Retrospective Study</a:t>
             </a:r>
             <a:endParaRPr lang="en-US" sz="1000" dirty="0"/>
           </a:p>
@@ -6671,7 +6713,7 @@
                 <a:ea typeface="Microsoft JhengHei" pitchFamily="34" charset="-122"/>
                 <a:cs typeface="Microsoft JhengHei" pitchFamily="34" charset="-120"/>
               </a:rPr>
-              <a:t>CAFs 促進 HCC 的免疫抑制。</a:t>
+              <a:t>ICI 時間影響治療效果。</a:t>
             </a:r>
             <a:endParaRPr lang="en-US" sz="1800" dirty="0"/>
           </a:p>
@@ -6692,7 +6734,7 @@
                 <a:ea typeface="Microsoft JhengHei" pitchFamily="34" charset="-122"/>
                 <a:cs typeface="Microsoft JhengHei" pitchFamily="34" charset="-120"/>
               </a:rPr>
-              <a:t>NNMT 調控 ANGPTL4 分泌。</a:t>
+              <a:t>早晨劑量改善無進展生存期。</a:t>
             </a:r>
             <a:endParaRPr lang="en-US" sz="1800" dirty="0"/>
           </a:p>
@@ -6713,7 +6755,7 @@
                 <a:ea typeface="Microsoft JhengHei" pitchFamily="34" charset="-122"/>
                 <a:cs typeface="Microsoft JhengHei" pitchFamily="34" charset="-120"/>
               </a:rPr>
-              <a:t>ANGPTL4 增強腫瘤免疫逃逸。</a:t>
+              <a:t>早晨組免疫反應不同。</a:t>
             </a:r>
             <a:endParaRPr lang="en-US" sz="1800" dirty="0"/>
           </a:p>
@@ -6749,7 +6791,7 @@
                   <a:srgbClr val="888888"/>
                 </a:solidFill>
               </a:rPr>
-              <a:t>Lu Shounan, Ke Shanjia, Yu Hongjun et al.. Advanced science (Weinheim, Baden-Wurttemberg, Germany). 2026-04-14 DOI: 10.1002/advs.202521418</a:t>
+              <a:t>Li Howard L, Charmsaz Soren, Reisman Benjamin J et al.. Journal for immunotherapy of cancer. 2026-04-21 DOI: 10.1136/jitc-2025-014070</a:t>
             </a:r>
             <a:endParaRPr lang="en-US" sz="800" dirty="0"/>
           </a:p>
@@ -6949,7 +6991,7 @@
                   </a:extLst>
                 </a:hlinkClick>
               </a:rPr>
-              <a:t>Selective depletion of virus-specific CD8 T cells from the liver after PD-1 therapy with Fc-intact antibody during chronic infection.</a:t>
+              <a:t>Cost-effectiveness analysis of atezolizumab and bevacizumab as first-line systemic therapy in unresectable hepatocellular carcinoma in Malaysia.</a:t>
             </a:r>
             <a:endParaRPr lang="en-US" sz="2400" dirty="0"/>
           </a:p>
@@ -6985,7 +7027,7 @@
                   <a:srgbClr val="888888"/>
                 </a:solidFill>
               </a:rPr>
-              <a:t>Proceedings of the National Academy of Sciences of the United States of America  ·  Basic Research  ·  🌏 Asia</a:t>
+              <a:t>Journal of medical economics  ·  Meta-Analysis</a:t>
             </a:r>
             <a:endParaRPr lang="en-US" sz="1000" dirty="0"/>
           </a:p>
@@ -7028,7 +7070,7 @@
                 <a:ea typeface="Microsoft JhengHei" pitchFamily="34" charset="-122"/>
                 <a:cs typeface="Microsoft JhengHei" pitchFamily="34" charset="-120"/>
               </a:rPr>
-              <a:t>Fc區域影響PD-1療法效果。</a:t>
+              <a:t>評估atezolizumab加bevacizumab的成本效益</a:t>
             </a:r>
             <a:endParaRPr lang="en-US" sz="1800" dirty="0"/>
           </a:p>
@@ -7049,7 +7091,7 @@
                 <a:ea typeface="Microsoft JhengHei" pitchFamily="34" charset="-122"/>
                 <a:cs typeface="Microsoft JhengHei" pitchFamily="34" charset="-120"/>
               </a:rPr>
-              <a:t>選擇性耗竭病毒特異性CD8 T細胞。</a:t>
+              <a:t>與lenvatinib和sorafenib比較於馬來西亞</a:t>
             </a:r>
             <a:endParaRPr lang="en-US" sz="1800" dirty="0"/>
           </a:p>
@@ -7070,7 +7112,7 @@
                 <a:ea typeface="Microsoft JhengHei" pitchFamily="34" charset="-122"/>
                 <a:cs typeface="Microsoft JhengHei" pitchFamily="34" charset="-120"/>
               </a:rPr>
-              <a:t>耗竭由激活性FcγR III介導。</a:t>
+              <a:t>atezolizumab加bevacizumab獲得最高QALYs</a:t>
             </a:r>
             <a:endParaRPr lang="en-US" sz="1800" dirty="0"/>
           </a:p>
@@ -7091,7 +7133,7 @@
                 <a:ea typeface="Microsoft JhengHei" pitchFamily="34" charset="-122"/>
                 <a:cs typeface="Microsoft JhengHei" pitchFamily="34" charset="-120"/>
               </a:rPr>
-              <a:t>吞噬細胞是關鍵效應細胞。</a:t>
+              <a:t>增量成本效益比為RM 51,399每QALY</a:t>
             </a:r>
             <a:endParaRPr lang="en-US" sz="1800" dirty="0"/>
           </a:p>
@@ -7112,7 +7154,7 @@
                 <a:ea typeface="Microsoft JhengHei" pitchFamily="34" charset="-122"/>
                 <a:cs typeface="Microsoft JhengHei" pitchFamily="34" charset="-120"/>
               </a:rPr>
-              <a:t>對肝癌治療的啟示。</a:t>
+              <a:t>研究結果支持公共衛生政策資金擴展</a:t>
             </a:r>
             <a:endParaRPr lang="en-US" sz="1800" dirty="0"/>
           </a:p>
@@ -7148,7 +7190,7 @@
                   <a:srgbClr val="888888"/>
                 </a:solidFill>
               </a:rPr>
-              <a:t>Hashimoto Masao, Nasti Tahseen H, Jin Hyun-Tak et al.. Proceedings of the National Academy of Sciences of the United States of America. 2026-04-08 DOI: 10.1073/pnas.2427192123</a:t>
+              <a:t>Wong Yoke Fui, Mohamed Rosmawati, Sulaiman Shah Audi Adawiah et al.. Journal of medical economics. 2026-04-25 DOI: 10.1080/13696998.2026.2658448</a:t>
             </a:r>
             <a:endParaRPr lang="en-US" sz="800" dirty="0"/>
           </a:p>
@@ -7348,7 +7390,7 @@
                   </a:extLst>
                 </a:hlinkClick>
               </a:rPr>
-              <a:t>… plus transarterial chemoembolization and PD-1 inhibitors as conversion therapies for unresectable intermediate-advanced hepatocellular carcinoma: a phase 2 trial …</a:t>
+              <a:t>Prognostic nutritional index and the survival of patients with hepatocellular carcinoma on immune checkpoint inhibitors: a meta-analysis</a:t>
             </a:r>
             <a:endParaRPr lang="en-US" sz="2400" dirty="0"/>
           </a:p>
@@ -7384,7 +7426,7 @@
                   <a:srgbClr val="888888"/>
                 </a:solidFill>
               </a:rPr>
-              <a:t>… and Targeted Therapy  ·  RCT Phase 2</a:t>
+              <a:t>BMC cancer  ·  Meta-Analysis</a:t>
             </a:r>
             <a:endParaRPr lang="en-US" sz="1000" dirty="0"/>
           </a:p>
@@ -7427,7 +7469,7 @@
                 <a:ea typeface="Microsoft JhengHei" pitchFamily="34" charset="-122"/>
                 <a:cs typeface="Microsoft JhengHei" pitchFamily="34" charset="-120"/>
               </a:rPr>
-              <a:t>針對不可切除HCC的組合療法</a:t>
+              <a:t>預後營養指數影響生存率。</a:t>
             </a:r>
             <a:endParaRPr lang="en-US" sz="1800" dirty="0"/>
           </a:p>
@@ -7448,7 +7490,7 @@
                 <a:ea typeface="Microsoft JhengHei" pitchFamily="34" charset="-122"/>
                 <a:cs typeface="Microsoft JhengHei" pitchFamily="34" charset="-120"/>
               </a:rPr>
-              <a:t>經動脈化療栓塞與PD-1抑制劑</a:t>
+              <a:t>HCC患者免疫檢查點抑制劑分析。</a:t>
             </a:r>
             <a:endParaRPr lang="en-US" sz="1800" dirty="0"/>
           </a:p>
@@ -7469,7 +7511,7 @@
                 <a:ea typeface="Microsoft JhengHei" pitchFamily="34" charset="-122"/>
                 <a:cs typeface="Microsoft JhengHei" pitchFamily="34" charset="-120"/>
               </a:rPr>
-              <a:t>第二期試驗顯示良好結果</a:t>
+              <a:t>營養狀態與免疫反應相關。</a:t>
             </a:r>
             <a:endParaRPr lang="en-US" sz="1800" dirty="0"/>
           </a:p>
@@ -7505,7 +7547,7 @@
                   <a:srgbClr val="888888"/>
                 </a:solidFill>
               </a:rPr>
-              <a:t>X Zhang, H Cai, W Peng. … and Targeted Therapy. 2026</a:t>
+              <a:t>J Fu, W Peng, J Jiang. BMC cancer. 2026</a:t>
             </a:r>
             <a:endParaRPr lang="en-US" sz="800" dirty="0"/>
           </a:p>

--- a/docs/digest-zh.pptx
+++ b/docs/digest-zh.pptx
@@ -2269,7 +2269,7 @@
                   <a:srgbClr val="888888"/>
                 </a:solidFill>
               </a:rPr>
-              <a:t>2026-04-20 — 2026-04-27</a:t>
+              <a:t>2026-04-27 — 2026-05-04</a:t>
             </a:r>
             <a:endParaRPr lang="en-US" sz="1400" dirty="0"/>
           </a:p>
@@ -2460,7 +2460,7 @@
                   </a:extLst>
                 </a:hlinkClick>
               </a:rPr>
-              <a:t>Radiotherapy versus local ablation therapy for the treatment of hepatocellular carcinoma: A systematic review and meta-analysis.</a:t>
+              <a:t>… plus transarterial chemoembolization and PD-1 inhibitors as conversion therapies for unresectable intermediate-advanced hepatocellular carcinoma: a phase 2 trial …</a:t>
             </a:r>
             <a:endParaRPr lang="en-US" sz="2400" dirty="0"/>
           </a:p>
@@ -2496,7 +2496,7 @@
                   <a:srgbClr val="888888"/>
                 </a:solidFill>
               </a:rPr>
-              <a:t>Journal of Clinical …  ·  Meta-Analysis</a:t>
+              <a:t>… and Targeted Therapy  ·  RCT Phase 2</a:t>
             </a:r>
             <a:endParaRPr lang="en-US" sz="1000" dirty="0"/>
           </a:p>
@@ -2539,7 +2539,7 @@
                 <a:ea typeface="Microsoft JhengHei" pitchFamily="34" charset="-122"/>
                 <a:cs typeface="Microsoft JhengHei" pitchFamily="34" charset="-120"/>
               </a:rPr>
-              <a:t>放射治療與局部消融比較</a:t>
+              <a:t>針對不可切除HCC的組合療法</a:t>
             </a:r>
             <a:endParaRPr lang="en-US" sz="1800" dirty="0"/>
           </a:p>
@@ -2560,7 +2560,7 @@
                 <a:ea typeface="Microsoft JhengHei" pitchFamily="34" charset="-122"/>
                 <a:cs typeface="Microsoft JhengHei" pitchFamily="34" charset="-120"/>
               </a:rPr>
-              <a:t>針對肝細胞癌（HCC）治療</a:t>
+              <a:t>使用經動脈化療栓塞(TACE)</a:t>
             </a:r>
             <a:endParaRPr lang="en-US" sz="1800" dirty="0"/>
           </a:p>
@@ -2581,7 +2581,7 @@
                 <a:ea typeface="Microsoft JhengHei" pitchFamily="34" charset="-122"/>
                 <a:cs typeface="Microsoft JhengHei" pitchFamily="34" charset="-120"/>
               </a:rPr>
-              <a:t>評估局部無進展生存期</a:t>
+              <a:t>PD-1抑制劑提升療效</a:t>
             </a:r>
             <a:endParaRPr lang="en-US" sz="1800" dirty="0"/>
           </a:p>
@@ -2602,7 +2602,7 @@
                 <a:ea typeface="Microsoft JhengHei" pitchFamily="34" charset="-122"/>
                 <a:cs typeface="Microsoft JhengHei" pitchFamily="34" charset="-120"/>
               </a:rPr>
-              <a:t>包括射頻與微波消融</a:t>
+              <a:t>第二期試驗顯示良好結果</a:t>
             </a:r>
             <a:endParaRPr lang="en-US" sz="1800" dirty="0"/>
           </a:p>
@@ -2623,7 +2623,7 @@
                 <a:ea typeface="Microsoft JhengHei" pitchFamily="34" charset="-122"/>
                 <a:cs typeface="Microsoft JhengHei" pitchFamily="34" charset="-120"/>
               </a:rPr>
-              <a:t>進行系統性回顧與統合分析</a:t>
+              <a:t>有潛力轉化為可切除病變</a:t>
             </a:r>
             <a:endParaRPr lang="en-US" sz="1800" dirty="0"/>
           </a:p>
@@ -2659,7 +2659,7 @@
                   <a:srgbClr val="888888"/>
                 </a:solidFill>
               </a:rPr>
-              <a:t>SH Bae, SH Choi, SM Yoon. Journal of Clinical …. 2026</a:t>
+              <a:t>X Zhang, H Cai, W Peng. … and Targeted Therapy. 2026</a:t>
             </a:r>
             <a:endParaRPr lang="en-US" sz="800" dirty="0"/>
           </a:p>
@@ -2859,7 +2859,7 @@
                   </a:extLst>
                 </a:hlinkClick>
               </a:rPr>
-              <a:t>… on interventional therapy and immune checkpoint inhibitors (ICIs) in patients with intermediate-and advanced-stage hepatocellular carcinoma: a systematic review …</a:t>
+              <a:t>Radiologic Response Assessment With RECIST 1.1 and mRECIST in Patients With Hepatocellular Carcinoma Treated With Atezolizumab Plus Bevacizumab.</a:t>
             </a:r>
             <a:endParaRPr lang="en-US" sz="2400" dirty="0"/>
           </a:p>
@@ -2895,7 +2895,7 @@
                   <a:srgbClr val="888888"/>
                 </a:solidFill>
               </a:rPr>
-              <a:t>… , Immunotherapy  ·  Systematic Review</a:t>
+              <a:t>Korean journal of radiology  ·  Retrospective Study  ·  🌏 Asia</a:t>
             </a:r>
             <a:endParaRPr lang="en-US" sz="1000" dirty="0"/>
           </a:p>
@@ -2938,7 +2938,7 @@
                 <a:ea typeface="Microsoft JhengHei" pitchFamily="34" charset="-122"/>
                 <a:cs typeface="Microsoft JhengHei" pitchFamily="34" charset="-120"/>
               </a:rPr>
-              <a:t>聯合療法在HCC中顯示潛力。</a:t>
+              <a:t>研究比較RECIST 1.1與mRECIST。</a:t>
             </a:r>
             <a:endParaRPr lang="en-US" sz="1800" dirty="0"/>
           </a:p>
@@ -2959,7 +2959,7 @@
                 <a:ea typeface="Microsoft JhengHei" pitchFamily="34" charset="-122"/>
                 <a:cs typeface="Microsoft JhengHei" pitchFamily="34" charset="-120"/>
               </a:rPr>
-              <a:t>介入療法增強ICI療效。</a:t>
+              <a:t>207名接受Atezo/Bev的HCC患者。</a:t>
             </a:r>
             <a:endParaRPr lang="en-US" sz="1800" dirty="0"/>
           </a:p>
@@ -2980,7 +2980,49 @@
                 <a:ea typeface="Microsoft JhengHei" pitchFamily="34" charset="-122"/>
                 <a:cs typeface="Microsoft JhengHei" pitchFamily="34" charset="-120"/>
               </a:rPr>
-              <a:t>需要更多全面的臨床試驗。</a:t>
+              <a:t>mRECIST識別的反應者多於RECIST 1.1。</a:t>
+            </a:r>
+            <a:endParaRPr lang="en-US" sz="1800" dirty="0"/>
+          </a:p>
+          <a:p>
+            <a:pPr marL="342900" indent="-342900">
+              <a:spcAft>
+                <a:spcPts val="800"/>
+              </a:spcAft>
+              <a:buSzPct val="100000"/>
+              <a:buChar char="•"/>
+            </a:pPr>
+            <a:r>
+              <a:rPr lang="en-US" sz="1800" dirty="0">
+                <a:solidFill>
+                  <a:srgbClr val="333333"/>
+                </a:solidFill>
+                <a:latin typeface="Microsoft JhengHei" pitchFamily="34" charset="0"/>
+                <a:ea typeface="Microsoft JhengHei" pitchFamily="34" charset="-122"/>
+                <a:cs typeface="Microsoft JhengHei" pitchFamily="34" charset="-120"/>
+              </a:rPr>
+              <a:t>RECIST 1.1顯示優秀的讀者一致性。</a:t>
+            </a:r>
+            <a:endParaRPr lang="en-US" sz="1800" dirty="0"/>
+          </a:p>
+          <a:p>
+            <a:pPr marL="342900" indent="-342900">
+              <a:spcAft>
+                <a:spcPts val="800"/>
+              </a:spcAft>
+              <a:buSzPct val="100000"/>
+              <a:buChar char="•"/>
+            </a:pPr>
+            <a:r>
+              <a:rPr lang="en-US" sz="1800" dirty="0">
+                <a:solidFill>
+                  <a:srgbClr val="333333"/>
+                </a:solidFill>
+                <a:latin typeface="Microsoft JhengHei" pitchFamily="34" charset="0"/>
+                <a:ea typeface="Microsoft JhengHei" pitchFamily="34" charset="-122"/>
+                <a:cs typeface="Microsoft JhengHei" pitchFamily="34" charset="-120"/>
+              </a:rPr>
+              <a:t>兩種方法獨立預測整體生存率。</a:t>
             </a:r>
             <a:endParaRPr lang="en-US" sz="1800" dirty="0"/>
           </a:p>
@@ -3016,7 +3058,7 @@
                   <a:srgbClr val="888888"/>
                 </a:solidFill>
               </a:rPr>
-              <a:t>J Su, Y Su, R Mai. … , Immunotherapy. 2026</a:t>
+              <a:t>Jeong Boryeong, Park Hyo Jung, Choi Won-Mook et al.. Korean journal of radiology. 2026-04-30 DOI: 10.3348/kjr.2025.1849</a:t>
             </a:r>
             <a:endParaRPr lang="en-US" sz="800" dirty="0"/>
           </a:p>
@@ -3216,7 +3258,7 @@
                   </a:extLst>
                 </a:hlinkClick>
               </a:rPr>
-              <a:t>Comparative efficacy and safety of immune checkpoint inhibitor–based strategies in advanced hepatocellular carcinoma: a systematic review and network meta …</a:t>
+              <a:t>Identification of Risk Factors for the Local Recurrence of Hepatocellular Carcinoma Post-radiofrequency Ablation.</a:t>
             </a:r>
             <a:endParaRPr lang="en-US" sz="2400" dirty="0"/>
           </a:p>
@@ -3252,7 +3294,7 @@
                   <a:srgbClr val="888888"/>
                 </a:solidFill>
               </a:rPr>
-              <a:t>… Journal of Surgery  ·  Systematic Review</a:t>
+              <a:t>Anticancer research  ·  Retrospective Study  ·  🌏 Asia</a:t>
             </a:r>
             <a:endParaRPr lang="en-US" sz="1000" dirty="0"/>
           </a:p>
@@ -3295,7 +3337,7 @@
                 <a:ea typeface="Microsoft JhengHei" pitchFamily="34" charset="-122"/>
                 <a:cs typeface="Microsoft JhengHei" pitchFamily="34" charset="-120"/>
               </a:rPr>
-              <a:t>免疫檢查點抑制劑顯示潛力。</a:t>
+              <a:t>射頻消融對HCC有效。</a:t>
             </a:r>
             <a:endParaRPr lang="en-US" sz="1800" dirty="0"/>
           </a:p>
@@ -3316,7 +3358,7 @@
                 <a:ea typeface="Microsoft JhengHei" pitchFamily="34" charset="-122"/>
                 <a:cs typeface="Microsoft JhengHei" pitchFamily="34" charset="-120"/>
               </a:rPr>
-              <a:t>聯合療法改善治療效果。</a:t>
+              <a:t>局部復發率在RFA後變化大。</a:t>
             </a:r>
             <a:endParaRPr lang="en-US" sz="1800" dirty="0"/>
           </a:p>
@@ -3337,7 +3379,49 @@
                 <a:ea typeface="Microsoft JhengHei" pitchFamily="34" charset="-122"/>
                 <a:cs typeface="Microsoft JhengHei" pitchFamily="34" charset="-120"/>
               </a:rPr>
-              <a:t>安全性在策略間有所不同。</a:t>
+              <a:t>腫瘤大小和位置是關鍵風險因素。</a:t>
+            </a:r>
+            <a:endParaRPr lang="en-US" sz="1800" dirty="0"/>
+          </a:p>
+          <a:p>
+            <a:pPr marL="342900" indent="-342900">
+              <a:spcAft>
+                <a:spcPts val="800"/>
+              </a:spcAft>
+              <a:buSzPct val="100000"/>
+              <a:buChar char="•"/>
+            </a:pPr>
+            <a:r>
+              <a:rPr lang="en-US" sz="1800" dirty="0">
+                <a:solidFill>
+                  <a:srgbClr val="333333"/>
+                </a:solidFill>
+                <a:latin typeface="Microsoft JhengHei" pitchFamily="34" charset="0"/>
+                <a:ea typeface="Microsoft JhengHei" pitchFamily="34" charset="-122"/>
+                <a:cs typeface="Microsoft JhengHei" pitchFamily="34" charset="-120"/>
+              </a:rPr>
+              <a:t>RFA前進行TACE影響LR組復發。</a:t>
+            </a:r>
+            <a:endParaRPr lang="en-US" sz="1800" dirty="0"/>
+          </a:p>
+          <a:p>
+            <a:pPr marL="342900" indent="-342900">
+              <a:spcAft>
+                <a:spcPts val="800"/>
+              </a:spcAft>
+              <a:buSzPct val="100000"/>
+              <a:buChar char="•"/>
+            </a:pPr>
+            <a:r>
+              <a:rPr lang="en-US" sz="1800" dirty="0">
+                <a:solidFill>
+                  <a:srgbClr val="333333"/>
+                </a:solidFill>
+                <a:latin typeface="Microsoft JhengHei" pitchFamily="34" charset="0"/>
+                <a:ea typeface="Microsoft JhengHei" pitchFamily="34" charset="-122"/>
+                <a:cs typeface="Microsoft JhengHei" pitchFamily="34" charset="-120"/>
+              </a:rPr>
+              <a:t>對於LR病例可能需考慮其他治療。</a:t>
             </a:r>
             <a:endParaRPr lang="en-US" sz="1800" dirty="0"/>
           </a:p>
@@ -3373,7 +3457,7 @@
                   <a:srgbClr val="888888"/>
                 </a:solidFill>
               </a:rPr>
-              <a:t>X Yu, X Zhang, O Jiang. … Journal of Surgery. 2026</a:t>
+              <a:t>Tanaka Kosuke, Kuwano Akifumi, Yada Masayoshi et al.. Anticancer research. 2026-04-28 DOI: 10.21873/anticanres.18141</a:t>
             </a:r>
             <a:endParaRPr lang="en-US" sz="800" dirty="0"/>
           </a:p>
@@ -3590,7 +3674,7 @@
                   <a:srgbClr val="FFFFFF"/>
                 </a:solidFill>
               </a:rPr>
-              <a:t>1. **免疫療法的長期生存潛力**  </a:t>
+              <a:t>1. **新療法的需求**  </a:t>
             </a:r>
             <a:endParaRPr lang="en-US" sz="1200" dirty="0"/>
           </a:p>
@@ -3607,7 +3691,7 @@
                   <a:srgbClr val="FFFFFF"/>
                 </a:solidFill>
               </a:rPr>
-              <a:t>   Immunotherapy has demonstrated the potential for long-term survival and even cure in advanced hepatocellular carcinoma (HCC), as evidenced by recent studies utilizing mixture cure models (MCMs).  </a:t>
+              <a:t>   The study highlights the urgent need for innovative therapies to improve survival rates in hepatocellular carcinoma (HCC) patients, as current treatment options remain limited.  </a:t>
             </a:r>
             <a:endParaRPr lang="en-US" sz="1200" dirty="0"/>
           </a:p>
@@ -3624,7 +3708,7 @@
                   <a:srgbClr val="FFFFFF"/>
                 </a:solidFill>
               </a:rPr>
-              <a:t>   免疫療法在晚期肝細胞癌（HCC）中顯示出長期生存甚至治癒的潛力，這一點在最近利用混合治癒模型（MCMs）的研究中得到了證實。</a:t>
+              <a:t>   研究強調了創新療法在肝細胞癌（HCC）患者中改善生存率的迫切需求，因為目前的治療選擇仍然有限。</a:t>
             </a:r>
             <a:endParaRPr lang="en-US" sz="1200" dirty="0"/>
           </a:p>
@@ -3650,7 +3734,7 @@
                   <a:srgbClr val="FFFFFF"/>
                 </a:solidFill>
               </a:rPr>
-              <a:t>2. **個性化治療策略的必要性**  </a:t>
+              <a:t>2. **預後生物標記的挑戰**  </a:t>
             </a:r>
             <a:endParaRPr lang="en-US" sz="1200" dirty="0"/>
           </a:p>
@@ -3667,7 +3751,7 @@
                   <a:srgbClr val="FFFFFF"/>
                 </a:solidFill>
               </a:rPr>
-              <a:t>   The era of immunotherapy necessitates personalized treatment strategies for HCC, as recurrence rates remain high despite curative intent in early-stage cases.  </a:t>
+              <a:t>   Identifying reliable prognostic biomarkers for HCC remains a significant challenge, which is crucial for tailoring treatment strategies and improving patient outcomes.  </a:t>
             </a:r>
             <a:endParaRPr lang="en-US" sz="1200" dirty="0"/>
           </a:p>
@@ -3684,7 +3768,7 @@
                   <a:srgbClr val="FFFFFF"/>
                 </a:solidFill>
               </a:rPr>
-              <a:t>   免疫療法的時代要求為HCC制定個性化的治療策略，因為儘管早期病例有治癒意圖，但復發率仍然很高。</a:t>
+              <a:t>   確定肝細胞癌的可靠預後生物標記仍然是一個重大挑戰，這對於量身定制治療策略和改善患者預後至關重要。</a:t>
             </a:r>
             <a:endParaRPr lang="en-US" sz="1200" dirty="0"/>
           </a:p>
@@ -3710,7 +3794,7 @@
                   <a:srgbClr val="FFFFFF"/>
                 </a:solidFill>
               </a:rPr>
-              <a:t>3. **局部療法與免疫檢查點抑制劑的結合**  </a:t>
+              <a:t>3. **代謝重編程的角色**  </a:t>
             </a:r>
             <a:endParaRPr lang="en-US" sz="1200" dirty="0"/>
           </a:p>
@@ -3727,7 +3811,7 @@
                   <a:srgbClr val="FFFFFF"/>
                 </a:solidFill>
               </a:rPr>
-              <a:t>   Combining local therapies, such as stereotactic body radiotherapy, with immune checkpoint inhibitors shows promising results in advanced HCC, enhancing treatment efficacy.  </a:t>
+              <a:t>   The role of metabolic reprogramming in HCC malignancy and immune evasion is increasingly recognized, suggesting potential targets for therapeutic intervention.  </a:t>
             </a:r>
             <a:endParaRPr lang="en-US" sz="1200" dirty="0"/>
           </a:p>
@@ -3744,7 +3828,7 @@
                   <a:srgbClr val="FFFFFF"/>
                 </a:solidFill>
               </a:rPr>
-              <a:t>   將局部療法（如立體定向體放療）與免疫檢查點抑制劑結合，顯示出在晚期HCC中的良好效果，增強了治療的有效性。</a:t>
+              <a:t>   代謝重編程在HCC惡性腫瘤和免疫逃逸中的角色越來越受到重視，這表明可能成為治療介入的潛在靶點。</a:t>
             </a:r>
             <a:endParaRPr lang="en-US" sz="1200" dirty="0"/>
           </a:p>
@@ -3770,7 +3854,7 @@
                   <a:srgbClr val="FFFFFF"/>
                 </a:solidFill>
               </a:rPr>
-              <a:t>4. **時間因素對免疫療法的影響**  </a:t>
+              <a:t>4. **免疫治療的整合**  </a:t>
             </a:r>
             <a:endParaRPr lang="en-US" sz="1200" dirty="0"/>
           </a:p>
@@ -3787,7 +3871,7 @@
                   <a:srgbClr val="FFFFFF"/>
                 </a:solidFill>
               </a:rPr>
-              <a:t>   The timing of immune checkpoint inhibitor administration may influence clinical outcomes, highlighting the importance of circadian rhythms in treatment efficacy.  </a:t>
+              <a:t>   The integration of immune checkpoint inhibitors with other therapies, such as anti-VEGF agents, shows promise in enhancing treatment efficacy for advanced HCC.  </a:t>
             </a:r>
             <a:endParaRPr lang="en-US" sz="1200" dirty="0"/>
           </a:p>
@@ -3804,7 +3888,7 @@
                   <a:srgbClr val="FFFFFF"/>
                 </a:solidFill>
               </a:rPr>
-              <a:t>   免疫檢查點抑制劑的給藥時間可能會影響臨床結果，強調了生物節律在治療效果中的重要性。</a:t>
+              <a:t>   免疫檢查點抑制劑與其他療法（如抗VEGF藥物）的整合顯示出增強晚期HCC治療效果的潛力。</a:t>
             </a:r>
             <a:endParaRPr lang="en-US" sz="1200" dirty="0"/>
           </a:p>
@@ -3830,7 +3914,7 @@
                   <a:srgbClr val="FFFFFF"/>
                 </a:solidFill>
               </a:rPr>
-              <a:t>5. **營養指標與預後關聯**  </a:t>
+              <a:t>5. **局部消融的風險因素**  </a:t>
             </a:r>
             <a:endParaRPr lang="en-US" sz="1200" dirty="0"/>
           </a:p>
@@ -3847,7 +3931,7 @@
                   <a:srgbClr val="FFFFFF"/>
                 </a:solidFill>
               </a:rPr>
-              <a:t>   The prognostic nutritional index has been associated with survival outcomes in HCC patients treated with immune checkpoint inhibitors, suggesting that nutritional status may play a role in treatment efficacy.</a:t>
+              <a:t>   Understanding the risk factors for local recurrence after radiofrequency ablation is essential for optimizing treatment protocols and improving long-term outcomes in HCC patients.</a:t>
             </a:r>
             <a:endParaRPr lang="en-US" sz="1200" dirty="0"/>
           </a:p>
@@ -3993,7 +4077,7 @@
                   <a:srgbClr val="FFFFFF"/>
                 </a:solidFill>
               </a:rPr>
-              <a:t>預後營養指數與接受免疫檢查點抑制劑治療的HCC患者的生存結果相關，這表明營養狀況可能在治療效果中扮演角色。</a:t>
+              <a:t>理解射頻消融後局部復發的風險因素對於優化治療方案和改善HCC患者的長期預後至關重要。</a:t>
             </a:r>
             <a:endParaRPr lang="en-US" sz="1200" dirty="0"/>
           </a:p>
@@ -4045,7 +4129,7 @@
                   <a:srgbClr val="FFFFFF"/>
                 </a:solidFill>
               </a:rPr>
-              <a:t>1. **混合治癒模型的應用**  </a:t>
+              <a:t>1. **生物標記的發現與驗證**  </a:t>
             </a:r>
             <a:endParaRPr lang="en-US" sz="1200" dirty="0"/>
           </a:p>
@@ -4062,7 +4146,7 @@
                   <a:srgbClr val="FFFFFF"/>
                 </a:solidFill>
               </a:rPr>
-              <a:t>   Further studies should apply mixture cure models in HCC to better estimate the fraction of long-term survivors and identify predictors of cure.  </a:t>
+              <a:t>   Future studies should focus on the discovery and validation of robust prognostic biomarkers to enhance personalized treatment approaches in HCC.  </a:t>
             </a:r>
             <a:endParaRPr lang="en-US" sz="1200" dirty="0"/>
           </a:p>
@@ -4079,7 +4163,7 @@
                   <a:srgbClr val="FFFFFF"/>
                 </a:solidFill>
               </a:rPr>
-              <a:t>   進一步的研究應在HCC中應用混合治癒模型，以更好地估計長期生存者的比例並識別治癒的預測因子。</a:t>
+              <a:t>   未來研究應專注於發現和驗證穩健的預後生物標記，以增強HCC的個性化治療方法。</a:t>
             </a:r>
             <a:endParaRPr lang="en-US" sz="1200" dirty="0"/>
           </a:p>
@@ -4105,7 +4189,7 @@
                   <a:srgbClr val="FFFFFF"/>
                 </a:solidFill>
               </a:rPr>
-              <a:t>2. **個性化治療的臨床試驗**  </a:t>
+              <a:t>2. **免疫治療組合的探索**  </a:t>
             </a:r>
             <a:endParaRPr lang="en-US" sz="1200" dirty="0"/>
           </a:p>
@@ -4122,7 +4206,7 @@
                   <a:srgbClr val="FFFFFF"/>
                 </a:solidFill>
               </a:rPr>
-              <a:t>   Large-scale clinical trials focusing on personalized treatment approaches in HCC patients receiving immunotherapy are needed to establish optimal strategies.  </a:t>
+              <a:t>   Investigating novel combinations of immune therapies with traditional treatments could provide synergistic effects and improve outcomes in HCC patients.  </a:t>
             </a:r>
             <a:endParaRPr lang="en-US" sz="1200" dirty="0"/>
           </a:p>
@@ -4139,7 +4223,7 @@
                   <a:srgbClr val="FFFFFF"/>
                 </a:solidFill>
               </a:rPr>
-              <a:t>   需要針對接受免疫療法的HCC患者進行大規模臨床試驗，專注於個性化治療方法，以確立最佳策略。</a:t>
+              <a:t>   探索免疫療法與傳統治療的新組合可能會提供協同效果並改善HCC患者的預後。</a:t>
             </a:r>
             <a:endParaRPr lang="en-US" sz="1200" dirty="0"/>
           </a:p>
@@ -4165,7 +4249,7 @@
                   <a:srgbClr val="FFFFFF"/>
                 </a:solidFill>
               </a:rPr>
-              <a:t>3. **時間因素的機制研究**  </a:t>
+              <a:t>3. **代謝重編程的機制研究**  </a:t>
             </a:r>
             <a:endParaRPr lang="en-US" sz="1200" dirty="0"/>
           </a:p>
@@ -4182,7 +4266,7 @@
                   <a:srgbClr val="FFFFFF"/>
                 </a:solidFill>
               </a:rPr>
-              <a:t>   Investigating the biological mechanisms behind the time-of-day effects on immune checkpoint inhibitor efficacy could lead to optimized treatment schedules.  </a:t>
+              <a:t>   Further research is needed to elucidate the mechanisms of metabolic reprogramming in HCC and its impact on tumor progression and immune response.  </a:t>
             </a:r>
             <a:endParaRPr lang="en-US" sz="1200" dirty="0"/>
           </a:p>
@@ -4199,7 +4283,7 @@
                   <a:srgbClr val="FFFFFF"/>
                 </a:solidFill>
               </a:rPr>
-              <a:t>   研究時間因素對免疫檢查點抑制劑療效的生物學機制，可能會導致最佳治療時間表的制定。</a:t>
+              <a:t>   需要進一步研究以闡明HCC中代謝重編程的機制及其對腫瘤進展和免疫反應的影響。</a:t>
             </a:r>
             <a:endParaRPr lang="en-US" sz="1200" dirty="0"/>
           </a:p>
@@ -4225,7 +4309,7 @@
                   <a:srgbClr val="FFFFFF"/>
                 </a:solidFill>
               </a:rPr>
-              <a:t>4. **營養干預的臨床應用**  </a:t>
+              <a:t>4. **局部治療的優化**  </a:t>
             </a:r>
             <a:endParaRPr lang="en-US" sz="1200" dirty="0"/>
           </a:p>
@@ -4242,7 +4326,7 @@
                   <a:srgbClr val="FFFFFF"/>
                 </a:solidFill>
               </a:rPr>
-              <a:t>   Exploring the role of nutritional interventions in conjunction with immunotherapy may enhance treatment outcomes for HCC patients.  </a:t>
+              <a:t>   Studies aimed at optimizing local ablation techniques and identifying patient-specific factors could reduce recurrence rates and enhance treatment efficacy.  </a:t>
             </a:r>
             <a:endParaRPr lang="en-US" sz="1200" dirty="0"/>
           </a:p>
@@ -4259,7 +4343,7 @@
                   <a:srgbClr val="FFFFFF"/>
                 </a:solidFill>
               </a:rPr>
-              <a:t>   探索營養干預與免疫療法結合的作用，可能會改善HCC患者的治療結果。</a:t>
+              <a:t>   旨在優化局部消融技術並識別患者特定因素的研究可以降低復發率並提高治療效果。</a:t>
             </a:r>
             <a:endParaRPr lang="en-US" sz="1200" dirty="0"/>
           </a:p>
@@ -4285,7 +4369,7 @@
                   <a:srgbClr val="FFFFFF"/>
                 </a:solidFill>
               </a:rPr>
-              <a:t>5. **局部療法的最佳化**  </a:t>
+              <a:t>5. **病毒性肝炎與免疫反應的關聯**  </a:t>
             </a:r>
             <a:endParaRPr lang="en-US" sz="1200" dirty="0"/>
           </a:p>
@@ -4302,7 +4386,7 @@
                   <a:srgbClr val="FFFFFF"/>
                 </a:solidFill>
               </a:rPr>
-              <a:t>   Future research should focus on optimizing the combination of local ablative therapies with immunotherapy to maximize patient benefits in HCC treatment.  </a:t>
+              <a:t>   Investigating the interplay between viral hepatitis and immune response in HCC could lead to better understanding and management of treatment outcomes.  </a:t>
             </a:r>
             <a:endParaRPr lang="en-US" sz="1200" dirty="0"/>
           </a:p>
@@ -4319,7 +4403,7 @@
                   <a:srgbClr val="FFFFFF"/>
                 </a:solidFill>
               </a:rPr>
-              <a:t>   未來的研究應專注於優化局部消融療法與免疫療法的結合，以最大化HCC治療中的患者受益。</a:t>
+              <a:t>   研究病毒性肝炎與HCC中免疫反應的相互作用可能有助於更好地理解和管理治療結果。</a:t>
             </a:r>
             <a:endParaRPr lang="en-US" sz="1200" dirty="0"/>
           </a:p>
@@ -4592,7 +4676,7 @@
                 <a:ea typeface="Arial" pitchFamily="34" charset="-122"/>
                 <a:cs typeface="Arial" pitchFamily="34" charset="-120"/>
               </a:rPr>
-              <a:t>Long-term survival and cure fraction in patients with advanced hepatocellular ca…</a:t>
+              <a:t>AdvanTIG-206: a phase II, randomized study of ociperlimab plus tislelizumab and …</a:t>
             </a:r>
             <a:endParaRPr lang="en-US" sz="1400" dirty="0"/>
           </a:p>
@@ -4629,7 +4713,7 @@
                 <a:ea typeface="Arial" pitchFamily="34" charset="-122"/>
                 <a:cs typeface="Arial" pitchFamily="34" charset="-120"/>
               </a:rPr>
-              <a:t>Optimal treatment selection for hepatocellular carcinoma in the era of immunothe…</a:t>
+              <a:t>Development and validation of a risk prediction model for patients with hepatoce…</a:t>
             </a:r>
             <a:endParaRPr lang="en-US" sz="1400" dirty="0"/>
           </a:p>
@@ -4666,7 +4750,7 @@
                 <a:ea typeface="Arial" pitchFamily="34" charset="-122"/>
                 <a:cs typeface="Arial" pitchFamily="34" charset="-120"/>
               </a:rPr>
-              <a:t>Pembrolizumab and stereotactic body radiotherapy combined in advanced hepatocell…</a:t>
+              <a:t>An etiology-stratified single-cell atlas identifies FABP4 as a prognostic marker…</a:t>
             </a:r>
             <a:endParaRPr lang="en-US" sz="1400" dirty="0"/>
           </a:p>
@@ -4703,7 +4787,7 @@
                 <a:ea typeface="Arial" pitchFamily="34" charset="-122"/>
                 <a:cs typeface="Arial" pitchFamily="34" charset="-120"/>
               </a:rPr>
-              <a:t>Multicentre prospective trial of abbreviated MRI using gadoxetic acid versus CT …</a:t>
+              <a:t>JOSD1 drives hepatocellular carcinoma malignancy by modulating the ubiquitinatio…</a:t>
             </a:r>
             <a:endParaRPr lang="en-US" sz="1400" dirty="0"/>
           </a:p>
@@ -4740,7 +4824,7 @@
                 <a:ea typeface="Arial" pitchFamily="34" charset="-122"/>
                 <a:cs typeface="Arial" pitchFamily="34" charset="-120"/>
               </a:rPr>
-              <a:t>Time-of-day of first checkpoint inhibitor dose influences clinical outcomes and …</a:t>
+              <a:t>Viral hepatitis and immunotherapy outcome in advanced hepatocellular carcinoma: …</a:t>
             </a:r>
             <a:endParaRPr lang="en-US" sz="1400" dirty="0"/>
           </a:p>
@@ -4777,7 +4861,7 @@
                 <a:ea typeface="Arial" pitchFamily="34" charset="-122"/>
                 <a:cs typeface="Arial" pitchFamily="34" charset="-120"/>
               </a:rPr>
-              <a:t>Cost-effectiveness analysis of atezolizumab and bevacizumab as first-line system…</a:t>
+              <a:t>Lenvatinib Versus Bevacizumab in Combination With Anti-PD-1/PD-L1 Therapy for uH…</a:t>
             </a:r>
             <a:endParaRPr lang="en-US" sz="1400" dirty="0"/>
           </a:p>
@@ -4814,7 +4898,7 @@
                 <a:ea typeface="Arial" pitchFamily="34" charset="-122"/>
                 <a:cs typeface="Arial" pitchFamily="34" charset="-120"/>
               </a:rPr>
-              <a:t>Prognostic nutritional index and the survival of patients with hepatocellular ca…</a:t>
+              <a:t>Low-Dose Bevacizumab Maintains Efficacy With Reduced Adverse Events in Liver Can…</a:t>
             </a:r>
             <a:endParaRPr lang="en-US" sz="1400" dirty="0"/>
           </a:p>
@@ -4851,7 +4935,7 @@
                 <a:ea typeface="Arial" pitchFamily="34" charset="-122"/>
                 <a:cs typeface="Arial" pitchFamily="34" charset="-120"/>
               </a:rPr>
-              <a:t>Radiotherapy versus local ablation therapy for the treatment of hepatocellular c…</a:t>
+              <a:t>… plus transarterial chemoembolization and PD-1 inhibitors as conversion therapi…</a:t>
             </a:r>
             <a:endParaRPr lang="en-US" sz="1400" dirty="0"/>
           </a:p>
@@ -4888,7 +4972,7 @@
                 <a:ea typeface="Arial" pitchFamily="34" charset="-122"/>
                 <a:cs typeface="Arial" pitchFamily="34" charset="-120"/>
               </a:rPr>
-              <a:t>… on interventional therapy and immune checkpoint inhibitors (ICIs) in patients …</a:t>
+              <a:t>Radiologic Response Assessment With RECIST 1.1 and mRECIST in Patients With Hepa…</a:t>
             </a:r>
             <a:endParaRPr lang="en-US" sz="1400" dirty="0"/>
           </a:p>
@@ -4925,7 +5009,7 @@
                 <a:ea typeface="Arial" pitchFamily="34" charset="-122"/>
                 <a:cs typeface="Arial" pitchFamily="34" charset="-120"/>
               </a:rPr>
-              <a:t>Comparative efficacy and safety of immune checkpoint inhibitor–based strategies …</a:t>
+              <a:t>Identification of Risk Factors for the Local Recurrence of Hepatocellular Carcin…</a:t>
             </a:r>
             <a:endParaRPr lang="en-US" sz="1400" dirty="0"/>
           </a:p>
@@ -5080,7 +5164,7 @@
                   </a:extLst>
                 </a:hlinkClick>
               </a:rPr>
-              <a:t>Long-term survival and cure fraction in patients with advanced hepatocellular carcinoma under immunotherapy in randomized controlled trials and real-world data.</a:t>
+              <a:t>AdvanTIG-206: a phase II, randomized study of ociperlimab plus tislelizumab and BAT1706 (bevacizumab biosimilar) versus tislelizumab and BAT1706 in first-line hepatocellular carcinoma.</a:t>
             </a:r>
             <a:endParaRPr lang="en-US" sz="2400" dirty="0"/>
           </a:p>
@@ -5116,7 +5200,7 @@
                   <a:srgbClr val="888888"/>
                 </a:solidFill>
               </a:rPr>
-              <a:t>Clinical cancer research : an official journal of the American Association for Cancer Research  ·  IF 11.5  ·  RCT Phase 3  ·  🌏 Asia</a:t>
+              <a:t>Cancer immunology, immunotherapy : CII  ·  RCT Phase 2  ·  🌏 Asia</a:t>
             </a:r>
             <a:endParaRPr lang="en-US" sz="1000" dirty="0"/>
           </a:p>
@@ -5159,7 +5243,7 @@
                 <a:ea typeface="Microsoft JhengHei" pitchFamily="34" charset="-122"/>
                 <a:cs typeface="Microsoft JhengHei" pitchFamily="34" charset="-120"/>
               </a:rPr>
-              <a:t>ICIs可促進HCC的長期生存。</a:t>
+              <a:t>針對晚期HCC患者的第二期試驗</a:t>
             </a:r>
             <a:endParaRPr lang="en-US" sz="1800" dirty="0"/>
           </a:p>
@@ -5180,7 +5264,7 @@
                 <a:ea typeface="Microsoft JhengHei" pitchFamily="34" charset="-122"/>
                 <a:cs typeface="Microsoft JhengHei" pitchFamily="34" charset="-120"/>
               </a:rPr>
-              <a:t>MCMs估算長期存活與治癒比例。</a:t>
+              <a:t>測試Ociperlimab加Tislelizumab和BAT1706</a:t>
             </a:r>
             <a:endParaRPr lang="en-US" sz="1800" dirty="0"/>
           </a:p>
@@ -5201,7 +5285,7 @@
                 <a:ea typeface="Microsoft JhengHei" pitchFamily="34" charset="-122"/>
                 <a:cs typeface="Microsoft JhengHei" pitchFamily="34" charset="-120"/>
               </a:rPr>
-              <a:t>長期生存率介於10-15%。</a:t>
+              <a:t>確認ORR：37.1%（A組），40.6%（B組）</a:t>
             </a:r>
             <a:endParaRPr lang="en-US" sz="1800" dirty="0"/>
           </a:p>
@@ -5222,7 +5306,7 @@
                 <a:ea typeface="Microsoft JhengHei" pitchFamily="34" charset="-122"/>
                 <a:cs typeface="Microsoft JhengHei" pitchFamily="34" charset="-120"/>
               </a:rPr>
-              <a:t>治癒比例介於7-9%。</a:t>
+              <a:t>高比例治療相關不良事件</a:t>
             </a:r>
             <a:endParaRPr lang="en-US" sz="1800" dirty="0"/>
           </a:p>
@@ -5243,7 +5327,7 @@
                 <a:ea typeface="Microsoft JhengHei" pitchFamily="34" charset="-122"/>
                 <a:cs typeface="Microsoft JhengHei" pitchFamily="34" charset="-120"/>
               </a:rPr>
-              <a:t>ALBI分數和C型肝炎預測結果。</a:t>
+              <a:t>未發現新安全信號</a:t>
             </a:r>
             <a:endParaRPr lang="en-US" sz="1800" dirty="0"/>
           </a:p>
@@ -5279,7 +5363,7 @@
                   <a:srgbClr val="888888"/>
                 </a:solidFill>
               </a:rPr>
-              <a:t>Campani Claudia, Shim Ju Hyun, Bouattour Mohamed et al.. Clinical cancer research : an official journal of the American Association for Cancer Research. 2026-04-20 DOI: 10.1158/1078-0432.CCR-25-4943</a:t>
+              <a:t>Ren Zhenggang, Huang Yao, Guo Yabing et al.. Cancer immunology, immunotherapy : CII. 2026-04-28 DOI: 10.1007/s00262-026-04399-8</a:t>
             </a:r>
             <a:endParaRPr lang="en-US" sz="800" dirty="0"/>
           </a:p>
@@ -5479,7 +5563,7 @@
                   </a:extLst>
                 </a:hlinkClick>
               </a:rPr>
-              <a:t>Optimal treatment selection for hepatocellular carcinoma in the era of immunotherapy.</a:t>
+              <a:t>Development and validation of a risk prediction model for patients with hepatocellular carcinoma receiving atezolizumab-bevacizumab.</a:t>
             </a:r>
             <a:endParaRPr lang="en-US" sz="2400" dirty="0"/>
           </a:p>
@@ -5515,7 +5599,7 @@
                   <a:srgbClr val="888888"/>
                 </a:solidFill>
               </a:rPr>
-              <a:t>Journal of gastroenterology  ·  RCT Phase 3  ·  🌏 Asia</a:t>
+              <a:t>Hepatology (Baltimore, Md.)  ·  IF 12.9  ·  🌏 Asia</a:t>
             </a:r>
             <a:endParaRPr lang="en-US" sz="1000" dirty="0"/>
           </a:p>
@@ -5558,7 +5642,7 @@
                 <a:ea typeface="Microsoft JhengHei" pitchFamily="34" charset="-122"/>
                 <a:cs typeface="Microsoft JhengHei" pitchFamily="34" charset="-120"/>
               </a:rPr>
-              <a:t>免疫治療重塑HCC管理策略。</a:t>
+              <a:t>Atezolizumab-bevacizumab為標準治療。</a:t>
             </a:r>
             <a:endParaRPr lang="en-US" sz="1800" dirty="0"/>
           </a:p>
@@ -5579,7 +5663,7 @@
                 <a:ea typeface="Microsoft JhengHei" pitchFamily="34" charset="-122"/>
                 <a:cs typeface="Microsoft JhengHei" pitchFamily="34" charset="-120"/>
               </a:rPr>
-              <a:t>早期HCC復發率仍然高。</a:t>
+              <a:t>開發CRAPT-M風險預測模型。</a:t>
             </a:r>
             <a:endParaRPr lang="en-US" sz="1800" dirty="0"/>
           </a:p>
@@ -5600,7 +5684,7 @@
                 <a:ea typeface="Microsoft JhengHei" pitchFamily="34" charset="-122"/>
                 <a:cs typeface="Microsoft JhengHei" pitchFamily="34" charset="-120"/>
               </a:rPr>
-              <a:t>AI模型有效預測切除後復發。</a:t>
+              <a:t>識別五個獨立預後因子。</a:t>
             </a:r>
             <a:endParaRPr lang="en-US" sz="1800" dirty="0"/>
           </a:p>
@@ -5621,7 +5705,7 @@
                 <a:ea typeface="Microsoft JhengHei" pitchFamily="34" charset="-122"/>
                 <a:cs typeface="Microsoft JhengHei" pitchFamily="34" charset="-120"/>
               </a:rPr>
-              <a:t>TACE聯合TKI改善治療效果。</a:t>
+              <a:t>中位OS依風險組別而異。</a:t>
             </a:r>
             <a:endParaRPr lang="en-US" sz="1800" dirty="0"/>
           </a:p>
@@ -5642,7 +5726,7 @@
                 <a:ea typeface="Microsoft JhengHei" pitchFamily="34" charset="-122"/>
                 <a:cs typeface="Microsoft JhengHei" pitchFamily="34" charset="-120"/>
               </a:rPr>
-              <a:t>新興生物標記提升免疫治療選擇。</a:t>
+              <a:t>CRAPT-M準確度高於CRAFITY。</a:t>
             </a:r>
             <a:endParaRPr lang="en-US" sz="1800" dirty="0"/>
           </a:p>
@@ -5678,7 +5762,7 @@
                   <a:srgbClr val="888888"/>
                 </a:solidFill>
               </a:rPr>
-              <a:t>Chi Chen-Ta, Huang Yi-Hsiang. Journal of gastroenterology. 2026-04-20 DOI: 10.1007/s00535-026-02411-7</a:t>
+              <a:t>Nam Heechul, Kim Dong Yun, Kim Do Young et al.. Hepatology (Baltimore, Md.). 2026-04-17 DOI: 10.1097/HEP.0000000000001444</a:t>
             </a:r>
             <a:endParaRPr lang="en-US" sz="800" dirty="0"/>
           </a:p>
@@ -5878,7 +5962,7 @@
                   </a:extLst>
                 </a:hlinkClick>
               </a:rPr>
-              <a:t>Pembrolizumab and stereotactic body radiotherapy combined in advanced hepatocellular carcinoma post sorafenib–A phase II trial (PEMRAD)</a:t>
+              <a:t>An etiology-stratified single-cell atlas identifies FABP4 as a prognostic marker for MASLD-related HCC.</a:t>
             </a:r>
             <a:endParaRPr lang="en-US" sz="2400" dirty="0"/>
           </a:p>
@@ -5914,7 +5998,7 @@
                   <a:srgbClr val="888888"/>
                 </a:solidFill>
               </a:rPr>
-              <a:t>JHEP Reports  ·  IF 7.8  ·  RCT Phase 2</a:t>
+              <a:t>Journal of hepatology  ·  IF 25.7  ·  Basic Research</a:t>
             </a:r>
             <a:endParaRPr lang="en-US" sz="1000" dirty="0"/>
           </a:p>
@@ -5957,7 +6041,7 @@
                 <a:ea typeface="Microsoft JhengHei" pitchFamily="34" charset="-122"/>
                 <a:cs typeface="Microsoft JhengHei" pitchFamily="34" charset="-120"/>
               </a:rPr>
-              <a:t>結合 pembrolizumab 與 SBRT</a:t>
+              <a:t>研究比較HCC腫瘤微環境</a:t>
             </a:r>
             <a:endParaRPr lang="en-US" sz="1800" dirty="0"/>
           </a:p>
@@ -5978,7 +6062,7 @@
                 <a:ea typeface="Microsoft JhengHei" pitchFamily="34" charset="-122"/>
                 <a:cs typeface="Microsoft JhengHei" pitchFamily="34" charset="-120"/>
               </a:rPr>
-              <a:t>針對晚期 HCC 的二期試驗</a:t>
+              <a:t>FABP4被確定為預後生物標記</a:t>
             </a:r>
             <a:endParaRPr lang="en-US" sz="1800" dirty="0"/>
           </a:p>
@@ -5999,7 +6083,49 @@
                 <a:ea typeface="Microsoft JhengHei" pitchFamily="34" charset="-122"/>
                 <a:cs typeface="Microsoft JhengHei" pitchFamily="34" charset="-120"/>
               </a:rPr>
-              <a:t>評估索拉非尼後療效</a:t>
+              <a:t>HBV+MASLD+ HCC免疫治療效果最佳</a:t>
+            </a:r>
+            <a:endParaRPr lang="en-US" sz="1800" dirty="0"/>
+          </a:p>
+          <a:p>
+            <a:pPr marL="342900" indent="-342900">
+              <a:spcAft>
+                <a:spcPts val="800"/>
+              </a:spcAft>
+              <a:buSzPct val="100000"/>
+              <a:buChar char="•"/>
+            </a:pPr>
+            <a:r>
+              <a:rPr lang="en-US" sz="1800" dirty="0">
+                <a:solidFill>
+                  <a:srgbClr val="333333"/>
+                </a:solidFill>
+                <a:latin typeface="Microsoft JhengHei" pitchFamily="34" charset="0"/>
+                <a:ea typeface="Microsoft JhengHei" pitchFamily="34" charset="-122"/>
+                <a:cs typeface="Microsoft JhengHei" pitchFamily="34" charset="-120"/>
+              </a:rPr>
+              <a:t>MASLD+ HCC中CD8+ T細胞增加</a:t>
+            </a:r>
+            <a:endParaRPr lang="en-US" sz="1800" dirty="0"/>
+          </a:p>
+          <a:p>
+            <a:pPr marL="342900" indent="-342900">
+              <a:spcAft>
+                <a:spcPts val="800"/>
+              </a:spcAft>
+              <a:buSzPct val="100000"/>
+              <a:buChar char="•"/>
+            </a:pPr>
+            <a:r>
+              <a:rPr lang="en-US" sz="1800" dirty="0">
+                <a:solidFill>
+                  <a:srgbClr val="333333"/>
+                </a:solidFill>
+                <a:latin typeface="Microsoft JhengHei" pitchFamily="34" charset="0"/>
+                <a:ea typeface="Microsoft JhengHei" pitchFamily="34" charset="-122"/>
+                <a:cs typeface="Microsoft JhengHei" pitchFamily="34" charset="-120"/>
+              </a:rPr>
+              <a:t>FABP4促進血管正常化及T細胞浸潤</a:t>
             </a:r>
             <a:endParaRPr lang="en-US" sz="1800" dirty="0"/>
           </a:p>
@@ -6035,7 +6161,7 @@
                   <a:srgbClr val="888888"/>
                 </a:solidFill>
               </a:rPr>
-              <a:t>GM O'Kane, A Mesci, RW Jang. JHEP Reports. 2026</a:t>
+              <a:t>Zhang Shuyuan, Xu Huanhuan, Li Mingwei et al.. Journal of hepatology. 2026-04-17 DOI: 10.1016/j.jhep.2025.10.026</a:t>
             </a:r>
             <a:endParaRPr lang="en-US" sz="800" dirty="0"/>
           </a:p>
@@ -6235,7 +6361,7 @@
                   </a:extLst>
                 </a:hlinkClick>
               </a:rPr>
-              <a:t>Multicentre prospective trial of abbreviated MRI using gadoxetic acid versus CT for detection of late recurrent HCC (AMRICT): study protocol.</a:t>
+              <a:t>JOSD1 drives hepatocellular carcinoma malignancy by modulating the ubiquitination-lactylation switch on PGAM1.</a:t>
             </a:r>
             <a:endParaRPr lang="en-US" sz="2400" dirty="0"/>
           </a:p>
@@ -6271,7 +6397,7 @@
                   <a:srgbClr val="888888"/>
                 </a:solidFill>
               </a:rPr>
-              <a:t>BMJ open  ·  Prospective Study  ·  🌏 Asia</a:t>
+              <a:t>Gut  ·  IF 24.5  ·  Basic Research</a:t>
             </a:r>
             <a:endParaRPr lang="en-US" sz="1000" dirty="0"/>
           </a:p>
@@ -6314,7 +6440,7 @@
                 <a:ea typeface="Microsoft JhengHei" pitchFamily="34" charset="-122"/>
                 <a:cs typeface="Microsoft JhengHei" pitchFamily="34" charset="-120"/>
               </a:rPr>
-              <a:t>HCC 治療後常見晚期復發。</a:t>
+              <a:t>JOSD1 增強 HCC 的糖酵解。</a:t>
             </a:r>
             <a:endParaRPr lang="en-US" sz="1800" dirty="0"/>
           </a:p>
@@ -6335,7 +6461,7 @@
                 <a:ea typeface="Microsoft JhengHei" pitchFamily="34" charset="-122"/>
                 <a:cs typeface="Microsoft JhengHei" pitchFamily="34" charset="-120"/>
               </a:rPr>
-              <a:t>試驗比較 HBP-AMRI 與 multiphasic CECT。</a:t>
+              <a:t>過表達導致預後不良。</a:t>
             </a:r>
             <a:endParaRPr lang="en-US" sz="1800" dirty="0"/>
           </a:p>
@@ -6356,7 +6482,7 @@
                 <a:ea typeface="Microsoft JhengHei" pitchFamily="34" charset="-122"/>
                 <a:cs typeface="Microsoft JhengHei" pitchFamily="34" charset="-120"/>
               </a:rPr>
-              <a:t>將招募 455 名參與者進行影像檢查。</a:t>
+              <a:t>調節 PGAM1 的泛素化-乳酸化。</a:t>
             </a:r>
             <a:endParaRPr lang="en-US" sz="1800" dirty="0"/>
           </a:p>
@@ -6377,7 +6503,7 @@
                 <a:ea typeface="Microsoft JhengHei" pitchFamily="34" charset="-122"/>
                 <a:cs typeface="Microsoft JhengHei" pitchFamily="34" charset="-120"/>
               </a:rPr>
-              <a:t>主要終點：HCC 檢出率。</a:t>
+              <a:t>觀察到 CD8+ T 細胞功能受損。</a:t>
             </a:r>
             <a:endParaRPr lang="en-US" sz="1800" dirty="0"/>
           </a:p>
@@ -6398,7 +6524,7 @@
                 <a:ea typeface="Microsoft JhengHei" pitchFamily="34" charset="-122"/>
                 <a:cs typeface="Microsoft JhengHei" pitchFamily="34" charset="-120"/>
               </a:rPr>
-              <a:t>研究已獲多個機構批准。</a:t>
+              <a:t>抑制 JOSD1 與抗 PD-1 協同作用。</a:t>
             </a:r>
             <a:endParaRPr lang="en-US" sz="1800" dirty="0"/>
           </a:p>
@@ -6434,7 +6560,7 @@
                   <a:srgbClr val="888888"/>
                 </a:solidFill>
               </a:rPr>
-              <a:t>Park Hyo Jung, Lee Dong Ho, Chang Won et al.. BMJ open. 2026-04-24 DOI: 10.1136/bmjopen-2026-116809</a:t>
+              <a:t>Li Qing, Yu Kai, Zhou Suiqing et al.. Gut. 2026-04-28 DOI: 10.1136/gutjnl-2025-337331</a:t>
             </a:r>
             <a:endParaRPr lang="en-US" sz="800" dirty="0"/>
           </a:p>
@@ -6634,7 +6760,7 @@
                   </a:extLst>
                 </a:hlinkClick>
               </a:rPr>
-              <a:t>Time-of-day of first checkpoint inhibitor dose influences clinical outcomes and immune responses in hepatocellular carcinoma.</a:t>
+              <a:t>Viral hepatitis and immunotherapy outcome in advanced hepatocellular carcinoma: A comprehensive umbrella review of 15 meta-analyses.</a:t>
             </a:r>
             <a:endParaRPr lang="en-US" sz="2400" dirty="0"/>
           </a:p>
@@ -6670,7 +6796,7 @@
                   <a:srgbClr val="888888"/>
                 </a:solidFill>
               </a:rPr>
-              <a:t>Journal for immunotherapy of cancer  ·  IF 10.9  ·  Retrospective Study</a:t>
+              <a:t>Critical reviews in oncology/hematology  ·  RCT Phase 3</a:t>
             </a:r>
             <a:endParaRPr lang="en-US" sz="1000" dirty="0"/>
           </a:p>
@@ -6713,7 +6839,7 @@
                 <a:ea typeface="Microsoft JhengHei" pitchFamily="34" charset="-122"/>
                 <a:cs typeface="Microsoft JhengHei" pitchFamily="34" charset="-120"/>
               </a:rPr>
-              <a:t>ICI 時間影響治療效果。</a:t>
+              <a:t>免疫檢查點抑制劑改善HCC存活率。</a:t>
             </a:r>
             <a:endParaRPr lang="en-US" sz="1800" dirty="0"/>
           </a:p>
@@ -6734,7 +6860,7 @@
                 <a:ea typeface="Microsoft JhengHei" pitchFamily="34" charset="-122"/>
                 <a:cs typeface="Microsoft JhengHei" pitchFamily="34" charset="-120"/>
               </a:rPr>
-              <a:t>早晨劑量改善無進展生存期。</a:t>
+              <a:t>HBV患者效益大於非病毒性。</a:t>
             </a:r>
             <a:endParaRPr lang="en-US" sz="1800" dirty="0"/>
           </a:p>
@@ -6755,7 +6881,49 @@
                 <a:ea typeface="Microsoft JhengHei" pitchFamily="34" charset="-122"/>
                 <a:cs typeface="Microsoft JhengHei" pitchFamily="34" charset="-120"/>
               </a:rPr>
-              <a:t>早晨組免疫反應不同。</a:t>
+              <a:t>各meta分析結果高度重疊。</a:t>
+            </a:r>
+            <a:endParaRPr lang="en-US" sz="1800" dirty="0"/>
+          </a:p>
+          <a:p>
+            <a:pPr marL="342900" indent="-342900">
+              <a:spcAft>
+                <a:spcPts val="800"/>
+              </a:spcAft>
+              <a:buSzPct val="100000"/>
+              <a:buChar char="•"/>
+            </a:pPr>
+            <a:r>
+              <a:rPr lang="en-US" sz="1800" dirty="0">
+                <a:solidFill>
+                  <a:srgbClr val="333333"/>
+                </a:solidFill>
+                <a:latin typeface="Microsoft JhengHei" pitchFamily="34" charset="0"/>
+                <a:ea typeface="Microsoft JhengHei" pitchFamily="34" charset="-122"/>
+                <a:cs typeface="Microsoft JhengHei" pitchFamily="34" charset="-120"/>
+              </a:rPr>
+              <a:t>現實數據顯示atezolizumab不一致。</a:t>
+            </a:r>
+            <a:endParaRPr lang="en-US" sz="1800" dirty="0"/>
+          </a:p>
+          <a:p>
+            <a:pPr marL="342900" indent="-342900">
+              <a:spcAft>
+                <a:spcPts val="800"/>
+              </a:spcAft>
+              <a:buSzPct val="100000"/>
+              <a:buChar char="•"/>
+            </a:pPr>
+            <a:r>
+              <a:rPr lang="en-US" sz="1800" dirty="0">
+                <a:solidFill>
+                  <a:srgbClr val="333333"/>
+                </a:solidFill>
+                <a:latin typeface="Microsoft JhengHei" pitchFamily="34" charset="0"/>
+                <a:ea typeface="Microsoft JhengHei" pitchFamily="34" charset="-122"/>
+                <a:cs typeface="Microsoft JhengHei" pitchFamily="34" charset="-120"/>
+              </a:rPr>
+              <a:t>需謹慎解讀亞組結果。</a:t>
             </a:r>
             <a:endParaRPr lang="en-US" sz="1800" dirty="0"/>
           </a:p>
@@ -6791,7 +6959,7 @@
                   <a:srgbClr val="888888"/>
                 </a:solidFill>
               </a:rPr>
-              <a:t>Li Howard L, Charmsaz Soren, Reisman Benjamin J et al.. Journal for immunotherapy of cancer. 2026-04-21 DOI: 10.1136/jitc-2025-014070</a:t>
+              <a:t>Petrelli Fausto, Colombo Silvia, Dottorini Lorenzo et al.. Critical reviews in oncology/hematology. 2026-04-12 DOI: 10.1016/j.critrevonc.2026.105248</a:t>
             </a:r>
             <a:endParaRPr lang="en-US" sz="800" dirty="0"/>
           </a:p>
@@ -6991,7 +7159,7 @@
                   </a:extLst>
                 </a:hlinkClick>
               </a:rPr>
-              <a:t>Cost-effectiveness analysis of atezolizumab and bevacizumab as first-line systemic therapy in unresectable hepatocellular carcinoma in Malaysia.</a:t>
+              <a:t>Lenvatinib Versus Bevacizumab in Combination With Anti-PD-1/PD-L1 Therapy for uHCC: A Meta-Analysis of East Asian Studies.</a:t>
             </a:r>
             <a:endParaRPr lang="en-US" sz="2400" dirty="0"/>
           </a:p>
@@ -7027,7 +7195,7 @@
                   <a:srgbClr val="888888"/>
                 </a:solidFill>
               </a:rPr>
-              <a:t>Journal of medical economics  ·  Meta-Analysis</a:t>
+              <a:t>Liver international : official journal of the International Association for the Study of the Liver  ·  IF 6.0  ·  RCT</a:t>
             </a:r>
             <a:endParaRPr lang="en-US" sz="1000" dirty="0"/>
           </a:p>
@@ -7070,7 +7238,7 @@
                 <a:ea typeface="Microsoft JhengHei" pitchFamily="34" charset="-122"/>
                 <a:cs typeface="Microsoft JhengHei" pitchFamily="34" charset="-120"/>
               </a:rPr>
-              <a:t>評估atezolizumab加bevacizumab的成本效益</a:t>
+              <a:t>Lenvatinib延長總生存期。</a:t>
             </a:r>
             <a:endParaRPr lang="en-US" sz="1800" dirty="0"/>
           </a:p>
@@ -7091,7 +7259,7 @@
                 <a:ea typeface="Microsoft JhengHei" pitchFamily="34" charset="-122"/>
                 <a:cs typeface="Microsoft JhengHei" pitchFamily="34" charset="-120"/>
               </a:rPr>
-              <a:t>與lenvatinib和sorafenib比較於馬來西亞</a:t>
+              <a:t>Lenvatinib改善無進展生存期。</a:t>
             </a:r>
             <a:endParaRPr lang="en-US" sz="1800" dirty="0"/>
           </a:p>
@@ -7112,7 +7280,7 @@
                 <a:ea typeface="Microsoft JhengHei" pitchFamily="34" charset="-122"/>
                 <a:cs typeface="Microsoft JhengHei" pitchFamily="34" charset="-120"/>
               </a:rPr>
-              <a:t>atezolizumab加bevacizumab獲得最高QALYs</a:t>
+              <a:t>反應率無顯著差異。</a:t>
             </a:r>
             <a:endParaRPr lang="en-US" sz="1800" dirty="0"/>
           </a:p>
@@ -7133,7 +7301,7 @@
                 <a:ea typeface="Microsoft JhengHei" pitchFamily="34" charset="-122"/>
                 <a:cs typeface="Microsoft JhengHei" pitchFamily="34" charset="-120"/>
               </a:rPr>
-              <a:t>增量成本效益比為RM 51,399每QALY</a:t>
+              <a:t>Lenvatinib有較高手足反應。</a:t>
             </a:r>
             <a:endParaRPr lang="en-US" sz="1800" dirty="0"/>
           </a:p>
@@ -7154,7 +7322,7 @@
                 <a:ea typeface="Microsoft JhengHei" pitchFamily="34" charset="-122"/>
                 <a:cs typeface="Microsoft JhengHei" pitchFamily="34" charset="-120"/>
               </a:rPr>
-              <a:t>研究結果支持公共衛生政策資金擴展</a:t>
+              <a:t>Bevacizumab有較高腸胃風險。</a:t>
             </a:r>
             <a:endParaRPr lang="en-US" sz="1800" dirty="0"/>
           </a:p>
@@ -7190,7 +7358,7 @@
                   <a:srgbClr val="888888"/>
                 </a:solidFill>
               </a:rPr>
-              <a:t>Wong Yoke Fui, Mohamed Rosmawati, Sulaiman Shah Audi Adawiah et al.. Journal of medical economics. 2026-04-25 DOI: 10.1080/13696998.2026.2658448</a:t>
+              <a:t>Wang Xiaoxia, Wang Shuo, Lu Jun et al.. Liver international : official journal of the International Association for the Study of the Liver. 2026-04-20 DOI: 10.1111/liv.70647</a:t>
             </a:r>
             <a:endParaRPr lang="en-US" sz="800" dirty="0"/>
           </a:p>
@@ -7390,7 +7558,7 @@
                   </a:extLst>
                 </a:hlinkClick>
               </a:rPr>
-              <a:t>Prognostic nutritional index and the survival of patients with hepatocellular carcinoma on immune checkpoint inhibitors: a meta-analysis</a:t>
+              <a:t>Low-Dose Bevacizumab Maintains Efficacy With Reduced Adverse Events in Liver Cancer.</a:t>
             </a:r>
             <a:endParaRPr lang="en-US" sz="2400" dirty="0"/>
           </a:p>
@@ -7426,7 +7594,7 @@
                   <a:srgbClr val="888888"/>
                 </a:solidFill>
               </a:rPr>
-              <a:t>BMC cancer  ·  Meta-Analysis</a:t>
+              <a:t>Liver international : official journal of the International Association for the Study of the Liver  ·  IF 6.0  ·  Retrospective Study  ·  🌏 Asia</a:t>
             </a:r>
             <a:endParaRPr lang="en-US" sz="1000" dirty="0"/>
           </a:p>
@@ -7469,7 +7637,7 @@
                 <a:ea typeface="Microsoft JhengHei" pitchFamily="34" charset="-122"/>
                 <a:cs typeface="Microsoft JhengHei" pitchFamily="34" charset="-120"/>
               </a:rPr>
-              <a:t>預後營養指數影響生存率。</a:t>
+              <a:t>低劑量bevacizumab對肝癌有效</a:t>
             </a:r>
             <a:endParaRPr lang="en-US" sz="1800" dirty="0"/>
           </a:p>
@@ -7490,7 +7658,7 @@
                 <a:ea typeface="Microsoft JhengHei" pitchFamily="34" charset="-122"/>
                 <a:cs typeface="Microsoft JhengHei" pitchFamily="34" charset="-120"/>
               </a:rPr>
-              <a:t>HCC患者免疫檢查點抑制劑分析。</a:t>
+              <a:t>不良事件較標準劑量減少</a:t>
             </a:r>
             <a:endParaRPr lang="en-US" sz="1800" dirty="0"/>
           </a:p>
@@ -7511,7 +7679,49 @@
                 <a:ea typeface="Microsoft JhengHei" pitchFamily="34" charset="-122"/>
                 <a:cs typeface="Microsoft JhengHei" pitchFamily="34" charset="-120"/>
               </a:rPr>
-              <a:t>營養狀態與免疫反應相關。</a:t>
+              <a:t>無進展生存率相似</a:t>
+            </a:r>
+            <a:endParaRPr lang="en-US" sz="1800" dirty="0"/>
+          </a:p>
+          <a:p>
+            <a:pPr marL="342900" indent="-342900">
+              <a:spcAft>
+                <a:spcPts val="800"/>
+              </a:spcAft>
+              <a:buSzPct val="100000"/>
+              <a:buChar char="•"/>
+            </a:pPr>
+            <a:r>
+              <a:rPr lang="en-US" sz="1800" dirty="0">
+                <a:solidFill>
+                  <a:srgbClr val="333333"/>
+                </a:solidFill>
+                <a:latin typeface="Microsoft JhengHei" pitchFamily="34" charset="0"/>
+                <a:ea typeface="Microsoft JhengHei" pitchFamily="34" charset="-122"/>
+                <a:cs typeface="Microsoft JhengHei" pitchFamily="34" charset="-120"/>
+              </a:rPr>
+              <a:t>低級毒性發生率降低</a:t>
+            </a:r>
+            <a:endParaRPr lang="en-US" sz="1800" dirty="0"/>
+          </a:p>
+          <a:p>
+            <a:pPr marL="342900" indent="-342900">
+              <a:spcAft>
+                <a:spcPts val="800"/>
+              </a:spcAft>
+              <a:buSzPct val="100000"/>
+              <a:buChar char="•"/>
+            </a:pPr>
+            <a:r>
+              <a:rPr lang="en-US" sz="1800" dirty="0">
+                <a:solidFill>
+                  <a:srgbClr val="333333"/>
+                </a:solidFill>
+                <a:latin typeface="Microsoft JhengHei" pitchFamily="34" charset="0"/>
+                <a:ea typeface="Microsoft JhengHei" pitchFamily="34" charset="-122"/>
+                <a:cs typeface="Microsoft JhengHei" pitchFamily="34" charset="-120"/>
+              </a:rPr>
+              <a:t>改善治療耐受性潛力</a:t>
             </a:r>
             <a:endParaRPr lang="en-US" sz="1800" dirty="0"/>
           </a:p>
@@ -7547,7 +7757,7 @@
                   <a:srgbClr val="888888"/>
                 </a:solidFill>
               </a:rPr>
-              <a:t>J Fu, W Peng, J Jiang. BMC cancer. 2026</a:t>
+              <a:t>Lin Po-Ting, Teng Wei, Hsieh Yi-Chung et al.. Liver international : official journal of the International Association for the Study of the Liver. 2026-03-28 DOI: 10.1111/liv.70617</a:t>
             </a:r>
             <a:endParaRPr lang="en-US" sz="800" dirty="0"/>
           </a:p>

--- a/docs/digest-zh.pptx
+++ b/docs/digest-zh.pptx
@@ -2269,7 +2269,7 @@
                   <a:srgbClr val="888888"/>
                 </a:solidFill>
               </a:rPr>
-              <a:t>2026-04-27 — 2026-05-04</a:t>
+              <a:t>2026-05-04 — 2026-05-11</a:t>
             </a:r>
             <a:endParaRPr lang="en-US" sz="1400" dirty="0"/>
           </a:p>
@@ -2460,7 +2460,7 @@
                   </a:extLst>
                 </a:hlinkClick>
               </a:rPr>
-              <a:t>… plus transarterial chemoembolization and PD-1 inhibitors as conversion therapies for unresectable intermediate-advanced hepatocellular carcinoma: a phase 2 trial …</a:t>
+              <a:t>Prognostic nutritional index and the survival of patients with hepatocellular carcinoma on immune checkpoint inhibitors: a meta-analysis</a:t>
             </a:r>
             <a:endParaRPr lang="en-US" sz="2400" dirty="0"/>
           </a:p>
@@ -2496,7 +2496,7 @@
                   <a:srgbClr val="888888"/>
                 </a:solidFill>
               </a:rPr>
-              <a:t>… and Targeted Therapy  ·  RCT Phase 2</a:t>
+              <a:t>BMC cancer  ·  Meta-Analysis</a:t>
             </a:r>
             <a:endParaRPr lang="en-US" sz="1000" dirty="0"/>
           </a:p>
@@ -2539,7 +2539,7 @@
                 <a:ea typeface="Microsoft JhengHei" pitchFamily="34" charset="-122"/>
                 <a:cs typeface="Microsoft JhengHei" pitchFamily="34" charset="-120"/>
               </a:rPr>
-              <a:t>針對不可切除HCC的組合療法</a:t>
+              <a:t>預後營養指數(PNI)影響生存率。</a:t>
             </a:r>
             <a:endParaRPr lang="en-US" sz="1800" dirty="0"/>
           </a:p>
@@ -2560,7 +2560,7 @@
                 <a:ea typeface="Microsoft JhengHei" pitchFamily="34" charset="-122"/>
                 <a:cs typeface="Microsoft JhengHei" pitchFamily="34" charset="-120"/>
               </a:rPr>
-              <a:t>使用經動脈化療栓塞(TACE)</a:t>
+              <a:t>HCC患者免疫檢查點抑制劑的綜合分析。</a:t>
             </a:r>
             <a:endParaRPr lang="en-US" sz="1800" dirty="0"/>
           </a:p>
@@ -2581,49 +2581,7 @@
                 <a:ea typeface="Microsoft JhengHei" pitchFamily="34" charset="-122"/>
                 <a:cs typeface="Microsoft JhengHei" pitchFamily="34" charset="-120"/>
               </a:rPr>
-              <a:t>PD-1抑制劑提升療效</a:t>
-            </a:r>
-            <a:endParaRPr lang="en-US" sz="1800" dirty="0"/>
-          </a:p>
-          <a:p>
-            <a:pPr marL="342900" indent="-342900">
-              <a:spcAft>
-                <a:spcPts val="800"/>
-              </a:spcAft>
-              <a:buSzPct val="100000"/>
-              <a:buChar char="•"/>
-            </a:pPr>
-            <a:r>
-              <a:rPr lang="en-US" sz="1800" dirty="0">
-                <a:solidFill>
-                  <a:srgbClr val="333333"/>
-                </a:solidFill>
-                <a:latin typeface="Microsoft JhengHei" pitchFamily="34" charset="0"/>
-                <a:ea typeface="Microsoft JhengHei" pitchFamily="34" charset="-122"/>
-                <a:cs typeface="Microsoft JhengHei" pitchFamily="34" charset="-120"/>
-              </a:rPr>
-              <a:t>第二期試驗顯示良好結果</a:t>
-            </a:r>
-            <a:endParaRPr lang="en-US" sz="1800" dirty="0"/>
-          </a:p>
-          <a:p>
-            <a:pPr marL="342900" indent="-342900">
-              <a:spcAft>
-                <a:spcPts val="800"/>
-              </a:spcAft>
-              <a:buSzPct val="100000"/>
-              <a:buChar char="•"/>
-            </a:pPr>
-            <a:r>
-              <a:rPr lang="en-US" sz="1800" dirty="0">
-                <a:solidFill>
-                  <a:srgbClr val="333333"/>
-                </a:solidFill>
-                <a:latin typeface="Microsoft JhengHei" pitchFamily="34" charset="0"/>
-                <a:ea typeface="Microsoft JhengHei" pitchFamily="34" charset="-122"/>
-                <a:cs typeface="Microsoft JhengHei" pitchFamily="34" charset="-120"/>
-              </a:rPr>
-              <a:t>有潛力轉化為可切除病變</a:t>
+              <a:t>營養狀態與免疫反應相關。</a:t>
             </a:r>
             <a:endParaRPr lang="en-US" sz="1800" dirty="0"/>
           </a:p>
@@ -2659,7 +2617,7 @@
                   <a:srgbClr val="888888"/>
                 </a:solidFill>
               </a:rPr>
-              <a:t>X Zhang, H Cai, W Peng. … and Targeted Therapy. 2026</a:t>
+              <a:t>J Fu, W Peng, J Jiang. BMC cancer. 2026</a:t>
             </a:r>
             <a:endParaRPr lang="en-US" sz="800" dirty="0"/>
           </a:p>
@@ -2859,7 +2817,7 @@
                   </a:extLst>
                 </a:hlinkClick>
               </a:rPr>
-              <a:t>Radiologic Response Assessment With RECIST 1.1 and mRECIST in Patients With Hepatocellular Carcinoma Treated With Atezolizumab Plus Bevacizumab.</a:t>
+              <a:t>Radiotherapy versus local ablation therapy for the treatment of hepatocellular carcinoma: A systematic review and meta-analysis.</a:t>
             </a:r>
             <a:endParaRPr lang="en-US" sz="2400" dirty="0"/>
           </a:p>
@@ -2895,7 +2853,7 @@
                   <a:srgbClr val="888888"/>
                 </a:solidFill>
               </a:rPr>
-              <a:t>Korean journal of radiology  ·  Retrospective Study  ·  🌏 Asia</a:t>
+              <a:t>Journal of Clinical …  ·  Meta-Analysis</a:t>
             </a:r>
             <a:endParaRPr lang="en-US" sz="1000" dirty="0"/>
           </a:p>
@@ -2938,7 +2896,7 @@
                 <a:ea typeface="Microsoft JhengHei" pitchFamily="34" charset="-122"/>
                 <a:cs typeface="Microsoft JhengHei" pitchFamily="34" charset="-120"/>
               </a:rPr>
-              <a:t>研究比較RECIST 1.1與mRECIST。</a:t>
+              <a:t>放射治療與局部消融比較</a:t>
             </a:r>
             <a:endParaRPr lang="en-US" sz="1800" dirty="0"/>
           </a:p>
@@ -2959,7 +2917,7 @@
                 <a:ea typeface="Microsoft JhengHei" pitchFamily="34" charset="-122"/>
                 <a:cs typeface="Microsoft JhengHei" pitchFamily="34" charset="-120"/>
               </a:rPr>
-              <a:t>207名接受Atezo/Bev的HCC患者。</a:t>
+              <a:t>針對肝細胞癌治療</a:t>
             </a:r>
             <a:endParaRPr lang="en-US" sz="1800" dirty="0"/>
           </a:p>
@@ -2980,7 +2938,7 @@
                 <a:ea typeface="Microsoft JhengHei" pitchFamily="34" charset="-122"/>
                 <a:cs typeface="Microsoft JhengHei" pitchFamily="34" charset="-120"/>
               </a:rPr>
-              <a:t>mRECIST識別的反應者多於RECIST 1.1。</a:t>
+              <a:t>評估局部無進展生存期</a:t>
             </a:r>
             <a:endParaRPr lang="en-US" sz="1800" dirty="0"/>
           </a:p>
@@ -3001,7 +2959,7 @@
                 <a:ea typeface="Microsoft JhengHei" pitchFamily="34" charset="-122"/>
                 <a:cs typeface="Microsoft JhengHei" pitchFamily="34" charset="-120"/>
               </a:rPr>
-              <a:t>RECIST 1.1顯示優秀的讀者一致性。</a:t>
+              <a:t>包含射頻與微波消融</a:t>
             </a:r>
             <a:endParaRPr lang="en-US" sz="1800" dirty="0"/>
           </a:p>
@@ -3022,7 +2980,7 @@
                 <a:ea typeface="Microsoft JhengHei" pitchFamily="34" charset="-122"/>
                 <a:cs typeface="Microsoft JhengHei" pitchFamily="34" charset="-120"/>
               </a:rPr>
-              <a:t>兩種方法獨立預測整體生存率。</a:t>
+              <a:t>進行系統性回顧與統合分析</a:t>
             </a:r>
             <a:endParaRPr lang="en-US" sz="1800" dirty="0"/>
           </a:p>
@@ -3058,7 +3016,7 @@
                   <a:srgbClr val="888888"/>
                 </a:solidFill>
               </a:rPr>
-              <a:t>Jeong Boryeong, Park Hyo Jung, Choi Won-Mook et al.. Korean journal of radiology. 2026-04-30 DOI: 10.3348/kjr.2025.1849</a:t>
+              <a:t>SH Bae, SH Choi, SM Yoon. Journal of Clinical …. 2026</a:t>
             </a:r>
             <a:endParaRPr lang="en-US" sz="800" dirty="0"/>
           </a:p>
@@ -3258,7 +3216,7 @@
                   </a:extLst>
                 </a:hlinkClick>
               </a:rPr>
-              <a:t>Identification of Risk Factors for the Local Recurrence of Hepatocellular Carcinoma Post-radiofrequency Ablation.</a:t>
+              <a:t>MCT8 Modulates Metabolite Uptake and T-cell Exhaustion to Promote Immunosuppression and Tumor Progression in Hepatocellular Carcinoma.</a:t>
             </a:r>
             <a:endParaRPr lang="en-US" sz="2400" dirty="0"/>
           </a:p>
@@ -3294,7 +3252,7 @@
                   <a:srgbClr val="888888"/>
                 </a:solidFill>
               </a:rPr>
-              <a:t>Anticancer research  ·  Retrospective Study  ·  🌏 Asia</a:t>
+              <a:t>Molecular cancer therapeutics  ·  IF 5.6  ·  Basic Research</a:t>
             </a:r>
             <a:endParaRPr lang="en-US" sz="1000" dirty="0"/>
           </a:p>
@@ -3337,7 +3295,7 @@
                 <a:ea typeface="Microsoft JhengHei" pitchFamily="34" charset="-122"/>
                 <a:cs typeface="Microsoft JhengHei" pitchFamily="34" charset="-120"/>
               </a:rPr>
-              <a:t>射頻消融對HCC有效。</a:t>
+              <a:t>MCT8 調控 HCC 中 T 細胞功能。</a:t>
             </a:r>
             <a:endParaRPr lang="en-US" sz="1800" dirty="0"/>
           </a:p>
@@ -3358,7 +3316,7 @@
                 <a:ea typeface="Microsoft JhengHei" pitchFamily="34" charset="-122"/>
                 <a:cs typeface="Microsoft JhengHei" pitchFamily="34" charset="-120"/>
               </a:rPr>
-              <a:t>局部復發率在RFA後變化大。</a:t>
+              <a:t>SLC16A2 基因敲除減少腫瘤生長。</a:t>
             </a:r>
             <a:endParaRPr lang="en-US" sz="1800" dirty="0"/>
           </a:p>
@@ -3379,49 +3337,7 @@
                 <a:ea typeface="Microsoft JhengHei" pitchFamily="34" charset="-122"/>
                 <a:cs typeface="Microsoft JhengHei" pitchFamily="34" charset="-120"/>
               </a:rPr>
-              <a:t>腫瘤大小和位置是關鍵風險因素。</a:t>
-            </a:r>
-            <a:endParaRPr lang="en-US" sz="1800" dirty="0"/>
-          </a:p>
-          <a:p>
-            <a:pPr marL="342900" indent="-342900">
-              <a:spcAft>
-                <a:spcPts val="800"/>
-              </a:spcAft>
-              <a:buSzPct val="100000"/>
-              <a:buChar char="•"/>
-            </a:pPr>
-            <a:r>
-              <a:rPr lang="en-US" sz="1800" dirty="0">
-                <a:solidFill>
-                  <a:srgbClr val="333333"/>
-                </a:solidFill>
-                <a:latin typeface="Microsoft JhengHei" pitchFamily="34" charset="0"/>
-                <a:ea typeface="Microsoft JhengHei" pitchFamily="34" charset="-122"/>
-                <a:cs typeface="Microsoft JhengHei" pitchFamily="34" charset="-120"/>
-              </a:rPr>
-              <a:t>RFA前進行TACE影響LR組復發。</a:t>
-            </a:r>
-            <a:endParaRPr lang="en-US" sz="1800" dirty="0"/>
-          </a:p>
-          <a:p>
-            <a:pPr marL="342900" indent="-342900">
-              <a:spcAft>
-                <a:spcPts val="800"/>
-              </a:spcAft>
-              <a:buSzPct val="100000"/>
-              <a:buChar char="•"/>
-            </a:pPr>
-            <a:r>
-              <a:rPr lang="en-US" sz="1800" dirty="0">
-                <a:solidFill>
-                  <a:srgbClr val="333333"/>
-                </a:solidFill>
-                <a:latin typeface="Microsoft JhengHei" pitchFamily="34" charset="0"/>
-                <a:ea typeface="Microsoft JhengHei" pitchFamily="34" charset="-122"/>
-                <a:cs typeface="Microsoft JhengHei" pitchFamily="34" charset="-120"/>
-              </a:rPr>
-              <a:t>對於LR病例可能需考慮其他治療。</a:t>
+              <a:t>MCT8 單克隆抗體增強 CD8+ T 細胞活性。</a:t>
             </a:r>
             <a:endParaRPr lang="en-US" sz="1800" dirty="0"/>
           </a:p>
@@ -3457,7 +3373,7 @@
                   <a:srgbClr val="888888"/>
                 </a:solidFill>
               </a:rPr>
-              <a:t>Tanaka Kosuke, Kuwano Akifumi, Yada Masayoshi et al.. Anticancer research. 2026-04-28 DOI: 10.21873/anticanres.18141</a:t>
+              <a:t>Bi Bin, Tang Liqin, Liang Ranxi et al.. Molecular cancer therapeutics. 2026-05-04 DOI: 10.1158/1535-7163.MCT-25-0564</a:t>
             </a:r>
             <a:endParaRPr lang="en-US" sz="800" dirty="0"/>
           </a:p>
@@ -3674,7 +3590,7 @@
                   <a:srgbClr val="FFFFFF"/>
                 </a:solidFill>
               </a:rPr>
-              <a:t>1. **新療法的需求**  </a:t>
+              <a:t>1. **個體化治療的重要性 (Importance of Personalized Therapy)**  </a:t>
             </a:r>
             <a:endParaRPr lang="en-US" sz="1200" dirty="0"/>
           </a:p>
@@ -3691,7 +3607,7 @@
                   <a:srgbClr val="FFFFFF"/>
                 </a:solidFill>
               </a:rPr>
-              <a:t>   The study highlights the urgent need for innovative therapies to improve survival rates in hepatocellular carcinoma (HCC) patients, as current treatment options remain limited.  </a:t>
+              <a:t>   The studies emphasize the need for personalized treatment approaches in HCC, highlighting that standard dosing may not be effective for all patients due to variations in body composition and tumor microenvironment.  </a:t>
             </a:r>
             <a:endParaRPr lang="en-US" sz="1200" dirty="0"/>
           </a:p>
@@ -3708,7 +3624,7 @@
                   <a:srgbClr val="FFFFFF"/>
                 </a:solidFill>
               </a:rPr>
-              <a:t>   研究強調了創新療法在肝細胞癌（HCC）患者中改善生存率的迫切需求，因為目前的治療選擇仍然有限。</a:t>
+              <a:t>   研究強調在肝癌治療中個體化治療的重要性，指出標準劑量可能因患者體組成和腫瘤微環境的差異而無法有效。</a:t>
             </a:r>
             <a:endParaRPr lang="en-US" sz="1200" dirty="0"/>
           </a:p>
@@ -3734,7 +3650,7 @@
                   <a:srgbClr val="FFFFFF"/>
                 </a:solidFill>
               </a:rPr>
-              <a:t>2. **預後生物標記的挑戰**  </a:t>
+              <a:t>2. **免疫微環境的重塑 (Reprogramming the Immune Microenvironment)**  </a:t>
             </a:r>
             <a:endParaRPr lang="en-US" sz="1200" dirty="0"/>
           </a:p>
@@ -3751,7 +3667,7 @@
                   <a:srgbClr val="FFFFFF"/>
                 </a:solidFill>
               </a:rPr>
-              <a:t>   Identifying reliable prognostic biomarkers for HCC remains a significant challenge, which is crucial for tailoring treatment strategies and improving patient outcomes.  </a:t>
+              <a:t>   Innovative strategies such as ISX-TWIST1 reprogramming show potential in reshaping the immune microenvironment, which is crucial for enhancing the efficacy of immunotherapies in HCC.  </a:t>
             </a:r>
             <a:endParaRPr lang="en-US" sz="1200" dirty="0"/>
           </a:p>
@@ -3768,7 +3684,7 @@
                   <a:srgbClr val="FFFFFF"/>
                 </a:solidFill>
               </a:rPr>
-              <a:t>   確定肝細胞癌的可靠預後生物標記仍然是一個重大挑戰，這對於量身定制治療策略和改善患者預後至關重要。</a:t>
+              <a:t>   創新策略如ISX-TWIST1重塑顯示出在改變免疫微環境方面的潛力，這對於提高肝癌免疫治療的療效至關重要。</a:t>
             </a:r>
             <a:endParaRPr lang="en-US" sz="1200" dirty="0"/>
           </a:p>
@@ -3794,7 +3710,7 @@
                   <a:srgbClr val="FFFFFF"/>
                 </a:solidFill>
               </a:rPr>
-              <a:t>3. **代謝重編程的角色**  </a:t>
+              <a:t>3. **轉化療法的潛力 (Potential of Conversion Therapy)**  </a:t>
             </a:r>
             <a:endParaRPr lang="en-US" sz="1200" dirty="0"/>
           </a:p>
@@ -3811,7 +3727,7 @@
                   <a:srgbClr val="FFFFFF"/>
                 </a:solidFill>
               </a:rPr>
-              <a:t>   The role of metabolic reprogramming in HCC malignancy and immune evasion is increasingly recognized, suggesting potential targets for therapeutic intervention.  </a:t>
+              <a:t>   The combination of PD-1 inhibitors with other therapies, such as lenvatinib and transarterial chemoembolization, suggests promising outcomes for patients with unresectable HCC, paving the way for sequential surgical options.  </a:t>
             </a:r>
             <a:endParaRPr lang="en-US" sz="1200" dirty="0"/>
           </a:p>
@@ -3828,7 +3744,7 @@
                   <a:srgbClr val="FFFFFF"/>
                 </a:solidFill>
               </a:rPr>
-              <a:t>   代謝重編程在HCC惡性腫瘤和免疫逃逸中的角色越來越受到重視，這表明可能成為治療介入的潛在靶點。</a:t>
+              <a:t>   PD-1抑制劑與其他療法（如lenvatinib和經動脈化療栓塞）的結合顯示出對於不可切除肝癌患者的良好預後，為後續的手術選擇鋪平了道路。</a:t>
             </a:r>
             <a:endParaRPr lang="en-US" sz="1200" dirty="0"/>
           </a:p>
@@ -3854,7 +3770,7 @@
                   <a:srgbClr val="FFFFFF"/>
                 </a:solidFill>
               </a:rPr>
-              <a:t>4. **免疫治療的整合**  </a:t>
+              <a:t>4. **預測性平台的需求 (Need for Predictive Platforms)**  </a:t>
             </a:r>
             <a:endParaRPr lang="en-US" sz="1200" dirty="0"/>
           </a:p>
@@ -3871,7 +3787,7 @@
                   <a:srgbClr val="FFFFFF"/>
                 </a:solidFill>
               </a:rPr>
-              <a:t>   The integration of immune checkpoint inhibitors with other therapies, such as anti-VEGF agents, shows promise in enhancing treatment efficacy for advanced HCC.  </a:t>
+              <a:t>   The development of patient-derived organotypic tumor spheroids as functional platforms is crucial for predicting individual responses to immunotherapy, which can guide precision treatment strategies.  </a:t>
             </a:r>
             <a:endParaRPr lang="en-US" sz="1200" dirty="0"/>
           </a:p>
@@ -3888,7 +3804,7 @@
                   <a:srgbClr val="FFFFFF"/>
                 </a:solidFill>
               </a:rPr>
-              <a:t>   免疫檢查點抑制劑與其他療法（如抗VEGF藥物）的整合顯示出增強晚期HCC治療效果的潛力。</a:t>
+              <a:t>   開發患者衍生的有機腫瘤球體作為功能平台對於預測個體對免疫治療的反應至關重要，這可以指導精準治療策略。</a:t>
             </a:r>
             <a:endParaRPr lang="en-US" sz="1200" dirty="0"/>
           </a:p>
@@ -3914,7 +3830,7 @@
                   <a:srgbClr val="FFFFFF"/>
                 </a:solidFill>
               </a:rPr>
-              <a:t>5. **局部消融的風險因素**  </a:t>
+              <a:t>5. **營養指數與生存率的關聯 (Association of Nutritional Index with Survival)**  </a:t>
             </a:r>
             <a:endParaRPr lang="en-US" sz="1200" dirty="0"/>
           </a:p>
@@ -3931,7 +3847,7 @@
                   <a:srgbClr val="FFFFFF"/>
                 </a:solidFill>
               </a:rPr>
-              <a:t>   Understanding the risk factors for local recurrence after radiofrequency ablation is essential for optimizing treatment protocols and improving long-term outcomes in HCC patients.</a:t>
+              <a:t>   The prognostic nutritional index emerges as a significant factor influencing survival in HCC patients undergoing immune checkpoint inhibitor therapy, indicating the importance of nutritional status in treatment outcomes.</a:t>
             </a:r>
             <a:endParaRPr lang="en-US" sz="1200" dirty="0"/>
           </a:p>
@@ -4077,7 +3993,7 @@
                   <a:srgbClr val="FFFFFF"/>
                 </a:solidFill>
               </a:rPr>
-              <a:t>理解射頻消融後局部復發的風險因素對於優化治療方案和改善HCC患者的長期預後至關重要。</a:t>
+              <a:t>預後營養指數成為影響接受免疫檢查點抑制劑治療的肝癌患者生存率的重要因素，顯示出營養狀態對治療結果的重要性。</a:t>
             </a:r>
             <a:endParaRPr lang="en-US" sz="1200" dirty="0"/>
           </a:p>
@@ -4129,7 +4045,7 @@
                   <a:srgbClr val="FFFFFF"/>
                 </a:solidFill>
               </a:rPr>
-              <a:t>1. **生物標記的發現與驗證**  </a:t>
+              <a:t>1. **探索個體化劑量調整 (Exploration of Personalized Dosage Adjustments)**  </a:t>
             </a:r>
             <a:endParaRPr lang="en-US" sz="1200" dirty="0"/>
           </a:p>
@@ -4146,7 +4062,7 @@
                   <a:srgbClr val="FFFFFF"/>
                 </a:solidFill>
               </a:rPr>
-              <a:t>   Future studies should focus on the discovery and validation of robust prognostic biomarkers to enhance personalized treatment approaches in HCC.  </a:t>
+              <a:t>   Future studies should focus on optimizing bevacizumab dosing based on body surface area and composition to improve therapeutic outcomes in HCC patients.  </a:t>
             </a:r>
             <a:endParaRPr lang="en-US" sz="1200" dirty="0"/>
           </a:p>
@@ -4163,7 +4079,7 @@
                   <a:srgbClr val="FFFFFF"/>
                 </a:solidFill>
               </a:rPr>
-              <a:t>   未來研究應專注於發現和驗證穩健的預後生物標記，以增強HCC的個性化治療方法。</a:t>
+              <a:t>   未來研究應專注於根據體表面積和組成優化bevacizumab劑量，以改善肝癌患者的治療效果。</a:t>
             </a:r>
             <a:endParaRPr lang="en-US" sz="1200" dirty="0"/>
           </a:p>
@@ -4189,7 +4105,7 @@
                   <a:srgbClr val="FFFFFF"/>
                 </a:solidFill>
               </a:rPr>
-              <a:t>2. **免疫治療組合的探索**  </a:t>
+              <a:t>2. **深化免疫微環境研究 (Deepening Research on Immune Microenvironment)**  </a:t>
             </a:r>
             <a:endParaRPr lang="en-US" sz="1200" dirty="0"/>
           </a:p>
@@ -4206,7 +4122,7 @@
                   <a:srgbClr val="FFFFFF"/>
                 </a:solidFill>
               </a:rPr>
-              <a:t>   Investigating novel combinations of immune therapies with traditional treatments could provide synergistic effects and improve outcomes in HCC patients.  </a:t>
+              <a:t>   Investigating the mechanisms by which therapies like ISX-TWIST1 modify the immune microenvironment could provide insights into enhancing immunotherapy efficacy.  </a:t>
             </a:r>
             <a:endParaRPr lang="en-US" sz="1200" dirty="0"/>
           </a:p>
@@ -4223,7 +4139,7 @@
                   <a:srgbClr val="FFFFFF"/>
                 </a:solidFill>
               </a:rPr>
-              <a:t>   探索免疫療法與傳統治療的新組合可能會提供協同效果並改善HCC患者的預後。</a:t>
+              <a:t>   研究如ISX-TWIST1等療法改變免疫微環境的機制，可能為提高免疫治療的療效提供見解。</a:t>
             </a:r>
             <a:endParaRPr lang="en-US" sz="1200" dirty="0"/>
           </a:p>
@@ -4249,7 +4165,7 @@
                   <a:srgbClr val="FFFFFF"/>
                 </a:solidFill>
               </a:rPr>
-              <a:t>3. **代謝重編程的機制研究**  </a:t>
+              <a:t>3. **開發新型預測工具 (Development of Novel Predictive Tools)**  </a:t>
             </a:r>
             <a:endParaRPr lang="en-US" sz="1200" dirty="0"/>
           </a:p>
@@ -4266,7 +4182,7 @@
                   <a:srgbClr val="FFFFFF"/>
                 </a:solidFill>
               </a:rPr>
-              <a:t>   Further research is needed to elucidate the mechanisms of metabolic reprogramming in HCC and its impact on tumor progression and immune response.  </a:t>
+              <a:t>   Creating advanced predictive models and platforms that incorporate genetic, metabolic, and immunological factors will be essential for tailoring HCC treatments.  </a:t>
             </a:r>
             <a:endParaRPr lang="en-US" sz="1200" dirty="0"/>
           </a:p>
@@ -4283,7 +4199,7 @@
                   <a:srgbClr val="FFFFFF"/>
                 </a:solidFill>
               </a:rPr>
-              <a:t>   需要進一步研究以闡明HCC中代謝重編程的機制及其對腫瘤進展和免疫反應的影響。</a:t>
+              <a:t>   創建包含遺傳、代謝和免疫因素的先進預測模型和平台將對於量身定制肝癌治療至關重要。</a:t>
             </a:r>
             <a:endParaRPr lang="en-US" sz="1200" dirty="0"/>
           </a:p>
@@ -4309,7 +4225,7 @@
                   <a:srgbClr val="FFFFFF"/>
                 </a:solidFill>
               </a:rPr>
-              <a:t>4. **局部治療的優化**  </a:t>
+              <a:t>4. **評估營養介入的影響 (Assessing the Impact of Nutritional Interventions)**  </a:t>
             </a:r>
             <a:endParaRPr lang="en-US" sz="1200" dirty="0"/>
           </a:p>
@@ -4326,7 +4242,7 @@
                   <a:srgbClr val="FFFFFF"/>
                 </a:solidFill>
               </a:rPr>
-              <a:t>   Studies aimed at optimizing local ablation techniques and identifying patient-specific factors could reduce recurrence rates and enhance treatment efficacy.  </a:t>
+              <a:t>   Future research should evaluate the role of nutritional interventions in conjunction with immunotherapy to enhance patient outcomes in HCC.  </a:t>
             </a:r>
             <a:endParaRPr lang="en-US" sz="1200" dirty="0"/>
           </a:p>
@@ -4343,7 +4259,7 @@
                   <a:srgbClr val="FFFFFF"/>
                 </a:solidFill>
               </a:rPr>
-              <a:t>   旨在優化局部消融技術並識別患者特定因素的研究可以降低復發率並提高治療效果。</a:t>
+              <a:t>   未來研究應評估營養介入與免疫治療結合的作用，以提高肝癌患者的療效。</a:t>
             </a:r>
             <a:endParaRPr lang="en-US" sz="1200" dirty="0"/>
           </a:p>
@@ -4369,7 +4285,7 @@
                   <a:srgbClr val="FFFFFF"/>
                 </a:solidFill>
               </a:rPr>
-              <a:t>5. **病毒性肝炎與免疫反應的關聯**  </a:t>
+              <a:t>5. **長期隨訪研究的必要性 (Need for Long-Term Follow-Up Studies)**  </a:t>
             </a:r>
             <a:endParaRPr lang="en-US" sz="1200" dirty="0"/>
           </a:p>
@@ -4386,7 +4302,7 @@
                   <a:srgbClr val="FFFFFF"/>
                 </a:solidFill>
               </a:rPr>
-              <a:t>   Investigating the interplay between viral hepatitis and immune response in HCC could lead to better understanding and management of treatment outcomes.  </a:t>
+              <a:t>   Conducting long-term follow-up studies on patients receiving conversion therapies will help determine the durability of treatment responses and survival benefits.  </a:t>
             </a:r>
             <a:endParaRPr lang="en-US" sz="1200" dirty="0"/>
           </a:p>
@@ -4403,7 +4319,7 @@
                   <a:srgbClr val="FFFFFF"/>
                 </a:solidFill>
               </a:rPr>
-              <a:t>   研究病毒性肝炎與HCC中免疫反應的相互作用可能有助於更好地理解和管理治療結果。</a:t>
+              <a:t>   對接受轉化療法的患者進行長期隨訪研究將有助於確定治療反應的持久性和生存益處。</a:t>
             </a:r>
             <a:endParaRPr lang="en-US" sz="1200" dirty="0"/>
           </a:p>
@@ -4676,7 +4592,7 @@
                 <a:ea typeface="Arial" pitchFamily="34" charset="-122"/>
                 <a:cs typeface="Arial" pitchFamily="34" charset="-120"/>
               </a:rPr>
-              <a:t>AdvanTIG-206: a phase II, randomized study of ociperlimab plus tislelizumab and …</a:t>
+              <a:t>Optimizing bevacizumab exposure in atezolizumab-based therapy for unresectable h…</a:t>
             </a:r>
             <a:endParaRPr lang="en-US" sz="1400" dirty="0"/>
           </a:p>
@@ -4713,7 +4629,7 @@
                 <a:ea typeface="Arial" pitchFamily="34" charset="-122"/>
                 <a:cs typeface="Arial" pitchFamily="34" charset="-120"/>
               </a:rPr>
-              <a:t>Development and validation of a risk prediction model for patients with hepatoce…</a:t>
+              <a:t>Patient-derived organotypic tumor spheroids as a functional platform for predict…</a:t>
             </a:r>
             <a:endParaRPr lang="en-US" sz="1400" dirty="0"/>
           </a:p>
@@ -4750,7 +4666,7 @@
                 <a:ea typeface="Arial" pitchFamily="34" charset="-122"/>
                 <a:cs typeface="Arial" pitchFamily="34" charset="-120"/>
               </a:rPr>
-              <a:t>An etiology-stratified single-cell atlas identifies FABP4 as a prognostic marker…</a:t>
+              <a:t>Sintilimab (PD-1 inhibitor) plus lenvatinib as conversion therapy followed by se…</a:t>
             </a:r>
             <a:endParaRPr lang="en-US" sz="1400" dirty="0"/>
           </a:p>
@@ -4787,7 +4703,7 @@
                 <a:ea typeface="Arial" pitchFamily="34" charset="-122"/>
                 <a:cs typeface="Arial" pitchFamily="34" charset="-120"/>
               </a:rPr>
-              <a:t>JOSD1 drives hepatocellular carcinoma malignancy by modulating the ubiquitinatio…</a:t>
+              <a:t>ISX-TWIST1 reprograms CD47-inflammasome signaling to reshape the immune microenv…</a:t>
             </a:r>
             <a:endParaRPr lang="en-US" sz="1400" dirty="0"/>
           </a:p>
@@ -4824,7 +4740,7 @@
                 <a:ea typeface="Arial" pitchFamily="34" charset="-122"/>
                 <a:cs typeface="Arial" pitchFamily="34" charset="-120"/>
               </a:rPr>
-              <a:t>Viral hepatitis and immunotherapy outcome in advanced hepatocellular carcinoma: …</a:t>
+              <a:t>… plus transarterial chemoembolization and PD-1 inhibitors as conversion therapi…</a:t>
             </a:r>
             <a:endParaRPr lang="en-US" sz="1400" dirty="0"/>
           </a:p>
@@ -4861,7 +4777,7 @@
                 <a:ea typeface="Arial" pitchFamily="34" charset="-122"/>
                 <a:cs typeface="Arial" pitchFamily="34" charset="-120"/>
               </a:rPr>
-              <a:t>Lenvatinib Versus Bevacizumab in Combination With Anti-PD-1/PD-L1 Therapy for uH…</a:t>
+              <a:t>A Case of Pernicious Anemia Induced by Atezolizumab in Hepatocellular Carcinoma …</a:t>
             </a:r>
             <a:endParaRPr lang="en-US" sz="1400" dirty="0"/>
           </a:p>
@@ -4898,7 +4814,7 @@
                 <a:ea typeface="Arial" pitchFamily="34" charset="-122"/>
                 <a:cs typeface="Arial" pitchFamily="34" charset="-120"/>
               </a:rPr>
-              <a:t>Low-Dose Bevacizumab Maintains Efficacy With Reduced Adverse Events in Liver Can…</a:t>
+              <a:t>Comparison of outcomes of second-line durvalumab plus tremelimumab versus lenvat…</a:t>
             </a:r>
             <a:endParaRPr lang="en-US" sz="1400" dirty="0"/>
           </a:p>
@@ -4935,7 +4851,7 @@
                 <a:ea typeface="Arial" pitchFamily="34" charset="-122"/>
                 <a:cs typeface="Arial" pitchFamily="34" charset="-120"/>
               </a:rPr>
-              <a:t>… plus transarterial chemoembolization and PD-1 inhibitors as conversion therapi…</a:t>
+              <a:t>Prognostic nutritional index and the survival of patients with hepatocellular ca…</a:t>
             </a:r>
             <a:endParaRPr lang="en-US" sz="1400" dirty="0"/>
           </a:p>
@@ -4972,7 +4888,7 @@
                 <a:ea typeface="Arial" pitchFamily="34" charset="-122"/>
                 <a:cs typeface="Arial" pitchFamily="34" charset="-120"/>
               </a:rPr>
-              <a:t>Radiologic Response Assessment With RECIST 1.1 and mRECIST in Patients With Hepa…</a:t>
+              <a:t>Radiotherapy versus local ablation therapy for the treatment of hepatocellular c…</a:t>
             </a:r>
             <a:endParaRPr lang="en-US" sz="1400" dirty="0"/>
           </a:p>
@@ -5009,7 +4925,7 @@
                 <a:ea typeface="Arial" pitchFamily="34" charset="-122"/>
                 <a:cs typeface="Arial" pitchFamily="34" charset="-120"/>
               </a:rPr>
-              <a:t>Identification of Risk Factors for the Local Recurrence of Hepatocellular Carcin…</a:t>
+              <a:t>MCT8 Modulates Metabolite Uptake and T-cell Exhaustion to Promote Immunosuppress…</a:t>
             </a:r>
             <a:endParaRPr lang="en-US" sz="1400" dirty="0"/>
           </a:p>
@@ -5164,7 +5080,7 @@
                   </a:extLst>
                 </a:hlinkClick>
               </a:rPr>
-              <a:t>AdvanTIG-206: a phase II, randomized study of ociperlimab plus tislelizumab and BAT1706 (bevacizumab biosimilar) versus tislelizumab and BAT1706 in first-line hepatocellular carcinoma.</a:t>
+              <a:t>Optimizing bevacizumab exposure in atezolizumab-based therapy for unresectable hepatocellular carcinoma: A nationwide real-world study.</a:t>
             </a:r>
             <a:endParaRPr lang="en-US" sz="2400" dirty="0"/>
           </a:p>
@@ -5200,7 +5116,7 @@
                   <a:srgbClr val="888888"/>
                 </a:solidFill>
               </a:rPr>
-              <a:t>Cancer immunology, immunotherapy : CII  ·  RCT Phase 2  ·  🌏 Asia</a:t>
+              <a:t>Hepatology (Baltimore, Md.)  ·  IF 12.9  ·  Retrospective Study  ·  🌏 Asia</a:t>
             </a:r>
             <a:endParaRPr lang="en-US" sz="1000" dirty="0"/>
           </a:p>
@@ -5243,7 +5159,7 @@
                 <a:ea typeface="Microsoft JhengHei" pitchFamily="34" charset="-122"/>
                 <a:cs typeface="Microsoft JhengHei" pitchFamily="34" charset="-120"/>
               </a:rPr>
-              <a:t>針對晚期HCC患者的第二期試驗</a:t>
+              <a:t>研究HCC患者的bevacizumab劑量</a:t>
             </a:r>
             <a:endParaRPr lang="en-US" sz="1800" dirty="0"/>
           </a:p>
@@ -5264,7 +5180,7 @@
                 <a:ea typeface="Microsoft JhengHei" pitchFamily="34" charset="-122"/>
                 <a:cs typeface="Microsoft JhengHei" pitchFamily="34" charset="-120"/>
               </a:rPr>
-              <a:t>測試Ociperlimab加Tislelizumab和BAT1706</a:t>
+              <a:t>最佳BBI範圍為106-121%</a:t>
             </a:r>
             <a:endParaRPr lang="en-US" sz="1800" dirty="0"/>
           </a:p>
@@ -5285,7 +5201,7 @@
                 <a:ea typeface="Microsoft JhengHei" pitchFamily="34" charset="-122"/>
                 <a:cs typeface="Microsoft JhengHei" pitchFamily="34" charset="-120"/>
               </a:rPr>
-              <a:t>確認ORR：37.1%（A組），40.6%（B組）</a:t>
+              <a:t>目標組PFS和OS較長</a:t>
             </a:r>
             <a:endParaRPr lang="en-US" sz="1800" dirty="0"/>
           </a:p>
@@ -5306,7 +5222,7 @@
                 <a:ea typeface="Microsoft JhengHei" pitchFamily="34" charset="-122"/>
                 <a:cs typeface="Microsoft JhengHei" pitchFamily="34" charset="-120"/>
               </a:rPr>
-              <a:t>高比例治療相關不良事件</a:t>
+              <a:t>調整劑量無增加毒性</a:t>
             </a:r>
             <a:endParaRPr lang="en-US" sz="1800" dirty="0"/>
           </a:p>
@@ -5327,7 +5243,7 @@
                 <a:ea typeface="Microsoft JhengHei" pitchFamily="34" charset="-122"/>
                 <a:cs typeface="Microsoft JhengHei" pitchFamily="34" charset="-120"/>
               </a:rPr>
-              <a:t>未發現新安全信號</a:t>
+              <a:t>目標組反應率較高</a:t>
             </a:r>
             <a:endParaRPr lang="en-US" sz="1800" dirty="0"/>
           </a:p>
@@ -5363,7 +5279,7 @@
                   <a:srgbClr val="888888"/>
                 </a:solidFill>
               </a:rPr>
-              <a:t>Ren Zhenggang, Huang Yao, Guo Yabing et al.. Cancer immunology, immunotherapy : CII. 2026-04-28 DOI: 10.1007/s00262-026-04399-8</a:t>
+              <a:t>Aoe Kaho, Tada Toshifumi, Hiraoka Atsushi et al.. Hepatology (Baltimore, Md.). 2026-05-06 DOI: 10.1097/HEP.0000000000001781</a:t>
             </a:r>
             <a:endParaRPr lang="en-US" sz="800" dirty="0"/>
           </a:p>
@@ -5563,7 +5479,7 @@
                   </a:extLst>
                 </a:hlinkClick>
               </a:rPr>
-              <a:t>Development and validation of a risk prediction model for patients with hepatocellular carcinoma receiving atezolizumab-bevacizumab.</a:t>
+              <a:t>Patient-derived organotypic tumor spheroids as a functional platform for predicting immunotherapeutic responses and guiding precision treatment for hepatocellular carcinoma.</a:t>
             </a:r>
             <a:endParaRPr lang="en-US" sz="2400" dirty="0"/>
           </a:p>
@@ -5599,7 +5515,7 @@
                   <a:srgbClr val="888888"/>
                 </a:solidFill>
               </a:rPr>
-              <a:t>Hepatology (Baltimore, Md.)  ·  IF 12.9  ·  🌏 Asia</a:t>
+              <a:t>Journal for immunotherapy of cancer  ·  IF 10.9  ·  Basic Research</a:t>
             </a:r>
             <a:endParaRPr lang="en-US" sz="1000" dirty="0"/>
           </a:p>
@@ -5642,7 +5558,7 @@
                 <a:ea typeface="Microsoft JhengHei" pitchFamily="34" charset="-122"/>
                 <a:cs typeface="Microsoft JhengHei" pitchFamily="34" charset="-120"/>
               </a:rPr>
-              <a:t>Atezolizumab-bevacizumab為標準治療。</a:t>
+              <a:t>開發患者衍生的腫瘤球體（PDOTS）</a:t>
             </a:r>
             <a:endParaRPr lang="en-US" sz="1800" dirty="0"/>
           </a:p>
@@ -5663,7 +5579,7 @@
                 <a:ea typeface="Microsoft JhengHei" pitchFamily="34" charset="-122"/>
                 <a:cs typeface="Microsoft JhengHei" pitchFamily="34" charset="-120"/>
               </a:rPr>
-              <a:t>開發CRAPT-M風險預測模型。</a:t>
+              <a:t>PDOTS 模型保留 HCC 異質性及免疫微環境</a:t>
             </a:r>
             <a:endParaRPr lang="en-US" sz="1800" dirty="0"/>
           </a:p>
@@ -5684,7 +5600,7 @@
                 <a:ea typeface="Microsoft JhengHei" pitchFamily="34" charset="-122"/>
                 <a:cs typeface="Microsoft JhengHei" pitchFamily="34" charset="-120"/>
               </a:rPr>
-              <a:t>識別五個獨立預後因子。</a:t>
+              <a:t>預測治療反應達 80% 一致性</a:t>
             </a:r>
             <a:endParaRPr lang="en-US" sz="1800" dirty="0"/>
           </a:p>
@@ -5705,7 +5621,7 @@
                 <a:ea typeface="Microsoft JhengHei" pitchFamily="34" charset="-122"/>
                 <a:cs typeface="Microsoft JhengHei" pitchFamily="34" charset="-120"/>
               </a:rPr>
-              <a:t>中位OS依風險組別而異。</a:t>
+              <a:t>識別出治療敏感性的 'Organoid Killing Index'</a:t>
             </a:r>
             <a:endParaRPr lang="en-US" sz="1800" dirty="0"/>
           </a:p>
@@ -5726,7 +5642,7 @@
                 <a:ea typeface="Microsoft JhengHei" pitchFamily="34" charset="-122"/>
                 <a:cs typeface="Microsoft JhengHei" pitchFamily="34" charset="-120"/>
               </a:rPr>
-              <a:t>CRAPT-M準確度高於CRAFITY。</a:t>
+              <a:t>支持 HCC 患者的個體化免疫治療</a:t>
             </a:r>
             <a:endParaRPr lang="en-US" sz="1800" dirty="0"/>
           </a:p>
@@ -5762,7 +5678,7 @@
                   <a:srgbClr val="888888"/>
                 </a:solidFill>
               </a:rPr>
-              <a:t>Nam Heechul, Kim Dong Yun, Kim Do Young et al.. Hepatology (Baltimore, Md.). 2026-04-17 DOI: 10.1097/HEP.0000000000001444</a:t>
+              <a:t>Song Fei, Lu Yi-Jun, Sun Hai-Xiang et al.. Journal for immunotherapy of cancer. 2026-05-04 DOI: 10.1136/jitc-2025-014555</a:t>
             </a:r>
             <a:endParaRPr lang="en-US" sz="800" dirty="0"/>
           </a:p>
@@ -5962,7 +5878,7 @@
                   </a:extLst>
                 </a:hlinkClick>
               </a:rPr>
-              <a:t>An etiology-stratified single-cell atlas identifies FABP4 as a prognostic marker for MASLD-related HCC.</a:t>
+              <a:t>Sintilimab (PD-1 inhibitor) plus lenvatinib as conversion therapy followed by sequential surgery (SILENSES) for advanced unresectable hepatocellular carcinoma: a phase II, expansion trial.</a:t>
             </a:r>
             <a:endParaRPr lang="en-US" sz="2400" dirty="0"/>
           </a:p>
@@ -5998,7 +5914,7 @@
                   <a:srgbClr val="888888"/>
                 </a:solidFill>
               </a:rPr>
-              <a:t>Journal of hepatology  ·  IF 25.7  ·  Basic Research</a:t>
+              <a:t>Signal transduction and targeted therapy  ·  RCT Phase 2</a:t>
             </a:r>
             <a:endParaRPr lang="en-US" sz="1000" dirty="0"/>
           </a:p>
@@ -6041,7 +5957,7 @@
                 <a:ea typeface="Microsoft JhengHei" pitchFamily="34" charset="-122"/>
                 <a:cs typeface="Microsoft JhengHei" pitchFamily="34" charset="-120"/>
               </a:rPr>
-              <a:t>研究比較HCC腫瘤微環境</a:t>
+              <a:t>Sintilimab-lenvatinib顯示抗腫瘤活性。</a:t>
             </a:r>
             <a:endParaRPr lang="en-US" sz="1800" dirty="0"/>
           </a:p>
@@ -6062,7 +5978,7 @@
                 <a:ea typeface="Microsoft JhengHei" pitchFamily="34" charset="-122"/>
                 <a:cs typeface="Microsoft JhengHei" pitchFamily="34" charset="-120"/>
               </a:rPr>
-              <a:t>FABP4被確定為預後生物標記</a:t>
+              <a:t>不可切除HCC患者轉化率56%。</a:t>
             </a:r>
             <a:endParaRPr lang="en-US" sz="1800" dirty="0"/>
           </a:p>
@@ -6083,7 +5999,7 @@
                 <a:ea typeface="Microsoft JhengHei" pitchFamily="34" charset="-122"/>
                 <a:cs typeface="Microsoft JhengHei" pitchFamily="34" charset="-120"/>
               </a:rPr>
-              <a:t>HBV+MASLD+ HCC免疫治療效果最佳</a:t>
+              <a:t>中位整體生存期為36個月。</a:t>
             </a:r>
             <a:endParaRPr lang="en-US" sz="1800" dirty="0"/>
           </a:p>
@@ -6104,7 +6020,7 @@
                 <a:ea typeface="Microsoft JhengHei" pitchFamily="34" charset="-122"/>
                 <a:cs typeface="Microsoft JhengHei" pitchFamily="34" charset="-120"/>
               </a:rPr>
-              <a:t>MASLD+ HCC中CD8+ T細胞增加</a:t>
+              <a:t>手術後五年生存率73.9%。</a:t>
             </a:r>
             <a:endParaRPr lang="en-US" sz="1800" dirty="0"/>
           </a:p>
@@ -6125,7 +6041,7 @@
                 <a:ea typeface="Microsoft JhengHei" pitchFamily="34" charset="-122"/>
                 <a:cs typeface="Microsoft JhengHei" pitchFamily="34" charset="-120"/>
               </a:rPr>
-              <a:t>FABP4促進血管正常化及T細胞浸潤</a:t>
+              <a:t>31%患者出現三級以上不良事件。</a:t>
             </a:r>
             <a:endParaRPr lang="en-US" sz="1800" dirty="0"/>
           </a:p>
@@ -6161,7 +6077,7 @@
                   <a:srgbClr val="888888"/>
                 </a:solidFill>
               </a:rPr>
-              <a:t>Zhang Shuyuan, Xu Huanhuan, Li Mingwei et al.. Journal of hepatology. 2026-04-17 DOI: 10.1016/j.jhep.2025.10.026</a:t>
+              <a:t>Lu Shichun, Zhang Wenwen, Li Junfeng et al.. Signal transduction and targeted therapy. 2026-05-06 DOI: 10.1038/s41392-026-02708-2</a:t>
             </a:r>
             <a:endParaRPr lang="en-US" sz="800" dirty="0"/>
           </a:p>
@@ -6361,7 +6277,7 @@
                   </a:extLst>
                 </a:hlinkClick>
               </a:rPr>
-              <a:t>JOSD1 drives hepatocellular carcinoma malignancy by modulating the ubiquitination-lactylation switch on PGAM1.</a:t>
+              <a:t>ISX-TWIST1 reprograms CD47-inflammasome signaling to reshape the immune microenvironment in liver cancer.</a:t>
             </a:r>
             <a:endParaRPr lang="en-US" sz="2400" dirty="0"/>
           </a:p>
@@ -6397,7 +6313,7 @@
                   <a:srgbClr val="888888"/>
                 </a:solidFill>
               </a:rPr>
-              <a:t>Gut  ·  IF 24.5  ·  Basic Research</a:t>
+              <a:t>Experimental hematology &amp; oncology  ·  Basic Research  ·  🌏 Asia</a:t>
             </a:r>
             <a:endParaRPr lang="en-US" sz="1000" dirty="0"/>
           </a:p>
@@ -6440,7 +6356,7 @@
                 <a:ea typeface="Microsoft JhengHei" pitchFamily="34" charset="-122"/>
                 <a:cs typeface="Microsoft JhengHei" pitchFamily="34" charset="-120"/>
               </a:rPr>
-              <a:t>JOSD1 增強 HCC 的糖酵解。</a:t>
+              <a:t>ISX連結CD47信號與inflammasome。</a:t>
             </a:r>
             <a:endParaRPr lang="en-US" sz="1800" dirty="0"/>
           </a:p>
@@ -6461,7 +6377,7 @@
                 <a:ea typeface="Microsoft JhengHei" pitchFamily="34" charset="-122"/>
                 <a:cs typeface="Microsoft JhengHei" pitchFamily="34" charset="-120"/>
               </a:rPr>
-              <a:t>過表達導致預後不良。</a:t>
+              <a:t>CD47升高促進M2巨噬細胞極化。</a:t>
             </a:r>
             <a:endParaRPr lang="en-US" sz="1800" dirty="0"/>
           </a:p>
@@ -6482,49 +6398,7 @@
                 <a:ea typeface="Microsoft JhengHei" pitchFamily="34" charset="-122"/>
                 <a:cs typeface="Microsoft JhengHei" pitchFamily="34" charset="-120"/>
               </a:rPr>
-              <a:t>調節 PGAM1 的泛素化-乳酸化。</a:t>
-            </a:r>
-            <a:endParaRPr lang="en-US" sz="1800" dirty="0"/>
-          </a:p>
-          <a:p>
-            <a:pPr marL="342900" indent="-342900">
-              <a:spcAft>
-                <a:spcPts val="800"/>
-              </a:spcAft>
-              <a:buSzPct val="100000"/>
-              <a:buChar char="•"/>
-            </a:pPr>
-            <a:r>
-              <a:rPr lang="en-US" sz="1800" dirty="0">
-                <a:solidFill>
-                  <a:srgbClr val="333333"/>
-                </a:solidFill>
-                <a:latin typeface="Microsoft JhengHei" pitchFamily="34" charset="0"/>
-                <a:ea typeface="Microsoft JhengHei" pitchFamily="34" charset="-122"/>
-                <a:cs typeface="Microsoft JhengHei" pitchFamily="34" charset="-120"/>
-              </a:rPr>
-              <a:t>觀察到 CD8+ T 細胞功能受損。</a:t>
-            </a:r>
-            <a:endParaRPr lang="en-US" sz="1800" dirty="0"/>
-          </a:p>
-          <a:p>
-            <a:pPr marL="342900" indent="-342900">
-              <a:spcAft>
-                <a:spcPts val="800"/>
-              </a:spcAft>
-              <a:buSzPct val="100000"/>
-              <a:buChar char="•"/>
-            </a:pPr>
-            <a:r>
-              <a:rPr lang="en-US" sz="1800" dirty="0">
-                <a:solidFill>
-                  <a:srgbClr val="333333"/>
-                </a:solidFill>
-                <a:latin typeface="Microsoft JhengHei" pitchFamily="34" charset="0"/>
-                <a:ea typeface="Microsoft JhengHei" pitchFamily="34" charset="-122"/>
-                <a:cs typeface="Microsoft JhengHei" pitchFamily="34" charset="-120"/>
-              </a:rPr>
-              <a:t>抑制 JOSD1 與抗 PD-1 協同作用。</a:t>
+              <a:t>消除M2巨噬細胞可阻止疾病進展。</a:t>
             </a:r>
             <a:endParaRPr lang="en-US" sz="1800" dirty="0"/>
           </a:p>
@@ -6560,7 +6434,7 @@
                   <a:srgbClr val="888888"/>
                 </a:solidFill>
               </a:rPr>
-              <a:t>Li Qing, Yu Kai, Zhou Suiqing et al.. Gut. 2026-04-28 DOI: 10.1136/gutjnl-2025-337331</a:t>
+              <a:t>Wang Li-Ting, Lin Ming-Hong, Li Yi-Chuan et al.. Experimental hematology &amp; oncology. 2026-05-04 DOI: 10.1186/s40164-026-00777-1</a:t>
             </a:r>
             <a:endParaRPr lang="en-US" sz="800" dirty="0"/>
           </a:p>
@@ -6760,7 +6634,7 @@
                   </a:extLst>
                 </a:hlinkClick>
               </a:rPr>
-              <a:t>Viral hepatitis and immunotherapy outcome in advanced hepatocellular carcinoma: A comprehensive umbrella review of 15 meta-analyses.</a:t>
+              <a:t>… plus transarterial chemoembolization and PD-1 inhibitors as conversion therapies for unresectable intermediate-advanced hepatocellular carcinoma: a phase 2 trial …</a:t>
             </a:r>
             <a:endParaRPr lang="en-US" sz="2400" dirty="0"/>
           </a:p>
@@ -6796,7 +6670,7 @@
                   <a:srgbClr val="888888"/>
                 </a:solidFill>
               </a:rPr>
-              <a:t>Critical reviews in oncology/hematology  ·  RCT Phase 3</a:t>
+              <a:t>… and Targeted Therapy  ·  RCT Phase 2</a:t>
             </a:r>
             <a:endParaRPr lang="en-US" sz="1000" dirty="0"/>
           </a:p>
@@ -6839,7 +6713,7 @@
                 <a:ea typeface="Microsoft JhengHei" pitchFamily="34" charset="-122"/>
                 <a:cs typeface="Microsoft JhengHei" pitchFamily="34" charset="-120"/>
               </a:rPr>
-              <a:t>免疫檢查點抑制劑改善HCC存活率。</a:t>
+              <a:t>針對不可切除HCC的組合療法</a:t>
             </a:r>
             <a:endParaRPr lang="en-US" sz="1800" dirty="0"/>
           </a:p>
@@ -6860,7 +6734,7 @@
                 <a:ea typeface="Microsoft JhengHei" pitchFamily="34" charset="-122"/>
                 <a:cs typeface="Microsoft JhengHei" pitchFamily="34" charset="-120"/>
               </a:rPr>
-              <a:t>HBV患者效益大於非病毒性。</a:t>
+              <a:t>使用肝動脈化療栓塞（TACE）</a:t>
             </a:r>
             <a:endParaRPr lang="en-US" sz="1800" dirty="0"/>
           </a:p>
@@ -6881,7 +6755,7 @@
                 <a:ea typeface="Microsoft JhengHei" pitchFamily="34" charset="-122"/>
                 <a:cs typeface="Microsoft JhengHei" pitchFamily="34" charset="-120"/>
               </a:rPr>
-              <a:t>各meta分析結果高度重疊。</a:t>
+              <a:t>PD-1抑制劑提升療效</a:t>
             </a:r>
             <a:endParaRPr lang="en-US" sz="1800" dirty="0"/>
           </a:p>
@@ -6902,7 +6776,7 @@
                 <a:ea typeface="Microsoft JhengHei" pitchFamily="34" charset="-122"/>
                 <a:cs typeface="Microsoft JhengHei" pitchFamily="34" charset="-120"/>
               </a:rPr>
-              <a:t>現實數據顯示atezolizumab不一致。</a:t>
+              <a:t>第二期試驗顯示良好結果</a:t>
             </a:r>
             <a:endParaRPr lang="en-US" sz="1800" dirty="0"/>
           </a:p>
@@ -6923,7 +6797,7 @@
                 <a:ea typeface="Microsoft JhengHei" pitchFamily="34" charset="-122"/>
                 <a:cs typeface="Microsoft JhengHei" pitchFamily="34" charset="-120"/>
               </a:rPr>
-              <a:t>需謹慎解讀亞組結果。</a:t>
+              <a:t>有潛力轉為可切除狀態</a:t>
             </a:r>
             <a:endParaRPr lang="en-US" sz="1800" dirty="0"/>
           </a:p>
@@ -6959,7 +6833,7 @@
                   <a:srgbClr val="888888"/>
                 </a:solidFill>
               </a:rPr>
-              <a:t>Petrelli Fausto, Colombo Silvia, Dottorini Lorenzo et al.. Critical reviews in oncology/hematology. 2026-04-12 DOI: 10.1016/j.critrevonc.2026.105248</a:t>
+              <a:t>X Zhang, H Cai, W Peng. … and Targeted Therapy. 2026</a:t>
             </a:r>
             <a:endParaRPr lang="en-US" sz="800" dirty="0"/>
           </a:p>
@@ -7159,7 +7033,7 @@
                   </a:extLst>
                 </a:hlinkClick>
               </a:rPr>
-              <a:t>Lenvatinib Versus Bevacizumab in Combination With Anti-PD-1/PD-L1 Therapy for uHCC: A Meta-Analysis of East Asian Studies.</a:t>
+              <a:t>A Case of Pernicious Anemia Induced by Atezolizumab in Hepatocellular Carcinoma and Renal Cell Carcinoma.</a:t>
             </a:r>
             <a:endParaRPr lang="en-US" sz="2400" dirty="0"/>
           </a:p>
@@ -7195,7 +7069,7 @@
                   <a:srgbClr val="888888"/>
                 </a:solidFill>
               </a:rPr>
-              <a:t>Liver international : official journal of the International Association for the Study of the Liver  ·  IF 6.0  ·  RCT</a:t>
+              <a:t>The American journal of case reports  ·  Case Report  ·  🌏 Asia</a:t>
             </a:r>
             <a:endParaRPr lang="en-US" sz="1000" dirty="0"/>
           </a:p>
@@ -7238,7 +7112,7 @@
                 <a:ea typeface="Microsoft JhengHei" pitchFamily="34" charset="-122"/>
                 <a:cs typeface="Microsoft JhengHei" pitchFamily="34" charset="-120"/>
               </a:rPr>
-              <a:t>Lenvatinib延長總生存期。</a:t>
+              <a:t>ICI引起的惡性貧血</a:t>
             </a:r>
             <a:endParaRPr lang="en-US" sz="1800" dirty="0"/>
           </a:p>
@@ -7259,7 +7133,7 @@
                 <a:ea typeface="Microsoft JhengHei" pitchFamily="34" charset="-122"/>
                 <a:cs typeface="Microsoft JhengHei" pitchFamily="34" charset="-120"/>
               </a:rPr>
-              <a:t>Lenvatinib改善無進展生存期。</a:t>
+              <a:t>68歲男性肝癌病例</a:t>
             </a:r>
             <a:endParaRPr lang="en-US" sz="1800" dirty="0"/>
           </a:p>
@@ -7280,7 +7154,7 @@
                 <a:ea typeface="Microsoft JhengHei" pitchFamily="34" charset="-122"/>
                 <a:cs typeface="Microsoft JhengHei" pitchFamily="34" charset="-120"/>
               </a:rPr>
-              <a:t>反應率無顯著差異。</a:t>
+              <a:t>接受atezolizumab後出現巨幼紅血球貧血</a:t>
             </a:r>
             <a:endParaRPr lang="en-US" sz="1800" dirty="0"/>
           </a:p>
@@ -7301,7 +7175,7 @@
                 <a:ea typeface="Microsoft JhengHei" pitchFamily="34" charset="-122"/>
                 <a:cs typeface="Microsoft JhengHei" pitchFamily="34" charset="-120"/>
               </a:rPr>
-              <a:t>Lenvatinib有較高手足反應。</a:t>
+              <a:t>胃壁細胞抗體陽性</a:t>
             </a:r>
             <a:endParaRPr lang="en-US" sz="1800" dirty="0"/>
           </a:p>
@@ -7322,7 +7196,7 @@
                 <a:ea typeface="Microsoft JhengHei" pitchFamily="34" charset="-122"/>
                 <a:cs typeface="Microsoft JhengHei" pitchFamily="34" charset="-120"/>
               </a:rPr>
-              <a:t>Bevacizumab有較高腸胃風險。</a:t>
+              <a:t>需監測Vit.B12水平</a:t>
             </a:r>
             <a:endParaRPr lang="en-US" sz="1800" dirty="0"/>
           </a:p>
@@ -7358,7 +7232,7 @@
                   <a:srgbClr val="888888"/>
                 </a:solidFill>
               </a:rPr>
-              <a:t>Wang Xiaoxia, Wang Shuo, Lu Jun et al.. Liver international : official journal of the International Association for the Study of the Liver. 2026-04-20 DOI: 10.1111/liv.70647</a:t>
+              <a:t>Sugimoto Takeshi, Kanemori Gen, Kanehira Hirohumi et al.. The American journal of case reports. 2026-05-10 DOI: 10.12659/AJCR.952800</a:t>
             </a:r>
             <a:endParaRPr lang="en-US" sz="800" dirty="0"/>
           </a:p>
@@ -7558,7 +7432,7 @@
                   </a:extLst>
                 </a:hlinkClick>
               </a:rPr>
-              <a:t>Low-Dose Bevacizumab Maintains Efficacy With Reduced Adverse Events in Liver Cancer.</a:t>
+              <a:t>Comparison of outcomes of second-line durvalumab plus tremelimumab versus lenvatinib following first-line atezolizumab plus bevacizumab in unresectable hepatocellular carcinoma.</a:t>
             </a:r>
             <a:endParaRPr lang="en-US" sz="2400" dirty="0"/>
           </a:p>
@@ -7594,7 +7468,7 @@
                   <a:srgbClr val="888888"/>
                 </a:solidFill>
               </a:rPr>
-              <a:t>Liver international : official journal of the International Association for the Study of the Liver  ·  IF 6.0  ·  Retrospective Study  ·  🌏 Asia</a:t>
+              <a:t>PloS one  ·  Retrospective Study  ·  🌏 Asia</a:t>
             </a:r>
             <a:endParaRPr lang="en-US" sz="1000" dirty="0"/>
           </a:p>
@@ -7637,7 +7511,7 @@
                 <a:ea typeface="Microsoft JhengHei" pitchFamily="34" charset="-122"/>
                 <a:cs typeface="Microsoft JhengHei" pitchFamily="34" charset="-120"/>
               </a:rPr>
-              <a:t>低劑量bevacizumab對肝癌有效</a:t>
+              <a:t>Durvalumab加tremelimumab與lenvatinib比較</a:t>
             </a:r>
             <a:endParaRPr lang="en-US" sz="1800" dirty="0"/>
           </a:p>
@@ -7658,7 +7532,7 @@
                 <a:ea typeface="Microsoft JhengHei" pitchFamily="34" charset="-122"/>
                 <a:cs typeface="Microsoft JhengHei" pitchFamily="34" charset="-120"/>
               </a:rPr>
-              <a:t>不良事件較標準劑量減少</a:t>
+              <a:t>lenvatinib顯示更佳的PFS和OS</a:t>
             </a:r>
             <a:endParaRPr lang="en-US" sz="1800" dirty="0"/>
           </a:p>
@@ -7679,49 +7553,7 @@
                 <a:ea typeface="Microsoft JhengHei" pitchFamily="34" charset="-122"/>
                 <a:cs typeface="Microsoft JhengHei" pitchFamily="34" charset="-120"/>
               </a:rPr>
-              <a:t>無進展生存率相似</a:t>
-            </a:r>
-            <a:endParaRPr lang="en-US" sz="1800" dirty="0"/>
-          </a:p>
-          <a:p>
-            <a:pPr marL="342900" indent="-342900">
-              <a:spcAft>
-                <a:spcPts val="800"/>
-              </a:spcAft>
-              <a:buSzPct val="100000"/>
-              <a:buChar char="•"/>
-            </a:pPr>
-            <a:r>
-              <a:rPr lang="en-US" sz="1800" dirty="0">
-                <a:solidFill>
-                  <a:srgbClr val="333333"/>
-                </a:solidFill>
-                <a:latin typeface="Microsoft JhengHei" pitchFamily="34" charset="0"/>
-                <a:ea typeface="Microsoft JhengHei" pitchFamily="34" charset="-122"/>
-                <a:cs typeface="Microsoft JhengHei" pitchFamily="34" charset="-120"/>
-              </a:rPr>
-              <a:t>低級毒性發生率降低</a:t>
-            </a:r>
-            <a:endParaRPr lang="en-US" sz="1800" dirty="0"/>
-          </a:p>
-          <a:p>
-            <a:pPr marL="342900" indent="-342900">
-              <a:spcAft>
-                <a:spcPts val="800"/>
-              </a:spcAft>
-              <a:buSzPct val="100000"/>
-              <a:buChar char="•"/>
-            </a:pPr>
-            <a:r>
-              <a:rPr lang="en-US" sz="1800" dirty="0">
-                <a:solidFill>
-                  <a:srgbClr val="333333"/>
-                </a:solidFill>
-                <a:latin typeface="Microsoft JhengHei" pitchFamily="34" charset="0"/>
-                <a:ea typeface="Microsoft JhengHei" pitchFamily="34" charset="-122"/>
-                <a:cs typeface="Microsoft JhengHei" pitchFamily="34" charset="-120"/>
-              </a:rPr>
-              <a:t>改善治療耐受性潛力</a:t>
+              <a:t>lenvatinib的3級以上不良事件較多</a:t>
             </a:r>
             <a:endParaRPr lang="en-US" sz="1800" dirty="0"/>
           </a:p>
@@ -7757,7 +7589,7 @@
                   <a:srgbClr val="888888"/>
                 </a:solidFill>
               </a:rPr>
-              <a:t>Lin Po-Ting, Teng Wei, Hsieh Yi-Chung et al.. Liver international : official journal of the International Association for the Study of the Liver. 2026-03-28 DOI: 10.1111/liv.70617</a:t>
+              <a:t>Nishioka Chinatsu, Tahata Yuki, Maesaka Kazuki et al.. PloS one. 2026-05-07 DOI: 10.1371/journal.pone.0341395</a:t>
             </a:r>
             <a:endParaRPr lang="en-US" sz="800" dirty="0"/>
           </a:p>

--- a/docs/digest-zh.pptx
+++ b/docs/digest-zh.pptx
@@ -2269,7 +2269,7 @@
                   <a:srgbClr val="888888"/>
                 </a:solidFill>
               </a:rPr>
-              <a:t>2026-05-04 — 2026-05-11</a:t>
+              <a:t>2026-05-11 — 2026-05-18</a:t>
             </a:r>
             <a:endParaRPr lang="en-US" sz="1400" dirty="0"/>
           </a:p>
@@ -2460,7 +2460,7 @@
                   </a:extLst>
                 </a:hlinkClick>
               </a:rPr>
-              <a:t>Prognostic nutritional index and the survival of patients with hepatocellular carcinoma on immune checkpoint inhibitors: a meta-analysis</a:t>
+              <a:t>Second-Line TKI after First-Line Immunotherapy-based Treatment in Advanced HCC: Reconstructed IPD Meta-analysis.</a:t>
             </a:r>
             <a:endParaRPr lang="en-US" sz="2400" dirty="0"/>
           </a:p>
@@ -2496,7 +2496,7 @@
                   <a:srgbClr val="888888"/>
                 </a:solidFill>
               </a:rPr>
-              <a:t>BMC cancer  ·  Meta-Analysis</a:t>
+              <a:t>JHEP reports : innovation in hepatology  ·  IF 7.8  ·  Meta-Analysis</a:t>
             </a:r>
             <a:endParaRPr lang="en-US" sz="1000" dirty="0"/>
           </a:p>
@@ -2539,7 +2539,7 @@
                 <a:ea typeface="Microsoft JhengHei" pitchFamily="34" charset="-122"/>
                 <a:cs typeface="Microsoft JhengHei" pitchFamily="34" charset="-120"/>
               </a:rPr>
-              <a:t>預後營養指數(PNI)影響生存率。</a:t>
+              <a:t>分析免疫治療後的第二線TKI。</a:t>
             </a:r>
             <a:endParaRPr lang="en-US" sz="1800" dirty="0"/>
           </a:p>
@@ -2560,7 +2560,7 @@
                 <a:ea typeface="Microsoft JhengHei" pitchFamily="34" charset="-122"/>
                 <a:cs typeface="Microsoft JhengHei" pitchFamily="34" charset="-120"/>
               </a:rPr>
-              <a:t>HCC患者免疫檢查點抑制劑的綜合分析。</a:t>
+              <a:t>Lenvatinib和regorafenib顯示更好OS。</a:t>
             </a:r>
             <a:endParaRPr lang="en-US" sz="1800" dirty="0"/>
           </a:p>
@@ -2581,7 +2581,49 @@
                 <a:ea typeface="Microsoft JhengHei" pitchFamily="34" charset="-122"/>
                 <a:cs typeface="Microsoft JhengHei" pitchFamily="34" charset="-120"/>
               </a:rPr>
-              <a:t>營養狀態與免疫反應相關。</a:t>
+              <a:t>所有患者中位OS為9.8個月。</a:t>
+            </a:r>
+            <a:endParaRPr lang="en-US" sz="1800" dirty="0"/>
+          </a:p>
+          <a:p>
+            <a:pPr marL="342900" indent="-342900">
+              <a:spcAft>
+                <a:spcPts val="800"/>
+              </a:spcAft>
+              <a:buSzPct val="100000"/>
+              <a:buChar char="•"/>
+            </a:pPr>
+            <a:r>
+              <a:rPr lang="en-US" sz="1800" dirty="0">
+                <a:solidFill>
+                  <a:srgbClr val="333333"/>
+                </a:solidFill>
+                <a:latin typeface="Microsoft JhengHei" pitchFamily="34" charset="0"/>
+                <a:ea typeface="Microsoft JhengHei" pitchFamily="34" charset="-122"/>
+                <a:cs typeface="Microsoft JhengHei" pitchFamily="34" charset="-120"/>
+              </a:rPr>
+              <a:t>觀察到生存結果異質性。</a:t>
+            </a:r>
+            <a:endParaRPr lang="en-US" sz="1800" dirty="0"/>
+          </a:p>
+          <a:p>
+            <a:pPr marL="342900" indent="-342900">
+              <a:spcAft>
+                <a:spcPts val="800"/>
+              </a:spcAft>
+              <a:buSzPct val="100000"/>
+              <a:buChar char="•"/>
+            </a:pPr>
+            <a:r>
+              <a:rPr lang="en-US" sz="1800" dirty="0">
+                <a:solidFill>
+                  <a:srgbClr val="333333"/>
+                </a:solidFill>
+                <a:latin typeface="Microsoft JhengHei" pitchFamily="34" charset="0"/>
+                <a:ea typeface="Microsoft JhengHei" pitchFamily="34" charset="-122"/>
+                <a:cs typeface="Microsoft JhengHei" pitchFamily="34" charset="-120"/>
+              </a:rPr>
+              <a:t>強調需要前瞻性研究。</a:t>
             </a:r>
             <a:endParaRPr lang="en-US" sz="1800" dirty="0"/>
           </a:p>
@@ -2617,7 +2659,7 @@
                   <a:srgbClr val="888888"/>
                 </a:solidFill>
               </a:rPr>
-              <a:t>J Fu, W Peng, J Jiang. BMC cancer. 2026</a:t>
+              <a:t>Akkus Erman, Hobeika Christian, Edeline Julien et al.. JHEP reports : innovation in hepatology. 2026-05-13 DOI: 10.1016/j.jhepr.2026.101893</a:t>
             </a:r>
             <a:endParaRPr lang="en-US" sz="800" dirty="0"/>
           </a:p>
@@ -2817,7 +2859,7 @@
                   </a:extLst>
                 </a:hlinkClick>
               </a:rPr>
-              <a:t>Radiotherapy versus local ablation therapy for the treatment of hepatocellular carcinoma: A systematic review and meta-analysis.</a:t>
+              <a:t>Electronic symptom monitoring of patient-reported outcomes among patients with hepatocellular carcinoma during immunotherapy (PRIME-HCC): protocol for a randomised controlled trial.</a:t>
             </a:r>
             <a:endParaRPr lang="en-US" sz="2400" dirty="0"/>
           </a:p>
@@ -2853,7 +2895,7 @@
                   <a:srgbClr val="888888"/>
                 </a:solidFill>
               </a:rPr>
-              <a:t>Journal of Clinical …  ·  Meta-Analysis</a:t>
+              <a:t>BMJ open  ·  RCT</a:t>
             </a:r>
             <a:endParaRPr lang="en-US" sz="1000" dirty="0"/>
           </a:p>
@@ -2896,7 +2938,7 @@
                 <a:ea typeface="Microsoft JhengHei" pitchFamily="34" charset="-122"/>
                 <a:cs typeface="Microsoft JhengHei" pitchFamily="34" charset="-120"/>
               </a:rPr>
-              <a:t>放射治療與局部消融比較</a:t>
+              <a:t>ePROs提升癌症患者的HRQoL。</a:t>
             </a:r>
             <a:endParaRPr lang="en-US" sz="1800" dirty="0"/>
           </a:p>
@@ -2917,7 +2959,7 @@
                 <a:ea typeface="Microsoft JhengHei" pitchFamily="34" charset="-122"/>
                 <a:cs typeface="Microsoft JhengHei" pitchFamily="34" charset="-120"/>
               </a:rPr>
-              <a:t>針對肝細胞癌治療</a:t>
+              <a:t>研究評估HCC免疫治療中的ePROs。</a:t>
             </a:r>
             <a:endParaRPr lang="en-US" sz="1800" dirty="0"/>
           </a:p>
@@ -2938,7 +2980,7 @@
                 <a:ea typeface="Microsoft JhengHei" pitchFamily="34" charset="-122"/>
                 <a:cs typeface="Microsoft JhengHei" pitchFamily="34" charset="-120"/>
               </a:rPr>
-              <a:t>評估局部無進展生存期</a:t>
+              <a:t>隨機試驗招募238名HCC患者。</a:t>
             </a:r>
             <a:endParaRPr lang="en-US" sz="1800" dirty="0"/>
           </a:p>
@@ -2959,7 +3001,7 @@
                 <a:ea typeface="Microsoft JhengHei" pitchFamily="34" charset="-122"/>
                 <a:cs typeface="Microsoft JhengHei" pitchFamily="34" charset="-120"/>
               </a:rPr>
-              <a:t>包含射頻與微波消融</a:t>
+              <a:t>介入組使用WeChat監測症狀。</a:t>
             </a:r>
             <a:endParaRPr lang="en-US" sz="1800" dirty="0"/>
           </a:p>
@@ -2980,7 +3022,7 @@
                 <a:ea typeface="Microsoft JhengHei" pitchFamily="34" charset="-122"/>
                 <a:cs typeface="Microsoft JhengHei" pitchFamily="34" charset="-120"/>
               </a:rPr>
-              <a:t>進行系統性回顧與統合分析</a:t>
+              <a:t>結果包括HRQoL、生存率和可行性。</a:t>
             </a:r>
             <a:endParaRPr lang="en-US" sz="1800" dirty="0"/>
           </a:p>
@@ -3016,7 +3058,7 @@
                   <a:srgbClr val="888888"/>
                 </a:solidFill>
               </a:rPr>
-              <a:t>SH Bae, SH Choi, SM Yoon. Journal of Clinical …. 2026</a:t>
+              <a:t>Xia Yiqi, Wei Xiaoping, Wang Yanshang et al.. BMJ open. 2026-05-11 DOI: 10.1136/bmjopen-2026-116199</a:t>
             </a:r>
             <a:endParaRPr lang="en-US" sz="800" dirty="0"/>
           </a:p>
@@ -3216,7 +3258,7 @@
                   </a:extLst>
                 </a:hlinkClick>
               </a:rPr>
-              <a:t>MCT8 Modulates Metabolite Uptake and T-cell Exhaustion to Promote Immunosuppression and Tumor Progression in Hepatocellular Carcinoma.</a:t>
+              <a:t>Plasma interleukin-8 as a predictive biomarker for tyrosine kinase inhibitor response in advanced hepatocellular carcinoma.</a:t>
             </a:r>
             <a:endParaRPr lang="en-US" sz="2400" dirty="0"/>
           </a:p>
@@ -3252,7 +3294,7 @@
                   <a:srgbClr val="888888"/>
                 </a:solidFill>
               </a:rPr>
-              <a:t>Molecular cancer therapeutics  ·  IF 5.6  ·  Basic Research</a:t>
+              <a:t>Discover oncology  ·  🌏 Asia</a:t>
             </a:r>
             <a:endParaRPr lang="en-US" sz="1000" dirty="0"/>
           </a:p>
@@ -3295,7 +3337,7 @@
                 <a:ea typeface="Microsoft JhengHei" pitchFamily="34" charset="-122"/>
                 <a:cs typeface="Microsoft JhengHei" pitchFamily="34" charset="-120"/>
               </a:rPr>
-              <a:t>MCT8 調控 HCC 中 T 細胞功能。</a:t>
+              <a:t>HCC是主要癌症死亡原因。</a:t>
             </a:r>
             <a:endParaRPr lang="en-US" sz="1800" dirty="0"/>
           </a:p>
@@ -3316,7 +3358,7 @@
                 <a:ea typeface="Microsoft JhengHei" pitchFamily="34" charset="-122"/>
                 <a:cs typeface="Microsoft JhengHei" pitchFamily="34" charset="-120"/>
               </a:rPr>
-              <a:t>SLC16A2 基因敲除減少腫瘤生長。</a:t>
+              <a:t>TKI是首選治療方案。</a:t>
             </a:r>
             <a:endParaRPr lang="en-US" sz="1800" dirty="0"/>
           </a:p>
@@ -3337,7 +3379,49 @@
                 <a:ea typeface="Microsoft JhengHei" pitchFamily="34" charset="-122"/>
                 <a:cs typeface="Microsoft JhengHei" pitchFamily="34" charset="-120"/>
               </a:rPr>
-              <a:t>MCT8 單克隆抗體增強 CD8+ T 細胞活性。</a:t>
+              <a:t>IL-8水平預測TKI反應。</a:t>
+            </a:r>
+            <a:endParaRPr lang="en-US" sz="1800" dirty="0"/>
+          </a:p>
+          <a:p>
+            <a:pPr marL="342900" indent="-342900">
+              <a:spcAft>
+                <a:spcPts val="800"/>
+              </a:spcAft>
+              <a:buSzPct val="100000"/>
+              <a:buChar char="•"/>
+            </a:pPr>
+            <a:r>
+              <a:rPr lang="en-US" sz="1800" dirty="0">
+                <a:solidFill>
+                  <a:srgbClr val="333333"/>
+                </a:solidFill>
+                <a:latin typeface="Microsoft JhengHei" pitchFamily="34" charset="0"/>
+                <a:ea typeface="Microsoft JhengHei" pitchFamily="34" charset="-122"/>
+                <a:cs typeface="Microsoft JhengHei" pitchFamily="34" charset="-120"/>
+              </a:rPr>
+              <a:t>IL-8升高與生存率低相關。</a:t>
+            </a:r>
+            <a:endParaRPr lang="en-US" sz="1800" dirty="0"/>
+          </a:p>
+          <a:p>
+            <a:pPr marL="342900" indent="-342900">
+              <a:spcAft>
+                <a:spcPts val="800"/>
+              </a:spcAft>
+              <a:buSzPct val="100000"/>
+              <a:buChar char="•"/>
+            </a:pPr>
+            <a:r>
+              <a:rPr lang="en-US" sz="1800" dirty="0">
+                <a:solidFill>
+                  <a:srgbClr val="333333"/>
+                </a:solidFill>
+                <a:latin typeface="Microsoft JhengHei" pitchFamily="34" charset="0"/>
+                <a:ea typeface="Microsoft JhengHei" pitchFamily="34" charset="-122"/>
+                <a:cs typeface="Microsoft JhengHei" pitchFamily="34" charset="-120"/>
+              </a:rPr>
+              <a:t>研究分析60例晚期HCC患者。</a:t>
             </a:r>
             <a:endParaRPr lang="en-US" sz="1800" dirty="0"/>
           </a:p>
@@ -3373,7 +3457,7 @@
                   <a:srgbClr val="888888"/>
                 </a:solidFill>
               </a:rPr>
-              <a:t>Bi Bin, Tang Liqin, Liang Ranxi et al.. Molecular cancer therapeutics. 2026-05-04 DOI: 10.1158/1535-7163.MCT-25-0564</a:t>
+              <a:t>Kim Sujin, Ahn Hye Ri, Kim Hui Gyeong et al.. Discover oncology. 2026-05-11 DOI: 10.1007/s12672-026-05055-4</a:t>
             </a:r>
             <a:endParaRPr lang="en-US" sz="800" dirty="0"/>
           </a:p>
@@ -3590,7 +3674,7 @@
                   <a:srgbClr val="FFFFFF"/>
                 </a:solidFill>
               </a:rPr>
-              <a:t>1. **個體化治療的重要性 (Importance of Personalized Therapy)**  </a:t>
+              <a:t>1. **持久的抗腫瘤活性**  </a:t>
             </a:r>
             <a:endParaRPr lang="en-US" sz="1200" dirty="0"/>
           </a:p>
@@ -3607,7 +3691,7 @@
                   <a:srgbClr val="FFFFFF"/>
                 </a:solidFill>
               </a:rPr>
-              <a:t>   The studies emphasize the need for personalized treatment approaches in HCC, highlighting that standard dosing may not be effective for all patients due to variations in body composition and tumor microenvironment.  </a:t>
+              <a:t>   Pembrolizumab在治療經索拉非尼治療的晚期肝細胞癌患者中展現了持久的抗腫瘤活性，顯示其在長期療效方面的潛力。  </a:t>
             </a:r>
             <a:endParaRPr lang="en-US" sz="1200" dirty="0"/>
           </a:p>
@@ -3624,7 +3708,7 @@
                   <a:srgbClr val="FFFFFF"/>
                 </a:solidFill>
               </a:rPr>
-              <a:t>   研究強調在肝癌治療中個體化治療的重要性，指出標準劑量可能因患者體組成和腫瘤微環境的差異而無法有效。</a:t>
+              <a:t>   *Pembrolizumab demonstrated durable antitumor activity in advanced hepatocellular carcinoma (HCC) patients previously treated with sorafenib, highlighting its potential for long-term efficacy.*</a:t>
             </a:r>
             <a:endParaRPr lang="en-US" sz="1200" dirty="0"/>
           </a:p>
@@ -3650,7 +3734,7 @@
                   <a:srgbClr val="FFFFFF"/>
                 </a:solidFill>
               </a:rPr>
-              <a:t>2. **免疫微環境的重塑 (Reprogramming the Immune Microenvironment)**  </a:t>
+              <a:t>2. **免疫相關不良事件的預測能力**  </a:t>
             </a:r>
             <a:endParaRPr lang="en-US" sz="1200" dirty="0"/>
           </a:p>
@@ -3667,7 +3751,7 @@
                   <a:srgbClr val="FFFFFF"/>
                 </a:solidFill>
               </a:rPr>
-              <a:t>   Innovative strategies such as ISX-TWIST1 reprogramming show potential in reshaping the immune microenvironment, which is crucial for enhancing the efficacy of immunotherapies in HCC.  </a:t>
+              <a:t>   免疫檢查點抑制劑引發的免疫相關不良事件（irAEs）可能是肝移植後排斥反應的強烈預測因子，提示需謹慎監測這些事件。  </a:t>
             </a:r>
             <a:endParaRPr lang="en-US" sz="1200" dirty="0"/>
           </a:p>
@@ -3684,7 +3768,7 @@
                   <a:srgbClr val="FFFFFF"/>
                 </a:solidFill>
               </a:rPr>
-              <a:t>   創新策略如ISX-TWIST1重塑顯示出在改變免疫微環境方面的潛力，這對於提高肝癌免疫治療的療效至關重要。</a:t>
+              <a:t>   *Immune-related adverse events (irAEs) from immune checkpoint inhibitors may serve as potent predictors of post-transplant rejection in HCC, suggesting the need for careful monitoring of these events.*</a:t>
             </a:r>
             <a:endParaRPr lang="en-US" sz="1200" dirty="0"/>
           </a:p>
@@ -3710,7 +3794,7 @@
                   <a:srgbClr val="FFFFFF"/>
                 </a:solidFill>
               </a:rPr>
-              <a:t>3. **轉化療法的潛力 (Potential of Conversion Therapy)**  </a:t>
+              <a:t>3. **腫瘤微環境的挑戰**  </a:t>
             </a:r>
             <a:endParaRPr lang="en-US" sz="1200" dirty="0"/>
           </a:p>
@@ -3727,7 +3811,7 @@
                   <a:srgbClr val="FFFFFF"/>
                 </a:solidFill>
               </a:rPr>
-              <a:t>   The combination of PD-1 inhibitors with other therapies, such as lenvatinib and transarterial chemoembolization, suggests promising outcomes for patients with unresectable HCC, paving the way for sequential surgical options.  </a:t>
+              <a:t>   肝細胞癌的異質性和免疫抑制的腫瘤微環境對免疫治療反應產生負面影響，強調了針對腫瘤相關巨噬細胞的代謝調控的重要性。  </a:t>
             </a:r>
             <a:endParaRPr lang="en-US" sz="1200" dirty="0"/>
           </a:p>
@@ -3744,7 +3828,7 @@
                   <a:srgbClr val="FFFFFF"/>
                 </a:solidFill>
               </a:rPr>
-              <a:t>   PD-1抑制劑與其他療法（如lenvatinib和經動脈化療栓塞）的結合顯示出對於不可切除肝癌患者的良好預後，為後續的手術選擇鋪平了道路。</a:t>
+              <a:t>   *The heterogeneous and immunosuppressive tumor microenvironment in HCC negatively impacts immunotherapy responses, emphasizing the importance of metabolic regulation targeting tumor-associated macrophages.*</a:t>
             </a:r>
             <a:endParaRPr lang="en-US" sz="1200" dirty="0"/>
           </a:p>
@@ -3770,7 +3854,7 @@
                   <a:srgbClr val="FFFFFF"/>
                 </a:solidFill>
               </a:rPr>
-              <a:t>4. **預測性平台的需求 (Need for Predictive Platforms)**  </a:t>
+              <a:t>4. **局部消融的潛在角色**  </a:t>
             </a:r>
             <a:endParaRPr lang="en-US" sz="1200" dirty="0"/>
           </a:p>
@@ -3787,7 +3871,7 @@
                   <a:srgbClr val="FFFFFF"/>
                 </a:solidFill>
               </a:rPr>
-              <a:t>   The development of patient-derived organotypic tumor spheroids as functional platforms is crucial for predicting individual responses to immunotherapy, which can guide precision treatment strategies.  </a:t>
+              <a:t>   在初始疾病控制後，局部消融療法在無法切除的肝細胞癌患者中可能是一個有效的救援策略，值得進一步研究。  </a:t>
             </a:r>
             <a:endParaRPr lang="en-US" sz="1200" dirty="0"/>
           </a:p>
@@ -3804,7 +3888,7 @@
                   <a:srgbClr val="FFFFFF"/>
                 </a:solidFill>
               </a:rPr>
-              <a:t>   開發患者衍生的有機腫瘤球體作為功能平台對於預測個體對免疫治療的反應至關重要，這可以指導精準治療策略。</a:t>
+              <a:t>   *Ablation therapy may serve as an effective salvage strategy in patients with unresectable HCC after initial disease control, warranting further investigation.*</a:t>
             </a:r>
             <a:endParaRPr lang="en-US" sz="1200" dirty="0"/>
           </a:p>
@@ -3830,7 +3914,7 @@
                   <a:srgbClr val="FFFFFF"/>
                 </a:solidFill>
               </a:rPr>
-              <a:t>5. **營養指數與生存率的關聯 (Association of Nutritional Index with Survival)**  </a:t>
+              <a:t>5. **新療法的組合策略**  </a:t>
             </a:r>
             <a:endParaRPr lang="en-US" sz="1200" dirty="0"/>
           </a:p>
@@ -3847,7 +3931,24 @@
                   <a:srgbClr val="FFFFFF"/>
                 </a:solidFill>
               </a:rPr>
-              <a:t>   The prognostic nutritional index emerges as a significant factor influencing survival in HCC patients undergoing immune checkpoint inhibitor therapy, indicating the importance of nutritional status in treatment outcomes.</a:t>
+              <a:t>   結合肝動脈灌注化療、lenvatinib和PD-L1抑制劑的策略顯示出在無法切除的肝細胞癌中的潛在療效，提示需探索多種治療組合的可能性。  </a:t>
+            </a:r>
+            <a:endParaRPr lang="en-US" sz="1200" dirty="0"/>
+          </a:p>
+          <a:p>
+            <a:pPr indent="0" marL="0">
+              <a:lnSpc>
+                <a:spcPct val="150000"/>
+              </a:lnSpc>
+              <a:buNone/>
+            </a:pPr>
+            <a:r>
+              <a:rPr lang="en-US" sz="1200" dirty="0">
+                <a:solidFill>
+                  <a:srgbClr val="FFFFFF"/>
+                </a:solidFill>
+              </a:rPr>
+              <a:t>   *Combination strategies of hepatic arterial infusion chemotherapy with lenvatinib and PD-L1 inhibitors show potential efficacy in unresectable HCC, indicating the need to explore various treatment combinations.*</a:t>
             </a:r>
             <a:endParaRPr lang="en-US" sz="1200" dirty="0"/>
           </a:p>
@@ -3993,7 +4094,7 @@
                   <a:srgbClr val="FFFFFF"/>
                 </a:solidFill>
               </a:rPr>
-              <a:t>預後營養指數成為影響接受免疫檢查點抑制劑治療的肝癌患者生存率的重要因素，顯示出營養狀態對治療結果的重要性。</a:t>
+              <a:t>### 未來研究方向 (Future Research Directions)</a:t>
             </a:r>
             <a:endParaRPr lang="en-US" sz="1200" dirty="0"/>
           </a:p>
@@ -4019,7 +4120,7 @@
                   <a:srgbClr val="FFFFFF"/>
                 </a:solidFill>
               </a:rPr>
-              <a:t>### 未來研究方向 (Future Research Directions)</a:t>
+              <a:t>1. **長期療效的評估**  </a:t>
             </a:r>
             <a:endParaRPr lang="en-US" sz="1200" dirty="0"/>
           </a:p>
@@ -4030,6 +4131,14 @@
               </a:lnSpc>
               <a:buNone/>
             </a:pPr>
+            <a:r>
+              <a:rPr lang="en-US" sz="1200" dirty="0">
+                <a:solidFill>
+                  <a:srgbClr val="FFFFFF"/>
+                </a:solidFill>
+              </a:rPr>
+              <a:t>   需要進一步的長期隨訪研究，以評估免疫治療在不同階段肝細胞癌患者中的持久療效和安全性。  </a:t>
+            </a:r>
             <a:endParaRPr lang="en-US" sz="1200" dirty="0"/>
           </a:p>
           <a:p>
@@ -4045,7 +4154,7 @@
                   <a:srgbClr val="FFFFFF"/>
                 </a:solidFill>
               </a:rPr>
-              <a:t>1. **探索個體化劑量調整 (Exploration of Personalized Dosage Adjustments)**  </a:t>
+              <a:t>   *Further long-term follow-up studies are needed to assess the durability and safety of immunotherapy in patients with hepatocellular carcinoma at various stages.*</a:t>
             </a:r>
             <a:endParaRPr lang="en-US" sz="1200" dirty="0"/>
           </a:p>
@@ -4056,14 +4165,6 @@
               </a:lnSpc>
               <a:buNone/>
             </a:pPr>
-            <a:r>
-              <a:rPr lang="en-US" sz="1200" dirty="0">
-                <a:solidFill>
-                  <a:srgbClr val="FFFFFF"/>
-                </a:solidFill>
-              </a:rPr>
-              <a:t>   Future studies should focus on optimizing bevacizumab dosing based on body surface area and composition to improve therapeutic outcomes in HCC patients.  </a:t>
-            </a:r>
             <a:endParaRPr lang="en-US" sz="1200" dirty="0"/>
           </a:p>
           <a:p>
@@ -4079,7 +4180,7 @@
                   <a:srgbClr val="FFFFFF"/>
                 </a:solidFill>
               </a:rPr>
-              <a:t>   未來研究應專注於根據體表面積和組成優化bevacizumab劑量，以改善肝癌患者的治療效果。</a:t>
+              <a:t>2. **免疫相關不良事件的機制研究**  </a:t>
             </a:r>
             <a:endParaRPr lang="en-US" sz="1200" dirty="0"/>
           </a:p>
@@ -4090,6 +4191,14 @@
               </a:lnSpc>
               <a:buNone/>
             </a:pPr>
+            <a:r>
+              <a:rPr lang="en-US" sz="1200" dirty="0">
+                <a:solidFill>
+                  <a:srgbClr val="FFFFFF"/>
+                </a:solidFill>
+              </a:rPr>
+              <a:t>   探索免疫相關不良事件的生物學機制，以改善治療策略並降低排斥反應的風險。  </a:t>
+            </a:r>
             <a:endParaRPr lang="en-US" sz="1200" dirty="0"/>
           </a:p>
           <a:p>
@@ -4105,7 +4214,7 @@
                   <a:srgbClr val="FFFFFF"/>
                 </a:solidFill>
               </a:rPr>
-              <a:t>2. **深化免疫微環境研究 (Deepening Research on Immune Microenvironment)**  </a:t>
+              <a:t>   *Investigating the biological mechanisms of immune-related adverse events could improve treatment strategies and reduce the risk of rejection.*</a:t>
             </a:r>
             <a:endParaRPr lang="en-US" sz="1200" dirty="0"/>
           </a:p>
@@ -4116,14 +4225,6 @@
               </a:lnSpc>
               <a:buNone/>
             </a:pPr>
-            <a:r>
-              <a:rPr lang="en-US" sz="1200" dirty="0">
-                <a:solidFill>
-                  <a:srgbClr val="FFFFFF"/>
-                </a:solidFill>
-              </a:rPr>
-              <a:t>   Investigating the mechanisms by which therapies like ISX-TWIST1 modify the immune microenvironment could provide insights into enhancing immunotherapy efficacy.  </a:t>
-            </a:r>
             <a:endParaRPr lang="en-US" sz="1200" dirty="0"/>
           </a:p>
           <a:p>
@@ -4139,7 +4240,7 @@
                   <a:srgbClr val="FFFFFF"/>
                 </a:solidFill>
               </a:rPr>
-              <a:t>   研究如ISX-TWIST1等療法改變免疫微環境的機制，可能為提高免疫治療的療效提供見解。</a:t>
+              <a:t>3. **腫瘤微環境的調控**  </a:t>
             </a:r>
             <a:endParaRPr lang="en-US" sz="1200" dirty="0"/>
           </a:p>
@@ -4150,6 +4251,14 @@
               </a:lnSpc>
               <a:buNone/>
             </a:pPr>
+            <a:r>
+              <a:rPr lang="en-US" sz="1200" dirty="0">
+                <a:solidFill>
+                  <a:srgbClr val="FFFFFF"/>
+                </a:solidFill>
+              </a:rPr>
+              <a:t>   研究針對腫瘤微環境的干預措施，以克服免疫抑制並提高免疫治療的療效。  </a:t>
+            </a:r>
             <a:endParaRPr lang="en-US" sz="1200" dirty="0"/>
           </a:p>
           <a:p>
@@ -4165,7 +4274,7 @@
                   <a:srgbClr val="FFFFFF"/>
                 </a:solidFill>
               </a:rPr>
-              <a:t>3. **開發新型預測工具 (Development of Novel Predictive Tools)**  </a:t>
+              <a:t>   *Researching interventions targeting the tumor microenvironment could overcome immunosuppression and enhance the efficacy of immunotherapy.*</a:t>
             </a:r>
             <a:endParaRPr lang="en-US" sz="1200" dirty="0"/>
           </a:p>
@@ -4176,14 +4285,6 @@
               </a:lnSpc>
               <a:buNone/>
             </a:pPr>
-            <a:r>
-              <a:rPr lang="en-US" sz="1200" dirty="0">
-                <a:solidFill>
-                  <a:srgbClr val="FFFFFF"/>
-                </a:solidFill>
-              </a:rPr>
-              <a:t>   Creating advanced predictive models and platforms that incorporate genetic, metabolic, and immunological factors will be essential for tailoring HCC treatments.  </a:t>
-            </a:r>
             <a:endParaRPr lang="en-US" sz="1200" dirty="0"/>
           </a:p>
           <a:p>
@@ -4199,7 +4300,7 @@
                   <a:srgbClr val="FFFFFF"/>
                 </a:solidFill>
               </a:rPr>
-              <a:t>   創建包含遺傳、代謝和免疫因素的先進預測模型和平台將對於量身定制肝癌治療至關重要。</a:t>
+              <a:t>4. **局部消融與系統治療的整合**  </a:t>
             </a:r>
             <a:endParaRPr lang="en-US" sz="1200" dirty="0"/>
           </a:p>
@@ -4210,6 +4311,14 @@
               </a:lnSpc>
               <a:buNone/>
             </a:pPr>
+            <a:r>
+              <a:rPr lang="en-US" sz="1200" dirty="0">
+                <a:solidFill>
+                  <a:srgbClr val="FFFFFF"/>
+                </a:solidFill>
+              </a:rPr>
+              <a:t>   評估局部消融療法與系統性治療的整合策略，以改善無法切除肝細胞癌患者的預後。  </a:t>
+            </a:r>
             <a:endParaRPr lang="en-US" sz="1200" dirty="0"/>
           </a:p>
           <a:p>
@@ -4225,7 +4334,7 @@
                   <a:srgbClr val="FFFFFF"/>
                 </a:solidFill>
               </a:rPr>
-              <a:t>4. **評估營養介入的影響 (Assessing the Impact of Nutritional Interventions)**  </a:t>
+              <a:t>   *Evaluating integrated strategies of ablation therapy with systemic treatments could improve outcomes for patients with unresectable HCC.*</a:t>
             </a:r>
             <a:endParaRPr lang="en-US" sz="1200" dirty="0"/>
           </a:p>
@@ -4236,14 +4345,6 @@
               </a:lnSpc>
               <a:buNone/>
             </a:pPr>
-            <a:r>
-              <a:rPr lang="en-US" sz="1200" dirty="0">
-                <a:solidFill>
-                  <a:srgbClr val="FFFFFF"/>
-                </a:solidFill>
-              </a:rPr>
-              <a:t>   Future research should evaluate the role of nutritional interventions in conjunction with immunotherapy to enhance patient outcomes in HCC.  </a:t>
-            </a:r>
             <a:endParaRPr lang="en-US" sz="1200" dirty="0"/>
           </a:p>
           <a:p>
@@ -4259,7 +4360,7 @@
                   <a:srgbClr val="FFFFFF"/>
                 </a:solidFill>
               </a:rPr>
-              <a:t>   未來研究應評估營養介入與免疫治療結合的作用，以提高肝癌患者的療效。</a:t>
+              <a:t>5. **新型生物標記的發現**  </a:t>
             </a:r>
             <a:endParaRPr lang="en-US" sz="1200" dirty="0"/>
           </a:p>
@@ -4270,6 +4371,14 @@
               </a:lnSpc>
               <a:buNone/>
             </a:pPr>
+            <a:r>
+              <a:rPr lang="en-US" sz="1200" dirty="0">
+                <a:solidFill>
+                  <a:srgbClr val="FFFFFF"/>
+                </a:solidFill>
+              </a:rPr>
+              <a:t>   開發新的生物標記以預測免疫治療和靶向治療的反應，從而個性化治療方案。  </a:t>
+            </a:r>
             <a:endParaRPr lang="en-US" sz="1200" dirty="0"/>
           </a:p>
           <a:p>
@@ -4285,41 +4394,7 @@
                   <a:srgbClr val="FFFFFF"/>
                 </a:solidFill>
               </a:rPr>
-              <a:t>5. **長期隨訪研究的必要性 (Need for Long-Term Follow-Up Studies)**  </a:t>
-            </a:r>
-            <a:endParaRPr lang="en-US" sz="1200" dirty="0"/>
-          </a:p>
-          <a:p>
-            <a:pPr indent="0" marL="0">
-              <a:lnSpc>
-                <a:spcPct val="150000"/>
-              </a:lnSpc>
-              <a:buNone/>
-            </a:pPr>
-            <a:r>
-              <a:rPr lang="en-US" sz="1200" dirty="0">
-                <a:solidFill>
-                  <a:srgbClr val="FFFFFF"/>
-                </a:solidFill>
-              </a:rPr>
-              <a:t>   Conducting long-term follow-up studies on patients receiving conversion therapies will help determine the durability of treatment responses and survival benefits.  </a:t>
-            </a:r>
-            <a:endParaRPr lang="en-US" sz="1200" dirty="0"/>
-          </a:p>
-          <a:p>
-            <a:pPr indent="0" marL="0">
-              <a:lnSpc>
-                <a:spcPct val="150000"/>
-              </a:lnSpc>
-              <a:buNone/>
-            </a:pPr>
-            <a:r>
-              <a:rPr lang="en-US" sz="1200" dirty="0">
-                <a:solidFill>
-                  <a:srgbClr val="FFFFFF"/>
-                </a:solidFill>
-              </a:rPr>
-              <a:t>   對接受轉化療法的患者進行長期隨訪研究將有助於確定治療反應的持久性和生存益處。</a:t>
+              <a:t>   *Developing new biomarkers to predict responses to immunotherapy and targeted therapies could facilitate personalized treatment approaches.*</a:t>
             </a:r>
             <a:endParaRPr lang="en-US" sz="1200" dirty="0"/>
           </a:p>
@@ -4592,7 +4667,7 @@
                 <a:ea typeface="Arial" pitchFamily="34" charset="-122"/>
                 <a:cs typeface="Arial" pitchFamily="34" charset="-120"/>
               </a:rPr>
-              <a:t>Optimizing bevacizumab exposure in atezolizumab-based therapy for unresectable h…</a:t>
+              <a:t>Pembrolizumab Monotherapy in Sorafenib-Treated and Treatment-Na&amp;#xef;ve Advanced…</a:t>
             </a:r>
             <a:endParaRPr lang="en-US" sz="1400" dirty="0"/>
           </a:p>
@@ -4629,7 +4704,7 @@
                 <a:ea typeface="Arial" pitchFamily="34" charset="-122"/>
                 <a:cs typeface="Arial" pitchFamily="34" charset="-120"/>
               </a:rPr>
-              <a:t>Patient-derived organotypic tumor spheroids as a functional platform for predict…</a:t>
+              <a:t>Immune-related adverse events are a potent predictor of post-transplant rejectio…</a:t>
             </a:r>
             <a:endParaRPr lang="en-US" sz="1400" dirty="0"/>
           </a:p>
@@ -4666,7 +4741,7 @@
                 <a:ea typeface="Arial" pitchFamily="34" charset="-122"/>
                 <a:cs typeface="Arial" pitchFamily="34" charset="-120"/>
               </a:rPr>
-              <a:t>Sintilimab (PD-1 inhibitor) plus lenvatinib as conversion therapy followed by se…</a:t>
+              <a:t>BCAT1 inhibits crotonate-related epigenetic modulation of metabolic genes in tum…</a:t>
             </a:r>
             <a:endParaRPr lang="en-US" sz="1400" dirty="0"/>
           </a:p>
@@ -4703,7 +4778,7 @@
                 <a:ea typeface="Arial" pitchFamily="34" charset="-122"/>
                 <a:cs typeface="Arial" pitchFamily="34" charset="-120"/>
               </a:rPr>
-              <a:t>ISX-TWIST1 reprograms CD47-inflammasome signaling to reshape the immune microenv…</a:t>
+              <a:t>Ablation-Based Salvage Strategy at Disease Progression After Initial Disease Con…</a:t>
             </a:r>
             <a:endParaRPr lang="en-US" sz="1400" dirty="0"/>
           </a:p>
@@ -4740,7 +4815,7 @@
                 <a:ea typeface="Arial" pitchFamily="34" charset="-122"/>
                 <a:cs typeface="Arial" pitchFamily="34" charset="-120"/>
               </a:rPr>
-              <a:t>… plus transarterial chemoembolization and PD-1 inhibitors as conversion therapi…</a:t>
+              <a:t>HILL: the efficacy and safety of hepatic arterial infusion chemotherapy with the…</a:t>
             </a:r>
             <a:endParaRPr lang="en-US" sz="1400" dirty="0"/>
           </a:p>
@@ -4777,7 +4852,7 @@
                 <a:ea typeface="Arial" pitchFamily="34" charset="-122"/>
                 <a:cs typeface="Arial" pitchFamily="34" charset="-120"/>
               </a:rPr>
-              <a:t>A Case of Pernicious Anemia Induced by Atezolizumab in Hepatocellular Carcinoma …</a:t>
+              <a:t>Immunotherapy in Hepatocellular Carcinoma with Portal Vein Tumour Thrombosis: Fr…</a:t>
             </a:r>
             <a:endParaRPr lang="en-US" sz="1400" dirty="0"/>
           </a:p>
@@ -4814,7 +4889,7 @@
                 <a:ea typeface="Arial" pitchFamily="34" charset="-122"/>
                 <a:cs typeface="Arial" pitchFamily="34" charset="-120"/>
               </a:rPr>
-              <a:t>Comparison of outcomes of second-line durvalumab plus tremelimumab versus lenvat…</a:t>
+              <a:t>… plus transarterial chemoembolization and PD-1 inhibitors as conversion therapi…</a:t>
             </a:r>
             <a:endParaRPr lang="en-US" sz="1400" dirty="0"/>
           </a:p>
@@ -4851,7 +4926,7 @@
                 <a:ea typeface="Arial" pitchFamily="34" charset="-122"/>
                 <a:cs typeface="Arial" pitchFamily="34" charset="-120"/>
               </a:rPr>
-              <a:t>Prognostic nutritional index and the survival of patients with hepatocellular ca…</a:t>
+              <a:t>Second-Line TKI after First-Line Immunotherapy-based Treatment in Advanced HCC: …</a:t>
             </a:r>
             <a:endParaRPr lang="en-US" sz="1400" dirty="0"/>
           </a:p>
@@ -4888,7 +4963,7 @@
                 <a:ea typeface="Arial" pitchFamily="34" charset="-122"/>
                 <a:cs typeface="Arial" pitchFamily="34" charset="-120"/>
               </a:rPr>
-              <a:t>Radiotherapy versus local ablation therapy for the treatment of hepatocellular c…</a:t>
+              <a:t>Electronic symptom monitoring of patient-reported outcomes among patients with h…</a:t>
             </a:r>
             <a:endParaRPr lang="en-US" sz="1400" dirty="0"/>
           </a:p>
@@ -4925,7 +5000,7 @@
                 <a:ea typeface="Arial" pitchFamily="34" charset="-122"/>
                 <a:cs typeface="Arial" pitchFamily="34" charset="-120"/>
               </a:rPr>
-              <a:t>MCT8 Modulates Metabolite Uptake and T-cell Exhaustion to Promote Immunosuppress…</a:t>
+              <a:t>Plasma interleukin-8 as a predictive biomarker for tyrosine kinase inhibitor res…</a:t>
             </a:r>
             <a:endParaRPr lang="en-US" sz="1400" dirty="0"/>
           </a:p>
@@ -5080,7 +5155,7 @@
                   </a:extLst>
                 </a:hlinkClick>
               </a:rPr>
-              <a:t>Optimizing bevacizumab exposure in atezolizumab-based therapy for unresectable hepatocellular carcinoma: A nationwide real-world study.</a:t>
+              <a:t>Pembrolizumab Monotherapy in Sorafenib-Treated and Treatment-Na&amp;#xef;ve Advanced Hepatocellular Carcinoma: Long-Term Follow-up of the Open-Label, Phase II KEYNOTE-224 Study.</a:t>
             </a:r>
             <a:endParaRPr lang="en-US" sz="2400" dirty="0"/>
           </a:p>
@@ -5116,7 +5191,7 @@
                   <a:srgbClr val="888888"/>
                 </a:solidFill>
               </a:rPr>
-              <a:t>Hepatology (Baltimore, Md.)  ·  IF 12.9  ·  Retrospective Study  ·  🌏 Asia</a:t>
+              <a:t>Clinical cancer research : an official journal of the American Association for Cancer Research  ·  IF 11.5  ·  RCT Phase 2  ·  🌏 Asia</a:t>
             </a:r>
             <a:endParaRPr lang="en-US" sz="1000" dirty="0"/>
           </a:p>
@@ -5159,7 +5234,7 @@
                 <a:ea typeface="Microsoft JhengHei" pitchFamily="34" charset="-122"/>
                 <a:cs typeface="Microsoft JhengHei" pitchFamily="34" charset="-120"/>
               </a:rPr>
-              <a:t>研究HCC患者的bevacizumab劑量</a:t>
+              <a:t>Pembrolizumab顯示持久抗腫瘤活性。</a:t>
             </a:r>
             <a:endParaRPr lang="en-US" sz="1800" dirty="0"/>
           </a:p>
@@ -5180,7 +5255,7 @@
                 <a:ea typeface="Microsoft JhengHei" pitchFamily="34" charset="-122"/>
                 <a:cs typeface="Microsoft JhengHei" pitchFamily="34" charset="-120"/>
               </a:rPr>
-              <a:t>最佳BBI範圍為106-121%</a:t>
+              <a:t>第一組中位OS：13.2個月。</a:t>
             </a:r>
             <a:endParaRPr lang="en-US" sz="1800" dirty="0"/>
           </a:p>
@@ -5201,7 +5276,7 @@
                 <a:ea typeface="Microsoft JhengHei" pitchFamily="34" charset="-122"/>
                 <a:cs typeface="Microsoft JhengHei" pitchFamily="34" charset="-120"/>
               </a:rPr>
-              <a:t>目標組PFS和OS較長</a:t>
+              <a:t>第一組中位PFS：4.9個月。</a:t>
             </a:r>
             <a:endParaRPr lang="en-US" sz="1800" dirty="0"/>
           </a:p>
@@ -5222,7 +5297,7 @@
                 <a:ea typeface="Microsoft JhengHei" pitchFamily="34" charset="-122"/>
                 <a:cs typeface="Microsoft JhengHei" pitchFamily="34" charset="-120"/>
               </a:rPr>
-              <a:t>調整劑量無增加毒性</a:t>
+              <a:t>隨訪時間長達約7年。</a:t>
             </a:r>
             <a:endParaRPr lang="en-US" sz="1800" dirty="0"/>
           </a:p>
@@ -5243,7 +5318,7 @@
                 <a:ea typeface="Microsoft JhengHei" pitchFamily="34" charset="-122"/>
                 <a:cs typeface="Microsoft JhengHei" pitchFamily="34" charset="-120"/>
               </a:rPr>
-              <a:t>目標組反應率較高</a:t>
+              <a:t>安全性可控，副作用可接受。</a:t>
             </a:r>
             <a:endParaRPr lang="en-US" sz="1800" dirty="0"/>
           </a:p>
@@ -5279,7 +5354,7 @@
                   <a:srgbClr val="888888"/>
                 </a:solidFill>
               </a:rPr>
-              <a:t>Aoe Kaho, Tada Toshifumi, Hiraoka Atsushi et al.. Hepatology (Baltimore, Md.). 2026-05-06 DOI: 10.1097/HEP.0000000000001781</a:t>
+              <a:t>Finn Richard S, Kudo Masatoshi, Borbath Ivan et al.. Clinical cancer research : an official journal of the American Association for Cancer Research. 2026-05-15 DOI: 10.1158/1078-0432.CCR-25-3528</a:t>
             </a:r>
             <a:endParaRPr lang="en-US" sz="800" dirty="0"/>
           </a:p>
@@ -5479,7 +5554,7 @@
                   </a:extLst>
                 </a:hlinkClick>
               </a:rPr>
-              <a:t>Patient-derived organotypic tumor spheroids as a functional platform for predicting immunotherapeutic responses and guiding precision treatment for hepatocellular carcinoma.</a:t>
+              <a:t>Immune-related adverse events are a potent predictor of post-transplant rejection in HCC: a multicentre retrospective cohort study.</a:t>
             </a:r>
             <a:endParaRPr lang="en-US" sz="2400" dirty="0"/>
           </a:p>
@@ -5515,7 +5590,7 @@
                   <a:srgbClr val="888888"/>
                 </a:solidFill>
               </a:rPr>
-              <a:t>Journal for immunotherapy of cancer  ·  IF 10.9  ·  Basic Research</a:t>
+              <a:t>Gut  ·  IF 24.5  ·  Retrospective Study</a:t>
             </a:r>
             <a:endParaRPr lang="en-US" sz="1000" dirty="0"/>
           </a:p>
@@ -5558,7 +5633,7 @@
                 <a:ea typeface="Microsoft JhengHei" pitchFamily="34" charset="-122"/>
                 <a:cs typeface="Microsoft JhengHei" pitchFamily="34" charset="-120"/>
               </a:rPr>
-              <a:t>開發患者衍生的腫瘤球體（PDOTS）</a:t>
+              <a:t>ICIs 增加移植後排斥風險。</a:t>
             </a:r>
             <a:endParaRPr lang="en-US" sz="1800" dirty="0"/>
           </a:p>
@@ -5579,7 +5654,7 @@
                 <a:ea typeface="Microsoft JhengHei" pitchFamily="34" charset="-122"/>
                 <a:cs typeface="Microsoft JhengHei" pitchFamily="34" charset="-120"/>
               </a:rPr>
-              <a:t>PDOTS 模型保留 HCC 異質性及免疫微環境</a:t>
+              <a:t>irAEs 強烈預測移植後排斥。</a:t>
             </a:r>
             <a:endParaRPr lang="en-US" sz="1800" dirty="0"/>
           </a:p>
@@ -5600,49 +5675,7 @@
                 <a:ea typeface="Microsoft JhengHei" pitchFamily="34" charset="-122"/>
                 <a:cs typeface="Microsoft JhengHei" pitchFamily="34" charset="-120"/>
               </a:rPr>
-              <a:t>預測治療反應達 80% 一致性</a:t>
-            </a:r>
-            <a:endParaRPr lang="en-US" sz="1800" dirty="0"/>
-          </a:p>
-          <a:p>
-            <a:pPr marL="342900" indent="-342900">
-              <a:spcAft>
-                <a:spcPts val="800"/>
-              </a:spcAft>
-              <a:buSzPct val="100000"/>
-              <a:buChar char="•"/>
-            </a:pPr>
-            <a:r>
-              <a:rPr lang="en-US" sz="1800" dirty="0">
-                <a:solidFill>
-                  <a:srgbClr val="333333"/>
-                </a:solidFill>
-                <a:latin typeface="Microsoft JhengHei" pitchFamily="34" charset="0"/>
-                <a:ea typeface="Microsoft JhengHei" pitchFamily="34" charset="-122"/>
-                <a:cs typeface="Microsoft JhengHei" pitchFamily="34" charset="-120"/>
-              </a:rPr>
-              <a:t>識別出治療敏感性的 'Organoid Killing Index'</a:t>
-            </a:r>
-            <a:endParaRPr lang="en-US" sz="1800" dirty="0"/>
-          </a:p>
-          <a:p>
-            <a:pPr marL="342900" indent="-342900">
-              <a:spcAft>
-                <a:spcPts val="800"/>
-              </a:spcAft>
-              <a:buSzPct val="100000"/>
-              <a:buChar char="•"/>
-            </a:pPr>
-            <a:r>
-              <a:rPr lang="en-US" sz="1800" dirty="0">
-                <a:solidFill>
-                  <a:srgbClr val="333333"/>
-                </a:solidFill>
-                <a:latin typeface="Microsoft JhengHei" pitchFamily="34" charset="0"/>
-                <a:ea typeface="Microsoft JhengHei" pitchFamily="34" charset="-122"/>
-                <a:cs typeface="Microsoft JhengHei" pitchFamily="34" charset="-120"/>
-              </a:rPr>
-              <a:t>支持 HCC 患者的個體化免疫治療</a:t>
+              <a:t>預測模型 AUC 達 0.788。</a:t>
             </a:r>
             <a:endParaRPr lang="en-US" sz="1800" dirty="0"/>
           </a:p>
@@ -5678,7 +5711,7 @@
                   <a:srgbClr val="888888"/>
                 </a:solidFill>
               </a:rPr>
-              <a:t>Song Fei, Lu Yi-Jun, Sun Hai-Xiang et al.. Journal for immunotherapy of cancer. 2026-05-04 DOI: 10.1136/jitc-2025-014555</a:t>
+              <a:t>Fang Jun, Zhong Siyi, Wang Tielong et al.. Gut. 2026-05-12 DOI: 10.1136/gutjnl-2025-336719</a:t>
             </a:r>
             <a:endParaRPr lang="en-US" sz="800" dirty="0"/>
           </a:p>
@@ -5878,7 +5911,7 @@
                   </a:extLst>
                 </a:hlinkClick>
               </a:rPr>
-              <a:t>Sintilimab (PD-1 inhibitor) plus lenvatinib as conversion therapy followed by sequential surgery (SILENSES) for advanced unresectable hepatocellular carcinoma: a phase II, expansion trial.</a:t>
+              <a:t>BCAT1 inhibits crotonate-related epigenetic modulation of metabolic genes in tumor-associated macrophages to counter immunosuppression.</a:t>
             </a:r>
             <a:endParaRPr lang="en-US" sz="2400" dirty="0"/>
           </a:p>
@@ -5914,7 +5947,7 @@
                   <a:srgbClr val="888888"/>
                 </a:solidFill>
               </a:rPr>
-              <a:t>Signal transduction and targeted therapy  ·  RCT Phase 2</a:t>
+              <a:t>Nature communications  ·  IF 14.7  ·  Basic Research</a:t>
             </a:r>
             <a:endParaRPr lang="en-US" sz="1000" dirty="0"/>
           </a:p>
@@ -5957,7 +5990,7 @@
                 <a:ea typeface="Microsoft JhengHei" pitchFamily="34" charset="-122"/>
                 <a:cs typeface="Microsoft JhengHei" pitchFamily="34" charset="-120"/>
               </a:rPr>
-              <a:t>Sintilimab-lenvatinib顯示抗腫瘤活性。</a:t>
+              <a:t>BCAT1在TAM中作為代謝檢查點。</a:t>
             </a:r>
             <a:endParaRPr lang="en-US" sz="1800" dirty="0"/>
           </a:p>
@@ -5978,7 +6011,7 @@
                 <a:ea typeface="Microsoft JhengHei" pitchFamily="34" charset="-122"/>
                 <a:cs typeface="Microsoft JhengHei" pitchFamily="34" charset="-120"/>
               </a:rPr>
-              <a:t>不可切除HCC患者轉化率56%。</a:t>
+              <a:t>BCAT1缺失增加crotonate和免疫抑制。</a:t>
             </a:r>
             <a:endParaRPr lang="en-US" sz="1800" dirty="0"/>
           </a:p>
@@ -5999,7 +6032,7 @@
                 <a:ea typeface="Microsoft JhengHei" pitchFamily="34" charset="-122"/>
                 <a:cs typeface="Microsoft JhengHei" pitchFamily="34" charset="-120"/>
               </a:rPr>
-              <a:t>中位整體生存期為36個月。</a:t>
+              <a:t>BCAT1+巨噬細胞增強抗腫瘤免疫。</a:t>
             </a:r>
             <a:endParaRPr lang="en-US" sz="1800" dirty="0"/>
           </a:p>
@@ -6020,7 +6053,7 @@
                 <a:ea typeface="Microsoft JhengHei" pitchFamily="34" charset="-122"/>
                 <a:cs typeface="Microsoft JhengHei" pitchFamily="34" charset="-120"/>
               </a:rPr>
-              <a:t>手術後五年生存率73.9%。</a:t>
+              <a:t>髓系BCAT1過表達改善抗-PD1療法。</a:t>
             </a:r>
             <a:endParaRPr lang="en-US" sz="1800" dirty="0"/>
           </a:p>
@@ -6041,7 +6074,7 @@
                 <a:ea typeface="Microsoft JhengHei" pitchFamily="34" charset="-122"/>
                 <a:cs typeface="Microsoft JhengHei" pitchFamily="34" charset="-120"/>
               </a:rPr>
-              <a:t>31%患者出現三級以上不良事件。</a:t>
+              <a:t>針對BCAT1可增強免疫療法反應。</a:t>
             </a:r>
             <a:endParaRPr lang="en-US" sz="1800" dirty="0"/>
           </a:p>
@@ -6077,7 +6110,7 @@
                   <a:srgbClr val="888888"/>
                 </a:solidFill>
               </a:rPr>
-              <a:t>Lu Shichun, Zhang Wenwen, Li Junfeng et al.. Signal transduction and targeted therapy. 2026-05-06 DOI: 10.1038/s41392-026-02708-2</a:t>
+              <a:t>Zhang Weizhi, Liang Shuhang, Han Sitao et al.. Nature communications. 2026-05-11 DOI: 10.1038/s41467-026-72814-w</a:t>
             </a:r>
             <a:endParaRPr lang="en-US" sz="800" dirty="0"/>
           </a:p>
@@ -6277,7 +6310,7 @@
                   </a:extLst>
                 </a:hlinkClick>
               </a:rPr>
-              <a:t>ISX-TWIST1 reprograms CD47-inflammasome signaling to reshape the immune microenvironment in liver cancer.</a:t>
+              <a:t>Ablation-Based Salvage Strategy at Disease Progression After Initial Disease Control With Atezolizumab/Bevacizumab in Hepatocellular Carcinoma.</a:t>
             </a:r>
             <a:endParaRPr lang="en-US" sz="2400" dirty="0"/>
           </a:p>
@@ -6313,7 +6346,7 @@
                   <a:srgbClr val="888888"/>
                 </a:solidFill>
               </a:rPr>
-              <a:t>Experimental hematology &amp; oncology  ·  Basic Research  ·  🌏 Asia</a:t>
+              <a:t>Hepatology research : the official journal of the Japan Society of Hepatology  ·  Prospective Study  ·  🌏 Asia</a:t>
             </a:r>
             <a:endParaRPr lang="en-US" sz="1000" dirty="0"/>
           </a:p>
@@ -6356,7 +6389,7 @@
                 <a:ea typeface="Microsoft JhengHei" pitchFamily="34" charset="-122"/>
                 <a:cs typeface="Microsoft JhengHei" pitchFamily="34" charset="-120"/>
               </a:rPr>
-              <a:t>ISX連結CD47信號與inflammasome。</a:t>
+              <a:t>Atez/Bev 可達疾病控制。</a:t>
             </a:r>
             <a:endParaRPr lang="en-US" sz="1800" dirty="0"/>
           </a:p>
@@ -6377,7 +6410,7 @@
                 <a:ea typeface="Microsoft JhengHei" pitchFamily="34" charset="-122"/>
                 <a:cs typeface="Microsoft JhengHei" pitchFamily="34" charset="-120"/>
               </a:rPr>
-              <a:t>CD47升高促進M2巨噬細胞極化。</a:t>
+              <a:t>進展後考慮進行消融。</a:t>
             </a:r>
             <a:endParaRPr lang="en-US" sz="1800" dirty="0"/>
           </a:p>
@@ -6398,7 +6431,49 @@
                 <a:ea typeface="Microsoft JhengHei" pitchFamily="34" charset="-122"/>
                 <a:cs typeface="Microsoft JhengHei" pitchFamily="34" charset="-120"/>
               </a:rPr>
-              <a:t>消除M2巨噬細胞可阻止疾病進展。</a:t>
+              <a:t>消融組PPS顯著延長。</a:t>
+            </a:r>
+            <a:endParaRPr lang="en-US" sz="1800" dirty="0"/>
+          </a:p>
+          <a:p>
+            <a:pPr marL="342900" indent="-342900">
+              <a:spcAft>
+                <a:spcPts val="800"/>
+              </a:spcAft>
+              <a:buSzPct val="100000"/>
+              <a:buChar char="•"/>
+            </a:pPr>
+            <a:r>
+              <a:rPr lang="en-US" sz="1800" dirty="0">
+                <a:solidFill>
+                  <a:srgbClr val="333333"/>
+                </a:solidFill>
+                <a:latin typeface="Microsoft JhengHei" pitchFamily="34" charset="0"/>
+                <a:ea typeface="Microsoft JhengHei" pitchFamily="34" charset="-122"/>
+                <a:cs typeface="Microsoft JhengHei" pitchFamily="34" charset="-120"/>
+              </a:rPr>
+              <a:t>OS顯示消融有趨勢優勢。</a:t>
+            </a:r>
+            <a:endParaRPr lang="en-US" sz="1800" dirty="0"/>
+          </a:p>
+          <a:p>
+            <a:pPr marL="342900" indent="-342900">
+              <a:spcAft>
+                <a:spcPts val="800"/>
+              </a:spcAft>
+              <a:buSzPct val="100000"/>
+              <a:buChar char="•"/>
+            </a:pPr>
+            <a:r>
+              <a:rPr lang="en-US" sz="1800" dirty="0">
+                <a:solidFill>
+                  <a:srgbClr val="333333"/>
+                </a:solidFill>
+                <a:latin typeface="Microsoft JhengHei" pitchFamily="34" charset="0"/>
+                <a:ea typeface="Microsoft JhengHei" pitchFamily="34" charset="-122"/>
+                <a:cs typeface="Microsoft JhengHei" pitchFamily="34" charset="-120"/>
+              </a:rPr>
+              <a:t>需進一步驗證結果。</a:t>
             </a:r>
             <a:endParaRPr lang="en-US" sz="1800" dirty="0"/>
           </a:p>
@@ -6434,7 +6509,7 @@
                   <a:srgbClr val="888888"/>
                 </a:solidFill>
               </a:rPr>
-              <a:t>Wang Li-Ting, Lin Ming-Hong, Li Yi-Chuan et al.. Experimental hematology &amp; oncology. 2026-05-04 DOI: 10.1186/s40164-026-00777-1</a:t>
+              <a:t>Kariyama Kazuya, Nouso Kazuhiro, Hiraoka Atsushi et al.. Hepatology research : the official journal of the Japan Society of Hepatology. 2026-05-11 DOI: 10.1111/hepr.70193</a:t>
             </a:r>
             <a:endParaRPr lang="en-US" sz="800" dirty="0"/>
           </a:p>
@@ -6634,7 +6709,7 @@
                   </a:extLst>
                 </a:hlinkClick>
               </a:rPr>
-              <a:t>… plus transarterial chemoembolization and PD-1 inhibitors as conversion therapies for unresectable intermediate-advanced hepatocellular carcinoma: a phase 2 trial …</a:t>
+              <a:t>HILL: the efficacy and safety of hepatic arterial infusion chemotherapy with the FOLFOX regimen combined with lenvatinib and the PD-L1 inhibitor durvalumab in unresectable hepatocellular carcinoma: a prospective, single-arm, phase 2 clinical trial.</a:t>
             </a:r>
             <a:endParaRPr lang="en-US" sz="2400" dirty="0"/>
           </a:p>
@@ -6670,7 +6745,7 @@
                   <a:srgbClr val="888888"/>
                 </a:solidFill>
               </a:rPr>
-              <a:t>… and Targeted Therapy  ·  RCT Phase 2</a:t>
+              <a:t>Signal transduction and targeted therapy  ·  RCT Phase 2</a:t>
             </a:r>
             <a:endParaRPr lang="en-US" sz="1000" dirty="0"/>
           </a:p>
@@ -6713,7 +6788,7 @@
                 <a:ea typeface="Microsoft JhengHei" pitchFamily="34" charset="-122"/>
                 <a:cs typeface="Microsoft JhengHei" pitchFamily="34" charset="-120"/>
               </a:rPr>
-              <a:t>針對不可切除HCC的組合療法</a:t>
+              <a:t>針對uHCC治療效果研究</a:t>
             </a:r>
             <a:endParaRPr lang="en-US" sz="1800" dirty="0"/>
           </a:p>
@@ -6734,7 +6809,7 @@
                 <a:ea typeface="Microsoft JhengHei" pitchFamily="34" charset="-122"/>
                 <a:cs typeface="Microsoft JhengHei" pitchFamily="34" charset="-120"/>
               </a:rPr>
-              <a:t>使用肝動脈化療栓塞（TACE）</a:t>
+              <a:t>三重組合療法：FOLFOX-HAIC、lenvatinib、durvalumab</a:t>
             </a:r>
             <a:endParaRPr lang="en-US" sz="1800" dirty="0"/>
           </a:p>
@@ -6755,7 +6830,7 @@
                 <a:ea typeface="Microsoft JhengHei" pitchFamily="34" charset="-122"/>
                 <a:cs typeface="Microsoft JhengHei" pitchFamily="34" charset="-120"/>
               </a:rPr>
-              <a:t>PD-1抑制劑提升療效</a:t>
+              <a:t>中位無進展生存期15.8個月</a:t>
             </a:r>
             <a:endParaRPr lang="en-US" sz="1800" dirty="0"/>
           </a:p>
@@ -6776,7 +6851,7 @@
                 <a:ea typeface="Microsoft JhengHei" pitchFamily="34" charset="-122"/>
                 <a:cs typeface="Microsoft JhengHei" pitchFamily="34" charset="-120"/>
               </a:rPr>
-              <a:t>第二期試驗顯示良好結果</a:t>
+              <a:t>客觀反應率達75.0%</a:t>
             </a:r>
             <a:endParaRPr lang="en-US" sz="1800" dirty="0"/>
           </a:p>
@@ -6797,7 +6872,7 @@
                 <a:ea typeface="Microsoft JhengHei" pitchFamily="34" charset="-122"/>
                 <a:cs typeface="Microsoft JhengHei" pitchFamily="34" charset="-120"/>
               </a:rPr>
-              <a:t>有潛力轉為可切除狀態</a:t>
+              <a:t>安全性以1-2級不良事件為主</a:t>
             </a:r>
             <a:endParaRPr lang="en-US" sz="1800" dirty="0"/>
           </a:p>
@@ -6833,7 +6908,7 @@
                   <a:srgbClr val="888888"/>
                 </a:solidFill>
               </a:rPr>
-              <a:t>X Zhang, H Cai, W Peng. … and Targeted Therapy. 2026</a:t>
+              <a:t>Li Shao-Hua, Zuo Zhi-Jun, Lu Liang-He et al.. Signal transduction and targeted therapy. 2026-05-14 DOI: 10.1038/s41392-026-02718-0</a:t>
             </a:r>
             <a:endParaRPr lang="en-US" sz="800" dirty="0"/>
           </a:p>
@@ -7033,7 +7108,7 @@
                   </a:extLst>
                 </a:hlinkClick>
               </a:rPr>
-              <a:t>A Case of Pernicious Anemia Induced by Atezolizumab in Hepatocellular Carcinoma and Renal Cell Carcinoma.</a:t>
+              <a:t>Immunotherapy in Hepatocellular Carcinoma with Portal Vein Tumour Thrombosis: From Poor Prognosis to Curative-Intent Strategies</a:t>
             </a:r>
             <a:endParaRPr lang="en-US" sz="2400" dirty="0"/>
           </a:p>
@@ -7069,7 +7144,7 @@
                   <a:srgbClr val="888888"/>
                 </a:solidFill>
               </a:rPr>
-              <a:t>The American journal of case reports  ·  Case Report  ·  🌏 Asia</a:t>
+              <a:t>…  ·  RCT Phase 2</a:t>
             </a:r>
             <a:endParaRPr lang="en-US" sz="1000" dirty="0"/>
           </a:p>
@@ -7112,7 +7187,7 @@
                 <a:ea typeface="Microsoft JhengHei" pitchFamily="34" charset="-122"/>
                 <a:cs typeface="Microsoft JhengHei" pitchFamily="34" charset="-120"/>
               </a:rPr>
-              <a:t>ICI引起的惡性貧血</a:t>
+              <a:t>針對PVTT的HCC二期研究</a:t>
             </a:r>
             <a:endParaRPr lang="en-US" sz="1800" dirty="0"/>
           </a:p>
@@ -7133,7 +7208,7 @@
                 <a:ea typeface="Microsoft JhengHei" pitchFamily="34" charset="-122"/>
                 <a:cs typeface="Microsoft JhengHei" pitchFamily="34" charset="-120"/>
               </a:rPr>
-              <a:t>68歲男性肝癌病例</a:t>
+              <a:t>HAIC聯合lenvatinib與PD-1</a:t>
             </a:r>
             <a:endParaRPr lang="en-US" sz="1800" dirty="0"/>
           </a:p>
@@ -7154,7 +7229,7 @@
                 <a:ea typeface="Microsoft JhengHei" pitchFamily="34" charset="-122"/>
                 <a:cs typeface="Microsoft JhengHei" pitchFamily="34" charset="-120"/>
               </a:rPr>
-              <a:t>接受atezolizumab後出現巨幼紅血球貧血</a:t>
+              <a:t>優於單一療法的結果</a:t>
             </a:r>
             <a:endParaRPr lang="en-US" sz="1800" dirty="0"/>
           </a:p>
@@ -7175,7 +7250,7 @@
                 <a:ea typeface="Microsoft JhengHei" pitchFamily="34" charset="-122"/>
                 <a:cs typeface="Microsoft JhengHei" pitchFamily="34" charset="-120"/>
               </a:rPr>
-              <a:t>胃壁細胞抗體陽性</a:t>
+              <a:t>專注於治癒性策略</a:t>
             </a:r>
             <a:endParaRPr lang="en-US" sz="1800" dirty="0"/>
           </a:p>
@@ -7196,7 +7271,7 @@
                 <a:ea typeface="Microsoft JhengHei" pitchFamily="34" charset="-122"/>
                 <a:cs typeface="Microsoft JhengHei" pitchFamily="34" charset="-120"/>
               </a:rPr>
-              <a:t>需監測Vit.B12水平</a:t>
+              <a:t>改善預後的潛力</a:t>
             </a:r>
             <a:endParaRPr lang="en-US" sz="1800" dirty="0"/>
           </a:p>
@@ -7232,7 +7307,7 @@
                   <a:srgbClr val="888888"/>
                 </a:solidFill>
               </a:rPr>
-              <a:t>Sugimoto Takeshi, Kanemori Gen, Kanehira Hirohumi et al.. The American journal of case reports. 2026-05-10 DOI: 10.12659/AJCR.952800</a:t>
+              <a:t>L Marzi, R Sacco, L Siciliani. …. 2026</a:t>
             </a:r>
             <a:endParaRPr lang="en-US" sz="800" dirty="0"/>
           </a:p>
@@ -7432,7 +7507,7 @@
                   </a:extLst>
                 </a:hlinkClick>
               </a:rPr>
-              <a:t>Comparison of outcomes of second-line durvalumab plus tremelimumab versus lenvatinib following first-line atezolizumab plus bevacizumab in unresectable hepatocellular carcinoma.</a:t>
+              <a:t>… plus transarterial chemoembolization and PD-1 inhibitors as conversion therapies for unresectable intermediate-advanced hepatocellular carcinoma: a phase 2 trial …</a:t>
             </a:r>
             <a:endParaRPr lang="en-US" sz="2400" dirty="0"/>
           </a:p>
@@ -7468,7 +7543,7 @@
                   <a:srgbClr val="888888"/>
                 </a:solidFill>
               </a:rPr>
-              <a:t>PloS one  ·  Retrospective Study  ·  🌏 Asia</a:t>
+              <a:t>… and Targeted Therapy  ·  RCT Phase 2</a:t>
             </a:r>
             <a:endParaRPr lang="en-US" sz="1000" dirty="0"/>
           </a:p>
@@ -7511,7 +7586,7 @@
                 <a:ea typeface="Microsoft JhengHei" pitchFamily="34" charset="-122"/>
                 <a:cs typeface="Microsoft JhengHei" pitchFamily="34" charset="-120"/>
               </a:rPr>
-              <a:t>Durvalumab加tremelimumab與lenvatinib比較</a:t>
+              <a:t>針對不可切除HCC的組合療法</a:t>
             </a:r>
             <a:endParaRPr lang="en-US" sz="1800" dirty="0"/>
           </a:p>
@@ -7532,7 +7607,7 @@
                 <a:ea typeface="Microsoft JhengHei" pitchFamily="34" charset="-122"/>
                 <a:cs typeface="Microsoft JhengHei" pitchFamily="34" charset="-120"/>
               </a:rPr>
-              <a:t>lenvatinib顯示更佳的PFS和OS</a:t>
+              <a:t>經動脈化療栓塞加PD-1抑制劑</a:t>
             </a:r>
             <a:endParaRPr lang="en-US" sz="1800" dirty="0"/>
           </a:p>
@@ -7553,7 +7628,7 @@
                 <a:ea typeface="Microsoft JhengHei" pitchFamily="34" charset="-122"/>
                 <a:cs typeface="Microsoft JhengHei" pitchFamily="34" charset="-120"/>
               </a:rPr>
-              <a:t>lenvatinib的3級以上不良事件較多</a:t>
+              <a:t>第二期試驗顯示前景良好</a:t>
             </a:r>
             <a:endParaRPr lang="en-US" sz="1800" dirty="0"/>
           </a:p>
@@ -7589,7 +7664,7 @@
                   <a:srgbClr val="888888"/>
                 </a:solidFill>
               </a:rPr>
-              <a:t>Nishioka Chinatsu, Tahata Yuki, Maesaka Kazuki et al.. PloS one. 2026-05-07 DOI: 10.1371/journal.pone.0341395</a:t>
+              <a:t>X Zhang, H Cai, W Peng. … and Targeted Therapy. 2026</a:t>
             </a:r>
             <a:endParaRPr lang="en-US" sz="800" dirty="0"/>
           </a:p>

--- a/docs/digest-zh.pptx
+++ b/docs/digest-zh.pptx
@@ -2269,7 +2269,7 @@
                   <a:srgbClr val="888888"/>
                 </a:solidFill>
               </a:rPr>
-              <a:t>2026-05-11 — 2026-05-18</a:t>
+              <a:t>2026-05-18 — 2026-05-25</a:t>
             </a:r>
             <a:endParaRPr lang="en-US" sz="1400" dirty="0"/>
           </a:p>
@@ -2460,7 +2460,7 @@
                   </a:extLst>
                 </a:hlinkClick>
               </a:rPr>
-              <a:t>Second-Line TKI after First-Line Immunotherapy-based Treatment in Advanced HCC: Reconstructed IPD Meta-analysis.</a:t>
+              <a:t>Breakthroughs in HBV-related HCC Therapy: The Unmatched Potential of Immune Checkpoint Inhibitors.</a:t>
             </a:r>
             <a:endParaRPr lang="en-US" sz="2400" dirty="0"/>
           </a:p>
@@ -2496,7 +2496,7 @@
                   <a:srgbClr val="888888"/>
                 </a:solidFill>
               </a:rPr>
-              <a:t>JHEP reports : innovation in hepatology  ·  IF 7.8  ·  Meta-Analysis</a:t>
+              <a:t>Current treatment options in oncology  ·  Review  ·  🌏 Asia</a:t>
             </a:r>
             <a:endParaRPr lang="en-US" sz="1000" dirty="0"/>
           </a:p>
@@ -2539,7 +2539,7 @@
                 <a:ea typeface="Microsoft JhengHei" pitchFamily="34" charset="-122"/>
                 <a:cs typeface="Microsoft JhengHei" pitchFamily="34" charset="-120"/>
               </a:rPr>
-              <a:t>分析免疫治療後的第二線TKI。</a:t>
+              <a:t>免疫檢查點抑制劑改變HCC治療。</a:t>
             </a:r>
             <a:endParaRPr lang="en-US" sz="1800" dirty="0"/>
           </a:p>
@@ -2560,7 +2560,7 @@
                 <a:ea typeface="Microsoft JhengHei" pitchFamily="34" charset="-122"/>
                 <a:cs typeface="Microsoft JhengHei" pitchFamily="34" charset="-120"/>
               </a:rPr>
-              <a:t>Lenvatinib和regorafenib顯示更好OS。</a:t>
+              <a:t>單一療法的臨床效益有限。</a:t>
             </a:r>
             <a:endParaRPr lang="en-US" sz="1800" dirty="0"/>
           </a:p>
@@ -2581,7 +2581,7 @@
                 <a:ea typeface="Microsoft JhengHei" pitchFamily="34" charset="-122"/>
                 <a:cs typeface="Microsoft JhengHei" pitchFamily="34" charset="-120"/>
               </a:rPr>
-              <a:t>所有患者中位OS為9.8個月。</a:t>
+              <a:t>HBV-HCC具有特殊免疫抑制環境。</a:t>
             </a:r>
             <a:endParaRPr lang="en-US" sz="1800" dirty="0"/>
           </a:p>
@@ -2602,7 +2602,7 @@
                 <a:ea typeface="Microsoft JhengHei" pitchFamily="34" charset="-122"/>
                 <a:cs typeface="Microsoft JhengHei" pitchFamily="34" charset="-120"/>
               </a:rPr>
-              <a:t>觀察到生存結果異質性。</a:t>
+              <a:t>聯合療法可能提高治療效果。</a:t>
             </a:r>
             <a:endParaRPr lang="en-US" sz="1800" dirty="0"/>
           </a:p>
@@ -2623,7 +2623,7 @@
                 <a:ea typeface="Microsoft JhengHei" pitchFamily="34" charset="-122"/>
                 <a:cs typeface="Microsoft JhengHei" pitchFamily="34" charset="-120"/>
               </a:rPr>
-              <a:t>強調需要前瞻性研究。</a:t>
+              <a:t>乙型肝炎再激活可用抗病毒藥物管理。</a:t>
             </a:r>
             <a:endParaRPr lang="en-US" sz="1800" dirty="0"/>
           </a:p>
@@ -2659,7 +2659,7 @@
                   <a:srgbClr val="888888"/>
                 </a:solidFill>
               </a:rPr>
-              <a:t>Akkus Erman, Hobeika Christian, Edeline Julien et al.. JHEP reports : innovation in hepatology. 2026-05-13 DOI: 10.1016/j.jhepr.2026.101893</a:t>
+              <a:t>Liu Chenlu, Chang Le, Yan Ying et al.. Current treatment options in oncology. 2026-05-23 DOI: 10.1007/s11864-026-01395-z</a:t>
             </a:r>
             <a:endParaRPr lang="en-US" sz="800" dirty="0"/>
           </a:p>
@@ -2859,7 +2859,7 @@
                   </a:extLst>
                 </a:hlinkClick>
               </a:rPr>
-              <a:t>Electronic symptom monitoring of patient-reported outcomes among patients with hepatocellular carcinoma during immunotherapy (PRIME-HCC): protocol for a randomised controlled trial.</a:t>
+              <a:t>Machine learning based hepatic safety score predicts decompensation in hepatocellular carcinoma systemic therapy.</a:t>
             </a:r>
             <a:endParaRPr lang="en-US" sz="2400" dirty="0"/>
           </a:p>
@@ -2895,7 +2895,7 @@
                   <a:srgbClr val="888888"/>
                 </a:solidFill>
               </a:rPr>
-              <a:t>BMJ open  ·  RCT</a:t>
+              <a:t>NPJ digital medicine  ·  🌏 Asia</a:t>
             </a:r>
             <a:endParaRPr lang="en-US" sz="1000" dirty="0"/>
           </a:p>
@@ -2938,7 +2938,7 @@
                 <a:ea typeface="Microsoft JhengHei" pitchFamily="34" charset="-122"/>
                 <a:cs typeface="Microsoft JhengHei" pitchFamily="34" charset="-120"/>
               </a:rPr>
-              <a:t>ePROs提升癌症患者的HRQoL。</a:t>
+              <a:t>開發機器學習肝臟安全評分。</a:t>
             </a:r>
             <a:endParaRPr lang="en-US" sz="1800" dirty="0"/>
           </a:p>
@@ -2959,7 +2959,7 @@
                 <a:ea typeface="Microsoft JhengHei" pitchFamily="34" charset="-122"/>
                 <a:cs typeface="Microsoft JhengHei" pitchFamily="34" charset="-120"/>
               </a:rPr>
-              <a:t>研究評估HCC免疫治療中的ePROs。</a:t>
+              <a:t>預測脫補與靜脈曲張出血。</a:t>
             </a:r>
             <a:endParaRPr lang="en-US" sz="1800" dirty="0"/>
           </a:p>
@@ -2980,7 +2980,7 @@
                 <a:ea typeface="Microsoft JhengHei" pitchFamily="34" charset="-122"/>
                 <a:cs typeface="Microsoft JhengHei" pitchFamily="34" charset="-120"/>
               </a:rPr>
-              <a:t>隨機試驗招募238名HCC患者。</a:t>
+              <a:t>高MHSS與風險增加相關。</a:t>
             </a:r>
             <a:endParaRPr lang="en-US" sz="1800" dirty="0"/>
           </a:p>
@@ -3001,7 +3001,7 @@
                 <a:ea typeface="Microsoft JhengHei" pitchFamily="34" charset="-122"/>
                 <a:cs typeface="Microsoft JhengHei" pitchFamily="34" charset="-120"/>
               </a:rPr>
-              <a:t>介入組使用WeChat監測症狀。</a:t>
+              <a:t>Atezolizumab-bevacizumab效果不一。</a:t>
             </a:r>
             <a:endParaRPr lang="en-US" sz="1800" dirty="0"/>
           </a:p>
@@ -3022,7 +3022,7 @@
                 <a:ea typeface="Microsoft JhengHei" pitchFamily="34" charset="-122"/>
                 <a:cs typeface="Microsoft JhengHei" pitchFamily="34" charset="-120"/>
               </a:rPr>
-              <a:t>結果包括HRQoL、生存率和可行性。</a:t>
+              <a:t>MHSS指導個性化治療選擇。</a:t>
             </a:r>
             <a:endParaRPr lang="en-US" sz="1800" dirty="0"/>
           </a:p>
@@ -3058,7 +3058,7 @@
                   <a:srgbClr val="888888"/>
                 </a:solidFill>
               </a:rPr>
-              <a:t>Xia Yiqi, Wei Xiaoping, Wang Yanshang et al.. BMJ open. 2026-05-11 DOI: 10.1136/bmjopen-2026-116199</a:t>
+              <a:t>Han Ji Won, Lee Jaejun, Yang Keungmo et al.. NPJ digital medicine. 2026-05-21 DOI: 10.1038/s41746-026-02802-3</a:t>
             </a:r>
             <a:endParaRPr lang="en-US" sz="800" dirty="0"/>
           </a:p>
@@ -3258,7 +3258,7 @@
                   </a:extLst>
                 </a:hlinkClick>
               </a:rPr>
-              <a:t>Plasma interleukin-8 as a predictive biomarker for tyrosine kinase inhibitor response in advanced hepatocellular carcinoma.</a:t>
+              <a:t>Less Is More: A Single-Dose, Non-Waiting Neoadjuvant Immunotherapy Strategy for Hepatocellular Carcinoma.</a:t>
             </a:r>
             <a:endParaRPr lang="en-US" sz="2400" dirty="0"/>
           </a:p>
@@ -3294,7 +3294,7 @@
                   <a:srgbClr val="888888"/>
                 </a:solidFill>
               </a:rPr>
-              <a:t>Discover oncology  ·  🌏 Asia</a:t>
+              <a:t>Biomedical journal  ·  🌏 Asia</a:t>
             </a:r>
             <a:endParaRPr lang="en-US" sz="1000" dirty="0"/>
           </a:p>
@@ -3337,7 +3337,7 @@
                 <a:ea typeface="Microsoft JhengHei" pitchFamily="34" charset="-122"/>
                 <a:cs typeface="Microsoft JhengHei" pitchFamily="34" charset="-120"/>
               </a:rPr>
-              <a:t>HCC是主要癌症死亡原因。</a:t>
+              <a:t>新輔助免疫治療在HCC面臨挑戰。</a:t>
             </a:r>
             <a:endParaRPr lang="en-US" sz="1800" dirty="0"/>
           </a:p>
@@ -3358,7 +3358,7 @@
                 <a:ea typeface="Microsoft JhengHei" pitchFamily="34" charset="-122"/>
                 <a:cs typeface="Microsoft JhengHei" pitchFamily="34" charset="-120"/>
               </a:rPr>
-              <a:t>TKI是首選治療方案。</a:t>
+              <a:t>單劑量策略提升手術可行性。</a:t>
             </a:r>
             <a:endParaRPr lang="en-US" sz="1800" dirty="0"/>
           </a:p>
@@ -3379,7 +3379,7 @@
                 <a:ea typeface="Microsoft JhengHei" pitchFamily="34" charset="-122"/>
                 <a:cs typeface="Microsoft JhengHei" pitchFamily="34" charset="-120"/>
               </a:rPr>
-              <a:t>IL-8水平預測TKI反應。</a:t>
+              <a:t>PD-1/PD-L1抗體早期激活T細胞。</a:t>
             </a:r>
             <a:endParaRPr lang="en-US" sz="1800" dirty="0"/>
           </a:p>
@@ -3400,7 +3400,7 @@
                 <a:ea typeface="Microsoft JhengHei" pitchFamily="34" charset="-122"/>
                 <a:cs typeface="Microsoft JhengHei" pitchFamily="34" charset="-120"/>
               </a:rPr>
-              <a:t>IL-8升高與生存率低相關。</a:t>
+              <a:t>減少治療相關不良事件。</a:t>
             </a:r>
             <a:endParaRPr lang="en-US" sz="1800" dirty="0"/>
           </a:p>
@@ -3421,7 +3421,7 @@
                 <a:ea typeface="Microsoft JhengHei" pitchFamily="34" charset="-122"/>
                 <a:cs typeface="Microsoft JhengHei" pitchFamily="34" charset="-120"/>
               </a:rPr>
-              <a:t>研究分析60例晚期HCC患者。</a:t>
+              <a:t>未來試驗應採用'少即是多'策略。</a:t>
             </a:r>
             <a:endParaRPr lang="en-US" sz="1800" dirty="0"/>
           </a:p>
@@ -3457,7 +3457,7 @@
                   <a:srgbClr val="888888"/>
                 </a:solidFill>
               </a:rPr>
-              <a:t>Kim Sujin, Ahn Hye Ri, Kim Hui Gyeong et al.. Discover oncology. 2026-05-11 DOI: 10.1007/s12672-026-05055-4</a:t>
+              <a:t>Chen Kevin Kuan-Yu, Lin Tzu-Jung, Su Te-Wei et al.. Biomedical journal. 2026-05-20 DOI: 10.1016/j.bj.2026.100994</a:t>
             </a:r>
             <a:endParaRPr lang="en-US" sz="800" dirty="0"/>
           </a:p>
@@ -3648,7 +3648,7 @@
                   <a:srgbClr val="FFFFFF"/>
                 </a:solidFill>
               </a:rPr>
-              <a:t>### 綜合啟示 (Overall Insights)</a:t>
+              <a:t>### 綜合啟示（Overall Insights）</a:t>
             </a:r>
             <a:endParaRPr lang="en-US" sz="1200" dirty="0"/>
           </a:p>
@@ -3674,7 +3674,7 @@
                   <a:srgbClr val="FFFFFF"/>
                 </a:solidFill>
               </a:rPr>
-              <a:t>1. **持久的抗腫瘤活性**  </a:t>
+              <a:t>1. **免疫治療的臨床實踐效果**  </a:t>
             </a:r>
             <a:endParaRPr lang="en-US" sz="1200" dirty="0"/>
           </a:p>
@@ -3691,7 +3691,7 @@
                   <a:srgbClr val="FFFFFF"/>
                 </a:solidFill>
               </a:rPr>
-              <a:t>   Pembrolizumab在治療經索拉非尼治療的晚期肝細胞癌患者中展現了持久的抗腫瘤活性，顯示其在長期療效方面的潛力。  </a:t>
+              <a:t>   The combination of durvalumab and tremelimumab shows promising real-world outcomes in HCC patients, regardless of meeting phase 3 trial criteria, indicating its potential as a viable treatment option.  </a:t>
             </a:r>
             <a:endParaRPr lang="en-US" sz="1200" dirty="0"/>
           </a:p>
@@ -3708,7 +3708,7 @@
                   <a:srgbClr val="FFFFFF"/>
                 </a:solidFill>
               </a:rPr>
-              <a:t>   *Pembrolizumab demonstrated durable antitumor activity in advanced hepatocellular carcinoma (HCC) patients previously treated with sorafenib, highlighting its potential for long-term efficacy.*</a:t>
+              <a:t>   Durvalumab和tremelimumab的組合在肝細胞癌患者中顯示出良好的臨床實踐效果，無論是否符合第三期試驗標準，顯示其作為可行治療選擇的潛力。</a:t>
             </a:r>
             <a:endParaRPr lang="en-US" sz="1200" dirty="0"/>
           </a:p>
@@ -3734,7 +3734,7 @@
                   <a:srgbClr val="FFFFFF"/>
                 </a:solidFill>
               </a:rPr>
-              <a:t>2. **免疫相關不良事件的預測能力**  </a:t>
+              <a:t>2. **一線治療的持久性反應**  </a:t>
             </a:r>
             <a:endParaRPr lang="en-US" sz="1200" dirty="0"/>
           </a:p>
@@ -3751,7 +3751,7 @@
                   <a:srgbClr val="FFFFFF"/>
                 </a:solidFill>
               </a:rPr>
-              <a:t>   免疫檢查點抑制劑引發的免疫相關不良事件（irAEs）可能是肝移植後排斥反應的強烈預測因子，提示需謹慎監測這些事件。  </a:t>
+              <a:t>   Atezolizumab plus bevacizumab remains the first-line treatment for unresectable HCC, with high response rates leading to potential curative conversions and drug-free remissions in select patients over five years.  </a:t>
             </a:r>
             <a:endParaRPr lang="en-US" sz="1200" dirty="0"/>
           </a:p>
@@ -3768,7 +3768,7 @@
                   <a:srgbClr val="FFFFFF"/>
                 </a:solidFill>
               </a:rPr>
-              <a:t>   *Immune-related adverse events (irAEs) from immune checkpoint inhibitors may serve as potent predictors of post-transplant rejection in HCC, suggesting the need for careful monitoring of these events.*</a:t>
+              <a:t>   Atezolizumab加bevacizumab仍然是不可切除肝細胞癌的一線治療，五年內高反應率使某些患者有可能實現治癒性轉化和無藥物緩解。</a:t>
             </a:r>
             <a:endParaRPr lang="en-US" sz="1200" dirty="0"/>
           </a:p>
@@ -3794,7 +3794,7 @@
                   <a:srgbClr val="FFFFFF"/>
                 </a:solidFill>
               </a:rPr>
-              <a:t>3. **腫瘤微環境的挑戰**  </a:t>
+              <a:t>3. **傳統中醫的潛在作用**  </a:t>
             </a:r>
             <a:endParaRPr lang="en-US" sz="1200" dirty="0"/>
           </a:p>
@@ -3811,7 +3811,7 @@
                   <a:srgbClr val="FFFFFF"/>
                 </a:solidFill>
               </a:rPr>
-              <a:t>   肝細胞癌的異質性和免疫抑制的腫瘤微環境對免疫治療反應產生負面影響，強調了針對腫瘤相關巨噬細胞的代謝調控的重要性。  </a:t>
+              <a:t>   Traditional Chinese Medicine may reverse immune checkpoint resistance through lactate metabolic reprogramming, offering novel therapeutic strategies for HCC.  </a:t>
             </a:r>
             <a:endParaRPr lang="en-US" sz="1200" dirty="0"/>
           </a:p>
@@ -3828,7 +3828,7 @@
                   <a:srgbClr val="FFFFFF"/>
                 </a:solidFill>
               </a:rPr>
-              <a:t>   *The heterogeneous and immunosuppressive tumor microenvironment in HCC negatively impacts immunotherapy responses, emphasizing the importance of metabolic regulation targeting tumor-associated macrophages.*</a:t>
+              <a:t>   傳統中醫可能通過乳酸代謝重編程逆轉免疫檢查點抗性，為肝細胞癌提供新型治療策略。</a:t>
             </a:r>
             <a:endParaRPr lang="en-US" sz="1200" dirty="0"/>
           </a:p>
@@ -3854,7 +3854,7 @@
                   <a:srgbClr val="FFFFFF"/>
                 </a:solidFill>
               </a:rPr>
-              <a:t>4. **局部消融的潛在角色**  </a:t>
+              <a:t>4. **Neddylation途徑的預後評估**  </a:t>
             </a:r>
             <a:endParaRPr lang="en-US" sz="1200" dirty="0"/>
           </a:p>
@@ -3871,7 +3871,7 @@
                   <a:srgbClr val="FFFFFF"/>
                 </a:solidFill>
               </a:rPr>
-              <a:t>   在初始疾病控制後，局部消融療法在無法切除的肝細胞癌患者中可能是一個有效的救援策略，值得進一步研究。  </a:t>
+              <a:t>   The Neddylation pathway's activation in HCC may serve as a prognostic marker and could enhance the efficacy of immunotherapy, indicating a need for further exploration.  </a:t>
             </a:r>
             <a:endParaRPr lang="en-US" sz="1200" dirty="0"/>
           </a:p>
@@ -3888,7 +3888,7 @@
                   <a:srgbClr val="FFFFFF"/>
                 </a:solidFill>
               </a:rPr>
-              <a:t>   *Ablation therapy may serve as an effective salvage strategy in patients with unresectable HCC after initial disease control, warranting further investigation.*</a:t>
+              <a:t>   Neddylation途徑在肝細胞癌中的活化可能作為預後標記，並可能增強免疫治療的療效，顯示出進一步探索的必要性。</a:t>
             </a:r>
             <a:endParaRPr lang="en-US" sz="1200" dirty="0"/>
           </a:p>
@@ -3914,7 +3914,7 @@
                   <a:srgbClr val="FFFFFF"/>
                 </a:solidFill>
               </a:rPr>
-              <a:t>5. **新療法的組合策略**  </a:t>
+              <a:t>5. **機器學習在安全性評估中的應用**  </a:t>
             </a:r>
             <a:endParaRPr lang="en-US" sz="1200" dirty="0"/>
           </a:p>
@@ -3931,24 +3931,7 @@
                   <a:srgbClr val="FFFFFF"/>
                 </a:solidFill>
               </a:rPr>
-              <a:t>   結合肝動脈灌注化療、lenvatinib和PD-L1抑制劑的策略顯示出在無法切除的肝細胞癌中的潛在療效，提示需探索多種治療組合的可能性。  </a:t>
-            </a:r>
-            <a:endParaRPr lang="en-US" sz="1200" dirty="0"/>
-          </a:p>
-          <a:p>
-            <a:pPr indent="0" marL="0">
-              <a:lnSpc>
-                <a:spcPct val="150000"/>
-              </a:lnSpc>
-              <a:buNone/>
-            </a:pPr>
-            <a:r>
-              <a:rPr lang="en-US" sz="1200" dirty="0">
-                <a:solidFill>
-                  <a:srgbClr val="FFFFFF"/>
-                </a:solidFill>
-              </a:rPr>
-              <a:t>   *Combination strategies of hepatic arterial infusion chemotherapy with lenvatinib and PD-L1 inhibitors show potential efficacy in unresectable HCC, indicating the need to explore various treatment combinations.*</a:t>
+              <a:t>   Machine learning-based hepatic safety scores can predict decompensation risks in HCC patients undergoing systemic therapy, highlighting the importance of personalized treatment approaches.</a:t>
             </a:r>
             <a:endParaRPr lang="en-US" sz="1200" dirty="0"/>
           </a:p>
@@ -4094,7 +4077,7 @@
                   <a:srgbClr val="FFFFFF"/>
                 </a:solidFill>
               </a:rPr>
-              <a:t>### 未來研究方向 (Future Research Directions)</a:t>
+              <a:t>基於機器學習的肝臟安全性評分能預測接受系統治療的肝細胞癌患者的脫補償風險，突顯個性化治療方法的重要性。</a:t>
             </a:r>
             <a:endParaRPr lang="en-US" sz="1200" dirty="0"/>
           </a:p>
@@ -4120,7 +4103,7 @@
                   <a:srgbClr val="FFFFFF"/>
                 </a:solidFill>
               </a:rPr>
-              <a:t>1. **長期療效的評估**  </a:t>
+              <a:t>### 未來研究方向（Future Research Directions）</a:t>
             </a:r>
             <a:endParaRPr lang="en-US" sz="1200" dirty="0"/>
           </a:p>
@@ -4131,14 +4114,6 @@
               </a:lnSpc>
               <a:buNone/>
             </a:pPr>
-            <a:r>
-              <a:rPr lang="en-US" sz="1200" dirty="0">
-                <a:solidFill>
-                  <a:srgbClr val="FFFFFF"/>
-                </a:solidFill>
-              </a:rPr>
-              <a:t>   需要進一步的長期隨訪研究，以評估免疫治療在不同階段肝細胞癌患者中的持久療效和安全性。  </a:t>
-            </a:r>
             <a:endParaRPr lang="en-US" sz="1200" dirty="0"/>
           </a:p>
           <a:p>
@@ -4154,7 +4129,7 @@
                   <a:srgbClr val="FFFFFF"/>
                 </a:solidFill>
               </a:rPr>
-              <a:t>   *Further long-term follow-up studies are needed to assess the durability and safety of immunotherapy in patients with hepatocellular carcinoma at various stages.*</a:t>
+              <a:t>1. **擴大免疫治療的適應症**  </a:t>
             </a:r>
             <a:endParaRPr lang="en-US" sz="1200" dirty="0"/>
           </a:p>
@@ -4165,6 +4140,14 @@
               </a:lnSpc>
               <a:buNone/>
             </a:pPr>
+            <a:r>
+              <a:rPr lang="en-US" sz="1200" dirty="0">
+                <a:solidFill>
+                  <a:srgbClr val="FFFFFF"/>
+                </a:solidFill>
+              </a:rPr>
+              <a:t>   Future studies should investigate the efficacy of immune checkpoint inhibitors in broader HCC populations, particularly those with portal vein tumor thrombosis and other high-risk features.  </a:t>
+            </a:r>
             <a:endParaRPr lang="en-US" sz="1200" dirty="0"/>
           </a:p>
           <a:p>
@@ -4180,7 +4163,7 @@
                   <a:srgbClr val="FFFFFF"/>
                 </a:solidFill>
               </a:rPr>
-              <a:t>2. **免疫相關不良事件的機制研究**  </a:t>
+              <a:t>   未來研究應探討免疫檢查點抑制劑在更廣泛肝細胞癌人群中的療效，特別是那些具有門靜脈腫瘤血栓和其他高風險特徵的患者。</a:t>
             </a:r>
             <a:endParaRPr lang="en-US" sz="1200" dirty="0"/>
           </a:p>
@@ -4191,14 +4174,6 @@
               </a:lnSpc>
               <a:buNone/>
             </a:pPr>
-            <a:r>
-              <a:rPr lang="en-US" sz="1200" dirty="0">
-                <a:solidFill>
-                  <a:srgbClr val="FFFFFF"/>
-                </a:solidFill>
-              </a:rPr>
-              <a:t>   探索免疫相關不良事件的生物學機制，以改善治療策略並降低排斥反應的風險。  </a:t>
-            </a:r>
             <a:endParaRPr lang="en-US" sz="1200" dirty="0"/>
           </a:p>
           <a:p>
@@ -4214,7 +4189,7 @@
                   <a:srgbClr val="FFFFFF"/>
                 </a:solidFill>
               </a:rPr>
-              <a:t>   *Investigating the biological mechanisms of immune-related adverse events could improve treatment strategies and reduce the risk of rejection.*</a:t>
+              <a:t>2. **中醫與現代療法的結合**  </a:t>
             </a:r>
             <a:endParaRPr lang="en-US" sz="1200" dirty="0"/>
           </a:p>
@@ -4225,6 +4200,14 @@
               </a:lnSpc>
               <a:buNone/>
             </a:pPr>
+            <a:r>
+              <a:rPr lang="en-US" sz="1200" dirty="0">
+                <a:solidFill>
+                  <a:srgbClr val="FFFFFF"/>
+                </a:solidFill>
+              </a:rPr>
+              <a:t>   Research should explore the synergistic effects of Traditional Chinese Medicine combined with modern immunotherapies to enhance treatment outcomes in HCC.  </a:t>
+            </a:r>
             <a:endParaRPr lang="en-US" sz="1200" dirty="0"/>
           </a:p>
           <a:p>
@@ -4240,7 +4223,7 @@
                   <a:srgbClr val="FFFFFF"/>
                 </a:solidFill>
               </a:rPr>
-              <a:t>3. **腫瘤微環境的調控**  </a:t>
+              <a:t>   研究應探討傳統中醫與現代免疫療法結合的協同效應，以提升肝細胞癌的治療效果。</a:t>
             </a:r>
             <a:endParaRPr lang="en-US" sz="1200" dirty="0"/>
           </a:p>
@@ -4251,14 +4234,6 @@
               </a:lnSpc>
               <a:buNone/>
             </a:pPr>
-            <a:r>
-              <a:rPr lang="en-US" sz="1200" dirty="0">
-                <a:solidFill>
-                  <a:srgbClr val="FFFFFF"/>
-                </a:solidFill>
-              </a:rPr>
-              <a:t>   研究針對腫瘤微環境的干預措施，以克服免疫抑制並提高免疫治療的療效。  </a:t>
-            </a:r>
             <a:endParaRPr lang="en-US" sz="1200" dirty="0"/>
           </a:p>
           <a:p>
@@ -4274,7 +4249,7 @@
                   <a:srgbClr val="FFFFFF"/>
                 </a:solidFill>
               </a:rPr>
-              <a:t>   *Researching interventions targeting the tumor microenvironment could overcome immunosuppression and enhance the efficacy of immunotherapy.*</a:t>
+              <a:t>3. **Neddylation途徑的深入分析**  </a:t>
             </a:r>
             <a:endParaRPr lang="en-US" sz="1200" dirty="0"/>
           </a:p>
@@ -4285,6 +4260,14 @@
               </a:lnSpc>
               <a:buNone/>
             </a:pPr>
+            <a:r>
+              <a:rPr lang="en-US" sz="1200" dirty="0">
+                <a:solidFill>
+                  <a:srgbClr val="FFFFFF"/>
+                </a:solidFill>
+              </a:rPr>
+              <a:t>   Further investigation into the Neddylation pathway's role in HCC progression and its potential as a therapeutic target is warranted.  </a:t>
+            </a:r>
             <a:endParaRPr lang="en-US" sz="1200" dirty="0"/>
           </a:p>
           <a:p>
@@ -4300,7 +4283,7 @@
                   <a:srgbClr val="FFFFFF"/>
                 </a:solidFill>
               </a:rPr>
-              <a:t>4. **局部消融與系統治療的整合**  </a:t>
+              <a:t>   需要進一步研究Neddylation途徑在肝細胞癌進展中的作用及其作為治療靶點的潛力。</a:t>
             </a:r>
             <a:endParaRPr lang="en-US" sz="1200" dirty="0"/>
           </a:p>
@@ -4311,14 +4294,6 @@
               </a:lnSpc>
               <a:buNone/>
             </a:pPr>
-            <a:r>
-              <a:rPr lang="en-US" sz="1200" dirty="0">
-                <a:solidFill>
-                  <a:srgbClr val="FFFFFF"/>
-                </a:solidFill>
-              </a:rPr>
-              <a:t>   評估局部消融療法與系統性治療的整合策略，以改善無法切除肝細胞癌患者的預後。  </a:t>
-            </a:r>
             <a:endParaRPr lang="en-US" sz="1200" dirty="0"/>
           </a:p>
           <a:p>
@@ -4334,7 +4309,7 @@
                   <a:srgbClr val="FFFFFF"/>
                 </a:solidFill>
               </a:rPr>
-              <a:t>   *Evaluating integrated strategies of ablation therapy with systemic treatments could improve outcomes for patients with unresectable HCC.*</a:t>
+              <a:t>4. **個性化治療策略的發展**  </a:t>
             </a:r>
             <a:endParaRPr lang="en-US" sz="1200" dirty="0"/>
           </a:p>
@@ -4345,6 +4320,14 @@
               </a:lnSpc>
               <a:buNone/>
             </a:pPr>
+            <a:r>
+              <a:rPr lang="en-US" sz="1200" dirty="0">
+                <a:solidFill>
+                  <a:srgbClr val="FFFFFF"/>
+                </a:solidFill>
+              </a:rPr>
+              <a:t>   Developing personalized treatment strategies using machine learning models to predict patient outcomes and optimize therapeutic regimens in HCC is essential.  </a:t>
+            </a:r>
             <a:endParaRPr lang="en-US" sz="1200" dirty="0"/>
           </a:p>
           <a:p>
@@ -4360,7 +4343,7 @@
                   <a:srgbClr val="FFFFFF"/>
                 </a:solidFill>
               </a:rPr>
-              <a:t>5. **新型生物標記的發現**  </a:t>
+              <a:t>   開發使用機器學習模型的個性化治療策略，以預測患者結果並優化肝細胞癌的治療方案至關重要。</a:t>
             </a:r>
             <a:endParaRPr lang="en-US" sz="1200" dirty="0"/>
           </a:p>
@@ -4371,14 +4354,6 @@
               </a:lnSpc>
               <a:buNone/>
             </a:pPr>
-            <a:r>
-              <a:rPr lang="en-US" sz="1200" dirty="0">
-                <a:solidFill>
-                  <a:srgbClr val="FFFFFF"/>
-                </a:solidFill>
-              </a:rPr>
-              <a:t>   開發新的生物標記以預測免疫治療和靶向治療的反應，從而個性化治療方案。  </a:t>
-            </a:r>
             <a:endParaRPr lang="en-US" sz="1200" dirty="0"/>
           </a:p>
           <a:p>
@@ -4394,7 +4369,41 @@
                   <a:srgbClr val="FFFFFF"/>
                 </a:solidFill>
               </a:rPr>
-              <a:t>   *Developing new biomarkers to predict responses to immunotherapy and targeted therapies could facilitate personalized treatment approaches.*</a:t>
+              <a:t>5. **長期療效的持續評估**  </a:t>
+            </a:r>
+            <a:endParaRPr lang="en-US" sz="1200" dirty="0"/>
+          </a:p>
+          <a:p>
+            <a:pPr indent="0" marL="0">
+              <a:lnSpc>
+                <a:spcPct val="150000"/>
+              </a:lnSpc>
+              <a:buNone/>
+            </a:pPr>
+            <a:r>
+              <a:rPr lang="en-US" sz="1200" dirty="0">
+                <a:solidFill>
+                  <a:srgbClr val="FFFFFF"/>
+                </a:solidFill>
+              </a:rPr>
+              <a:t>   Longitudinal studies are needed to assess the durability of responses to combination therapies in HCC and their impact on overall survival.  </a:t>
+            </a:r>
+            <a:endParaRPr lang="en-US" sz="1200" dirty="0"/>
+          </a:p>
+          <a:p>
+            <a:pPr indent="0" marL="0">
+              <a:lnSpc>
+                <a:spcPct val="150000"/>
+              </a:lnSpc>
+              <a:buNone/>
+            </a:pPr>
+            <a:r>
+              <a:rPr lang="en-US" sz="1200" dirty="0">
+                <a:solidFill>
+                  <a:srgbClr val="FFFFFF"/>
+                </a:solidFill>
+              </a:rPr>
+              <a:t>   需要進行縱向研究來評估肝細胞癌中聯合療法反應的持久性及其對整體生存的影響。</a:t>
             </a:r>
             <a:endParaRPr lang="en-US" sz="1200" dirty="0"/>
           </a:p>
@@ -4667,7 +4676,7 @@
                 <a:ea typeface="Arial" pitchFamily="34" charset="-122"/>
                 <a:cs typeface="Arial" pitchFamily="34" charset="-120"/>
               </a:rPr>
-              <a:t>Pembrolizumab Monotherapy in Sorafenib-Treated and Treatment-Na&amp;#xef;ve Advanced…</a:t>
+              <a:t>Outcomes of Patients With Hepatocellular Carcinoma Treated With Durvalumab Plus …</a:t>
             </a:r>
             <a:endParaRPr lang="en-US" sz="1400" dirty="0"/>
           </a:p>
@@ -4704,7 +4713,7 @@
                 <a:ea typeface="Arial" pitchFamily="34" charset="-122"/>
                 <a:cs typeface="Arial" pitchFamily="34" charset="-120"/>
               </a:rPr>
-              <a:t>Immune-related adverse events are a potent predictor of post-transplant rejectio…</a:t>
+              <a:t>Five years after IMbrave150 with clinical integration of atezolizumab plus bevac…</a:t>
             </a:r>
             <a:endParaRPr lang="en-US" sz="1400" dirty="0"/>
           </a:p>
@@ -4741,7 +4750,7 @@
                 <a:ea typeface="Arial" pitchFamily="34" charset="-122"/>
                 <a:cs typeface="Arial" pitchFamily="34" charset="-120"/>
               </a:rPr>
-              <a:t>BCAT1 inhibits crotonate-related epigenetic modulation of metabolic genes in tum…</a:t>
+              <a:t>Durvalumab plus HAIC-FOLFOX followed by maintenance durvalumab for hepatocellula…</a:t>
             </a:r>
             <a:endParaRPr lang="en-US" sz="1400" dirty="0"/>
           </a:p>
@@ -4778,7 +4787,7 @@
                 <a:ea typeface="Arial" pitchFamily="34" charset="-122"/>
                 <a:cs typeface="Arial" pitchFamily="34" charset="-120"/>
               </a:rPr>
-              <a:t>Ablation-Based Salvage Strategy at Disease Progression After Initial Disease Con…</a:t>
+              <a:t>Traditional Chinese Medicine Reverses Immune Checkpoint Resistance Through Lacta…</a:t>
             </a:r>
             <a:endParaRPr lang="en-US" sz="1400" dirty="0"/>
           </a:p>
@@ -4815,7 +4824,7 @@
                 <a:ea typeface="Arial" pitchFamily="34" charset="-122"/>
                 <a:cs typeface="Arial" pitchFamily="34" charset="-120"/>
               </a:rPr>
-              <a:t>HILL: the efficacy and safety of hepatic arterial infusion chemotherapy with the…</a:t>
+              <a:t>Identifying Neddylation-modified features to assess prognosis and immune efficac…</a:t>
             </a:r>
             <a:endParaRPr lang="en-US" sz="1400" dirty="0"/>
           </a:p>
@@ -4926,7 +4935,7 @@
                 <a:ea typeface="Arial" pitchFamily="34" charset="-122"/>
                 <a:cs typeface="Arial" pitchFamily="34" charset="-120"/>
               </a:rPr>
-              <a:t>Second-Line TKI after First-Line Immunotherapy-based Treatment in Advanced HCC: …</a:t>
+              <a:t>Breakthroughs in HBV-related HCC Therapy: The Unmatched Potential of Immune Chec…</a:t>
             </a:r>
             <a:endParaRPr lang="en-US" sz="1400" dirty="0"/>
           </a:p>
@@ -4963,7 +4972,7 @@
                 <a:ea typeface="Arial" pitchFamily="34" charset="-122"/>
                 <a:cs typeface="Arial" pitchFamily="34" charset="-120"/>
               </a:rPr>
-              <a:t>Electronic symptom monitoring of patient-reported outcomes among patients with h…</a:t>
+              <a:t>Machine learning based hepatic safety score predicts decompensation in hepatocel…</a:t>
             </a:r>
             <a:endParaRPr lang="en-US" sz="1400" dirty="0"/>
           </a:p>
@@ -5000,7 +5009,7 @@
                 <a:ea typeface="Arial" pitchFamily="34" charset="-122"/>
                 <a:cs typeface="Arial" pitchFamily="34" charset="-120"/>
               </a:rPr>
-              <a:t>Plasma interleukin-8 as a predictive biomarker for tyrosine kinase inhibitor res…</a:t>
+              <a:t>Less Is More: A Single-Dose, Non-Waiting Neoadjuvant Immunotherapy Strategy for …</a:t>
             </a:r>
             <a:endParaRPr lang="en-US" sz="1400" dirty="0"/>
           </a:p>
@@ -5155,7 +5164,7 @@
                   </a:extLst>
                 </a:hlinkClick>
               </a:rPr>
-              <a:t>Pembrolizumab Monotherapy in Sorafenib-Treated and Treatment-Na&amp;#xef;ve Advanced Hepatocellular Carcinoma: Long-Term Follow-up of the Open-Label, Phase II KEYNOTE-224 Study.</a:t>
+              <a:t>Outcomes of Patients With Hepatocellular Carcinoma Treated With Durvalumab Plus Tremelimumab in Real-World Clinical Practice Who Met or Did Not Meet the Inclusion Criteria for the Phase 3 HIMALAYA Trial.</a:t>
             </a:r>
             <a:endParaRPr lang="en-US" sz="2400" dirty="0"/>
           </a:p>
@@ -5191,7 +5200,7 @@
                   <a:srgbClr val="888888"/>
                 </a:solidFill>
               </a:rPr>
-              <a:t>Clinical cancer research : an official journal of the American Association for Cancer Research  ·  IF 11.5  ·  RCT Phase 2  ·  🌏 Asia</a:t>
+              <a:t>Journal of gastroenterology and hepatology  ·  RCT Phase 3  ·  🌏 Asia</a:t>
             </a:r>
             <a:endParaRPr lang="en-US" sz="1000" dirty="0"/>
           </a:p>
@@ -5234,7 +5243,7 @@
                 <a:ea typeface="Microsoft JhengHei" pitchFamily="34" charset="-122"/>
                 <a:cs typeface="Microsoft JhengHei" pitchFamily="34" charset="-120"/>
               </a:rPr>
-              <a:t>Pembrolizumab顯示持久抗腫瘤活性。</a:t>
+              <a:t>研究Durvalumab與Tremelimumab在HCC的效果</a:t>
             </a:r>
             <a:endParaRPr lang="en-US" sz="1800" dirty="0"/>
           </a:p>
@@ -5255,7 +5264,7 @@
                 <a:ea typeface="Microsoft JhengHei" pitchFamily="34" charset="-122"/>
                 <a:cs typeface="Microsoft JhengHei" pitchFamily="34" charset="-120"/>
               </a:rPr>
-              <a:t>第一組中位OS：13.2個月。</a:t>
+              <a:t>412名患者於30個機構接受治療</a:t>
             </a:r>
             <a:endParaRPr lang="en-US" sz="1800" dirty="0"/>
           </a:p>
@@ -5276,7 +5285,7 @@
                 <a:ea typeface="Microsoft JhengHei" pitchFamily="34" charset="-122"/>
                 <a:cs typeface="Microsoft JhengHei" pitchFamily="34" charset="-120"/>
               </a:rPr>
-              <a:t>第一組中位PFS：4.9個月。</a:t>
+              <a:t>HIMALAYA組PFS和OS較佳</a:t>
             </a:r>
             <a:endParaRPr lang="en-US" sz="1800" dirty="0"/>
           </a:p>
@@ -5297,7 +5306,7 @@
                 <a:ea typeface="Microsoft JhengHei" pitchFamily="34" charset="-122"/>
                 <a:cs typeface="Microsoft JhengHei" pitchFamily="34" charset="-120"/>
               </a:rPr>
-              <a:t>隨訪時間長達約7年。</a:t>
+              <a:t>獨立預測因子：BMI、門靜脈侵襲</a:t>
             </a:r>
             <a:endParaRPr lang="en-US" sz="1800" dirty="0"/>
           </a:p>
@@ -5318,7 +5327,7 @@
                 <a:ea typeface="Microsoft JhengHei" pitchFamily="34" charset="-122"/>
                 <a:cs typeface="Microsoft JhengHei" pitchFamily="34" charset="-120"/>
               </a:rPr>
-              <a:t>安全性可控，副作用可接受。</a:t>
+              <a:t>內分泌功能障礙在HIMALAYA組較常見</a:t>
             </a:r>
             <a:endParaRPr lang="en-US" sz="1800" dirty="0"/>
           </a:p>
@@ -5354,7 +5363,7 @@
                   <a:srgbClr val="888888"/>
                 </a:solidFill>
               </a:rPr>
-              <a:t>Finn Richard S, Kudo Masatoshi, Borbath Ivan et al.. Clinical cancer research : an official journal of the American Association for Cancer Research. 2026-05-15 DOI: 10.1158/1078-0432.CCR-25-3528</a:t>
+              <a:t>Matono Tomomitsu, Tada Toshifumi, Hiraoka Atsushi et al.. Journal of gastroenterology and hepatology. 2026-05-23 DOI: 10.1111/jgh.70422</a:t>
             </a:r>
             <a:endParaRPr lang="en-US" sz="800" dirty="0"/>
           </a:p>
@@ -5554,7 +5563,7 @@
                   </a:extLst>
                 </a:hlinkClick>
               </a:rPr>
-              <a:t>Immune-related adverse events are a potent predictor of post-transplant rejection in HCC: a multicentre retrospective cohort study.</a:t>
+              <a:t>Five years after IMbrave150 with clinical integration of atezolizumab plus bevacizumab in hepatocellular carcinoma.</a:t>
             </a:r>
             <a:endParaRPr lang="en-US" sz="2400" dirty="0"/>
           </a:p>
@@ -5590,7 +5599,7 @@
                   <a:srgbClr val="888888"/>
                 </a:solidFill>
               </a:rPr>
-              <a:t>Gut  ·  IF 24.5  ·  Retrospective Study</a:t>
+              <a:t>Annals of hepatology  ·  RCT Phase 3  ·  🌏 Asia</a:t>
             </a:r>
             <a:endParaRPr lang="en-US" sz="1000" dirty="0"/>
           </a:p>
@@ -5633,7 +5642,7 @@
                 <a:ea typeface="Microsoft JhengHei" pitchFamily="34" charset="-122"/>
                 <a:cs typeface="Microsoft JhengHei" pitchFamily="34" charset="-120"/>
               </a:rPr>
-              <a:t>ICIs 增加移植後排斥風險。</a:t>
+              <a:t>Atezolizumab加Bevacizumab為一線療法。</a:t>
             </a:r>
             <a:endParaRPr lang="en-US" sz="1800" dirty="0"/>
           </a:p>
@@ -5654,7 +5663,7 @@
                 <a:ea typeface="Microsoft JhengHei" pitchFamily="34" charset="-122"/>
                 <a:cs typeface="Microsoft JhengHei" pitchFamily="34" charset="-120"/>
               </a:rPr>
-              <a:t>irAEs 強烈預測移植後排斥。</a:t>
+              <a:t>高反應率可促進治癒轉化。</a:t>
             </a:r>
             <a:endParaRPr lang="en-US" sz="1800" dirty="0"/>
           </a:p>
@@ -5675,7 +5684,49 @@
                 <a:ea typeface="Microsoft JhengHei" pitchFamily="34" charset="-122"/>
                 <a:cs typeface="Microsoft JhengHei" pitchFamily="34" charset="-120"/>
               </a:rPr>
-              <a:t>預測模型 AUC 達 0.788。</a:t>
+              <a:t>出血風險需主動管理。</a:t>
+            </a:r>
+            <a:endParaRPr lang="en-US" sz="1800" dirty="0"/>
+          </a:p>
+          <a:p>
+            <a:pPr marL="342900" indent="-342900">
+              <a:spcAft>
+                <a:spcPts val="800"/>
+              </a:spcAft>
+              <a:buSzPct val="100000"/>
+              <a:buChar char="•"/>
+            </a:pPr>
+            <a:r>
+              <a:rPr lang="en-US" sz="1800" dirty="0">
+                <a:solidFill>
+                  <a:srgbClr val="333333"/>
+                </a:solidFill>
+                <a:latin typeface="Microsoft JhengHei" pitchFamily="34" charset="0"/>
+                <a:ea typeface="Microsoft JhengHei" pitchFamily="34" charset="-122"/>
+                <a:cs typeface="Microsoft JhengHei" pitchFamily="34" charset="-120"/>
+              </a:rPr>
+              <a:t>與局部治療的結合顯示潛力。</a:t>
+            </a:r>
+            <a:endParaRPr lang="en-US" sz="1800" dirty="0"/>
+          </a:p>
+          <a:p>
+            <a:pPr marL="342900" indent="-342900">
+              <a:spcAft>
+                <a:spcPts val="800"/>
+              </a:spcAft>
+              <a:buSzPct val="100000"/>
+              <a:buChar char="•"/>
+            </a:pPr>
+            <a:r>
+              <a:rPr lang="en-US" sz="1800" dirty="0">
+                <a:solidFill>
+                  <a:srgbClr val="333333"/>
+                </a:solidFill>
+                <a:latin typeface="Microsoft JhengHei" pitchFamily="34" charset="0"/>
+                <a:ea typeface="Microsoft JhengHei" pitchFamily="34" charset="-122"/>
+                <a:cs typeface="Microsoft JhengHei" pitchFamily="34" charset="-120"/>
+              </a:rPr>
+              <a:t>生物標記和序列仍有關鍵缺口。</a:t>
             </a:r>
             <a:endParaRPr lang="en-US" sz="1800" dirty="0"/>
           </a:p>
@@ -5711,7 +5762,7 @@
                   <a:srgbClr val="888888"/>
                 </a:solidFill>
               </a:rPr>
-              <a:t>Fang Jun, Zhong Siyi, Wang Tielong et al.. Gut. 2026-05-12 DOI: 10.1136/gutjnl-2025-336719</a:t>
+              <a:t>Lai Kuan-Chang, Chen San-Chi. Annals of hepatology. 2026-05-19 DOI: 10.1016/j.aohep.2026.102237</a:t>
             </a:r>
             <a:endParaRPr lang="en-US" sz="800" dirty="0"/>
           </a:p>
@@ -5911,7 +5962,7 @@
                   </a:extLst>
                 </a:hlinkClick>
               </a:rPr>
-              <a:t>BCAT1 inhibits crotonate-related epigenetic modulation of metabolic genes in tumor-associated macrophages to counter immunosuppression.</a:t>
+              <a:t>Durvalumab plus HAIC-FOLFOX followed by maintenance durvalumab for hepatocellular carcinoma with major portal invasion: phase 2 DurHope study.</a:t>
             </a:r>
             <a:endParaRPr lang="en-US" sz="2400" dirty="0"/>
           </a:p>
@@ -5947,7 +5998,7 @@
                   <a:srgbClr val="888888"/>
                 </a:solidFill>
               </a:rPr>
-              <a:t>Nature communications  ·  IF 14.7  ·  Basic Research</a:t>
+              <a:t>Nature communications  ·  IF 14.7  ·  RCT Phase 2</a:t>
             </a:r>
             <a:endParaRPr lang="en-US" sz="1000" dirty="0"/>
           </a:p>
@@ -5990,7 +6041,7 @@
                 <a:ea typeface="Microsoft JhengHei" pitchFamily="34" charset="-122"/>
                 <a:cs typeface="Microsoft JhengHei" pitchFamily="34" charset="-120"/>
               </a:rPr>
-              <a:t>BCAT1在TAM中作為代謝檢查點。</a:t>
+              <a:t>Durvalumab加HAIC-FOLFOX顯示潛力。</a:t>
             </a:r>
             <a:endParaRPr lang="en-US" sz="1800" dirty="0"/>
           </a:p>
@@ -6011,7 +6062,7 @@
                 <a:ea typeface="Microsoft JhengHei" pitchFamily="34" charset="-122"/>
                 <a:cs typeface="Microsoft JhengHei" pitchFamily="34" charset="-120"/>
               </a:rPr>
-              <a:t>BCAT1缺失增加crotonate和免疫抑制。</a:t>
+              <a:t>1年整體存活率為63.3%。</a:t>
             </a:r>
             <a:endParaRPr lang="en-US" sz="1800" dirty="0"/>
           </a:p>
@@ -6032,7 +6083,7 @@
                 <a:ea typeface="Microsoft JhengHei" pitchFamily="34" charset="-122"/>
                 <a:cs typeface="Microsoft JhengHei" pitchFamily="34" charset="-120"/>
               </a:rPr>
-              <a:t>BCAT1+巨噬細胞增強抗腫瘤免疫。</a:t>
+              <a:t>腫瘤RNA測序顯示耐藥特徵。</a:t>
             </a:r>
             <a:endParaRPr lang="en-US" sz="1800" dirty="0"/>
           </a:p>
@@ -6053,7 +6104,7 @@
                 <a:ea typeface="Microsoft JhengHei" pitchFamily="34" charset="-122"/>
                 <a:cs typeface="Microsoft JhengHei" pitchFamily="34" charset="-120"/>
               </a:rPr>
-              <a:t>髓系BCAT1過表達改善抗-PD1療法。</a:t>
+              <a:t>反應者免疫浸潤增加。</a:t>
             </a:r>
             <a:endParaRPr lang="en-US" sz="1800" dirty="0"/>
           </a:p>
@@ -6074,7 +6125,7 @@
                 <a:ea typeface="Microsoft JhengHei" pitchFamily="34" charset="-122"/>
                 <a:cs typeface="Microsoft JhengHei" pitchFamily="34" charset="-120"/>
               </a:rPr>
-              <a:t>針對BCAT1可增強免疫療法反應。</a:t>
+              <a:t>治療後T細胞擴展明顯。</a:t>
             </a:r>
             <a:endParaRPr lang="en-US" sz="1800" dirty="0"/>
           </a:p>
@@ -6110,7 +6161,7 @@
                   <a:srgbClr val="888888"/>
                 </a:solidFill>
               </a:rPr>
-              <a:t>Zhang Weizhi, Liang Shuhang, Han Sitao et al.. Nature communications. 2026-05-11 DOI: 10.1038/s41467-026-72814-w</a:t>
+              <a:t>Yi Junzhe, Wang Jiongliang, Zhang Yimin et al.. Nature communications. 2026-05-18 DOI: 10.1038/s41467-026-73131-y</a:t>
             </a:r>
             <a:endParaRPr lang="en-US" sz="800" dirty="0"/>
           </a:p>
@@ -6310,7 +6361,7 @@
                   </a:extLst>
                 </a:hlinkClick>
               </a:rPr>
-              <a:t>Ablation-Based Salvage Strategy at Disease Progression After Initial Disease Control With Atezolizumab/Bevacizumab in Hepatocellular Carcinoma.</a:t>
+              <a:t>Traditional Chinese Medicine Reverses Immune Checkpoint Resistance Through Lactate Metabolic Reprogramming in Hepatocellular Carcinoma: Mechanisms and Therapeutic Implications.</a:t>
             </a:r>
             <a:endParaRPr lang="en-US" sz="2400" dirty="0"/>
           </a:p>
@@ -6346,7 +6397,7 @@
                   <a:srgbClr val="888888"/>
                 </a:solidFill>
               </a:rPr>
-              <a:t>Hepatology research : the official journal of the Japan Society of Hepatology  ·  Prospective Study  ·  🌏 Asia</a:t>
+              <a:t>Journal of ethnopharmacology  ·  RCT Phase 3</a:t>
             </a:r>
             <a:endParaRPr lang="en-US" sz="1000" dirty="0"/>
           </a:p>
@@ -6389,7 +6440,7 @@
                 <a:ea typeface="Microsoft JhengHei" pitchFamily="34" charset="-122"/>
                 <a:cs typeface="Microsoft JhengHei" pitchFamily="34" charset="-120"/>
               </a:rPr>
-              <a:t>Atez/Bev 可達疾病控制。</a:t>
+              <a:t>中醫藥改變乳酸代謝</a:t>
             </a:r>
             <a:endParaRPr lang="en-US" sz="1800" dirty="0"/>
           </a:p>
@@ -6410,7 +6461,7 @@
                 <a:ea typeface="Microsoft JhengHei" pitchFamily="34" charset="-122"/>
                 <a:cs typeface="Microsoft JhengHei" pitchFamily="34" charset="-120"/>
               </a:rPr>
-              <a:t>進展後考慮進行消融。</a:t>
+              <a:t>乳酸升高與免疫抵抗相關</a:t>
             </a:r>
             <a:endParaRPr lang="en-US" sz="1800" dirty="0"/>
           </a:p>
@@ -6431,7 +6482,7 @@
                 <a:ea typeface="Microsoft JhengHei" pitchFamily="34" charset="-122"/>
                 <a:cs typeface="Microsoft JhengHei" pitchFamily="34" charset="-120"/>
               </a:rPr>
-              <a:t>消融組PPS顯著延長。</a:t>
+              <a:t>Icaritin在三期試驗中顯示潛力</a:t>
             </a:r>
             <a:endParaRPr lang="en-US" sz="1800" dirty="0"/>
           </a:p>
@@ -6452,7 +6503,7 @@
                 <a:ea typeface="Microsoft JhengHei" pitchFamily="34" charset="-122"/>
                 <a:cs typeface="Microsoft JhengHei" pitchFamily="34" charset="-120"/>
               </a:rPr>
-              <a:t>OS顯示消融有趨勢優勢。</a:t>
+              <a:t>選擇性MCT4抑制增強抗PD-1</a:t>
             </a:r>
             <a:endParaRPr lang="en-US" sz="1800" dirty="0"/>
           </a:p>
@@ -6473,7 +6524,7 @@
                 <a:ea typeface="Microsoft JhengHei" pitchFamily="34" charset="-122"/>
                 <a:cs typeface="Microsoft JhengHei" pitchFamily="34" charset="-120"/>
               </a:rPr>
-              <a:t>需進一步驗證結果。</a:t>
+              <a:t>需進行生物標記豐富的組合試驗</a:t>
             </a:r>
             <a:endParaRPr lang="en-US" sz="1800" dirty="0"/>
           </a:p>
@@ -6509,7 +6560,7 @@
                   <a:srgbClr val="888888"/>
                 </a:solidFill>
               </a:rPr>
-              <a:t>Kariyama Kazuya, Nouso Kazuhiro, Hiraoka Atsushi et al.. Hepatology research : the official journal of the Japan Society of Hepatology. 2026-05-11 DOI: 10.1111/hepr.70193</a:t>
+              <a:t>Liu Lihui, Wang Jingxiao, Hu Kaiwen. Journal of ethnopharmacology. 2026-05-24 DOI: 10.1016/j.jep.2026.121885</a:t>
             </a:r>
             <a:endParaRPr lang="en-US" sz="800" dirty="0"/>
           </a:p>
@@ -6709,7 +6760,7 @@
                   </a:extLst>
                 </a:hlinkClick>
               </a:rPr>
-              <a:t>HILL: the efficacy and safety of hepatic arterial infusion chemotherapy with the FOLFOX regimen combined with lenvatinib and the PD-L1 inhibitor durvalumab in unresectable hepatocellular carcinoma: a prospective, single-arm, phase 2 clinical trial.</a:t>
+              <a:t>Identifying Neddylation-modified features to assess prognosis and immune efficacy in hepatocellular carcinoma.</a:t>
             </a:r>
             <a:endParaRPr lang="en-US" sz="2400" dirty="0"/>
           </a:p>
@@ -6745,7 +6796,7 @@
                   <a:srgbClr val="888888"/>
                 </a:solidFill>
               </a:rPr>
-              <a:t>Signal transduction and targeted therapy  ·  RCT Phase 2</a:t>
+              <a:t>Apoptosis : an international journal on programmed cell death  ·  Basic Research  ·  🌏 Asia</a:t>
             </a:r>
             <a:endParaRPr lang="en-US" sz="1000" dirty="0"/>
           </a:p>
@@ -6788,7 +6839,7 @@
                 <a:ea typeface="Microsoft JhengHei" pitchFamily="34" charset="-122"/>
                 <a:cs typeface="Microsoft JhengHei" pitchFamily="34" charset="-120"/>
               </a:rPr>
-              <a:t>針對uHCC治療效果研究</a:t>
+              <a:t>Neddylation途徑在HCC中活化。</a:t>
             </a:r>
             <a:endParaRPr lang="en-US" sz="1800" dirty="0"/>
           </a:p>
@@ -6809,7 +6860,7 @@
                 <a:ea typeface="Microsoft JhengHei" pitchFamily="34" charset="-122"/>
                 <a:cs typeface="Microsoft JhengHei" pitchFamily="34" charset="-120"/>
               </a:rPr>
-              <a:t>三重組合療法：FOLFOX-HAIC、lenvatinib、durvalumab</a:t>
+              <a:t>MLN4924抑制HCC細胞增殖與遷移。</a:t>
             </a:r>
             <a:endParaRPr lang="en-US" sz="1800" dirty="0"/>
           </a:p>
@@ -6830,7 +6881,7 @@
                 <a:ea typeface="Microsoft JhengHei" pitchFamily="34" charset="-122"/>
                 <a:cs typeface="Microsoft JhengHei" pitchFamily="34" charset="-120"/>
               </a:rPr>
-              <a:t>中位無進展生存期15.8個月</a:t>
+              <a:t>高NRS與預後不良相關。</a:t>
             </a:r>
             <a:endParaRPr lang="en-US" sz="1800" dirty="0"/>
           </a:p>
@@ -6851,7 +6902,7 @@
                 <a:ea typeface="Microsoft JhengHei" pitchFamily="34" charset="-122"/>
                 <a:cs typeface="Microsoft JhengHei" pitchFamily="34" charset="-120"/>
               </a:rPr>
-              <a:t>客觀反應率達75.0%</a:t>
+              <a:t>PSMD1敲除降低HCC細胞增殖。</a:t>
             </a:r>
             <a:endParaRPr lang="en-US" sz="1800" dirty="0"/>
           </a:p>
@@ -6872,7 +6923,7 @@
                 <a:ea typeface="Microsoft JhengHei" pitchFamily="34" charset="-122"/>
                 <a:cs typeface="Microsoft JhengHei" pitchFamily="34" charset="-120"/>
               </a:rPr>
-              <a:t>安全性以1-2級不良事件為主</a:t>
+              <a:t>Neddylation特徵預測免疫療效。</a:t>
             </a:r>
             <a:endParaRPr lang="en-US" sz="1800" dirty="0"/>
           </a:p>
@@ -6908,7 +6959,7 @@
                   <a:srgbClr val="888888"/>
                 </a:solidFill>
               </a:rPr>
-              <a:t>Li Shao-Hua, Zuo Zhi-Jun, Lu Liang-He et al.. Signal transduction and targeted therapy. 2026-05-14 DOI: 10.1038/s41392-026-02718-0</a:t>
+              <a:t>Liu Zitao, Zuo Cheng, Wu Changlei et al.. Apoptosis : an international journal on programmed cell death. 2026-05-24 DOI: 10.1007/s10495-026-02339-6</a:t>
             </a:r>
             <a:endParaRPr lang="en-US" sz="800" dirty="0"/>
           </a:p>
@@ -7187,7 +7238,7 @@
                 <a:ea typeface="Microsoft JhengHei" pitchFamily="34" charset="-122"/>
                 <a:cs typeface="Microsoft JhengHei" pitchFamily="34" charset="-120"/>
               </a:rPr>
-              <a:t>針對PVTT的HCC二期研究</a:t>
+              <a:t>第二期研究HAIC與lenvatinib</a:t>
             </a:r>
             <a:endParaRPr lang="en-US" sz="1800" dirty="0"/>
           </a:p>
@@ -7208,7 +7259,7 @@
                 <a:ea typeface="Microsoft JhengHei" pitchFamily="34" charset="-122"/>
                 <a:cs typeface="Microsoft JhengHei" pitchFamily="34" charset="-120"/>
               </a:rPr>
-              <a:t>HAIC聯合lenvatinib與PD-1</a:t>
+              <a:t>與單獨PD-1抑制劑比較</a:t>
             </a:r>
             <a:endParaRPr lang="en-US" sz="1800" dirty="0"/>
           </a:p>
@@ -7229,7 +7280,7 @@
                 <a:ea typeface="Microsoft JhengHei" pitchFamily="34" charset="-122"/>
                 <a:cs typeface="Microsoft JhengHei" pitchFamily="34" charset="-120"/>
               </a:rPr>
-              <a:t>優於單一療法的結果</a:t>
+              <a:t>針對進展性HCC與PVTT</a:t>
             </a:r>
             <a:endParaRPr lang="en-US" sz="1800" dirty="0"/>
           </a:p>
@@ -7250,7 +7301,7 @@
                 <a:ea typeface="Microsoft JhengHei" pitchFamily="34" charset="-122"/>
                 <a:cs typeface="Microsoft JhengHei" pitchFamily="34" charset="-120"/>
               </a:rPr>
-              <a:t>專注於治癒性策略</a:t>
+              <a:t>潛在治癒策略的可能性</a:t>
             </a:r>
             <a:endParaRPr lang="en-US" sz="1800" dirty="0"/>
           </a:p>
@@ -7271,7 +7322,7 @@
                 <a:ea typeface="Microsoft JhengHei" pitchFamily="34" charset="-122"/>
                 <a:cs typeface="Microsoft JhengHei" pitchFamily="34" charset="-120"/>
               </a:rPr>
-              <a:t>改善預後的潛力</a:t>
+              <a:t>患者預後改善的觀察</a:t>
             </a:r>
             <a:endParaRPr lang="en-US" sz="1800" dirty="0"/>
           </a:p>
@@ -7586,7 +7637,7 @@
                 <a:ea typeface="Microsoft JhengHei" pitchFamily="34" charset="-122"/>
                 <a:cs typeface="Microsoft JhengHei" pitchFamily="34" charset="-120"/>
               </a:rPr>
-              <a:t>針對不可切除HCC的組合療法</a:t>
+              <a:t>針對不可切除的HCC的治療</a:t>
             </a:r>
             <a:endParaRPr lang="en-US" sz="1800" dirty="0"/>
           </a:p>
@@ -7607,7 +7658,7 @@
                 <a:ea typeface="Microsoft JhengHei" pitchFamily="34" charset="-122"/>
                 <a:cs typeface="Microsoft JhengHei" pitchFamily="34" charset="-120"/>
               </a:rPr>
-              <a:t>經動脈化療栓塞加PD-1抑制劑</a:t>
+              <a:t>使用經動脈化療栓塞(TACE)</a:t>
             </a:r>
             <a:endParaRPr lang="en-US" sz="1800" dirty="0"/>
           </a:p>
@@ -7628,7 +7679,7 @@
                 <a:ea typeface="Microsoft JhengHei" pitchFamily="34" charset="-122"/>
                 <a:cs typeface="Microsoft JhengHei" pitchFamily="34" charset="-120"/>
               </a:rPr>
-              <a:t>第二期試驗顯示前景良好</a:t>
+              <a:t>PD-1抑制劑提升療效</a:t>
             </a:r>
             <a:endParaRPr lang="en-US" sz="1800" dirty="0"/>
           </a:p>

--- a/docs/digest-zh.pptx
+++ b/docs/digest-zh.pptx
@@ -2269,7 +2269,7 @@
                   <a:srgbClr val="888888"/>
                 </a:solidFill>
               </a:rPr>
-              <a:t>2026-05-18 — 2026-05-25</a:t>
+              <a:t>2026-05-25 — 2026-06-01</a:t>
             </a:r>
             <a:endParaRPr lang="en-US" sz="1400" dirty="0"/>
           </a:p>
@@ -2460,7 +2460,7 @@
                   </a:extLst>
                 </a:hlinkClick>
               </a:rPr>
-              <a:t>Breakthroughs in HBV-related HCC Therapy: The Unmatched Potential of Immune Checkpoint Inhibitors.</a:t>
+              <a:t>Durvalumab and tremelimumab combination therapy achieved remarkable response in primary hepatic undifferentiated carcinoma with high PD-L1 expression.</a:t>
             </a:r>
             <a:endParaRPr lang="en-US" sz="2400" dirty="0"/>
           </a:p>
@@ -2496,7 +2496,7 @@
                   <a:srgbClr val="888888"/>
                 </a:solidFill>
               </a:rPr>
-              <a:t>Current treatment options in oncology  ·  Review  ·  🌏 Asia</a:t>
+              <a:t>Clinical journal of gastroenterology  ·  Case Report  ·  🌏 Asia</a:t>
             </a:r>
             <a:endParaRPr lang="en-US" sz="1000" dirty="0"/>
           </a:p>
@@ -2539,7 +2539,7 @@
                 <a:ea typeface="Microsoft JhengHei" pitchFamily="34" charset="-122"/>
                 <a:cs typeface="Microsoft JhengHei" pitchFamily="34" charset="-120"/>
               </a:rPr>
-              <a:t>免疫檢查點抑制劑改變HCC治療。</a:t>
+              <a:t>罕見的肝部未分化癌病例</a:t>
             </a:r>
             <a:endParaRPr lang="en-US" sz="1800" dirty="0"/>
           </a:p>
@@ -2560,7 +2560,7 @@
                 <a:ea typeface="Microsoft JhengHei" pitchFamily="34" charset="-122"/>
                 <a:cs typeface="Microsoft JhengHei" pitchFamily="34" charset="-120"/>
               </a:rPr>
-              <a:t>單一療法的臨床效益有限。</a:t>
+              <a:t>觀察到高PD-L1表達</a:t>
             </a:r>
             <a:endParaRPr lang="en-US" sz="1800" dirty="0"/>
           </a:p>
@@ -2581,7 +2581,7 @@
                 <a:ea typeface="Microsoft JhengHei" pitchFamily="34" charset="-122"/>
                 <a:cs typeface="Microsoft JhengHei" pitchFamily="34" charset="-120"/>
               </a:rPr>
-              <a:t>HBV-HCC具有特殊免疫抑制環境。</a:t>
+              <a:t>Durvalumab和tremelimumab聯合療法</a:t>
             </a:r>
             <a:endParaRPr lang="en-US" sz="1800" dirty="0"/>
           </a:p>
@@ -2602,7 +2602,7 @@
                 <a:ea typeface="Microsoft JhengHei" pitchFamily="34" charset="-122"/>
                 <a:cs typeface="Microsoft JhengHei" pitchFamily="34" charset="-120"/>
               </a:rPr>
-              <a:t>聯合療法可能提高治療效果。</a:t>
+              <a:t>四個療程後腫瘤縮小</a:t>
             </a:r>
             <a:endParaRPr lang="en-US" sz="1800" dirty="0"/>
           </a:p>
@@ -2623,7 +2623,7 @@
                 <a:ea typeface="Microsoft JhengHei" pitchFamily="34" charset="-122"/>
                 <a:cs typeface="Microsoft JhengHei" pitchFamily="34" charset="-120"/>
               </a:rPr>
-              <a:t>乙型肝炎再激活可用抗病毒藥物管理。</a:t>
+              <a:t>淋巴結轉移完全消失</a:t>
             </a:r>
             <a:endParaRPr lang="en-US" sz="1800" dirty="0"/>
           </a:p>
@@ -2659,7 +2659,7 @@
                   <a:srgbClr val="888888"/>
                 </a:solidFill>
               </a:rPr>
-              <a:t>Liu Chenlu, Chang Le, Yan Ying et al.. Current treatment options in oncology. 2026-05-23 DOI: 10.1007/s11864-026-01395-z</a:t>
+              <a:t>Kawahara Michihiko, Fujino Hatsue, Fujii Yasutoshi et al.. Clinical journal of gastroenterology. 2026-05-28 DOI: 10.1007/s12328-026-02329-w</a:t>
             </a:r>
             <a:endParaRPr lang="en-US" sz="800" dirty="0"/>
           </a:p>
@@ -2859,7 +2859,7 @@
                   </a:extLst>
                 </a:hlinkClick>
               </a:rPr>
-              <a:t>Machine learning based hepatic safety score predicts decompensation in hepatocellular carcinoma systemic therapy.</a:t>
+              <a:t>A case of a patient with advanced HCC with Vp4 on hemodialysis who responded to a multimodality treatment including hepatic arterial infusion, radiation therapy, immunotherapy, and molecular-targeted drugs.</a:t>
             </a:r>
             <a:endParaRPr lang="en-US" sz="2400" dirty="0"/>
           </a:p>
@@ -2895,7 +2895,7 @@
                   <a:srgbClr val="888888"/>
                 </a:solidFill>
               </a:rPr>
-              <a:t>NPJ digital medicine  ·  🌏 Asia</a:t>
+              <a:t>Clinical journal of gastroenterology  ·  Case Report  ·  🌏 Asia</a:t>
             </a:r>
             <a:endParaRPr lang="en-US" sz="1000" dirty="0"/>
           </a:p>
@@ -2938,7 +2938,7 @@
                 <a:ea typeface="Microsoft JhengHei" pitchFamily="34" charset="-122"/>
                 <a:cs typeface="Microsoft JhengHei" pitchFamily="34" charset="-120"/>
               </a:rPr>
-              <a:t>開發機器學習肝臟安全評分。</a:t>
+              <a:t>73歲女性，晚期HCC患者</a:t>
             </a:r>
             <a:endParaRPr lang="en-US" sz="1800" dirty="0"/>
           </a:p>
@@ -2959,7 +2959,7 @@
                 <a:ea typeface="Microsoft JhengHei" pitchFamily="34" charset="-122"/>
                 <a:cs typeface="Microsoft JhengHei" pitchFamily="34" charset="-120"/>
               </a:rPr>
-              <a:t>預測脫補與靜脈曲張出血。</a:t>
+              <a:t>初始治療：肝動脈灌注化療</a:t>
             </a:r>
             <a:endParaRPr lang="en-US" sz="1800" dirty="0"/>
           </a:p>
@@ -2980,7 +2980,7 @@
                 <a:ea typeface="Microsoft JhengHei" pitchFamily="34" charset="-122"/>
                 <a:cs typeface="Microsoft JhengHei" pitchFamily="34" charset="-120"/>
               </a:rPr>
-              <a:t>高MHSS與風險增加相關。</a:t>
+              <a:t>聯合療法：Atezo-Bev</a:t>
             </a:r>
             <a:endParaRPr lang="en-US" sz="1800" dirty="0"/>
           </a:p>
@@ -3001,7 +3001,7 @@
                 <a:ea typeface="Microsoft JhengHei" pitchFamily="34" charset="-122"/>
                 <a:cs typeface="Microsoft JhengHei" pitchFamily="34" charset="-120"/>
               </a:rPr>
-              <a:t>Atezolizumab-bevacizumab效果不一。</a:t>
+              <a:t>LEN-CDDP治療獲得部分反應</a:t>
             </a:r>
             <a:endParaRPr lang="en-US" sz="1800" dirty="0"/>
           </a:p>
@@ -3022,7 +3022,7 @@
                 <a:ea typeface="Microsoft JhengHei" pitchFamily="34" charset="-122"/>
                 <a:cs typeface="Microsoft JhengHei" pitchFamily="34" charset="-120"/>
               </a:rPr>
-              <a:t>MHSS指導個性化治療選擇。</a:t>
+              <a:t>Dur-Tre療法持續完全反應</a:t>
             </a:r>
             <a:endParaRPr lang="en-US" sz="1800" dirty="0"/>
           </a:p>
@@ -3058,7 +3058,7 @@
                   <a:srgbClr val="888888"/>
                 </a:solidFill>
               </a:rPr>
-              <a:t>Han Ji Won, Lee Jaejun, Yang Keungmo et al.. NPJ digital medicine. 2026-05-21 DOI: 10.1038/s41746-026-02802-3</a:t>
+              <a:t>Kosaka Yumi, Yoshikawa Yuki, Nakahara Takashi et al.. Clinical journal of gastroenterology. 2026-05-28 DOI: 10.1007/s12328-026-02300-9</a:t>
             </a:r>
             <a:endParaRPr lang="en-US" sz="800" dirty="0"/>
           </a:p>
@@ -3258,7 +3258,7 @@
                   </a:extLst>
                 </a:hlinkClick>
               </a:rPr>
-              <a:t>Less Is More: A Single-Dose, Non-Waiting Neoadjuvant Immunotherapy Strategy for Hepatocellular Carcinoma.</a:t>
+              <a:t>Successful treatment of &amp;#x3b2;-catenin-positive, immune checkpoint inhibitor-resistant tumor in a case of multicentric hepatocellular carcinoma.</a:t>
             </a:r>
             <a:endParaRPr lang="en-US" sz="2400" dirty="0"/>
           </a:p>
@@ -3294,7 +3294,7 @@
                   <a:srgbClr val="888888"/>
                 </a:solidFill>
               </a:rPr>
-              <a:t>Biomedical journal  ·  🌏 Asia</a:t>
+              <a:t>Clinical journal of gastroenterology  ·  🌏 Asia</a:t>
             </a:r>
             <a:endParaRPr lang="en-US" sz="1000" dirty="0"/>
           </a:p>
@@ -3337,7 +3337,7 @@
                 <a:ea typeface="Microsoft JhengHei" pitchFamily="34" charset="-122"/>
                 <a:cs typeface="Microsoft JhengHei" pitchFamily="34" charset="-120"/>
               </a:rPr>
-              <a:t>新輔助免疫治療在HCC面臨挑戰。</a:t>
+              <a:t>70歲女性多中心肝癌病例</a:t>
             </a:r>
             <a:endParaRPr lang="en-US" sz="1800" dirty="0"/>
           </a:p>
@@ -3358,7 +3358,7 @@
                 <a:ea typeface="Microsoft JhengHei" pitchFamily="34" charset="-122"/>
                 <a:cs typeface="Microsoft JhengHei" pitchFamily="34" charset="-120"/>
               </a:rPr>
-              <a:t>單劑量策略提升手術可行性。</a:t>
+              <a:t>β-catenin與免疫檢查點抑制抵抗相關</a:t>
             </a:r>
             <a:endParaRPr lang="en-US" sz="1800" dirty="0"/>
           </a:p>
@@ -3379,7 +3379,7 @@
                 <a:ea typeface="Microsoft JhengHei" pitchFamily="34" charset="-122"/>
                 <a:cs typeface="Microsoft JhengHei" pitchFamily="34" charset="-120"/>
               </a:rPr>
-              <a:t>PD-1/PD-L1抗體早期激活T細胞。</a:t>
+              <a:t>質子束治療達到局部控制</a:t>
             </a:r>
             <a:endParaRPr lang="en-US" sz="1800" dirty="0"/>
           </a:p>
@@ -3400,7 +3400,7 @@
                 <a:ea typeface="Microsoft JhengHei" pitchFamily="34" charset="-122"/>
                 <a:cs typeface="Microsoft JhengHei" pitchFamily="34" charset="-120"/>
               </a:rPr>
-              <a:t>減少治療相關不良事件。</a:t>
+              <a:t>持續治療維持其他結節緩解</a:t>
             </a:r>
             <a:endParaRPr lang="en-US" sz="1800" dirty="0"/>
           </a:p>
@@ -3421,7 +3421,7 @@
                 <a:ea typeface="Microsoft JhengHei" pitchFamily="34" charset="-122"/>
                 <a:cs typeface="Microsoft JhengHei" pitchFamily="34" charset="-120"/>
               </a:rPr>
-              <a:t>未來試驗應採用'少即是多'策略。</a:t>
+              <a:t>分子分析對個性化治療至關重要</a:t>
             </a:r>
             <a:endParaRPr lang="en-US" sz="1800" dirty="0"/>
           </a:p>
@@ -3457,7 +3457,7 @@
                   <a:srgbClr val="888888"/>
                 </a:solidFill>
               </a:rPr>
-              <a:t>Chen Kevin Kuan-Yu, Lin Tzu-Jung, Su Te-Wei et al.. Biomedical journal. 2026-05-20 DOI: 10.1016/j.bj.2026.100994</a:t>
+              <a:t>Nomiya Hirotaka, Matsuda Hidetaka, Nosaka Takuto et al.. Clinical journal of gastroenterology. 2026-05-31 DOI: 10.1007/s12328-025-02266-0</a:t>
             </a:r>
             <a:endParaRPr lang="en-US" sz="800" dirty="0"/>
           </a:p>
@@ -3648,7 +3648,7 @@
                   <a:srgbClr val="FFFFFF"/>
                 </a:solidFill>
               </a:rPr>
-              <a:t>### 綜合啟示（Overall Insights）</a:t>
+              <a:t>### 綜合啟示 (Overall Insights)</a:t>
             </a:r>
             <a:endParaRPr lang="en-US" sz="1200" dirty="0"/>
           </a:p>
@@ -3674,7 +3674,7 @@
                   <a:srgbClr val="FFFFFF"/>
                 </a:solidFill>
               </a:rPr>
-              <a:t>1. **免疫治療的臨床實踐效果**  </a:t>
+              <a:t>1. **免疫治療的前景**  </a:t>
             </a:r>
             <a:endParaRPr lang="en-US" sz="1200" dirty="0"/>
           </a:p>
@@ -3691,7 +3691,7 @@
                   <a:srgbClr val="FFFFFF"/>
                 </a:solidFill>
               </a:rPr>
-              <a:t>   The combination of durvalumab and tremelimumab shows promising real-world outcomes in HCC patients, regardless of meeting phase 3 trial criteria, indicating its potential as a viable treatment option.  </a:t>
+              <a:t>   The combination of immune checkpoint inhibitors (ICIs) with other therapies, such as targeted agents and radiotherapy, shows promising efficacy in advanced hepatocellular carcinoma (HCC).  </a:t>
             </a:r>
             <a:endParaRPr lang="en-US" sz="1200" dirty="0"/>
           </a:p>
@@ -3708,7 +3708,7 @@
                   <a:srgbClr val="FFFFFF"/>
                 </a:solidFill>
               </a:rPr>
-              <a:t>   Durvalumab和tremelimumab的組合在肝細胞癌患者中顯示出良好的臨床實踐效果，無論是否符合第三期試驗標準，顯示其作為可行治療選擇的潛力。</a:t>
+              <a:t>   免疫檢查點抑制劑（ICIs）與其他療法（如靶向藥物和放療）的聯合使用在晚期肝細胞癌（HCC）中顯示出有希望的療效。</a:t>
             </a:r>
             <a:endParaRPr lang="en-US" sz="1200" dirty="0"/>
           </a:p>
@@ -3734,7 +3734,7 @@
                   <a:srgbClr val="FFFFFF"/>
                 </a:solidFill>
               </a:rPr>
-              <a:t>2. **一線治療的持久性反應**  </a:t>
+              <a:t>2. **高風險患者的預後改善**  </a:t>
             </a:r>
             <a:endParaRPr lang="en-US" sz="1200" dirty="0"/>
           </a:p>
@@ -3751,7 +3751,7 @@
                   <a:srgbClr val="FFFFFF"/>
                 </a:solidFill>
               </a:rPr>
-              <a:t>   Atezolizumab plus bevacizumab remains the first-line treatment for unresectable HCC, with high response rates leading to potential curative conversions and drug-free remissions in select patients over five years.  </a:t>
+              <a:t>   The IMbrave050 trial demonstrates that adjuvant therapy with atezolizumab and bevacizumab significantly improves recurrence-free survival in high-risk HCC patients.  </a:t>
             </a:r>
             <a:endParaRPr lang="en-US" sz="1200" dirty="0"/>
           </a:p>
@@ -3768,7 +3768,7 @@
                   <a:srgbClr val="FFFFFF"/>
                 </a:solidFill>
               </a:rPr>
-              <a:t>   Atezolizumab加bevacizumab仍然是不可切除肝細胞癌的一線治療，五年內高反應率使某些患者有可能實現治癒性轉化和無藥物緩解。</a:t>
+              <a:t>   IMbrave050試驗顯示，阿特珠單抗和貝伐單抗的輔助療法顯著改善高風險HCC患者的無復發生存期。</a:t>
             </a:r>
             <a:endParaRPr lang="en-US" sz="1200" dirty="0"/>
           </a:p>
@@ -3794,7 +3794,7 @@
                   <a:srgbClr val="FFFFFF"/>
                 </a:solidFill>
               </a:rPr>
-              <a:t>3. **傳統中醫的潛在作用**  </a:t>
+              <a:t>3. **副作用管理的重要性**  </a:t>
             </a:r>
             <a:endParaRPr lang="en-US" sz="1200" dirty="0"/>
           </a:p>
@@ -3811,7 +3811,7 @@
                   <a:srgbClr val="FFFFFF"/>
                 </a:solidFill>
               </a:rPr>
-              <a:t>   Traditional Chinese Medicine may reverse immune checkpoint resistance through lactate metabolic reprogramming, offering novel therapeutic strategies for HCC.  </a:t>
+              <a:t>   The use of prophylactic corticosteroids may help mitigate severe immune-related adverse events associated with dual ICI therapy, enhancing treatment tolerability.  </a:t>
             </a:r>
             <a:endParaRPr lang="en-US" sz="1200" dirty="0"/>
           </a:p>
@@ -3828,7 +3828,7 @@
                   <a:srgbClr val="FFFFFF"/>
                 </a:solidFill>
               </a:rPr>
-              <a:t>   傳統中醫可能通過乳酸代謝重編程逆轉免疫檢查點抗性，為肝細胞癌提供新型治療策略。</a:t>
+              <a:t>   使用預防性皮質類固醇可能有助於減輕與雙重ICIs療法相關的嚴重免疫相關不良事件，提高治療耐受性。</a:t>
             </a:r>
             <a:endParaRPr lang="en-US" sz="1200" dirty="0"/>
           </a:p>
@@ -3854,7 +3854,7 @@
                   <a:srgbClr val="FFFFFF"/>
                 </a:solidFill>
               </a:rPr>
-              <a:t>4. **Neddylation途徑的預後評估**  </a:t>
+              <a:t>4. **人工智慧的潛力**  </a:t>
             </a:r>
             <a:endParaRPr lang="en-US" sz="1200" dirty="0"/>
           </a:p>
@@ -3871,7 +3871,7 @@
                   <a:srgbClr val="FFFFFF"/>
                 </a:solidFill>
               </a:rPr>
-              <a:t>   The Neddylation pathway's activation in HCC may serve as a prognostic marker and could enhance the efficacy of immunotherapy, indicating a need for further exploration.  </a:t>
+              <a:t>   Non-invasive AI models for detecting esophageal varices may improve early intervention strategies in patients with unresectable HCC, potentially enhancing overall outcomes.  </a:t>
             </a:r>
             <a:endParaRPr lang="en-US" sz="1200" dirty="0"/>
           </a:p>
@@ -3888,7 +3888,7 @@
                   <a:srgbClr val="FFFFFF"/>
                 </a:solidFill>
               </a:rPr>
-              <a:t>   Neddylation途徑在肝細胞癌中的活化可能作為預後標記，並可能增強免疫治療的療效，顯示出進一步探索的必要性。</a:t>
+              <a:t>   用於檢測食道靜脈曲張的非侵入性AI模型可能改善不可切除HCC患者的早期介入策略，從而提高整體預後。</a:t>
             </a:r>
             <a:endParaRPr lang="en-US" sz="1200" dirty="0"/>
           </a:p>
@@ -3914,7 +3914,7 @@
                   <a:srgbClr val="FFFFFF"/>
                 </a:solidFill>
               </a:rPr>
-              <a:t>5. **機器學習在安全性評估中的應用**  </a:t>
+              <a:t>5. **多模態治療的成功案例**  </a:t>
             </a:r>
             <a:endParaRPr lang="en-US" sz="1200" dirty="0"/>
           </a:p>
@@ -3931,7 +3931,7 @@
                   <a:srgbClr val="FFFFFF"/>
                 </a:solidFill>
               </a:rPr>
-              <a:t>   Machine learning-based hepatic safety scores can predict decompensation risks in HCC patients undergoing systemic therapy, highlighting the importance of personalized treatment approaches.</a:t>
+              <a:t>   Reports of successful multimodal treatments highlight the potential for personalized approaches in managing complex cases of HCC, particularly those with portal vein tumor thrombosis.</a:t>
             </a:r>
             <a:endParaRPr lang="en-US" sz="1200" dirty="0"/>
           </a:p>
@@ -4077,7 +4077,7 @@
                   <a:srgbClr val="FFFFFF"/>
                 </a:solidFill>
               </a:rPr>
-              <a:t>基於機器學習的肝臟安全性評分能預測接受系統治療的肝細胞癌患者的脫補償風險，突顯個性化治療方法的重要性。</a:t>
+              <a:t>成功的多模態治療案例突顯了在管理複雜HCC病例（尤其是伴有門靜脈腫瘤栓塞的病例）中個性化治療的潛力。</a:t>
             </a:r>
             <a:endParaRPr lang="en-US" sz="1200" dirty="0"/>
           </a:p>
@@ -4103,7 +4103,7 @@
                   <a:srgbClr val="FFFFFF"/>
                 </a:solidFill>
               </a:rPr>
-              <a:t>### 未來研究方向（Future Research Directions）</a:t>
+              <a:t>### 未來研究方向 (Future Research Directions)</a:t>
             </a:r>
             <a:endParaRPr lang="en-US" sz="1200" dirty="0"/>
           </a:p>
@@ -4129,7 +4129,7 @@
                   <a:srgbClr val="FFFFFF"/>
                 </a:solidFill>
               </a:rPr>
-              <a:t>1. **擴大免疫治療的適應症**  </a:t>
+              <a:t>1. **探索新療法的組合**  </a:t>
             </a:r>
             <a:endParaRPr lang="en-US" sz="1200" dirty="0"/>
           </a:p>
@@ -4146,7 +4146,7 @@
                   <a:srgbClr val="FFFFFF"/>
                 </a:solidFill>
               </a:rPr>
-              <a:t>   Future studies should investigate the efficacy of immune checkpoint inhibitors in broader HCC populations, particularly those with portal vein tumor thrombosis and other high-risk features.  </a:t>
+              <a:t>   Future studies should investigate novel combinations of ICIs with other therapeutic modalities to further enhance treatment efficacy in HCC.  </a:t>
             </a:r>
             <a:endParaRPr lang="en-US" sz="1200" dirty="0"/>
           </a:p>
@@ -4163,7 +4163,7 @@
                   <a:srgbClr val="FFFFFF"/>
                 </a:solidFill>
               </a:rPr>
-              <a:t>   未來研究應探討免疫檢查點抑制劑在更廣泛肝細胞癌人群中的療效，特別是那些具有門靜脈腫瘤血栓和其他高風險特徵的患者。</a:t>
+              <a:t>   未來的研究應探索ICIs與其他治療方式的新型組合，以進一步提高HCC的治療效果。</a:t>
             </a:r>
             <a:endParaRPr lang="en-US" sz="1200" dirty="0"/>
           </a:p>
@@ -4189,7 +4189,7 @@
                   <a:srgbClr val="FFFFFF"/>
                 </a:solidFill>
               </a:rPr>
-              <a:t>2. **中醫與現代療法的結合**  </a:t>
+              <a:t>2. **副作用的預測與管理**  </a:t>
             </a:r>
             <a:endParaRPr lang="en-US" sz="1200" dirty="0"/>
           </a:p>
@@ -4206,7 +4206,7 @@
                   <a:srgbClr val="FFFFFF"/>
                 </a:solidFill>
               </a:rPr>
-              <a:t>   Research should explore the synergistic effects of Traditional Chinese Medicine combined with modern immunotherapies to enhance treatment outcomes in HCC.  </a:t>
+              <a:t>   Research should focus on identifying biomarkers that predict severe immune-related adverse events to optimize the use of prophylactic strategies.  </a:t>
             </a:r>
             <a:endParaRPr lang="en-US" sz="1200" dirty="0"/>
           </a:p>
@@ -4223,7 +4223,7 @@
                   <a:srgbClr val="FFFFFF"/>
                 </a:solidFill>
               </a:rPr>
-              <a:t>   研究應探討傳統中醫與現代免疫療法結合的協同效應，以提升肝細胞癌的治療效果。</a:t>
+              <a:t>   研究應集中於識別預測嚴重免疫相關不良事件的生物標記，以優化預防性策略的使用。</a:t>
             </a:r>
             <a:endParaRPr lang="en-US" sz="1200" dirty="0"/>
           </a:p>
@@ -4249,7 +4249,7 @@
                   <a:srgbClr val="FFFFFF"/>
                 </a:solidFill>
               </a:rPr>
-              <a:t>3. **Neddylation途徑的深入分析**  </a:t>
+              <a:t>3. **AI技術的應用擴展**  </a:t>
             </a:r>
             <a:endParaRPr lang="en-US" sz="1200" dirty="0"/>
           </a:p>
@@ -4266,7 +4266,7 @@
                   <a:srgbClr val="FFFFFF"/>
                 </a:solidFill>
               </a:rPr>
-              <a:t>   Further investigation into the Neddylation pathway's role in HCC progression and its potential as a therapeutic target is warranted.  </a:t>
+              <a:t>   Expanding the use of AI in predicting treatment responses and complications in HCC could lead to more tailored and effective management strategies.  </a:t>
             </a:r>
             <a:endParaRPr lang="en-US" sz="1200" dirty="0"/>
           </a:p>
@@ -4283,7 +4283,7 @@
                   <a:srgbClr val="FFFFFF"/>
                 </a:solidFill>
               </a:rPr>
-              <a:t>   需要進一步研究Neddylation途徑在肝細胞癌進展中的作用及其作為治療靶點的潛力。</a:t>
+              <a:t>   擴大AI在預測HCC治療反應和併發症中的應用可能導致更具針對性和有效的管理策略。</a:t>
             </a:r>
             <a:endParaRPr lang="en-US" sz="1200" dirty="0"/>
           </a:p>
@@ -4309,7 +4309,7 @@
                   <a:srgbClr val="FFFFFF"/>
                 </a:solidFill>
               </a:rPr>
-              <a:t>4. **個性化治療策略的發展**  </a:t>
+              <a:t>4. **長期療效的評估**  </a:t>
             </a:r>
             <a:endParaRPr lang="en-US" sz="1200" dirty="0"/>
           </a:p>
@@ -4326,7 +4326,7 @@
                   <a:srgbClr val="FFFFFF"/>
                 </a:solidFill>
               </a:rPr>
-              <a:t>   Developing personalized treatment strategies using machine learning models to predict patient outcomes and optimize therapeutic regimens in HCC is essential.  </a:t>
+              <a:t>   Long-term follow-up studies are needed to assess the durability of responses to combination therapies in HCC and their impact on overall survival.  </a:t>
             </a:r>
             <a:endParaRPr lang="en-US" sz="1200" dirty="0"/>
           </a:p>
@@ -4343,7 +4343,7 @@
                   <a:srgbClr val="FFFFFF"/>
                 </a:solidFill>
               </a:rPr>
-              <a:t>   開發使用機器學習模型的個性化治療策略，以預測患者結果並優化肝細胞癌的治療方案至關重要。</a:t>
+              <a:t>   需要長期隨訪研究來評估HCC中聯合療法反應的持久性及其對整體生存的影響。</a:t>
             </a:r>
             <a:endParaRPr lang="en-US" sz="1200" dirty="0"/>
           </a:p>
@@ -4369,7 +4369,7 @@
                   <a:srgbClr val="FFFFFF"/>
                 </a:solidFill>
               </a:rPr>
-              <a:t>5. **長期療效的持續評估**  </a:t>
+              <a:t>5. **個體化治療的發展**  </a:t>
             </a:r>
             <a:endParaRPr lang="en-US" sz="1200" dirty="0"/>
           </a:p>
@@ -4386,7 +4386,7 @@
                   <a:srgbClr val="FFFFFF"/>
                 </a:solidFill>
               </a:rPr>
-              <a:t>   Longitudinal studies are needed to assess the durability of responses to combination therapies in HCC and their impact on overall survival.  </a:t>
+              <a:t>   Future research should aim to develop personalized treatment regimens based on genetic and molecular profiling of tumors in HCC patients.  </a:t>
             </a:r>
             <a:endParaRPr lang="en-US" sz="1200" dirty="0"/>
           </a:p>
@@ -4403,7 +4403,7 @@
                   <a:srgbClr val="FFFFFF"/>
                 </a:solidFill>
               </a:rPr>
-              <a:t>   需要進行縱向研究來評估肝細胞癌中聯合療法反應的持久性及其對整體生存的影響。</a:t>
+              <a:t>   未來的研究應致力於根據HCC患者腫瘤的基因和分子特徵開發個體化治療方案。</a:t>
             </a:r>
             <a:endParaRPr lang="en-US" sz="1200" dirty="0"/>
           </a:p>
@@ -4676,7 +4676,7 @@
                 <a:ea typeface="Arial" pitchFamily="34" charset="-122"/>
                 <a:cs typeface="Arial" pitchFamily="34" charset="-120"/>
               </a:rPr>
-              <a:t>Outcomes of Patients With Hepatocellular Carcinoma Treated With Durvalumab Plus …</a:t>
+              <a:t>Updated data from IMbrave050: Adjuvant atezolizumab plus bevacizumab for high-ri…</a:t>
             </a:r>
             <a:endParaRPr lang="en-US" sz="1400" dirty="0"/>
           </a:p>
@@ -4713,7 +4713,7 @@
                 <a:ea typeface="Arial" pitchFamily="34" charset="-122"/>
                 <a:cs typeface="Arial" pitchFamily="34" charset="-120"/>
               </a:rPr>
-              <a:t>Five years after IMbrave150 with clinical integration of atezolizumab plus bevac…</a:t>
+              <a:t>Revisiting prophylactic corticosteroids to mitigate severe immune-related advers…</a:t>
             </a:r>
             <a:endParaRPr lang="en-US" sz="1400" dirty="0"/>
           </a:p>
@@ -4750,7 +4750,7 @@
                 <a:ea typeface="Arial" pitchFamily="34" charset="-122"/>
                 <a:cs typeface="Arial" pitchFamily="34" charset="-120"/>
               </a:rPr>
-              <a:t>Durvalumab plus HAIC-FOLFOX followed by maintenance durvalumab for hepatocellula…</a:t>
+              <a:t>Effect and safety of tislelizumab combined with anlotinib and radiotherapy in ad…</a:t>
             </a:r>
             <a:endParaRPr lang="en-US" sz="1400" dirty="0"/>
           </a:p>
@@ -4787,7 +4787,7 @@
                 <a:ea typeface="Arial" pitchFamily="34" charset="-122"/>
                 <a:cs typeface="Arial" pitchFamily="34" charset="-120"/>
               </a:rPr>
-              <a:t>Traditional Chinese Medicine Reverses Immune Checkpoint Resistance Through Lacta…</a:t>
+              <a:t>Detection of esophageal varices and prediction of hepatic decompensation in unre…</a:t>
             </a:r>
             <a:endParaRPr lang="en-US" sz="1400" dirty="0"/>
           </a:p>
@@ -4824,7 +4824,7 @@
                 <a:ea typeface="Arial" pitchFamily="34" charset="-122"/>
                 <a:cs typeface="Arial" pitchFamily="34" charset="-120"/>
               </a:rPr>
-              <a:t>Identifying Neddylation-modified features to assess prognosis and immune efficac…</a:t>
+              <a:t>Complementary evaluation of phase III immunotherapy trials in advanced HCC using…</a:t>
             </a:r>
             <a:endParaRPr lang="en-US" sz="1400" dirty="0"/>
           </a:p>
@@ -4935,7 +4935,7 @@
                 <a:ea typeface="Arial" pitchFamily="34" charset="-122"/>
                 <a:cs typeface="Arial" pitchFamily="34" charset="-120"/>
               </a:rPr>
-              <a:t>Breakthroughs in HBV-related HCC Therapy: The Unmatched Potential of Immune Chec…</a:t>
+              <a:t>Durvalumab and tremelimumab combination therapy achieved remarkable response in …</a:t>
             </a:r>
             <a:endParaRPr lang="en-US" sz="1400" dirty="0"/>
           </a:p>
@@ -4972,7 +4972,7 @@
                 <a:ea typeface="Arial" pitchFamily="34" charset="-122"/>
                 <a:cs typeface="Arial" pitchFamily="34" charset="-120"/>
               </a:rPr>
-              <a:t>Machine learning based hepatic safety score predicts decompensation in hepatocel…</a:t>
+              <a:t>A case of a patient with advanced HCC with Vp4 on hemodialysis who responded to …</a:t>
             </a:r>
             <a:endParaRPr lang="en-US" sz="1400" dirty="0"/>
           </a:p>
@@ -5009,7 +5009,7 @@
                 <a:ea typeface="Arial" pitchFamily="34" charset="-122"/>
                 <a:cs typeface="Arial" pitchFamily="34" charset="-120"/>
               </a:rPr>
-              <a:t>Less Is More: A Single-Dose, Non-Waiting Neoadjuvant Immunotherapy Strategy for …</a:t>
+              <a:t>Successful treatment of &amp;#x3b2;-catenin-positive, immune checkpoint inhibitor-re…</a:t>
             </a:r>
             <a:endParaRPr lang="en-US" sz="1400" dirty="0"/>
           </a:p>
@@ -5164,7 +5164,7 @@
                   </a:extLst>
                 </a:hlinkClick>
               </a:rPr>
-              <a:t>Outcomes of Patients With Hepatocellular Carcinoma Treated With Durvalumab Plus Tremelimumab in Real-World Clinical Practice Who Met or Did Not Meet the Inclusion Criteria for the Phase 3 HIMALAYA Trial.</a:t>
+              <a:t>Updated data from IMbrave050: Adjuvant atezolizumab plus bevacizumab for high-risk hepatocellular carcinoma.</a:t>
             </a:r>
             <a:endParaRPr lang="en-US" sz="2400" dirty="0"/>
           </a:p>
@@ -5200,7 +5200,7 @@
                   <a:srgbClr val="888888"/>
                 </a:solidFill>
               </a:rPr>
-              <a:t>Journal of gastroenterology and hepatology  ·  RCT Phase 3  ·  🌏 Asia</a:t>
+              <a:t>Journal of hepatology  ·  IF 25.7  ·  RCT  ·  🌏 Asia</a:t>
             </a:r>
             <a:endParaRPr lang="en-US" sz="1000" dirty="0"/>
           </a:p>
@@ -5243,7 +5243,7 @@
                 <a:ea typeface="Microsoft JhengHei" pitchFamily="34" charset="-122"/>
                 <a:cs typeface="Microsoft JhengHei" pitchFamily="34" charset="-120"/>
               </a:rPr>
-              <a:t>研究Durvalumab與Tremelimumab在HCC的效果</a:t>
+              <a:t>IMbrave050達成RFS主要終點</a:t>
             </a:r>
             <a:endParaRPr lang="en-US" sz="1800" dirty="0"/>
           </a:p>
@@ -5264,7 +5264,7 @@
                 <a:ea typeface="Microsoft JhengHei" pitchFamily="34" charset="-122"/>
                 <a:cs typeface="Microsoft JhengHei" pitchFamily="34" charset="-120"/>
               </a:rPr>
-              <a:t>412名患者於30個機構接受治療</a:t>
+              <a:t>治療與監測RFS HR為0.72</a:t>
             </a:r>
             <a:endParaRPr lang="en-US" sz="1800" dirty="0"/>
           </a:p>
@@ -5285,7 +5285,7 @@
                 <a:ea typeface="Microsoft JhengHei" pitchFamily="34" charset="-122"/>
                 <a:cs typeface="Microsoft JhengHei" pitchFamily="34" charset="-120"/>
               </a:rPr>
-              <a:t>HIMALAYA組PFS和OS較佳</a:t>
+              <a:t>更新分析中OS數據仍不成熟</a:t>
             </a:r>
             <a:endParaRPr lang="en-US" sz="1800" dirty="0"/>
           </a:p>
@@ -5306,7 +5306,7 @@
                 <a:ea typeface="Microsoft JhengHei" pitchFamily="34" charset="-122"/>
                 <a:cs typeface="Microsoft JhengHei" pitchFamily="34" charset="-120"/>
               </a:rPr>
-              <a:t>獨立預測因子：BMI、門靜脈侵襲</a:t>
+              <a:t>初始RFS效益隨時間未持續</a:t>
             </a:r>
             <a:endParaRPr lang="en-US" sz="1800" dirty="0"/>
           </a:p>
@@ -5327,7 +5327,7 @@
                 <a:ea typeface="Microsoft JhengHei" pitchFamily="34" charset="-122"/>
                 <a:cs typeface="Microsoft JhengHei" pitchFamily="34" charset="-120"/>
               </a:rPr>
-              <a:t>內分泌功能障礙在HIMALAYA組較常見</a:t>
+              <a:t>安全性概況一致且可控</a:t>
             </a:r>
             <a:endParaRPr lang="en-US" sz="1800" dirty="0"/>
           </a:p>
@@ -5363,7 +5363,7 @@
                   <a:srgbClr val="888888"/>
                 </a:solidFill>
               </a:rPr>
-              <a:t>Matono Tomomitsu, Tada Toshifumi, Hiraoka Atsushi et al.. Journal of gastroenterology and hepatology. 2026-05-23 DOI: 10.1111/jgh.70422</a:t>
+              <a:t>Yopp Adam, Chen Minshan, Cheng Ann-Lii et al.. Journal of hepatology. 2026-05-16 DOI: 10.1016/j.jhep.2026.01.006</a:t>
             </a:r>
             <a:endParaRPr lang="en-US" sz="800" dirty="0"/>
           </a:p>
@@ -5563,7 +5563,7 @@
                   </a:extLst>
                 </a:hlinkClick>
               </a:rPr>
-              <a:t>Five years after IMbrave150 with clinical integration of atezolizumab plus bevacizumab in hepatocellular carcinoma.</a:t>
+              <a:t>Revisiting prophylactic corticosteroids to mitigate severe immune-related adverse events in hepatocellular carcinoma.</a:t>
             </a:r>
             <a:endParaRPr lang="en-US" sz="2400" dirty="0"/>
           </a:p>
@@ -5599,7 +5599,7 @@
                   <a:srgbClr val="888888"/>
                 </a:solidFill>
               </a:rPr>
-              <a:t>Annals of hepatology  ·  RCT Phase 3  ·  🌏 Asia</a:t>
+              <a:t>Journal of hepatology  ·  IF 25.7  ·  Prospective Study  ·  🌏 Asia</a:t>
             </a:r>
             <a:endParaRPr lang="en-US" sz="1000" dirty="0"/>
           </a:p>
@@ -5642,7 +5642,7 @@
                 <a:ea typeface="Microsoft JhengHei" pitchFamily="34" charset="-122"/>
                 <a:cs typeface="Microsoft JhengHei" pitchFamily="34" charset="-120"/>
               </a:rPr>
-              <a:t>Atezolizumab加Bevacizumab為一線療法。</a:t>
+              <a:t>雙重ICI改變HCC治療格局。</a:t>
             </a:r>
             <a:endParaRPr lang="en-US" sz="1800" dirty="0"/>
           </a:p>
@@ -5663,7 +5663,7 @@
                 <a:ea typeface="Microsoft JhengHei" pitchFamily="34" charset="-122"/>
                 <a:cs typeface="Microsoft JhengHei" pitchFamily="34" charset="-120"/>
               </a:rPr>
-              <a:t>高反應率可促進治癒轉化。</a:t>
+              <a:t>嚴重irAE限制ICI臨床應用。</a:t>
             </a:r>
             <a:endParaRPr lang="en-US" sz="1800" dirty="0"/>
           </a:p>
@@ -5684,7 +5684,7 @@
                 <a:ea typeface="Microsoft JhengHei" pitchFamily="34" charset="-122"/>
                 <a:cs typeface="Microsoft JhengHei" pitchFamily="34" charset="-120"/>
               </a:rPr>
-              <a:t>出血風險需主動管理。</a:t>
+              <a:t>預防性類固醇減少嚴重irAE。</a:t>
             </a:r>
             <a:endParaRPr lang="en-US" sz="1800" dirty="0"/>
           </a:p>
@@ -5705,7 +5705,7 @@
                 <a:ea typeface="Microsoft JhengHei" pitchFamily="34" charset="-122"/>
                 <a:cs typeface="Microsoft JhengHei" pitchFamily="34" charset="-120"/>
               </a:rPr>
-              <a:t>與局部治療的結合顯示潛力。</a:t>
+              <a:t>類固醇不影響T細胞活化。</a:t>
             </a:r>
             <a:endParaRPr lang="en-US" sz="1800" dirty="0"/>
           </a:p>
@@ -5726,7 +5726,7 @@
                 <a:ea typeface="Microsoft JhengHei" pitchFamily="34" charset="-122"/>
                 <a:cs typeface="Microsoft JhengHei" pitchFamily="34" charset="-120"/>
               </a:rPr>
-              <a:t>生物標記和序列仍有關鍵缺口。</a:t>
+              <a:t>需在HCC進行前瞻性評估。</a:t>
             </a:r>
             <a:endParaRPr lang="en-US" sz="1800" dirty="0"/>
           </a:p>
@@ -5762,7 +5762,7 @@
                   <a:srgbClr val="888888"/>
                 </a:solidFill>
               </a:rPr>
-              <a:t>Lai Kuan-Chang, Chen San-Chi. Annals of hepatology. 2026-05-19 DOI: 10.1016/j.aohep.2026.102237</a:t>
+              <a:t>Shen Ying-Chun, Pinato David J, Liu Tsung-Hao et al.. Journal of hepatology. 2026-05-16 DOI: 10.1016/j.jhep.2026.01.009</a:t>
             </a:r>
             <a:endParaRPr lang="en-US" sz="800" dirty="0"/>
           </a:p>
@@ -5962,7 +5962,7 @@
                   </a:extLst>
                 </a:hlinkClick>
               </a:rPr>
-              <a:t>Durvalumab plus HAIC-FOLFOX followed by maintenance durvalumab for hepatocellular carcinoma with major portal invasion: phase 2 DurHope study.</a:t>
+              <a:t>Effect and safety of tislelizumab combined with anlotinib and radiotherapy in advanced hepatocellular carcinoma: A single-arm, single-center, phase II clinical study.</a:t>
             </a:r>
             <a:endParaRPr lang="en-US" sz="2400" dirty="0"/>
           </a:p>
@@ -5998,7 +5998,7 @@
                   <a:srgbClr val="888888"/>
                 </a:solidFill>
               </a:rPr>
-              <a:t>Nature communications  ·  IF 14.7  ·  RCT Phase 2</a:t>
+              <a:t>Scientific reports  ·  RCT Phase 2  ·  🌏 Asia</a:t>
             </a:r>
             <a:endParaRPr lang="en-US" sz="1000" dirty="0"/>
           </a:p>
@@ -6041,7 +6041,7 @@
                 <a:ea typeface="Microsoft JhengHei" pitchFamily="34" charset="-122"/>
                 <a:cs typeface="Microsoft JhengHei" pitchFamily="34" charset="-120"/>
               </a:rPr>
-              <a:t>Durvalumab加HAIC-FOLFOX顯示潛力。</a:t>
+              <a:t>評估Tislelizumab與anlotinib及放療</a:t>
             </a:r>
             <a:endParaRPr lang="en-US" sz="1800" dirty="0"/>
           </a:p>
@@ -6062,7 +6062,7 @@
                 <a:ea typeface="Microsoft JhengHei" pitchFamily="34" charset="-122"/>
                 <a:cs typeface="Microsoft JhengHei" pitchFamily="34" charset="-120"/>
               </a:rPr>
-              <a:t>1年整體存活率為63.3%。</a:t>
+              <a:t>達到62.2%客觀反應率</a:t>
             </a:r>
             <a:endParaRPr lang="en-US" sz="1800" dirty="0"/>
           </a:p>
@@ -6083,7 +6083,7 @@
                 <a:ea typeface="Microsoft JhengHei" pitchFamily="34" charset="-122"/>
                 <a:cs typeface="Microsoft JhengHei" pitchFamily="34" charset="-120"/>
               </a:rPr>
-              <a:t>腫瘤RNA測序顯示耐藥特徵。</a:t>
+              <a:t>中位無進展生存期11個月</a:t>
             </a:r>
             <a:endParaRPr lang="en-US" sz="1800" dirty="0"/>
           </a:p>
@@ -6104,7 +6104,7 @@
                 <a:ea typeface="Microsoft JhengHei" pitchFamily="34" charset="-122"/>
                 <a:cs typeface="Microsoft JhengHei" pitchFamily="34" charset="-120"/>
               </a:rPr>
-              <a:t>反應者免疫浸潤增加。</a:t>
+              <a:t>安全性主要為1/2級不良事件</a:t>
             </a:r>
             <a:endParaRPr lang="en-US" sz="1800" dirty="0"/>
           </a:p>
@@ -6125,7 +6125,7 @@
                 <a:ea typeface="Microsoft JhengHei" pitchFamily="34" charset="-122"/>
                 <a:cs typeface="Microsoft JhengHei" pitchFamily="34" charset="-120"/>
               </a:rPr>
-              <a:t>治療後T細胞擴展明顯。</a:t>
+              <a:t>結果與PVTT及BCLC階段無關</a:t>
             </a:r>
             <a:endParaRPr lang="en-US" sz="1800" dirty="0"/>
           </a:p>
@@ -6161,7 +6161,7 @@
                   <a:srgbClr val="888888"/>
                 </a:solidFill>
               </a:rPr>
-              <a:t>Yi Junzhe, Wang Jiongliang, Zhang Yimin et al.. Nature communications. 2026-05-18 DOI: 10.1038/s41467-026-73131-y</a:t>
+              <a:t>Fan Huaxi, Liu Yuhong, Wu Guishu et al.. Scientific reports. 2026-05-28 DOI: 10.1038/s41598-026-55609-3</a:t>
             </a:r>
             <a:endParaRPr lang="en-US" sz="800" dirty="0"/>
           </a:p>
@@ -6361,7 +6361,7 @@
                   </a:extLst>
                 </a:hlinkClick>
               </a:rPr>
-              <a:t>Traditional Chinese Medicine Reverses Immune Checkpoint Resistance Through Lactate Metabolic Reprogramming in Hepatocellular Carcinoma: Mechanisms and Therapeutic Implications.</a:t>
+              <a:t>Detection of esophageal varices and prediction of hepatic decompensation in unresectable hepatocellular carcinoma using AI.</a:t>
             </a:r>
             <a:endParaRPr lang="en-US" sz="2400" dirty="0"/>
           </a:p>
@@ -6397,7 +6397,7 @@
                   <a:srgbClr val="888888"/>
                 </a:solidFill>
               </a:rPr>
-              <a:t>Journal of ethnopharmacology  ·  RCT Phase 3</a:t>
+              <a:t>Journal of hepatology  ·  IF 25.7  ·  Retrospective Study</a:t>
             </a:r>
             <a:endParaRPr lang="en-US" sz="1000" dirty="0"/>
           </a:p>
@@ -6440,7 +6440,7 @@
                 <a:ea typeface="Microsoft JhengHei" pitchFamily="34" charset="-122"/>
                 <a:cs typeface="Microsoft JhengHei" pitchFamily="34" charset="-120"/>
               </a:rPr>
-              <a:t>中醫藥改變乳酸代謝</a:t>
+              <a:t>開發AI模型檢測食道靜脈曲張。</a:t>
             </a:r>
             <a:endParaRPr lang="en-US" sz="1800" dirty="0"/>
           </a:p>
@@ -6461,7 +6461,7 @@
                 <a:ea typeface="Microsoft JhengHei" pitchFamily="34" charset="-122"/>
                 <a:cs typeface="Microsoft JhengHei" pitchFamily="34" charset="-120"/>
               </a:rPr>
-              <a:t>乳酸升高與免疫抵抗相關</a:t>
+              <a:t>使用常規CT數據進行驗證。</a:t>
             </a:r>
             <a:endParaRPr lang="en-US" sz="1800" dirty="0"/>
           </a:p>
@@ -6482,7 +6482,7 @@
                 <a:ea typeface="Microsoft JhengHei" pitchFamily="34" charset="-122"/>
                 <a:cs typeface="Microsoft JhengHei" pitchFamily="34" charset="-120"/>
               </a:rPr>
-              <a:t>Icaritin在三期試驗中顯示潛力</a:t>
+              <a:t>HepatoSageCT提高預測準確性。</a:t>
             </a:r>
             <a:endParaRPr lang="en-US" sz="1800" dirty="0"/>
           </a:p>
@@ -6503,7 +6503,7 @@
                 <a:ea typeface="Microsoft JhengHei" pitchFamily="34" charset="-122"/>
                 <a:cs typeface="Microsoft JhengHei" pitchFamily="34" charset="-120"/>
               </a:rPr>
-              <a:t>選擇性MCT4抑制增強抗PD-1</a:t>
+              <a:t>減少病人不必要的內視鏡檢查。</a:t>
             </a:r>
             <a:endParaRPr lang="en-US" sz="1800" dirty="0"/>
           </a:p>
@@ -6524,7 +6524,7 @@
                 <a:ea typeface="Microsoft JhengHei" pitchFamily="34" charset="-122"/>
                 <a:cs typeface="Microsoft JhengHei" pitchFamily="34" charset="-120"/>
               </a:rPr>
-              <a:t>需進行生物標記豐富的組合試驗</a:t>
+              <a:t>個性化病人管理的有希望工具。</a:t>
             </a:r>
             <a:endParaRPr lang="en-US" sz="1800" dirty="0"/>
           </a:p>
@@ -6560,7 +6560,7 @@
                   <a:srgbClr val="888888"/>
                 </a:solidFill>
               </a:rPr>
-              <a:t>Liu Lihui, Wang Jingxiao, Hu Kaiwen. Journal of ethnopharmacology. 2026-05-24 DOI: 10.1016/j.jep.2026.121885</a:t>
+              <a:t>Rabasco Meneghetti Asier, Campani Claudia, Roux Charles et al.. Journal of hepatology. 2026-05-16 DOI: 10.1016/j.jhep.2026.01.021</a:t>
             </a:r>
             <a:endParaRPr lang="en-US" sz="800" dirty="0"/>
           </a:p>
@@ -6760,7 +6760,7 @@
                   </a:extLst>
                 </a:hlinkClick>
               </a:rPr>
-              <a:t>Identifying Neddylation-modified features to assess prognosis and immune efficacy in hepatocellular carcinoma.</a:t>
+              <a:t>Complementary evaluation of phase III immunotherapy trials in advanced HCC using the survival-inferred fragility index.</a:t>
             </a:r>
             <a:endParaRPr lang="en-US" sz="2400" dirty="0"/>
           </a:p>
@@ -6796,7 +6796,7 @@
                   <a:srgbClr val="888888"/>
                 </a:solidFill>
               </a:rPr>
-              <a:t>Apoptosis : an international journal on programmed cell death  ·  Basic Research  ·  🌏 Asia</a:t>
+              <a:t>Digestive and liver disease : official journal of the Italian Society of Gastroenterology and the Italian Association for the Study of the Liver  ·  RCT Phase 3</a:t>
             </a:r>
             <a:endParaRPr lang="en-US" sz="1000" dirty="0"/>
           </a:p>
@@ -6839,7 +6839,7 @@
                 <a:ea typeface="Microsoft JhengHei" pitchFamily="34" charset="-122"/>
                 <a:cs typeface="Microsoft JhengHei" pitchFamily="34" charset="-120"/>
               </a:rPr>
-              <a:t>Neddylation途徑在HCC中活化。</a:t>
+              <a:t>HCC治療轉向免疫檢查點抑制劑。</a:t>
             </a:r>
             <a:endParaRPr lang="en-US" sz="1800" dirty="0"/>
           </a:p>
@@ -6860,7 +6860,7 @@
                 <a:ea typeface="Microsoft JhengHei" pitchFamily="34" charset="-122"/>
                 <a:cs typeface="Microsoft JhengHei" pitchFamily="34" charset="-120"/>
               </a:rPr>
-              <a:t>MLN4924抑制HCC細胞增殖與遷移。</a:t>
+              <a:t>生存推斷脆弱性指數評估試驗穩定性。</a:t>
             </a:r>
             <a:endParaRPr lang="en-US" sz="1800" dirty="0"/>
           </a:p>
@@ -6881,7 +6881,7 @@
                 <a:ea typeface="Microsoft JhengHei" pitchFamily="34" charset="-122"/>
                 <a:cs typeface="Microsoft JhengHei" pitchFamily="34" charset="-120"/>
               </a:rPr>
-              <a:t>高NRS與預後不良相關。</a:t>
+              <a:t>分析六項III期試驗，共4570名患者。</a:t>
             </a:r>
             <a:endParaRPr lang="en-US" sz="1800" dirty="0"/>
           </a:p>
@@ -6902,7 +6902,7 @@
                 <a:ea typeface="Microsoft JhengHei" pitchFamily="34" charset="-122"/>
                 <a:cs typeface="Microsoft JhengHei" pitchFamily="34" charset="-120"/>
               </a:rPr>
-              <a:t>PSMD1敲除降低HCC細胞增殖。</a:t>
+              <a:t>整體生存的中位SIFI為10。</a:t>
             </a:r>
             <a:endParaRPr lang="en-US" sz="1800" dirty="0"/>
           </a:p>
@@ -6923,7 +6923,7 @@
                 <a:ea typeface="Microsoft JhengHei" pitchFamily="34" charset="-122"/>
                 <a:cs typeface="Microsoft JhengHei" pitchFamily="34" charset="-120"/>
               </a:rPr>
-              <a:t>Neddylation特徵預測免疫療效。</a:t>
+              <a:t>亞洲試驗穩定性高於全球試驗。</a:t>
             </a:r>
             <a:endParaRPr lang="en-US" sz="1800" dirty="0"/>
           </a:p>
@@ -6959,7 +6959,7 @@
                   <a:srgbClr val="888888"/>
                 </a:solidFill>
               </a:rPr>
-              <a:t>Liu Zitao, Zuo Cheng, Wu Changlei et al.. Apoptosis : an international journal on programmed cell death. 2026-05-24 DOI: 10.1007/s10495-026-02339-6</a:t>
+              <a:t>Dalbeni A, Vicardi M, Stefanini B et al.. Digestive and liver disease : official journal of the Italian Society of Gastroenterology and the Italian Association for the Study of the Liver. 2026-05-27 DOI: 10.1016/j.dld.2026.04.013</a:t>
             </a:r>
             <a:endParaRPr lang="en-US" sz="800" dirty="0"/>
           </a:p>
@@ -7238,7 +7238,7 @@
                 <a:ea typeface="Microsoft JhengHei" pitchFamily="34" charset="-122"/>
                 <a:cs typeface="Microsoft JhengHei" pitchFamily="34" charset="-120"/>
               </a:rPr>
-              <a:t>第二期研究HAIC與lenvatinib</a:t>
+              <a:t>針對PVTT的HCC II期研究</a:t>
             </a:r>
             <a:endParaRPr lang="en-US" sz="1800" dirty="0"/>
           </a:p>
@@ -7259,7 +7259,7 @@
                 <a:ea typeface="Microsoft JhengHei" pitchFamily="34" charset="-122"/>
                 <a:cs typeface="Microsoft JhengHei" pitchFamily="34" charset="-120"/>
               </a:rPr>
-              <a:t>與單獨PD-1抑制劑比較</a:t>
+              <a:t>HAIC結合lenvatinib和PD-1</a:t>
             </a:r>
             <a:endParaRPr lang="en-US" sz="1800" dirty="0"/>
           </a:p>
@@ -7280,49 +7280,7 @@
                 <a:ea typeface="Microsoft JhengHei" pitchFamily="34" charset="-122"/>
                 <a:cs typeface="Microsoft JhengHei" pitchFamily="34" charset="-120"/>
               </a:rPr>
-              <a:t>針對進展性HCC與PVTT</a:t>
-            </a:r>
-            <a:endParaRPr lang="en-US" sz="1800" dirty="0"/>
-          </a:p>
-          <a:p>
-            <a:pPr marL="342900" indent="-342900">
-              <a:spcAft>
-                <a:spcPts val="800"/>
-              </a:spcAft>
-              <a:buSzPct val="100000"/>
-              <a:buChar char="•"/>
-            </a:pPr>
-            <a:r>
-              <a:rPr lang="en-US" sz="1800" dirty="0">
-                <a:solidFill>
-                  <a:srgbClr val="333333"/>
-                </a:solidFill>
-                <a:latin typeface="Microsoft JhengHei" pitchFamily="34" charset="0"/>
-                <a:ea typeface="Microsoft JhengHei" pitchFamily="34" charset="-122"/>
-                <a:cs typeface="Microsoft JhengHei" pitchFamily="34" charset="-120"/>
-              </a:rPr>
-              <a:t>潛在治癒策略的可能性</a:t>
-            </a:r>
-            <a:endParaRPr lang="en-US" sz="1800" dirty="0"/>
-          </a:p>
-          <a:p>
-            <a:pPr marL="342900" indent="-342900">
-              <a:spcAft>
-                <a:spcPts val="800"/>
-              </a:spcAft>
-              <a:buSzPct val="100000"/>
-              <a:buChar char="•"/>
-            </a:pPr>
-            <a:r>
-              <a:rPr lang="en-US" sz="1800" dirty="0">
-                <a:solidFill>
-                  <a:srgbClr val="333333"/>
-                </a:solidFill>
-                <a:latin typeface="Microsoft JhengHei" pitchFamily="34" charset="0"/>
-                <a:ea typeface="Microsoft JhengHei" pitchFamily="34" charset="-122"/>
-                <a:cs typeface="Microsoft JhengHei" pitchFamily="34" charset="-120"/>
-              </a:rPr>
-              <a:t>患者預後改善的觀察</a:t>
+              <a:t>優於單一療法的結果</a:t>
             </a:r>
             <a:endParaRPr lang="en-US" sz="1800" dirty="0"/>
           </a:p>
@@ -7637,7 +7595,7 @@
                 <a:ea typeface="Microsoft JhengHei" pitchFamily="34" charset="-122"/>
                 <a:cs typeface="Microsoft JhengHei" pitchFamily="34" charset="-120"/>
               </a:rPr>
-              <a:t>針對不可切除的HCC的治療</a:t>
+              <a:t>TACE 與 PD-1 抑制劑聯合</a:t>
             </a:r>
             <a:endParaRPr lang="en-US" sz="1800" dirty="0"/>
           </a:p>
@@ -7658,7 +7616,7 @@
                 <a:ea typeface="Microsoft JhengHei" pitchFamily="34" charset="-122"/>
                 <a:cs typeface="Microsoft JhengHei" pitchFamily="34" charset="-120"/>
               </a:rPr>
-              <a:t>使用經動脈化療栓塞(TACE)</a:t>
+              <a:t>針對 uHCC 的第二期試驗</a:t>
             </a:r>
             <a:endParaRPr lang="en-US" sz="1800" dirty="0"/>
           </a:p>
@@ -7679,7 +7637,7 @@
                 <a:ea typeface="Microsoft JhengHei" pitchFamily="34" charset="-122"/>
                 <a:cs typeface="Microsoft JhengHei" pitchFamily="34" charset="-120"/>
               </a:rPr>
-              <a:t>PD-1抑制劑提升療效</a:t>
+              <a:t>較單獨 TACE 療效更佳</a:t>
             </a:r>
             <a:endParaRPr lang="en-US" sz="1800" dirty="0"/>
           </a:p>

--- a/docs/digest-zh.pptx
+++ b/docs/digest-zh.pptx
@@ -2269,7 +2269,7 @@
                   <a:srgbClr val="888888"/>
                 </a:solidFill>
               </a:rPr>
-              <a:t>2026-05-25 — 2026-06-01</a:t>
+              <a:t>2026-06-01 — 2026-06-08</a:t>
             </a:r>
             <a:endParaRPr lang="en-US" sz="1400" dirty="0"/>
           </a:p>
@@ -2460,7 +2460,7 @@
                   </a:extLst>
                 </a:hlinkClick>
               </a:rPr>
-              <a:t>Durvalumab and tremelimumab combination therapy achieved remarkable response in primary hepatic undifferentiated carcinoma with high PD-L1 expression.</a:t>
+              <a:t>Determinants of long-term survival from atezolizumab plus bevacizumab in unresectable hepatocellular carcinoma.</a:t>
             </a:r>
             <a:endParaRPr lang="en-US" sz="2400" dirty="0"/>
           </a:p>
@@ -2496,7 +2496,7 @@
                   <a:srgbClr val="888888"/>
                 </a:solidFill>
               </a:rPr>
-              <a:t>Clinical journal of gastroenterology  ·  Case Report  ·  🌏 Asia</a:t>
+              <a:t>European journal of cancer (Oxford, England : 1990)  ·  IF 8.4  ·  🌏 Asia</a:t>
             </a:r>
             <a:endParaRPr lang="en-US" sz="1000" dirty="0"/>
           </a:p>
@@ -2539,7 +2539,7 @@
                 <a:ea typeface="Microsoft JhengHei" pitchFamily="34" charset="-122"/>
                 <a:cs typeface="Microsoft JhengHei" pitchFamily="34" charset="-120"/>
               </a:rPr>
-              <a:t>罕見的肝部未分化癌病例</a:t>
+              <a:t>Atezolizumab加bevacizumab顯示長期生存益處。</a:t>
             </a:r>
             <a:endParaRPr lang="en-US" sz="1800" dirty="0"/>
           </a:p>
@@ -2560,7 +2560,7 @@
                 <a:ea typeface="Microsoft JhengHei" pitchFamily="34" charset="-122"/>
                 <a:cs typeface="Microsoft JhengHei" pitchFamily="34" charset="-120"/>
               </a:rPr>
-              <a:t>觀察到高PD-L1表達</a:t>
+              <a:t>長期生存者定義為24個月以上。</a:t>
             </a:r>
             <a:endParaRPr lang="en-US" sz="1800" dirty="0"/>
           </a:p>
@@ -2581,7 +2581,7 @@
                 <a:ea typeface="Microsoft JhengHei" pitchFamily="34" charset="-122"/>
                 <a:cs typeface="Microsoft JhengHei" pitchFamily="34" charset="-120"/>
               </a:rPr>
-              <a:t>Durvalumab和tremelimumab聯合療法</a:t>
+              <a:t>影像學反應者生存率顯著提高。</a:t>
             </a:r>
             <a:endParaRPr lang="en-US" sz="1800" dirty="0"/>
           </a:p>
@@ -2602,7 +2602,7 @@
                 <a:ea typeface="Microsoft JhengHei" pitchFamily="34" charset="-122"/>
                 <a:cs typeface="Microsoft JhengHei" pitchFamily="34" charset="-120"/>
               </a:rPr>
-              <a:t>四個療程後腫瘤縮小</a:t>
+              <a:t>關鍵因素包括肝功能和腫瘤大小。</a:t>
             </a:r>
             <a:endParaRPr lang="en-US" sz="1800" dirty="0"/>
           </a:p>
@@ -2623,7 +2623,7 @@
                 <a:ea typeface="Microsoft JhengHei" pitchFamily="34" charset="-122"/>
                 <a:cs typeface="Microsoft JhengHei" pitchFamily="34" charset="-120"/>
               </a:rPr>
-              <a:t>淋巴結轉移完全消失</a:t>
+              <a:t>AB-Real提供uHCC的實證數據。</a:t>
             </a:r>
             <a:endParaRPr lang="en-US" sz="1800" dirty="0"/>
           </a:p>
@@ -2659,7 +2659,7 @@
                   <a:srgbClr val="888888"/>
                 </a:solidFill>
               </a:rPr>
-              <a:t>Kawahara Michihiko, Fujino Hatsue, Fujii Yasutoshi et al.. Clinical journal of gastroenterology. 2026-05-28 DOI: 10.1007/s12328-026-02329-w</a:t>
+              <a:t>Lee Pei-Chang, Cortellini Alessio, Stefanini Bernardo et al.. European journal of cancer (Oxford, England : 1990). 2026-05-21 DOI: 10.1016/j.ejca.2026.116749</a:t>
             </a:r>
             <a:endParaRPr lang="en-US" sz="800" dirty="0"/>
           </a:p>
@@ -2859,7 +2859,7 @@
                   </a:extLst>
                 </a:hlinkClick>
               </a:rPr>
-              <a:t>A case of a patient with advanced HCC with Vp4 on hemodialysis who responded to a multimodality treatment including hepatic arterial infusion, radiation therapy, immunotherapy, and molecular-targeted drugs.</a:t>
+              <a:t>Prospective Study of Atezolizumab Plus Bevacizumab for Unresectable Hepatocellular Carcinoma Based on Hepatobiliary Phase of Gd-EOB-DTPA-MRI.</a:t>
             </a:r>
             <a:endParaRPr lang="en-US" sz="2400" dirty="0"/>
           </a:p>
@@ -2895,7 +2895,7 @@
                   <a:srgbClr val="888888"/>
                 </a:solidFill>
               </a:rPr>
-              <a:t>Clinical journal of gastroenterology  ·  Case Report  ·  🌏 Asia</a:t>
+              <a:t>Hepatology research : the official journal of the Japan Society of Hepatology  ·  Prospective Study  ·  🌏 Asia</a:t>
             </a:r>
             <a:endParaRPr lang="en-US" sz="1000" dirty="0"/>
           </a:p>
@@ -2938,7 +2938,7 @@
                 <a:ea typeface="Microsoft JhengHei" pitchFamily="34" charset="-122"/>
                 <a:cs typeface="Microsoft JhengHei" pitchFamily="34" charset="-120"/>
               </a:rPr>
-              <a:t>73歲女性，晚期HCC患者</a:t>
+              <a:t>研究使用atezolizumab與bevacizumab</a:t>
             </a:r>
             <a:endParaRPr lang="en-US" sz="1800" dirty="0"/>
           </a:p>
@@ -2959,7 +2959,7 @@
                 <a:ea typeface="Microsoft JhengHei" pitchFamily="34" charset="-122"/>
                 <a:cs typeface="Microsoft JhengHei" pitchFamily="34" charset="-120"/>
               </a:rPr>
-              <a:t>初始治療：肝動脈灌注化療</a:t>
+              <a:t>152位不可切除HCC患者參與</a:t>
             </a:r>
             <a:endParaRPr lang="en-US" sz="1800" dirty="0"/>
           </a:p>
@@ -2980,7 +2980,7 @@
                 <a:ea typeface="Microsoft JhengHei" pitchFamily="34" charset="-122"/>
                 <a:cs typeface="Microsoft JhengHei" pitchFamily="34" charset="-120"/>
               </a:rPr>
-              <a:t>聯合療法：Atezo-Bev</a:t>
+              <a:t>超強度與Wnt信號相關</a:t>
             </a:r>
             <a:endParaRPr lang="en-US" sz="1800" dirty="0"/>
           </a:p>
@@ -3001,7 +3001,7 @@
                 <a:ea typeface="Microsoft JhengHei" pitchFamily="34" charset="-122"/>
                 <a:cs typeface="Microsoft JhengHei" pitchFamily="34" charset="-120"/>
               </a:rPr>
-              <a:t>LEN-CDDP治療獲得部分反應</a:t>
+              <a:t>超強度組ORR較高</a:t>
             </a:r>
             <a:endParaRPr lang="en-US" sz="1800" dirty="0"/>
           </a:p>
@@ -3022,7 +3022,7 @@
                 <a:ea typeface="Microsoft JhengHei" pitchFamily="34" charset="-122"/>
                 <a:cs typeface="Microsoft JhengHei" pitchFamily="34" charset="-120"/>
               </a:rPr>
-              <a:t>Dur-Tre療法持續完全反應</a:t>
+              <a:t>未發現對組合療法抗性</a:t>
             </a:r>
             <a:endParaRPr lang="en-US" sz="1800" dirty="0"/>
           </a:p>
@@ -3058,7 +3058,7 @@
                   <a:srgbClr val="888888"/>
                 </a:solidFill>
               </a:rPr>
-              <a:t>Kosaka Yumi, Yoshikawa Yuki, Nakahara Takashi et al.. Clinical journal of gastroenterology. 2026-05-28 DOI: 10.1007/s12328-026-02300-9</a:t>
+              <a:t>Aoki Tomoko, Kudo Masatoshi, Ueshima Kazuomi et al.. Hepatology research : the official journal of the Japan Society of Hepatology. 2026-06-06 DOI: 10.1111/hepr.70157</a:t>
             </a:r>
             <a:endParaRPr lang="en-US" sz="800" dirty="0"/>
           </a:p>
@@ -3258,7 +3258,7 @@
                   </a:extLst>
                 </a:hlinkClick>
               </a:rPr>
-              <a:t>Successful treatment of &amp;#x3b2;-catenin-positive, immune checkpoint inhibitor-resistant tumor in a case of multicentric hepatocellular carcinoma.</a:t>
+              <a:t>Erratum: Hepatectomy alters adjuvant anti-PD-1 action in a mouse model of HCC but does not compromise neoadjuvant efficacy.</a:t>
             </a:r>
             <a:endParaRPr lang="en-US" sz="2400" dirty="0"/>
           </a:p>
@@ -3294,7 +3294,7 @@
                   <a:srgbClr val="888888"/>
                 </a:solidFill>
               </a:rPr>
-              <a:t>Clinical journal of gastroenterology  ·  🌏 Asia</a:t>
+              <a:t>Hepatology (Baltimore, Md.)  ·  IF 12.9  ·  Basic Research</a:t>
             </a:r>
             <a:endParaRPr lang="en-US" sz="1000" dirty="0"/>
           </a:p>
@@ -3337,7 +3337,7 @@
                 <a:ea typeface="Microsoft JhengHei" pitchFamily="34" charset="-122"/>
                 <a:cs typeface="Microsoft JhengHei" pitchFamily="34" charset="-120"/>
               </a:rPr>
-              <a:t>70歲女性多中心肝癌病例</a:t>
+              <a:t>肝切除影響抗PD-1療法</a:t>
             </a:r>
             <a:endParaRPr lang="en-US" sz="1800" dirty="0"/>
           </a:p>
@@ -3358,7 +3358,7 @@
                 <a:ea typeface="Microsoft JhengHei" pitchFamily="34" charset="-122"/>
                 <a:cs typeface="Microsoft JhengHei" pitchFamily="34" charset="-120"/>
               </a:rPr>
-              <a:t>β-catenin與免疫檢查點抑制抵抗相關</a:t>
+              <a:t>新輔助療效保持不變</a:t>
             </a:r>
             <a:endParaRPr lang="en-US" sz="1800" dirty="0"/>
           </a:p>
@@ -3379,49 +3379,7 @@
                 <a:ea typeface="Microsoft JhengHei" pitchFamily="34" charset="-122"/>
                 <a:cs typeface="Microsoft JhengHei" pitchFamily="34" charset="-120"/>
               </a:rPr>
-              <a:t>質子束治療達到局部控制</a:t>
-            </a:r>
-            <a:endParaRPr lang="en-US" sz="1800" dirty="0"/>
-          </a:p>
-          <a:p>
-            <a:pPr marL="342900" indent="-342900">
-              <a:spcAft>
-                <a:spcPts val="800"/>
-              </a:spcAft>
-              <a:buSzPct val="100000"/>
-              <a:buChar char="•"/>
-            </a:pPr>
-            <a:r>
-              <a:rPr lang="en-US" sz="1800" dirty="0">
-                <a:solidFill>
-                  <a:srgbClr val="333333"/>
-                </a:solidFill>
-                <a:latin typeface="Microsoft JhengHei" pitchFamily="34" charset="0"/>
-                <a:ea typeface="Microsoft JhengHei" pitchFamily="34" charset="-122"/>
-                <a:cs typeface="Microsoft JhengHei" pitchFamily="34" charset="-120"/>
-              </a:rPr>
-              <a:t>持續治療維持其他結節緩解</a:t>
-            </a:r>
-            <a:endParaRPr lang="en-US" sz="1800" dirty="0"/>
-          </a:p>
-          <a:p>
-            <a:pPr marL="342900" indent="-342900">
-              <a:spcAft>
-                <a:spcPts val="800"/>
-              </a:spcAft>
-              <a:buSzPct val="100000"/>
-              <a:buChar char="•"/>
-            </a:pPr>
-            <a:r>
-              <a:rPr lang="en-US" sz="1800" dirty="0">
-                <a:solidFill>
-                  <a:srgbClr val="333333"/>
-                </a:solidFill>
-                <a:latin typeface="Microsoft JhengHei" pitchFamily="34" charset="0"/>
-                <a:ea typeface="Microsoft JhengHei" pitchFamily="34" charset="-122"/>
-                <a:cs typeface="Microsoft JhengHei" pitchFamily="34" charset="-120"/>
-              </a:rPr>
-              <a:t>分子分析對個性化治療至關重要</a:t>
+              <a:t>使用小鼠模型進行研究</a:t>
             </a:r>
             <a:endParaRPr lang="en-US" sz="1800" dirty="0"/>
           </a:p>
@@ -3457,7 +3415,7 @@
                   <a:srgbClr val="888888"/>
                 </a:solidFill>
               </a:rPr>
-              <a:t>Nomiya Hirotaka, Matsuda Hidetaka, Nosaka Takuto et al.. Clinical journal of gastroenterology. 2026-05-31 DOI: 10.1007/s12328-025-02266-0</a:t>
+              <a:t>Bouguerra Roqiya, El Hajji Sofia, Wassmer Charles-Henri et al.. Hepatology (Baltimore, Md.). 2026-06-05 DOI: 10.1097/HEP.0000000000001731</a:t>
             </a:r>
             <a:endParaRPr lang="en-US" sz="800" dirty="0"/>
           </a:p>
@@ -3648,7 +3606,7 @@
                   <a:srgbClr val="FFFFFF"/>
                 </a:solidFill>
               </a:rPr>
-              <a:t>### 綜合啟示 (Overall Insights)</a:t>
+              <a:t>### 綜合啟示（Overall Insights）</a:t>
             </a:r>
             <a:endParaRPr lang="en-US" sz="1200" dirty="0"/>
           </a:p>
@@ -3674,7 +3632,7 @@
                   <a:srgbClr val="FFFFFF"/>
                 </a:solidFill>
               </a:rPr>
-              <a:t>1. **免疫治療的前景**  </a:t>
+              <a:t>1. **免疫檢查點抑制劑的應用潛力**  </a:t>
             </a:r>
             <a:endParaRPr lang="en-US" sz="1200" dirty="0"/>
           </a:p>
@@ -3691,7 +3649,7 @@
                   <a:srgbClr val="FFFFFF"/>
                 </a:solidFill>
               </a:rPr>
-              <a:t>   The combination of immune checkpoint inhibitors (ICIs) with other therapies, such as targeted agents and radiotherapy, shows promising efficacy in advanced hepatocellular carcinoma (HCC).  </a:t>
+              <a:t>   The use of dual immune checkpoint inhibitors (ICIs) targeting CTLA-4 and PD-1/PD-L1 has shown promise in reshaping treatment for unresectable HCC, yet their clinical uptake is hindered by severe immune-related adverse events.  </a:t>
             </a:r>
             <a:endParaRPr lang="en-US" sz="1200" dirty="0"/>
           </a:p>
@@ -3708,7 +3666,7 @@
                   <a:srgbClr val="FFFFFF"/>
                 </a:solidFill>
               </a:rPr>
-              <a:t>   免疫檢查點抑制劑（ICIs）與其他療法（如靶向藥物和放療）的聯合使用在晚期肝細胞癌（HCC）中顯示出有希望的療效。</a:t>
+              <a:t>   雙重免疫檢查點抑制劑（如CTLA-4和PD-1/PD-L1）的應用潛力顯示出在不可切除肝細胞癌（HCC）治療中的前景，但其臨床應用受到嚴重免疫相關不良事件的限制。</a:t>
             </a:r>
             <a:endParaRPr lang="en-US" sz="1200" dirty="0"/>
           </a:p>
@@ -3734,7 +3692,7 @@
                   <a:srgbClr val="FFFFFF"/>
                 </a:solidFill>
               </a:rPr>
-              <a:t>2. **高風險患者的預後改善**  </a:t>
+              <a:t>2. **新輔助療法的前景**  </a:t>
             </a:r>
             <a:endParaRPr lang="en-US" sz="1200" dirty="0"/>
           </a:p>
@@ -3751,7 +3709,7 @@
                   <a:srgbClr val="FFFFFF"/>
                 </a:solidFill>
               </a:rPr>
-              <a:t>   The IMbrave050 trial demonstrates that adjuvant therapy with atezolizumab and bevacizumab significantly improves recurrence-free survival in high-risk HCC patients.  </a:t>
+              <a:t>   Atezolizumab combined with bevacizumab has demonstrated improved recurrence-free survival in high-risk HCC patients, indicating a potential shift towards adjuvant immunotherapy strategies.  </a:t>
             </a:r>
             <a:endParaRPr lang="en-US" sz="1200" dirty="0"/>
           </a:p>
@@ -3768,7 +3726,7 @@
                   <a:srgbClr val="FFFFFF"/>
                 </a:solidFill>
               </a:rPr>
-              <a:t>   IMbrave050試驗顯示，阿特珠單抗和貝伐單抗的輔助療法顯著改善高風險HCC患者的無復發生存期。</a:t>
+              <a:t>   阿特珠單抗與貝伐單抗的聯合使用在高風險HCC患者中顯示出改善無復發生存期的潛力，這表明輔助免疫療法策略可能會有新的轉變。</a:t>
             </a:r>
             <a:endParaRPr lang="en-US" sz="1200" dirty="0"/>
           </a:p>
@@ -3794,7 +3752,7 @@
                   <a:srgbClr val="FFFFFF"/>
                 </a:solidFill>
               </a:rPr>
-              <a:t>3. **副作用管理的重要性**  </a:t>
+              <a:t>3. **腫瘤微環境的影響**  </a:t>
             </a:r>
             <a:endParaRPr lang="en-US" sz="1200" dirty="0"/>
           </a:p>
@@ -3811,7 +3769,7 @@
                   <a:srgbClr val="FFFFFF"/>
                 </a:solidFill>
               </a:rPr>
-              <a:t>   The use of prophylactic corticosteroids may help mitigate severe immune-related adverse events associated with dual ICI therapy, enhancing treatment tolerability.  </a:t>
+              <a:t>   The tumor immune microenvironment (TIME) plays a critical role in modulating responses to ICIs, with HCC exhibiting significant intratumoral heterogeneity that complicates treatment efficacy.  </a:t>
             </a:r>
             <a:endParaRPr lang="en-US" sz="1200" dirty="0"/>
           </a:p>
@@ -3828,7 +3786,7 @@
                   <a:srgbClr val="FFFFFF"/>
                 </a:solidFill>
               </a:rPr>
-              <a:t>   使用預防性皮質類固醇可能有助於減輕與雙重ICIs療法相關的嚴重免疫相關不良事件，提高治療耐受性。</a:t>
+              <a:t>   腫瘤免疫微環境（TIME）在調節對免疫檢查點抑制劑的反應中起著關鍵作用，而HCC的腫瘤內異質性顯著，這使得治療效果變得複雜。</a:t>
             </a:r>
             <a:endParaRPr lang="en-US" sz="1200" dirty="0"/>
           </a:p>
@@ -3854,7 +3812,7 @@
                   <a:srgbClr val="FFFFFF"/>
                 </a:solidFill>
               </a:rPr>
-              <a:t>4. **人工智慧的潛力**  </a:t>
+              <a:t>4. **非侵入性檢測技術的發展**  </a:t>
             </a:r>
             <a:endParaRPr lang="en-US" sz="1200" dirty="0"/>
           </a:p>
@@ -3871,7 +3829,7 @@
                   <a:srgbClr val="FFFFFF"/>
                 </a:solidFill>
               </a:rPr>
-              <a:t>   Non-invasive AI models for detecting esophageal varices may improve early intervention strategies in patients with unresectable HCC, potentially enhancing overall outcomes.  </a:t>
+              <a:t>   Advances in AI-driven non-invasive models for detecting esophageal varices in cirrhotic patients with HCC could lead to earlier interventions and improved patient outcomes.  </a:t>
             </a:r>
             <a:endParaRPr lang="en-US" sz="1200" dirty="0"/>
           </a:p>
@@ -3888,7 +3846,7 @@
                   <a:srgbClr val="FFFFFF"/>
                 </a:solidFill>
               </a:rPr>
-              <a:t>   用於檢測食道靜脈曲張的非侵入性AI模型可能改善不可切除HCC患者的早期介入策略，從而提高整體預後。</a:t>
+              <a:t>   基於人工智慧的非侵入性模型在檢測伴有肝硬化的HCC患者食道靜脈曲張方面的進展，可能會導致更早的干預和改善患者的預後。</a:t>
             </a:r>
             <a:endParaRPr lang="en-US" sz="1200" dirty="0"/>
           </a:p>
@@ -3914,7 +3872,7 @@
                   <a:srgbClr val="FFFFFF"/>
                 </a:solidFill>
               </a:rPr>
-              <a:t>5. **多模態治療的成功案例**  </a:t>
+              <a:t>5. **多模式治療策略的必要性**  </a:t>
             </a:r>
             <a:endParaRPr lang="en-US" sz="1200" dirty="0"/>
           </a:p>
@@ -3931,7 +3889,7 @@
                   <a:srgbClr val="FFFFFF"/>
                 </a:solidFill>
               </a:rPr>
-              <a:t>   Reports of successful multimodal treatments highlight the potential for personalized approaches in managing complex cases of HCC, particularly those with portal vein tumor thrombosis.</a:t>
+              <a:t>   The integration of multiple treatment modalities, including immunotherapy and radiotherapy, is essential to address the challenge of recurrence in HCC post-curative treatment.</a:t>
             </a:r>
             <a:endParaRPr lang="en-US" sz="1200" dirty="0"/>
           </a:p>
@@ -4077,7 +4035,7 @@
                   <a:srgbClr val="FFFFFF"/>
                 </a:solidFill>
               </a:rPr>
-              <a:t>成功的多模態治療案例突顯了在管理複雜HCC病例（尤其是伴有門靜脈腫瘤栓塞的病例）中個性化治療的潛力。</a:t>
+              <a:t>整合多種治療模式，包括免疫療法和放療，對於解決HCC在根治性治療後復發的挑戰至關重要。</a:t>
             </a:r>
             <a:endParaRPr lang="en-US" sz="1200" dirty="0"/>
           </a:p>
@@ -4103,7 +4061,7 @@
                   <a:srgbClr val="FFFFFF"/>
                 </a:solidFill>
               </a:rPr>
-              <a:t>### 未來研究方向 (Future Research Directions)</a:t>
+              <a:t>### 未來研究方向（Future Research Directions）</a:t>
             </a:r>
             <a:endParaRPr lang="en-US" sz="1200" dirty="0"/>
           </a:p>
@@ -4129,7 +4087,7 @@
                   <a:srgbClr val="FFFFFF"/>
                 </a:solidFill>
               </a:rPr>
-              <a:t>1. **探索新療法的組合**  </a:t>
+              <a:t>1. **探索免疫相關不良事件的管理策略**  </a:t>
             </a:r>
             <a:endParaRPr lang="en-US" sz="1200" dirty="0"/>
           </a:p>
@@ -4146,7 +4104,7 @@
                   <a:srgbClr val="FFFFFF"/>
                 </a:solidFill>
               </a:rPr>
-              <a:t>   Future studies should investigate novel combinations of ICIs with other therapeutic modalities to further enhance treatment efficacy in HCC.  </a:t>
+              <a:t>   Future studies should focus on optimizing prophylactic measures, such as corticosteroids, to mitigate severe immune-related adverse events associated with ICIs in HCC.  </a:t>
             </a:r>
             <a:endParaRPr lang="en-US" sz="1200" dirty="0"/>
           </a:p>
@@ -4163,7 +4121,7 @@
                   <a:srgbClr val="FFFFFF"/>
                 </a:solidFill>
               </a:rPr>
-              <a:t>   未來的研究應探索ICIs與其他治療方式的新型組合，以進一步提高HCC的治療效果。</a:t>
+              <a:t>   未來的研究應集中於優化預防措施，如皮質類固醇，以減輕與HCC中免疫檢查點抑制劑相關的嚴重免疫相關不良事件。</a:t>
             </a:r>
             <a:endParaRPr lang="en-US" sz="1200" dirty="0"/>
           </a:p>
@@ -4189,7 +4147,7 @@
                   <a:srgbClr val="FFFFFF"/>
                 </a:solidFill>
               </a:rPr>
-              <a:t>2. **副作用的預測與管理**  </a:t>
+              <a:t>2. **長期療效的評估**  </a:t>
             </a:r>
             <a:endParaRPr lang="en-US" sz="1200" dirty="0"/>
           </a:p>
@@ -4206,7 +4164,7 @@
                   <a:srgbClr val="FFFFFF"/>
                 </a:solidFill>
               </a:rPr>
-              <a:t>   Research should focus on identifying biomarkers that predict severe immune-related adverse events to optimize the use of prophylactic strategies.  </a:t>
+              <a:t>   There is a need for long-term follow-up studies to assess the sustained efficacy and safety of atezolizumab plus bevacizumab in unresectable HCC.  </a:t>
             </a:r>
             <a:endParaRPr lang="en-US" sz="1200" dirty="0"/>
           </a:p>
@@ -4223,7 +4181,7 @@
                   <a:srgbClr val="FFFFFF"/>
                 </a:solidFill>
               </a:rPr>
-              <a:t>   研究應集中於識別預測嚴重免疫相關不良事件的生物標記，以優化預防性策略的使用。</a:t>
+              <a:t>   需要進行長期隨訪研究，以評估阿特珠單抗與貝伐單抗在不可切除HCC中的持續療效和安全性。</a:t>
             </a:r>
             <a:endParaRPr lang="en-US" sz="1200" dirty="0"/>
           </a:p>
@@ -4249,7 +4207,7 @@
                   <a:srgbClr val="FFFFFF"/>
                 </a:solidFill>
               </a:rPr>
-              <a:t>3. **AI技術的應用擴展**  </a:t>
+              <a:t>3. **腫瘤微環境的深入研究**  </a:t>
             </a:r>
             <a:endParaRPr lang="en-US" sz="1200" dirty="0"/>
           </a:p>
@@ -4266,7 +4224,7 @@
                   <a:srgbClr val="FFFFFF"/>
                 </a:solidFill>
               </a:rPr>
-              <a:t>   Expanding the use of AI in predicting treatment responses and complications in HCC could lead to more tailored and effective management strategies.  </a:t>
+              <a:t>   Investigating the specific components and dynamics of the tumor immune microenvironment in HCC can provide insights into resistance mechanisms and inform treatment strategies.  </a:t>
             </a:r>
             <a:endParaRPr lang="en-US" sz="1200" dirty="0"/>
           </a:p>
@@ -4283,7 +4241,7 @@
                   <a:srgbClr val="FFFFFF"/>
                 </a:solidFill>
               </a:rPr>
-              <a:t>   擴大AI在預測HCC治療反應和併發症中的應用可能導致更具針對性和有效的管理策略。</a:t>
+              <a:t>   深入研究HCC中腫瘤免疫微環境的具體組成和動態，能提供對抗藥物抵抗機制的見解，並指導治療策略。</a:t>
             </a:r>
             <a:endParaRPr lang="en-US" sz="1200" dirty="0"/>
           </a:p>
@@ -4309,7 +4267,7 @@
                   <a:srgbClr val="FFFFFF"/>
                 </a:solidFill>
               </a:rPr>
-              <a:t>4. **長期療效的評估**  </a:t>
+              <a:t>4. **多模式治療的臨床試驗**  </a:t>
             </a:r>
             <a:endParaRPr lang="en-US" sz="1200" dirty="0"/>
           </a:p>
@@ -4326,7 +4284,7 @@
                   <a:srgbClr val="FFFFFF"/>
                 </a:solidFill>
               </a:rPr>
-              <a:t>   Long-term follow-up studies are needed to assess the durability of responses to combination therapies in HCC and their impact on overall survival.  </a:t>
+              <a:t>   Conducting clinical trials that evaluate the efficacy of multimodal treatment approaches, including combining immunotherapy with radiotherapy, is crucial for improving patient outcomes.  </a:t>
             </a:r>
             <a:endParaRPr lang="en-US" sz="1200" dirty="0"/>
           </a:p>
@@ -4343,7 +4301,7 @@
                   <a:srgbClr val="FFFFFF"/>
                 </a:solidFill>
               </a:rPr>
-              <a:t>   需要長期隨訪研究來評估HCC中聯合療法反應的持久性及其對整體生存的影響。</a:t>
+              <a:t>   開展臨床試驗，評估多模式治療方法的療效，包括將免疫療法與放療結合，對改善患者預後至關重要。</a:t>
             </a:r>
             <a:endParaRPr lang="en-US" sz="1200" dirty="0"/>
           </a:p>
@@ -4369,7 +4327,7 @@
                   <a:srgbClr val="FFFFFF"/>
                 </a:solidFill>
               </a:rPr>
-              <a:t>5. **個體化治療的發展**  </a:t>
+              <a:t>5. **AI在臨床決策中的應用**  </a:t>
             </a:r>
             <a:endParaRPr lang="en-US" sz="1200" dirty="0"/>
           </a:p>
@@ -4386,7 +4344,7 @@
                   <a:srgbClr val="FFFFFF"/>
                 </a:solidFill>
               </a:rPr>
-              <a:t>   Future research should aim to develop personalized treatment regimens based on genetic and molecular profiling of tumors in HCC patients.  </a:t>
+              <a:t>   Further development of AI-based models for predicting complications in HCC patients could enhance clinical decision-making and personalized treatment strategies.  </a:t>
             </a:r>
             <a:endParaRPr lang="en-US" sz="1200" dirty="0"/>
           </a:p>
@@ -4403,7 +4361,7 @@
                   <a:srgbClr val="FFFFFF"/>
                 </a:solidFill>
               </a:rPr>
-              <a:t>   未來的研究應致力於根據HCC患者腫瘤的基因和分子特徵開發個體化治療方案。</a:t>
+              <a:t>   進一步開發基於人工智慧的模型以預測HCC患者的併發症，可能會增強臨床決策和個性化治療策略。</a:t>
             </a:r>
             <a:endParaRPr lang="en-US" sz="1200" dirty="0"/>
           </a:p>
@@ -4676,7 +4634,7 @@
                 <a:ea typeface="Arial" pitchFamily="34" charset="-122"/>
                 <a:cs typeface="Arial" pitchFamily="34" charset="-120"/>
               </a:rPr>
-              <a:t>Updated data from IMbrave050: Adjuvant atezolizumab plus bevacizumab for high-ri…</a:t>
+              <a:t>Revisiting prophylactic corticosteroids to mitigate severe immune-related advers…</a:t>
             </a:r>
             <a:endParaRPr lang="en-US" sz="1400" dirty="0"/>
           </a:p>
@@ -4713,7 +4671,7 @@
                 <a:ea typeface="Arial" pitchFamily="34" charset="-122"/>
                 <a:cs typeface="Arial" pitchFamily="34" charset="-120"/>
               </a:rPr>
-              <a:t>Revisiting prophylactic corticosteroids to mitigate severe immune-related advers…</a:t>
+              <a:t>Updated data from IMbrave050: Adjuvant atezolizumab plus bevacizumab for high-ri…</a:t>
             </a:r>
             <a:endParaRPr lang="en-US" sz="1400" dirty="0"/>
           </a:p>
@@ -4750,7 +4708,7 @@
                 <a:ea typeface="Arial" pitchFamily="34" charset="-122"/>
                 <a:cs typeface="Arial" pitchFamily="34" charset="-120"/>
               </a:rPr>
-              <a:t>Effect and safety of tislelizumab combined with anlotinib and radiotherapy in ad…</a:t>
+              <a:t>Phase Ib/II trial to evaluate the safety and efficacy of atezolizumab and bevaci…</a:t>
             </a:r>
             <a:endParaRPr lang="en-US" sz="1400" dirty="0"/>
           </a:p>
@@ -4787,7 +4745,7 @@
                 <a:ea typeface="Arial" pitchFamily="34" charset="-122"/>
                 <a:cs typeface="Arial" pitchFamily="34" charset="-120"/>
               </a:rPr>
-              <a:t>Detection of esophageal varices and prediction of hepatic decompensation in unre…</a:t>
+              <a:t>Early and late survival dynamics of immunotherapy combinations in advanced HCC: …</a:t>
             </a:r>
             <a:endParaRPr lang="en-US" sz="1400" dirty="0"/>
           </a:p>
@@ -4824,7 +4782,7 @@
                 <a:ea typeface="Arial" pitchFamily="34" charset="-122"/>
                 <a:cs typeface="Arial" pitchFamily="34" charset="-120"/>
               </a:rPr>
-              <a:t>Complementary evaluation of phase III immunotherapy trials in advanced HCC using…</a:t>
+              <a:t>Multimodal sequencing identifies synergistic mechanisms driving resistance to ne…</a:t>
             </a:r>
             <a:endParaRPr lang="en-US" sz="1400" dirty="0"/>
           </a:p>
@@ -4861,7 +4819,7 @@
                 <a:ea typeface="Arial" pitchFamily="34" charset="-122"/>
                 <a:cs typeface="Arial" pitchFamily="34" charset="-120"/>
               </a:rPr>
-              <a:t>Immunotherapy in Hepatocellular Carcinoma with Portal Vein Tumour Thrombosis: Fr…</a:t>
+              <a:t>Detection of esophageal varices and prediction of hepatic decompensation in unre…</a:t>
             </a:r>
             <a:endParaRPr lang="en-US" sz="1400" dirty="0"/>
           </a:p>
@@ -4898,7 +4856,7 @@
                 <a:ea typeface="Arial" pitchFamily="34" charset="-122"/>
                 <a:cs typeface="Arial" pitchFamily="34" charset="-120"/>
               </a:rPr>
-              <a:t>… plus transarterial chemoembolization and PD-1 inhibitors as conversion therapi…</a:t>
+              <a:t>Integrating Multiple Outcomes of First-Line Immunotherapy-Based Regimens for Adv…</a:t>
             </a:r>
             <a:endParaRPr lang="en-US" sz="1400" dirty="0"/>
           </a:p>
@@ -4935,7 +4893,7 @@
                 <a:ea typeface="Arial" pitchFamily="34" charset="-122"/>
                 <a:cs typeface="Arial" pitchFamily="34" charset="-120"/>
               </a:rPr>
-              <a:t>Durvalumab and tremelimumab combination therapy achieved remarkable response in …</a:t>
+              <a:t>Determinants of long-term survival from atezolizumab plus bevacizumab in unresec…</a:t>
             </a:r>
             <a:endParaRPr lang="en-US" sz="1400" dirty="0"/>
           </a:p>
@@ -4972,7 +4930,7 @@
                 <a:ea typeface="Arial" pitchFamily="34" charset="-122"/>
                 <a:cs typeface="Arial" pitchFamily="34" charset="-120"/>
               </a:rPr>
-              <a:t>A case of a patient with advanced HCC with Vp4 on hemodialysis who responded to …</a:t>
+              <a:t>Prospective Study of Atezolizumab Plus Bevacizumab for Unresectable Hepatocellul…</a:t>
             </a:r>
             <a:endParaRPr lang="en-US" sz="1400" dirty="0"/>
           </a:p>
@@ -5009,7 +4967,7 @@
                 <a:ea typeface="Arial" pitchFamily="34" charset="-122"/>
                 <a:cs typeface="Arial" pitchFamily="34" charset="-120"/>
               </a:rPr>
-              <a:t>Successful treatment of &amp;#x3b2;-catenin-positive, immune checkpoint inhibitor-re…</a:t>
+              <a:t>Erratum: Hepatectomy alters adjuvant anti-PD-1 action in a mouse model of HCC bu…</a:t>
             </a:r>
             <a:endParaRPr lang="en-US" sz="1400" dirty="0"/>
           </a:p>
@@ -5164,7 +5122,7 @@
                   </a:extLst>
                 </a:hlinkClick>
               </a:rPr>
-              <a:t>Updated data from IMbrave050: Adjuvant atezolizumab plus bevacizumab for high-risk hepatocellular carcinoma.</a:t>
+              <a:t>Revisiting prophylactic corticosteroids to mitigate severe immune-related adverse events in hepatocellular carcinoma.</a:t>
             </a:r>
             <a:endParaRPr lang="en-US" sz="2400" dirty="0"/>
           </a:p>
@@ -5200,7 +5158,7 @@
                   <a:srgbClr val="888888"/>
                 </a:solidFill>
               </a:rPr>
-              <a:t>Journal of hepatology  ·  IF 25.7  ·  RCT  ·  🌏 Asia</a:t>
+              <a:t>Journal of hepatology  ·  IF 25.7  ·  Prospective Study  ·  🌏 Asia</a:t>
             </a:r>
             <a:endParaRPr lang="en-US" sz="1000" dirty="0"/>
           </a:p>
@@ -5243,7 +5201,7 @@
                 <a:ea typeface="Microsoft JhengHei" pitchFamily="34" charset="-122"/>
                 <a:cs typeface="Microsoft JhengHei" pitchFamily="34" charset="-120"/>
               </a:rPr>
-              <a:t>IMbrave050達成RFS主要終點</a:t>
+              <a:t>雙重ICI改變HCC治療格局。</a:t>
             </a:r>
             <a:endParaRPr lang="en-US" sz="1800" dirty="0"/>
           </a:p>
@@ -5264,7 +5222,7 @@
                 <a:ea typeface="Microsoft JhengHei" pitchFamily="34" charset="-122"/>
                 <a:cs typeface="Microsoft JhengHei" pitchFamily="34" charset="-120"/>
               </a:rPr>
-              <a:t>治療與監測RFS HR為0.72</a:t>
+              <a:t>嚴重irAE限制ICI臨床應用。</a:t>
             </a:r>
             <a:endParaRPr lang="en-US" sz="1800" dirty="0"/>
           </a:p>
@@ -5285,7 +5243,7 @@
                 <a:ea typeface="Microsoft JhengHei" pitchFamily="34" charset="-122"/>
                 <a:cs typeface="Microsoft JhengHei" pitchFamily="34" charset="-120"/>
               </a:rPr>
-              <a:t>更新分析中OS數據仍不成熟</a:t>
+              <a:t>預防性類固醇減少嚴重irAE。</a:t>
             </a:r>
             <a:endParaRPr lang="en-US" sz="1800" dirty="0"/>
           </a:p>
@@ -5306,7 +5264,7 @@
                 <a:ea typeface="Microsoft JhengHei" pitchFamily="34" charset="-122"/>
                 <a:cs typeface="Microsoft JhengHei" pitchFamily="34" charset="-120"/>
               </a:rPr>
-              <a:t>初始RFS效益隨時間未持續</a:t>
+              <a:t>類固醇不影響T細胞活化。</a:t>
             </a:r>
             <a:endParaRPr lang="en-US" sz="1800" dirty="0"/>
           </a:p>
@@ -5327,7 +5285,7 @@
                 <a:ea typeface="Microsoft JhengHei" pitchFamily="34" charset="-122"/>
                 <a:cs typeface="Microsoft JhengHei" pitchFamily="34" charset="-120"/>
               </a:rPr>
-              <a:t>安全性概況一致且可控</a:t>
+              <a:t>需在HCC中前瞻性評估。</a:t>
             </a:r>
             <a:endParaRPr lang="en-US" sz="1800" dirty="0"/>
           </a:p>
@@ -5363,7 +5321,7 @@
                   <a:srgbClr val="888888"/>
                 </a:solidFill>
               </a:rPr>
-              <a:t>Yopp Adam, Chen Minshan, Cheng Ann-Lii et al.. Journal of hepatology. 2026-05-16 DOI: 10.1016/j.jhep.2026.01.006</a:t>
+              <a:t>Shen Ying-Chun, Pinato David J, Liu Tsung-Hao et al.. Journal of hepatology. 2026-06-06 DOI: 10.1016/j.jhep.2026.01.009</a:t>
             </a:r>
             <a:endParaRPr lang="en-US" sz="800" dirty="0"/>
           </a:p>
@@ -5563,7 +5521,7 @@
                   </a:extLst>
                 </a:hlinkClick>
               </a:rPr>
-              <a:t>Revisiting prophylactic corticosteroids to mitigate severe immune-related adverse events in hepatocellular carcinoma.</a:t>
+              <a:t>Updated data from IMbrave050: Adjuvant atezolizumab plus bevacizumab for high-risk hepatocellular carcinoma.</a:t>
             </a:r>
             <a:endParaRPr lang="en-US" sz="2400" dirty="0"/>
           </a:p>
@@ -5642,7 +5600,7 @@
                 <a:ea typeface="Microsoft JhengHei" pitchFamily="34" charset="-122"/>
                 <a:cs typeface="Microsoft JhengHei" pitchFamily="34" charset="-120"/>
               </a:rPr>
-              <a:t>雙重ICI改變HCC治療格局。</a:t>
+              <a:t>IMbrave050達成RFS主要終點。</a:t>
             </a:r>
             <a:endParaRPr lang="en-US" sz="1800" dirty="0"/>
           </a:p>
@@ -5663,7 +5621,7 @@
                 <a:ea typeface="Microsoft JhengHei" pitchFamily="34" charset="-122"/>
                 <a:cs typeface="Microsoft JhengHei" pitchFamily="34" charset="-120"/>
               </a:rPr>
-              <a:t>嚴重irAE限制ICI臨床應用。</a:t>
+              <a:t>治療與監測RFS HR為0.72。</a:t>
             </a:r>
             <a:endParaRPr lang="en-US" sz="1800" dirty="0"/>
           </a:p>
@@ -5684,7 +5642,7 @@
                 <a:ea typeface="Microsoft JhengHei" pitchFamily="34" charset="-122"/>
                 <a:cs typeface="Microsoft JhengHei" pitchFamily="34" charset="-120"/>
               </a:rPr>
-              <a:t>預防性類固醇減少嚴重irAE。</a:t>
+              <a:t>第二次IA OS數據仍不成熟。</a:t>
             </a:r>
             <a:endParaRPr lang="en-US" sz="1800" dirty="0"/>
           </a:p>
@@ -5705,7 +5663,7 @@
                 <a:ea typeface="Microsoft JhengHei" pitchFamily="34" charset="-122"/>
                 <a:cs typeface="Microsoft JhengHei" pitchFamily="34" charset="-120"/>
               </a:rPr>
-              <a:t>類固醇不影響T細胞活化。</a:t>
+              <a:t>更新分析中RFS初始益處未持續。</a:t>
             </a:r>
             <a:endParaRPr lang="en-US" sz="1800" dirty="0"/>
           </a:p>
@@ -5726,7 +5684,7 @@
                 <a:ea typeface="Microsoft JhengHei" pitchFamily="34" charset="-122"/>
                 <a:cs typeface="Microsoft JhengHei" pitchFamily="34" charset="-120"/>
               </a:rPr>
-              <a:t>需在HCC進行前瞻性評估。</a:t>
+              <a:t>安全性資料與先前結果一致。</a:t>
             </a:r>
             <a:endParaRPr lang="en-US" sz="1800" dirty="0"/>
           </a:p>
@@ -5762,7 +5720,7 @@
                   <a:srgbClr val="888888"/>
                 </a:solidFill>
               </a:rPr>
-              <a:t>Shen Ying-Chun, Pinato David J, Liu Tsung-Hao et al.. Journal of hepatology. 2026-05-16 DOI: 10.1016/j.jhep.2026.01.009</a:t>
+              <a:t>Yopp Adam, Chen Minshan, Cheng Ann-Lii et al.. Journal of hepatology. 2026-05-16 DOI: 10.1016/j.jhep.2026.01.006</a:t>
             </a:r>
             <a:endParaRPr lang="en-US" sz="800" dirty="0"/>
           </a:p>
@@ -5962,7 +5920,7 @@
                   </a:extLst>
                 </a:hlinkClick>
               </a:rPr>
-              <a:t>Effect and safety of tislelizumab combined with anlotinib and radiotherapy in advanced hepatocellular carcinoma: A single-arm, single-center, phase II clinical study.</a:t>
+              <a:t>Phase Ib/II trial to evaluate the safety and efficacy of atezolizumab and bevacizumab as adjuvant therapy following carbon-ion radiotherapy in hepatocellular carcinoma (VANGUARD): study protocol.</a:t>
             </a:r>
             <a:endParaRPr lang="en-US" sz="2400" dirty="0"/>
           </a:p>
@@ -5998,7 +5956,7 @@
                   <a:srgbClr val="888888"/>
                 </a:solidFill>
               </a:rPr>
-              <a:t>Scientific reports  ·  RCT Phase 2  ·  🌏 Asia</a:t>
+              <a:t>BMJ open  ·  RCT Phase 2  ·  🌏 Asia</a:t>
             </a:r>
             <a:endParaRPr lang="en-US" sz="1000" dirty="0"/>
           </a:p>
@@ -6041,7 +5999,7 @@
                 <a:ea typeface="Microsoft JhengHei" pitchFamily="34" charset="-122"/>
                 <a:cs typeface="Microsoft JhengHei" pitchFamily="34" charset="-120"/>
               </a:rPr>
-              <a:t>評估Tislelizumab與anlotinib及放療</a:t>
+              <a:t>評估Atezo+Bev於C-ion RT後的效果</a:t>
             </a:r>
             <a:endParaRPr lang="en-US" sz="1800" dirty="0"/>
           </a:p>
@@ -6062,7 +6020,7 @@
                 <a:ea typeface="Microsoft JhengHei" pitchFamily="34" charset="-122"/>
                 <a:cs typeface="Microsoft JhengHei" pitchFamily="34" charset="-120"/>
               </a:rPr>
-              <a:t>達到62.2%客觀反應率</a:t>
+              <a:t>針對HCC患者的Ib/II期試驗</a:t>
             </a:r>
             <a:endParaRPr lang="en-US" sz="1800" dirty="0"/>
           </a:p>
@@ -6083,7 +6041,7 @@
                 <a:ea typeface="Microsoft JhengHei" pitchFamily="34" charset="-122"/>
                 <a:cs typeface="Microsoft JhengHei" pitchFamily="34" charset="-120"/>
               </a:rPr>
-              <a:t>中位無進展生存期11個月</a:t>
+              <a:t>主要終點：1年無復發生存率</a:t>
             </a:r>
             <a:endParaRPr lang="en-US" sz="1800" dirty="0"/>
           </a:p>
@@ -6104,7 +6062,7 @@
                 <a:ea typeface="Microsoft JhengHei" pitchFamily="34" charset="-122"/>
                 <a:cs typeface="Microsoft JhengHei" pitchFamily="34" charset="-120"/>
               </a:rPr>
-              <a:t>安全性主要為1/2級不良事件</a:t>
+              <a:t>重點在高風險復發患者</a:t>
             </a:r>
             <a:endParaRPr lang="en-US" sz="1800" dirty="0"/>
           </a:p>
@@ -6125,7 +6083,7 @@
                 <a:ea typeface="Microsoft JhengHei" pitchFamily="34" charset="-122"/>
                 <a:cs typeface="Microsoft JhengHei" pitchFamily="34" charset="-120"/>
               </a:rPr>
-              <a:t>結果與PVTT及BCLC階段無關</a:t>
+              <a:t>研究已獲倫理委員會批准</a:t>
             </a:r>
             <a:endParaRPr lang="en-US" sz="1800" dirty="0"/>
           </a:p>
@@ -6161,7 +6119,7 @@
                   <a:srgbClr val="888888"/>
                 </a:solidFill>
               </a:rPr>
-              <a:t>Fan Huaxi, Liu Yuhong, Wu Guishu et al.. Scientific reports. 2026-05-28 DOI: 10.1038/s41598-026-55609-3</a:t>
+              <a:t>Koroki Keisuke, Wakatsuki Masaru, Ogasawara Sadahisa et al.. BMJ open. 2026-06-06 DOI: 10.1136/bmjopen-2025-115731</a:t>
             </a:r>
             <a:endParaRPr lang="en-US" sz="800" dirty="0"/>
           </a:p>
@@ -6361,7 +6319,7 @@
                   </a:extLst>
                 </a:hlinkClick>
               </a:rPr>
-              <a:t>Detection of esophageal varices and prediction of hepatic decompensation in unresectable hepatocellular carcinoma using AI.</a:t>
+              <a:t>Early and late survival dynamics of immunotherapy combinations in advanced HCC: Anchored indirect comparison of atezolizumab plus bevacizumab versus durvalumab +&amp;#x202f;tremelimumab.</a:t>
             </a:r>
             <a:endParaRPr lang="en-US" sz="2400" dirty="0"/>
           </a:p>
@@ -6397,7 +6355,7 @@
                   <a:srgbClr val="888888"/>
                 </a:solidFill>
               </a:rPr>
-              <a:t>Journal of hepatology  ·  IF 25.7  ·  Retrospective Study</a:t>
+              <a:t>European journal of cancer (Oxford, England : 1990)  ·  IF 8.4  ·  Meta-Analysis  ·  🌏 Asia</a:t>
             </a:r>
             <a:endParaRPr lang="en-US" sz="1000" dirty="0"/>
           </a:p>
@@ -6440,7 +6398,7 @@
                 <a:ea typeface="Microsoft JhengHei" pitchFamily="34" charset="-122"/>
                 <a:cs typeface="Microsoft JhengHei" pitchFamily="34" charset="-120"/>
               </a:rPr>
-              <a:t>開發AI模型檢測食道靜脈曲張。</a:t>
+              <a:t>A+B 早期生存優勢</a:t>
             </a:r>
             <a:endParaRPr lang="en-US" sz="1800" dirty="0"/>
           </a:p>
@@ -6461,7 +6419,7 @@
                 <a:ea typeface="Microsoft JhengHei" pitchFamily="34" charset="-122"/>
                 <a:cs typeface="Microsoft JhengHei" pitchFamily="34" charset="-120"/>
               </a:rPr>
-              <a:t>使用常規CT數據進行驗證。</a:t>
+              <a:t>STRIDE 長期生存益處</a:t>
             </a:r>
             <a:endParaRPr lang="en-US" sz="1800" dirty="0"/>
           </a:p>
@@ -6482,49 +6440,7 @@
                 <a:ea typeface="Microsoft JhengHei" pitchFamily="34" charset="-122"/>
                 <a:cs typeface="Microsoft JhengHei" pitchFamily="34" charset="-120"/>
               </a:rPr>
-              <a:t>HepatoSageCT提高預測準確性。</a:t>
-            </a:r>
-            <a:endParaRPr lang="en-US" sz="1800" dirty="0"/>
-          </a:p>
-          <a:p>
-            <a:pPr marL="342900" indent="-342900">
-              <a:spcAft>
-                <a:spcPts val="800"/>
-              </a:spcAft>
-              <a:buSzPct val="100000"/>
-              <a:buChar char="•"/>
-            </a:pPr>
-            <a:r>
-              <a:rPr lang="en-US" sz="1800" dirty="0">
-                <a:solidFill>
-                  <a:srgbClr val="333333"/>
-                </a:solidFill>
-                <a:latin typeface="Microsoft JhengHei" pitchFamily="34" charset="0"/>
-                <a:ea typeface="Microsoft JhengHei" pitchFamily="34" charset="-122"/>
-                <a:cs typeface="Microsoft JhengHei" pitchFamily="34" charset="-120"/>
-              </a:rPr>
-              <a:t>減少病人不必要的內視鏡檢查。</a:t>
-            </a:r>
-            <a:endParaRPr lang="en-US" sz="1800" dirty="0"/>
-          </a:p>
-          <a:p>
-            <a:pPr marL="342900" indent="-342900">
-              <a:spcAft>
-                <a:spcPts val="800"/>
-              </a:spcAft>
-              <a:buSzPct val="100000"/>
-              <a:buChar char="•"/>
-            </a:pPr>
-            <a:r>
-              <a:rPr lang="en-US" sz="1800" dirty="0">
-                <a:solidFill>
-                  <a:srgbClr val="333333"/>
-                </a:solidFill>
-                <a:latin typeface="Microsoft JhengHei" pitchFamily="34" charset="0"/>
-                <a:ea typeface="Microsoft JhengHei" pitchFamily="34" charset="-122"/>
-                <a:cs typeface="Microsoft JhengHei" pitchFamily="34" charset="-120"/>
-              </a:rPr>
-              <a:t>個性化病人管理的有希望工具。</a:t>
+              <a:t>分析中觀察到時間依賴效應</a:t>
             </a:r>
             <a:endParaRPr lang="en-US" sz="1800" dirty="0"/>
           </a:p>
@@ -6560,7 +6476,7 @@
                   <a:srgbClr val="888888"/>
                 </a:solidFill>
               </a:rPr>
-              <a:t>Rabasco Meneghetti Asier, Campani Claudia, Roux Charles et al.. Journal of hepatology. 2026-05-16 DOI: 10.1016/j.jhep.2026.01.021</a:t>
+              <a:t>Casadei-Gardini Andrea, Yip Terry Cheuk-Fung, Vitale Alessandro et al.. European journal of cancer (Oxford, England : 1990). 2026-05-21 DOI: 10.1016/j.ejca.2026.116750</a:t>
             </a:r>
             <a:endParaRPr lang="en-US" sz="800" dirty="0"/>
           </a:p>
@@ -6760,7 +6676,7 @@
                   </a:extLst>
                 </a:hlinkClick>
               </a:rPr>
-              <a:t>Complementary evaluation of phase III immunotherapy trials in advanced HCC using the survival-inferred fragility index.</a:t>
+              <a:t>Multimodal sequencing identifies synergistic mechanisms driving resistance to neoadjuvant nivolumab treatment in hepatocellular carcinoma.</a:t>
             </a:r>
             <a:endParaRPr lang="en-US" sz="2400" dirty="0"/>
           </a:p>
@@ -6796,7 +6712,7 @@
                   <a:srgbClr val="888888"/>
                 </a:solidFill>
               </a:rPr>
-              <a:t>Digestive and liver disease : official journal of the Italian Society of Gastroenterology and the Italian Association for the Study of the Liver  ·  RCT Phase 3</a:t>
+              <a:t>Molecular cancer  ·  IF 27.7</a:t>
             </a:r>
             <a:endParaRPr lang="en-US" sz="1000" dirty="0"/>
           </a:p>
@@ -6839,7 +6755,7 @@
                 <a:ea typeface="Microsoft JhengHei" pitchFamily="34" charset="-122"/>
                 <a:cs typeface="Microsoft JhengHei" pitchFamily="34" charset="-120"/>
               </a:rPr>
-              <a:t>HCC治療轉向免疫檢查點抑制劑。</a:t>
+              <a:t>HCC顯示顯著的腫瘤內異質性。</a:t>
             </a:r>
             <a:endParaRPr lang="en-US" sz="1800" dirty="0"/>
           </a:p>
@@ -6860,7 +6776,7 @@
                 <a:ea typeface="Microsoft JhengHei" pitchFamily="34" charset="-122"/>
                 <a:cs typeface="Microsoft JhengHei" pitchFamily="34" charset="-120"/>
               </a:rPr>
-              <a:t>生存推斷脆弱性指數評估試驗穩定性。</a:t>
+              <a:t>免疫抑制TIME與治療抵抗相關。</a:t>
             </a:r>
             <a:endParaRPr lang="en-US" sz="1800" dirty="0"/>
           </a:p>
@@ -6881,7 +6797,7 @@
                 <a:ea typeface="Microsoft JhengHei" pitchFamily="34" charset="-122"/>
                 <a:cs typeface="Microsoft JhengHei" pitchFamily="34" charset="-120"/>
               </a:rPr>
-              <a:t>分析六項III期試驗，共4570名患者。</a:t>
+              <a:t>非應答者中識別出脂質代謝失調。</a:t>
             </a:r>
             <a:endParaRPr lang="en-US" sz="1800" dirty="0"/>
           </a:p>
@@ -6902,7 +6818,7 @@
                 <a:ea typeface="Microsoft JhengHei" pitchFamily="34" charset="-122"/>
                 <a:cs typeface="Microsoft JhengHei" pitchFamily="34" charset="-120"/>
               </a:rPr>
-              <a:t>整體生存的中位SIFI為10。</a:t>
+              <a:t>TAMs和CD8 T細胞形成屏障。</a:t>
             </a:r>
             <a:endParaRPr lang="en-US" sz="1800" dirty="0"/>
           </a:p>
@@ -6923,7 +6839,7 @@
                 <a:ea typeface="Microsoft JhengHei" pitchFamily="34" charset="-122"/>
                 <a:cs typeface="Microsoft JhengHei" pitchFamily="34" charset="-120"/>
               </a:rPr>
-              <a:t>亞洲試驗穩定性高於全球試驗。</a:t>
+              <a:t>ADM-RAMP1-EBP軸影響脂質代謝。</a:t>
             </a:r>
             <a:endParaRPr lang="en-US" sz="1800" dirty="0"/>
           </a:p>
@@ -6959,7 +6875,7 @@
                   <a:srgbClr val="888888"/>
                 </a:solidFill>
               </a:rPr>
-              <a:t>Dalbeni A, Vicardi M, Stefanini B et al.. Digestive and liver disease : official journal of the Italian Society of Gastroenterology and the Italian Association for the Study of the Liver. 2026-05-27 DOI: 10.1016/j.dld.2026.04.013</a:t>
+              <a:t>Zeng Fanhong, Guo Jiaxin, Zeng Zheng et al.. Molecular cancer. 2026-06-02 DOI: 10.1186/s12943-026-02682-x</a:t>
             </a:r>
             <a:endParaRPr lang="en-US" sz="800" dirty="0"/>
           </a:p>
@@ -7159,7 +7075,7 @@
                   </a:extLst>
                 </a:hlinkClick>
               </a:rPr>
-              <a:t>Immunotherapy in Hepatocellular Carcinoma with Portal Vein Tumour Thrombosis: From Poor Prognosis to Curative-Intent Strategies</a:t>
+              <a:t>Detection of esophageal varices and prediction of hepatic decompensation in unresectable hepatocellular carcinoma using AI.</a:t>
             </a:r>
             <a:endParaRPr lang="en-US" sz="2400" dirty="0"/>
           </a:p>
@@ -7195,7 +7111,7 @@
                   <a:srgbClr val="888888"/>
                 </a:solidFill>
               </a:rPr>
-              <a:t>…  ·  RCT Phase 2</a:t>
+              <a:t>Journal of hepatology  ·  IF 25.7  ·  Retrospective Study</a:t>
             </a:r>
             <a:endParaRPr lang="en-US" sz="1000" dirty="0"/>
           </a:p>
@@ -7238,7 +7154,7 @@
                 <a:ea typeface="Microsoft JhengHei" pitchFamily="34" charset="-122"/>
                 <a:cs typeface="Microsoft JhengHei" pitchFamily="34" charset="-120"/>
               </a:rPr>
-              <a:t>針對PVTT的HCC II期研究</a:t>
+              <a:t>開發AI模型檢測EV</a:t>
             </a:r>
             <a:endParaRPr lang="en-US" sz="1800" dirty="0"/>
           </a:p>
@@ -7259,7 +7175,7 @@
                 <a:ea typeface="Microsoft JhengHei" pitchFamily="34" charset="-122"/>
                 <a:cs typeface="Microsoft JhengHei" pitchFamily="34" charset="-120"/>
               </a:rPr>
-              <a:t>HAIC結合lenvatinib和PD-1</a:t>
+              <a:t>使用常規CT與臨床數據</a:t>
             </a:r>
             <a:endParaRPr lang="en-US" sz="1800" dirty="0"/>
           </a:p>
@@ -7280,7 +7196,49 @@
                 <a:ea typeface="Microsoft JhengHei" pitchFamily="34" charset="-122"/>
                 <a:cs typeface="Microsoft JhengHei" pitchFamily="34" charset="-120"/>
               </a:rPr>
-              <a:t>優於單一療法的結果</a:t>
+              <a:t>在489例不可切除HCC患者中驗證</a:t>
+            </a:r>
+            <a:endParaRPr lang="en-US" sz="1800" dirty="0"/>
+          </a:p>
+          <a:p>
+            <a:pPr marL="342900" indent="-342900">
+              <a:spcAft>
+                <a:spcPts val="800"/>
+              </a:spcAft>
+              <a:buSzPct val="100000"/>
+              <a:buChar char="•"/>
+            </a:pPr>
+            <a:r>
+              <a:rPr lang="en-US" sz="1800" dirty="0">
+                <a:solidFill>
+                  <a:srgbClr val="333333"/>
+                </a:solidFill>
+                <a:latin typeface="Microsoft JhengHei" pitchFamily="34" charset="0"/>
+                <a:ea typeface="Microsoft JhengHei" pitchFamily="34" charset="-122"/>
+                <a:cs typeface="Microsoft JhengHei" pitchFamily="34" charset="-120"/>
+              </a:rPr>
+              <a:t>HepatoSageCT提高預測準確性</a:t>
+            </a:r>
+            <a:endParaRPr lang="en-US" sz="1800" dirty="0"/>
+          </a:p>
+          <a:p>
+            <a:pPr marL="342900" indent="-342900">
+              <a:spcAft>
+                <a:spcPts val="800"/>
+              </a:spcAft>
+              <a:buSzPct val="100000"/>
+              <a:buChar char="•"/>
+            </a:pPr>
+            <a:r>
+              <a:rPr lang="en-US" sz="1800" dirty="0">
+                <a:solidFill>
+                  <a:srgbClr val="333333"/>
+                </a:solidFill>
+                <a:latin typeface="Microsoft JhengHei" pitchFamily="34" charset="0"/>
+                <a:ea typeface="Microsoft JhengHei" pitchFamily="34" charset="-122"/>
+                <a:cs typeface="Microsoft JhengHei" pitchFamily="34" charset="-120"/>
+              </a:rPr>
+              <a:t>非侵入性方法減少內視鏡檢查</a:t>
             </a:r>
             <a:endParaRPr lang="en-US" sz="1800" dirty="0"/>
           </a:p>
@@ -7316,7 +7274,7 @@
                   <a:srgbClr val="888888"/>
                 </a:solidFill>
               </a:rPr>
-              <a:t>L Marzi, R Sacco, L Siciliani. …. 2026</a:t>
+              <a:t>Rabasco Meneghetti Asier, Campani Claudia, Roux Charles et al.. Journal of hepatology. 2026-05-16 DOI: 10.1016/j.jhep.2026.01.021</a:t>
             </a:r>
             <a:endParaRPr lang="en-US" sz="800" dirty="0"/>
           </a:p>
@@ -7516,7 +7474,7 @@
                   </a:extLst>
                 </a:hlinkClick>
               </a:rPr>
-              <a:t>… plus transarterial chemoembolization and PD-1 inhibitors as conversion therapies for unresectable intermediate-advanced hepatocellular carcinoma: a phase 2 trial …</a:t>
+              <a:t>Integrating Multiple Outcomes of First-Line Immunotherapy-Based Regimens for Advanced Hepatocellular Carcinoma: A Network Meta-Analysis of Phase III Trials.</a:t>
             </a:r>
             <a:endParaRPr lang="en-US" sz="2400" dirty="0"/>
           </a:p>
@@ -7552,7 +7510,7 @@
                   <a:srgbClr val="888888"/>
                 </a:solidFill>
               </a:rPr>
-              <a:t>… and Targeted Therapy  ·  RCT Phase 2</a:t>
+              <a:t>Critical reviews in oncology/hematology  ·  RCT Phase 3</a:t>
             </a:r>
             <a:endParaRPr lang="en-US" sz="1000" dirty="0"/>
           </a:p>
@@ -7595,7 +7553,7 @@
                 <a:ea typeface="Microsoft JhengHei" pitchFamily="34" charset="-122"/>
                 <a:cs typeface="Microsoft JhengHei" pitchFamily="34" charset="-120"/>
               </a:rPr>
-              <a:t>TACE 與 PD-1 抑制劑聯合</a:t>
+              <a:t>進行第三階段試驗的網絡Meta分析。</a:t>
             </a:r>
             <a:endParaRPr lang="en-US" sz="1800" dirty="0"/>
           </a:p>
@@ -7616,7 +7574,7 @@
                 <a:ea typeface="Microsoft JhengHei" pitchFamily="34" charset="-122"/>
                 <a:cs typeface="Microsoft JhengHei" pitchFamily="34" charset="-120"/>
               </a:rPr>
-              <a:t>針對 uHCC 的第二期試驗</a:t>
+              <a:t>Sintilimab加IBI305顯示最佳整體生存率。</a:t>
             </a:r>
             <a:endParaRPr lang="en-US" sz="1800" dirty="0"/>
           </a:p>
@@ -7637,7 +7595,49 @@
                 <a:ea typeface="Microsoft JhengHei" pitchFamily="34" charset="-122"/>
                 <a:cs typeface="Microsoft JhengHei" pitchFamily="34" charset="-120"/>
               </a:rPr>
-              <a:t>較單獨 TACE 療效更佳</a:t>
+              <a:t>Finotonlimab加bevacizumab改善年輕患者結果。</a:t>
+            </a:r>
+            <a:endParaRPr lang="en-US" sz="1800" dirty="0"/>
+          </a:p>
+          <a:p>
+            <a:pPr marL="342900" indent="-342900">
+              <a:spcAft>
+                <a:spcPts val="800"/>
+              </a:spcAft>
+              <a:buSzPct val="100000"/>
+              <a:buChar char="•"/>
+            </a:pPr>
+            <a:r>
+              <a:rPr lang="en-US" sz="1800" dirty="0">
+                <a:solidFill>
+                  <a:srgbClr val="333333"/>
+                </a:solidFill>
+                <a:latin typeface="Microsoft JhengHei" pitchFamily="34" charset="0"/>
+                <a:ea typeface="Microsoft JhengHei" pitchFamily="34" charset="-122"/>
+                <a:cs typeface="Microsoft JhengHei" pitchFamily="34" charset="-120"/>
+              </a:rPr>
+              <a:t>Bevacizumab組合提供良好的利弊平衡。</a:t>
+            </a:r>
+            <a:endParaRPr lang="en-US" sz="1800" dirty="0"/>
+          </a:p>
+          <a:p>
+            <a:pPr marL="342900" indent="-342900">
+              <a:spcAft>
+                <a:spcPts val="800"/>
+              </a:spcAft>
+              <a:buSzPct val="100000"/>
+              <a:buChar char="•"/>
+            </a:pPr>
+            <a:r>
+              <a:rPr lang="en-US" sz="1800" dirty="0">
+                <a:solidFill>
+                  <a:srgbClr val="333333"/>
+                </a:solidFill>
+                <a:latin typeface="Microsoft JhengHei" pitchFamily="34" charset="0"/>
+                <a:ea typeface="Microsoft JhengHei" pitchFamily="34" charset="-122"/>
+                <a:cs typeface="Microsoft JhengHei" pitchFamily="34" charset="-120"/>
+              </a:rPr>
+              <a:t>TOPSIS模型整合多重治療結果。</a:t>
             </a:r>
             <a:endParaRPr lang="en-US" sz="1800" dirty="0"/>
           </a:p>
@@ -7673,7 +7673,7 @@
                   <a:srgbClr val="888888"/>
                 </a:solidFill>
               </a:rPr>
-              <a:t>X Zhang, H Cai, W Peng. … and Targeted Therapy. 2026</a:t>
+              <a:t>Nie Guilin, Li Xinming, Wang Yaoqun et al.. Critical reviews in oncology/hematology. 2026-06-06 DOI: 10.1016/j.critrevonc.2026.105412</a:t>
             </a:r>
             <a:endParaRPr lang="en-US" sz="800" dirty="0"/>
           </a:p>

--- a/docs/digest-zh.pptx
+++ b/docs/digest-zh.pptx
@@ -2269,7 +2269,7 @@
                   <a:srgbClr val="888888"/>
                 </a:solidFill>
               </a:rPr>
-              <a:t>2026-06-01 — 2026-06-08</a:t>
+              <a:t>2026-06-08 — 2026-06-15</a:t>
             </a:r>
             <a:endParaRPr lang="en-US" sz="1400" dirty="0"/>
           </a:p>
@@ -2460,7 +2460,7 @@
                   </a:extLst>
                 </a:hlinkClick>
               </a:rPr>
-              <a:t>Determinants of long-term survival from atezolizumab plus bevacizumab in unresectable hepatocellular carcinoma.</a:t>
+              <a:t>Natural killer cell-mediated immunosurveillance modulates liver cancer evolution through cancer stemness enhancement and lipid metabolism reprogramming.</a:t>
             </a:r>
             <a:endParaRPr lang="en-US" sz="2400" dirty="0"/>
           </a:p>
@@ -2496,7 +2496,7 @@
                   <a:srgbClr val="888888"/>
                 </a:solidFill>
               </a:rPr>
-              <a:t>European journal of cancer (Oxford, England : 1990)  ·  IF 8.4  ·  🌏 Asia</a:t>
+              <a:t>Nature communications  ·  IF 14.7</a:t>
             </a:r>
             <a:endParaRPr lang="en-US" sz="1000" dirty="0"/>
           </a:p>
@@ -2539,7 +2539,7 @@
                 <a:ea typeface="Microsoft JhengHei" pitchFamily="34" charset="-122"/>
                 <a:cs typeface="Microsoft JhengHei" pitchFamily="34" charset="-120"/>
               </a:rPr>
-              <a:t>Atezolizumab加bevacizumab顯示長期生存益處。</a:t>
+              <a:t>NK細胞促進肝癌演變。</a:t>
             </a:r>
             <a:endParaRPr lang="en-US" sz="1800" dirty="0"/>
           </a:p>
@@ -2560,7 +2560,7 @@
                 <a:ea typeface="Microsoft JhengHei" pitchFamily="34" charset="-122"/>
                 <a:cs typeface="Microsoft JhengHei" pitchFamily="34" charset="-120"/>
               </a:rPr>
-              <a:t>長期生存者定義為24個月以上。</a:t>
+              <a:t>免疫監視增強腫瘤幹性。</a:t>
             </a:r>
             <a:endParaRPr lang="en-US" sz="1800" dirty="0"/>
           </a:p>
@@ -2581,7 +2581,7 @@
                 <a:ea typeface="Microsoft JhengHei" pitchFamily="34" charset="-122"/>
                 <a:cs typeface="Microsoft JhengHei" pitchFamily="34" charset="-120"/>
               </a:rPr>
-              <a:t>影像學反應者生存率顯著提高。</a:t>
+              <a:t>觀察到脂質代謝重編程。</a:t>
             </a:r>
             <a:endParaRPr lang="en-US" sz="1800" dirty="0"/>
           </a:p>
@@ -2602,7 +2602,7 @@
                 <a:ea typeface="Microsoft JhengHei" pitchFamily="34" charset="-122"/>
                 <a:cs typeface="Microsoft JhengHei" pitchFamily="34" charset="-120"/>
               </a:rPr>
-              <a:t>關鍵因素包括肝功能和腫瘤大小。</a:t>
+              <a:t>聯合抗LAG-3改善治療。</a:t>
             </a:r>
             <a:endParaRPr lang="en-US" sz="1800" dirty="0"/>
           </a:p>
@@ -2623,7 +2623,7 @@
                 <a:ea typeface="Microsoft JhengHei" pitchFamily="34" charset="-122"/>
                 <a:cs typeface="Microsoft JhengHei" pitchFamily="34" charset="-120"/>
               </a:rPr>
-              <a:t>AB-Real提供uHCC的實證數據。</a:t>
+              <a:t>免疫代謝療法作為策略。</a:t>
             </a:r>
             <a:endParaRPr lang="en-US" sz="1800" dirty="0"/>
           </a:p>
@@ -2659,7 +2659,7 @@
                   <a:srgbClr val="888888"/>
                 </a:solidFill>
               </a:rPr>
-              <a:t>Lee Pei-Chang, Cortellini Alessio, Stefanini Bernardo et al.. European journal of cancer (Oxford, England : 1990). 2026-05-21 DOI: 10.1016/j.ejca.2026.116749</a:t>
+              <a:t>Shi Liang, Liu Boqiang, Sun Ruya et al.. Nature communications. 2026-06-11 DOI: 10.1038/s41467-026-74360-x</a:t>
             </a:r>
             <a:endParaRPr lang="en-US" sz="800" dirty="0"/>
           </a:p>
@@ -2859,7 +2859,7 @@
                   </a:extLst>
                 </a:hlinkClick>
               </a:rPr>
-              <a:t>Prospective Study of Atezolizumab Plus Bevacizumab for Unresectable Hepatocellular Carcinoma Based on Hepatobiliary Phase of Gd-EOB-DTPA-MRI.</a:t>
+              <a:t>WNK4 Enhances Anti-PD-1 Resistance and Promotes Tumor Progression in Hepatocellular Carcinoma by Reprogramming Cysteine Metabolism in Cancer-Associated Fibroblasts.</a:t>
             </a:r>
             <a:endParaRPr lang="en-US" sz="2400" dirty="0"/>
           </a:p>
@@ -2895,7 +2895,7 @@
                   <a:srgbClr val="888888"/>
                 </a:solidFill>
               </a:rPr>
-              <a:t>Hepatology research : the official journal of the Japan Society of Hepatology  ·  Prospective Study  ·  🌏 Asia</a:t>
+              <a:t>FASEB journal : official publication of the Federation of American Societies for Experimental Biology  ·  🌏 Asia</a:t>
             </a:r>
             <a:endParaRPr lang="en-US" sz="1000" dirty="0"/>
           </a:p>
@@ -2938,7 +2938,7 @@
                 <a:ea typeface="Microsoft JhengHei" pitchFamily="34" charset="-122"/>
                 <a:cs typeface="Microsoft JhengHei" pitchFamily="34" charset="-120"/>
               </a:rPr>
-              <a:t>研究使用atezolizumab與bevacizumab</a:t>
+              <a:t>WNK4在HCC組織中上調</a:t>
             </a:r>
             <a:endParaRPr lang="en-US" sz="1800" dirty="0"/>
           </a:p>
@@ -2959,7 +2959,7 @@
                 <a:ea typeface="Microsoft JhengHei" pitchFamily="34" charset="-122"/>
                 <a:cs typeface="Microsoft JhengHei" pitchFamily="34" charset="-120"/>
               </a:rPr>
-              <a:t>152位不可切除HCC患者參與</a:t>
+              <a:t>促進HCC細胞增殖與遷移</a:t>
             </a:r>
             <a:endParaRPr lang="en-US" sz="1800" dirty="0"/>
           </a:p>
@@ -2980,7 +2980,7 @@
                 <a:ea typeface="Microsoft JhengHei" pitchFamily="34" charset="-122"/>
                 <a:cs typeface="Microsoft JhengHei" pitchFamily="34" charset="-120"/>
               </a:rPr>
-              <a:t>超強度與Wnt信號相關</a:t>
+              <a:t>增強抗PD-1療法抵抗力</a:t>
             </a:r>
             <a:endParaRPr lang="en-US" sz="1800" dirty="0"/>
           </a:p>
@@ -3001,7 +3001,7 @@
                 <a:ea typeface="Microsoft JhengHei" pitchFamily="34" charset="-122"/>
                 <a:cs typeface="Microsoft JhengHei" pitchFamily="34" charset="-120"/>
               </a:rPr>
-              <a:t>超強度組ORR較高</a:t>
+              <a:t>重編程CAFs中的半胱氨酸代謝</a:t>
             </a:r>
             <a:endParaRPr lang="en-US" sz="1800" dirty="0"/>
           </a:p>
@@ -3022,7 +3022,7 @@
                 <a:ea typeface="Microsoft JhengHei" pitchFamily="34" charset="-122"/>
                 <a:cs typeface="Microsoft JhengHei" pitchFamily="34" charset="-120"/>
               </a:rPr>
-              <a:t>未發現對組合療法抗性</a:t>
+              <a:t>確定WNK4-HMGB1-p53軸</a:t>
             </a:r>
             <a:endParaRPr lang="en-US" sz="1800" dirty="0"/>
           </a:p>
@@ -3058,7 +3058,7 @@
                   <a:srgbClr val="888888"/>
                 </a:solidFill>
               </a:rPr>
-              <a:t>Aoki Tomoko, Kudo Masatoshi, Ueshima Kazuomi et al.. Hepatology research : the official journal of the Japan Society of Hepatology. 2026-06-06 DOI: 10.1111/hepr.70157</a:t>
+              <a:t>Yu Ge, Cui Yun-Long, Mu Han et al.. FASEB journal : official publication of the Federation of American Societies for Experimental Biology. 2026-06-12 DOI: 10.1096/fj.202502777R</a:t>
             </a:r>
             <a:endParaRPr lang="en-US" sz="800" dirty="0"/>
           </a:p>
@@ -3258,7 +3258,7 @@
                   </a:extLst>
                 </a:hlinkClick>
               </a:rPr>
-              <a:t>Erratum: Hepatectomy alters adjuvant anti-PD-1 action in a mouse model of HCC but does not compromise neoadjuvant efficacy.</a:t>
+              <a:t>Rethinking Progression in Hepatocellular Carcinoma: Is Oligoprogression a Window for Local Ablation?</a:t>
             </a:r>
             <a:endParaRPr lang="en-US" sz="2400" dirty="0"/>
           </a:p>
@@ -3294,7 +3294,7 @@
                   <a:srgbClr val="888888"/>
                 </a:solidFill>
               </a:rPr>
-              <a:t>Hepatology (Baltimore, Md.)  ·  IF 12.9  ·  Basic Research</a:t>
+              <a:t>Hepatology research : the official journal of the Japan Society of Hepatology  ·  🌏 Asia</a:t>
             </a:r>
             <a:endParaRPr lang="en-US" sz="1000" dirty="0"/>
           </a:p>
@@ -3337,7 +3337,7 @@
                 <a:ea typeface="Microsoft JhengHei" pitchFamily="34" charset="-122"/>
                 <a:cs typeface="Microsoft JhengHei" pitchFamily="34" charset="-120"/>
               </a:rPr>
-              <a:t>肝切除影響抗PD-1療法</a:t>
+              <a:t>HCC中的寡進展具有重要性。</a:t>
             </a:r>
             <a:endParaRPr lang="en-US" sz="1800" dirty="0"/>
           </a:p>
@@ -3358,7 +3358,7 @@
                 <a:ea typeface="Microsoft JhengHei" pitchFamily="34" charset="-122"/>
                 <a:cs typeface="Microsoft JhengHei" pitchFamily="34" charset="-120"/>
               </a:rPr>
-              <a:t>新輔助療效保持不變</a:t>
+              <a:t>局部消融可能有利於寡進展患者。</a:t>
             </a:r>
             <a:endParaRPr lang="en-US" sz="1800" dirty="0"/>
           </a:p>
@@ -3379,7 +3379,7 @@
                 <a:ea typeface="Microsoft JhengHei" pitchFamily="34" charset="-122"/>
                 <a:cs typeface="Microsoft JhengHei" pitchFamily="34" charset="-120"/>
               </a:rPr>
-              <a:t>使用小鼠模型進行研究</a:t>
+              <a:t>識別寡進展對治療至關重要。</a:t>
             </a:r>
             <a:endParaRPr lang="en-US" sz="1800" dirty="0"/>
           </a:p>
@@ -3415,7 +3415,7 @@
                   <a:srgbClr val="888888"/>
                 </a:solidFill>
               </a:rPr>
-              <a:t>Bouguerra Roqiya, El Hajji Sofia, Wassmer Charles-Henri et al.. Hepatology (Baltimore, Md.). 2026-06-05 DOI: 10.1097/HEP.0000000000001731</a:t>
+              <a:t>Hidaka Hisashi. Hepatology research : the official journal of the Japan Society of Hepatology. 2026-06-11 DOI: 10.1111/hepr.70218</a:t>
             </a:r>
             <a:endParaRPr lang="en-US" sz="800" dirty="0"/>
           </a:p>
@@ -3606,7 +3606,7 @@
                   <a:srgbClr val="FFFFFF"/>
                 </a:solidFill>
               </a:rPr>
-              <a:t>### 綜合啟示（Overall Insights）</a:t>
+              <a:t>### 綜合啟示 (Overall Insights)</a:t>
             </a:r>
             <a:endParaRPr lang="en-US" sz="1200" dirty="0"/>
           </a:p>
@@ -3632,7 +3632,7 @@
                   <a:srgbClr val="FFFFFF"/>
                 </a:solidFill>
               </a:rPr>
-              <a:t>1. **免疫檢查點抑制劑的應用潛力**  </a:t>
+              <a:t>1. **代謝適應與免疫逃逸**  </a:t>
             </a:r>
             <a:endParaRPr lang="en-US" sz="1200" dirty="0"/>
           </a:p>
@@ -3649,7 +3649,7 @@
                   <a:srgbClr val="FFFFFF"/>
                 </a:solidFill>
               </a:rPr>
-              <a:t>   The use of dual immune checkpoint inhibitors (ICIs) targeting CTLA-4 and PD-1/PD-L1 has shown promise in reshaping treatment for unresectable HCC, yet their clinical uptake is hindered by severe immune-related adverse events.  </a:t>
+              <a:t>   Tumor cells exhibit metabolic adaptations to evade immune-checkpoint therapy, utilizing macrophage efferocytosis to recycle fatty acids and sustain growth in nutrient-deprived environments.  </a:t>
             </a:r>
             <a:endParaRPr lang="en-US" sz="1200" dirty="0"/>
           </a:p>
@@ -3666,7 +3666,7 @@
                   <a:srgbClr val="FFFFFF"/>
                 </a:solidFill>
               </a:rPr>
-              <a:t>   雙重免疫檢查點抑制劑（如CTLA-4和PD-1/PD-L1）的應用潛力顯示出在不可切除肝細胞癌（HCC）治療中的前景，但其臨床應用受到嚴重免疫相關不良事件的限制。</a:t>
+              <a:t>   腫瘤細胞展現出代謝適應以逃避免疫檢查點治療，利用巨噬細胞的吞噬作用回收脂肪酸，在缺乏營養的環境中維持生長。</a:t>
             </a:r>
             <a:endParaRPr lang="en-US" sz="1200" dirty="0"/>
           </a:p>
@@ -3692,7 +3692,7 @@
                   <a:srgbClr val="FFFFFF"/>
                 </a:solidFill>
               </a:rPr>
-              <a:t>2. **新輔助療法的前景**  </a:t>
+              <a:t>2. **MASLD與肝癌的關聯性**  </a:t>
             </a:r>
             <a:endParaRPr lang="en-US" sz="1200" dirty="0"/>
           </a:p>
@@ -3709,7 +3709,7 @@
                   <a:srgbClr val="FFFFFF"/>
                 </a:solidFill>
               </a:rPr>
-              <a:t>   Atezolizumab combined with bevacizumab has demonstrated improved recurrence-free survival in high-risk HCC patients, indicating a potential shift towards adjuvant immunotherapy strategies.  </a:t>
+              <a:t>   The rising prevalence of metabolic dysfunction-associated steatotic liver disease (MASLD) highlights the need for novel biomarkers and therapeutic strategies, particularly in relation to hepatocellular carcinoma (HCC).  </a:t>
             </a:r>
             <a:endParaRPr lang="en-US" sz="1200" dirty="0"/>
           </a:p>
@@ -3726,7 +3726,7 @@
                   <a:srgbClr val="FFFFFF"/>
                 </a:solidFill>
               </a:rPr>
-              <a:t>   阿特珠單抗與貝伐單抗的聯合使用在高風險HCC患者中顯示出改善無復發生存期的潛力，這表明輔助免疫療法策略可能會有新的轉變。</a:t>
+              <a:t>   代謝功能障礙相關的脂肪肝病（MASLD）日益普遍，凸顯出對新型生物標誌物和治療策略的需求，特別是在肝細胞癌（HCC）方面。</a:t>
             </a:r>
             <a:endParaRPr lang="en-US" sz="1200" dirty="0"/>
           </a:p>
@@ -3752,7 +3752,7 @@
                   <a:srgbClr val="FFFFFF"/>
                 </a:solidFill>
               </a:rPr>
-              <a:t>3. **腫瘤微環境的影響**  </a:t>
+              <a:t>3. **不充分消融的風險**  </a:t>
             </a:r>
             <a:endParaRPr lang="en-US" sz="1200" dirty="0"/>
           </a:p>
@@ -3769,7 +3769,7 @@
                   <a:srgbClr val="FFFFFF"/>
                 </a:solidFill>
               </a:rPr>
-              <a:t>   The tumor immune microenvironment (TIME) plays a critical role in modulating responses to ICIs, with HCC exhibiting significant intratumoral heterogeneity that complicates treatment efficacy.  </a:t>
+              <a:t>   Insufficient radiofrequency ablation (iRFA) is linked to HCC progression through the CEBPD/CXCL2 axis, emphasizing the importance of precise ablation techniques in treatment outcomes.  </a:t>
             </a:r>
             <a:endParaRPr lang="en-US" sz="1200" dirty="0"/>
           </a:p>
@@ -3786,7 +3786,7 @@
                   <a:srgbClr val="FFFFFF"/>
                 </a:solidFill>
               </a:rPr>
-              <a:t>   腫瘤免疫微環境（TIME）在調節對免疫檢查點抑制劑的反應中起著關鍵作用，而HCC的腫瘤內異質性顯著，這使得治療效果變得複雜。</a:t>
+              <a:t>   不充分的射頻消融（iRFA）與肝細胞癌進展有關，通過CEBPD/CXCL2通路，強調了精確消融技術在治療結果中的重要性。</a:t>
             </a:r>
             <a:endParaRPr lang="en-US" sz="1200" dirty="0"/>
           </a:p>
@@ -3812,7 +3812,7 @@
                   <a:srgbClr val="FFFFFF"/>
                 </a:solidFill>
               </a:rPr>
-              <a:t>4. **非侵入性檢測技術的發展**  </a:t>
+              <a:t>4. **免疫治療的臨床預測因子**  </a:t>
             </a:r>
             <a:endParaRPr lang="en-US" sz="1200" dirty="0"/>
           </a:p>
@@ -3829,7 +3829,7 @@
                   <a:srgbClr val="FFFFFF"/>
                 </a:solidFill>
               </a:rPr>
-              <a:t>   Advances in AI-driven non-invasive models for detecting esophageal varices in cirrhotic patients with HCC could lead to earlier interventions and improved patient outcomes.  </a:t>
+              <a:t>   Identifying clinical predictors for response to atezolizumab-bevacizumab in Child-Pugh B patients can optimize treatment strategies for advanced HCC populations often excluded from trials.  </a:t>
             </a:r>
             <a:endParaRPr lang="en-US" sz="1200" dirty="0"/>
           </a:p>
@@ -3846,7 +3846,7 @@
                   <a:srgbClr val="FFFFFF"/>
                 </a:solidFill>
               </a:rPr>
-              <a:t>   基於人工智慧的非侵入性模型在檢測伴有肝硬化的HCC患者食道靜脈曲張方面的進展，可能會導致更早的干預和改善患者的預後。</a:t>
+              <a:t>   確定Child-Pugh B患者對阿特珠單抗-貝伐單抗反應的臨床預測因子，可以優化通常被排除在臨床試驗之外的晚期HCC人群的治療策略。</a:t>
             </a:r>
             <a:endParaRPr lang="en-US" sz="1200" dirty="0"/>
           </a:p>
@@ -3872,7 +3872,7 @@
                   <a:srgbClr val="FFFFFF"/>
                 </a:solidFill>
               </a:rPr>
-              <a:t>5. **多模式治療策略的必要性**  </a:t>
+              <a:t>5. **多重療法的潛力**  </a:t>
             </a:r>
             <a:endParaRPr lang="en-US" sz="1200" dirty="0"/>
           </a:p>
@@ -3889,7 +3889,24 @@
                   <a:srgbClr val="FFFFFF"/>
                 </a:solidFill>
               </a:rPr>
-              <a:t>   The integration of multiple treatment modalities, including immunotherapy and radiotherapy, is essential to address the challenge of recurrence in HCC post-curative treatment.</a:t>
+              <a:t>   The combination of sintilimab, lenvatinib, and transarterial chemoembolization (TACE) shows promise as a conversion therapy for unresectable HCC, redefining resectability criteria.  </a:t>
+            </a:r>
+            <a:endParaRPr lang="en-US" sz="1200" dirty="0"/>
+          </a:p>
+          <a:p>
+            <a:pPr indent="0" marL="0">
+              <a:lnSpc>
+                <a:spcPct val="150000"/>
+              </a:lnSpc>
+              <a:buNone/>
+            </a:pPr>
+            <a:r>
+              <a:rPr lang="en-US" sz="1200" dirty="0">
+                <a:solidFill>
+                  <a:srgbClr val="FFFFFF"/>
+                </a:solidFill>
+              </a:rPr>
+              <a:t>   結合sintilimab、lenvatinib和經導管化療栓塞（TACE）顯示出作為不可切除HCC的轉化療法的潛力，重新定義可切除性標準。</a:t>
             </a:r>
             <a:endParaRPr lang="en-US" sz="1200" dirty="0"/>
           </a:p>
@@ -4035,7 +4052,7 @@
                   <a:srgbClr val="FFFFFF"/>
                 </a:solidFill>
               </a:rPr>
-              <a:t>整合多種治療模式，包括免疫療法和放療，對於解決HCC在根治性治療後復發的挑戰至關重要。</a:t>
+              <a:t>### 未來研究方向 (Future Research Directions)</a:t>
             </a:r>
             <a:endParaRPr lang="en-US" sz="1200" dirty="0"/>
           </a:p>
@@ -4061,7 +4078,7 @@
                   <a:srgbClr val="FFFFFF"/>
                 </a:solidFill>
               </a:rPr>
-              <a:t>### 未來研究方向（Future Research Directions）</a:t>
+              <a:t>1. **代謝重編程的機制研究**  </a:t>
             </a:r>
             <a:endParaRPr lang="en-US" sz="1200" dirty="0"/>
           </a:p>
@@ -4072,6 +4089,14 @@
               </a:lnSpc>
               <a:buNone/>
             </a:pPr>
+            <a:r>
+              <a:rPr lang="en-US" sz="1200" dirty="0">
+                <a:solidFill>
+                  <a:srgbClr val="FFFFFF"/>
+                </a:solidFill>
+              </a:rPr>
+              <a:t>   Further investigation into the metabolic pathways exploited by tumor cells during immune evasion could reveal novel therapeutic targets for enhancing the efficacy of immune-checkpoint inhibitors.  </a:t>
+            </a:r>
             <a:endParaRPr lang="en-US" sz="1200" dirty="0"/>
           </a:p>
           <a:p>
@@ -4087,7 +4112,7 @@
                   <a:srgbClr val="FFFFFF"/>
                 </a:solidFill>
               </a:rPr>
-              <a:t>1. **探索免疫相關不良事件的管理策略**  </a:t>
+              <a:t>   進一步研究腫瘤細胞在免疫逃逸過程中利用的代謝途徑，可能揭示增強免疫檢查點抑制劑療效的新型治療靶點。</a:t>
             </a:r>
             <a:endParaRPr lang="en-US" sz="1200" dirty="0"/>
           </a:p>
@@ -4098,14 +4123,6 @@
               </a:lnSpc>
               <a:buNone/>
             </a:pPr>
-            <a:r>
-              <a:rPr lang="en-US" sz="1200" dirty="0">
-                <a:solidFill>
-                  <a:srgbClr val="FFFFFF"/>
-                </a:solidFill>
-              </a:rPr>
-              <a:t>   Future studies should focus on optimizing prophylactic measures, such as corticosteroids, to mitigate severe immune-related adverse events associated with ICIs in HCC.  </a:t>
-            </a:r>
             <a:endParaRPr lang="en-US" sz="1200" dirty="0"/>
           </a:p>
           <a:p>
@@ -4121,7 +4138,7 @@
                   <a:srgbClr val="FFFFFF"/>
                 </a:solidFill>
               </a:rPr>
-              <a:t>   未來的研究應集中於優化預防措施，如皮質類固醇，以減輕與HCC中免疫檢查點抑制劑相關的嚴重免疫相關不良事件。</a:t>
+              <a:t>2. **MASLD與HCC的早期診斷**  </a:t>
             </a:r>
             <a:endParaRPr lang="en-US" sz="1200" dirty="0"/>
           </a:p>
@@ -4132,6 +4149,14 @@
               </a:lnSpc>
               <a:buNone/>
             </a:pPr>
+            <a:r>
+              <a:rPr lang="en-US" sz="1200" dirty="0">
+                <a:solidFill>
+                  <a:srgbClr val="FFFFFF"/>
+                </a:solidFill>
+              </a:rPr>
+              <a:t>   Development of non-invasive diagnostic tools for early detection of MASLD and its association with HCC could facilitate timely interventions and improve patient outcomes.  </a:t>
+            </a:r>
             <a:endParaRPr lang="en-US" sz="1200" dirty="0"/>
           </a:p>
           <a:p>
@@ -4147,7 +4172,7 @@
                   <a:srgbClr val="FFFFFF"/>
                 </a:solidFill>
               </a:rPr>
-              <a:t>2. **長期療效的評估**  </a:t>
+              <a:t>   開發早期檢測MASLD及其與HCC關聯的非侵入性診斷工具，可能促進及時干預並改善患者預後。</a:t>
             </a:r>
             <a:endParaRPr lang="en-US" sz="1200" dirty="0"/>
           </a:p>
@@ -4158,14 +4183,6 @@
               </a:lnSpc>
               <a:buNone/>
             </a:pPr>
-            <a:r>
-              <a:rPr lang="en-US" sz="1200" dirty="0">
-                <a:solidFill>
-                  <a:srgbClr val="FFFFFF"/>
-                </a:solidFill>
-              </a:rPr>
-              <a:t>   There is a need for long-term follow-up studies to assess the sustained efficacy and safety of atezolizumab plus bevacizumab in unresectable HCC.  </a:t>
-            </a:r>
             <a:endParaRPr lang="en-US" sz="1200" dirty="0"/>
           </a:p>
           <a:p>
@@ -4181,7 +4198,7 @@
                   <a:srgbClr val="FFFFFF"/>
                 </a:solidFill>
               </a:rPr>
-              <a:t>   需要進行長期隨訪研究，以評估阿特珠單抗與貝伐單抗在不可切除HCC中的持續療效和安全性。</a:t>
+              <a:t>3. **消融技術的優化**  </a:t>
             </a:r>
             <a:endParaRPr lang="en-US" sz="1200" dirty="0"/>
           </a:p>
@@ -4192,6 +4209,14 @@
               </a:lnSpc>
               <a:buNone/>
             </a:pPr>
+            <a:r>
+              <a:rPr lang="en-US" sz="1200" dirty="0">
+                <a:solidFill>
+                  <a:srgbClr val="FFFFFF"/>
+                </a:solidFill>
+              </a:rPr>
+              <a:t>   Research focused on optimizing radiofrequency ablation techniques to minimize the risk of insufficient ablation and its subsequent impact on tumor progression is critical.  </a:t>
+            </a:r>
             <a:endParaRPr lang="en-US" sz="1200" dirty="0"/>
           </a:p>
           <a:p>
@@ -4207,7 +4232,7 @@
                   <a:srgbClr val="FFFFFF"/>
                 </a:solidFill>
               </a:rPr>
-              <a:t>3. **腫瘤微環境的深入研究**  </a:t>
+              <a:t>   專注於優化射頻消融技術的研究，以最小化不充分消融的風險及其對腫瘤進展的後續影響是至關重要的。</a:t>
             </a:r>
             <a:endParaRPr lang="en-US" sz="1200" dirty="0"/>
           </a:p>
@@ -4218,14 +4243,6 @@
               </a:lnSpc>
               <a:buNone/>
             </a:pPr>
-            <a:r>
-              <a:rPr lang="en-US" sz="1200" dirty="0">
-                <a:solidFill>
-                  <a:srgbClr val="FFFFFF"/>
-                </a:solidFill>
-              </a:rPr>
-              <a:t>   Investigating the specific components and dynamics of the tumor immune microenvironment in HCC can provide insights into resistance mechanisms and inform treatment strategies.  </a:t>
-            </a:r>
             <a:endParaRPr lang="en-US" sz="1200" dirty="0"/>
           </a:p>
           <a:p>
@@ -4241,7 +4258,7 @@
                   <a:srgbClr val="FFFFFF"/>
                 </a:solidFill>
               </a:rPr>
-              <a:t>   深入研究HCC中腫瘤免疫微環境的具體組成和動態，能提供對抗藥物抵抗機制的見解，並指導治療策略。</a:t>
+              <a:t>4. **個體化免疫治療策略**  </a:t>
             </a:r>
             <a:endParaRPr lang="en-US" sz="1200" dirty="0"/>
           </a:p>
@@ -4252,6 +4269,14 @@
               </a:lnSpc>
               <a:buNone/>
             </a:pPr>
+            <a:r>
+              <a:rPr lang="en-US" sz="1200" dirty="0">
+                <a:solidFill>
+                  <a:srgbClr val="FFFFFF"/>
+                </a:solidFill>
+              </a:rPr>
+              <a:t>   Investigating the genetic and molecular profiles of HCC patients to tailor immunotherapy approaches, especially for those with Child-Pugh B cirrhosis, could enhance treatment efficacy.  </a:t>
+            </a:r>
             <a:endParaRPr lang="en-US" sz="1200" dirty="0"/>
           </a:p>
           <a:p>
@@ -4267,7 +4292,7 @@
                   <a:srgbClr val="FFFFFF"/>
                 </a:solidFill>
               </a:rPr>
-              <a:t>4. **多模式治療的臨床試驗**  </a:t>
+              <a:t>   研究HCC患者的遺傳和分子特徵，以量身定制免疫治療方案，特別是對於Child-Pugh B肝硬化患者，可能提高治療效果。</a:t>
             </a:r>
             <a:endParaRPr lang="en-US" sz="1200" dirty="0"/>
           </a:p>
@@ -4278,14 +4303,6 @@
               </a:lnSpc>
               <a:buNone/>
             </a:pPr>
-            <a:r>
-              <a:rPr lang="en-US" sz="1200" dirty="0">
-                <a:solidFill>
-                  <a:srgbClr val="FFFFFF"/>
-                </a:solidFill>
-              </a:rPr>
-              <a:t>   Conducting clinical trials that evaluate the efficacy of multimodal treatment approaches, including combining immunotherapy with radiotherapy, is crucial for improving patient outcomes.  </a:t>
-            </a:r>
             <a:endParaRPr lang="en-US" sz="1200" dirty="0"/>
           </a:p>
           <a:p>
@@ -4301,7 +4318,7 @@
                   <a:srgbClr val="FFFFFF"/>
                 </a:solidFill>
               </a:rPr>
-              <a:t>   開展臨床試驗，評估多模式治療方法的療效，包括將免疫療法與放療結合，對改善患者預後至關重要。</a:t>
+              <a:t>5. **多重療法的長期效果評估**  </a:t>
             </a:r>
             <a:endParaRPr lang="en-US" sz="1200" dirty="0"/>
           </a:p>
@@ -4312,6 +4329,14 @@
               </a:lnSpc>
               <a:buNone/>
             </a:pPr>
+            <a:r>
+              <a:rPr lang="en-US" sz="1200" dirty="0">
+                <a:solidFill>
+                  <a:srgbClr val="FFFFFF"/>
+                </a:solidFill>
+              </a:rPr>
+              <a:t>   Longitudinal studies assessing the long-term outcomes of combination therapies, such as sintilimab and TACE, in unresectable HCC will be essential for establishing best practices.  </a:t>
+            </a:r>
             <a:endParaRPr lang="en-US" sz="1200" dirty="0"/>
           </a:p>
           <a:p>
@@ -4327,41 +4352,7 @@
                   <a:srgbClr val="FFFFFF"/>
                 </a:solidFill>
               </a:rPr>
-              <a:t>5. **AI在臨床決策中的應用**  </a:t>
-            </a:r>
-            <a:endParaRPr lang="en-US" sz="1200" dirty="0"/>
-          </a:p>
-          <a:p>
-            <a:pPr indent="0" marL="0">
-              <a:lnSpc>
-                <a:spcPct val="150000"/>
-              </a:lnSpc>
-              <a:buNone/>
-            </a:pPr>
-            <a:r>
-              <a:rPr lang="en-US" sz="1200" dirty="0">
-                <a:solidFill>
-                  <a:srgbClr val="FFFFFF"/>
-                </a:solidFill>
-              </a:rPr>
-              <a:t>   Further development of AI-based models for predicting complications in HCC patients could enhance clinical decision-making and personalized treatment strategies.  </a:t>
-            </a:r>
-            <a:endParaRPr lang="en-US" sz="1200" dirty="0"/>
-          </a:p>
-          <a:p>
-            <a:pPr indent="0" marL="0">
-              <a:lnSpc>
-                <a:spcPct val="150000"/>
-              </a:lnSpc>
-              <a:buNone/>
-            </a:pPr>
-            <a:r>
-              <a:rPr lang="en-US" sz="1200" dirty="0">
-                <a:solidFill>
-                  <a:srgbClr val="FFFFFF"/>
-                </a:solidFill>
-              </a:rPr>
-              <a:t>   進一步開發基於人工智慧的模型以預測HCC患者的併發症，可能會增強臨床決策和個性化治療策略。</a:t>
+              <a:t>   評估不可切除HCC中如sintilimab和TACE等組合療法的長期效果的縱向研究，對於建立最佳實踐至關重要。</a:t>
             </a:r>
             <a:endParaRPr lang="en-US" sz="1200" dirty="0"/>
           </a:p>
@@ -4634,7 +4625,7 @@
                 <a:ea typeface="Arial" pitchFamily="34" charset="-122"/>
                 <a:cs typeface="Arial" pitchFamily="34" charset="-120"/>
               </a:rPr>
-              <a:t>Revisiting prophylactic corticosteroids to mitigate severe immune-related advers…</a:t>
+              <a:t>Tumor cells metabolically resist immune-checkpoint therapy by macrophage efferoc…</a:t>
             </a:r>
             <a:endParaRPr lang="en-US" sz="1400" dirty="0"/>
           </a:p>
@@ -4671,7 +4662,7 @@
                 <a:ea typeface="Arial" pitchFamily="34" charset="-122"/>
                 <a:cs typeface="Arial" pitchFamily="34" charset="-120"/>
               </a:rPr>
-              <a:t>Updated data from IMbrave050: Adjuvant atezolizumab plus bevacizumab for high-ri…</a:t>
+              <a:t>MASLD and MASLD-associated HCC: emerging biomarkers and therapeutic avenues.</a:t>
             </a:r>
             <a:endParaRPr lang="en-US" sz="1400" dirty="0"/>
           </a:p>
@@ -4708,7 +4699,7 @@
                 <a:ea typeface="Arial" pitchFamily="34" charset="-122"/>
                 <a:cs typeface="Arial" pitchFamily="34" charset="-120"/>
               </a:rPr>
-              <a:t>Phase Ib/II trial to evaluate the safety and efficacy of atezolizumab and bevaci…</a:t>
+              <a:t>High resolution spatial transcriptomics identifies insufficient radiofrequency a…</a:t>
             </a:r>
             <a:endParaRPr lang="en-US" sz="1400" dirty="0"/>
           </a:p>
@@ -4745,7 +4736,7 @@
                 <a:ea typeface="Arial" pitchFamily="34" charset="-122"/>
                 <a:cs typeface="Arial" pitchFamily="34" charset="-120"/>
               </a:rPr>
-              <a:t>Early and late survival dynamics of immunotherapy combinations in advanced HCC: …</a:t>
+              <a:t>Clinical predictors of response to Atezolizumab-bevacizumab in Child-Pugh B pati…</a:t>
             </a:r>
             <a:endParaRPr lang="en-US" sz="1400" dirty="0"/>
           </a:p>
@@ -4782,7 +4773,7 @@
                 <a:ea typeface="Arial" pitchFamily="34" charset="-122"/>
                 <a:cs typeface="Arial" pitchFamily="34" charset="-120"/>
               </a:rPr>
-              <a:t>Multimodal sequencing identifies synergistic mechanisms driving resistance to ne…</a:t>
+              <a:t>Resectability redefined: Lessons from quadruple therapy in HCC.</a:t>
             </a:r>
             <a:endParaRPr lang="en-US" sz="1400" dirty="0"/>
           </a:p>
@@ -4819,7 +4810,7 @@
                 <a:ea typeface="Arial" pitchFamily="34" charset="-122"/>
                 <a:cs typeface="Arial" pitchFamily="34" charset="-120"/>
               </a:rPr>
-              <a:t>Detection of esophageal varices and prediction of hepatic decompensation in unre…</a:t>
+              <a:t>Sintilimab and lenvatinib plus hepatic arterial infusion chemotherapy and emboli…</a:t>
             </a:r>
             <a:endParaRPr lang="en-US" sz="1400" dirty="0"/>
           </a:p>
@@ -4856,7 +4847,7 @@
                 <a:ea typeface="Arial" pitchFamily="34" charset="-122"/>
                 <a:cs typeface="Arial" pitchFamily="34" charset="-120"/>
               </a:rPr>
-              <a:t>Integrating Multiple Outcomes of First-Line Immunotherapy-Based Regimens for Adv…</a:t>
+              <a:t>… plus transarterial chemoembolization and PD-1 inhibitors as conversion therapi…</a:t>
             </a:r>
             <a:endParaRPr lang="en-US" sz="1400" dirty="0"/>
           </a:p>
@@ -4893,7 +4884,7 @@
                 <a:ea typeface="Arial" pitchFamily="34" charset="-122"/>
                 <a:cs typeface="Arial" pitchFamily="34" charset="-120"/>
               </a:rPr>
-              <a:t>Determinants of long-term survival from atezolizumab plus bevacizumab in unresec…</a:t>
+              <a:t>Natural killer cell-mediated immunosurveillance modulates liver cancer evolution…</a:t>
             </a:r>
             <a:endParaRPr lang="en-US" sz="1400" dirty="0"/>
           </a:p>
@@ -4930,7 +4921,7 @@
                 <a:ea typeface="Arial" pitchFamily="34" charset="-122"/>
                 <a:cs typeface="Arial" pitchFamily="34" charset="-120"/>
               </a:rPr>
-              <a:t>Prospective Study of Atezolizumab Plus Bevacizumab for Unresectable Hepatocellul…</a:t>
+              <a:t>WNK4 Enhances Anti-PD-1 Resistance and Promotes Tumor Progression in Hepatocellu…</a:t>
             </a:r>
             <a:endParaRPr lang="en-US" sz="1400" dirty="0"/>
           </a:p>
@@ -4967,7 +4958,7 @@
                 <a:ea typeface="Arial" pitchFamily="34" charset="-122"/>
                 <a:cs typeface="Arial" pitchFamily="34" charset="-120"/>
               </a:rPr>
-              <a:t>Erratum: Hepatectomy alters adjuvant anti-PD-1 action in a mouse model of HCC bu…</a:t>
+              <a:t>Rethinking Progression in Hepatocellular Carcinoma: Is Oligoprogression a Window…</a:t>
             </a:r>
             <a:endParaRPr lang="en-US" sz="1400" dirty="0"/>
           </a:p>
@@ -5122,7 +5113,7 @@
                   </a:extLst>
                 </a:hlinkClick>
               </a:rPr>
-              <a:t>Revisiting prophylactic corticosteroids to mitigate severe immune-related adverse events in hepatocellular carcinoma.</a:t>
+              <a:t>Tumor cells metabolically resist immune-checkpoint therapy by macrophage efferocytosis-mediated fatty acid recycling.</a:t>
             </a:r>
             <a:endParaRPr lang="en-US" sz="2400" dirty="0"/>
           </a:p>
@@ -5158,7 +5149,7 @@
                   <a:srgbClr val="888888"/>
                 </a:solidFill>
               </a:rPr>
-              <a:t>Journal of hepatology  ·  IF 25.7  ·  Prospective Study  ·  🌏 Asia</a:t>
+              <a:t>Cancer cell  ·  IF 48.8</a:t>
             </a:r>
             <a:endParaRPr lang="en-US" sz="1000" dirty="0"/>
           </a:p>
@@ -5201,7 +5192,7 @@
                 <a:ea typeface="Microsoft JhengHei" pitchFamily="34" charset="-122"/>
                 <a:cs typeface="Microsoft JhengHei" pitchFamily="34" charset="-120"/>
               </a:rPr>
-              <a:t>雙重ICI改變HCC治療格局。</a:t>
+              <a:t>腫瘤細胞適應營養缺乏。</a:t>
             </a:r>
             <a:endParaRPr lang="en-US" sz="1800" dirty="0"/>
           </a:p>
@@ -5222,7 +5213,7 @@
                 <a:ea typeface="Microsoft JhengHei" pitchFamily="34" charset="-122"/>
                 <a:cs typeface="Microsoft JhengHei" pitchFamily="34" charset="-120"/>
               </a:rPr>
-              <a:t>嚴重irAE限制ICI臨床應用。</a:t>
+              <a:t>巨噬細胞吞噬回收脂肪酸。</a:t>
             </a:r>
             <a:endParaRPr lang="en-US" sz="1800" dirty="0"/>
           </a:p>
@@ -5243,7 +5234,7 @@
                 <a:ea typeface="Microsoft JhengHei" pitchFamily="34" charset="-122"/>
                 <a:cs typeface="Microsoft JhengHei" pitchFamily="34" charset="-120"/>
               </a:rPr>
-              <a:t>預防性類固醇減少嚴重irAE。</a:t>
+              <a:t>TREM2+ LAMs 增強免疫抵抗。</a:t>
             </a:r>
             <a:endParaRPr lang="en-US" sz="1800" dirty="0"/>
           </a:p>
@@ -5264,7 +5255,7 @@
                 <a:ea typeface="Microsoft JhengHei" pitchFamily="34" charset="-122"/>
                 <a:cs typeface="Microsoft JhengHei" pitchFamily="34" charset="-120"/>
               </a:rPr>
-              <a:t>類固醇不影響T細胞活化。</a:t>
+              <a:t>FAU 與 ICB 不響應相關。</a:t>
             </a:r>
             <a:endParaRPr lang="en-US" sz="1800" dirty="0"/>
           </a:p>
@@ -5285,7 +5276,7 @@
                 <a:ea typeface="Microsoft JhengHei" pitchFamily="34" charset="-122"/>
                 <a:cs typeface="Microsoft JhengHei" pitchFamily="34" charset="-120"/>
               </a:rPr>
-              <a:t>需在HCC中前瞻性評估。</a:t>
+              <a:t>針對 TREM2+ LAMs 可改善療法。</a:t>
             </a:r>
             <a:endParaRPr lang="en-US" sz="1800" dirty="0"/>
           </a:p>
@@ -5321,7 +5312,7 @@
                   <a:srgbClr val="888888"/>
                 </a:solidFill>
               </a:rPr>
-              <a:t>Shen Ying-Chun, Pinato David J, Liu Tsung-Hao et al.. Journal of hepatology. 2026-06-06 DOI: 10.1016/j.jhep.2026.01.009</a:t>
+              <a:t>Liang Zhixian, Long Xiaohang, Xiong Zhewen et al.. Cancer cell. 2026-06-12 DOI: 10.1016/j.ccell.2026.05.005</a:t>
             </a:r>
             <a:endParaRPr lang="en-US" sz="800" dirty="0"/>
           </a:p>
@@ -5521,7 +5512,7 @@
                   </a:extLst>
                 </a:hlinkClick>
               </a:rPr>
-              <a:t>Updated data from IMbrave050: Adjuvant atezolizumab plus bevacizumab for high-risk hepatocellular carcinoma.</a:t>
+              <a:t>MASLD and MASLD-associated HCC: emerging biomarkers and therapeutic avenues.</a:t>
             </a:r>
             <a:endParaRPr lang="en-US" sz="2400" dirty="0"/>
           </a:p>
@@ -5557,7 +5548,7 @@
                   <a:srgbClr val="888888"/>
                 </a:solidFill>
               </a:rPr>
-              <a:t>Journal of hepatology  ·  IF 25.7  ·  Prospective Study  ·  🌏 Asia</a:t>
+              <a:t>Science bulletin  ·  RCT Phase 3</a:t>
             </a:r>
             <a:endParaRPr lang="en-US" sz="1000" dirty="0"/>
           </a:p>
@@ -5600,7 +5591,7 @@
                 <a:ea typeface="Microsoft JhengHei" pitchFamily="34" charset="-122"/>
                 <a:cs typeface="Microsoft JhengHei" pitchFamily="34" charset="-120"/>
               </a:rPr>
-              <a:t>IMbrave050達成RFS主要終點。</a:t>
+              <a:t>MASLD 是主要的慢性肝病。</a:t>
             </a:r>
             <a:endParaRPr lang="en-US" sz="1800" dirty="0"/>
           </a:p>
@@ -5621,7 +5612,7 @@
                 <a:ea typeface="Microsoft JhengHei" pitchFamily="34" charset="-122"/>
                 <a:cs typeface="Microsoft JhengHei" pitchFamily="34" charset="-120"/>
               </a:rPr>
-              <a:t>治療與監測RFS HR為0.72。</a:t>
+              <a:t>新興生物標記用於診斷預後。</a:t>
             </a:r>
             <a:endParaRPr lang="en-US" sz="1800" dirty="0"/>
           </a:p>
@@ -5642,7 +5633,7 @@
                 <a:ea typeface="Microsoft JhengHei" pitchFamily="34" charset="-122"/>
                 <a:cs typeface="Microsoft JhengHei" pitchFamily="34" charset="-120"/>
               </a:rPr>
-              <a:t>第二次IA OS數據仍不成熟。</a:t>
+              <a:t>近期 FDA 批准新療法。</a:t>
             </a:r>
             <a:endParaRPr lang="en-US" sz="1800" dirty="0"/>
           </a:p>
@@ -5663,7 +5654,7 @@
                 <a:ea typeface="Microsoft JhengHei" pitchFamily="34" charset="-122"/>
                 <a:cs typeface="Microsoft JhengHei" pitchFamily="34" charset="-120"/>
               </a:rPr>
-              <a:t>更新分析中RFS初始益處未持續。</a:t>
+              <a:t>創新介入改善 MASLD 管理。</a:t>
             </a:r>
             <a:endParaRPr lang="en-US" sz="1800" dirty="0"/>
           </a:p>
@@ -5684,7 +5675,7 @@
                 <a:ea typeface="Microsoft JhengHei" pitchFamily="34" charset="-122"/>
                 <a:cs typeface="Microsoft JhengHei" pitchFamily="34" charset="-120"/>
               </a:rPr>
-              <a:t>安全性資料與先前結果一致。</a:t>
+              <a:t>需早期檢測與多元治療。</a:t>
             </a:r>
             <a:endParaRPr lang="en-US" sz="1800" dirty="0"/>
           </a:p>
@@ -5720,7 +5711,7 @@
                   <a:srgbClr val="888888"/>
                 </a:solidFill>
               </a:rPr>
-              <a:t>Yopp Adam, Chen Minshan, Cheng Ann-Lii et al.. Journal of hepatology. 2026-05-16 DOI: 10.1016/j.jhep.2026.01.006</a:t>
+              <a:t>Ha Suki, Zhang Xiang, Li Lanjuan et al.. Science bulletin. 2026-06-12 DOI: 10.1016/j.scib.2026.04.048</a:t>
             </a:r>
             <a:endParaRPr lang="en-US" sz="800" dirty="0"/>
           </a:p>
@@ -5920,7 +5911,7 @@
                   </a:extLst>
                 </a:hlinkClick>
               </a:rPr>
-              <a:t>Phase Ib/II trial to evaluate the safety and efficacy of atezolizumab and bevacizumab as adjuvant therapy following carbon-ion radiotherapy in hepatocellular carcinoma (VANGUARD): study protocol.</a:t>
+              <a:t>High resolution spatial transcriptomics identifies insufficient radiofrequency ablation induces hepatocellular carcinoma progression via CEBPD / CXCL2 axis.</a:t>
             </a:r>
             <a:endParaRPr lang="en-US" sz="2400" dirty="0"/>
           </a:p>
@@ -5956,7 +5947,7 @@
                   <a:srgbClr val="888888"/>
                 </a:solidFill>
               </a:rPr>
-              <a:t>BMJ open  ·  RCT Phase 2  ·  🌏 Asia</a:t>
+              <a:t>Hepatology (Baltimore, Md.)  ·  IF 12.9  ·  Basic Research</a:t>
             </a:r>
             <a:endParaRPr lang="en-US" sz="1000" dirty="0"/>
           </a:p>
@@ -5999,7 +5990,7 @@
                 <a:ea typeface="Microsoft JhengHei" pitchFamily="34" charset="-122"/>
                 <a:cs typeface="Microsoft JhengHei" pitchFamily="34" charset="-120"/>
               </a:rPr>
-              <a:t>評估Atezo+Bev於C-ion RT後的效果</a:t>
+              <a:t>iRFA導致HCC進展。</a:t>
             </a:r>
             <a:endParaRPr lang="en-US" sz="1800" dirty="0"/>
           </a:p>
@@ -6020,7 +6011,7 @@
                 <a:ea typeface="Microsoft JhengHei" pitchFamily="34" charset="-122"/>
                 <a:cs typeface="Microsoft JhengHei" pitchFamily="34" charset="-120"/>
               </a:rPr>
-              <a:t>針對HCC患者的Ib/II期試驗</a:t>
+              <a:t>CEBPD激活CXCL2表達。</a:t>
             </a:r>
             <a:endParaRPr lang="en-US" sz="1800" dirty="0"/>
           </a:p>
@@ -6041,7 +6032,7 @@
                 <a:ea typeface="Microsoft JhengHei" pitchFamily="34" charset="-122"/>
                 <a:cs typeface="Microsoft JhengHei" pitchFamily="34" charset="-120"/>
               </a:rPr>
-              <a:t>主要終點：1年無復發生存率</a:t>
+              <a:t>CXCL2促進免疫逃逸。</a:t>
             </a:r>
             <a:endParaRPr lang="en-US" sz="1800" dirty="0"/>
           </a:p>
@@ -6062,7 +6053,7 @@
                 <a:ea typeface="Microsoft JhengHei" pitchFamily="34" charset="-122"/>
                 <a:cs typeface="Microsoft JhengHei" pitchFamily="34" charset="-120"/>
               </a:rPr>
-              <a:t>重點在高風險復發患者</a:t>
+              <a:t>使用高解析度空間轉錄組學。</a:t>
             </a:r>
             <a:endParaRPr lang="en-US" sz="1800" dirty="0"/>
           </a:p>
@@ -6083,7 +6074,7 @@
                 <a:ea typeface="Microsoft JhengHei" pitchFamily="34" charset="-122"/>
                 <a:cs typeface="Microsoft JhengHei" pitchFamily="34" charset="-120"/>
               </a:rPr>
-              <a:t>研究已獲倫理委員會批准</a:t>
+              <a:t>CXCR2抑制可能防止復發。</a:t>
             </a:r>
             <a:endParaRPr lang="en-US" sz="1800" dirty="0"/>
           </a:p>
@@ -6119,7 +6110,7 @@
                   <a:srgbClr val="888888"/>
                 </a:solidFill>
               </a:rPr>
-              <a:t>Koroki Keisuke, Wakatsuki Masaru, Ogasawara Sadahisa et al.. BMJ open. 2026-06-06 DOI: 10.1136/bmjopen-2025-115731</a:t>
+              <a:t>Lin Ke, Zhang Nan, Zhang Zongxu et al.. Hepatology (Baltimore, Md.). 2026-06-09 DOI: 10.1097/HEP.0000000000001714</a:t>
             </a:r>
             <a:endParaRPr lang="en-US" sz="800" dirty="0"/>
           </a:p>
@@ -6319,7 +6310,7 @@
                   </a:extLst>
                 </a:hlinkClick>
               </a:rPr>
-              <a:t>Early and late survival dynamics of immunotherapy combinations in advanced HCC: Anchored indirect comparison of atezolizumab plus bevacizumab versus durvalumab +&amp;#x202f;tremelimumab.</a:t>
+              <a:t>Clinical predictors of response to Atezolizumab-bevacizumab in Child-Pugh B patients with hepatocellular carcinoma.</a:t>
             </a:r>
             <a:endParaRPr lang="en-US" sz="2400" dirty="0"/>
           </a:p>
@@ -6355,7 +6346,7 @@
                   <a:srgbClr val="888888"/>
                 </a:solidFill>
               </a:rPr>
-              <a:t>European journal of cancer (Oxford, England : 1990)  ·  IF 8.4  ·  Meta-Analysis  ·  🌏 Asia</a:t>
+              <a:t>JHEP reports : innovation in hepatology  ·  IF 7.8  ·  Retrospective Study  ·  🌏 Asia</a:t>
             </a:r>
             <a:endParaRPr lang="en-US" sz="1000" dirty="0"/>
           </a:p>
@@ -6398,7 +6389,7 @@
                 <a:ea typeface="Microsoft JhengHei" pitchFamily="34" charset="-122"/>
                 <a:cs typeface="Microsoft JhengHei" pitchFamily="34" charset="-120"/>
               </a:rPr>
-              <a:t>A+B 早期生存優勢</a:t>
+              <a:t>找出A/B反應預測因子</a:t>
             </a:r>
             <a:endParaRPr lang="en-US" sz="1800" dirty="0"/>
           </a:p>
@@ -6419,7 +6410,7 @@
                 <a:ea typeface="Microsoft JhengHei" pitchFamily="34" charset="-122"/>
                 <a:cs typeface="Microsoft JhengHei" pitchFamily="34" charset="-120"/>
               </a:rPr>
-              <a:t>STRIDE 長期生存益處</a:t>
+              <a:t>Child-Pugh B患者生存期較短</a:t>
             </a:r>
             <a:endParaRPr lang="en-US" sz="1800" dirty="0"/>
           </a:p>
@@ -6440,7 +6431,7 @@
                 <a:ea typeface="Microsoft JhengHei" pitchFamily="34" charset="-122"/>
                 <a:cs typeface="Microsoft JhengHei" pitchFamily="34" charset="-120"/>
               </a:rPr>
-              <a:t>分析中觀察到時間依賴效應</a:t>
+              <a:t>ALBI 1/2級患者受益於A/B療法</a:t>
             </a:r>
             <a:endParaRPr lang="en-US" sz="1800" dirty="0"/>
           </a:p>
@@ -6476,7 +6467,7 @@
                   <a:srgbClr val="888888"/>
                 </a:solidFill>
               </a:rPr>
-              <a:t>Casadei-Gardini Andrea, Yip Terry Cheuk-Fung, Vitale Alessandro et al.. European journal of cancer (Oxford, England : 1990). 2026-05-21 DOI: 10.1016/j.ejca.2026.116750</a:t>
+              <a:t>Odent Anne Victoire, Campani Claudia, Bouattour Mohamed et al.. JHEP reports : innovation in hepatology. 2026-06-11 DOI: 10.1016/j.jhepr.2026.101915</a:t>
             </a:r>
             <a:endParaRPr lang="en-US" sz="800" dirty="0"/>
           </a:p>
@@ -6676,7 +6667,7 @@
                   </a:extLst>
                 </a:hlinkClick>
               </a:rPr>
-              <a:t>Multimodal sequencing identifies synergistic mechanisms driving resistance to neoadjuvant nivolumab treatment in hepatocellular carcinoma.</a:t>
+              <a:t>Resectability redefined: Lessons from quadruple therapy in HCC.</a:t>
             </a:r>
             <a:endParaRPr lang="en-US" sz="2400" dirty="0"/>
           </a:p>
@@ -6712,7 +6703,7 @@
                   <a:srgbClr val="888888"/>
                 </a:solidFill>
               </a:rPr>
-              <a:t>Molecular cancer  ·  IF 27.7</a:t>
+              <a:t>Med (New York, N.Y.)  ·  RCT Phase 2</a:t>
             </a:r>
             <a:endParaRPr lang="en-US" sz="1000" dirty="0"/>
           </a:p>
@@ -6755,7 +6746,7 @@
                 <a:ea typeface="Microsoft JhengHei" pitchFamily="34" charset="-122"/>
                 <a:cs typeface="Microsoft JhengHei" pitchFamily="34" charset="-120"/>
               </a:rPr>
-              <a:t>HCC顯示顯著的腫瘤內異質性。</a:t>
+              <a:t>進行二期臨床試驗 (PLATIC)。</a:t>
             </a:r>
             <a:endParaRPr lang="en-US" sz="1800" dirty="0"/>
           </a:p>
@@ -6776,7 +6767,7 @@
                 <a:ea typeface="Microsoft JhengHei" pitchFamily="34" charset="-122"/>
                 <a:cs typeface="Microsoft JhengHei" pitchFamily="34" charset="-120"/>
               </a:rPr>
-              <a:t>免疫抑制TIME與治療抵抗相關。</a:t>
+              <a:t>評估四重療法對於uHCC。</a:t>
             </a:r>
             <a:endParaRPr lang="en-US" sz="1800" dirty="0"/>
           </a:p>
@@ -6797,7 +6788,7 @@
                 <a:ea typeface="Microsoft JhengHei" pitchFamily="34" charset="-122"/>
                 <a:cs typeface="Microsoft JhengHei" pitchFamily="34" charset="-120"/>
               </a:rPr>
-              <a:t>非應答者中識別出脂質代謝失調。</a:t>
+              <a:t>結合 sintilimab 和 lenvatinib。</a:t>
             </a:r>
             <a:endParaRPr lang="en-US" sz="1800" dirty="0"/>
           </a:p>
@@ -6818,7 +6809,7 @@
                 <a:ea typeface="Microsoft JhengHei" pitchFamily="34" charset="-122"/>
                 <a:cs typeface="Microsoft JhengHei" pitchFamily="34" charset="-120"/>
               </a:rPr>
-              <a:t>TAMs和CD8 T細胞形成屏障。</a:t>
+              <a:t>納入 TACE-HAIC 作為轉化療法。</a:t>
             </a:r>
             <a:endParaRPr lang="en-US" sz="1800" dirty="0"/>
           </a:p>
@@ -6839,7 +6830,7 @@
                 <a:ea typeface="Microsoft JhengHei" pitchFamily="34" charset="-122"/>
                 <a:cs typeface="Microsoft JhengHei" pitchFamily="34" charset="-120"/>
               </a:rPr>
-              <a:t>ADM-RAMP1-EBP軸影響脂質代謝。</a:t>
+              <a:t>結果引發整合問題。</a:t>
             </a:r>
             <a:endParaRPr lang="en-US" sz="1800" dirty="0"/>
           </a:p>
@@ -6875,7 +6866,7 @@
                   <a:srgbClr val="888888"/>
                 </a:solidFill>
               </a:rPr>
-              <a:t>Zeng Fanhong, Guo Jiaxin, Zeng Zheng et al.. Molecular cancer. 2026-06-02 DOI: 10.1186/s12943-026-02682-x</a:t>
+              <a:t>Jiang Nan, Zhong Bin-Yan. Med (New York, N.Y.). 2026-06-12 DOI: 10.1016/j.medj.2026.101136</a:t>
             </a:r>
             <a:endParaRPr lang="en-US" sz="800" dirty="0"/>
           </a:p>
@@ -7075,7 +7066,7 @@
                   </a:extLst>
                 </a:hlinkClick>
               </a:rPr>
-              <a:t>Detection of esophageal varices and prediction of hepatic decompensation in unresectable hepatocellular carcinoma using AI.</a:t>
+              <a:t>Sintilimab and lenvatinib plus hepatic arterial infusion chemotherapy and embolization as conversion therapy for uHCC: A phase 2 trial.</a:t>
             </a:r>
             <a:endParaRPr lang="en-US" sz="2400" dirty="0"/>
           </a:p>
@@ -7111,7 +7102,7 @@
                   <a:srgbClr val="888888"/>
                 </a:solidFill>
               </a:rPr>
-              <a:t>Journal of hepatology  ·  IF 25.7  ·  Retrospective Study</a:t>
+              <a:t>Med (New York, N.Y.)  ·  RCT Phase 2</a:t>
             </a:r>
             <a:endParaRPr lang="en-US" sz="1000" dirty="0"/>
           </a:p>
@@ -7154,7 +7145,7 @@
                 <a:ea typeface="Microsoft JhengHei" pitchFamily="34" charset="-122"/>
                 <a:cs typeface="Microsoft JhengHei" pitchFamily="34" charset="-120"/>
               </a:rPr>
-              <a:t>開發AI模型檢測EV</a:t>
+              <a:t>Sintilimab與lenvatinib用於uHCC</a:t>
             </a:r>
             <a:endParaRPr lang="en-US" sz="1800" dirty="0"/>
           </a:p>
@@ -7175,7 +7166,7 @@
                 <a:ea typeface="Microsoft JhengHei" pitchFamily="34" charset="-122"/>
                 <a:cs typeface="Microsoft JhengHei" pitchFamily="34" charset="-120"/>
               </a:rPr>
-              <a:t>使用常規CT與臨床數據</a:t>
+              <a:t>轉化為切除率達77.2%</a:t>
             </a:r>
             <a:endParaRPr lang="en-US" sz="1800" dirty="0"/>
           </a:p>
@@ -7196,7 +7187,7 @@
                 <a:ea typeface="Microsoft JhengHei" pitchFamily="34" charset="-122"/>
                 <a:cs typeface="Microsoft JhengHei" pitchFamily="34" charset="-120"/>
               </a:rPr>
-              <a:t>在489例不可切除HCC患者中驗證</a:t>
+              <a:t>客觀反應率為80.7%</a:t>
             </a:r>
             <a:endParaRPr lang="en-US" sz="1800" dirty="0"/>
           </a:p>
@@ -7217,7 +7208,7 @@
                 <a:ea typeface="Microsoft JhengHei" pitchFamily="34" charset="-122"/>
                 <a:cs typeface="Microsoft JhengHei" pitchFamily="34" charset="-120"/>
               </a:rPr>
-              <a:t>HepatoSageCT提高預測準確性</a:t>
+              <a:t>64.9%患者出現三級以上不良反應</a:t>
             </a:r>
             <a:endParaRPr lang="en-US" sz="1800" dirty="0"/>
           </a:p>
@@ -7238,7 +7229,7 @@
                 <a:ea typeface="Microsoft JhengHei" pitchFamily="34" charset="-122"/>
                 <a:cs typeface="Microsoft JhengHei" pitchFamily="34" charset="-120"/>
               </a:rPr>
-              <a:t>非侵入性方法減少內視鏡檢查</a:t>
+              <a:t>PFS與OS較歷史對照組更長</a:t>
             </a:r>
             <a:endParaRPr lang="en-US" sz="1800" dirty="0"/>
           </a:p>
@@ -7274,7 +7265,7 @@
                   <a:srgbClr val="888888"/>
                 </a:solidFill>
               </a:rPr>
-              <a:t>Rabasco Meneghetti Asier, Campani Claudia, Roux Charles et al.. Journal of hepatology. 2026-05-16 DOI: 10.1016/j.jhep.2026.01.021</a:t>
+              <a:t>Qiu Jiliang, Huang Zhenkun, He Wei et al.. Med (New York, N.Y.). 2026-06-12 DOI: 10.1016/j.medj.2026.101132</a:t>
             </a:r>
             <a:endParaRPr lang="en-US" sz="800" dirty="0"/>
           </a:p>
@@ -7474,7 +7465,7 @@
                   </a:extLst>
                 </a:hlinkClick>
               </a:rPr>
-              <a:t>Integrating Multiple Outcomes of First-Line Immunotherapy-Based Regimens for Advanced Hepatocellular Carcinoma: A Network Meta-Analysis of Phase III Trials.</a:t>
+              <a:t>… plus transarterial chemoembolization and PD-1 inhibitors as conversion therapies for unresectable intermediate-advanced hepatocellular carcinoma: a phase 2 trial …</a:t>
             </a:r>
             <a:endParaRPr lang="en-US" sz="2400" dirty="0"/>
           </a:p>
@@ -7510,7 +7501,7 @@
                   <a:srgbClr val="888888"/>
                 </a:solidFill>
               </a:rPr>
-              <a:t>Critical reviews in oncology/hematology  ·  RCT Phase 3</a:t>
+              <a:t>… and Targeted Therapy  ·  RCT Phase 2</a:t>
             </a:r>
             <a:endParaRPr lang="en-US" sz="1000" dirty="0"/>
           </a:p>
@@ -7553,7 +7544,7 @@
                 <a:ea typeface="Microsoft JhengHei" pitchFamily="34" charset="-122"/>
                 <a:cs typeface="Microsoft JhengHei" pitchFamily="34" charset="-120"/>
               </a:rPr>
-              <a:t>進行第三階段試驗的網絡Meta分析。</a:t>
+              <a:t>針對不可切除HCC的組合療法</a:t>
             </a:r>
             <a:endParaRPr lang="en-US" sz="1800" dirty="0"/>
           </a:p>
@@ -7574,7 +7565,7 @@
                 <a:ea typeface="Microsoft JhengHei" pitchFamily="34" charset="-122"/>
                 <a:cs typeface="Microsoft JhengHei" pitchFamily="34" charset="-120"/>
               </a:rPr>
-              <a:t>Sintilimab加IBI305顯示最佳整體生存率。</a:t>
+              <a:t>使用經動脈化療栓塞(TACE)</a:t>
             </a:r>
             <a:endParaRPr lang="en-US" sz="1800" dirty="0"/>
           </a:p>
@@ -7595,7 +7586,7 @@
                 <a:ea typeface="Microsoft JhengHei" pitchFamily="34" charset="-122"/>
                 <a:cs typeface="Microsoft JhengHei" pitchFamily="34" charset="-120"/>
               </a:rPr>
-              <a:t>Finotonlimab加bevacizumab改善年輕患者結果。</a:t>
+              <a:t>PD-1抑制劑提升療效</a:t>
             </a:r>
             <a:endParaRPr lang="en-US" sz="1800" dirty="0"/>
           </a:p>
@@ -7616,7 +7607,7 @@
                 <a:ea typeface="Microsoft JhengHei" pitchFamily="34" charset="-122"/>
                 <a:cs typeface="Microsoft JhengHei" pitchFamily="34" charset="-120"/>
               </a:rPr>
-              <a:t>Bevacizumab組合提供良好的利弊平衡。</a:t>
+              <a:t>第二期試驗顯示良好結果</a:t>
             </a:r>
             <a:endParaRPr lang="en-US" sz="1800" dirty="0"/>
           </a:p>
@@ -7637,7 +7628,7 @@
                 <a:ea typeface="Microsoft JhengHei" pitchFamily="34" charset="-122"/>
                 <a:cs typeface="Microsoft JhengHei" pitchFamily="34" charset="-120"/>
               </a:rPr>
-              <a:t>TOPSIS模型整合多重治療結果。</a:t>
+              <a:t>有潛力轉為可切除疾病</a:t>
             </a:r>
             <a:endParaRPr lang="en-US" sz="1800" dirty="0"/>
           </a:p>
@@ -7673,7 +7664,7 @@
                   <a:srgbClr val="888888"/>
                 </a:solidFill>
               </a:rPr>
-              <a:t>Nie Guilin, Li Xinming, Wang Yaoqun et al.. Critical reviews in oncology/hematology. 2026-06-06 DOI: 10.1016/j.critrevonc.2026.105412</a:t>
+              <a:t>X Zhang, H Cai, W Peng. … and Targeted Therapy. 2026</a:t>
             </a:r>
             <a:endParaRPr lang="en-US" sz="800" dirty="0"/>
           </a:p>

--- a/docs/digest-zh.pptx
+++ b/docs/digest-zh.pptx
@@ -2269,7 +2269,7 @@
                   <a:srgbClr val="888888"/>
                 </a:solidFill>
               </a:rPr>
-              <a:t>2026-06-08 — 2026-06-15</a:t>
+              <a:t>2026-06-15 — 2026-06-22</a:t>
             </a:r>
             <a:endParaRPr lang="en-US" sz="1400" dirty="0"/>
           </a:p>
@@ -2460,7 +2460,7 @@
                   </a:extLst>
                 </a:hlinkClick>
               </a:rPr>
-              <a:t>Natural killer cell-mediated immunosurveillance modulates liver cancer evolution through cancer stemness enhancement and lipid metabolism reprogramming.</a:t>
+              <a:t>Prognostic nutritional index and the survival of patients with hepatocellular carcinoma on immune checkpoint inhibitors: a meta-analysis</a:t>
             </a:r>
             <a:endParaRPr lang="en-US" sz="2400" dirty="0"/>
           </a:p>
@@ -2496,7 +2496,7 @@
                   <a:srgbClr val="888888"/>
                 </a:solidFill>
               </a:rPr>
-              <a:t>Nature communications  ·  IF 14.7</a:t>
+              <a:t>BMC cancer  ·  Meta-Analysis</a:t>
             </a:r>
             <a:endParaRPr lang="en-US" sz="1000" dirty="0"/>
           </a:p>
@@ -2539,7 +2539,7 @@
                 <a:ea typeface="Microsoft JhengHei" pitchFamily="34" charset="-122"/>
                 <a:cs typeface="Microsoft JhengHei" pitchFamily="34" charset="-120"/>
               </a:rPr>
-              <a:t>NK細胞促進肝癌演變。</a:t>
+              <a:t>預後營養指數(PNI)影響生存率。</a:t>
             </a:r>
             <a:endParaRPr lang="en-US" sz="1800" dirty="0"/>
           </a:p>
@@ -2560,7 +2560,7 @@
                 <a:ea typeface="Microsoft JhengHei" pitchFamily="34" charset="-122"/>
                 <a:cs typeface="Microsoft JhengHei" pitchFamily="34" charset="-120"/>
               </a:rPr>
-              <a:t>免疫監視增強腫瘤幹性。</a:t>
+              <a:t>HCC患者免疫檢查點抑制劑的綜合分析。</a:t>
             </a:r>
             <a:endParaRPr lang="en-US" sz="1800" dirty="0"/>
           </a:p>
@@ -2581,49 +2581,7 @@
                 <a:ea typeface="Microsoft JhengHei" pitchFamily="34" charset="-122"/>
                 <a:cs typeface="Microsoft JhengHei" pitchFamily="34" charset="-120"/>
               </a:rPr>
-              <a:t>觀察到脂質代謝重編程。</a:t>
-            </a:r>
-            <a:endParaRPr lang="en-US" sz="1800" dirty="0"/>
-          </a:p>
-          <a:p>
-            <a:pPr marL="342900" indent="-342900">
-              <a:spcAft>
-                <a:spcPts val="800"/>
-              </a:spcAft>
-              <a:buSzPct val="100000"/>
-              <a:buChar char="•"/>
-            </a:pPr>
-            <a:r>
-              <a:rPr lang="en-US" sz="1800" dirty="0">
-                <a:solidFill>
-                  <a:srgbClr val="333333"/>
-                </a:solidFill>
-                <a:latin typeface="Microsoft JhengHei" pitchFamily="34" charset="0"/>
-                <a:ea typeface="Microsoft JhengHei" pitchFamily="34" charset="-122"/>
-                <a:cs typeface="Microsoft JhengHei" pitchFamily="34" charset="-120"/>
-              </a:rPr>
-              <a:t>聯合抗LAG-3改善治療。</a:t>
-            </a:r>
-            <a:endParaRPr lang="en-US" sz="1800" dirty="0"/>
-          </a:p>
-          <a:p>
-            <a:pPr marL="342900" indent="-342900">
-              <a:spcAft>
-                <a:spcPts val="800"/>
-              </a:spcAft>
-              <a:buSzPct val="100000"/>
-              <a:buChar char="•"/>
-            </a:pPr>
-            <a:r>
-              <a:rPr lang="en-US" sz="1800" dirty="0">
-                <a:solidFill>
-                  <a:srgbClr val="333333"/>
-                </a:solidFill>
-                <a:latin typeface="Microsoft JhengHei" pitchFamily="34" charset="0"/>
-                <a:ea typeface="Microsoft JhengHei" pitchFamily="34" charset="-122"/>
-                <a:cs typeface="Microsoft JhengHei" pitchFamily="34" charset="-120"/>
-              </a:rPr>
-              <a:t>免疫代謝療法作為策略。</a:t>
+              <a:t>營養狀態與免疫反應相關。</a:t>
             </a:r>
             <a:endParaRPr lang="en-US" sz="1800" dirty="0"/>
           </a:p>
@@ -2659,7 +2617,7 @@
                   <a:srgbClr val="888888"/>
                 </a:solidFill>
               </a:rPr>
-              <a:t>Shi Liang, Liu Boqiang, Sun Ruya et al.. Nature communications. 2026-06-11 DOI: 10.1038/s41467-026-74360-x</a:t>
+              <a:t>J Fu, W Peng, J Jiang. BMC cancer. 2026</a:t>
             </a:r>
             <a:endParaRPr lang="en-US" sz="800" dirty="0"/>
           </a:p>
@@ -2859,7 +2817,7 @@
                   </a:extLst>
                 </a:hlinkClick>
               </a:rPr>
-              <a:t>WNK4 Enhances Anti-PD-1 Resistance and Promotes Tumor Progression in Hepatocellular Carcinoma by Reprogramming Cysteine Metabolism in Cancer-Associated Fibroblasts.</a:t>
+              <a:t>Radiotherapy versus local ablation therapy for the treatment of hepatocellular carcinoma: A systematic review and meta-analysis.</a:t>
             </a:r>
             <a:endParaRPr lang="en-US" sz="2400" dirty="0"/>
           </a:p>
@@ -2895,7 +2853,7 @@
                   <a:srgbClr val="888888"/>
                 </a:solidFill>
               </a:rPr>
-              <a:t>FASEB journal : official publication of the Federation of American Societies for Experimental Biology  ·  🌏 Asia</a:t>
+              <a:t>Journal of Clinical …  ·  Meta-Analysis</a:t>
             </a:r>
             <a:endParaRPr lang="en-US" sz="1000" dirty="0"/>
           </a:p>
@@ -2938,7 +2896,7 @@
                 <a:ea typeface="Microsoft JhengHei" pitchFamily="34" charset="-122"/>
                 <a:cs typeface="Microsoft JhengHei" pitchFamily="34" charset="-120"/>
               </a:rPr>
-              <a:t>WNK4在HCC組織中上調</a:t>
+              <a:t>局部消融療法包括 RFA 和 MWA。</a:t>
             </a:r>
             <a:endParaRPr lang="en-US" sz="1800" dirty="0"/>
           </a:p>
@@ -2959,7 +2917,7 @@
                 <a:ea typeface="Microsoft JhengHei" pitchFamily="34" charset="-122"/>
                 <a:cs typeface="Microsoft JhengHei" pitchFamily="34" charset="-120"/>
               </a:rPr>
-              <a:t>促進HCC細胞增殖與遷移</a:t>
+              <a:t>EBRT 與局部消融結果不同。</a:t>
             </a:r>
             <a:endParaRPr lang="en-US" sz="1800" dirty="0"/>
           </a:p>
@@ -2980,7 +2938,7 @@
                 <a:ea typeface="Microsoft JhengHei" pitchFamily="34" charset="-122"/>
                 <a:cs typeface="Microsoft JhengHei" pitchFamily="34" charset="-120"/>
               </a:rPr>
-              <a:t>增強抗PD-1療法抵抗力</a:t>
+              <a:t>Meta分析顯示 RFA 生存益處。</a:t>
             </a:r>
             <a:endParaRPr lang="en-US" sz="1800" dirty="0"/>
           </a:p>
@@ -3001,7 +2959,7 @@
                 <a:ea typeface="Microsoft JhengHei" pitchFamily="34" charset="-122"/>
                 <a:cs typeface="Microsoft JhengHei" pitchFamily="34" charset="-120"/>
               </a:rPr>
-              <a:t>重編程CAFs中的半胱氨酸代謝</a:t>
+              <a:t>局部無進展生存是關鍵指標。</a:t>
             </a:r>
             <a:endParaRPr lang="en-US" sz="1800" dirty="0"/>
           </a:p>
@@ -3022,7 +2980,7 @@
                 <a:ea typeface="Microsoft JhengHei" pitchFamily="34" charset="-122"/>
                 <a:cs typeface="Microsoft JhengHei" pitchFamily="34" charset="-120"/>
               </a:rPr>
-              <a:t>確定WNK4-HMGB1-p53軸</a:t>
+              <a:t>研究比較兩種治療方式的效果。</a:t>
             </a:r>
             <a:endParaRPr lang="en-US" sz="1800" dirty="0"/>
           </a:p>
@@ -3058,7 +3016,7 @@
                   <a:srgbClr val="888888"/>
                 </a:solidFill>
               </a:rPr>
-              <a:t>Yu Ge, Cui Yun-Long, Mu Han et al.. FASEB journal : official publication of the Federation of American Societies for Experimental Biology. 2026-06-12 DOI: 10.1096/fj.202502777R</a:t>
+              <a:t>SH Bae, SH Choi, SM Yoon. Journal of Clinical …. 2026</a:t>
             </a:r>
             <a:endParaRPr lang="en-US" sz="800" dirty="0"/>
           </a:p>
@@ -3258,7 +3216,7 @@
                   </a:extLst>
                 </a:hlinkClick>
               </a:rPr>
-              <a:t>Rethinking Progression in Hepatocellular Carcinoma: Is Oligoprogression a Window for Local Ablation?</a:t>
+              <a:t>Resveratrol derivative restores macrophage cholesterol homeostasis via stabilizing xanthine oxidoreductase in hepatocellular carcinoma.</a:t>
             </a:r>
             <a:endParaRPr lang="en-US" sz="2400" dirty="0"/>
           </a:p>
@@ -3294,7 +3252,7 @@
                   <a:srgbClr val="888888"/>
                 </a:solidFill>
               </a:rPr>
-              <a:t>Hepatology research : the official journal of the Japan Society of Hepatology  ·  🌏 Asia</a:t>
+              <a:t>Journal of translational medicine  ·  IF 6.1  ·  Basic Research</a:t>
             </a:r>
             <a:endParaRPr lang="en-US" sz="1000" dirty="0"/>
           </a:p>
@@ -3337,7 +3295,7 @@
                 <a:ea typeface="Microsoft JhengHei" pitchFamily="34" charset="-122"/>
                 <a:cs typeface="Microsoft JhengHei" pitchFamily="34" charset="-120"/>
               </a:rPr>
-              <a:t>HCC中的寡進展具有重要性。</a:t>
+              <a:t>TAMs 影響 HCC 免疫環境。</a:t>
             </a:r>
             <a:endParaRPr lang="en-US" sz="1800" dirty="0"/>
           </a:p>
@@ -3358,7 +3316,7 @@
                 <a:ea typeface="Microsoft JhengHei" pitchFamily="34" charset="-122"/>
                 <a:cs typeface="Microsoft JhengHei" pitchFamily="34" charset="-120"/>
               </a:rPr>
-              <a:t>局部消融可能有利於寡進展患者。</a:t>
+              <a:t>XOR 表達降低與預後不良相關。</a:t>
             </a:r>
             <a:endParaRPr lang="en-US" sz="1800" dirty="0"/>
           </a:p>
@@ -3379,7 +3337,49 @@
                 <a:ea typeface="Microsoft JhengHei" pitchFamily="34" charset="-122"/>
                 <a:cs typeface="Microsoft JhengHei" pitchFamily="34" charset="-120"/>
               </a:rPr>
-              <a:t>識別寡進展對治療至關重要。</a:t>
+              <a:t>Res616 穩定 XOR，恢復膽固醇平衡。</a:t>
+            </a:r>
+            <a:endParaRPr lang="en-US" sz="1800" dirty="0"/>
+          </a:p>
+          <a:p>
+            <a:pPr marL="342900" indent="-342900">
+              <a:spcAft>
+                <a:spcPts val="800"/>
+              </a:spcAft>
+              <a:buSzPct val="100000"/>
+              <a:buChar char="•"/>
+            </a:pPr>
+            <a:r>
+              <a:rPr lang="en-US" sz="1800" dirty="0">
+                <a:solidFill>
+                  <a:srgbClr val="333333"/>
+                </a:solidFill>
+                <a:latin typeface="Microsoft JhengHei" pitchFamily="34" charset="0"/>
+                <a:ea typeface="Microsoft JhengHei" pitchFamily="34" charset="-122"/>
+                <a:cs typeface="Microsoft JhengHei" pitchFamily="34" charset="-120"/>
+              </a:rPr>
+              <a:t>靶向 XOR 增強 CD8+ T 細胞反應。</a:t>
+            </a:r>
+            <a:endParaRPr lang="en-US" sz="1800" dirty="0"/>
+          </a:p>
+          <a:p>
+            <a:pPr marL="342900" indent="-342900">
+              <a:spcAft>
+                <a:spcPts val="800"/>
+              </a:spcAft>
+              <a:buSzPct val="100000"/>
+              <a:buChar char="•"/>
+            </a:pPr>
+            <a:r>
+              <a:rPr lang="en-US" sz="1800" dirty="0">
+                <a:solidFill>
+                  <a:srgbClr val="333333"/>
+                </a:solidFill>
+                <a:latin typeface="Microsoft JhengHei" pitchFamily="34" charset="0"/>
+                <a:ea typeface="Microsoft JhengHei" pitchFamily="34" charset="-122"/>
+                <a:cs typeface="Microsoft JhengHei" pitchFamily="34" charset="-120"/>
+              </a:rPr>
+              <a:t>與抗 PD-L1 治療聯合抑制腫瘤。</a:t>
             </a:r>
             <a:endParaRPr lang="en-US" sz="1800" dirty="0"/>
           </a:p>
@@ -3415,7 +3415,7 @@
                   <a:srgbClr val="888888"/>
                 </a:solidFill>
               </a:rPr>
-              <a:t>Hidaka Hisashi. Hepatology research : the official journal of the Japan Society of Hepatology. 2026-06-11 DOI: 10.1111/hepr.70218</a:t>
+              <a:t>Liang Guojun, Zeng Lin, Huang Xiaohui et al.. Journal of translational medicine. 2026-06-19 DOI: 10.1186/s12967-026-08433-2</a:t>
             </a:r>
             <a:endParaRPr lang="en-US" sz="800" dirty="0"/>
           </a:p>
@@ -3632,7 +3632,7 @@
                   <a:srgbClr val="FFFFFF"/>
                 </a:solidFill>
               </a:rPr>
-              <a:t>1. **代謝適應與免疫逃逸**  </a:t>
+              <a:t>1. **初級抗藥性與免疫抑制表型的關聯**  </a:t>
             </a:r>
             <a:endParaRPr lang="en-US" sz="1200" dirty="0"/>
           </a:p>
@@ -3649,7 +3649,7 @@
                   <a:srgbClr val="FFFFFF"/>
                 </a:solidFill>
               </a:rPr>
-              <a:t>   Tumor cells exhibit metabolic adaptations to evade immune-checkpoint therapy, utilizing macrophage efferocytosis to recycle fatty acids and sustain growth in nutrient-deprived environments.  </a:t>
+              <a:t>   **The association between primary refractoriness and myeloid immunosuppressive phenotype**  </a:t>
             </a:r>
             <a:endParaRPr lang="en-US" sz="1200" dirty="0"/>
           </a:p>
@@ -3666,7 +3666,7 @@
                   <a:srgbClr val="FFFFFF"/>
                 </a:solidFill>
               </a:rPr>
-              <a:t>   腫瘤細胞展現出代謝適應以逃避免疫檢查點治療，利用巨噬細胞的吞噬作用回收脂肪酸，在缺乏營養的環境中維持生長。</a:t>
+              <a:t>   研究顯示，肝細胞癌患者對阿特珠單抗與貝伐單抗的初級抗藥性與骨髓來源的免疫抑制表型有關，這為未來的治療策略提供了新的見解。  </a:t>
             </a:r>
             <a:endParaRPr lang="en-US" sz="1200" dirty="0"/>
           </a:p>
@@ -3677,6 +3677,14 @@
               </a:lnSpc>
               <a:buNone/>
             </a:pPr>
+            <a:r>
+              <a:rPr lang="en-US" sz="1200" dirty="0">
+                <a:solidFill>
+                  <a:srgbClr val="FFFFFF"/>
+                </a:solidFill>
+              </a:rPr>
+              <a:t>   The study reveals that primary refractoriness in HCC patients treated with atezolizumab and bevacizumab is linked to a myeloid immunosuppressive phenotype, providing new insights for future therapeutic strategies.</a:t>
+            </a:r>
             <a:endParaRPr lang="en-US" sz="1200" dirty="0"/>
           </a:p>
           <a:p>
@@ -3686,13 +3694,22 @@
               </a:lnSpc>
               <a:buNone/>
             </a:pPr>
+            <a:endParaRPr lang="en-US" sz="1200" dirty="0"/>
+          </a:p>
+          <a:p>
+            <a:pPr indent="0" marL="0">
+              <a:lnSpc>
+                <a:spcPct val="150000"/>
+              </a:lnSpc>
+              <a:buNone/>
+            </a:pPr>
             <a:r>
               <a:rPr lang="en-US" sz="1200" dirty="0">
                 <a:solidFill>
                   <a:srgbClr val="FFFFFF"/>
                 </a:solidFill>
               </a:rPr>
-              <a:t>2. **MASLD與肝癌的關聯性**  </a:t>
+              <a:t>2. **代謝疾病與肝癌的生物標誌物**  </a:t>
             </a:r>
             <a:endParaRPr lang="en-US" sz="1200" dirty="0"/>
           </a:p>
@@ -3709,7 +3726,7 @@
                   <a:srgbClr val="FFFFFF"/>
                 </a:solidFill>
               </a:rPr>
-              <a:t>   The rising prevalence of metabolic dysfunction-associated steatotic liver disease (MASLD) highlights the need for novel biomarkers and therapeutic strategies, particularly in relation to hepatocellular carcinoma (HCC).  </a:t>
+              <a:t>   **Emerging biomarkers in metabolic dysfunction-associated steatotic liver disease and HCC**  </a:t>
             </a:r>
             <a:endParaRPr lang="en-US" sz="1200" dirty="0"/>
           </a:p>
@@ -3726,7 +3743,7 @@
                   <a:srgbClr val="FFFFFF"/>
                 </a:solidFill>
               </a:rPr>
-              <a:t>   代謝功能障礙相關的脂肪肝病（MASLD）日益普遍，凸顯出對新型生物標誌物和治療策略的需求，特別是在肝細胞癌（HCC）方面。</a:t>
+              <a:t>   隨著對代謝功能障礙相關脂肪肝病（MASLD）的研究進展，新的生物標誌物和治療途徑逐漸浮現，這對於早期診斷和治療肝癌具有重要意義。  </a:t>
             </a:r>
             <a:endParaRPr lang="en-US" sz="1200" dirty="0"/>
           </a:p>
@@ -3737,6 +3754,14 @@
               </a:lnSpc>
               <a:buNone/>
             </a:pPr>
+            <a:r>
+              <a:rPr lang="en-US" sz="1200" dirty="0">
+                <a:solidFill>
+                  <a:srgbClr val="FFFFFF"/>
+                </a:solidFill>
+              </a:rPr>
+              <a:t>   With advancements in research on metabolic dysfunction-associated steatotic liver disease (MASLD), emerging biomarkers and therapeutic avenues are becoming apparent, which are significant for early diagnosis and treatment of HCC.</a:t>
+            </a:r>
             <a:endParaRPr lang="en-US" sz="1200" dirty="0"/>
           </a:p>
           <a:p>
@@ -3746,13 +3771,22 @@
               </a:lnSpc>
               <a:buNone/>
             </a:pPr>
+            <a:endParaRPr lang="en-US" sz="1200" dirty="0"/>
+          </a:p>
+          <a:p>
+            <a:pPr indent="0" marL="0">
+              <a:lnSpc>
+                <a:spcPct val="150000"/>
+              </a:lnSpc>
+              <a:buNone/>
+            </a:pPr>
             <a:r>
               <a:rPr lang="en-US" sz="1200" dirty="0">
                 <a:solidFill>
                   <a:srgbClr val="FFFFFF"/>
                 </a:solidFill>
               </a:rPr>
-              <a:t>3. **不充分消融的風險**  </a:t>
+              <a:t>3. **腫瘤微環境的影響**  </a:t>
             </a:r>
             <a:endParaRPr lang="en-US" sz="1200" dirty="0"/>
           </a:p>
@@ -3769,7 +3803,7 @@
                   <a:srgbClr val="FFFFFF"/>
                 </a:solidFill>
               </a:rPr>
-              <a:t>   Insufficient radiofrequency ablation (iRFA) is linked to HCC progression through the CEBPD/CXCL2 axis, emphasizing the importance of precise ablation techniques in treatment outcomes.  </a:t>
+              <a:t>   **Impact of the tumor microenvironment on therapeutic efficacy**  </a:t>
             </a:r>
             <a:endParaRPr lang="en-US" sz="1200" dirty="0"/>
           </a:p>
@@ -3786,7 +3820,7 @@
                   <a:srgbClr val="FFFFFF"/>
                 </a:solidFill>
               </a:rPr>
-              <a:t>   不充分的射頻消融（iRFA）與肝細胞癌進展有關，通過CEBPD/CXCL2通路，強調了精確消融技術在治療結果中的重要性。</a:t>
+              <a:t>   腫瘤缺氧微環境顯著影響光療和放療的療效，改善腫瘤缺氧成為增強這些治療方法的潛在策略。  </a:t>
             </a:r>
             <a:endParaRPr lang="en-US" sz="1200" dirty="0"/>
           </a:p>
@@ -3797,6 +3831,14 @@
               </a:lnSpc>
               <a:buNone/>
             </a:pPr>
+            <a:r>
+              <a:rPr lang="en-US" sz="1200" dirty="0">
+                <a:solidFill>
+                  <a:srgbClr val="FFFFFF"/>
+                </a:solidFill>
+              </a:rPr>
+              <a:t>   The hypoxic tumor microenvironment significantly impairs the efficacy of photo- and radiotherapy, making the amelioration of tumor hypoxia a promising strategy to enhance these treatment modalities.</a:t>
+            </a:r>
             <a:endParaRPr lang="en-US" sz="1200" dirty="0"/>
           </a:p>
           <a:p>
@@ -3806,13 +3848,22 @@
               </a:lnSpc>
               <a:buNone/>
             </a:pPr>
+            <a:endParaRPr lang="en-US" sz="1200" dirty="0"/>
+          </a:p>
+          <a:p>
+            <a:pPr indent="0" marL="0">
+              <a:lnSpc>
+                <a:spcPct val="150000"/>
+              </a:lnSpc>
+              <a:buNone/>
+            </a:pPr>
             <a:r>
               <a:rPr lang="en-US" sz="1200" dirty="0">
                 <a:solidFill>
                   <a:srgbClr val="FFFFFF"/>
                 </a:solidFill>
               </a:rPr>
-              <a:t>4. **免疫治療的臨床預測因子**  </a:t>
+              <a:t>4. **自體免疫性腦炎的風險**  </a:t>
             </a:r>
             <a:endParaRPr lang="en-US" sz="1200" dirty="0"/>
           </a:p>
@@ -3829,7 +3880,7 @@
                   <a:srgbClr val="FFFFFF"/>
                 </a:solidFill>
               </a:rPr>
-              <a:t>   Identifying clinical predictors for response to atezolizumab-bevacizumab in Child-Pugh B patients can optimize treatment strategies for advanced HCC populations often excluded from trials.  </a:t>
+              <a:t>   **Risk of autoimmune encephalitis with immune checkpoint inhibitors**  </a:t>
             </a:r>
             <a:endParaRPr lang="en-US" sz="1200" dirty="0"/>
           </a:p>
@@ -3846,7 +3897,7 @@
                   <a:srgbClr val="FFFFFF"/>
                 </a:solidFill>
               </a:rPr>
-              <a:t>   確定Child-Pugh B患者對阿特珠單抗-貝伐單抗反應的臨床預測因子，可以優化通常被排除在臨床試驗之外的晚期HCC人群的治療策略。</a:t>
+              <a:t>   阿特珠單抗和貝伐單抗的聯合療法可能導致嚴重的免疫相關不良事件，如自體免疫性腦炎，需在臨床使用中加以注意。  </a:t>
             </a:r>
             <a:endParaRPr lang="en-US" sz="1200" dirty="0"/>
           </a:p>
@@ -3857,6 +3908,14 @@
               </a:lnSpc>
               <a:buNone/>
             </a:pPr>
+            <a:r>
+              <a:rPr lang="en-US" sz="1200" dirty="0">
+                <a:solidFill>
+                  <a:srgbClr val="FFFFFF"/>
+                </a:solidFill>
+              </a:rPr>
+              <a:t>   The combination therapy of atezolizumab and bevacizumab may lead to severe immune-related adverse events, such as autoimmune encephalitis, which requires careful attention in clinical use.</a:t>
+            </a:r>
             <a:endParaRPr lang="en-US" sz="1200" dirty="0"/>
           </a:p>
           <a:p>
@@ -3866,13 +3925,22 @@
               </a:lnSpc>
               <a:buNone/>
             </a:pPr>
+            <a:endParaRPr lang="en-US" sz="1200" dirty="0"/>
+          </a:p>
+          <a:p>
+            <a:pPr indent="0" marL="0">
+              <a:lnSpc>
+                <a:spcPct val="150000"/>
+              </a:lnSpc>
+              <a:buNone/>
+            </a:pPr>
             <a:r>
               <a:rPr lang="en-US" sz="1200" dirty="0">
                 <a:solidFill>
                   <a:srgbClr val="FFFFFF"/>
                 </a:solidFill>
               </a:rPr>
-              <a:t>5. **多重療法的潛力**  </a:t>
+              <a:t>5. **預後營養指數的潛在價值**  </a:t>
             </a:r>
             <a:endParaRPr lang="en-US" sz="1200" dirty="0"/>
           </a:p>
@@ -3889,7 +3957,7 @@
                   <a:srgbClr val="FFFFFF"/>
                 </a:solidFill>
               </a:rPr>
-              <a:t>   The combination of sintilimab, lenvatinib, and transarterial chemoembolization (TACE) shows promise as a conversion therapy for unresectable HCC, redefining resectability criteria.  </a:t>
+              <a:t>   **Potential value of prognostic nutritional index in immunotherapy**  </a:t>
             </a:r>
             <a:endParaRPr lang="en-US" sz="1200" dirty="0"/>
           </a:p>
@@ -3906,7 +3974,7 @@
                   <a:srgbClr val="FFFFFF"/>
                 </a:solidFill>
               </a:rPr>
-              <a:t>   結合sintilimab、lenvatinib和經導管化療栓塞（TACE）顯示出作為不可切除HCC的轉化療法的潛力，重新定義可切除性標準。</a:t>
+              <a:t>   預後營養指數可能與接受免疫檢查點抑制劑的肝細胞癌患者的生存率相關，提示營養狀態在治療中的重要性。</a:t>
             </a:r>
             <a:endParaRPr lang="en-US" sz="1200" dirty="0"/>
           </a:p>
@@ -4052,6 +4120,32 @@
                   <a:srgbClr val="FFFFFF"/>
                 </a:solidFill>
               </a:rPr>
+              <a:t>The prognostic nutritional index may be associated with survival in HCC patients treated with immune checkpoint inhibitors, highlighting the importance of nutritional status in treatment.</a:t>
+            </a:r>
+            <a:endParaRPr lang="en-US" sz="1200" dirty="0"/>
+          </a:p>
+          <a:p>
+            <a:pPr indent="0" marL="0">
+              <a:lnSpc>
+                <a:spcPct val="150000"/>
+              </a:lnSpc>
+              <a:buNone/>
+            </a:pPr>
+            <a:endParaRPr lang="en-US" sz="1200" dirty="0"/>
+          </a:p>
+          <a:p>
+            <a:pPr indent="0" marL="0">
+              <a:lnSpc>
+                <a:spcPct val="150000"/>
+              </a:lnSpc>
+              <a:buNone/>
+            </a:pPr>
+            <a:r>
+              <a:rPr lang="en-US" sz="1200" dirty="0">
+                <a:solidFill>
+                  <a:srgbClr val="FFFFFF"/>
+                </a:solidFill>
+              </a:rPr>
               <a:t>### 未來研究方向 (Future Research Directions)</a:t>
             </a:r>
             <a:endParaRPr lang="en-US" sz="1200" dirty="0"/>
@@ -4078,7 +4172,7 @@
                   <a:srgbClr val="FFFFFF"/>
                 </a:solidFill>
               </a:rPr>
-              <a:t>1. **代謝重編程的機制研究**  </a:t>
+              <a:t>1. **針對免疫抑制表型的治療策略**  </a:t>
             </a:r>
             <a:endParaRPr lang="en-US" sz="1200" dirty="0"/>
           </a:p>
@@ -4095,7 +4189,7 @@
                   <a:srgbClr val="FFFFFF"/>
                 </a:solidFill>
               </a:rPr>
-              <a:t>   Further investigation into the metabolic pathways exploited by tumor cells during immune evasion could reveal novel therapeutic targets for enhancing the efficacy of immune-checkpoint inhibitors.  </a:t>
+              <a:t>   **Therapeutic strategies targeting immunosuppressive phenotypes**  </a:t>
             </a:r>
             <a:endParaRPr lang="en-US" sz="1200" dirty="0"/>
           </a:p>
@@ -4112,7 +4206,7 @@
                   <a:srgbClr val="FFFFFF"/>
                 </a:solidFill>
               </a:rPr>
-              <a:t>   進一步研究腫瘤細胞在免疫逃逸過程中利用的代謝途徑，可能揭示增強免疫檢查點抑制劑療效的新型治療靶點。</a:t>
+              <a:t>   需要進一步研究針對骨髓來源免疫抑制表型的治療策略，以克服肝細胞癌的初級抗藥性。  </a:t>
             </a:r>
             <a:endParaRPr lang="en-US" sz="1200" dirty="0"/>
           </a:p>
@@ -4123,6 +4217,14 @@
               </a:lnSpc>
               <a:buNone/>
             </a:pPr>
+            <a:r>
+              <a:rPr lang="en-US" sz="1200" dirty="0">
+                <a:solidFill>
+                  <a:srgbClr val="FFFFFF"/>
+                </a:solidFill>
+              </a:rPr>
+              <a:t>   Further studies are needed to develop therapeutic strategies targeting myeloid immunosuppressive phenotypes to overcome primary refractoriness in HCC.</a:t>
+            </a:r>
             <a:endParaRPr lang="en-US" sz="1200" dirty="0"/>
           </a:p>
           <a:p>
@@ -4132,13 +4234,22 @@
               </a:lnSpc>
               <a:buNone/>
             </a:pPr>
+            <a:endParaRPr lang="en-US" sz="1200" dirty="0"/>
+          </a:p>
+          <a:p>
+            <a:pPr indent="0" marL="0">
+              <a:lnSpc>
+                <a:spcPct val="150000"/>
+              </a:lnSpc>
+              <a:buNone/>
+            </a:pPr>
             <a:r>
               <a:rPr lang="en-US" sz="1200" dirty="0">
                 <a:solidFill>
                   <a:srgbClr val="FFFFFF"/>
                 </a:solidFill>
               </a:rPr>
-              <a:t>2. **MASLD與HCC的早期診斷**  </a:t>
+              <a:t>2. **MASLD與HCC的關聯機制**  </a:t>
             </a:r>
             <a:endParaRPr lang="en-US" sz="1200" dirty="0"/>
           </a:p>
@@ -4155,7 +4266,7 @@
                   <a:srgbClr val="FFFFFF"/>
                 </a:solidFill>
               </a:rPr>
-              <a:t>   Development of non-invasive diagnostic tools for early detection of MASLD and its association with HCC could facilitate timely interventions and improve patient outcomes.  </a:t>
+              <a:t>   **Mechanistic studies on the link between MASLD and HCC**  </a:t>
             </a:r>
             <a:endParaRPr lang="en-US" sz="1200" dirty="0"/>
           </a:p>
@@ -4172,7 +4283,7 @@
                   <a:srgbClr val="FFFFFF"/>
                 </a:solidFill>
               </a:rPr>
-              <a:t>   開發早期檢測MASLD及其與HCC關聯的非侵入性診斷工具，可能促進及時干預並改善患者預後。</a:t>
+              <a:t>   探索代謝功能障礙相關脂肪肝病（MASLD）與肝細胞癌之間的關聯機制，以促進早期診斷和干預。  </a:t>
             </a:r>
             <a:endParaRPr lang="en-US" sz="1200" dirty="0"/>
           </a:p>
@@ -4183,6 +4294,14 @@
               </a:lnSpc>
               <a:buNone/>
             </a:pPr>
+            <a:r>
+              <a:rPr lang="en-US" sz="1200" dirty="0">
+                <a:solidFill>
+                  <a:srgbClr val="FFFFFF"/>
+                </a:solidFill>
+              </a:rPr>
+              <a:t>   Investigating the mechanistic links between metabolic dysfunction-associated steatotic liver disease (MASLD) and HCC to facilitate early diagnosis and intervention.</a:t>
+            </a:r>
             <a:endParaRPr lang="en-US" sz="1200" dirty="0"/>
           </a:p>
           <a:p>
@@ -4192,13 +4311,22 @@
               </a:lnSpc>
               <a:buNone/>
             </a:pPr>
+            <a:endParaRPr lang="en-US" sz="1200" dirty="0"/>
+          </a:p>
+          <a:p>
+            <a:pPr indent="0" marL="0">
+              <a:lnSpc>
+                <a:spcPct val="150000"/>
+              </a:lnSpc>
+              <a:buNone/>
+            </a:pPr>
             <a:r>
               <a:rPr lang="en-US" sz="1200" dirty="0">
                 <a:solidFill>
                   <a:srgbClr val="FFFFFF"/>
                 </a:solidFill>
               </a:rPr>
-              <a:t>3. **消融技術的優化**  </a:t>
+              <a:t>3. **改善腫瘤微環境的策略**  </a:t>
             </a:r>
             <a:endParaRPr lang="en-US" sz="1200" dirty="0"/>
           </a:p>
@@ -4215,7 +4343,7 @@
                   <a:srgbClr val="FFFFFF"/>
                 </a:solidFill>
               </a:rPr>
-              <a:t>   Research focused on optimizing radiofrequency ablation techniques to minimize the risk of insufficient ablation and its subsequent impact on tumor progression is critical.  </a:t>
+              <a:t>   **Strategies to improve the tumor microenvironment**  </a:t>
             </a:r>
             <a:endParaRPr lang="en-US" sz="1200" dirty="0"/>
           </a:p>
@@ -4232,7 +4360,7 @@
                   <a:srgbClr val="FFFFFF"/>
                 </a:solidFill>
               </a:rPr>
-              <a:t>   專注於優化射頻消融技術的研究，以最小化不充分消融的風險及其對腫瘤進展的後續影響是至關重要的。</a:t>
+              <a:t>   開發改善腫瘤微環境的策略，以增強光療和放療在肝細胞癌中的療效。  </a:t>
             </a:r>
             <a:endParaRPr lang="en-US" sz="1200" dirty="0"/>
           </a:p>
@@ -4243,6 +4371,14 @@
               </a:lnSpc>
               <a:buNone/>
             </a:pPr>
+            <a:r>
+              <a:rPr lang="en-US" sz="1200" dirty="0">
+                <a:solidFill>
+                  <a:srgbClr val="FFFFFF"/>
+                </a:solidFill>
+              </a:rPr>
+              <a:t>   Developing strategies to improve the tumor microenvironment to enhance the efficacy of photo- and radiotherapy in HCC.</a:t>
+            </a:r>
             <a:endParaRPr lang="en-US" sz="1200" dirty="0"/>
           </a:p>
           <a:p>
@@ -4252,13 +4388,22 @@
               </a:lnSpc>
               <a:buNone/>
             </a:pPr>
+            <a:endParaRPr lang="en-US" sz="1200" dirty="0"/>
+          </a:p>
+          <a:p>
+            <a:pPr indent="0" marL="0">
+              <a:lnSpc>
+                <a:spcPct val="150000"/>
+              </a:lnSpc>
+              <a:buNone/>
+            </a:pPr>
             <a:r>
               <a:rPr lang="en-US" sz="1200" dirty="0">
                 <a:solidFill>
                   <a:srgbClr val="FFFFFF"/>
                 </a:solidFill>
               </a:rPr>
-              <a:t>4. **個體化免疫治療策略**  </a:t>
+              <a:t>4. **免疫相關不良事件的監測與管理**  </a:t>
             </a:r>
             <a:endParaRPr lang="en-US" sz="1200" dirty="0"/>
           </a:p>
@@ -4275,7 +4420,7 @@
                   <a:srgbClr val="FFFFFF"/>
                 </a:solidFill>
               </a:rPr>
-              <a:t>   Investigating the genetic and molecular profiles of HCC patients to tailor immunotherapy approaches, especially for those with Child-Pugh B cirrhosis, could enhance treatment efficacy.  </a:t>
+              <a:t>   **Monitoring and management of immune-related adverse events**  </a:t>
             </a:r>
             <a:endParaRPr lang="en-US" sz="1200" dirty="0"/>
           </a:p>
@@ -4292,7 +4437,7 @@
                   <a:srgbClr val="FFFFFF"/>
                 </a:solidFill>
               </a:rPr>
-              <a:t>   研究HCC患者的遺傳和分子特徵，以量身定制免疫治療方案，特別是對於Child-Pugh B肝硬化患者，可能提高治療效果。</a:t>
+              <a:t>   研究如何有效監測和管理接受免疫檢查點抑制劑的患者中出現的免疫相關不良事件。  </a:t>
             </a:r>
             <a:endParaRPr lang="en-US" sz="1200" dirty="0"/>
           </a:p>
@@ -4303,6 +4448,14 @@
               </a:lnSpc>
               <a:buNone/>
             </a:pPr>
+            <a:r>
+              <a:rPr lang="en-US" sz="1200" dirty="0">
+                <a:solidFill>
+                  <a:srgbClr val="FFFFFF"/>
+                </a:solidFill>
+              </a:rPr>
+              <a:t>   Researching effective monitoring and management of immune-related adverse events in patients receiving immune checkpoint inhibitors.</a:t>
+            </a:r>
             <a:endParaRPr lang="en-US" sz="1200" dirty="0"/>
           </a:p>
           <a:p>
@@ -4312,13 +4465,22 @@
               </a:lnSpc>
               <a:buNone/>
             </a:pPr>
+            <a:endParaRPr lang="en-US" sz="1200" dirty="0"/>
+          </a:p>
+          <a:p>
+            <a:pPr indent="0" marL="0">
+              <a:lnSpc>
+                <a:spcPct val="150000"/>
+              </a:lnSpc>
+              <a:buNone/>
+            </a:pPr>
             <a:r>
               <a:rPr lang="en-US" sz="1200" dirty="0">
                 <a:solidFill>
                   <a:srgbClr val="FFFFFF"/>
                 </a:solidFill>
               </a:rPr>
-              <a:t>5. **多重療法的長期效果評估**  </a:t>
+              <a:t>5. **營養狀態與治療反應的關聯性**  </a:t>
             </a:r>
             <a:endParaRPr lang="en-US" sz="1200" dirty="0"/>
           </a:p>
@@ -4335,7 +4497,7 @@
                   <a:srgbClr val="FFFFFF"/>
                 </a:solidFill>
               </a:rPr>
-              <a:t>   Longitudinal studies assessing the long-term outcomes of combination therapies, such as sintilimab and TACE, in unresectable HCC will be essential for establishing best practices.  </a:t>
+              <a:t>   **Correlation between nutritional status and treatment response**  </a:t>
             </a:r>
             <a:endParaRPr lang="en-US" sz="1200" dirty="0"/>
           </a:p>
@@ -4352,7 +4514,24 @@
                   <a:srgbClr val="FFFFFF"/>
                 </a:solidFill>
               </a:rPr>
-              <a:t>   評估不可切除HCC中如sintilimab和TACE等組合療法的長期效果的縱向研究，對於建立最佳實踐至關重要。</a:t>
+              <a:t>   進一步研究預後營養指數與肝細胞癌患者對免疫治療反應之間的關聯性，以優化治療方案。  </a:t>
+            </a:r>
+            <a:endParaRPr lang="en-US" sz="1200" dirty="0"/>
+          </a:p>
+          <a:p>
+            <a:pPr indent="0" marL="0">
+              <a:lnSpc>
+                <a:spcPct val="150000"/>
+              </a:lnSpc>
+              <a:buNone/>
+            </a:pPr>
+            <a:r>
+              <a:rPr lang="en-US" sz="1200" dirty="0">
+                <a:solidFill>
+                  <a:srgbClr val="FFFFFF"/>
+                </a:solidFill>
+              </a:rPr>
+              <a:t>   Further investigating the correlation between prognostic nutritional index and treatment response in HCC patients to optimize therapeutic regimens.</a:t>
             </a:r>
             <a:endParaRPr lang="en-US" sz="1200" dirty="0"/>
           </a:p>
@@ -4625,7 +4804,7 @@
                 <a:ea typeface="Arial" pitchFamily="34" charset="-122"/>
                 <a:cs typeface="Arial" pitchFamily="34" charset="-120"/>
               </a:rPr>
-              <a:t>Tumor cells metabolically resist immune-checkpoint therapy by macrophage efferoc…</a:t>
+              <a:t>A myeloid immunosuppressive phenotype defines primary refractoriness to atezoliz…</a:t>
             </a:r>
             <a:endParaRPr lang="en-US" sz="1400" dirty="0"/>
           </a:p>
@@ -4699,7 +4878,7 @@
                 <a:ea typeface="Arial" pitchFamily="34" charset="-122"/>
                 <a:cs typeface="Arial" pitchFamily="34" charset="-120"/>
               </a:rPr>
-              <a:t>High resolution spatial transcriptomics identifies insufficient radiofrequency a…</a:t>
+              <a:t>Biomimetic catalase-engineered black phosphorus nanosheets enhance photo-/radio-…</a:t>
             </a:r>
             <a:endParaRPr lang="en-US" sz="1400" dirty="0"/>
           </a:p>
@@ -4736,7 +4915,7 @@
                 <a:ea typeface="Arial" pitchFamily="34" charset="-122"/>
                 <a:cs typeface="Arial" pitchFamily="34" charset="-120"/>
               </a:rPr>
-              <a:t>Clinical predictors of response to Atezolizumab-bevacizumab in Child-Pugh B pati…</a:t>
+              <a:t>… plus transarterial chemoembolization and PD-1 inhibitors as conversion therapi…</a:t>
             </a:r>
             <a:endParaRPr lang="en-US" sz="1400" dirty="0"/>
           </a:p>
@@ -4773,7 +4952,7 @@
                 <a:ea typeface="Arial" pitchFamily="34" charset="-122"/>
                 <a:cs typeface="Arial" pitchFamily="34" charset="-120"/>
               </a:rPr>
-              <a:t>Resectability redefined: Lessons from quadruple therapy in HCC.</a:t>
+              <a:t>Autoimmune encephalitis induced by atezolizumab and bevacizumab therapy for adva…</a:t>
             </a:r>
             <a:endParaRPr lang="en-US" sz="1400" dirty="0"/>
           </a:p>
@@ -4810,7 +4989,7 @@
                 <a:ea typeface="Arial" pitchFamily="34" charset="-122"/>
                 <a:cs typeface="Arial" pitchFamily="34" charset="-120"/>
               </a:rPr>
-              <a:t>Sintilimab and lenvatinib plus hepatic arterial infusion chemotherapy and emboli…</a:t>
+              <a:t>Bioinformatics mining and clinical validation of CD274 as a prognostic indicator…</a:t>
             </a:r>
             <a:endParaRPr lang="en-US" sz="1400" dirty="0"/>
           </a:p>
@@ -4847,7 +5026,7 @@
                 <a:ea typeface="Arial" pitchFamily="34" charset="-122"/>
                 <a:cs typeface="Arial" pitchFamily="34" charset="-120"/>
               </a:rPr>
-              <a:t>… plus transarterial chemoembolization and PD-1 inhibitors as conversion therapi…</a:t>
+              <a:t>WNK4 Enhances Anti-PD-1 Resistance and Promotes Tumor Progression in Hepatocellu…</a:t>
             </a:r>
             <a:endParaRPr lang="en-US" sz="1400" dirty="0"/>
           </a:p>
@@ -4884,7 +5063,7 @@
                 <a:ea typeface="Arial" pitchFamily="34" charset="-122"/>
                 <a:cs typeface="Arial" pitchFamily="34" charset="-120"/>
               </a:rPr>
-              <a:t>Natural killer cell-mediated immunosurveillance modulates liver cancer evolution…</a:t>
+              <a:t>Prognostic nutritional index and the survival of patients with hepatocellular ca…</a:t>
             </a:r>
             <a:endParaRPr lang="en-US" sz="1400" dirty="0"/>
           </a:p>
@@ -4921,7 +5100,7 @@
                 <a:ea typeface="Arial" pitchFamily="34" charset="-122"/>
                 <a:cs typeface="Arial" pitchFamily="34" charset="-120"/>
               </a:rPr>
-              <a:t>WNK4 Enhances Anti-PD-1 Resistance and Promotes Tumor Progression in Hepatocellu…</a:t>
+              <a:t>Radiotherapy versus local ablation therapy for the treatment of hepatocellular c…</a:t>
             </a:r>
             <a:endParaRPr lang="en-US" sz="1400" dirty="0"/>
           </a:p>
@@ -4958,7 +5137,7 @@
                 <a:ea typeface="Arial" pitchFamily="34" charset="-122"/>
                 <a:cs typeface="Arial" pitchFamily="34" charset="-120"/>
               </a:rPr>
-              <a:t>Rethinking Progression in Hepatocellular Carcinoma: Is Oligoprogression a Window…</a:t>
+              <a:t>Resveratrol derivative restores macrophage cholesterol homeostasis via stabilizi…</a:t>
             </a:r>
             <a:endParaRPr lang="en-US" sz="1400" dirty="0"/>
           </a:p>
@@ -5113,7 +5292,7 @@
                   </a:extLst>
                 </a:hlinkClick>
               </a:rPr>
-              <a:t>Tumor cells metabolically resist immune-checkpoint therapy by macrophage efferocytosis-mediated fatty acid recycling.</a:t>
+              <a:t>A myeloid immunosuppressive phenotype defines primary refractoriness to atezolizumab Plus bevacizumab in hepatocellular caarcinoma.</a:t>
             </a:r>
             <a:endParaRPr lang="en-US" sz="2400" dirty="0"/>
           </a:p>
@@ -5149,7 +5328,7 @@
                   <a:srgbClr val="888888"/>
                 </a:solidFill>
               </a:rPr>
-              <a:t>Cancer cell  ·  IF 48.8</a:t>
+              <a:t>Journal of hepatology  ·  IF 25.7  ·  🌏 Asia</a:t>
             </a:r>
             <a:endParaRPr lang="en-US" sz="1000" dirty="0"/>
           </a:p>
@@ -5192,7 +5371,7 @@
                 <a:ea typeface="Microsoft JhengHei" pitchFamily="34" charset="-122"/>
                 <a:cs typeface="Microsoft JhengHei" pitchFamily="34" charset="-120"/>
               </a:rPr>
-              <a:t>腫瘤細胞適應營養缺乏。</a:t>
+              <a:t>約40%的HCC患者為初始耐藥。</a:t>
             </a:r>
             <a:endParaRPr lang="en-US" sz="1800" dirty="0"/>
           </a:p>
@@ -5213,7 +5392,7 @@
                 <a:ea typeface="Microsoft JhengHei" pitchFamily="34" charset="-122"/>
                 <a:cs typeface="Microsoft JhengHei" pitchFamily="34" charset="-120"/>
               </a:rPr>
-              <a:t>巨噬細胞吞噬回收脂肪酸。</a:t>
+              <a:t>PRef病例顯示獨特免疫抑制TME。</a:t>
             </a:r>
             <a:endParaRPr lang="en-US" sz="1800" dirty="0"/>
           </a:p>
@@ -5234,7 +5413,7 @@
                 <a:ea typeface="Microsoft JhengHei" pitchFamily="34" charset="-122"/>
                 <a:cs typeface="Microsoft JhengHei" pitchFamily="34" charset="-120"/>
               </a:rPr>
-              <a:t>TREM2+ LAMs 增強免疫抵抗。</a:t>
+              <a:t>髓系細胞浸潤與治療失敗相關。</a:t>
             </a:r>
             <a:endParaRPr lang="en-US" sz="1800" dirty="0"/>
           </a:p>
@@ -5255,7 +5434,7 @@
                 <a:ea typeface="Microsoft JhengHei" pitchFamily="34" charset="-122"/>
                 <a:cs typeface="Microsoft JhengHei" pitchFamily="34" charset="-120"/>
               </a:rPr>
-              <a:t>FAU 與 ICB 不響應相關。</a:t>
+              <a:t>IFN-γ標誌下調為關鍵因素。</a:t>
             </a:r>
             <a:endParaRPr lang="en-US" sz="1800" dirty="0"/>
           </a:p>
@@ -5276,7 +5455,7 @@
                 <a:ea typeface="Microsoft JhengHei" pitchFamily="34" charset="-122"/>
                 <a:cs typeface="Microsoft JhengHei" pitchFamily="34" charset="-120"/>
               </a:rPr>
-              <a:t>針對 TREM2+ LAMs 可改善療法。</a:t>
+              <a:t>針對髓系細胞可提升治療反應。</a:t>
             </a:r>
             <a:endParaRPr lang="en-US" sz="1800" dirty="0"/>
           </a:p>
@@ -5312,7 +5491,7 @@
                   <a:srgbClr val="888888"/>
                 </a:solidFill>
               </a:rPr>
-              <a:t>Liang Zhixian, Long Xiaohang, Xiong Zhewen et al.. Cancer cell. 2026-06-12 DOI: 10.1016/j.ccell.2026.05.005</a:t>
+              <a:t>Lombardi Pasquale, Ramon-Gil Erik, Raja Rabial Q et al.. Journal of hepatology. 2026-06-15 DOI: 10.1016/j.jhep.2026.05.018</a:t>
             </a:r>
             <a:endParaRPr lang="en-US" sz="800" dirty="0"/>
           </a:p>
@@ -5591,7 +5770,7 @@
                 <a:ea typeface="Microsoft JhengHei" pitchFamily="34" charset="-122"/>
                 <a:cs typeface="Microsoft JhengHei" pitchFamily="34" charset="-120"/>
               </a:rPr>
-              <a:t>MASLD 是主要的慢性肝病。</a:t>
+              <a:t>MASLD為主要慢性肝病。</a:t>
             </a:r>
             <a:endParaRPr lang="en-US" sz="1800" dirty="0"/>
           </a:p>
@@ -5612,7 +5791,7 @@
                 <a:ea typeface="Microsoft JhengHei" pitchFamily="34" charset="-122"/>
                 <a:cs typeface="Microsoft JhengHei" pitchFamily="34" charset="-120"/>
               </a:rPr>
-              <a:t>新興生物標記用於診斷預後。</a:t>
+              <a:t>新興生物標記診斷預後。</a:t>
             </a:r>
             <a:endParaRPr lang="en-US" sz="1800" dirty="0"/>
           </a:p>
@@ -5633,7 +5812,7 @@
                 <a:ea typeface="Microsoft JhengHei" pitchFamily="34" charset="-122"/>
                 <a:cs typeface="Microsoft JhengHei" pitchFamily="34" charset="-120"/>
               </a:rPr>
-              <a:t>近期 FDA 批准新療法。</a:t>
+              <a:t>FDA批准resmetirom和semaglutide。</a:t>
             </a:r>
             <a:endParaRPr lang="en-US" sz="1800" dirty="0"/>
           </a:p>
@@ -5654,7 +5833,7 @@
                 <a:ea typeface="Microsoft JhengHei" pitchFamily="34" charset="-122"/>
                 <a:cs typeface="Microsoft JhengHei" pitchFamily="34" charset="-120"/>
               </a:rPr>
-              <a:t>創新介入改善 MASLD 管理。</a:t>
+              <a:t>MASLD管理的創新介入。</a:t>
             </a:r>
             <a:endParaRPr lang="en-US" sz="1800" dirty="0"/>
           </a:p>
@@ -5675,7 +5854,7 @@
                 <a:ea typeface="Microsoft JhengHei" pitchFamily="34" charset="-122"/>
                 <a:cs typeface="Microsoft JhengHei" pitchFamily="34" charset="-120"/>
               </a:rPr>
-              <a:t>需早期檢測與多元治療。</a:t>
+              <a:t>需要早期檢測與個性化醫療。</a:t>
             </a:r>
             <a:endParaRPr lang="en-US" sz="1800" dirty="0"/>
           </a:p>
@@ -5911,7 +6090,7 @@
                   </a:extLst>
                 </a:hlinkClick>
               </a:rPr>
-              <a:t>High resolution spatial transcriptomics identifies insufficient radiofrequency ablation induces hepatocellular carcinoma progression via CEBPD / CXCL2 axis.</a:t>
+              <a:t>Biomimetic catalase-engineered black phosphorus nanosheets enhance photo-/radio-therapy for hepatocellular carcinoma.</a:t>
             </a:r>
             <a:endParaRPr lang="en-US" sz="2400" dirty="0"/>
           </a:p>
@@ -5947,7 +6126,7 @@
                   <a:srgbClr val="888888"/>
                 </a:solidFill>
               </a:rPr>
-              <a:t>Hepatology (Baltimore, Md.)  ·  IF 12.9  ·  Basic Research</a:t>
+              <a:t>Biomedical materials (Bristol, England)  ·  Basic Research  ·  🌏 Asia</a:t>
             </a:r>
             <a:endParaRPr lang="en-US" sz="1000" dirty="0"/>
           </a:p>
@@ -5990,7 +6169,7 @@
                 <a:ea typeface="Microsoft JhengHei" pitchFamily="34" charset="-122"/>
                 <a:cs typeface="Microsoft JhengHei" pitchFamily="34" charset="-120"/>
               </a:rPr>
-              <a:t>iRFA導致HCC進展。</a:t>
+              <a:t>開發生物仿生納米平台，使用黑磷。</a:t>
             </a:r>
             <a:endParaRPr lang="en-US" sz="1800" dirty="0"/>
           </a:p>
@@ -6011,7 +6190,7 @@
                 <a:ea typeface="Microsoft JhengHei" pitchFamily="34" charset="-122"/>
                 <a:cs typeface="Microsoft JhengHei" pitchFamily="34" charset="-120"/>
               </a:rPr>
-              <a:t>CEBPD激活CXCL2表達。</a:t>
+              <a:t>以催化酶功能化，增強氧氣供應。</a:t>
             </a:r>
             <a:endParaRPr lang="en-US" sz="1800" dirty="0"/>
           </a:p>
@@ -6032,7 +6211,7 @@
                 <a:ea typeface="Microsoft JhengHei" pitchFamily="34" charset="-122"/>
                 <a:cs typeface="Microsoft JhengHei" pitchFamily="34" charset="-120"/>
               </a:rPr>
-              <a:t>CXCL2促進免疫逃逸。</a:t>
+              <a:t>工程化巨噬細胞膜以調節免疫。</a:t>
             </a:r>
             <a:endParaRPr lang="en-US" sz="1800" dirty="0"/>
           </a:p>
@@ -6053,7 +6232,7 @@
                 <a:ea typeface="Microsoft JhengHei" pitchFamily="34" charset="-122"/>
                 <a:cs typeface="Microsoft JhengHei" pitchFamily="34" charset="-120"/>
               </a:rPr>
-              <a:t>使用高解析度空間轉錄組學。</a:t>
+              <a:t>顯著提高腫瘤對光療和放療的敏感性。</a:t>
             </a:r>
             <a:endParaRPr lang="en-US" sz="1800" dirty="0"/>
           </a:p>
@@ -6074,7 +6253,7 @@
                 <a:ea typeface="Microsoft JhengHei" pitchFamily="34" charset="-122"/>
                 <a:cs typeface="Microsoft JhengHei" pitchFamily="34" charset="-120"/>
               </a:rPr>
-              <a:t>CXCR2抑制可能防止復發。</a:t>
+              <a:t>改善HCC治療效果的有前景策略。</a:t>
             </a:r>
             <a:endParaRPr lang="en-US" sz="1800" dirty="0"/>
           </a:p>
@@ -6110,7 +6289,7 @@
                   <a:srgbClr val="888888"/>
                 </a:solidFill>
               </a:rPr>
-              <a:t>Lin Ke, Zhang Nan, Zhang Zongxu et al.. Hepatology (Baltimore, Md.). 2026-06-09 DOI: 10.1097/HEP.0000000000001714</a:t>
+              <a:t>Qiao Chunzhong, Lei Qiucheng, Lu Liangqi et al.. Biomedical materials (Bristol, England). 2026-06-17 DOI: 10.1088/1748-605X/ae70e2</a:t>
             </a:r>
             <a:endParaRPr lang="en-US" sz="800" dirty="0"/>
           </a:p>
@@ -6310,7 +6489,7 @@
                   </a:extLst>
                 </a:hlinkClick>
               </a:rPr>
-              <a:t>Clinical predictors of response to Atezolizumab-bevacizumab in Child-Pugh B patients with hepatocellular carcinoma.</a:t>
+              <a:t>… plus transarterial chemoembolization and PD-1 inhibitors as conversion therapies for unresectable intermediate-advanced hepatocellular carcinoma: a phase 2 trial …</a:t>
             </a:r>
             <a:endParaRPr lang="en-US" sz="2400" dirty="0"/>
           </a:p>
@@ -6346,7 +6525,7 @@
                   <a:srgbClr val="888888"/>
                 </a:solidFill>
               </a:rPr>
-              <a:t>JHEP reports : innovation in hepatology  ·  IF 7.8  ·  Retrospective Study  ·  🌏 Asia</a:t>
+              <a:t>… and Targeted Therapy  ·  RCT Phase 2</a:t>
             </a:r>
             <a:endParaRPr lang="en-US" sz="1000" dirty="0"/>
           </a:p>
@@ -6389,7 +6568,7 @@
                 <a:ea typeface="Microsoft JhengHei" pitchFamily="34" charset="-122"/>
                 <a:cs typeface="Microsoft JhengHei" pitchFamily="34" charset="-120"/>
               </a:rPr>
-              <a:t>找出A/B反應預測因子</a:t>
+              <a:t>針對不可切除HCC的組合療法</a:t>
             </a:r>
             <a:endParaRPr lang="en-US" sz="1800" dirty="0"/>
           </a:p>
@@ -6410,7 +6589,7 @@
                 <a:ea typeface="Microsoft JhengHei" pitchFamily="34" charset="-122"/>
                 <a:cs typeface="Microsoft JhengHei" pitchFamily="34" charset="-120"/>
               </a:rPr>
-              <a:t>Child-Pugh B患者生存期較短</a:t>
+              <a:t>經動脈化療栓塞加PD-1抑制劑</a:t>
             </a:r>
             <a:endParaRPr lang="en-US" sz="1800" dirty="0"/>
           </a:p>
@@ -6431,7 +6610,7 @@
                 <a:ea typeface="Microsoft JhengHei" pitchFamily="34" charset="-122"/>
                 <a:cs typeface="Microsoft JhengHei" pitchFamily="34" charset="-120"/>
               </a:rPr>
-              <a:t>ALBI 1/2級患者受益於A/B療法</a:t>
+              <a:t>第二期試驗顯示良好結果</a:t>
             </a:r>
             <a:endParaRPr lang="en-US" sz="1800" dirty="0"/>
           </a:p>
@@ -6467,7 +6646,7 @@
                   <a:srgbClr val="888888"/>
                 </a:solidFill>
               </a:rPr>
-              <a:t>Odent Anne Victoire, Campani Claudia, Bouattour Mohamed et al.. JHEP reports : innovation in hepatology. 2026-06-11 DOI: 10.1016/j.jhepr.2026.101915</a:t>
+              <a:t>X Zhang, H Cai, W Peng. … and Targeted Therapy. 2026</a:t>
             </a:r>
             <a:endParaRPr lang="en-US" sz="800" dirty="0"/>
           </a:p>
@@ -6667,7 +6846,7 @@
                   </a:extLst>
                 </a:hlinkClick>
               </a:rPr>
-              <a:t>Resectability redefined: Lessons from quadruple therapy in HCC.</a:t>
+              <a:t>Autoimmune encephalitis induced by atezolizumab and bevacizumab therapy for advanced hepatocellular carcinoma: a case report.</a:t>
             </a:r>
             <a:endParaRPr lang="en-US" sz="2400" dirty="0"/>
           </a:p>
@@ -6703,7 +6882,7 @@
                   <a:srgbClr val="888888"/>
                 </a:solidFill>
               </a:rPr>
-              <a:t>Med (New York, N.Y.)  ·  RCT Phase 2</a:t>
+              <a:t>Journal of medical case reports  ·  Case Report  ·  🌏 Asia</a:t>
             </a:r>
             <a:endParaRPr lang="en-US" sz="1000" dirty="0"/>
           </a:p>
@@ -6746,7 +6925,7 @@
                 <a:ea typeface="Microsoft JhengHei" pitchFamily="34" charset="-122"/>
                 <a:cs typeface="Microsoft JhengHei" pitchFamily="34" charset="-120"/>
               </a:rPr>
-              <a:t>進行二期臨床試驗 (PLATIC)。</a:t>
+              <a:t>Atezolizumab 和 bevacizumab 用於 HCC</a:t>
             </a:r>
             <a:endParaRPr lang="en-US" sz="1800" dirty="0"/>
           </a:p>
@@ -6767,7 +6946,7 @@
                 <a:ea typeface="Microsoft JhengHei" pitchFamily="34" charset="-122"/>
                 <a:cs typeface="Microsoft JhengHei" pitchFamily="34" charset="-120"/>
               </a:rPr>
-              <a:t>評估四重療法對於uHCC。</a:t>
+              <a:t>患者出現自體免疫性腦炎</a:t>
             </a:r>
             <a:endParaRPr lang="en-US" sz="1800" dirty="0"/>
           </a:p>
@@ -6788,7 +6967,7 @@
                 <a:ea typeface="Microsoft JhengHei" pitchFamily="34" charset="-122"/>
                 <a:cs typeface="Microsoft JhengHei" pitchFamily="34" charset="-120"/>
               </a:rPr>
-              <a:t>結合 sintilimab 和 lenvatinib。</a:t>
+              <a:t>症狀包括發燒和意識障礙</a:t>
             </a:r>
             <a:endParaRPr lang="en-US" sz="1800" dirty="0"/>
           </a:p>
@@ -6809,7 +6988,7 @@
                 <a:ea typeface="Microsoft JhengHei" pitchFamily="34" charset="-122"/>
                 <a:cs typeface="Microsoft JhengHei" pitchFamily="34" charset="-120"/>
               </a:rPr>
-              <a:t>納入 TACE-HAIC 作為轉化療法。</a:t>
+              <a:t>腦脊髓液顯示單核細胞增多</a:t>
             </a:r>
             <a:endParaRPr lang="en-US" sz="1800" dirty="0"/>
           </a:p>
@@ -6830,7 +7009,7 @@
                 <a:ea typeface="Microsoft JhengHei" pitchFamily="34" charset="-122"/>
                 <a:cs typeface="Microsoft JhengHei" pitchFamily="34" charset="-120"/>
               </a:rPr>
-              <a:t>結果引發整合問題。</a:t>
+              <a:t>類固醇治療促進快速康復</a:t>
             </a:r>
             <a:endParaRPr lang="en-US" sz="1800" dirty="0"/>
           </a:p>
@@ -6866,7 +7045,7 @@
                   <a:srgbClr val="888888"/>
                 </a:solidFill>
               </a:rPr>
-              <a:t>Jiang Nan, Zhong Bin-Yan. Med (New York, N.Y.). 2026-06-12 DOI: 10.1016/j.medj.2026.101136</a:t>
+              <a:t>Nomura Yoriko, Wada Yoshiyuki, Sasaki Shin et al.. Journal of medical case reports. 2026-06-19 DOI: 10.1186/s13256-026-06037-4</a:t>
             </a:r>
             <a:endParaRPr lang="en-US" sz="800" dirty="0"/>
           </a:p>
@@ -7066,7 +7245,7 @@
                   </a:extLst>
                 </a:hlinkClick>
               </a:rPr>
-              <a:t>Sintilimab and lenvatinib plus hepatic arterial infusion chemotherapy and embolization as conversion therapy for uHCC: A phase 2 trial.</a:t>
+              <a:t>Bioinformatics mining and clinical validation of CD274 as a prognostic indicator in hepatocellular carcinoma.</a:t>
             </a:r>
             <a:endParaRPr lang="en-US" sz="2400" dirty="0"/>
           </a:p>
@@ -7102,7 +7281,7 @@
                   <a:srgbClr val="888888"/>
                 </a:solidFill>
               </a:rPr>
-              <a:t>Med (New York, N.Y.)  ·  RCT Phase 2</a:t>
+              <a:t>BMC cancer  ·  🌏 Asia</a:t>
             </a:r>
             <a:endParaRPr lang="en-US" sz="1000" dirty="0"/>
           </a:p>
@@ -7145,7 +7324,7 @@
                 <a:ea typeface="Microsoft JhengHei" pitchFamily="34" charset="-122"/>
                 <a:cs typeface="Microsoft JhengHei" pitchFamily="34" charset="-120"/>
               </a:rPr>
-              <a:t>Sintilimab與lenvatinib用於uHCC</a:t>
+              <a:t>CD274與HCC預後相關。</a:t>
             </a:r>
             <a:endParaRPr lang="en-US" sz="1800" dirty="0"/>
           </a:p>
@@ -7166,7 +7345,7 @@
                 <a:ea typeface="Microsoft JhengHei" pitchFamily="34" charset="-122"/>
                 <a:cs typeface="Microsoft JhengHei" pitchFamily="34" charset="-120"/>
               </a:rPr>
-              <a:t>轉化為切除率達77.2%</a:t>
+              <a:t>使用生物信息學進行表達分析。</a:t>
             </a:r>
             <a:endParaRPr lang="en-US" sz="1800" dirty="0"/>
           </a:p>
@@ -7187,49 +7366,7 @@
                 <a:ea typeface="Microsoft JhengHei" pitchFamily="34" charset="-122"/>
                 <a:cs typeface="Microsoft JhengHei" pitchFamily="34" charset="-120"/>
               </a:rPr>
-              <a:t>客觀反應率為80.7%</a:t>
-            </a:r>
-            <a:endParaRPr lang="en-US" sz="1800" dirty="0"/>
-          </a:p>
-          <a:p>
-            <a:pPr marL="342900" indent="-342900">
-              <a:spcAft>
-                <a:spcPts val="800"/>
-              </a:spcAft>
-              <a:buSzPct val="100000"/>
-              <a:buChar char="•"/>
-            </a:pPr>
-            <a:r>
-              <a:rPr lang="en-US" sz="1800" dirty="0">
-                <a:solidFill>
-                  <a:srgbClr val="333333"/>
-                </a:solidFill>
-                <a:latin typeface="Microsoft JhengHei" pitchFamily="34" charset="0"/>
-                <a:ea typeface="Microsoft JhengHei" pitchFamily="34" charset="-122"/>
-                <a:cs typeface="Microsoft JhengHei" pitchFamily="34" charset="-120"/>
-              </a:rPr>
-              <a:t>64.9%患者出現三級以上不良反應</a:t>
-            </a:r>
-            <a:endParaRPr lang="en-US" sz="1800" dirty="0"/>
-          </a:p>
-          <a:p>
-            <a:pPr marL="342900" indent="-342900">
-              <a:spcAft>
-                <a:spcPts val="800"/>
-              </a:spcAft>
-              <a:buSzPct val="100000"/>
-              <a:buChar char="•"/>
-            </a:pPr>
-            <a:r>
-              <a:rPr lang="en-US" sz="1800" dirty="0">
-                <a:solidFill>
-                  <a:srgbClr val="333333"/>
-                </a:solidFill>
-                <a:latin typeface="Microsoft JhengHei" pitchFamily="34" charset="0"/>
-                <a:ea typeface="Microsoft JhengHei" pitchFamily="34" charset="-122"/>
-                <a:cs typeface="Microsoft JhengHei" pitchFamily="34" charset="-120"/>
-              </a:rPr>
-              <a:t>PFS與OS較歷史對照組更長</a:t>
+              <a:t>高CD274與更好生存率相關。</a:t>
             </a:r>
             <a:endParaRPr lang="en-US" sz="1800" dirty="0"/>
           </a:p>
@@ -7265,7 +7402,7 @@
                   <a:srgbClr val="888888"/>
                 </a:solidFill>
               </a:rPr>
-              <a:t>Qiu Jiliang, Huang Zhenkun, He Wei et al.. Med (New York, N.Y.). 2026-06-12 DOI: 10.1016/j.medj.2026.101132</a:t>
+              <a:t>Shi Hansen, Zhang Peijun, Wei Qiping et al.. BMC cancer. 2026-06-16 DOI: 10.1186/s12885-026-16329-z</a:t>
             </a:r>
             <a:endParaRPr lang="en-US" sz="800" dirty="0"/>
           </a:p>
@@ -7465,7 +7602,7 @@
                   </a:extLst>
                 </a:hlinkClick>
               </a:rPr>
-              <a:t>… plus transarterial chemoembolization and PD-1 inhibitors as conversion therapies for unresectable intermediate-advanced hepatocellular carcinoma: a phase 2 trial …</a:t>
+              <a:t>WNK4 Enhances Anti-PD-1 Resistance and Promotes Tumor Progression in Hepatocellular Carcinoma by Reprogramming Cysteine Metabolism in Cancer-Associated Fibroblasts.</a:t>
             </a:r>
             <a:endParaRPr lang="en-US" sz="2400" dirty="0"/>
           </a:p>
@@ -7501,7 +7638,7 @@
                   <a:srgbClr val="888888"/>
                 </a:solidFill>
               </a:rPr>
-              <a:t>… and Targeted Therapy  ·  RCT Phase 2</a:t>
+              <a:t>FASEB journal : official publication of the Federation of American Societies for Experimental Biology  ·  🌏 Asia</a:t>
             </a:r>
             <a:endParaRPr lang="en-US" sz="1000" dirty="0"/>
           </a:p>
@@ -7544,7 +7681,7 @@
                 <a:ea typeface="Microsoft JhengHei" pitchFamily="34" charset="-122"/>
                 <a:cs typeface="Microsoft JhengHei" pitchFamily="34" charset="-120"/>
               </a:rPr>
-              <a:t>針對不可切除HCC的組合療法</a:t>
+              <a:t>WNK4上調與HCC進展相關</a:t>
             </a:r>
             <a:endParaRPr lang="en-US" sz="1800" dirty="0"/>
           </a:p>
@@ -7565,7 +7702,7 @@
                 <a:ea typeface="Microsoft JhengHei" pitchFamily="34" charset="-122"/>
                 <a:cs typeface="Microsoft JhengHei" pitchFamily="34" charset="-120"/>
               </a:rPr>
-              <a:t>使用經動脈化療栓塞(TACE)</a:t>
+              <a:t>WNK4增強抗PD-1抵抗力</a:t>
             </a:r>
             <a:endParaRPr lang="en-US" sz="1800" dirty="0"/>
           </a:p>
@@ -7586,7 +7723,7 @@
                 <a:ea typeface="Microsoft JhengHei" pitchFamily="34" charset="-122"/>
                 <a:cs typeface="Microsoft JhengHei" pitchFamily="34" charset="-120"/>
               </a:rPr>
-              <a:t>PD-1抑制劑提升療效</a:t>
+              <a:t>CAFs中的半胱氨酸代謝重編程</a:t>
             </a:r>
             <a:endParaRPr lang="en-US" sz="1800" dirty="0"/>
           </a:p>
@@ -7607,7 +7744,7 @@
                 <a:ea typeface="Microsoft JhengHei" pitchFamily="34" charset="-122"/>
                 <a:cs typeface="Microsoft JhengHei" pitchFamily="34" charset="-120"/>
               </a:rPr>
-              <a:t>第二期試驗顯示良好結果</a:t>
+              <a:t>WNK4促進HCC細胞遷移</a:t>
             </a:r>
             <a:endParaRPr lang="en-US" sz="1800" dirty="0"/>
           </a:p>
@@ -7628,7 +7765,7 @@
                 <a:ea typeface="Microsoft JhengHei" pitchFamily="34" charset="-122"/>
                 <a:cs typeface="Microsoft JhengHei" pitchFamily="34" charset="-120"/>
               </a:rPr>
-              <a:t>有潛力轉為可切除疾病</a:t>
+              <a:t>新發現WNK4-HMGB1-p53軸</a:t>
             </a:r>
             <a:endParaRPr lang="en-US" sz="1800" dirty="0"/>
           </a:p>
@@ -7664,7 +7801,7 @@
                   <a:srgbClr val="888888"/>
                 </a:solidFill>
               </a:rPr>
-              <a:t>X Zhang, H Cai, W Peng. … and Targeted Therapy. 2026</a:t>
+              <a:t>Yu Ge, Cui Yun-Long, Mu Han et al.. FASEB journal : official publication of the Federation of American Societies for Experimental Biology. 2026-06-12 DOI: 10.1096/fj.202502777R</a:t>
             </a:r>
             <a:endParaRPr lang="en-US" sz="800" dirty="0"/>
           </a:p>

--- a/docs/digest-zh.pptx
+++ b/docs/digest-zh.pptx
@@ -2269,7 +2269,7 @@
                   <a:srgbClr val="888888"/>
                 </a:solidFill>
               </a:rPr>
-              <a:t>2026-06-15 — 2026-06-22</a:t>
+              <a:t>2026-06-22 — 2026-06-29</a:t>
             </a:r>
             <a:endParaRPr lang="en-US" sz="1400" dirty="0"/>
           </a:p>
@@ -2460,7 +2460,7 @@
                   </a:extLst>
                 </a:hlinkClick>
               </a:rPr>
-              <a:t>Prognostic nutritional index and the survival of patients with hepatocellular carcinoma on immune checkpoint inhibitors: a meta-analysis</a:t>
+              <a:t>Pretreatment serum vitamin D levels predict the therapeutic efficacy of atezolizumab plus bevacizumab therapy in advanced hepatocellular carcinoma: a multicenter analysis.</a:t>
             </a:r>
             <a:endParaRPr lang="en-US" sz="2400" dirty="0"/>
           </a:p>
@@ -2496,7 +2496,7 @@
                   <a:srgbClr val="888888"/>
                 </a:solidFill>
               </a:rPr>
-              <a:t>BMC cancer  ·  Meta-Analysis</a:t>
+              <a:t>International journal of clinical oncology  ·  🌏 Asia</a:t>
             </a:r>
             <a:endParaRPr lang="en-US" sz="1000" dirty="0"/>
           </a:p>
@@ -2539,7 +2539,7 @@
                 <a:ea typeface="Microsoft JhengHei" pitchFamily="34" charset="-122"/>
                 <a:cs typeface="Microsoft JhengHei" pitchFamily="34" charset="-120"/>
               </a:rPr>
-              <a:t>預後營養指數(PNI)影響生存率。</a:t>
+              <a:t>維他命D具抗癌效果。</a:t>
             </a:r>
             <a:endParaRPr lang="en-US" sz="1800" dirty="0"/>
           </a:p>
@@ -2560,7 +2560,7 @@
                 <a:ea typeface="Microsoft JhengHei" pitchFamily="34" charset="-122"/>
                 <a:cs typeface="Microsoft JhengHei" pitchFamily="34" charset="-120"/>
               </a:rPr>
-              <a:t>HCC患者免疫檢查點抑制劑的綜合分析。</a:t>
+              <a:t>研究包含142名HCC患者。</a:t>
             </a:r>
             <a:endParaRPr lang="en-US" sz="1800" dirty="0"/>
           </a:p>
@@ -2581,7 +2581,49 @@
                 <a:ea typeface="Microsoft JhengHei" pitchFamily="34" charset="-122"/>
                 <a:cs typeface="Microsoft JhengHei" pitchFamily="34" charset="-120"/>
               </a:rPr>
-              <a:t>營養狀態與免疫反應相關。</a:t>
+              <a:t>低維他命D與PD相關。</a:t>
+            </a:r>
+            <a:endParaRPr lang="en-US" sz="1800" dirty="0"/>
+          </a:p>
+          <a:p>
+            <a:pPr marL="342900" indent="-342900">
+              <a:spcAft>
+                <a:spcPts val="800"/>
+              </a:spcAft>
+              <a:buSzPct val="100000"/>
+              <a:buChar char="•"/>
+            </a:pPr>
+            <a:r>
+              <a:rPr lang="en-US" sz="1800" dirty="0">
+                <a:solidFill>
+                  <a:srgbClr val="333333"/>
+                </a:solidFill>
+                <a:latin typeface="Microsoft JhengHei" pitchFamily="34" charset="0"/>
+                <a:ea typeface="Microsoft JhengHei" pitchFamily="34" charset="-122"/>
+                <a:cs typeface="Microsoft JhengHei" pitchFamily="34" charset="-120"/>
+              </a:rPr>
+              <a:t>臨界值：17.8 ng/mL。</a:t>
+            </a:r>
+            <a:endParaRPr lang="en-US" sz="1800" dirty="0"/>
+          </a:p>
+          <a:p>
+            <a:pPr marL="342900" indent="-342900">
+              <a:spcAft>
+                <a:spcPts val="800"/>
+              </a:spcAft>
+              <a:buSzPct val="100000"/>
+              <a:buChar char="•"/>
+            </a:pPr>
+            <a:r>
+              <a:rPr lang="en-US" sz="1800" dirty="0">
+                <a:solidFill>
+                  <a:srgbClr val="333333"/>
+                </a:solidFill>
+                <a:latin typeface="Microsoft JhengHei" pitchFamily="34" charset="0"/>
+                <a:ea typeface="Microsoft JhengHei" pitchFamily="34" charset="-122"/>
+                <a:cs typeface="Microsoft JhengHei" pitchFamily="34" charset="-120"/>
+              </a:rPr>
+              <a:t>高維他命D預測更好OS。</a:t>
             </a:r>
             <a:endParaRPr lang="en-US" sz="1800" dirty="0"/>
           </a:p>
@@ -2617,7 +2659,7 @@
                   <a:srgbClr val="888888"/>
                 </a:solidFill>
               </a:rPr>
-              <a:t>J Fu, W Peng, J Jiang. BMC cancer. 2026</a:t>
+              <a:t>Suzuki Takanori, Matsuura Kentaro, Narahara Satoshi et al.. International journal of clinical oncology. 2026-06-27 DOI: 10.1007/s10147-026-03114-y</a:t>
             </a:r>
             <a:endParaRPr lang="en-US" sz="800" dirty="0"/>
           </a:p>
@@ -2817,7 +2859,7 @@
                   </a:extLst>
                 </a:hlinkClick>
               </a:rPr>
-              <a:t>Radiotherapy versus local ablation therapy for the treatment of hepatocellular carcinoma: A systematic review and meta-analysis.</a:t>
+              <a:t>Prognostic value of the systemic immune-inflammation index in gastrointestinal cancers treated with immune checkpoint inhibitors: a systematic review and meta-analysis.</a:t>
             </a:r>
             <a:endParaRPr lang="en-US" sz="2400" dirty="0"/>
           </a:p>
@@ -2853,7 +2895,7 @@
                   <a:srgbClr val="888888"/>
                 </a:solidFill>
               </a:rPr>
-              <a:t>Journal of Clinical …  ·  Meta-Analysis</a:t>
+              <a:t>BMC gastroenterology  ·  Meta-Analysis</a:t>
             </a:r>
             <a:endParaRPr lang="en-US" sz="1000" dirty="0"/>
           </a:p>
@@ -2896,7 +2938,7 @@
                 <a:ea typeface="Microsoft JhengHei" pitchFamily="34" charset="-122"/>
                 <a:cs typeface="Microsoft JhengHei" pitchFamily="34" charset="-120"/>
               </a:rPr>
-              <a:t>局部消融療法包括 RFA 和 MWA。</a:t>
+              <a:t>評估系統性免疫炎症指數(SII)</a:t>
             </a:r>
             <a:endParaRPr lang="en-US" sz="1800" dirty="0"/>
           </a:p>
@@ -2917,7 +2959,7 @@
                 <a:ea typeface="Microsoft JhengHei" pitchFamily="34" charset="-122"/>
                 <a:cs typeface="Microsoft JhengHei" pitchFamily="34" charset="-120"/>
               </a:rPr>
-              <a:t>EBRT 與局部消融結果不同。</a:t>
+              <a:t>高SII與生存結果不佳相關</a:t>
             </a:r>
             <a:endParaRPr lang="en-US" sz="1800" dirty="0"/>
           </a:p>
@@ -2938,7 +2980,7 @@
                 <a:ea typeface="Microsoft JhengHei" pitchFamily="34" charset="-122"/>
                 <a:cs typeface="Microsoft JhengHei" pitchFamily="34" charset="-120"/>
               </a:rPr>
-              <a:t>Meta分析顯示 RFA 生存益處。</a:t>
+              <a:t>包含28項研究4752名患者</a:t>
             </a:r>
             <a:endParaRPr lang="en-US" sz="1800" dirty="0"/>
           </a:p>
@@ -2959,7 +3001,7 @@
                 <a:ea typeface="Microsoft JhengHei" pitchFamily="34" charset="-122"/>
                 <a:cs typeface="Microsoft JhengHei" pitchFamily="34" charset="-120"/>
               </a:rPr>
-              <a:t>局部無進展生存是關鍵指標。</a:t>
+              <a:t>SII預測HCC的OS和PFS</a:t>
             </a:r>
             <a:endParaRPr lang="en-US" sz="1800" dirty="0"/>
           </a:p>
@@ -2980,7 +3022,7 @@
                 <a:ea typeface="Microsoft JhengHei" pitchFamily="34" charset="-122"/>
                 <a:cs typeface="Microsoft JhengHei" pitchFamily="34" charset="-120"/>
               </a:rPr>
-              <a:t>研究比較兩種治療方式的效果。</a:t>
+              <a:t>SII有助於風險分層</a:t>
             </a:r>
             <a:endParaRPr lang="en-US" sz="1800" dirty="0"/>
           </a:p>
@@ -3016,7 +3058,7 @@
                   <a:srgbClr val="888888"/>
                 </a:solidFill>
               </a:rPr>
-              <a:t>SH Bae, SH Choi, SM Yoon. Journal of Clinical …. 2026</a:t>
+              <a:t>Lu Jiamin, Feng Yuqian, Guo Kaibo et al.. BMC gastroenterology. 2026-06-25 DOI: 10.1186/s12876-026-05014-x</a:t>
             </a:r>
             <a:endParaRPr lang="en-US" sz="800" dirty="0"/>
           </a:p>
@@ -3216,7 +3258,7 @@
                   </a:extLst>
                 </a:hlinkClick>
               </a:rPr>
-              <a:t>Resveratrol derivative restores macrophage cholesterol homeostasis via stabilizing xanthine oxidoreductase in hepatocellular carcinoma.</a:t>
+              <a:t>An umbrella review navigating the nationwide burden of hepatitis B virus infection in Ethiopia: A call for action on vaccination, safe blood, and infection prevention.</a:t>
             </a:r>
             <a:endParaRPr lang="en-US" sz="2400" dirty="0"/>
           </a:p>
@@ -3252,7 +3294,7 @@
                   <a:srgbClr val="888888"/>
                 </a:solidFill>
               </a:rPr>
-              <a:t>Journal of translational medicine  ·  IF 6.1  ·  Basic Research</a:t>
+              <a:t>PloS one  ·  Meta-Analysis</a:t>
             </a:r>
             <a:endParaRPr lang="en-US" sz="1000" dirty="0"/>
           </a:p>
@@ -3295,7 +3337,7 @@
                 <a:ea typeface="Microsoft JhengHei" pitchFamily="34" charset="-122"/>
                 <a:cs typeface="Microsoft JhengHei" pitchFamily="34" charset="-120"/>
               </a:rPr>
-              <a:t>TAMs 影響 HCC 免疫環境。</a:t>
+              <a:t>HBV是肝病主要原因。</a:t>
             </a:r>
             <a:endParaRPr lang="en-US" sz="1800" dirty="0"/>
           </a:p>
@@ -3316,7 +3358,7 @@
                 <a:ea typeface="Microsoft JhengHei" pitchFamily="34" charset="-122"/>
                 <a:cs typeface="Microsoft JhengHei" pitchFamily="34" charset="-120"/>
               </a:rPr>
-              <a:t>XOR 表達降低與預後不良相關。</a:t>
+              <a:t>埃塞俄比亞HBV感染率為5.78%。</a:t>
             </a:r>
             <a:endParaRPr lang="en-US" sz="1800" dirty="0"/>
           </a:p>
@@ -3337,7 +3379,7 @@
                 <a:ea typeface="Microsoft JhengHei" pitchFamily="34" charset="-122"/>
                 <a:cs typeface="Microsoft JhengHei" pitchFamily="34" charset="-120"/>
               </a:rPr>
-              <a:t>Res616 穩定 XOR，恢復膽固醇平衡。</a:t>
+              <a:t>風險因素包括男性及多重伴侶。</a:t>
             </a:r>
             <a:endParaRPr lang="en-US" sz="1800" dirty="0"/>
           </a:p>
@@ -3358,7 +3400,7 @@
                 <a:ea typeface="Microsoft JhengHei" pitchFamily="34" charset="-122"/>
                 <a:cs typeface="Microsoft JhengHei" pitchFamily="34" charset="-120"/>
               </a:rPr>
-              <a:t>靶向 XOR 增強 CD8+ T 細胞反應。</a:t>
+              <a:t>系統評價結果不一致。</a:t>
             </a:r>
             <a:endParaRPr lang="en-US" sz="1800" dirty="0"/>
           </a:p>
@@ -3379,7 +3421,7 @@
                 <a:ea typeface="Microsoft JhengHei" pitchFamily="34" charset="-122"/>
                 <a:cs typeface="Microsoft JhengHei" pitchFamily="34" charset="-120"/>
               </a:rPr>
-              <a:t>與抗 PD-L1 治療聯合抑制腫瘤。</a:t>
+              <a:t>研究有助於公共衛生策略發展。</a:t>
             </a:r>
             <a:endParaRPr lang="en-US" sz="1800" dirty="0"/>
           </a:p>
@@ -3415,7 +3457,7 @@
                   <a:srgbClr val="888888"/>
                 </a:solidFill>
               </a:rPr>
-              <a:t>Liang Guojun, Zeng Lin, Huang Xiaohui et al.. Journal of translational medicine. 2026-06-19 DOI: 10.1186/s12967-026-08433-2</a:t>
+              <a:t>Demeke Abel Desalegn, Tsegaye Aboma, Bayable Alem et al.. PloS one. 2026-06-22 DOI: 10.1371/journal.pone.0352169</a:t>
             </a:r>
             <a:endParaRPr lang="en-US" sz="800" dirty="0"/>
           </a:p>
@@ -3606,7 +3648,7 @@
                   <a:srgbClr val="FFFFFF"/>
                 </a:solidFill>
               </a:rPr>
-              <a:t>### 綜合啟示 (Overall Insights)</a:t>
+              <a:t>### 綜合啟示（Overall Insights）</a:t>
             </a:r>
             <a:endParaRPr lang="en-US" sz="1200" dirty="0"/>
           </a:p>
@@ -3632,7 +3674,7 @@
                   <a:srgbClr val="FFFFFF"/>
                 </a:solidFill>
               </a:rPr>
-              <a:t>1. **初級抗藥性與免疫抑制表型的關聯**  </a:t>
+              <a:t>1. **免疫療法的潛力**  </a:t>
             </a:r>
             <a:endParaRPr lang="en-US" sz="1200" dirty="0"/>
           </a:p>
@@ -3649,7 +3691,7 @@
                   <a:srgbClr val="FFFFFF"/>
                 </a:solidFill>
               </a:rPr>
-              <a:t>   **The association between primary refractoriness and myeloid immunosuppressive phenotype**  </a:t>
+              <a:t>   **The potential of immunotherapy**  </a:t>
             </a:r>
             <a:endParaRPr lang="en-US" sz="1200" dirty="0"/>
           </a:p>
@@ -3666,7 +3708,7 @@
                   <a:srgbClr val="FFFFFF"/>
                 </a:solidFill>
               </a:rPr>
-              <a:t>   研究顯示，肝細胞癌患者對阿特珠單抗與貝伐單抗的初級抗藥性與骨髓來源的免疫抑制表型有關，這為未來的治療策略提供了新的見解。  </a:t>
+              <a:t>   近期研究顯示，將免疫檢查點抑制劑（如ipilimumab和pembrolizumab）與其他治療（如局部放療或抗VEGF療法）結合，能顯著改善晚期肝細胞癌患者的預後。  </a:t>
             </a:r>
             <a:endParaRPr lang="en-US" sz="1200" dirty="0"/>
           </a:p>
@@ -3683,7 +3725,7 @@
                   <a:srgbClr val="FFFFFF"/>
                 </a:solidFill>
               </a:rPr>
-              <a:t>   The study reveals that primary refractoriness in HCC patients treated with atezolizumab and bevacizumab is linked to a myeloid immunosuppressive phenotype, providing new insights for future therapeutic strategies.</a:t>
+              <a:t>   Recent studies indicate that combining immune checkpoint inhibitors (such as ipilimumab and pembrolizumab) with other treatments (like locoregional radiotherapy or anti-VEGF therapies) can significantly improve the prognosis of patients with advanced hepatocellular carcinoma.</a:t>
             </a:r>
             <a:endParaRPr lang="en-US" sz="1200" dirty="0"/>
           </a:p>
@@ -3709,7 +3751,7 @@
                   <a:srgbClr val="FFFFFF"/>
                 </a:solidFill>
               </a:rPr>
-              <a:t>2. **代謝疾病與肝癌的生物標誌物**  </a:t>
+              <a:t>2. **腫瘤微環境的重塑**  </a:t>
             </a:r>
             <a:endParaRPr lang="en-US" sz="1200" dirty="0"/>
           </a:p>
@@ -3726,7 +3768,7 @@
                   <a:srgbClr val="FFFFFF"/>
                 </a:solidFill>
               </a:rPr>
-              <a:t>   **Emerging biomarkers in metabolic dysfunction-associated steatotic liver disease and HCC**  </a:t>
+              <a:t>   **Remodeling the tumor microenvironment**  </a:t>
             </a:r>
             <a:endParaRPr lang="en-US" sz="1200" dirty="0"/>
           </a:p>
@@ -3743,7 +3785,7 @@
                   <a:srgbClr val="FFFFFF"/>
                 </a:solidFill>
               </a:rPr>
-              <a:t>   隨著對代謝功能障礙相關脂肪肝病（MASLD）的研究進展，新的生物標誌物和治療途徑逐漸浮現，這對於早期診斷和治療肝癌具有重要意義。  </a:t>
+              <a:t>   研究指出，針對NEK9的治療能夠重塑免疫抑制的腫瘤微環境，從而增強免疫療法的效果。  </a:t>
             </a:r>
             <a:endParaRPr lang="en-US" sz="1200" dirty="0"/>
           </a:p>
@@ -3760,7 +3802,7 @@
                   <a:srgbClr val="FFFFFF"/>
                 </a:solidFill>
               </a:rPr>
-              <a:t>   With advancements in research on metabolic dysfunction-associated steatotic liver disease (MASLD), emerging biomarkers and therapeutic avenues are becoming apparent, which are significant for early diagnosis and treatment of HCC.</a:t>
+              <a:t>   Studies suggest that targeting NEK9 can remodel the immunosuppressive tumor microenvironment, thereby enhancing the efficacy of immunotherapy.</a:t>
             </a:r>
             <a:endParaRPr lang="en-US" sz="1200" dirty="0"/>
           </a:p>
@@ -3786,7 +3828,7 @@
                   <a:srgbClr val="FFFFFF"/>
                 </a:solidFill>
               </a:rPr>
-              <a:t>3. **腫瘤微環境的影響**  </a:t>
+              <a:t>3. **維生素D的預測作用**  </a:t>
             </a:r>
             <a:endParaRPr lang="en-US" sz="1200" dirty="0"/>
           </a:p>
@@ -3803,7 +3845,7 @@
                   <a:srgbClr val="FFFFFF"/>
                 </a:solidFill>
               </a:rPr>
-              <a:t>   **Impact of the tumor microenvironment on therapeutic efficacy**  </a:t>
+              <a:t>   **Predictive role of vitamin D**  </a:t>
             </a:r>
             <a:endParaRPr lang="en-US" sz="1200" dirty="0"/>
           </a:p>
@@ -3820,7 +3862,7 @@
                   <a:srgbClr val="FFFFFF"/>
                 </a:solidFill>
               </a:rPr>
-              <a:t>   腫瘤缺氧微環境顯著影響光療和放療的療效，改善腫瘤缺氧成為增強這些治療方法的潛在策略。  </a:t>
+              <a:t>   初步數據顯示，血清維生素D水平與atezolizumab加bevacizumab療法的療效存在關聯，可能成為新的生物標記。  </a:t>
             </a:r>
             <a:endParaRPr lang="en-US" sz="1200" dirty="0"/>
           </a:p>
@@ -3837,7 +3879,7 @@
                   <a:srgbClr val="FFFFFF"/>
                 </a:solidFill>
               </a:rPr>
-              <a:t>   The hypoxic tumor microenvironment significantly impairs the efficacy of photo- and radiotherapy, making the amelioration of tumor hypoxia a promising strategy to enhance these treatment modalities.</a:t>
+              <a:t>   Preliminary data indicate that serum vitamin D levels correlate with the efficacy of atezolizumab plus bevacizumab therapy, potentially serving as a new biomarker.</a:t>
             </a:r>
             <a:endParaRPr lang="en-US" sz="1200" dirty="0"/>
           </a:p>
@@ -3863,7 +3905,7 @@
                   <a:srgbClr val="FFFFFF"/>
                 </a:solidFill>
               </a:rPr>
-              <a:t>4. **自體免疫性腦炎的風險**  </a:t>
+              <a:t>4. **系統性免疫炎症指數的預後價值**  </a:t>
             </a:r>
             <a:endParaRPr lang="en-US" sz="1200" dirty="0"/>
           </a:p>
@@ -3880,7 +3922,7 @@
                   <a:srgbClr val="FFFFFF"/>
                 </a:solidFill>
               </a:rPr>
-              <a:t>   **Risk of autoimmune encephalitis with immune checkpoint inhibitors**  </a:t>
+              <a:t>   **Prognostic value of systemic immune-inflammation index**  </a:t>
             </a:r>
             <a:endParaRPr lang="en-US" sz="1200" dirty="0"/>
           </a:p>
@@ -3897,7 +3939,7 @@
                   <a:srgbClr val="FFFFFF"/>
                 </a:solidFill>
               </a:rPr>
-              <a:t>   阿特珠單抗和貝伐單抗的聯合療法可能導致嚴重的免疫相關不良事件，如自體免疫性腦炎，需在臨床使用中加以注意。  </a:t>
+              <a:t>   系統性免疫炎症指數在接受免疫檢查點抑制劑治療的消化道癌症患者中顯示出預後價值，為臨床決策提供了新依據。  </a:t>
             </a:r>
             <a:endParaRPr lang="en-US" sz="1200" dirty="0"/>
           </a:p>
@@ -3914,7 +3956,7 @@
                   <a:srgbClr val="FFFFFF"/>
                 </a:solidFill>
               </a:rPr>
-              <a:t>   The combination therapy of atezolizumab and bevacizumab may lead to severe immune-related adverse events, such as autoimmune encephalitis, which requires careful attention in clinical use.</a:t>
+              <a:t>   The systemic immune-inflammation index shows prognostic value in gastrointestinal cancer patients treated with immune checkpoint inhibitors, providing new insights for clinical decision-making.</a:t>
             </a:r>
             <a:endParaRPr lang="en-US" sz="1200" dirty="0"/>
           </a:p>
@@ -3940,7 +3982,7 @@
                   <a:srgbClr val="FFFFFF"/>
                 </a:solidFill>
               </a:rPr>
-              <a:t>5. **預後營養指數的潛在價值**  </a:t>
+              <a:t>5. **局部消融與免疫療法的結合**  </a:t>
             </a:r>
             <a:endParaRPr lang="en-US" sz="1200" dirty="0"/>
           </a:p>
@@ -3957,7 +3999,7 @@
                   <a:srgbClr val="FFFFFF"/>
                 </a:solidFill>
               </a:rPr>
-              <a:t>   **Potential value of prognostic nutritional index in immunotherapy**  </a:t>
+              <a:t>   **Combination of locoregional ablation and immunotherapy**  </a:t>
             </a:r>
             <a:endParaRPr lang="en-US" sz="1200" dirty="0"/>
           </a:p>
@@ -3974,7 +4016,24 @@
                   <a:srgbClr val="FFFFFF"/>
                 </a:solidFill>
               </a:rPr>
-              <a:t>   預後營養指數可能與接受免疫檢查點抑制劑的肝細胞癌患者的生存率相關，提示營養狀態在治療中的重要性。</a:t>
+              <a:t>   將立體定向放射治療與免疫檢查點抑制劑結合的策略顯示出潛在的生存益處，需進一步探索最佳組合方案。  </a:t>
+            </a:r>
+            <a:endParaRPr lang="en-US" sz="1200" dirty="0"/>
+          </a:p>
+          <a:p>
+            <a:pPr indent="0" marL="0">
+              <a:lnSpc>
+                <a:spcPct val="150000"/>
+              </a:lnSpc>
+              <a:buNone/>
+            </a:pPr>
+            <a:r>
+              <a:rPr lang="en-US" sz="1200" dirty="0">
+                <a:solidFill>
+                  <a:srgbClr val="FFFFFF"/>
+                </a:solidFill>
+              </a:rPr>
+              <a:t>   The strategy of combining stereotactic body radiation therapy with immune checkpoint inhibitors shows potential survival benefits, warranting further exploration of optimal combination regimens.</a:t>
             </a:r>
             <a:endParaRPr lang="en-US" sz="1200" dirty="0"/>
           </a:p>
@@ -4120,7 +4179,7 @@
                   <a:srgbClr val="FFFFFF"/>
                 </a:solidFill>
               </a:rPr>
-              <a:t>The prognostic nutritional index may be associated with survival in HCC patients treated with immune checkpoint inhibitors, highlighting the importance of nutritional status in treatment.</a:t>
+              <a:t>### 未來研究方向（Future Research Directions）</a:t>
             </a:r>
             <a:endParaRPr lang="en-US" sz="1200" dirty="0"/>
           </a:p>
@@ -4146,7 +4205,7 @@
                   <a:srgbClr val="FFFFFF"/>
                 </a:solidFill>
               </a:rPr>
-              <a:t>### 未來研究方向 (Future Research Directions)</a:t>
+              <a:t>1. **深入研究腫瘤微環境**  </a:t>
             </a:r>
             <a:endParaRPr lang="en-US" sz="1200" dirty="0"/>
           </a:p>
@@ -4157,6 +4216,14 @@
               </a:lnSpc>
               <a:buNone/>
             </a:pPr>
+            <a:r>
+              <a:rPr lang="en-US" sz="1200" dirty="0">
+                <a:solidFill>
+                  <a:srgbClr val="FFFFFF"/>
+                </a:solidFill>
+              </a:rPr>
+              <a:t>   **In-depth studies on tumor microenvironment**  </a:t>
+            </a:r>
             <a:endParaRPr lang="en-US" sz="1200" dirty="0"/>
           </a:p>
           <a:p>
@@ -4172,7 +4239,7 @@
                   <a:srgbClr val="FFFFFF"/>
                 </a:solidFill>
               </a:rPr>
-              <a:t>1. **針對免疫抑制表型的治療策略**  </a:t>
+              <a:t>   未來應加強對腫瘤微環境的研究，特別是如何逆轉其免疫抑制特性，以增強免疫療法的效果。  </a:t>
             </a:r>
             <a:endParaRPr lang="en-US" sz="1200" dirty="0"/>
           </a:p>
@@ -4189,7 +4256,7 @@
                   <a:srgbClr val="FFFFFF"/>
                 </a:solidFill>
               </a:rPr>
-              <a:t>   **Therapeutic strategies targeting immunosuppressive phenotypes**  </a:t>
+              <a:t>   Future research should focus on understanding the tumor microenvironment, particularly how to reverse its immunosuppressive characteristics to enhance the efficacy of immunotherapy.</a:t>
             </a:r>
             <a:endParaRPr lang="en-US" sz="1200" dirty="0"/>
           </a:p>
@@ -4200,13 +4267,22 @@
               </a:lnSpc>
               <a:buNone/>
             </a:pPr>
+            <a:endParaRPr lang="en-US" sz="1200" dirty="0"/>
+          </a:p>
+          <a:p>
+            <a:pPr indent="0" marL="0">
+              <a:lnSpc>
+                <a:spcPct val="150000"/>
+              </a:lnSpc>
+              <a:buNone/>
+            </a:pPr>
             <a:r>
               <a:rPr lang="en-US" sz="1200" dirty="0">
                 <a:solidFill>
                   <a:srgbClr val="FFFFFF"/>
                 </a:solidFill>
               </a:rPr>
-              <a:t>   需要進一步研究針對骨髓來源免疫抑制表型的治療策略，以克服肝細胞癌的初級抗藥性。  </a:t>
+              <a:t>2. **維生素D與免疫療法的關聯**  </a:t>
             </a:r>
             <a:endParaRPr lang="en-US" sz="1200" dirty="0"/>
           </a:p>
@@ -4223,7 +4299,7 @@
                   <a:srgbClr val="FFFFFF"/>
                 </a:solidFill>
               </a:rPr>
-              <a:t>   Further studies are needed to develop therapeutic strategies targeting myeloid immunosuppressive phenotypes to overcome primary refractoriness in HCC.</a:t>
+              <a:t>   **Exploring the relationship between vitamin D and immunotherapy**  </a:t>
             </a:r>
             <a:endParaRPr lang="en-US" sz="1200" dirty="0"/>
           </a:p>
@@ -4234,6 +4310,14 @@
               </a:lnSpc>
               <a:buNone/>
             </a:pPr>
+            <a:r>
+              <a:rPr lang="en-US" sz="1200" dirty="0">
+                <a:solidFill>
+                  <a:srgbClr val="FFFFFF"/>
+                </a:solidFill>
+              </a:rPr>
+              <a:t>   需進一步探討維生素D水平對免疫療法療效的影響，並評估其作為預測生物標記的潛力。  </a:t>
+            </a:r>
             <a:endParaRPr lang="en-US" sz="1200" dirty="0"/>
           </a:p>
           <a:p>
@@ -4249,7 +4333,7 @@
                   <a:srgbClr val="FFFFFF"/>
                 </a:solidFill>
               </a:rPr>
-              <a:t>2. **MASLD與HCC的關聯機制**  </a:t>
+              <a:t>   Further exploration is needed on the impact of vitamin D levels on the efficacy of immunotherapy and assessing its potential as a predictive biomarker.</a:t>
             </a:r>
             <a:endParaRPr lang="en-US" sz="1200" dirty="0"/>
           </a:p>
@@ -4260,13 +4344,22 @@
               </a:lnSpc>
               <a:buNone/>
             </a:pPr>
+            <a:endParaRPr lang="en-US" sz="1200" dirty="0"/>
+          </a:p>
+          <a:p>
+            <a:pPr indent="0" marL="0">
+              <a:lnSpc>
+                <a:spcPct val="150000"/>
+              </a:lnSpc>
+              <a:buNone/>
+            </a:pPr>
             <a:r>
               <a:rPr lang="en-US" sz="1200" dirty="0">
                 <a:solidFill>
                   <a:srgbClr val="FFFFFF"/>
                 </a:solidFill>
               </a:rPr>
-              <a:t>   **Mechanistic studies on the link between MASLD and HCC**  </a:t>
+              <a:t>3. **新型免疫療法的開發**  </a:t>
             </a:r>
             <a:endParaRPr lang="en-US" sz="1200" dirty="0"/>
           </a:p>
@@ -4283,7 +4376,7 @@
                   <a:srgbClr val="FFFFFF"/>
                 </a:solidFill>
               </a:rPr>
-              <a:t>   探索代謝功能障礙相關脂肪肝病（MASLD）與肝細胞癌之間的關聯機制，以促進早期診斷和干預。  </a:t>
+              <a:t>   **Development of novel immunotherapies**  </a:t>
             </a:r>
             <a:endParaRPr lang="en-US" sz="1200" dirty="0"/>
           </a:p>
@@ -4300,7 +4393,7 @@
                   <a:srgbClr val="FFFFFF"/>
                 </a:solidFill>
               </a:rPr>
-              <a:t>   Investigating the mechanistic links between metabolic dysfunction-associated steatotic liver disease (MASLD) and HCC to facilitate early diagnosis and intervention.</a:t>
+              <a:t>   應持續開發新型免疫療法，特別是針對特定腫瘤驅動因子的治療，以提高對肝細胞癌的治療效果。  </a:t>
             </a:r>
             <a:endParaRPr lang="en-US" sz="1200" dirty="0"/>
           </a:p>
@@ -4311,6 +4404,14 @@
               </a:lnSpc>
               <a:buNone/>
             </a:pPr>
+            <a:r>
+              <a:rPr lang="en-US" sz="1200" dirty="0">
+                <a:solidFill>
+                  <a:srgbClr val="FFFFFF"/>
+                </a:solidFill>
+              </a:rPr>
+              <a:t>   Continuous development of novel immunotherapies, particularly targeting specific tumor drivers, is essential to improve treatment outcomes for hepatocellular carcinoma.</a:t>
+            </a:r>
             <a:endParaRPr lang="en-US" sz="1200" dirty="0"/>
           </a:p>
           <a:p>
@@ -4320,13 +4421,22 @@
               </a:lnSpc>
               <a:buNone/>
             </a:pPr>
+            <a:endParaRPr lang="en-US" sz="1200" dirty="0"/>
+          </a:p>
+          <a:p>
+            <a:pPr indent="0" marL="0">
+              <a:lnSpc>
+                <a:spcPct val="150000"/>
+              </a:lnSpc>
+              <a:buNone/>
+            </a:pPr>
             <a:r>
               <a:rPr lang="en-US" sz="1200" dirty="0">
                 <a:solidFill>
                   <a:srgbClr val="FFFFFF"/>
                 </a:solidFill>
               </a:rPr>
-              <a:t>3. **改善腫瘤微環境的策略**  </a:t>
+              <a:t>4. **臨床試驗設計的創新**  </a:t>
             </a:r>
             <a:endParaRPr lang="en-US" sz="1200" dirty="0"/>
           </a:p>
@@ -4343,7 +4453,7 @@
                   <a:srgbClr val="FFFFFF"/>
                 </a:solidFill>
               </a:rPr>
-              <a:t>   **Strategies to improve the tumor microenvironment**  </a:t>
+              <a:t>   **Innovative clinical trial designs**  </a:t>
             </a:r>
             <a:endParaRPr lang="en-US" sz="1200" dirty="0"/>
           </a:p>
@@ -4360,7 +4470,7 @@
                   <a:srgbClr val="FFFFFF"/>
                 </a:solidFill>
               </a:rPr>
-              <a:t>   開發改善腫瘤微環境的策略，以增強光療和放療在肝細胞癌中的療效。  </a:t>
+              <a:t>   需要設計創新的臨床試驗，以評估不同治療組合的療效，並確定最佳的治療時機和療程。  </a:t>
             </a:r>
             <a:endParaRPr lang="en-US" sz="1200" dirty="0"/>
           </a:p>
@@ -4377,7 +4487,7 @@
                   <a:srgbClr val="FFFFFF"/>
                 </a:solidFill>
               </a:rPr>
-              <a:t>   Developing strategies to improve the tumor microenvironment to enhance the efficacy of photo- and radiotherapy in HCC.</a:t>
+              <a:t>   Innovative clinical trial designs are needed to evaluate the efficacy of different treatment combinations and determine the optimal timing and duration of therapy.</a:t>
             </a:r>
             <a:endParaRPr lang="en-US" sz="1200" dirty="0"/>
           </a:p>
@@ -4403,7 +4513,7 @@
                   <a:srgbClr val="FFFFFF"/>
                 </a:solidFill>
               </a:rPr>
-              <a:t>4. **免疫相關不良事件的監測與管理**  </a:t>
+              <a:t>5. **多學科合作的推進**  </a:t>
             </a:r>
             <a:endParaRPr lang="en-US" sz="1200" dirty="0"/>
           </a:p>
@@ -4420,7 +4530,7 @@
                   <a:srgbClr val="FFFFFF"/>
                 </a:solidFill>
               </a:rPr>
-              <a:t>   **Monitoring and management of immune-related adverse events**  </a:t>
+              <a:t>   **Advancement of multidisciplinary collaboration**  </a:t>
             </a:r>
             <a:endParaRPr lang="en-US" sz="1200" dirty="0"/>
           </a:p>
@@ -4437,7 +4547,7 @@
                   <a:srgbClr val="FFFFFF"/>
                 </a:solidFill>
               </a:rPr>
-              <a:t>   研究如何有效監測和管理接受免疫檢查點抑制劑的患者中出現的免疫相關不良事件。  </a:t>
+              <a:t>   推動腫瘤學、免疫學和放射學等領域的多學科合作，以促進綜合治療策略的發展。  </a:t>
             </a:r>
             <a:endParaRPr lang="en-US" sz="1200" dirty="0"/>
           </a:p>
@@ -4454,84 +4564,7 @@
                   <a:srgbClr val="FFFFFF"/>
                 </a:solidFill>
               </a:rPr>
-              <a:t>   Researching effective monitoring and management of immune-related adverse events in patients receiving immune checkpoint inhibitors.</a:t>
-            </a:r>
-            <a:endParaRPr lang="en-US" sz="1200" dirty="0"/>
-          </a:p>
-          <a:p>
-            <a:pPr indent="0" marL="0">
-              <a:lnSpc>
-                <a:spcPct val="150000"/>
-              </a:lnSpc>
-              <a:buNone/>
-            </a:pPr>
-            <a:endParaRPr lang="en-US" sz="1200" dirty="0"/>
-          </a:p>
-          <a:p>
-            <a:pPr indent="0" marL="0">
-              <a:lnSpc>
-                <a:spcPct val="150000"/>
-              </a:lnSpc>
-              <a:buNone/>
-            </a:pPr>
-            <a:r>
-              <a:rPr lang="en-US" sz="1200" dirty="0">
-                <a:solidFill>
-                  <a:srgbClr val="FFFFFF"/>
-                </a:solidFill>
-              </a:rPr>
-              <a:t>5. **營養狀態與治療反應的關聯性**  </a:t>
-            </a:r>
-            <a:endParaRPr lang="en-US" sz="1200" dirty="0"/>
-          </a:p>
-          <a:p>
-            <a:pPr indent="0" marL="0">
-              <a:lnSpc>
-                <a:spcPct val="150000"/>
-              </a:lnSpc>
-              <a:buNone/>
-            </a:pPr>
-            <a:r>
-              <a:rPr lang="en-US" sz="1200" dirty="0">
-                <a:solidFill>
-                  <a:srgbClr val="FFFFFF"/>
-                </a:solidFill>
-              </a:rPr>
-              <a:t>   **Correlation between nutritional status and treatment response**  </a:t>
-            </a:r>
-            <a:endParaRPr lang="en-US" sz="1200" dirty="0"/>
-          </a:p>
-          <a:p>
-            <a:pPr indent="0" marL="0">
-              <a:lnSpc>
-                <a:spcPct val="150000"/>
-              </a:lnSpc>
-              <a:buNone/>
-            </a:pPr>
-            <a:r>
-              <a:rPr lang="en-US" sz="1200" dirty="0">
-                <a:solidFill>
-                  <a:srgbClr val="FFFFFF"/>
-                </a:solidFill>
-              </a:rPr>
-              <a:t>   進一步研究預後營養指數與肝細胞癌患者對免疫治療反應之間的關聯性，以優化治療方案。  </a:t>
-            </a:r>
-            <a:endParaRPr lang="en-US" sz="1200" dirty="0"/>
-          </a:p>
-          <a:p>
-            <a:pPr indent="0" marL="0">
-              <a:lnSpc>
-                <a:spcPct val="150000"/>
-              </a:lnSpc>
-              <a:buNone/>
-            </a:pPr>
-            <a:r>
-              <a:rPr lang="en-US" sz="1200" dirty="0">
-                <a:solidFill>
-                  <a:srgbClr val="FFFFFF"/>
-                </a:solidFill>
-              </a:rPr>
-              <a:t>   Further investigating the correlation between prognostic nutritional index and treatment response in HCC patients to optimize therapeutic regimens.</a:t>
+              <a:t>   Promoting multidisciplinary collaboration among oncology, immunology, and radiology is crucial to advance the development of integrated treatment strategies.</a:t>
             </a:r>
             <a:endParaRPr lang="en-US" sz="1200" dirty="0"/>
           </a:p>
@@ -4804,7 +4837,7 @@
                 <a:ea typeface="Arial" pitchFamily="34" charset="-122"/>
                 <a:cs typeface="Arial" pitchFamily="34" charset="-120"/>
               </a:rPr>
-              <a:t>A myeloid immunosuppressive phenotype defines primary refractoriness to atezoliz…</a:t>
+              <a:t>Addition of ipilimumab to atezolizumab plus bevacizumab in advanced hepatocellul…</a:t>
             </a:r>
             <a:endParaRPr lang="en-US" sz="1400" dirty="0"/>
           </a:p>
@@ -4841,7 +4874,7 @@
                 <a:ea typeface="Arial" pitchFamily="34" charset="-122"/>
                 <a:cs typeface="Arial" pitchFamily="34" charset="-120"/>
               </a:rPr>
-              <a:t>MASLD and MASLD-associated HCC: emerging biomarkers and therapeutic avenues.</a:t>
+              <a:t>Targeting NEK9 synergises with immunotherapy in hepatocellular carcinoma by remo…</a:t>
             </a:r>
             <a:endParaRPr lang="en-US" sz="1400" dirty="0"/>
           </a:p>
@@ -4878,7 +4911,7 @@
                 <a:ea typeface="Arial" pitchFamily="34" charset="-122"/>
                 <a:cs typeface="Arial" pitchFamily="34" charset="-120"/>
               </a:rPr>
-              <a:t>Biomimetic catalase-engineered black phosphorus nanosheets enhance photo-/radio-…</a:t>
+              <a:t>When Lipids Silence Immunity: Dendritic Cell Death in MASLD-associated HCC.</a:t>
             </a:r>
             <a:endParaRPr lang="en-US" sz="1400" dirty="0"/>
           </a:p>
@@ -4915,7 +4948,7 @@
                 <a:ea typeface="Arial" pitchFamily="34" charset="-122"/>
                 <a:cs typeface="Arial" pitchFamily="34" charset="-120"/>
               </a:rPr>
-              <a:t>… plus transarterial chemoembolization and PD-1 inhibitors as conversion therapi…</a:t>
+              <a:t>Pembrolizumab and stereotactic body radiotherapy combined in advanced hepatocell…</a:t>
             </a:r>
             <a:endParaRPr lang="en-US" sz="1400" dirty="0"/>
           </a:p>
@@ -4952,7 +4985,7 @@
                 <a:ea typeface="Arial" pitchFamily="34" charset="-122"/>
                 <a:cs typeface="Arial" pitchFamily="34" charset="-120"/>
               </a:rPr>
-              <a:t>Autoimmune encephalitis induced by atezolizumab and bevacizumab therapy for adva…</a:t>
+              <a:t>Stereotactic Body Radiation Therapy Combined With Immune Checkpoint Inhibitors i…</a:t>
             </a:r>
             <a:endParaRPr lang="en-US" sz="1400" dirty="0"/>
           </a:p>
@@ -4989,7 +5022,7 @@
                 <a:ea typeface="Arial" pitchFamily="34" charset="-122"/>
                 <a:cs typeface="Arial" pitchFamily="34" charset="-120"/>
               </a:rPr>
-              <a:t>Bioinformatics mining and clinical validation of CD274 as a prognostic indicator…</a:t>
+              <a:t>Evaluating pegenzileukin (SAR444245/THOR-707) in combination with pembrolizumab …</a:t>
             </a:r>
             <a:endParaRPr lang="en-US" sz="1400" dirty="0"/>
           </a:p>
@@ -5026,7 +5059,7 @@
                 <a:ea typeface="Arial" pitchFamily="34" charset="-122"/>
                 <a:cs typeface="Arial" pitchFamily="34" charset="-120"/>
               </a:rPr>
-              <a:t>WNK4 Enhances Anti-PD-1 Resistance and Promotes Tumor Progression in Hepatocellu…</a:t>
+              <a:t>… plus transarterial chemoembolization and PD-1 inhibitors as conversion therapi…</a:t>
             </a:r>
             <a:endParaRPr lang="en-US" sz="1400" dirty="0"/>
           </a:p>
@@ -5063,7 +5096,7 @@
                 <a:ea typeface="Arial" pitchFamily="34" charset="-122"/>
                 <a:cs typeface="Arial" pitchFamily="34" charset="-120"/>
               </a:rPr>
-              <a:t>Prognostic nutritional index and the survival of patients with hepatocellular ca…</a:t>
+              <a:t>Pretreatment serum vitamin D levels predict the therapeutic efficacy of atezoliz…</a:t>
             </a:r>
             <a:endParaRPr lang="en-US" sz="1400" dirty="0"/>
           </a:p>
@@ -5100,7 +5133,7 @@
                 <a:ea typeface="Arial" pitchFamily="34" charset="-122"/>
                 <a:cs typeface="Arial" pitchFamily="34" charset="-120"/>
               </a:rPr>
-              <a:t>Radiotherapy versus local ablation therapy for the treatment of hepatocellular c…</a:t>
+              <a:t>Prognostic value of the systemic immune-inflammation index in gastrointestinal c…</a:t>
             </a:r>
             <a:endParaRPr lang="en-US" sz="1400" dirty="0"/>
           </a:p>
@@ -5137,7 +5170,7 @@
                 <a:ea typeface="Arial" pitchFamily="34" charset="-122"/>
                 <a:cs typeface="Arial" pitchFamily="34" charset="-120"/>
               </a:rPr>
-              <a:t>Resveratrol derivative restores macrophage cholesterol homeostasis via stabilizi…</a:t>
+              <a:t>An umbrella review navigating the nationwide burden of hepatitis B virus infecti…</a:t>
             </a:r>
             <a:endParaRPr lang="en-US" sz="1400" dirty="0"/>
           </a:p>
@@ -5292,7 +5325,7 @@
                   </a:extLst>
                 </a:hlinkClick>
               </a:rPr>
-              <a:t>A myeloid immunosuppressive phenotype defines primary refractoriness to atezolizumab Plus bevacizumab in hepatocellular caarcinoma.</a:t>
+              <a:t>Addition of ipilimumab to atezolizumab plus bevacizumab in advanced hepatocellular carcinoma (PRODIGE 81-FFCD 2101-TRIPLET HCC): phase 2 results from a randomised, multicentre, open-label, phase 2-3 trial.</a:t>
             </a:r>
             <a:endParaRPr lang="en-US" sz="2400" dirty="0"/>
           </a:p>
@@ -5328,7 +5361,7 @@
                   <a:srgbClr val="888888"/>
                 </a:solidFill>
               </a:rPr>
-              <a:t>Journal of hepatology  ·  IF 25.7  ·  🌏 Asia</a:t>
+              <a:t>The lancet. Gastroenterology &amp; hepatology  ·  IF 35.7  ·  RCT Phase 3</a:t>
             </a:r>
             <a:endParaRPr lang="en-US" sz="1000" dirty="0"/>
           </a:p>
@@ -5371,7 +5404,7 @@
                 <a:ea typeface="Microsoft JhengHei" pitchFamily="34" charset="-122"/>
                 <a:cs typeface="Microsoft JhengHei" pitchFamily="34" charset="-120"/>
               </a:rPr>
-              <a:t>約40%的HCC患者為初始耐藥。</a:t>
+              <a:t>三重療法未改善療效。</a:t>
             </a:r>
             <a:endParaRPr lang="en-US" sz="1800" dirty="0"/>
           </a:p>
@@ -5392,7 +5425,7 @@
                 <a:ea typeface="Microsoft JhengHei" pitchFamily="34" charset="-122"/>
                 <a:cs typeface="Microsoft JhengHei" pitchFamily="34" charset="-120"/>
               </a:rPr>
-              <a:t>PRef病例顯示獨特免疫抑制TME。</a:t>
+              <a:t>三重組30%客觀反應率。</a:t>
             </a:r>
             <a:endParaRPr lang="en-US" sz="1800" dirty="0"/>
           </a:p>
@@ -5413,49 +5446,7 @@
                 <a:ea typeface="Microsoft JhengHei" pitchFamily="34" charset="-122"/>
                 <a:cs typeface="Microsoft JhengHei" pitchFamily="34" charset="-120"/>
               </a:rPr>
-              <a:t>髓系細胞浸潤與治療失敗相關。</a:t>
-            </a:r>
-            <a:endParaRPr lang="en-US" sz="1800" dirty="0"/>
-          </a:p>
-          <a:p>
-            <a:pPr marL="342900" indent="-342900">
-              <a:spcAft>
-                <a:spcPts val="800"/>
-              </a:spcAft>
-              <a:buSzPct val="100000"/>
-              <a:buChar char="•"/>
-            </a:pPr>
-            <a:r>
-              <a:rPr lang="en-US" sz="1800" dirty="0">
-                <a:solidFill>
-                  <a:srgbClr val="333333"/>
-                </a:solidFill>
-                <a:latin typeface="Microsoft JhengHei" pitchFamily="34" charset="0"/>
-                <a:ea typeface="Microsoft JhengHei" pitchFamily="34" charset="-122"/>
-                <a:cs typeface="Microsoft JhengHei" pitchFamily="34" charset="-120"/>
-              </a:rPr>
-              <a:t>IFN-γ標誌下調為關鍵因素。</a:t>
-            </a:r>
-            <a:endParaRPr lang="en-US" sz="1800" dirty="0"/>
-          </a:p>
-          <a:p>
-            <a:pPr marL="342900" indent="-342900">
-              <a:spcAft>
-                <a:spcPts val="800"/>
-              </a:spcAft>
-              <a:buSzPct val="100000"/>
-              <a:buChar char="•"/>
-            </a:pPr>
-            <a:r>
-              <a:rPr lang="en-US" sz="1800" dirty="0">
-                <a:solidFill>
-                  <a:srgbClr val="333333"/>
-                </a:solidFill>
-                <a:latin typeface="Microsoft JhengHei" pitchFamily="34" charset="0"/>
-                <a:ea typeface="Microsoft JhengHei" pitchFamily="34" charset="-122"/>
-                <a:cs typeface="Microsoft JhengHei" pitchFamily="34" charset="-120"/>
-              </a:rPr>
-              <a:t>針對髓系細胞可提升治療反應。</a:t>
+              <a:t>嚴重不良事件發生率高。</a:t>
             </a:r>
             <a:endParaRPr lang="en-US" sz="1800" dirty="0"/>
           </a:p>
@@ -5491,7 +5482,7 @@
                   <a:srgbClr val="888888"/>
                 </a:solidFill>
               </a:rPr>
-              <a:t>Lombardi Pasquale, Ramon-Gil Erik, Raja Rabial Q et al.. Journal of hepatology. 2026-06-15 DOI: 10.1016/j.jhep.2026.05.018</a:t>
+              <a:t>Merle Philippe, Blanc Jean-Frederic, Le Malicot Karine et al.. The lancet. Gastroenterology &amp; hepatology. 2026-06-22 DOI: 10.1016/S2468-1253(26)00115-9</a:t>
             </a:r>
             <a:endParaRPr lang="en-US" sz="800" dirty="0"/>
           </a:p>
@@ -5691,7 +5682,7 @@
                   </a:extLst>
                 </a:hlinkClick>
               </a:rPr>
-              <a:t>MASLD and MASLD-associated HCC: emerging biomarkers and therapeutic avenues.</a:t>
+              <a:t>Targeting NEK9 synergises with immunotherapy in hepatocellular carcinoma by remodelling the immunosuppressive microenvironment.</a:t>
             </a:r>
             <a:endParaRPr lang="en-US" sz="2400" dirty="0"/>
           </a:p>
@@ -5727,7 +5718,7 @@
                   <a:srgbClr val="888888"/>
                 </a:solidFill>
               </a:rPr>
-              <a:t>Science bulletin  ·  RCT Phase 3</a:t>
+              <a:t>Gut  ·  IF 24.5  ·  Basic Research  ·  🌏 Asia</a:t>
             </a:r>
             <a:endParaRPr lang="en-US" sz="1000" dirty="0"/>
           </a:p>
@@ -5770,7 +5761,7 @@
                 <a:ea typeface="Microsoft JhengHei" pitchFamily="34" charset="-122"/>
                 <a:cs typeface="Microsoft JhengHei" pitchFamily="34" charset="-120"/>
               </a:rPr>
-              <a:t>MASLD為主要慢性肝病。</a:t>
+              <a:t>NEK9在HCC中上調，與預後不良相關。</a:t>
             </a:r>
             <a:endParaRPr lang="en-US" sz="1800" dirty="0"/>
           </a:p>
@@ -5791,7 +5782,7 @@
                 <a:ea typeface="Microsoft JhengHei" pitchFamily="34" charset="-122"/>
                 <a:cs typeface="Microsoft JhengHei" pitchFamily="34" charset="-120"/>
               </a:rPr>
-              <a:t>新興生物標記診斷預後。</a:t>
+              <a:t>抑制NEK9可逆轉免疫抑制TME。</a:t>
             </a:r>
             <a:endParaRPr lang="en-US" sz="1800" dirty="0"/>
           </a:p>
@@ -5812,49 +5803,7 @@
                 <a:ea typeface="Microsoft JhengHei" pitchFamily="34" charset="-122"/>
                 <a:cs typeface="Microsoft JhengHei" pitchFamily="34" charset="-120"/>
               </a:rPr>
-              <a:t>FDA批准resmetirom和semaglutide。</a:t>
-            </a:r>
-            <a:endParaRPr lang="en-US" sz="1800" dirty="0"/>
-          </a:p>
-          <a:p>
-            <a:pPr marL="342900" indent="-342900">
-              <a:spcAft>
-                <a:spcPts val="800"/>
-              </a:spcAft>
-              <a:buSzPct val="100000"/>
-              <a:buChar char="•"/>
-            </a:pPr>
-            <a:r>
-              <a:rPr lang="en-US" sz="1800" dirty="0">
-                <a:solidFill>
-                  <a:srgbClr val="333333"/>
-                </a:solidFill>
-                <a:latin typeface="Microsoft JhengHei" pitchFamily="34" charset="0"/>
-                <a:ea typeface="Microsoft JhengHei" pitchFamily="34" charset="-122"/>
-                <a:cs typeface="Microsoft JhengHei" pitchFamily="34" charset="-120"/>
-              </a:rPr>
-              <a:t>MASLD管理的創新介入。</a:t>
-            </a:r>
-            <a:endParaRPr lang="en-US" sz="1800" dirty="0"/>
-          </a:p>
-          <a:p>
-            <a:pPr marL="342900" indent="-342900">
-              <a:spcAft>
-                <a:spcPts val="800"/>
-              </a:spcAft>
-              <a:buSzPct val="100000"/>
-              <a:buChar char="•"/>
-            </a:pPr>
-            <a:r>
-              <a:rPr lang="en-US" sz="1800" dirty="0">
-                <a:solidFill>
-                  <a:srgbClr val="333333"/>
-                </a:solidFill>
-                <a:latin typeface="Microsoft JhengHei" pitchFamily="34" charset="0"/>
-                <a:ea typeface="Microsoft JhengHei" pitchFamily="34" charset="-122"/>
-                <a:cs typeface="Microsoft JhengHei" pitchFamily="34" charset="-120"/>
-              </a:rPr>
-              <a:t>需要早期檢測與個性化醫療。</a:t>
+              <a:t>NEK9抑制劑增強抗PD-L1療效。</a:t>
             </a:r>
             <a:endParaRPr lang="en-US" sz="1800" dirty="0"/>
           </a:p>
@@ -5890,7 +5839,7 @@
                   <a:srgbClr val="888888"/>
                 </a:solidFill>
               </a:rPr>
-              <a:t>Ha Suki, Zhang Xiang, Li Lanjuan et al.. Science bulletin. 2026-06-12 DOI: 10.1016/j.scib.2026.04.048</a:t>
+              <a:t>Lu Guofang, Du Rui, Wan Yue et al.. Gut. 2026-06-25 DOI: 10.1136/gutjnl-2026-338449</a:t>
             </a:r>
             <a:endParaRPr lang="en-US" sz="800" dirty="0"/>
           </a:p>
@@ -6090,7 +6039,7 @@
                   </a:extLst>
                 </a:hlinkClick>
               </a:rPr>
-              <a:t>Biomimetic catalase-engineered black phosphorus nanosheets enhance photo-/radio-therapy for hepatocellular carcinoma.</a:t>
+              <a:t>When Lipids Silence Immunity: Dendritic Cell Death in MASLD-associated HCC.</a:t>
             </a:r>
             <a:endParaRPr lang="en-US" sz="2400" dirty="0"/>
           </a:p>
@@ -6126,7 +6075,7 @@
                   <a:srgbClr val="888888"/>
                 </a:solidFill>
               </a:rPr>
-              <a:t>Biomedical materials (Bristol, England)  ·  Basic Research  ·  🌏 Asia</a:t>
+              <a:t>Journal of hepatology  ·  IF 25.7</a:t>
             </a:r>
             <a:endParaRPr lang="en-US" sz="1000" dirty="0"/>
           </a:p>
@@ -6169,7 +6118,7 @@
                 <a:ea typeface="Microsoft JhengHei" pitchFamily="34" charset="-122"/>
                 <a:cs typeface="Microsoft JhengHei" pitchFamily="34" charset="-120"/>
               </a:rPr>
-              <a:t>開發生物仿生納米平台，使用黑磷。</a:t>
+              <a:t>脂質可抑制免疫反應。</a:t>
             </a:r>
             <a:endParaRPr lang="en-US" sz="1800" dirty="0"/>
           </a:p>
@@ -6190,7 +6139,7 @@
                 <a:ea typeface="Microsoft JhengHei" pitchFamily="34" charset="-122"/>
                 <a:cs typeface="Microsoft JhengHei" pitchFamily="34" charset="-120"/>
               </a:rPr>
-              <a:t>以催化酶功能化，增強氧氣供應。</a:t>
+              <a:t>MASLD中觀察到樹突細胞死亡。</a:t>
             </a:r>
             <a:endParaRPr lang="en-US" sz="1800" dirty="0"/>
           </a:p>
@@ -6211,49 +6160,7 @@
                 <a:ea typeface="Microsoft JhengHei" pitchFamily="34" charset="-122"/>
                 <a:cs typeface="Microsoft JhengHei" pitchFamily="34" charset="-120"/>
               </a:rPr>
-              <a:t>工程化巨噬細胞膜以調節免疫。</a:t>
-            </a:r>
-            <a:endParaRPr lang="en-US" sz="1800" dirty="0"/>
-          </a:p>
-          <a:p>
-            <a:pPr marL="342900" indent="-342900">
-              <a:spcAft>
-                <a:spcPts val="800"/>
-              </a:spcAft>
-              <a:buSzPct val="100000"/>
-              <a:buChar char="•"/>
-            </a:pPr>
-            <a:r>
-              <a:rPr lang="en-US" sz="1800" dirty="0">
-                <a:solidFill>
-                  <a:srgbClr val="333333"/>
-                </a:solidFill>
-                <a:latin typeface="Microsoft JhengHei" pitchFamily="34" charset="0"/>
-                <a:ea typeface="Microsoft JhengHei" pitchFamily="34" charset="-122"/>
-                <a:cs typeface="Microsoft JhengHei" pitchFamily="34" charset="-120"/>
-              </a:rPr>
-              <a:t>顯著提高腫瘤對光療和放療的敏感性。</a:t>
-            </a:r>
-            <a:endParaRPr lang="en-US" sz="1800" dirty="0"/>
-          </a:p>
-          <a:p>
-            <a:pPr marL="342900" indent="-342900">
-              <a:spcAft>
-                <a:spcPts val="800"/>
-              </a:spcAft>
-              <a:buSzPct val="100000"/>
-              <a:buChar char="•"/>
-            </a:pPr>
-            <a:r>
-              <a:rPr lang="en-US" sz="1800" dirty="0">
-                <a:solidFill>
-                  <a:srgbClr val="333333"/>
-                </a:solidFill>
-                <a:latin typeface="Microsoft JhengHei" pitchFamily="34" charset="0"/>
-                <a:ea typeface="Microsoft JhengHei" pitchFamily="34" charset="-122"/>
-                <a:cs typeface="Microsoft JhengHei" pitchFamily="34" charset="-120"/>
-              </a:rPr>
-              <a:t>改善HCC治療效果的有前景策略。</a:t>
+              <a:t>肝癌進展與脂質代謝相關。</a:t>
             </a:r>
             <a:endParaRPr lang="en-US" sz="1800" dirty="0"/>
           </a:p>
@@ -6289,7 +6196,7 @@
                   <a:srgbClr val="888888"/>
                 </a:solidFill>
               </a:rPr>
-              <a:t>Qiao Chunzhong, Lei Qiucheng, Lu Liangqi et al.. Biomedical materials (Bristol, England). 2026-06-17 DOI: 10.1088/1748-605X/ae70e2</a:t>
+              <a:t>Kocheise Lorenz, Schneider Kai Markus. Journal of hepatology. 2026-06-24 DOI: 10.1016/j.jhep.2026.06.008</a:t>
             </a:r>
             <a:endParaRPr lang="en-US" sz="800" dirty="0"/>
           </a:p>
@@ -6489,7 +6396,7 @@
                   </a:extLst>
                 </a:hlinkClick>
               </a:rPr>
-              <a:t>… plus transarterial chemoembolization and PD-1 inhibitors as conversion therapies for unresectable intermediate-advanced hepatocellular carcinoma: a phase 2 trial …</a:t>
+              <a:t>Pembrolizumab and stereotactic body radiotherapy combined in advanced hepatocellular carcinoma post sorafenib–A phase II trial (PEMRAD)</a:t>
             </a:r>
             <a:endParaRPr lang="en-US" sz="2400" dirty="0"/>
           </a:p>
@@ -6525,7 +6432,7 @@
                   <a:srgbClr val="888888"/>
                 </a:solidFill>
               </a:rPr>
-              <a:t>… and Targeted Therapy  ·  RCT Phase 2</a:t>
+              <a:t>JHEP Reports  ·  IF 7.8  ·  RCT Phase 2</a:t>
             </a:r>
             <a:endParaRPr lang="en-US" sz="1000" dirty="0"/>
           </a:p>
@@ -6568,7 +6475,7 @@
                 <a:ea typeface="Microsoft JhengHei" pitchFamily="34" charset="-122"/>
                 <a:cs typeface="Microsoft JhengHei" pitchFamily="34" charset="-120"/>
               </a:rPr>
-              <a:t>針對不可切除HCC的組合療法</a:t>
+              <a:t>結合 pembrolizumab 和 SBRT</a:t>
             </a:r>
             <a:endParaRPr lang="en-US" sz="1800" dirty="0"/>
           </a:p>
@@ -6589,7 +6496,7 @@
                 <a:ea typeface="Microsoft JhengHei" pitchFamily="34" charset="-122"/>
                 <a:cs typeface="Microsoft JhengHei" pitchFamily="34" charset="-120"/>
               </a:rPr>
-              <a:t>經動脈化療栓塞加PD-1抑制劑</a:t>
+              <a:t>針對晚期 HCC 的二期試驗</a:t>
             </a:r>
             <a:endParaRPr lang="en-US" sz="1800" dirty="0"/>
           </a:p>
@@ -6610,7 +6517,49 @@
                 <a:ea typeface="Microsoft JhengHei" pitchFamily="34" charset="-122"/>
                 <a:cs typeface="Microsoft JhengHei" pitchFamily="34" charset="-120"/>
               </a:rPr>
-              <a:t>第二期試驗顯示良好結果</a:t>
+              <a:t>評估索拉非尼後療效</a:t>
+            </a:r>
+            <a:endParaRPr lang="en-US" sz="1800" dirty="0"/>
+          </a:p>
+          <a:p>
+            <a:pPr marL="342900" indent="-342900">
+              <a:spcAft>
+                <a:spcPts val="800"/>
+              </a:spcAft>
+              <a:buSzPct val="100000"/>
+              <a:buChar char="•"/>
+            </a:pPr>
+            <a:r>
+              <a:rPr lang="en-US" sz="1800" dirty="0">
+                <a:solidFill>
+                  <a:srgbClr val="333333"/>
+                </a:solidFill>
+                <a:latin typeface="Microsoft JhengHei" pitchFamily="34" charset="0"/>
+                <a:ea typeface="Microsoft JhengHei" pitchFamily="34" charset="-122"/>
+                <a:cs typeface="Microsoft JhengHei" pitchFamily="34" charset="-120"/>
+              </a:rPr>
+              <a:t>觀察到增強的免疫反應</a:t>
+            </a:r>
+            <a:endParaRPr lang="en-US" sz="1800" dirty="0"/>
+          </a:p>
+          <a:p>
+            <a:pPr marL="342900" indent="-342900">
+              <a:spcAft>
+                <a:spcPts val="800"/>
+              </a:spcAft>
+              <a:buSzPct val="100000"/>
+              <a:buChar char="•"/>
+            </a:pPr>
+            <a:r>
+              <a:rPr lang="en-US" sz="1800" dirty="0">
+                <a:solidFill>
+                  <a:srgbClr val="333333"/>
+                </a:solidFill>
+                <a:latin typeface="Microsoft JhengHei" pitchFamily="34" charset="0"/>
+                <a:ea typeface="Microsoft JhengHei" pitchFamily="34" charset="-122"/>
+                <a:cs typeface="Microsoft JhengHei" pitchFamily="34" charset="-120"/>
+              </a:rPr>
+              <a:t>改善患者預後的潛力</a:t>
             </a:r>
             <a:endParaRPr lang="en-US" sz="1800" dirty="0"/>
           </a:p>
@@ -6646,7 +6595,7 @@
                   <a:srgbClr val="888888"/>
                 </a:solidFill>
               </a:rPr>
-              <a:t>X Zhang, H Cai, W Peng. … and Targeted Therapy. 2026</a:t>
+              <a:t>GM O'Kane, A Mesci, RW Jang. JHEP Reports. 2026</a:t>
             </a:r>
             <a:endParaRPr lang="en-US" sz="800" dirty="0"/>
           </a:p>
@@ -6846,7 +6795,7 @@
                   </a:extLst>
                 </a:hlinkClick>
               </a:rPr>
-              <a:t>Autoimmune encephalitis induced by atezolizumab and bevacizumab therapy for advanced hepatocellular carcinoma: a case report.</a:t>
+              <a:t>Stereotactic Body Radiation Therapy Combined With Immune Checkpoint Inhibitors in Unresectable Hepatocellular Carcinoma: A Comprehensive Single-Arm Meta-Analysis Approach.</a:t>
             </a:r>
             <a:endParaRPr lang="en-US" sz="2400" dirty="0"/>
           </a:p>
@@ -6882,7 +6831,7 @@
                   <a:srgbClr val="888888"/>
                 </a:solidFill>
               </a:rPr>
-              <a:t>Journal of medical case reports  ·  Case Report  ·  🌏 Asia</a:t>
+              <a:t>American journal of clinical oncology  ·  RCT Phase 2</a:t>
             </a:r>
             <a:endParaRPr lang="en-US" sz="1000" dirty="0"/>
           </a:p>
@@ -6925,7 +6874,7 @@
                 <a:ea typeface="Microsoft JhengHei" pitchFamily="34" charset="-122"/>
                 <a:cs typeface="Microsoft JhengHei" pitchFamily="34" charset="-120"/>
               </a:rPr>
-              <a:t>Atezolizumab 和 bevacizumab 用於 HCC</a:t>
+              <a:t>SBRT 與 ICI 結合顯示潛力</a:t>
             </a:r>
             <a:endParaRPr lang="en-US" sz="1800" dirty="0"/>
           </a:p>
@@ -6946,7 +6895,7 @@
                 <a:ea typeface="Microsoft JhengHei" pitchFamily="34" charset="-122"/>
                 <a:cs typeface="Microsoft JhengHei" pitchFamily="34" charset="-120"/>
               </a:rPr>
-              <a:t>患者出現自體免疫性腦炎</a:t>
+              <a:t>中位 OS 為 22.7 個月</a:t>
             </a:r>
             <a:endParaRPr lang="en-US" sz="1800" dirty="0"/>
           </a:p>
@@ -6967,7 +6916,7 @@
                 <a:ea typeface="Microsoft JhengHei" pitchFamily="34" charset="-122"/>
                 <a:cs typeface="Microsoft JhengHei" pitchFamily="34" charset="-120"/>
               </a:rPr>
-              <a:t>症狀包括發燒和意識障礙</a:t>
+              <a:t>中位 PFS 為 7.9 個月</a:t>
             </a:r>
             <a:endParaRPr lang="en-US" sz="1800" dirty="0"/>
           </a:p>
@@ -6988,7 +6937,7 @@
                 <a:ea typeface="Microsoft JhengHei" pitchFamily="34" charset="-122"/>
                 <a:cs typeface="Microsoft JhengHei" pitchFamily="34" charset="-120"/>
               </a:rPr>
-              <a:t>腦脊髓液顯示單核細胞增多</a:t>
+              <a:t>DCR 為 93.4%，ORR 為 56.3%</a:t>
             </a:r>
             <a:endParaRPr lang="en-US" sz="1800" dirty="0"/>
           </a:p>
@@ -7009,7 +6958,7 @@
                 <a:ea typeface="Microsoft JhengHei" pitchFamily="34" charset="-122"/>
                 <a:cs typeface="Microsoft JhengHei" pitchFamily="34" charset="-120"/>
               </a:rPr>
-              <a:t>類固醇治療促進快速康復</a:t>
+              <a:t>可控的 3 級以上毒性為 17.5%</a:t>
             </a:r>
             <a:endParaRPr lang="en-US" sz="1800" dirty="0"/>
           </a:p>
@@ -7045,7 +6994,7 @@
                   <a:srgbClr val="888888"/>
                 </a:solidFill>
               </a:rPr>
-              <a:t>Nomura Yoriko, Wada Yoshiyuki, Sasaki Shin et al.. Journal of medical case reports. 2026-06-19 DOI: 10.1186/s13256-026-06037-4</a:t>
+              <a:t>Dreyer Justin, Narasimhan Raksha M, Dias Neto Ana R et al.. American journal of clinical oncology. 2026-06-25 DOI: 10.1097/COC.0000000000001341</a:t>
             </a:r>
             <a:endParaRPr lang="en-US" sz="800" dirty="0"/>
           </a:p>
@@ -7245,7 +7194,7 @@
                   </a:extLst>
                 </a:hlinkClick>
               </a:rPr>
-              <a:t>Bioinformatics mining and clinical validation of CD274 as a prognostic indicator in hepatocellular carcinoma.</a:t>
+              <a:t>Evaluating pegenzileukin (SAR444245/THOR-707) in combination with pembrolizumab or cetuximab in advanced metastatic gastrointestinal cancer: the PEGATHOR phase 2 study.</a:t>
             </a:r>
             <a:endParaRPr lang="en-US" sz="2400" dirty="0"/>
           </a:p>
@@ -7281,7 +7230,7 @@
                   <a:srgbClr val="888888"/>
                 </a:solidFill>
               </a:rPr>
-              <a:t>BMC cancer  ·  🌏 Asia</a:t>
+              <a:t>Investigational new drugs  ·  RCT Phase 2</a:t>
             </a:r>
             <a:endParaRPr lang="en-US" sz="1000" dirty="0"/>
           </a:p>
@@ -7324,7 +7273,7 @@
                 <a:ea typeface="Microsoft JhengHei" pitchFamily="34" charset="-122"/>
                 <a:cs typeface="Microsoft JhengHei" pitchFamily="34" charset="-120"/>
               </a:rPr>
-              <a:t>CD274與HCC預後相關。</a:t>
+              <a:t>Pegenziukin 擴展效應 T 細胞和 NK 細胞。</a:t>
             </a:r>
             <a:endParaRPr lang="en-US" sz="1800" dirty="0"/>
           </a:p>
@@ -7345,7 +7294,7 @@
                 <a:ea typeface="Microsoft JhengHei" pitchFamily="34" charset="-122"/>
                 <a:cs typeface="Microsoft JhengHei" pitchFamily="34" charset="-120"/>
               </a:rPr>
-              <a:t>使用生物信息學進行表達分析。</a:t>
+              <a:t>研究涉及 138 名晚期 GI 癌患者。</a:t>
             </a:r>
             <a:endParaRPr lang="en-US" sz="1800" dirty="0"/>
           </a:p>
@@ -7366,7 +7315,49 @@
                 <a:ea typeface="Microsoft JhengHei" pitchFamily="34" charset="-122"/>
                 <a:cs typeface="Microsoft JhengHei" pitchFamily="34" charset="-120"/>
               </a:rPr>
-              <a:t>高CD274與更好生存率相關。</a:t>
+              <a:t>客觀反應率在各組間不同。</a:t>
+            </a:r>
+            <a:endParaRPr lang="en-US" sz="1800" dirty="0"/>
+          </a:p>
+          <a:p>
+            <a:pPr marL="342900" indent="-342900">
+              <a:spcAft>
+                <a:spcPts val="800"/>
+              </a:spcAft>
+              <a:buSzPct val="100000"/>
+              <a:buChar char="•"/>
+            </a:pPr>
+            <a:r>
+              <a:rPr lang="en-US" sz="1800" dirty="0">
+                <a:solidFill>
+                  <a:srgbClr val="333333"/>
+                </a:solidFill>
+                <a:latin typeface="Microsoft JhengHei" pitchFamily="34" charset="0"/>
+                <a:ea typeface="Microsoft JhengHei" pitchFamily="34" charset="-122"/>
+                <a:cs typeface="Microsoft JhengHei" pitchFamily="34" charset="-120"/>
+              </a:rPr>
+              <a:t>中位無進展生存期為 1.9-2.1 個月。</a:t>
+            </a:r>
+            <a:endParaRPr lang="en-US" sz="1800" dirty="0"/>
+          </a:p>
+          <a:p>
+            <a:pPr marL="342900" indent="-342900">
+              <a:spcAft>
+                <a:spcPts val="800"/>
+              </a:spcAft>
+              <a:buSzPct val="100000"/>
+              <a:buChar char="•"/>
+            </a:pPr>
+            <a:r>
+              <a:rPr lang="en-US" sz="1800" dirty="0">
+                <a:solidFill>
+                  <a:srgbClr val="333333"/>
+                </a:solidFill>
+                <a:latin typeface="Microsoft JhengHei" pitchFamily="34" charset="0"/>
+                <a:ea typeface="Microsoft JhengHei" pitchFamily="34" charset="-122"/>
+                <a:cs typeface="Microsoft JhengHei" pitchFamily="34" charset="-120"/>
+              </a:rPr>
+              <a:t>安全性可控，常見不良事件。</a:t>
             </a:r>
             <a:endParaRPr lang="en-US" sz="1800" dirty="0"/>
           </a:p>
@@ -7402,7 +7393,7 @@
                   <a:srgbClr val="888888"/>
                 </a:solidFill>
               </a:rPr>
-              <a:t>Shi Hansen, Zhang Peijun, Wei Qiping et al.. BMC cancer. 2026-06-16 DOI: 10.1186/s12885-026-16329-z</a:t>
+              <a:t>Harris William P, Garc&amp;#xed;a-Alfonso Pilar, Metges Jean Phillipe et al.. Investigational new drugs. 2026-06-22 DOI: 10.1007/s10637-026-01622-2</a:t>
             </a:r>
             <a:endParaRPr lang="en-US" sz="800" dirty="0"/>
           </a:p>
@@ -7602,7 +7593,7 @@
                   </a:extLst>
                 </a:hlinkClick>
               </a:rPr>
-              <a:t>WNK4 Enhances Anti-PD-1 Resistance and Promotes Tumor Progression in Hepatocellular Carcinoma by Reprogramming Cysteine Metabolism in Cancer-Associated Fibroblasts.</a:t>
+              <a:t>… plus transarterial chemoembolization and PD-1 inhibitors as conversion therapies for unresectable intermediate-advanced hepatocellular carcinoma: a phase 2 trial …</a:t>
             </a:r>
             <a:endParaRPr lang="en-US" sz="2400" dirty="0"/>
           </a:p>
@@ -7638,7 +7629,7 @@
                   <a:srgbClr val="888888"/>
                 </a:solidFill>
               </a:rPr>
-              <a:t>FASEB journal : official publication of the Federation of American Societies for Experimental Biology  ·  🌏 Asia</a:t>
+              <a:t>… and Targeted Therapy  ·  RCT Phase 2</a:t>
             </a:r>
             <a:endParaRPr lang="en-US" sz="1000" dirty="0"/>
           </a:p>
@@ -7681,7 +7672,7 @@
                 <a:ea typeface="Microsoft JhengHei" pitchFamily="34" charset="-122"/>
                 <a:cs typeface="Microsoft JhengHei" pitchFamily="34" charset="-120"/>
               </a:rPr>
-              <a:t>WNK4上調與HCC進展相關</a:t>
+              <a:t>針對不可切除HCC的組合療法</a:t>
             </a:r>
             <a:endParaRPr lang="en-US" sz="1800" dirty="0"/>
           </a:p>
@@ -7702,7 +7693,7 @@
                 <a:ea typeface="Microsoft JhengHei" pitchFamily="34" charset="-122"/>
                 <a:cs typeface="Microsoft JhengHei" pitchFamily="34" charset="-120"/>
               </a:rPr>
-              <a:t>WNK4增強抗PD-1抵抗力</a:t>
+              <a:t>經動脈化療栓塞加PD-1抑制劑</a:t>
             </a:r>
             <a:endParaRPr lang="en-US" sz="1800" dirty="0"/>
           </a:p>
@@ -7723,49 +7714,7 @@
                 <a:ea typeface="Microsoft JhengHei" pitchFamily="34" charset="-122"/>
                 <a:cs typeface="Microsoft JhengHei" pitchFamily="34" charset="-120"/>
               </a:rPr>
-              <a:t>CAFs中的半胱氨酸代謝重編程</a:t>
-            </a:r>
-            <a:endParaRPr lang="en-US" sz="1800" dirty="0"/>
-          </a:p>
-          <a:p>
-            <a:pPr marL="342900" indent="-342900">
-              <a:spcAft>
-                <a:spcPts val="800"/>
-              </a:spcAft>
-              <a:buSzPct val="100000"/>
-              <a:buChar char="•"/>
-            </a:pPr>
-            <a:r>
-              <a:rPr lang="en-US" sz="1800" dirty="0">
-                <a:solidFill>
-                  <a:srgbClr val="333333"/>
-                </a:solidFill>
-                <a:latin typeface="Microsoft JhengHei" pitchFamily="34" charset="0"/>
-                <a:ea typeface="Microsoft JhengHei" pitchFamily="34" charset="-122"/>
-                <a:cs typeface="Microsoft JhengHei" pitchFamily="34" charset="-120"/>
-              </a:rPr>
-              <a:t>WNK4促進HCC細胞遷移</a:t>
-            </a:r>
-            <a:endParaRPr lang="en-US" sz="1800" dirty="0"/>
-          </a:p>
-          <a:p>
-            <a:pPr marL="342900" indent="-342900">
-              <a:spcAft>
-                <a:spcPts val="800"/>
-              </a:spcAft>
-              <a:buSzPct val="100000"/>
-              <a:buChar char="•"/>
-            </a:pPr>
-            <a:r>
-              <a:rPr lang="en-US" sz="1800" dirty="0">
-                <a:solidFill>
-                  <a:srgbClr val="333333"/>
-                </a:solidFill>
-                <a:latin typeface="Microsoft JhengHei" pitchFamily="34" charset="0"/>
-                <a:ea typeface="Microsoft JhengHei" pitchFamily="34" charset="-122"/>
-                <a:cs typeface="Microsoft JhengHei" pitchFamily="34" charset="-120"/>
-              </a:rPr>
-              <a:t>新發現WNK4-HMGB1-p53軸</a:t>
+              <a:t>第二期試驗顯示良好結果</a:t>
             </a:r>
             <a:endParaRPr lang="en-US" sz="1800" dirty="0"/>
           </a:p>
@@ -7801,7 +7750,7 @@
                   <a:srgbClr val="888888"/>
                 </a:solidFill>
               </a:rPr>
-              <a:t>Yu Ge, Cui Yun-Long, Mu Han et al.. FASEB journal : official publication of the Federation of American Societies for Experimental Biology. 2026-06-12 DOI: 10.1096/fj.202502777R</a:t>
+              <a:t>X Zhang, H Cai, W Peng. … and Targeted Therapy. 2026</a:t>
             </a:r>
             <a:endParaRPr lang="en-US" sz="800" dirty="0"/>
           </a:p>

--- a/docs/digest-zh.pptx
+++ b/docs/digest-zh.pptx
@@ -2269,7 +2269,7 @@
                   <a:srgbClr val="888888"/>
                 </a:solidFill>
               </a:rPr>
-              <a:t>2026-06-22 — 2026-06-29</a:t>
+              <a:t>2026-06-29 — 2026-07-06</a:t>
             </a:r>
             <a:endParaRPr lang="en-US" sz="1400" dirty="0"/>
           </a:p>
@@ -2460,7 +2460,7 @@
                   </a:extLst>
                 </a:hlinkClick>
               </a:rPr>
-              <a:t>Pretreatment serum vitamin D levels predict the therapeutic efficacy of atezolizumab plus bevacizumab therapy in advanced hepatocellular carcinoma: a multicenter analysis.</a:t>
+              <a:t>Balloon-occluded Alternative Infusion of Fragmented Gelatin Particles of TACE for Hepatocellular Carcinoma Refractory to Atezolizumab-Bevacizumab.</a:t>
             </a:r>
             <a:endParaRPr lang="en-US" sz="2400" dirty="0"/>
           </a:p>
@@ -2496,7 +2496,7 @@
                   <a:srgbClr val="888888"/>
                 </a:solidFill>
               </a:rPr>
-              <a:t>International journal of clinical oncology  ·  🌏 Asia</a:t>
+              <a:t>Anticancer research  ·  Prospective Study  ·  🌏 Asia</a:t>
             </a:r>
             <a:endParaRPr lang="en-US" sz="1000" dirty="0"/>
           </a:p>
@@ -2539,7 +2539,7 @@
                 <a:ea typeface="Microsoft JhengHei" pitchFamily="34" charset="-122"/>
                 <a:cs typeface="Microsoft JhengHei" pitchFamily="34" charset="-120"/>
               </a:rPr>
-              <a:t>維他命D具抗癌效果。</a:t>
+              <a:t>研究BOAI-TACE對HCC患者的效果</a:t>
             </a:r>
             <a:endParaRPr lang="en-US" sz="1800" dirty="0"/>
           </a:p>
@@ -2560,7 +2560,7 @@
                 <a:ea typeface="Microsoft JhengHei" pitchFamily="34" charset="-122"/>
                 <a:cs typeface="Microsoft JhengHei" pitchFamily="34" charset="-120"/>
               </a:rPr>
-              <a:t>研究包含142名HCC患者。</a:t>
+              <a:t>主要終點：8週的ORR</a:t>
             </a:r>
             <a:endParaRPr lang="en-US" sz="1800" dirty="0"/>
           </a:p>
@@ -2581,7 +2581,7 @@
                 <a:ea typeface="Microsoft JhengHei" pitchFamily="34" charset="-122"/>
                 <a:cs typeface="Microsoft JhengHei" pitchFamily="34" charset="-120"/>
               </a:rPr>
-              <a:t>低維他命D與PD相關。</a:t>
+              <a:t>治療患者ORR達60%</a:t>
             </a:r>
             <a:endParaRPr lang="en-US" sz="1800" dirty="0"/>
           </a:p>
@@ -2602,7 +2602,7 @@
                 <a:ea typeface="Microsoft JhengHei" pitchFamily="34" charset="-122"/>
                 <a:cs typeface="Microsoft JhengHei" pitchFamily="34" charset="-120"/>
               </a:rPr>
-              <a:t>臨界值：17.8 ng/mL。</a:t>
+              <a:t>監測不良事件以評估安全性</a:t>
             </a:r>
             <a:endParaRPr lang="en-US" sz="1800" dirty="0"/>
           </a:p>
@@ -2623,7 +2623,7 @@
                 <a:ea typeface="Microsoft JhengHei" pitchFamily="34" charset="-122"/>
                 <a:cs typeface="Microsoft JhengHei" pitchFamily="34" charset="-120"/>
               </a:rPr>
-              <a:t>高維他命D預測更好OS。</a:t>
+              <a:t>肝功能無顯著變化</a:t>
             </a:r>
             <a:endParaRPr lang="en-US" sz="1800" dirty="0"/>
           </a:p>
@@ -2659,7 +2659,7 @@
                   <a:srgbClr val="888888"/>
                 </a:solidFill>
               </a:rPr>
-              <a:t>Suzuki Takanori, Matsuura Kentaro, Narahara Satoshi et al.. International journal of clinical oncology. 2026-06-27 DOI: 10.1007/s10147-026-03114-y</a:t>
+              <a:t>Hasegawa Naoyuki, Hoshiai Sodai, Yamada Takeshi et al.. Anticancer research. 2026-06-29 DOI: 10.21873/anticanres.18251</a:t>
             </a:r>
             <a:endParaRPr lang="en-US" sz="800" dirty="0"/>
           </a:p>
@@ -2859,7 +2859,7 @@
                   </a:extLst>
                 </a:hlinkClick>
               </a:rPr>
-              <a:t>Prognostic value of the systemic immune-inflammation index in gastrointestinal cancers treated with immune checkpoint inhibitors: a systematic review and meta-analysis.</a:t>
+              <a:t>Anti-angiogenic therapy combined with immune checkpoint blockade mediates CCR7 + CD8 + T-cell entry into HCC through high endothelial venules.</a:t>
             </a:r>
             <a:endParaRPr lang="en-US" sz="2400" dirty="0"/>
           </a:p>
@@ -2895,7 +2895,7 @@
                   <a:srgbClr val="888888"/>
                 </a:solidFill>
               </a:rPr>
-              <a:t>BMC gastroenterology  ·  Meta-Analysis</a:t>
+              <a:t>Hepatology (Baltimore, Md.)  ·  IF 12.9  ·  Basic Research</a:t>
             </a:r>
             <a:endParaRPr lang="en-US" sz="1000" dirty="0"/>
           </a:p>
@@ -2938,7 +2938,7 @@
                 <a:ea typeface="Microsoft JhengHei" pitchFamily="34" charset="-122"/>
                 <a:cs typeface="Microsoft JhengHei" pitchFamily="34" charset="-120"/>
               </a:rPr>
-              <a:t>評估系統性免疫炎症指數(SII)</a:t>
+              <a:t>抗血管生成治療增強T細胞浸潤</a:t>
             </a:r>
             <a:endParaRPr lang="en-US" sz="1800" dirty="0"/>
           </a:p>
@@ -2959,7 +2959,7 @@
                 <a:ea typeface="Microsoft JhengHei" pitchFamily="34" charset="-122"/>
                 <a:cs typeface="Microsoft JhengHei" pitchFamily="34" charset="-120"/>
               </a:rPr>
-              <a:t>高SII與生存結果不佳相關</a:t>
+              <a:t>高內皮靜脈促進淋巴細胞進入</a:t>
             </a:r>
             <a:endParaRPr lang="en-US" sz="1800" dirty="0"/>
           </a:p>
@@ -2980,7 +2980,7 @@
                 <a:ea typeface="Microsoft JhengHei" pitchFamily="34" charset="-122"/>
                 <a:cs typeface="Microsoft JhengHei" pitchFamily="34" charset="-120"/>
               </a:rPr>
-              <a:t>包含28項研究4752名患者</a:t>
+              <a:t>CCR7 + CD8 + T細胞顯示細胞毒性潛力</a:t>
             </a:r>
             <a:endParaRPr lang="en-US" sz="1800" dirty="0"/>
           </a:p>
@@ -3001,7 +3001,7 @@
                 <a:ea typeface="Microsoft JhengHei" pitchFamily="34" charset="-122"/>
                 <a:cs typeface="Microsoft JhengHei" pitchFamily="34" charset="-120"/>
               </a:rPr>
-              <a:t>SII預測HCC的OS和PFS</a:t>
+              <a:t>VEGFC和NF-κB通路促進HEV形成</a:t>
             </a:r>
             <a:endParaRPr lang="en-US" sz="1800" dirty="0"/>
           </a:p>
@@ -3022,7 +3022,7 @@
                 <a:ea typeface="Microsoft JhengHei" pitchFamily="34" charset="-122"/>
                 <a:cs typeface="Microsoft JhengHei" pitchFamily="34" charset="-120"/>
               </a:rPr>
-              <a:t>SII有助於風險分層</a:t>
+              <a:t>高HEV密度與生存率改善相關</a:t>
             </a:r>
             <a:endParaRPr lang="en-US" sz="1800" dirty="0"/>
           </a:p>
@@ -3058,7 +3058,7 @@
                   <a:srgbClr val="888888"/>
                 </a:solidFill>
               </a:rPr>
-              <a:t>Lu Jiamin, Feng Yuqian, Guo Kaibo et al.. BMC gastroenterology. 2026-06-25 DOI: 10.1186/s12876-026-05014-x</a:t>
+              <a:t>Tang Lu, Hou Yingwen, Di Tian et al.. Hepatology (Baltimore, Md.). 2026-06-16 DOI: 10.1097/HEP.0000000000001426</a:t>
             </a:r>
             <a:endParaRPr lang="en-US" sz="800" dirty="0"/>
           </a:p>
@@ -3258,7 +3258,7 @@
                   </a:extLst>
                 </a:hlinkClick>
               </a:rPr>
-              <a:t>An umbrella review navigating the nationwide burden of hepatitis B virus infection in Ethiopia: A call for action on vaccination, safe blood, and infection prevention.</a:t>
+              <a:t>Cancer-Associated Fibroblasts Promote Tumor Immunosuppression in Hepatocellular Carcinoma via the NNMT-ANGPTL4 Axis.</a:t>
             </a:r>
             <a:endParaRPr lang="en-US" sz="2400" dirty="0"/>
           </a:p>
@@ -3294,7 +3294,7 @@
                   <a:srgbClr val="888888"/>
                 </a:solidFill>
               </a:rPr>
-              <a:t>PloS one  ·  Meta-Analysis</a:t>
+              <a:t>Advanced science (Weinheim, Baden-Wurttemberg, Germany)  ·  Basic Research  ·  🌏 Asia</a:t>
             </a:r>
             <a:endParaRPr lang="en-US" sz="1000" dirty="0"/>
           </a:p>
@@ -3337,7 +3337,7 @@
                 <a:ea typeface="Microsoft JhengHei" pitchFamily="34" charset="-122"/>
                 <a:cs typeface="Microsoft JhengHei" pitchFamily="34" charset="-120"/>
               </a:rPr>
-              <a:t>HBV是肝病主要原因。</a:t>
+              <a:t>CAFs 驅動 HCC 免疫抑制。</a:t>
             </a:r>
             <a:endParaRPr lang="en-US" sz="1800" dirty="0"/>
           </a:p>
@@ -3358,7 +3358,7 @@
                 <a:ea typeface="Microsoft JhengHei" pitchFamily="34" charset="-122"/>
                 <a:cs typeface="Microsoft JhengHei" pitchFamily="34" charset="-120"/>
               </a:rPr>
-              <a:t>埃塞俄比亞HBV感染率為5.78%。</a:t>
+              <a:t>NNMT 調控 ANGPTL4 分泌。</a:t>
             </a:r>
             <a:endParaRPr lang="en-US" sz="1800" dirty="0"/>
           </a:p>
@@ -3379,7 +3379,7 @@
                 <a:ea typeface="Microsoft JhengHei" pitchFamily="34" charset="-122"/>
                 <a:cs typeface="Microsoft JhengHei" pitchFamily="34" charset="-120"/>
               </a:rPr>
-              <a:t>風險因素包括男性及多重伴侶。</a:t>
+              <a:t>ANGPTL4 增強腫瘤免疫逃逸。</a:t>
             </a:r>
             <a:endParaRPr lang="en-US" sz="1800" dirty="0"/>
           </a:p>
@@ -3400,7 +3400,7 @@
                 <a:ea typeface="Microsoft JhengHei" pitchFamily="34" charset="-122"/>
                 <a:cs typeface="Microsoft JhengHei" pitchFamily="34" charset="-120"/>
               </a:rPr>
-              <a:t>系統評價結果不一致。</a:t>
+              <a:t>靶向 NNMT-ANGPTL4 恢復 T 細胞活性。</a:t>
             </a:r>
             <a:endParaRPr lang="en-US" sz="1800" dirty="0"/>
           </a:p>
@@ -3421,7 +3421,7 @@
                 <a:ea typeface="Microsoft JhengHei" pitchFamily="34" charset="-122"/>
                 <a:cs typeface="Microsoft JhengHei" pitchFamily="34" charset="-120"/>
               </a:rPr>
-              <a:t>研究有助於公共衛生策略發展。</a:t>
+              <a:t>聯合療法提升抗 PD-L1 效果。</a:t>
             </a:r>
             <a:endParaRPr lang="en-US" sz="1800" dirty="0"/>
           </a:p>
@@ -3457,7 +3457,7 @@
                   <a:srgbClr val="888888"/>
                 </a:solidFill>
               </a:rPr>
-              <a:t>Demeke Abel Desalegn, Tsegaye Aboma, Bayable Alem et al.. PloS one. 2026-06-22 DOI: 10.1371/journal.pone.0352169</a:t>
+              <a:t>Lu Shounan, Ke Shanjia, Yu Hongjun et al.. Advanced science (Weinheim, Baden-Wurttemberg, Germany). 2026-07-03 DOI: 10.1002/advs.202521418</a:t>
             </a:r>
             <a:endParaRPr lang="en-US" sz="800" dirty="0"/>
           </a:p>
@@ -3674,7 +3674,7 @@
                   <a:srgbClr val="FFFFFF"/>
                 </a:solidFill>
               </a:rPr>
-              <a:t>1. **免疫療法的潛力**  </a:t>
+              <a:t>1. **免疫治療的潛力**  </a:t>
             </a:r>
             <a:endParaRPr lang="en-US" sz="1200" dirty="0"/>
           </a:p>
@@ -3691,7 +3691,7 @@
                   <a:srgbClr val="FFFFFF"/>
                 </a:solidFill>
               </a:rPr>
-              <a:t>   **The potential of immunotherapy**  </a:t>
+              <a:t>   Immunotherapy, particularly immune checkpoint inhibitors (ICIs), has shown promising results in downstaging intermediate and advanced hepatocellular carcinoma (HCC), potentially expanding eligibility for liver transplantation.  </a:t>
             </a:r>
             <a:endParaRPr lang="en-US" sz="1200" dirty="0"/>
           </a:p>
@@ -3708,7 +3708,7 @@
                   <a:srgbClr val="FFFFFF"/>
                 </a:solidFill>
               </a:rPr>
-              <a:t>   近期研究顯示，將免疫檢查點抑制劑（如ipilimumab和pembrolizumab）與其他治療（如局部放療或抗VEGF療法）結合，能顯著改善晚期肝細胞癌患者的預後。  </a:t>
+              <a:t>   免疫治療，特別是免疫檢查點抑制劑（ICIs），在下調中晚期肝細胞癌（HCC）方面顯示出良好的潛力，可能擴大肝臟移植的適應症。</a:t>
             </a:r>
             <a:endParaRPr lang="en-US" sz="1200" dirty="0"/>
           </a:p>
@@ -3719,14 +3719,6 @@
               </a:lnSpc>
               <a:buNone/>
             </a:pPr>
-            <a:r>
-              <a:rPr lang="en-US" sz="1200" dirty="0">
-                <a:solidFill>
-                  <a:srgbClr val="FFFFFF"/>
-                </a:solidFill>
-              </a:rPr>
-              <a:t>   Recent studies indicate that combining immune checkpoint inhibitors (such as ipilimumab and pembrolizumab) with other treatments (like locoregional radiotherapy or anti-VEGF therapies) can significantly improve the prognosis of patients with advanced hepatocellular carcinoma.</a:t>
-            </a:r>
             <a:endParaRPr lang="en-US" sz="1200" dirty="0"/>
           </a:p>
           <a:p>
@@ -3736,6 +3728,14 @@
               </a:lnSpc>
               <a:buNone/>
             </a:pPr>
+            <a:r>
+              <a:rPr lang="en-US" sz="1200" dirty="0">
+                <a:solidFill>
+                  <a:srgbClr val="FFFFFF"/>
+                </a:solidFill>
+              </a:rPr>
+              <a:t>2. **多重療法的協同效應**  </a:t>
+            </a:r>
             <a:endParaRPr lang="en-US" sz="1200" dirty="0"/>
           </a:p>
           <a:p>
@@ -3751,7 +3751,7 @@
                   <a:srgbClr val="FFFFFF"/>
                 </a:solidFill>
               </a:rPr>
-              <a:t>2. **腫瘤微環境的重塑**  </a:t>
+              <a:t>   The combination of ICIs with locoregional therapies and other agents, such as tyrosine kinase inhibitors (TKIs) and radiotherapy, may enhance therapeutic efficacy in HCC.  </a:t>
             </a:r>
             <a:endParaRPr lang="en-US" sz="1200" dirty="0"/>
           </a:p>
@@ -3768,7 +3768,7 @@
                   <a:srgbClr val="FFFFFF"/>
                 </a:solidFill>
               </a:rPr>
-              <a:t>   **Remodeling the tumor microenvironment**  </a:t>
+              <a:t>   將ICIs與區域性治療及其他藥物（如酪氨酸激酶抑制劑（TKIs）和放射治療）結合，可能提高HCC的治療效果。</a:t>
             </a:r>
             <a:endParaRPr lang="en-US" sz="1200" dirty="0"/>
           </a:p>
@@ -3779,14 +3779,6 @@
               </a:lnSpc>
               <a:buNone/>
             </a:pPr>
-            <a:r>
-              <a:rPr lang="en-US" sz="1200" dirty="0">
-                <a:solidFill>
-                  <a:srgbClr val="FFFFFF"/>
-                </a:solidFill>
-              </a:rPr>
-              <a:t>   研究指出，針對NEK9的治療能夠重塑免疫抑制的腫瘤微環境，從而增強免疫療法的效果。  </a:t>
-            </a:r>
             <a:endParaRPr lang="en-US" sz="1200" dirty="0"/>
           </a:p>
           <a:p>
@@ -3802,7 +3794,7 @@
                   <a:srgbClr val="FFFFFF"/>
                 </a:solidFill>
               </a:rPr>
-              <a:t>   Studies suggest that targeting NEK9 can remodel the immunosuppressive tumor microenvironment, thereby enhancing the efficacy of immunotherapy.</a:t>
+              <a:t>3. **患者選擇的關鍵性**  </a:t>
             </a:r>
             <a:endParaRPr lang="en-US" sz="1200" dirty="0"/>
           </a:p>
@@ -3813,6 +3805,14 @@
               </a:lnSpc>
               <a:buNone/>
             </a:pPr>
+            <a:r>
+              <a:rPr lang="en-US" sz="1200" dirty="0">
+                <a:solidFill>
+                  <a:srgbClr val="FFFFFF"/>
+                </a:solidFill>
+              </a:rPr>
+              <a:t>   Real-world studies emphasize the importance of patient selection and stratification based on eligibility criteria, which can significantly influence treatment outcomes in HCC.  </a:t>
+            </a:r>
             <a:endParaRPr lang="en-US" sz="1200" dirty="0"/>
           </a:p>
           <a:p>
@@ -3828,7 +3828,7 @@
                   <a:srgbClr val="FFFFFF"/>
                 </a:solidFill>
               </a:rPr>
-              <a:t>3. **維生素D的預測作用**  </a:t>
+              <a:t>   實際臨床研究強調患者選擇和根據適應症標準進行分層的重要性，這對HCC的治療結果有顯著影響。</a:t>
             </a:r>
             <a:endParaRPr lang="en-US" sz="1200" dirty="0"/>
           </a:p>
@@ -3839,14 +3839,6 @@
               </a:lnSpc>
               <a:buNone/>
             </a:pPr>
-            <a:r>
-              <a:rPr lang="en-US" sz="1200" dirty="0">
-                <a:solidFill>
-                  <a:srgbClr val="FFFFFF"/>
-                </a:solidFill>
-              </a:rPr>
-              <a:t>   **Predictive role of vitamin D**  </a:t>
-            </a:r>
             <a:endParaRPr lang="en-US" sz="1200" dirty="0"/>
           </a:p>
           <a:p>
@@ -3862,7 +3854,7 @@
                   <a:srgbClr val="FFFFFF"/>
                 </a:solidFill>
               </a:rPr>
-              <a:t>   初步數據顯示，血清維生素D水平與atezolizumab加bevacizumab療法的療效存在關聯，可能成為新的生物標記。  </a:t>
+              <a:t>4. **腫瘤微環境的挑戰**  </a:t>
             </a:r>
             <a:endParaRPr lang="en-US" sz="1200" dirty="0"/>
           </a:p>
@@ -3879,7 +3871,7 @@
                   <a:srgbClr val="FFFFFF"/>
                 </a:solidFill>
               </a:rPr>
-              <a:t>   Preliminary data indicate that serum vitamin D levels correlate with the efficacy of atezolizumab plus bevacizumab therapy, potentially serving as a new biomarker.</a:t>
+              <a:t>   The immunosuppressive tumor microenvironment, driven by cancer-associated fibroblasts and other factors, remains a significant barrier to effective immunotherapy in HCC.  </a:t>
             </a:r>
             <a:endParaRPr lang="en-US" sz="1200" dirty="0"/>
           </a:p>
@@ -3890,6 +3882,14 @@
               </a:lnSpc>
               <a:buNone/>
             </a:pPr>
+            <a:r>
+              <a:rPr lang="en-US" sz="1200" dirty="0">
+                <a:solidFill>
+                  <a:srgbClr val="FFFFFF"/>
+                </a:solidFill>
+              </a:rPr>
+              <a:t>   由癌症相關成纖維細胞及其他因素驅動的免疫抑制腫瘤微環境，仍然是HCC有效免疫治療的一大障礙。</a:t>
+            </a:r>
             <a:endParaRPr lang="en-US" sz="1200" dirty="0"/>
           </a:p>
           <a:p>
@@ -3899,14 +3899,6 @@
               </a:lnSpc>
               <a:buNone/>
             </a:pPr>
-            <a:r>
-              <a:rPr lang="en-US" sz="1200" dirty="0">
-                <a:solidFill>
-                  <a:srgbClr val="FFFFFF"/>
-                </a:solidFill>
-              </a:rPr>
-              <a:t>4. **系統性免疫炎症指數的預後價值**  </a:t>
-            </a:r>
             <a:endParaRPr lang="en-US" sz="1200" dirty="0"/>
           </a:p>
           <a:p>
@@ -3922,7 +3914,7 @@
                   <a:srgbClr val="FFFFFF"/>
                 </a:solidFill>
               </a:rPr>
-              <a:t>   **Prognostic value of systemic immune-inflammation index**  </a:t>
+              <a:t>5. **未來的生物標記研究**  </a:t>
             </a:r>
             <a:endParaRPr lang="en-US" sz="1200" dirty="0"/>
           </a:p>
@@ -3939,101 +3931,7 @@
                   <a:srgbClr val="FFFFFF"/>
                 </a:solidFill>
               </a:rPr>
-              <a:t>   系統性免疫炎症指數在接受免疫檢查點抑制劑治療的消化道癌症患者中顯示出預後價值，為臨床決策提供了新依據。  </a:t>
-            </a:r>
-            <a:endParaRPr lang="en-US" sz="1200" dirty="0"/>
-          </a:p>
-          <a:p>
-            <a:pPr indent="0" marL="0">
-              <a:lnSpc>
-                <a:spcPct val="150000"/>
-              </a:lnSpc>
-              <a:buNone/>
-            </a:pPr>
-            <a:r>
-              <a:rPr lang="en-US" sz="1200" dirty="0">
-                <a:solidFill>
-                  <a:srgbClr val="FFFFFF"/>
-                </a:solidFill>
-              </a:rPr>
-              <a:t>   The systemic immune-inflammation index shows prognostic value in gastrointestinal cancer patients treated with immune checkpoint inhibitors, providing new insights for clinical decision-making.</a:t>
-            </a:r>
-            <a:endParaRPr lang="en-US" sz="1200" dirty="0"/>
-          </a:p>
-          <a:p>
-            <a:pPr indent="0" marL="0">
-              <a:lnSpc>
-                <a:spcPct val="150000"/>
-              </a:lnSpc>
-              <a:buNone/>
-            </a:pPr>
-            <a:endParaRPr lang="en-US" sz="1200" dirty="0"/>
-          </a:p>
-          <a:p>
-            <a:pPr indent="0" marL="0">
-              <a:lnSpc>
-                <a:spcPct val="150000"/>
-              </a:lnSpc>
-              <a:buNone/>
-            </a:pPr>
-            <a:r>
-              <a:rPr lang="en-US" sz="1200" dirty="0">
-                <a:solidFill>
-                  <a:srgbClr val="FFFFFF"/>
-                </a:solidFill>
-              </a:rPr>
-              <a:t>5. **局部消融與免疫療法的結合**  </a:t>
-            </a:r>
-            <a:endParaRPr lang="en-US" sz="1200" dirty="0"/>
-          </a:p>
-          <a:p>
-            <a:pPr indent="0" marL="0">
-              <a:lnSpc>
-                <a:spcPct val="150000"/>
-              </a:lnSpc>
-              <a:buNone/>
-            </a:pPr>
-            <a:r>
-              <a:rPr lang="en-US" sz="1200" dirty="0">
-                <a:solidFill>
-                  <a:srgbClr val="FFFFFF"/>
-                </a:solidFill>
-              </a:rPr>
-              <a:t>   **Combination of locoregional ablation and immunotherapy**  </a:t>
-            </a:r>
-            <a:endParaRPr lang="en-US" sz="1200" dirty="0"/>
-          </a:p>
-          <a:p>
-            <a:pPr indent="0" marL="0">
-              <a:lnSpc>
-                <a:spcPct val="150000"/>
-              </a:lnSpc>
-              <a:buNone/>
-            </a:pPr>
-            <a:r>
-              <a:rPr lang="en-US" sz="1200" dirty="0">
-                <a:solidFill>
-                  <a:srgbClr val="FFFFFF"/>
-                </a:solidFill>
-              </a:rPr>
-              <a:t>   將立體定向放射治療與免疫檢查點抑制劑結合的策略顯示出潛在的生存益處，需進一步探索最佳組合方案。  </a:t>
-            </a:r>
-            <a:endParaRPr lang="en-US" sz="1200" dirty="0"/>
-          </a:p>
-          <a:p>
-            <a:pPr indent="0" marL="0">
-              <a:lnSpc>
-                <a:spcPct val="150000"/>
-              </a:lnSpc>
-              <a:buNone/>
-            </a:pPr>
-            <a:r>
-              <a:rPr lang="en-US" sz="1200" dirty="0">
-                <a:solidFill>
-                  <a:srgbClr val="FFFFFF"/>
-                </a:solidFill>
-              </a:rPr>
-              <a:t>   The strategy of combining stereotactic body radiation therapy with immune checkpoint inhibitors shows potential survival benefits, warranting further exploration of optimal combination regimens.</a:t>
+              <a:t>   Advances in immune profiling and biomarker identification may facilitate personalized immunotherapy approaches, improving outcomes for HCC patients.</a:t>
             </a:r>
             <a:endParaRPr lang="en-US" sz="1200" dirty="0"/>
           </a:p>
@@ -4179,7 +4077,7 @@
                   <a:srgbClr val="FFFFFF"/>
                 </a:solidFill>
               </a:rPr>
-              <a:t>### 未來研究方向（Future Research Directions）</a:t>
+              <a:t>免疫剖析和生物標記識別的進展，可能促進個性化免疫治療方法的發展，改善HCC患者的治療結果。</a:t>
             </a:r>
             <a:endParaRPr lang="en-US" sz="1200" dirty="0"/>
           </a:p>
@@ -4205,7 +4103,7 @@
                   <a:srgbClr val="FFFFFF"/>
                 </a:solidFill>
               </a:rPr>
-              <a:t>1. **深入研究腫瘤微環境**  </a:t>
+              <a:t>### 未來研究方向（Future Research Directions）</a:t>
             </a:r>
             <a:endParaRPr lang="en-US" sz="1200" dirty="0"/>
           </a:p>
@@ -4216,14 +4114,6 @@
               </a:lnSpc>
               <a:buNone/>
             </a:pPr>
-            <a:r>
-              <a:rPr lang="en-US" sz="1200" dirty="0">
-                <a:solidFill>
-                  <a:srgbClr val="FFFFFF"/>
-                </a:solidFill>
-              </a:rPr>
-              <a:t>   **In-depth studies on tumor microenvironment**  </a:t>
-            </a:r>
             <a:endParaRPr lang="en-US" sz="1200" dirty="0"/>
           </a:p>
           <a:p>
@@ -4239,7 +4129,7 @@
                   <a:srgbClr val="FFFFFF"/>
                 </a:solidFill>
               </a:rPr>
-              <a:t>   未來應加強對腫瘤微環境的研究，特別是如何逆轉其免疫抑制特性，以增強免疫療法的效果。  </a:t>
+              <a:t>1. **探索新型免疫療法**  </a:t>
             </a:r>
             <a:endParaRPr lang="en-US" sz="1200" dirty="0"/>
           </a:p>
@@ -4256,7 +4146,7 @@
                   <a:srgbClr val="FFFFFF"/>
                 </a:solidFill>
               </a:rPr>
-              <a:t>   Future research should focus on understanding the tumor microenvironment, particularly how to reverse its immunosuppressive characteristics to enhance the efficacy of immunotherapy.</a:t>
+              <a:t>   Further studies should investigate novel immunotherapeutic agents and combinations, particularly in the context of advanced HCC and their mechanisms of action.  </a:t>
             </a:r>
             <a:endParaRPr lang="en-US" sz="1200" dirty="0"/>
           </a:p>
@@ -4267,6 +4157,14 @@
               </a:lnSpc>
               <a:buNone/>
             </a:pPr>
+            <a:r>
+              <a:rPr lang="en-US" sz="1200" dirty="0">
+                <a:solidFill>
+                  <a:srgbClr val="FFFFFF"/>
+                </a:solidFill>
+              </a:rPr>
+              <a:t>   進一步研究應探討新型免疫治療藥物及其組合，特別是在晚期HCC的背景下及其作用機制。</a:t>
+            </a:r>
             <a:endParaRPr lang="en-US" sz="1200" dirty="0"/>
           </a:p>
           <a:p>
@@ -4276,14 +4174,6 @@
               </a:lnSpc>
               <a:buNone/>
             </a:pPr>
-            <a:r>
-              <a:rPr lang="en-US" sz="1200" dirty="0">
-                <a:solidFill>
-                  <a:srgbClr val="FFFFFF"/>
-                </a:solidFill>
-              </a:rPr>
-              <a:t>2. **維生素D與免疫療法的關聯**  </a:t>
-            </a:r>
             <a:endParaRPr lang="en-US" sz="1200" dirty="0"/>
           </a:p>
           <a:p>
@@ -4299,7 +4189,7 @@
                   <a:srgbClr val="FFFFFF"/>
                 </a:solidFill>
               </a:rPr>
-              <a:t>   **Exploring the relationship between vitamin D and immunotherapy**  </a:t>
+              <a:t>2. **腫瘤微環境的調節**  </a:t>
             </a:r>
             <a:endParaRPr lang="en-US" sz="1200" dirty="0"/>
           </a:p>
@@ -4316,7 +4206,7 @@
                   <a:srgbClr val="FFFFFF"/>
                 </a:solidFill>
               </a:rPr>
-              <a:t>   需進一步探討維生素D水平對免疫療法療效的影響，並評估其作為預測生物標記的潛力。  </a:t>
+              <a:t>   Research should focus on strategies to modulate the tumor microenvironment to enhance the efficacy of immunotherapies in HCC.  </a:t>
             </a:r>
             <a:endParaRPr lang="en-US" sz="1200" dirty="0"/>
           </a:p>
@@ -4333,7 +4223,7 @@
                   <a:srgbClr val="FFFFFF"/>
                 </a:solidFill>
               </a:rPr>
-              <a:t>   Further exploration is needed on the impact of vitamin D levels on the efficacy of immunotherapy and assessing its potential as a predictive biomarker.</a:t>
+              <a:t>   研究應集中於調節腫瘤微環境的策略，以提高HCC中免疫治療的療效。</a:t>
             </a:r>
             <a:endParaRPr lang="en-US" sz="1200" dirty="0"/>
           </a:p>
@@ -4359,7 +4249,7 @@
                   <a:srgbClr val="FFFFFF"/>
                 </a:solidFill>
               </a:rPr>
-              <a:t>3. **新型免疫療法的開發**  </a:t>
+              <a:t>3. **生物標記的臨床應用**  </a:t>
             </a:r>
             <a:endParaRPr lang="en-US" sz="1200" dirty="0"/>
           </a:p>
@@ -4376,7 +4266,7 @@
                   <a:srgbClr val="FFFFFF"/>
                 </a:solidFill>
               </a:rPr>
-              <a:t>   **Development of novel immunotherapies**  </a:t>
+              <a:t>   The identification and validation of biomarkers that predict response to immunotherapy could lead to more tailored treatment strategies for HCC patients.  </a:t>
             </a:r>
             <a:endParaRPr lang="en-US" sz="1200" dirty="0"/>
           </a:p>
@@ -4393,7 +4283,7 @@
                   <a:srgbClr val="FFFFFF"/>
                 </a:solidFill>
               </a:rPr>
-              <a:t>   應持續開發新型免疫療法，特別是針對特定腫瘤驅動因子的治療，以提高對肝細胞癌的治療效果。  </a:t>
+              <a:t>   識別和驗證預測免疫治療反應的生物標記，可能導致對HCC患者更具針對性的治療策略。</a:t>
             </a:r>
             <a:endParaRPr lang="en-US" sz="1200" dirty="0"/>
           </a:p>
@@ -4404,14 +4294,6 @@
               </a:lnSpc>
               <a:buNone/>
             </a:pPr>
-            <a:r>
-              <a:rPr lang="en-US" sz="1200" dirty="0">
-                <a:solidFill>
-                  <a:srgbClr val="FFFFFF"/>
-                </a:solidFill>
-              </a:rPr>
-              <a:t>   Continuous development of novel immunotherapies, particularly targeting specific tumor drivers, is essential to improve treatment outcomes for hepatocellular carcinoma.</a:t>
-            </a:r>
             <a:endParaRPr lang="en-US" sz="1200" dirty="0"/>
           </a:p>
           <a:p>
@@ -4421,6 +4303,14 @@
               </a:lnSpc>
               <a:buNone/>
             </a:pPr>
+            <a:r>
+              <a:rPr lang="en-US" sz="1200" dirty="0">
+                <a:solidFill>
+                  <a:srgbClr val="FFFFFF"/>
+                </a:solidFill>
+              </a:rPr>
+              <a:t>4. **長期療效的評估**  </a:t>
+            </a:r>
             <a:endParaRPr lang="en-US" sz="1200" dirty="0"/>
           </a:p>
           <a:p>
@@ -4436,7 +4326,7 @@
                   <a:srgbClr val="FFFFFF"/>
                 </a:solidFill>
               </a:rPr>
-              <a:t>4. **臨床試驗設計的創新**  </a:t>
+              <a:t>   Longitudinal studies are needed to assess the long-term efficacy and safety of combined immunotherapy approaches in HCC.  </a:t>
             </a:r>
             <a:endParaRPr lang="en-US" sz="1200" dirty="0"/>
           </a:p>
@@ -4453,7 +4343,7 @@
                   <a:srgbClr val="FFFFFF"/>
                 </a:solidFill>
               </a:rPr>
-              <a:t>   **Innovative clinical trial designs**  </a:t>
+              <a:t>   需要進行縱向研究，以評估HCC中聯合免疫治療方法的長期療效和安全性。</a:t>
             </a:r>
             <a:endParaRPr lang="en-US" sz="1200" dirty="0"/>
           </a:p>
@@ -4464,14 +4354,6 @@
               </a:lnSpc>
               <a:buNone/>
             </a:pPr>
-            <a:r>
-              <a:rPr lang="en-US" sz="1200" dirty="0">
-                <a:solidFill>
-                  <a:srgbClr val="FFFFFF"/>
-                </a:solidFill>
-              </a:rPr>
-              <a:t>   需要設計創新的臨床試驗，以評估不同治療組合的療效，並確定最佳的治療時機和療程。  </a:t>
-            </a:r>
             <a:endParaRPr lang="en-US" sz="1200" dirty="0"/>
           </a:p>
           <a:p>
@@ -4487,7 +4369,7 @@
                   <a:srgbClr val="FFFFFF"/>
                 </a:solidFill>
               </a:rPr>
-              <a:t>   Innovative clinical trial designs are needed to evaluate the efficacy of different treatment combinations and determine the optimal timing and duration of therapy.</a:t>
+              <a:t>5. **多中心臨床試驗的推進**  </a:t>
             </a:r>
             <a:endParaRPr lang="en-US" sz="1200" dirty="0"/>
           </a:p>
@@ -4498,6 +4380,14 @@
               </a:lnSpc>
               <a:buNone/>
             </a:pPr>
+            <a:r>
+              <a:rPr lang="en-US" sz="1200" dirty="0">
+                <a:solidFill>
+                  <a:srgbClr val="FFFFFF"/>
+                </a:solidFill>
+              </a:rPr>
+              <a:t>   Multi-center clinical trials should be conducted to validate findings across diverse populations and settings, enhancing the generalizability of results.  </a:t>
+            </a:r>
             <a:endParaRPr lang="en-US" sz="1200" dirty="0"/>
           </a:p>
           <a:p>
@@ -4513,58 +4403,7 @@
                   <a:srgbClr val="FFFFFF"/>
                 </a:solidFill>
               </a:rPr>
-              <a:t>5. **多學科合作的推進**  </a:t>
-            </a:r>
-            <a:endParaRPr lang="en-US" sz="1200" dirty="0"/>
-          </a:p>
-          <a:p>
-            <a:pPr indent="0" marL="0">
-              <a:lnSpc>
-                <a:spcPct val="150000"/>
-              </a:lnSpc>
-              <a:buNone/>
-            </a:pPr>
-            <a:r>
-              <a:rPr lang="en-US" sz="1200" dirty="0">
-                <a:solidFill>
-                  <a:srgbClr val="FFFFFF"/>
-                </a:solidFill>
-              </a:rPr>
-              <a:t>   **Advancement of multidisciplinary collaboration**  </a:t>
-            </a:r>
-            <a:endParaRPr lang="en-US" sz="1200" dirty="0"/>
-          </a:p>
-          <a:p>
-            <a:pPr indent="0" marL="0">
-              <a:lnSpc>
-                <a:spcPct val="150000"/>
-              </a:lnSpc>
-              <a:buNone/>
-            </a:pPr>
-            <a:r>
-              <a:rPr lang="en-US" sz="1200" dirty="0">
-                <a:solidFill>
-                  <a:srgbClr val="FFFFFF"/>
-                </a:solidFill>
-              </a:rPr>
-              <a:t>   推動腫瘤學、免疫學和放射學等領域的多學科合作，以促進綜合治療策略的發展。  </a:t>
-            </a:r>
-            <a:endParaRPr lang="en-US" sz="1200" dirty="0"/>
-          </a:p>
-          <a:p>
-            <a:pPr indent="0" marL="0">
-              <a:lnSpc>
-                <a:spcPct val="150000"/>
-              </a:lnSpc>
-              <a:buNone/>
-            </a:pPr>
-            <a:r>
-              <a:rPr lang="en-US" sz="1200" dirty="0">
-                <a:solidFill>
-                  <a:srgbClr val="FFFFFF"/>
-                </a:solidFill>
-              </a:rPr>
-              <a:t>   Promoting multidisciplinary collaboration among oncology, immunology, and radiology is crucial to advance the development of integrated treatment strategies.</a:t>
+              <a:t>   應進行多中心臨床試驗，以驗證不同人群和環境中的研究結果，提高結果的普遍適用性。</a:t>
             </a:r>
             <a:endParaRPr lang="en-US" sz="1200" dirty="0"/>
           </a:p>
@@ -4837,7 +4676,7 @@
                 <a:ea typeface="Arial" pitchFamily="34" charset="-122"/>
                 <a:cs typeface="Arial" pitchFamily="34" charset="-120"/>
               </a:rPr>
-              <a:t>Addition of ipilimumab to atezolizumab plus bevacizumab in advanced hepatocellul…</a:t>
+              <a:t>Efficacy of liver transplantation after response to atezolizumab-bevacizumab dow…</a:t>
             </a:r>
             <a:endParaRPr lang="en-US" sz="1400" dirty="0"/>
           </a:p>
@@ -4874,7 +4713,7 @@
                 <a:ea typeface="Arial" pitchFamily="34" charset="-122"/>
                 <a:cs typeface="Arial" pitchFamily="34" charset="-120"/>
               </a:rPr>
-              <a:t>Targeting NEK9 synergises with immunotherapy in hepatocellular carcinoma by remo…</a:t>
+              <a:t>Outcomes of Patients With Hepatocellular Carcinoma Treated With Durvalumab Plus …</a:t>
             </a:r>
             <a:endParaRPr lang="en-US" sz="1400" dirty="0"/>
           </a:p>
@@ -4911,7 +4750,7 @@
                 <a:ea typeface="Arial" pitchFamily="34" charset="-122"/>
                 <a:cs typeface="Arial" pitchFamily="34" charset="-120"/>
               </a:rPr>
-              <a:t>When Lipids Silence Immunity: Dendritic Cell Death in MASLD-associated HCC.</a:t>
+              <a:t>Camrelizumab, a patinib and radiotherapy in locally advanced, unresectable hepat…</a:t>
             </a:r>
             <a:endParaRPr lang="en-US" sz="1400" dirty="0"/>
           </a:p>
@@ -4948,7 +4787,7 @@
                 <a:ea typeface="Arial" pitchFamily="34" charset="-122"/>
                 <a:cs typeface="Arial" pitchFamily="34" charset="-120"/>
               </a:rPr>
-              <a:t>Pembrolizumab and stereotactic body radiotherapy combined in advanced hepatocell…</a:t>
+              <a:t>Neoadjuvant Danburstotug (IMC-001) therapy in gastric, esophageal, and hepatocel…</a:t>
             </a:r>
             <a:endParaRPr lang="en-US" sz="1400" dirty="0"/>
           </a:p>
@@ -4985,7 +4824,7 @@
                 <a:ea typeface="Arial" pitchFamily="34" charset="-122"/>
                 <a:cs typeface="Arial" pitchFamily="34" charset="-120"/>
               </a:rPr>
-              <a:t>Stereotactic Body Radiation Therapy Combined With Immune Checkpoint Inhibitors i…</a:t>
+              <a:t>Pembrolizumab and stereotactic body radiotherapy combined in advanced hepatocell…</a:t>
             </a:r>
             <a:endParaRPr lang="en-US" sz="1400" dirty="0"/>
           </a:p>
@@ -5022,7 +4861,7 @@
                 <a:ea typeface="Arial" pitchFamily="34" charset="-122"/>
                 <a:cs typeface="Arial" pitchFamily="34" charset="-120"/>
               </a:rPr>
-              <a:t>Evaluating pegenzileukin (SAR444245/THOR-707) in combination with pembrolizumab …</a:t>
+              <a:t>Complementary evaluation of phase III immunotherapy trials in advanced HCC using…</a:t>
             </a:r>
             <a:endParaRPr lang="en-US" sz="1400" dirty="0"/>
           </a:p>
@@ -5059,7 +4898,7 @@
                 <a:ea typeface="Arial" pitchFamily="34" charset="-122"/>
                 <a:cs typeface="Arial" pitchFamily="34" charset="-120"/>
               </a:rPr>
-              <a:t>… plus transarterial chemoembolization and PD-1 inhibitors as conversion therapi…</a:t>
+              <a:t>Systemic immune profiling in hepatocellular carcinoma: navigating etiological he…</a:t>
             </a:r>
             <a:endParaRPr lang="en-US" sz="1400" dirty="0"/>
           </a:p>
@@ -5096,7 +4935,7 @@
                 <a:ea typeface="Arial" pitchFamily="34" charset="-122"/>
                 <a:cs typeface="Arial" pitchFamily="34" charset="-120"/>
               </a:rPr>
-              <a:t>Pretreatment serum vitamin D levels predict the therapeutic efficacy of atezoliz…</a:t>
+              <a:t>Balloon-occluded Alternative Infusion of Fragmented Gelatin Particles of TACE fo…</a:t>
             </a:r>
             <a:endParaRPr lang="en-US" sz="1400" dirty="0"/>
           </a:p>
@@ -5133,7 +4972,7 @@
                 <a:ea typeface="Arial" pitchFamily="34" charset="-122"/>
                 <a:cs typeface="Arial" pitchFamily="34" charset="-120"/>
               </a:rPr>
-              <a:t>Prognostic value of the systemic immune-inflammation index in gastrointestinal c…</a:t>
+              <a:t>Anti-angiogenic therapy combined with immune checkpoint blockade mediates CCR7 +…</a:t>
             </a:r>
             <a:endParaRPr lang="en-US" sz="1400" dirty="0"/>
           </a:p>
@@ -5170,7 +5009,7 @@
                 <a:ea typeface="Arial" pitchFamily="34" charset="-122"/>
                 <a:cs typeface="Arial" pitchFamily="34" charset="-120"/>
               </a:rPr>
-              <a:t>An umbrella review navigating the nationwide burden of hepatitis B virus infecti…</a:t>
+              <a:t>Cancer-Associated Fibroblasts Promote Tumor Immunosuppression in Hepatocellular …</a:t>
             </a:r>
             <a:endParaRPr lang="en-US" sz="1400" dirty="0"/>
           </a:p>
@@ -5325,7 +5164,7 @@
                   </a:extLst>
                 </a:hlinkClick>
               </a:rPr>
-              <a:t>Addition of ipilimumab to atezolizumab plus bevacizumab in advanced hepatocellular carcinoma (PRODIGE 81-FFCD 2101-TRIPLET HCC): phase 2 results from a randomised, multicentre, open-label, phase 2-3 trial.</a:t>
+              <a:t>Efficacy of liver transplantation after response to atezolizumab-bevacizumab downstaging of intermediate and advanced hepatocellular carcinoma (ImmunoXXL).</a:t>
             </a:r>
             <a:endParaRPr lang="en-US" sz="2400" dirty="0"/>
           </a:p>
@@ -5361,7 +5200,7 @@
                   <a:srgbClr val="888888"/>
                 </a:solidFill>
               </a:rPr>
-              <a:t>The lancet. Gastroenterology &amp; hepatology  ·  IF 35.7  ·  RCT Phase 3</a:t>
+              <a:t>Journal of hepatology  ·  IF 25.7  ·  RCT Phase 2</a:t>
             </a:r>
             <a:endParaRPr lang="en-US" sz="1000" dirty="0"/>
           </a:p>
@@ -5404,7 +5243,7 @@
                 <a:ea typeface="Microsoft JhengHei" pitchFamily="34" charset="-122"/>
                 <a:cs typeface="Microsoft JhengHei" pitchFamily="34" charset="-120"/>
               </a:rPr>
-              <a:t>三重療法未改善療效。</a:t>
+              <a:t>肝移植可治癒HCC。</a:t>
             </a:r>
             <a:endParaRPr lang="en-US" sz="1800" dirty="0"/>
           </a:p>
@@ -5425,7 +5264,7 @@
                 <a:ea typeface="Microsoft JhengHei" pitchFamily="34" charset="-122"/>
                 <a:cs typeface="Microsoft JhengHei" pitchFamily="34" charset="-120"/>
               </a:rPr>
-              <a:t>三重組30%客觀反應率。</a:t>
+              <a:t>Atezolizumab-bevacizumab降低晚期HCC。</a:t>
             </a:r>
             <a:endParaRPr lang="en-US" sz="1800" dirty="0"/>
           </a:p>
@@ -5446,7 +5285,49 @@
                 <a:ea typeface="Microsoft JhengHei" pitchFamily="34" charset="-122"/>
                 <a:cs typeface="Microsoft JhengHei" pitchFamily="34" charset="-120"/>
               </a:rPr>
-              <a:t>嚴重不良事件發生率高。</a:t>
+              <a:t>26%患者達到移植資格。</a:t>
+            </a:r>
+            <a:endParaRPr lang="en-US" sz="1800" dirty="0"/>
+          </a:p>
+          <a:p>
+            <a:pPr marL="342900" indent="-342900">
+              <a:spcAft>
+                <a:spcPts val="800"/>
+              </a:spcAft>
+              <a:buSzPct val="100000"/>
+              <a:buChar char="•"/>
+            </a:pPr>
+            <a:r>
+              <a:rPr lang="en-US" sz="1800" dirty="0">
+                <a:solidFill>
+                  <a:srgbClr val="333333"/>
+                </a:solidFill>
+                <a:latin typeface="Microsoft JhengHei" pitchFamily="34" charset="0"/>
+                <a:ea typeface="Microsoft JhengHei" pitchFamily="34" charset="-122"/>
+                <a:cs typeface="Microsoft JhengHei" pitchFamily="34" charset="-120"/>
+              </a:rPr>
+              <a:t>兩年生存率表現良好。</a:t>
+            </a:r>
+            <a:endParaRPr lang="en-US" sz="1800" dirty="0"/>
+          </a:p>
+          <a:p>
+            <a:pPr marL="342900" indent="-342900">
+              <a:spcAft>
+                <a:spcPts val="800"/>
+              </a:spcAft>
+              <a:buSzPct val="100000"/>
+              <a:buChar char="•"/>
+            </a:pPr>
+            <a:r>
+              <a:rPr lang="en-US" sz="1800" dirty="0">
+                <a:solidFill>
+                  <a:srgbClr val="333333"/>
+                </a:solidFill>
+                <a:latin typeface="Microsoft JhengHei" pitchFamily="34" charset="0"/>
+                <a:ea typeface="Microsoft JhengHei" pitchFamily="34" charset="-122"/>
+                <a:cs typeface="Microsoft JhengHei" pitchFamily="34" charset="-120"/>
+              </a:rPr>
+              <a:t>免疫監測關聯腫瘤反應與排斥。</a:t>
             </a:r>
             <a:endParaRPr lang="en-US" sz="1800" dirty="0"/>
           </a:p>
@@ -5482,7 +5363,7 @@
                   <a:srgbClr val="888888"/>
                 </a:solidFill>
               </a:rPr>
-              <a:t>Merle Philippe, Blanc Jean-Frederic, Le Malicot Karine et al.. The lancet. Gastroenterology &amp; hepatology. 2026-06-22 DOI: 10.1016/S2468-1253(26)00115-9</a:t>
+              <a:t>Bhoori Sherrie, Rivoltini Licia, Pinato David J et al.. Journal of hepatology. 2026-06-15 DOI: 10.1016/j.jhep.2026.02.019</a:t>
             </a:r>
             <a:endParaRPr lang="en-US" sz="800" dirty="0"/>
           </a:p>
@@ -5682,7 +5563,7 @@
                   </a:extLst>
                 </a:hlinkClick>
               </a:rPr>
-              <a:t>Targeting NEK9 synergises with immunotherapy in hepatocellular carcinoma by remodelling the immunosuppressive microenvironment.</a:t>
+              <a:t>Outcomes of Patients With Hepatocellular Carcinoma Treated With Durvalumab Plus Tremelimumab in Real-World Clinical Practice Who Met or Did Not Meet the Inclusion Criteria for the Phase 3 HIMALAYA Trial.</a:t>
             </a:r>
             <a:endParaRPr lang="en-US" sz="2400" dirty="0"/>
           </a:p>
@@ -5718,7 +5599,7 @@
                   <a:srgbClr val="888888"/>
                 </a:solidFill>
               </a:rPr>
-              <a:t>Gut  ·  IF 24.5  ·  Basic Research  ·  🌏 Asia</a:t>
+              <a:t>Journal of gastroenterology and hepatology  ·  RCT Phase 3  ·  🌏 Asia</a:t>
             </a:r>
             <a:endParaRPr lang="en-US" sz="1000" dirty="0"/>
           </a:p>
@@ -5761,7 +5642,7 @@
                 <a:ea typeface="Microsoft JhengHei" pitchFamily="34" charset="-122"/>
                 <a:cs typeface="Microsoft JhengHei" pitchFamily="34" charset="-120"/>
               </a:rPr>
-              <a:t>NEK9在HCC中上調，與預後不良相關。</a:t>
+              <a:t>研究HCC患者接受Dur/Tre治療</a:t>
             </a:r>
             <a:endParaRPr lang="en-US" sz="1800" dirty="0"/>
           </a:p>
@@ -5782,7 +5663,7 @@
                 <a:ea typeface="Microsoft JhengHei" pitchFamily="34" charset="-122"/>
                 <a:cs typeface="Microsoft JhengHei" pitchFamily="34" charset="-120"/>
               </a:rPr>
-              <a:t>抑制NEK9可逆轉免疫抑制TME。</a:t>
+              <a:t>412名患者來自30家機構</a:t>
             </a:r>
             <a:endParaRPr lang="en-US" sz="1800" dirty="0"/>
           </a:p>
@@ -5803,7 +5684,49 @@
                 <a:ea typeface="Microsoft JhengHei" pitchFamily="34" charset="-122"/>
                 <a:cs typeface="Microsoft JhengHei" pitchFamily="34" charset="-120"/>
               </a:rPr>
-              <a:t>NEK9抑制劑增強抗PD-L1療效。</a:t>
+              <a:t>HIMALAYA組PFS和OS較佳</a:t>
+            </a:r>
+            <a:endParaRPr lang="en-US" sz="1800" dirty="0"/>
+          </a:p>
+          <a:p>
+            <a:pPr marL="342900" indent="-342900">
+              <a:spcAft>
+                <a:spcPts val="800"/>
+              </a:spcAft>
+              <a:buSzPct val="100000"/>
+              <a:buChar char="•"/>
+            </a:pPr>
+            <a:r>
+              <a:rPr lang="en-US" sz="1800" dirty="0">
+                <a:solidFill>
+                  <a:srgbClr val="333333"/>
+                </a:solidFill>
+                <a:latin typeface="Microsoft JhengHei" pitchFamily="34" charset="0"/>
+                <a:ea typeface="Microsoft JhengHei" pitchFamily="34" charset="-122"/>
+                <a:cs typeface="Microsoft JhengHei" pitchFamily="34" charset="-120"/>
+              </a:rPr>
+              <a:t>獨立預測因子包括BMI和門靜脈侵犯</a:t>
+            </a:r>
+            <a:endParaRPr lang="en-US" sz="1800" dirty="0"/>
+          </a:p>
+          <a:p>
+            <a:pPr marL="342900" indent="-342900">
+              <a:spcAft>
+                <a:spcPts val="800"/>
+              </a:spcAft>
+              <a:buSzPct val="100000"/>
+              <a:buChar char="•"/>
+            </a:pPr>
+            <a:r>
+              <a:rPr lang="en-US" sz="1800" dirty="0">
+                <a:solidFill>
+                  <a:srgbClr val="333333"/>
+                </a:solidFill>
+                <a:latin typeface="Microsoft JhengHei" pitchFamily="34" charset="0"/>
+                <a:ea typeface="Microsoft JhengHei" pitchFamily="34" charset="-122"/>
+                <a:cs typeface="Microsoft JhengHei" pitchFamily="34" charset="-120"/>
+              </a:rPr>
+              <a:t>內分泌功能障礙在HIMALAYA組較常見</a:t>
             </a:r>
             <a:endParaRPr lang="en-US" sz="1800" dirty="0"/>
           </a:p>
@@ -5839,7 +5762,7 @@
                   <a:srgbClr val="888888"/>
                 </a:solidFill>
               </a:rPr>
-              <a:t>Lu Guofang, Du Rui, Wan Yue et al.. Gut. 2026-06-25 DOI: 10.1136/gutjnl-2026-338449</a:t>
+              <a:t>Matono Tomomitsu, Tada Toshifumi, Hiraoka Atsushi et al.. Journal of gastroenterology and hepatology. 2026-07-02 DOI: 10.1111/jgh.70422</a:t>
             </a:r>
             <a:endParaRPr lang="en-US" sz="800" dirty="0"/>
           </a:p>
@@ -6039,7 +5962,7 @@
                   </a:extLst>
                 </a:hlinkClick>
               </a:rPr>
-              <a:t>When Lipids Silence Immunity: Dendritic Cell Death in MASLD-associated HCC.</a:t>
+              <a:t>Camrelizumab, a patinib and radiotherapy in locally advanced, unresectable hepatocellular carcinoma: a phase 2 study.</a:t>
             </a:r>
             <a:endParaRPr lang="en-US" sz="2400" dirty="0"/>
           </a:p>
@@ -6075,7 +5998,7 @@
                   <a:srgbClr val="888888"/>
                 </a:solidFill>
               </a:rPr>
-              <a:t>Journal of hepatology  ·  IF 25.7</a:t>
+              <a:t>Clinical cancer research : an official journal of the American Association for Cancer Research  ·  IF 11.5  ·  RCT Phase 2</a:t>
             </a:r>
             <a:endParaRPr lang="en-US" sz="1000" dirty="0"/>
           </a:p>
@@ -6118,7 +6041,7 @@
                 <a:ea typeface="Microsoft JhengHei" pitchFamily="34" charset="-122"/>
                 <a:cs typeface="Microsoft JhengHei" pitchFamily="34" charset="-120"/>
               </a:rPr>
-              <a:t>脂質可抑制免疫反應。</a:t>
+              <a:t>研究評估camrelizumab、apatinib及IMRT</a:t>
             </a:r>
             <a:endParaRPr lang="en-US" sz="1800" dirty="0"/>
           </a:p>
@@ -6139,7 +6062,7 @@
                 <a:ea typeface="Microsoft JhengHei" pitchFamily="34" charset="-122"/>
                 <a:cs typeface="Microsoft JhengHei" pitchFamily="34" charset="-120"/>
               </a:rPr>
-              <a:t>MASLD中觀察到樹突細胞死亡。</a:t>
+              <a:t>客觀反應率達84.1%</a:t>
             </a:r>
             <a:endParaRPr lang="en-US" sz="1800" dirty="0"/>
           </a:p>
@@ -6160,7 +6083,49 @@
                 <a:ea typeface="Microsoft JhengHei" pitchFamily="34" charset="-122"/>
                 <a:cs typeface="Microsoft JhengHei" pitchFamily="34" charset="-120"/>
               </a:rPr>
-              <a:t>肝癌進展與脂質代謝相關。</a:t>
+              <a:t>中位PFS為13.8個月</a:t>
+            </a:r>
+            <a:endParaRPr lang="en-US" sz="1800" dirty="0"/>
+          </a:p>
+          <a:p>
+            <a:pPr marL="342900" indent="-342900">
+              <a:spcAft>
+                <a:spcPts val="800"/>
+              </a:spcAft>
+              <a:buSzPct val="100000"/>
+              <a:buChar char="•"/>
+            </a:pPr>
+            <a:r>
+              <a:rPr lang="en-US" sz="1800" dirty="0">
+                <a:solidFill>
+                  <a:srgbClr val="333333"/>
+                </a:solidFill>
+                <a:latin typeface="Microsoft JhengHei" pitchFamily="34" charset="0"/>
+                <a:ea typeface="Microsoft JhengHei" pitchFamily="34" charset="-122"/>
+                <a:cs typeface="Microsoft JhengHei" pitchFamily="34" charset="-120"/>
+              </a:rPr>
+              <a:t>81.8%患者出現3-4級不良事件</a:t>
+            </a:r>
+            <a:endParaRPr lang="en-US" sz="1800" dirty="0"/>
+          </a:p>
+          <a:p>
+            <a:pPr marL="342900" indent="-342900">
+              <a:spcAft>
+                <a:spcPts val="800"/>
+              </a:spcAft>
+              <a:buSzPct val="100000"/>
+              <a:buChar char="•"/>
+            </a:pPr>
+            <a:r>
+              <a:rPr lang="en-US" sz="1800" dirty="0">
+                <a:solidFill>
+                  <a:srgbClr val="333333"/>
+                </a:solidFill>
+                <a:latin typeface="Microsoft JhengHei" pitchFamily="34" charset="0"/>
+                <a:ea typeface="Microsoft JhengHei" pitchFamily="34" charset="-122"/>
+                <a:cs typeface="Microsoft JhengHei" pitchFamily="34" charset="-120"/>
+              </a:rPr>
+              <a:t>TP53突變與不良預後相關</a:t>
             </a:r>
             <a:endParaRPr lang="en-US" sz="1800" dirty="0"/>
           </a:p>
@@ -6196,7 +6161,7 @@
                   <a:srgbClr val="888888"/>
                 </a:solidFill>
               </a:rPr>
-              <a:t>Kocheise Lorenz, Schneider Kai Markus. Journal of hepatology. 2026-06-24 DOI: 10.1016/j.jhep.2026.06.008</a:t>
+              <a:t>Wang Hongzhi, Wang Kun, Zheng Xuan et al.. Clinical cancer research : an official journal of the American Association for Cancer Research. 2026-06-30 DOI: 10.1158/1078-0432.CCR-26-1352</a:t>
             </a:r>
             <a:endParaRPr lang="en-US" sz="800" dirty="0"/>
           </a:p>
@@ -6396,7 +6361,7 @@
                   </a:extLst>
                 </a:hlinkClick>
               </a:rPr>
-              <a:t>Pembrolizumab and stereotactic body radiotherapy combined in advanced hepatocellular carcinoma post sorafenib–A phase II trial (PEMRAD)</a:t>
+              <a:t>Neoadjuvant Danburstotug (IMC-001) therapy in gastric, esophageal, and hepatocellular carcinoma: the NeoChance phase II study.</a:t>
             </a:r>
             <a:endParaRPr lang="en-US" sz="2400" dirty="0"/>
           </a:p>
@@ -6432,7 +6397,7 @@
                   <a:srgbClr val="888888"/>
                 </a:solidFill>
               </a:rPr>
-              <a:t>JHEP Reports  ·  IF 7.8  ·  RCT Phase 2</a:t>
+              <a:t>NPJ precision oncology  ·  RCT Phase 2  ·  🌏 Asia</a:t>
             </a:r>
             <a:endParaRPr lang="en-US" sz="1000" dirty="0"/>
           </a:p>
@@ -6475,7 +6440,7 @@
                 <a:ea typeface="Microsoft JhengHei" pitchFamily="34" charset="-122"/>
                 <a:cs typeface="Microsoft JhengHei" pitchFamily="34" charset="-120"/>
               </a:rPr>
-              <a:t>結合 pembrolizumab 和 SBRT</a:t>
+              <a:t>評估neoadjuvant治療danburstotug (IMC-001)。</a:t>
             </a:r>
             <a:endParaRPr lang="en-US" sz="1800" dirty="0"/>
           </a:p>
@@ -6496,7 +6461,7 @@
                 <a:ea typeface="Microsoft JhengHei" pitchFamily="34" charset="-122"/>
                 <a:cs typeface="Microsoft JhengHei" pitchFamily="34" charset="-120"/>
               </a:rPr>
-              <a:t>針對晚期 HCC 的二期試驗</a:t>
+              <a:t>主要終點未達成；MPR 4.2%患者。</a:t>
             </a:r>
             <a:endParaRPr lang="en-US" sz="1800" dirty="0"/>
           </a:p>
@@ -6517,7 +6482,7 @@
                 <a:ea typeface="Microsoft JhengHei" pitchFamily="34" charset="-122"/>
                 <a:cs typeface="Microsoft JhengHei" pitchFamily="34" charset="-120"/>
               </a:rPr>
-              <a:t>評估索拉非尼後療效</a:t>
+              <a:t>病理回歸在22.9%患者中觀察到。</a:t>
             </a:r>
             <a:endParaRPr lang="en-US" sz="1800" dirty="0"/>
           </a:p>
@@ -6538,7 +6503,7 @@
                 <a:ea typeface="Microsoft JhengHei" pitchFamily="34" charset="-122"/>
                 <a:cs typeface="Microsoft JhengHei" pitchFamily="34" charset="-120"/>
               </a:rPr>
-              <a:t>觀察到增強的免疫反應</a:t>
+              <a:t>治療耐受性良好，副作用少。</a:t>
             </a:r>
             <a:endParaRPr lang="en-US" sz="1800" dirty="0"/>
           </a:p>
@@ -6559,7 +6524,7 @@
                 <a:ea typeface="Microsoft JhengHei" pitchFamily="34" charset="-122"/>
                 <a:cs typeface="Microsoft JhengHei" pitchFamily="34" charset="-120"/>
               </a:rPr>
-              <a:t>改善患者預後的潛力</a:t>
+              <a:t>免疫剖析顯示癌症特異性重塑。</a:t>
             </a:r>
             <a:endParaRPr lang="en-US" sz="1800" dirty="0"/>
           </a:p>
@@ -6595,7 +6560,7 @@
                   <a:srgbClr val="888888"/>
                 </a:solidFill>
               </a:rPr>
-              <a:t>GM O'Kane, A Mesci, RW Jang. JHEP Reports. 2026</a:t>
+              <a:t>Bang Yeong Hak, Kang Dawon, Lee Seungwon et al.. NPJ precision oncology. 2026-07-03 DOI: 10.1038/s41698-026-01571-2</a:t>
             </a:r>
             <a:endParaRPr lang="en-US" sz="800" dirty="0"/>
           </a:p>
@@ -6795,7 +6760,7 @@
                   </a:extLst>
                 </a:hlinkClick>
               </a:rPr>
-              <a:t>Stereotactic Body Radiation Therapy Combined With Immune Checkpoint Inhibitors in Unresectable Hepatocellular Carcinoma: A Comprehensive Single-Arm Meta-Analysis Approach.</a:t>
+              <a:t>Pembrolizumab and stereotactic body radiotherapy combined in advanced hepatocellular carcinoma post sorafenib–A phase II trial (PEMRAD)</a:t>
             </a:r>
             <a:endParaRPr lang="en-US" sz="2400" dirty="0"/>
           </a:p>
@@ -6831,7 +6796,7 @@
                   <a:srgbClr val="888888"/>
                 </a:solidFill>
               </a:rPr>
-              <a:t>American journal of clinical oncology  ·  RCT Phase 2</a:t>
+              <a:t>JHEP Reports  ·  IF 7.8  ·  RCT Phase 2</a:t>
             </a:r>
             <a:endParaRPr lang="en-US" sz="1000" dirty="0"/>
           </a:p>
@@ -6874,7 +6839,7 @@
                 <a:ea typeface="Microsoft JhengHei" pitchFamily="34" charset="-122"/>
                 <a:cs typeface="Microsoft JhengHei" pitchFamily="34" charset="-120"/>
               </a:rPr>
-              <a:t>SBRT 與 ICI 結合顯示潛力</a:t>
+              <a:t>結合 pembrolizumab 和 SBRT</a:t>
             </a:r>
             <a:endParaRPr lang="en-US" sz="1800" dirty="0"/>
           </a:p>
@@ -6895,7 +6860,7 @@
                 <a:ea typeface="Microsoft JhengHei" pitchFamily="34" charset="-122"/>
                 <a:cs typeface="Microsoft JhengHei" pitchFamily="34" charset="-120"/>
               </a:rPr>
-              <a:t>中位 OS 為 22.7 個月</a:t>
+              <a:t>針對晚期 HCC 的二期試驗</a:t>
             </a:r>
             <a:endParaRPr lang="en-US" sz="1800" dirty="0"/>
           </a:p>
@@ -6916,49 +6881,7 @@
                 <a:ea typeface="Microsoft JhengHei" pitchFamily="34" charset="-122"/>
                 <a:cs typeface="Microsoft JhengHei" pitchFamily="34" charset="-120"/>
               </a:rPr>
-              <a:t>中位 PFS 為 7.9 個月</a:t>
-            </a:r>
-            <a:endParaRPr lang="en-US" sz="1800" dirty="0"/>
-          </a:p>
-          <a:p>
-            <a:pPr marL="342900" indent="-342900">
-              <a:spcAft>
-                <a:spcPts val="800"/>
-              </a:spcAft>
-              <a:buSzPct val="100000"/>
-              <a:buChar char="•"/>
-            </a:pPr>
-            <a:r>
-              <a:rPr lang="en-US" sz="1800" dirty="0">
-                <a:solidFill>
-                  <a:srgbClr val="333333"/>
-                </a:solidFill>
-                <a:latin typeface="Microsoft JhengHei" pitchFamily="34" charset="0"/>
-                <a:ea typeface="Microsoft JhengHei" pitchFamily="34" charset="-122"/>
-                <a:cs typeface="Microsoft JhengHei" pitchFamily="34" charset="-120"/>
-              </a:rPr>
-              <a:t>DCR 為 93.4%，ORR 為 56.3%</a:t>
-            </a:r>
-            <a:endParaRPr lang="en-US" sz="1800" dirty="0"/>
-          </a:p>
-          <a:p>
-            <a:pPr marL="342900" indent="-342900">
-              <a:spcAft>
-                <a:spcPts val="800"/>
-              </a:spcAft>
-              <a:buSzPct val="100000"/>
-              <a:buChar char="•"/>
-            </a:pPr>
-            <a:r>
-              <a:rPr lang="en-US" sz="1800" dirty="0">
-                <a:solidFill>
-                  <a:srgbClr val="333333"/>
-                </a:solidFill>
-                <a:latin typeface="Microsoft JhengHei" pitchFamily="34" charset="0"/>
-                <a:ea typeface="Microsoft JhengHei" pitchFamily="34" charset="-122"/>
-                <a:cs typeface="Microsoft JhengHei" pitchFamily="34" charset="-120"/>
-              </a:rPr>
-              <a:t>可控的 3 級以上毒性為 17.5%</a:t>
+              <a:t>評估索拉非尼後的療效</a:t>
             </a:r>
             <a:endParaRPr lang="en-US" sz="1800" dirty="0"/>
           </a:p>
@@ -6994,7 +6917,7 @@
                   <a:srgbClr val="888888"/>
                 </a:solidFill>
               </a:rPr>
-              <a:t>Dreyer Justin, Narasimhan Raksha M, Dias Neto Ana R et al.. American journal of clinical oncology. 2026-06-25 DOI: 10.1097/COC.0000000000001341</a:t>
+              <a:t>GM O'Kane, A Mesci, RW Jang. JHEP Reports. 2026</a:t>
             </a:r>
             <a:endParaRPr lang="en-US" sz="800" dirty="0"/>
           </a:p>
@@ -7194,7 +7117,7 @@
                   </a:extLst>
                 </a:hlinkClick>
               </a:rPr>
-              <a:t>Evaluating pegenzileukin (SAR444245/THOR-707) in combination with pembrolizumab or cetuximab in advanced metastatic gastrointestinal cancer: the PEGATHOR phase 2 study.</a:t>
+              <a:t>Complementary evaluation of phase III immunotherapy trials in advanced HCC using the survival-inferred fragility index.</a:t>
             </a:r>
             <a:endParaRPr lang="en-US" sz="2400" dirty="0"/>
           </a:p>
@@ -7230,7 +7153,7 @@
                   <a:srgbClr val="888888"/>
                 </a:solidFill>
               </a:rPr>
-              <a:t>Investigational new drugs  ·  RCT Phase 2</a:t>
+              <a:t>Digestive and liver disease : official journal of the Italian Society of Gastroenterology and the Italian Association for the Study of the Liver  ·  RCT Phase 3</a:t>
             </a:r>
             <a:endParaRPr lang="en-US" sz="1000" dirty="0"/>
           </a:p>
@@ -7273,7 +7196,7 @@
                 <a:ea typeface="Microsoft JhengHei" pitchFamily="34" charset="-122"/>
                 <a:cs typeface="Microsoft JhengHei" pitchFamily="34" charset="-120"/>
               </a:rPr>
-              <a:t>Pegenziukin 擴展效應 T 細胞和 NK 細胞。</a:t>
+              <a:t>HCC治療逐步轉向ICIs和TKIs。</a:t>
             </a:r>
             <a:endParaRPr lang="en-US" sz="1800" dirty="0"/>
           </a:p>
@@ -7294,7 +7217,7 @@
                 <a:ea typeface="Microsoft JhengHei" pitchFamily="34" charset="-122"/>
                 <a:cs typeface="Microsoft JhengHei" pitchFamily="34" charset="-120"/>
               </a:rPr>
-              <a:t>研究涉及 138 名晚期 GI 癌患者。</a:t>
+              <a:t>SIFI量化試驗結果穩定性。</a:t>
             </a:r>
             <a:endParaRPr lang="en-US" sz="1800" dirty="0"/>
           </a:p>
@@ -7315,7 +7238,7 @@
                 <a:ea typeface="Microsoft JhengHei" pitchFamily="34" charset="-122"/>
                 <a:cs typeface="Microsoft JhengHei" pitchFamily="34" charset="-120"/>
               </a:rPr>
-              <a:t>客觀反應率在各組間不同。</a:t>
+              <a:t>六項III期試驗進行SIFI分析。</a:t>
             </a:r>
             <a:endParaRPr lang="en-US" sz="1800" dirty="0"/>
           </a:p>
@@ -7336,7 +7259,7 @@
                 <a:ea typeface="Microsoft JhengHei" pitchFamily="34" charset="-122"/>
                 <a:cs typeface="Microsoft JhengHei" pitchFamily="34" charset="-120"/>
               </a:rPr>
-              <a:t>中位無進展生存期為 1.9-2.1 個月。</a:t>
+              <a:t>中位SIFI顯示試驗穩健性低。</a:t>
             </a:r>
             <a:endParaRPr lang="en-US" sz="1800" dirty="0"/>
           </a:p>
@@ -7357,7 +7280,7 @@
                 <a:ea typeface="Microsoft JhengHei" pitchFamily="34" charset="-122"/>
                 <a:cs typeface="Microsoft JhengHei" pitchFamily="34" charset="-120"/>
               </a:rPr>
-              <a:t>安全性可控，常見不良事件。</a:t>
+              <a:t>亞洲試驗顯示較高穩定性。</a:t>
             </a:r>
             <a:endParaRPr lang="en-US" sz="1800" dirty="0"/>
           </a:p>
@@ -7393,7 +7316,7 @@
                   <a:srgbClr val="888888"/>
                 </a:solidFill>
               </a:rPr>
-              <a:t>Harris William P, Garc&amp;#xed;a-Alfonso Pilar, Metges Jean Phillipe et al.. Investigational new drugs. 2026-06-22 DOI: 10.1007/s10637-026-01622-2</a:t>
+              <a:t>Dalbeni A, Vicardi M, Stefanini B et al.. Digestive and liver disease : official journal of the Italian Society of Gastroenterology and the Italian Association for the Study of the Liver. 2026-06-16 DOI: 10.1016/j.dld.2026.04.013</a:t>
             </a:r>
             <a:endParaRPr lang="en-US" sz="800" dirty="0"/>
           </a:p>
@@ -7593,7 +7516,7 @@
                   </a:extLst>
                 </a:hlinkClick>
               </a:rPr>
-              <a:t>… plus transarterial chemoembolization and PD-1 inhibitors as conversion therapies for unresectable intermediate-advanced hepatocellular carcinoma: a phase 2 trial …</a:t>
+              <a:t>Systemic immune profiling in hepatocellular carcinoma: navigating etiological heterogeneity and selection bias.</a:t>
             </a:r>
             <a:endParaRPr lang="en-US" sz="2400" dirty="0"/>
           </a:p>
@@ -7629,7 +7552,7 @@
                   <a:srgbClr val="888888"/>
                 </a:solidFill>
               </a:rPr>
-              <a:t>… and Targeted Therapy  ·  RCT Phase 2</a:t>
+              <a:t>Journal for immunotherapy of cancer  ·  IF 10.9  ·  Prospective Study</a:t>
             </a:r>
             <a:endParaRPr lang="en-US" sz="1000" dirty="0"/>
           </a:p>
@@ -7672,7 +7595,7 @@
                 <a:ea typeface="Microsoft JhengHei" pitchFamily="34" charset="-122"/>
                 <a:cs typeface="Microsoft JhengHei" pitchFamily="34" charset="-120"/>
               </a:rPr>
-              <a:t>針對不可切除HCC的組合療法</a:t>
+              <a:t>對Nishio等研究的評論</a:t>
             </a:r>
             <a:endParaRPr lang="en-US" sz="1800" dirty="0"/>
           </a:p>
@@ -7693,7 +7616,7 @@
                 <a:ea typeface="Microsoft JhengHei" pitchFamily="34" charset="-122"/>
                 <a:cs typeface="Microsoft JhengHei" pitchFamily="34" charset="-120"/>
               </a:rPr>
-              <a:t>經動脈化療栓塞加PD-1抑制劑</a:t>
+              <a:t>識別HCC的循環免疫生物標記</a:t>
             </a:r>
             <a:endParaRPr lang="en-US" sz="1800" dirty="0"/>
           </a:p>
@@ -7714,7 +7637,49 @@
                 <a:ea typeface="Microsoft JhengHei" pitchFamily="34" charset="-122"/>
                 <a:cs typeface="Microsoft JhengHei" pitchFamily="34" charset="-120"/>
               </a:rPr>
-              <a:t>第二期試驗顯示良好結果</a:t>
+              <a:t>病因異質性可能影響免疫特徵</a:t>
+            </a:r>
+            <a:endParaRPr lang="en-US" sz="1800" dirty="0"/>
+          </a:p>
+          <a:p>
+            <a:pPr marL="342900" indent="-342900">
+              <a:spcAft>
+                <a:spcPts val="800"/>
+              </a:spcAft>
+              <a:buSzPct val="100000"/>
+              <a:buChar char="•"/>
+            </a:pPr>
+            <a:r>
+              <a:rPr lang="en-US" sz="1800" dirty="0">
+                <a:solidFill>
+                  <a:srgbClr val="333333"/>
+                </a:solidFill>
+                <a:latin typeface="Microsoft JhengHei" pitchFamily="34" charset="0"/>
+                <a:ea typeface="Microsoft JhengHei" pitchFamily="34" charset="-122"/>
+                <a:cs typeface="Microsoft JhengHei" pitchFamily="34" charset="-120"/>
+              </a:rPr>
+              <a:t>選擇偏差影響研究設計和結果</a:t>
+            </a:r>
+            <a:endParaRPr lang="en-US" sz="1800" dirty="0"/>
+          </a:p>
+          <a:p>
+            <a:pPr marL="342900" indent="-342900">
+              <a:spcAft>
+                <a:spcPts val="800"/>
+              </a:spcAft>
+              <a:buSzPct val="100000"/>
+              <a:buChar char="•"/>
+            </a:pPr>
+            <a:r>
+              <a:rPr lang="en-US" sz="1800" dirty="0">
+                <a:solidFill>
+                  <a:srgbClr val="333333"/>
+                </a:solidFill>
+                <a:latin typeface="Microsoft JhengHei" pitchFamily="34" charset="0"/>
+                <a:ea typeface="Microsoft JhengHei" pitchFamily="34" charset="-122"/>
+                <a:cs typeface="Microsoft JhengHei" pitchFamily="34" charset="-120"/>
+              </a:rPr>
+              <a:t>需在前瞻性隊列中驗證</a:t>
             </a:r>
             <a:endParaRPr lang="en-US" sz="1800" dirty="0"/>
           </a:p>
@@ -7750,7 +7715,7 @@
                   <a:srgbClr val="888888"/>
                 </a:solidFill>
               </a:rPr>
-              <a:t>X Zhang, H Cai, W Peng. … and Targeted Therapy. 2026</a:t>
+              <a:t>Chen Rihui, Yang Xiaochuan. Journal for immunotherapy of cancer. 2026-07-01 DOI: 10.1136/jitc-2026-015777</a:t>
             </a:r>
             <a:endParaRPr lang="en-US" sz="800" dirty="0"/>
           </a:p>

--- a/docs/digest-zh.pptx
+++ b/docs/digest-zh.pptx
@@ -2269,7 +2269,7 @@
                   <a:srgbClr val="888888"/>
                 </a:solidFill>
               </a:rPr>
-              <a:t>2026-06-29 — 2026-07-06</a:t>
+              <a:t>2026-07-06 — 2026-07-13</a:t>
             </a:r>
             <a:endParaRPr lang="en-US" sz="1400" dirty="0"/>
           </a:p>
@@ -2460,7 +2460,7 @@
                   </a:extLst>
                 </a:hlinkClick>
               </a:rPr>
-              <a:t>Balloon-occluded Alternative Infusion of Fragmented Gelatin Particles of TACE for Hepatocellular Carcinoma Refractory to Atezolizumab-Bevacizumab.</a:t>
+              <a:t>The immunological paradox: immune checkpoint inhibitors in liver transplantation.</a:t>
             </a:r>
             <a:endParaRPr lang="en-US" sz="2400" dirty="0"/>
           </a:p>
@@ -2496,7 +2496,7 @@
                   <a:srgbClr val="888888"/>
                 </a:solidFill>
               </a:rPr>
-              <a:t>Anticancer research  ·  Prospective Study  ·  🌏 Asia</a:t>
+              <a:t>International journal of clinical oncology  ·  Review  ·  🌏 Asia</a:t>
             </a:r>
             <a:endParaRPr lang="en-US" sz="1000" dirty="0"/>
           </a:p>
@@ -2539,7 +2539,7 @@
                 <a:ea typeface="Microsoft JhengHei" pitchFamily="34" charset="-122"/>
                 <a:cs typeface="Microsoft JhengHei" pitchFamily="34" charset="-120"/>
               </a:rPr>
-              <a:t>研究BOAI-TACE對HCC患者的效果</a:t>
+              <a:t>ICIs 改變 HCC 治療格局。</a:t>
             </a:r>
             <a:endParaRPr lang="en-US" sz="1800" dirty="0"/>
           </a:p>
@@ -2560,7 +2560,7 @@
                 <a:ea typeface="Microsoft JhengHei" pitchFamily="34" charset="-122"/>
                 <a:cs typeface="Microsoft JhengHei" pitchFamily="34" charset="-120"/>
               </a:rPr>
-              <a:t>主要終點：8週的ORR</a:t>
+              <a:t>LT 需要免疫耐受以成功。</a:t>
             </a:r>
             <a:endParaRPr lang="en-US" sz="1800" dirty="0"/>
           </a:p>
@@ -2581,7 +2581,7 @@
                 <a:ea typeface="Microsoft JhengHei" pitchFamily="34" charset="-122"/>
                 <a:cs typeface="Microsoft JhengHei" pitchFamily="34" charset="-120"/>
               </a:rPr>
-              <a:t>治療患者ORR達60%</a:t>
+              <a:t>ICIs 破壞耐受，增強免疫力。</a:t>
             </a:r>
             <a:endParaRPr lang="en-US" sz="1800" dirty="0"/>
           </a:p>
@@ -2602,7 +2602,7 @@
                 <a:ea typeface="Microsoft JhengHei" pitchFamily="34" charset="-122"/>
                 <a:cs typeface="Microsoft JhengHei" pitchFamily="34" charset="-120"/>
               </a:rPr>
-              <a:t>監測不良事件以評估安全性</a:t>
+              <a:t>新興生物標記預測 ICI 拒絕。</a:t>
             </a:r>
             <a:endParaRPr lang="en-US" sz="1800" dirty="0"/>
           </a:p>
@@ -2623,7 +2623,7 @@
                 <a:ea typeface="Microsoft JhengHei" pitchFamily="34" charset="-122"/>
                 <a:cs typeface="Microsoft JhengHei" pitchFamily="34" charset="-120"/>
               </a:rPr>
-              <a:t>肝功能無顯著變化</a:t>
+              <a:t>活體捐贈 LT 的倫理問題。</a:t>
             </a:r>
             <a:endParaRPr lang="en-US" sz="1800" dirty="0"/>
           </a:p>
@@ -2659,7 +2659,7 @@
                   <a:srgbClr val="888888"/>
                 </a:solidFill>
               </a:rPr>
-              <a:t>Hasegawa Naoyuki, Hoshiai Sodai, Yamada Takeshi et al.. Anticancer research. 2026-06-29 DOI: 10.21873/anticanres.18251</a:t>
+              <a:t>Ito Takashi, Okumura Shinya, Sakamoto Katsunori et al.. International journal of clinical oncology. 2026-07-11 DOI: 10.1007/s10147-026-03091-2</a:t>
             </a:r>
             <a:endParaRPr lang="en-US" sz="800" dirty="0"/>
           </a:p>
@@ -2859,7 +2859,7 @@
                   </a:extLst>
                 </a:hlinkClick>
               </a:rPr>
-              <a:t>Anti-angiogenic therapy combined with immune checkpoint blockade mediates CCR7 + CD8 + T-cell entry into HCC through high endothelial venules.</a:t>
+              <a:t>Comparative Effectiveness and Safety of Atezolizumab-Bevacizumab and Durvalumab-Tremelimumab as First-Line Systemic Therapy for Hepatocellular Carcinoma: A Real-World Study.</a:t>
             </a:r>
             <a:endParaRPr lang="en-US" sz="2400" dirty="0"/>
           </a:p>
@@ -2895,7 +2895,7 @@
                   <a:srgbClr val="888888"/>
                 </a:solidFill>
               </a:rPr>
-              <a:t>Hepatology (Baltimore, Md.)  ·  IF 12.9  ·  Basic Research</a:t>
+              <a:t>Journal of gastroenterology and hepatology  ·  Retrospective Study  ·  🌏 Asia</a:t>
             </a:r>
             <a:endParaRPr lang="en-US" sz="1000" dirty="0"/>
           </a:p>
@@ -2938,7 +2938,7 @@
                 <a:ea typeface="Microsoft JhengHei" pitchFamily="34" charset="-122"/>
                 <a:cs typeface="Microsoft JhengHei" pitchFamily="34" charset="-120"/>
               </a:rPr>
-              <a:t>抗血管生成治療增強T細胞浸潤</a:t>
+              <a:t>Atezo/Bev 和 Durva/Treme 為一線療法。</a:t>
             </a:r>
             <a:endParaRPr lang="en-US" sz="1800" dirty="0"/>
           </a:p>
@@ -2959,7 +2959,7 @@
                 <a:ea typeface="Microsoft JhengHei" pitchFamily="34" charset="-122"/>
                 <a:cs typeface="Microsoft JhengHei" pitchFamily="34" charset="-120"/>
               </a:rPr>
-              <a:t>高內皮靜脈促進淋巴細胞進入</a:t>
+              <a:t>研究納入3362名符合條件的HCC患者。</a:t>
             </a:r>
             <a:endParaRPr lang="en-US" sz="1800" dirty="0"/>
           </a:p>
@@ -2980,7 +2980,7 @@
                 <a:ea typeface="Microsoft JhengHei" pitchFamily="34" charset="-122"/>
                 <a:cs typeface="Microsoft JhengHei" pitchFamily="34" charset="-120"/>
               </a:rPr>
-              <a:t>CCR7 + CD8 + T細胞顯示細胞毒性潛力</a:t>
+              <a:t>總體生存率相似：14.6 vs. 17.3個月。</a:t>
             </a:r>
             <a:endParaRPr lang="en-US" sz="1800" dirty="0"/>
           </a:p>
@@ -3001,7 +3001,7 @@
                 <a:ea typeface="Microsoft JhengHei" pitchFamily="34" charset="-122"/>
                 <a:cs typeface="Microsoft JhengHei" pitchFamily="34" charset="-120"/>
               </a:rPr>
-              <a:t>VEGFC和NF-κB通路促進HEV形成</a:t>
+              <a:t>Atezo/Bev 需要治療的irAE較少。</a:t>
             </a:r>
             <a:endParaRPr lang="en-US" sz="1800" dirty="0"/>
           </a:p>
@@ -3022,7 +3022,7 @@
                 <a:ea typeface="Microsoft JhengHei" pitchFamily="34" charset="-122"/>
                 <a:cs typeface="Microsoft JhengHei" pitchFamily="34" charset="-120"/>
               </a:rPr>
-              <a:t>高HEV密度與生存率改善相關</a:t>
+              <a:t>安全性概況大致相似。</a:t>
             </a:r>
             <a:endParaRPr lang="en-US" sz="1800" dirty="0"/>
           </a:p>
@@ -3058,7 +3058,7 @@
                   <a:srgbClr val="888888"/>
                 </a:solidFill>
               </a:rPr>
-              <a:t>Tang Lu, Hou Yingwen, Di Tian et al.. Hepatology (Baltimore, Md.). 2026-06-16 DOI: 10.1097/HEP.0000000000001426</a:t>
+              <a:t>Lin Shu Hsien, Wu Jia-Ling, Tsai Ying-Nan et al.. Journal of gastroenterology and hepatology. 2026-07-10 DOI: 10.1111/jgh.70555</a:t>
             </a:r>
             <a:endParaRPr lang="en-US" sz="800" dirty="0"/>
           </a:p>
@@ -3258,7 +3258,7 @@
                   </a:extLst>
                 </a:hlinkClick>
               </a:rPr>
-              <a:t>Cancer-Associated Fibroblasts Promote Tumor Immunosuppression in Hepatocellular Carcinoma via the NNMT-ANGPTL4 Axis.</a:t>
+              <a:t>Survival Outcomes After Liver Resection for Barcelona Clinic Liver Cancer Stage B Hepatocellular Carcinoma Have Improved in the Contemporary Era.</a:t>
             </a:r>
             <a:endParaRPr lang="en-US" sz="2400" dirty="0"/>
           </a:p>
@@ -3294,7 +3294,7 @@
                   <a:srgbClr val="888888"/>
                 </a:solidFill>
               </a:rPr>
-              <a:t>Advanced science (Weinheim, Baden-Wurttemberg, Germany)  ·  Basic Research  ·  🌏 Asia</a:t>
+              <a:t>Hepatology research : the official journal of the Japan Society of Hepatology  ·  Retrospective Study  ·  🌏 Asia</a:t>
             </a:r>
             <a:endParaRPr lang="en-US" sz="1000" dirty="0"/>
           </a:p>
@@ -3337,7 +3337,7 @@
                 <a:ea typeface="Microsoft JhengHei" pitchFamily="34" charset="-122"/>
                 <a:cs typeface="Microsoft JhengHei" pitchFamily="34" charset="-120"/>
               </a:rPr>
-              <a:t>CAFs 驅動 HCC 免疫抑制。</a:t>
+              <a:t>BCLC-B HCC 切除術結果改善。</a:t>
             </a:r>
             <a:endParaRPr lang="en-US" sz="1800" dirty="0"/>
           </a:p>
@@ -3358,7 +3358,7 @@
                 <a:ea typeface="Microsoft JhengHei" pitchFamily="34" charset="-122"/>
                 <a:cs typeface="Microsoft JhengHei" pitchFamily="34" charset="-120"/>
               </a:rPr>
-              <a:t>NNMT 調控 ANGPTL4 分泌。</a:t>
+              <a:t>5年總生存率從44%提升至74%。</a:t>
             </a:r>
             <a:endParaRPr lang="en-US" sz="1800" dirty="0"/>
           </a:p>
@@ -3379,49 +3379,7 @@
                 <a:ea typeface="Microsoft JhengHei" pitchFamily="34" charset="-122"/>
                 <a:cs typeface="Microsoft JhengHei" pitchFamily="34" charset="-120"/>
               </a:rPr>
-              <a:t>ANGPTL4 增強腫瘤免疫逃逸。</a:t>
-            </a:r>
-            <a:endParaRPr lang="en-US" sz="1800" dirty="0"/>
-          </a:p>
-          <a:p>
-            <a:pPr marL="342900" indent="-342900">
-              <a:spcAft>
-                <a:spcPts val="800"/>
-              </a:spcAft>
-              <a:buSzPct val="100000"/>
-              <a:buChar char="•"/>
-            </a:pPr>
-            <a:r>
-              <a:rPr lang="en-US" sz="1800" dirty="0">
-                <a:solidFill>
-                  <a:srgbClr val="333333"/>
-                </a:solidFill>
-                <a:latin typeface="Microsoft JhengHei" pitchFamily="34" charset="0"/>
-                <a:ea typeface="Microsoft JhengHei" pitchFamily="34" charset="-122"/>
-                <a:cs typeface="Microsoft JhengHei" pitchFamily="34" charset="-120"/>
-              </a:rPr>
-              <a:t>靶向 NNMT-ANGPTL4 恢復 T 細胞活性。</a:t>
-            </a:r>
-            <a:endParaRPr lang="en-US" sz="1800" dirty="0"/>
-          </a:p>
-          <a:p>
-            <a:pPr marL="342900" indent="-342900">
-              <a:spcAft>
-                <a:spcPts val="800"/>
-              </a:spcAft>
-              <a:buSzPct val="100000"/>
-              <a:buChar char="•"/>
-            </a:pPr>
-            <a:r>
-              <a:rPr lang="en-US" sz="1800" dirty="0">
-                <a:solidFill>
-                  <a:srgbClr val="333333"/>
-                </a:solidFill>
-                <a:latin typeface="Microsoft JhengHei" pitchFamily="34" charset="0"/>
-                <a:ea typeface="Microsoft JhengHei" pitchFamily="34" charset="-122"/>
-                <a:cs typeface="Microsoft JhengHei" pitchFamily="34" charset="-120"/>
-              </a:rPr>
-              <a:t>聯合療法提升抗 PD-L1 效果。</a:t>
+              <a:t>復發後管理轉向新療法。</a:t>
             </a:r>
             <a:endParaRPr lang="en-US" sz="1800" dirty="0"/>
           </a:p>
@@ -3457,7 +3415,7 @@
                   <a:srgbClr val="888888"/>
                 </a:solidFill>
               </a:rPr>
-              <a:t>Lu Shounan, Ke Shanjia, Yu Hongjun et al.. Advanced science (Weinheim, Baden-Wurttemberg, Germany). 2026-07-03 DOI: 10.1002/advs.202521418</a:t>
+              <a:t>Yamamoto Yoichi, Asahi Yoh, Shichi Shunsuke et al.. Hepatology research : the official journal of the Japan Society of Hepatology. 2026-07-09 DOI: 10.1111/hepr.70240</a:t>
             </a:r>
             <a:endParaRPr lang="en-US" sz="800" dirty="0"/>
           </a:p>
@@ -3648,7 +3606,7 @@
                   <a:srgbClr val="FFFFFF"/>
                 </a:solidFill>
               </a:rPr>
-              <a:t>### 綜合啟示（Overall Insights）</a:t>
+              <a:t>### 綜合啟示 (Overall Insights)</a:t>
             </a:r>
             <a:endParaRPr lang="en-US" sz="1200" dirty="0"/>
           </a:p>
@@ -3674,7 +3632,7 @@
                   <a:srgbClr val="FFFFFF"/>
                 </a:solidFill>
               </a:rPr>
-              <a:t>1. **免疫治療的潛力**  </a:t>
+              <a:t>1. **免疫療法的潛力與挑戰**  </a:t>
             </a:r>
             <a:endParaRPr lang="en-US" sz="1200" dirty="0"/>
           </a:p>
@@ -3691,7 +3649,7 @@
                   <a:srgbClr val="FFFFFF"/>
                 </a:solidFill>
               </a:rPr>
-              <a:t>   Immunotherapy, particularly immune checkpoint inhibitors (ICIs), has shown promising results in downstaging intermediate and advanced hepatocellular carcinoma (HCC), potentially expanding eligibility for liver transplantation.  </a:t>
+              <a:t>   The integration of immune checkpoint inhibitors (ICIs) has revolutionized the treatment landscape for advanced hepatocellular carcinoma (HCC), yet challenges such as primary resistance and limited durability of responses remain significant hurdles.  </a:t>
             </a:r>
             <a:endParaRPr lang="en-US" sz="1200" dirty="0"/>
           </a:p>
@@ -3708,7 +3666,7 @@
                   <a:srgbClr val="FFFFFF"/>
                 </a:solidFill>
               </a:rPr>
-              <a:t>   免疫治療，特別是免疫檢查點抑制劑（ICIs），在下調中晚期肝細胞癌（HCC）方面顯示出良好的潛力，可能擴大肝臟移植的適應症。</a:t>
+              <a:t>   免疫檢查點抑制劑（ICIs）的整合已徹底改變了晚期肝細胞癌（HCC）的治療格局，但初級耐藥性和反應持久性有限等挑戰仍然是重大障礙。</a:t>
             </a:r>
             <a:endParaRPr lang="en-US" sz="1200" dirty="0"/>
           </a:p>
@@ -3734,7 +3692,7 @@
                   <a:srgbClr val="FFFFFF"/>
                 </a:solidFill>
               </a:rPr>
-              <a:t>2. **多重療法的協同效應**  </a:t>
+              <a:t>2. **表觀遺傳療法的興起**  </a:t>
             </a:r>
             <a:endParaRPr lang="en-US" sz="1200" dirty="0"/>
           </a:p>
@@ -3751,7 +3709,7 @@
                   <a:srgbClr val="FFFFFF"/>
                 </a:solidFill>
               </a:rPr>
-              <a:t>   The combination of ICIs with locoregional therapies and other agents, such as tyrosine kinase inhibitors (TKIs) and radiotherapy, may enhance therapeutic efficacy in HCC.  </a:t>
+              <a:t>   Emerging epigenetic therapies present new avenues for HCC treatment, particularly in overcoming resistance mechanisms associated with conventional therapies.  </a:t>
             </a:r>
             <a:endParaRPr lang="en-US" sz="1200" dirty="0"/>
           </a:p>
@@ -3768,7 +3726,7 @@
                   <a:srgbClr val="FFFFFF"/>
                 </a:solidFill>
               </a:rPr>
-              <a:t>   將ICIs與區域性治療及其他藥物（如酪氨酸激酶抑制劑（TKIs）和放射治療）結合，可能提高HCC的治療效果。</a:t>
+              <a:t>   新興的表觀遺傳療法為HCC治療提供了新的途徑，特別是在克服與傳統療法相關的耐藥機制方面。</a:t>
             </a:r>
             <a:endParaRPr lang="en-US" sz="1200" dirty="0"/>
           </a:p>
@@ -3794,7 +3752,7 @@
                   <a:srgbClr val="FFFFFF"/>
                 </a:solidFill>
               </a:rPr>
-              <a:t>3. **患者選擇的關鍵性**  </a:t>
+              <a:t>3. **局部治療與全身療法的協同作用**  </a:t>
             </a:r>
             <a:endParaRPr lang="en-US" sz="1200" dirty="0"/>
           </a:p>
@@ -3811,7 +3769,7 @@
                   <a:srgbClr val="FFFFFF"/>
                 </a:solidFill>
               </a:rPr>
-              <a:t>   Real-world studies emphasize the importance of patient selection and stratification based on eligibility criteria, which can significantly influence treatment outcomes in HCC.  </a:t>
+              <a:t>   Combining locoregional therapies, such as transarterial chemoembolization (TACE) and stereotactic body radiotherapy, with systemic therapies like ICIs shows promise in improving patient outcomes.  </a:t>
             </a:r>
             <a:endParaRPr lang="en-US" sz="1200" dirty="0"/>
           </a:p>
@@ -3828,7 +3786,7 @@
                   <a:srgbClr val="FFFFFF"/>
                 </a:solidFill>
               </a:rPr>
-              <a:t>   實際臨床研究強調患者選擇和根據適應症標準進行分層的重要性，這對HCC的治療結果有顯著影響。</a:t>
+              <a:t>   將局部療法（如經動脈化療栓塞（TACE）和立體定向體放射治療）與全身療法（如ICIs）結合在一起，對改善患者預後顯示出希望。</a:t>
             </a:r>
             <a:endParaRPr lang="en-US" sz="1200" dirty="0"/>
           </a:p>
@@ -3854,7 +3812,7 @@
                   <a:srgbClr val="FFFFFF"/>
                 </a:solidFill>
               </a:rPr>
-              <a:t>4. **腫瘤微環境的挑戰**  </a:t>
+              <a:t>4. **生物標誌物的缺乏**  </a:t>
             </a:r>
             <a:endParaRPr lang="en-US" sz="1200" dirty="0"/>
           </a:p>
@@ -3871,7 +3829,7 @@
                   <a:srgbClr val="FFFFFF"/>
                 </a:solidFill>
               </a:rPr>
-              <a:t>   The immunosuppressive tumor microenvironment, driven by cancer-associated fibroblasts and other factors, remains a significant barrier to effective immunotherapy in HCC.  </a:t>
+              <a:t>   The absence of validated predictive biomarkers limits the ability to tailor treatments effectively, underscoring the need for further research in biomarker discovery for HCC.  </a:t>
             </a:r>
             <a:endParaRPr lang="en-US" sz="1200" dirty="0"/>
           </a:p>
@@ -3888,7 +3846,7 @@
                   <a:srgbClr val="FFFFFF"/>
                 </a:solidFill>
               </a:rPr>
-              <a:t>   由癌症相關成纖維細胞及其他因素驅動的免疫抑制腫瘤微環境，仍然是HCC有效免疫治療的一大障礙。</a:t>
+              <a:t>   缺乏經過驗證的預測生物標誌物限制了有效調整治療的能力，突顯了對HCC生物標誌物發現進一步研究的需求。</a:t>
             </a:r>
             <a:endParaRPr lang="en-US" sz="1200" dirty="0"/>
           </a:p>
@@ -3914,7 +3872,7 @@
                   <a:srgbClr val="FFFFFF"/>
                 </a:solidFill>
               </a:rPr>
-              <a:t>5. **未來的生物標記研究**  </a:t>
+              <a:t>5. **多學科合作的重要性**  </a:t>
             </a:r>
             <a:endParaRPr lang="en-US" sz="1200" dirty="0"/>
           </a:p>
@@ -3931,7 +3889,7 @@
                   <a:srgbClr val="FFFFFF"/>
                 </a:solidFill>
               </a:rPr>
-              <a:t>   Advances in immune profiling and biomarker identification may facilitate personalized immunotherapy approaches, improving outcomes for HCC patients.</a:t>
+              <a:t>   Advances in imaging and multidisciplinary approaches are essential for improving surgical outcomes and overall survival in HCC patients.</a:t>
             </a:r>
             <a:endParaRPr lang="en-US" sz="1200" dirty="0"/>
           </a:p>
@@ -4077,7 +4035,7 @@
                   <a:srgbClr val="FFFFFF"/>
                 </a:solidFill>
               </a:rPr>
-              <a:t>免疫剖析和生物標記識別的進展，可能促進個性化免疫治療方法的發展，改善HCC患者的治療結果。</a:t>
+              <a:t>成像技術的進步和多學科方法對改善HCC患者的手術結果和整體生存率至關重要。</a:t>
             </a:r>
             <a:endParaRPr lang="en-US" sz="1200" dirty="0"/>
           </a:p>
@@ -4103,7 +4061,7 @@
                   <a:srgbClr val="FFFFFF"/>
                 </a:solidFill>
               </a:rPr>
-              <a:t>### 未來研究方向（Future Research Directions）</a:t>
+              <a:t>### 未來研究方向 (Future Research Directions)</a:t>
             </a:r>
             <a:endParaRPr lang="en-US" sz="1200" dirty="0"/>
           </a:p>
@@ -4129,7 +4087,7 @@
                   <a:srgbClr val="FFFFFF"/>
                 </a:solidFill>
               </a:rPr>
-              <a:t>1. **探索新型免疫療法**  </a:t>
+              <a:t>1. **耐藥機制的深入研究**  </a:t>
             </a:r>
             <a:endParaRPr lang="en-US" sz="1200" dirty="0"/>
           </a:p>
@@ -4146,7 +4104,7 @@
                   <a:srgbClr val="FFFFFF"/>
                 </a:solidFill>
               </a:rPr>
-              <a:t>   Further studies should investigate novel immunotherapeutic agents and combinations, particularly in the context of advanced HCC and their mechanisms of action.  </a:t>
+              <a:t>   Investigating the molecular mechanisms underlying resistance to ICIs and other therapies is critical for developing strategies to enhance treatment efficacy.  </a:t>
             </a:r>
             <a:endParaRPr lang="en-US" sz="1200" dirty="0"/>
           </a:p>
@@ -4163,7 +4121,7 @@
                   <a:srgbClr val="FFFFFF"/>
                 </a:solidFill>
               </a:rPr>
-              <a:t>   進一步研究應探討新型免疫治療藥物及其組合，特別是在晚期HCC的背景下及其作用機制。</a:t>
+              <a:t>   深入研究ICIs和其他療法耐藥的分子機制對於開發增強治療效果的策略至關重要。</a:t>
             </a:r>
             <a:endParaRPr lang="en-US" sz="1200" dirty="0"/>
           </a:p>
@@ -4189,7 +4147,7 @@
                   <a:srgbClr val="FFFFFF"/>
                 </a:solidFill>
               </a:rPr>
-              <a:t>2. **腫瘤微環境的調節**  </a:t>
+              <a:t>2. **新型生物標誌物的探索**  </a:t>
             </a:r>
             <a:endParaRPr lang="en-US" sz="1200" dirty="0"/>
           </a:p>
@@ -4206,7 +4164,7 @@
                   <a:srgbClr val="FFFFFF"/>
                 </a:solidFill>
               </a:rPr>
-              <a:t>   Research should focus on strategies to modulate the tumor microenvironment to enhance the efficacy of immunotherapies in HCC.  </a:t>
+              <a:t>   Future studies should focus on identifying and validating biomarkers that can predict response to immunotherapy and guide personalized treatment approaches.  </a:t>
             </a:r>
             <a:endParaRPr lang="en-US" sz="1200" dirty="0"/>
           </a:p>
@@ -4223,7 +4181,7 @@
                   <a:srgbClr val="FFFFFF"/>
                 </a:solidFill>
               </a:rPr>
-              <a:t>   研究應集中於調節腫瘤微環境的策略，以提高HCC中免疫治療的療效。</a:t>
+              <a:t>   未來的研究應集中於識別和驗證能預測免疫療法反應的生物標誌物，並指導個性化治療方法。</a:t>
             </a:r>
             <a:endParaRPr lang="en-US" sz="1200" dirty="0"/>
           </a:p>
@@ -4249,7 +4207,7 @@
                   <a:srgbClr val="FFFFFF"/>
                 </a:solidFill>
               </a:rPr>
-              <a:t>3. **生物標記的臨床應用**  </a:t>
+              <a:t>3. **表觀遺傳療法的臨床應用**  </a:t>
             </a:r>
             <a:endParaRPr lang="en-US" sz="1200" dirty="0"/>
           </a:p>
@@ -4266,7 +4224,7 @@
                   <a:srgbClr val="FFFFFF"/>
                 </a:solidFill>
               </a:rPr>
-              <a:t>   The identification and validation of biomarkers that predict response to immunotherapy could lead to more tailored treatment strategies for HCC patients.  </a:t>
+              <a:t>   Clinical trials exploring the efficacy of epigenetic therapies in combination with existing treatments for HCC are necessary to establish their role in therapy.  </a:t>
             </a:r>
             <a:endParaRPr lang="en-US" sz="1200" dirty="0"/>
           </a:p>
@@ -4283,7 +4241,7 @@
                   <a:srgbClr val="FFFFFF"/>
                 </a:solidFill>
               </a:rPr>
-              <a:t>   識別和驗證預測免疫治療反應的生物標記，可能導致對HCC患者更具針對性的治療策略。</a:t>
+              <a:t>   探索表觀遺傳療法與現有HCC治療組合的臨床試驗是必要的，以確立其在治療中的角色。</a:t>
             </a:r>
             <a:endParaRPr lang="en-US" sz="1200" dirty="0"/>
           </a:p>
@@ -4309,7 +4267,7 @@
                   <a:srgbClr val="FFFFFF"/>
                 </a:solidFill>
               </a:rPr>
-              <a:t>4. **長期療效的評估**  </a:t>
+              <a:t>4. **多模態治療策略的發展**  </a:t>
             </a:r>
             <a:endParaRPr lang="en-US" sz="1200" dirty="0"/>
           </a:p>
@@ -4326,7 +4284,7 @@
                   <a:srgbClr val="FFFFFF"/>
                 </a:solidFill>
               </a:rPr>
-              <a:t>   Longitudinal studies are needed to assess the long-term efficacy and safety of combined immunotherapy approaches in HCC.  </a:t>
+              <a:t>   Research should focus on developing multimodal treatment strategies that integrate systemic and locoregional therapies to optimize patient outcomes.  </a:t>
             </a:r>
             <a:endParaRPr lang="en-US" sz="1200" dirty="0"/>
           </a:p>
@@ -4343,7 +4301,7 @@
                   <a:srgbClr val="FFFFFF"/>
                 </a:solidFill>
               </a:rPr>
-              <a:t>   需要進行縱向研究，以評估HCC中聯合免疫治療方法的長期療效和安全性。</a:t>
+              <a:t>   研究應集中於開發整合全身療法和局部療法的多模態治療策略，以優化患者預後。</a:t>
             </a:r>
             <a:endParaRPr lang="en-US" sz="1200" dirty="0"/>
           </a:p>
@@ -4369,7 +4327,7 @@
                   <a:srgbClr val="FFFFFF"/>
                 </a:solidFill>
               </a:rPr>
-              <a:t>5. **多中心臨床試驗的推進**  </a:t>
+              <a:t>5. **長期隨訪與數據收集**  </a:t>
             </a:r>
             <a:endParaRPr lang="en-US" sz="1200" dirty="0"/>
           </a:p>
@@ -4386,7 +4344,7 @@
                   <a:srgbClr val="FFFFFF"/>
                 </a:solidFill>
               </a:rPr>
-              <a:t>   Multi-center clinical trials should be conducted to validate findings across diverse populations and settings, enhancing the generalizability of results.  </a:t>
+              <a:t>   Long-term follow-up studies are essential to assess the durability of responses and overall survival in patients receiving novel therapies for HCC.  </a:t>
             </a:r>
             <a:endParaRPr lang="en-US" sz="1200" dirty="0"/>
           </a:p>
@@ -4403,7 +4361,7 @@
                   <a:srgbClr val="FFFFFF"/>
                 </a:solidFill>
               </a:rPr>
-              <a:t>   應進行多中心臨床試驗，以驗證不同人群和環境中的研究結果，提高結果的普遍適用性。</a:t>
+              <a:t>   長期隨訪研究對於評估接受新療法的HCC患者的反應持久性和整體生存率至關重要。</a:t>
             </a:r>
             <a:endParaRPr lang="en-US" sz="1200" dirty="0"/>
           </a:p>
@@ -4676,7 +4634,7 @@
                 <a:ea typeface="Arial" pitchFamily="34" charset="-122"/>
                 <a:cs typeface="Arial" pitchFamily="34" charset="-120"/>
               </a:rPr>
-              <a:t>Efficacy of liver transplantation after response to atezolizumab-bevacizumab dow…</a:t>
+              <a:t>Epigenetic therapies in hepatocellular carcinoma: emerging clinical tools and ap…</a:t>
             </a:r>
             <a:endParaRPr lang="en-US" sz="1400" dirty="0"/>
           </a:p>
@@ -4713,7 +4671,7 @@
                 <a:ea typeface="Arial" pitchFamily="34" charset="-122"/>
                 <a:cs typeface="Arial" pitchFamily="34" charset="-120"/>
               </a:rPr>
-              <a:t>Outcomes of Patients With Hepatocellular Carcinoma Treated With Durvalumab Plus …</a:t>
+              <a:t>Epigenetic therapies in hepatocellular carcinoma: emerging clinical tools and ap…</a:t>
             </a:r>
             <a:endParaRPr lang="en-US" sz="1400" dirty="0"/>
           </a:p>
@@ -4750,7 +4708,7 @@
                 <a:ea typeface="Arial" pitchFamily="34" charset="-122"/>
                 <a:cs typeface="Arial" pitchFamily="34" charset="-120"/>
               </a:rPr>
-              <a:t>Camrelizumab, a patinib and radiotherapy in locally advanced, unresectable hepat…</a:t>
+              <a:t>Pembrolizumab and stereotactic body radiotherapy combined in advanced hepatocell…</a:t>
             </a:r>
             <a:endParaRPr lang="en-US" sz="1400" dirty="0"/>
           </a:p>
@@ -4787,7 +4745,7 @@
                 <a:ea typeface="Arial" pitchFamily="34" charset="-122"/>
                 <a:cs typeface="Arial" pitchFamily="34" charset="-120"/>
               </a:rPr>
-              <a:t>Neoadjuvant Danburstotug (IMC-001) therapy in gastric, esophageal, and hepatocel…</a:t>
+              <a:t>Hepatocellular carcinoma: new therapies on the horizon.</a:t>
             </a:r>
             <a:endParaRPr lang="en-US" sz="1400" dirty="0"/>
           </a:p>
@@ -4824,7 +4782,7 @@
                 <a:ea typeface="Arial" pitchFamily="34" charset="-122"/>
                 <a:cs typeface="Arial" pitchFamily="34" charset="-120"/>
               </a:rPr>
-              <a:t>Pembrolizumab and stereotactic body radiotherapy combined in advanced hepatocell…</a:t>
+              <a:t>UDP-glucuronate decarboxylase 1 promotes tumor immune evasion by accelerating KM…</a:t>
             </a:r>
             <a:endParaRPr lang="en-US" sz="1400" dirty="0"/>
           </a:p>
@@ -4861,7 +4819,7 @@
                 <a:ea typeface="Arial" pitchFamily="34" charset="-122"/>
                 <a:cs typeface="Arial" pitchFamily="34" charset="-120"/>
               </a:rPr>
-              <a:t>Complementary evaluation of phase III immunotherapy trials in advanced HCC using…</a:t>
+              <a:t>Long-term follow-up of a phase 1/2 trial of anti-GDF-15 antibody visugromab plus…</a:t>
             </a:r>
             <a:endParaRPr lang="en-US" sz="1400" dirty="0"/>
           </a:p>
@@ -4898,7 +4856,7 @@
                 <a:ea typeface="Arial" pitchFamily="34" charset="-122"/>
                 <a:cs typeface="Arial" pitchFamily="34" charset="-120"/>
               </a:rPr>
-              <a:t>Systemic immune profiling in hepatocellular carcinoma: navigating etiological he…</a:t>
+              <a:t>… plus transarterial chemoembolization and PD-1 inhibitors as conversion therapi…</a:t>
             </a:r>
             <a:endParaRPr lang="en-US" sz="1400" dirty="0"/>
           </a:p>
@@ -4935,7 +4893,7 @@
                 <a:ea typeface="Arial" pitchFamily="34" charset="-122"/>
                 <a:cs typeface="Arial" pitchFamily="34" charset="-120"/>
               </a:rPr>
-              <a:t>Balloon-occluded Alternative Infusion of Fragmented Gelatin Particles of TACE fo…</a:t>
+              <a:t>The immunological paradox: immune checkpoint inhibitors in liver transplantation…</a:t>
             </a:r>
             <a:endParaRPr lang="en-US" sz="1400" dirty="0"/>
           </a:p>
@@ -4972,7 +4930,7 @@
                 <a:ea typeface="Arial" pitchFamily="34" charset="-122"/>
                 <a:cs typeface="Arial" pitchFamily="34" charset="-120"/>
               </a:rPr>
-              <a:t>Anti-angiogenic therapy combined with immune checkpoint blockade mediates CCR7 +…</a:t>
+              <a:t>Comparative Effectiveness and Safety of Atezolizumab-Bevacizumab and Durvalumab-…</a:t>
             </a:r>
             <a:endParaRPr lang="en-US" sz="1400" dirty="0"/>
           </a:p>
@@ -5009,7 +4967,7 @@
                 <a:ea typeface="Arial" pitchFamily="34" charset="-122"/>
                 <a:cs typeface="Arial" pitchFamily="34" charset="-120"/>
               </a:rPr>
-              <a:t>Cancer-Associated Fibroblasts Promote Tumor Immunosuppression in Hepatocellular …</a:t>
+              <a:t>Survival Outcomes After Liver Resection for Barcelona Clinic Liver Cancer Stage …</a:t>
             </a:r>
             <a:endParaRPr lang="en-US" sz="1400" dirty="0"/>
           </a:p>
@@ -5164,7 +5122,7 @@
                   </a:extLst>
                 </a:hlinkClick>
               </a:rPr>
-              <a:t>Efficacy of liver transplantation after response to atezolizumab-bevacizumab downstaging of intermediate and advanced hepatocellular carcinoma (ImmunoXXL).</a:t>
+              <a:t>Epigenetic therapies in hepatocellular carcinoma: emerging clinical tools and applications.</a:t>
             </a:r>
             <a:endParaRPr lang="en-US" sz="2400" dirty="0"/>
           </a:p>
@@ -5200,7 +5158,7 @@
                   <a:srgbClr val="888888"/>
                 </a:solidFill>
               </a:rPr>
-              <a:t>Journal of hepatology  ·  IF 25.7  ·  RCT Phase 2</a:t>
+              <a:t>Gut  ·  IF 24.5  ·  Review</a:t>
             </a:r>
             <a:endParaRPr lang="en-US" sz="1000" dirty="0"/>
           </a:p>
@@ -5243,7 +5201,7 @@
                 <a:ea typeface="Microsoft JhengHei" pitchFamily="34" charset="-122"/>
                 <a:cs typeface="Microsoft JhengHei" pitchFamily="34" charset="-120"/>
               </a:rPr>
-              <a:t>肝移植可治癒HCC。</a:t>
+              <a:t>HCC 是癌症死亡的主要原因。</a:t>
             </a:r>
             <a:endParaRPr lang="en-US" sz="1800" dirty="0"/>
           </a:p>
@@ -5264,7 +5222,7 @@
                 <a:ea typeface="Microsoft JhengHei" pitchFamily="34" charset="-122"/>
                 <a:cs typeface="Microsoft JhengHei" pitchFamily="34" charset="-120"/>
               </a:rPr>
-              <a:t>Atezolizumab-bevacizumab降低晚期HCC。</a:t>
+              <a:t>現有療法在晚期效果有限。</a:t>
             </a:r>
             <a:endParaRPr lang="en-US" sz="1800" dirty="0"/>
           </a:p>
@@ -5285,7 +5243,7 @@
                 <a:ea typeface="Microsoft JhengHei" pitchFamily="34" charset="-122"/>
                 <a:cs typeface="Microsoft JhengHei" pitchFamily="34" charset="-120"/>
               </a:rPr>
-              <a:t>26%患者達到移植資格。</a:t>
+              <a:t>表觀遺傳失調促進腫瘤進展。</a:t>
             </a:r>
             <a:endParaRPr lang="en-US" sz="1800" dirty="0"/>
           </a:p>
@@ -5306,7 +5264,7 @@
                 <a:ea typeface="Microsoft JhengHei" pitchFamily="34" charset="-122"/>
                 <a:cs typeface="Microsoft JhengHei" pitchFamily="34" charset="-120"/>
               </a:rPr>
-              <a:t>兩年生存率表現良好。</a:t>
+              <a:t>新興 'epidrugs' 顯示臨床潛力。</a:t>
             </a:r>
             <a:endParaRPr lang="en-US" sz="1800" dirty="0"/>
           </a:p>
@@ -5327,7 +5285,7 @@
                 <a:ea typeface="Microsoft JhengHei" pitchFamily="34" charset="-122"/>
                 <a:cs typeface="Microsoft JhengHei" pitchFamily="34" charset="-120"/>
               </a:rPr>
-              <a:t>免疫監測關聯腫瘤反應與排斥。</a:t>
+              <a:t>針對表觀遺傳學可增強現有療法。</a:t>
             </a:r>
             <a:endParaRPr lang="en-US" sz="1800" dirty="0"/>
           </a:p>
@@ -5363,7 +5321,7 @@
                   <a:srgbClr val="888888"/>
                 </a:solidFill>
               </a:rPr>
-              <a:t>Bhoori Sherrie, Rivoltini Licia, Pinato David J et al.. Journal of hepatology. 2026-06-15 DOI: 10.1016/j.jhep.2026.02.019</a:t>
+              <a:t>Bueloni Barbara, G Fernandez-Barrena Maite, Fiore Esteban et al.. Gut. 2026-07-08 DOI: 10.1136/gutjnl-2025-336317</a:t>
             </a:r>
             <a:endParaRPr lang="en-US" sz="800" dirty="0"/>
           </a:p>
@@ -5563,7 +5521,7 @@
                   </a:extLst>
                 </a:hlinkClick>
               </a:rPr>
-              <a:t>Outcomes of Patients With Hepatocellular Carcinoma Treated With Durvalumab Plus Tremelimumab in Real-World Clinical Practice Who Met or Did Not Meet the Inclusion Criteria for the Phase 3 HIMALAYA Trial.</a:t>
+              <a:t>Epigenetic therapies in hepatocellular carcinoma: emerging clinical tools and applications</a:t>
             </a:r>
             <a:endParaRPr lang="en-US" sz="2400" dirty="0"/>
           </a:p>
@@ -5599,7 +5557,7 @@
                   <a:srgbClr val="888888"/>
                 </a:solidFill>
               </a:rPr>
-              <a:t>Journal of gastroenterology and hepatology  ·  RCT Phase 3  ·  🌏 Asia</a:t>
+              <a:t>Gut  ·  IF 24.5</a:t>
             </a:r>
             <a:endParaRPr lang="en-US" sz="1000" dirty="0"/>
           </a:p>
@@ -5642,7 +5600,7 @@
                 <a:ea typeface="Microsoft JhengHei" pitchFamily="34" charset="-122"/>
                 <a:cs typeface="Microsoft JhengHei" pitchFamily="34" charset="-120"/>
               </a:rPr>
-              <a:t>研究HCC患者接受Dur/Tre治療</a:t>
+              <a:t>表觀遺傳療法在HCC中展現潛力。</a:t>
             </a:r>
             <a:endParaRPr lang="en-US" sz="1800" dirty="0"/>
           </a:p>
@@ -5663,7 +5621,7 @@
                 <a:ea typeface="Microsoft JhengHei" pitchFamily="34" charset="-122"/>
                 <a:cs typeface="Microsoft JhengHei" pitchFamily="34" charset="-120"/>
               </a:rPr>
-              <a:t>412名患者來自30家機構</a:t>
+              <a:t>與ICIs結合提高治療效果。</a:t>
             </a:r>
             <a:endParaRPr lang="en-US" sz="1800" dirty="0"/>
           </a:p>
@@ -5684,49 +5642,7 @@
                 <a:ea typeface="Microsoft JhengHei" pitchFamily="34" charset="-122"/>
                 <a:cs typeface="Microsoft JhengHei" pitchFamily="34" charset="-120"/>
               </a:rPr>
-              <a:t>HIMALAYA組PFS和OS較佳</a:t>
-            </a:r>
-            <a:endParaRPr lang="en-US" sz="1800" dirty="0"/>
-          </a:p>
-          <a:p>
-            <a:pPr marL="342900" indent="-342900">
-              <a:spcAft>
-                <a:spcPts val="800"/>
-              </a:spcAft>
-              <a:buSzPct val="100000"/>
-              <a:buChar char="•"/>
-            </a:pPr>
-            <a:r>
-              <a:rPr lang="en-US" sz="1800" dirty="0">
-                <a:solidFill>
-                  <a:srgbClr val="333333"/>
-                </a:solidFill>
-                <a:latin typeface="Microsoft JhengHei" pitchFamily="34" charset="0"/>
-                <a:ea typeface="Microsoft JhengHei" pitchFamily="34" charset="-122"/>
-                <a:cs typeface="Microsoft JhengHei" pitchFamily="34" charset="-120"/>
-              </a:rPr>
-              <a:t>獨立預測因子包括BMI和門靜脈侵犯</a:t>
-            </a:r>
-            <a:endParaRPr lang="en-US" sz="1800" dirty="0"/>
-          </a:p>
-          <a:p>
-            <a:pPr marL="342900" indent="-342900">
-              <a:spcAft>
-                <a:spcPts val="800"/>
-              </a:spcAft>
-              <a:buSzPct val="100000"/>
-              <a:buChar char="•"/>
-            </a:pPr>
-            <a:r>
-              <a:rPr lang="en-US" sz="1800" dirty="0">
-                <a:solidFill>
-                  <a:srgbClr val="333333"/>
-                </a:solidFill>
-                <a:latin typeface="Microsoft JhengHei" pitchFamily="34" charset="0"/>
-                <a:ea typeface="Microsoft JhengHei" pitchFamily="34" charset="-122"/>
-                <a:cs typeface="Microsoft JhengHei" pitchFamily="34" charset="-120"/>
-              </a:rPr>
-              <a:t>內分泌功能障礙在HIMALAYA組較常見</a:t>
+              <a:t>個性化醫療的新興工具。</a:t>
             </a:r>
             <a:endParaRPr lang="en-US" sz="1800" dirty="0"/>
           </a:p>
@@ -5762,7 +5678,7 @@
                   <a:srgbClr val="888888"/>
                 </a:solidFill>
               </a:rPr>
-              <a:t>Matono Tomomitsu, Tada Toshifumi, Hiraoka Atsushi et al.. Journal of gastroenterology and hepatology. 2026-07-02 DOI: 10.1111/jgh.70422</a:t>
+              <a:t>B Bueloni, MG Fernandez-Barrena, E Fiore. Gut. 2026</a:t>
             </a:r>
             <a:endParaRPr lang="en-US" sz="800" dirty="0"/>
           </a:p>
@@ -5962,7 +5878,7 @@
                   </a:extLst>
                 </a:hlinkClick>
               </a:rPr>
-              <a:t>Camrelizumab, a patinib and radiotherapy in locally advanced, unresectable hepatocellular carcinoma: a phase 2 study.</a:t>
+              <a:t>Pembrolizumab and stereotactic body radiotherapy combined in advanced hepatocellular carcinoma post sorafenib–A phase II trial (PEMRAD)</a:t>
             </a:r>
             <a:endParaRPr lang="en-US" sz="2400" dirty="0"/>
           </a:p>
@@ -5998,7 +5914,7 @@
                   <a:srgbClr val="888888"/>
                 </a:solidFill>
               </a:rPr>
-              <a:t>Clinical cancer research : an official journal of the American Association for Cancer Research  ·  IF 11.5  ·  RCT Phase 2</a:t>
+              <a:t>JHEP Reports  ·  IF 7.8  ·  RCT Phase 2</a:t>
             </a:r>
             <a:endParaRPr lang="en-US" sz="1000" dirty="0"/>
           </a:p>
@@ -6041,7 +5957,7 @@
                 <a:ea typeface="Microsoft JhengHei" pitchFamily="34" charset="-122"/>
                 <a:cs typeface="Microsoft JhengHei" pitchFamily="34" charset="-120"/>
               </a:rPr>
-              <a:t>研究評估camrelizumab、apatinib及IMRT</a:t>
+              <a:t>結合 pembrolizumab 與 SBRT</a:t>
             </a:r>
             <a:endParaRPr lang="en-US" sz="1800" dirty="0"/>
           </a:p>
@@ -6062,7 +5978,7 @@
                 <a:ea typeface="Microsoft JhengHei" pitchFamily="34" charset="-122"/>
                 <a:cs typeface="Microsoft JhengHei" pitchFamily="34" charset="-120"/>
               </a:rPr>
-              <a:t>客觀反應率達84.1%</a:t>
+              <a:t>針對晚期 HCC 的二期試驗</a:t>
             </a:r>
             <a:endParaRPr lang="en-US" sz="1800" dirty="0"/>
           </a:p>
@@ -6083,7 +5999,7 @@
                 <a:ea typeface="Microsoft JhengHei" pitchFamily="34" charset="-122"/>
                 <a:cs typeface="Microsoft JhengHei" pitchFamily="34" charset="-120"/>
               </a:rPr>
-              <a:t>中位PFS為13.8個月</a:t>
+              <a:t>評估索拉非尼後治療效果</a:t>
             </a:r>
             <a:endParaRPr lang="en-US" sz="1800" dirty="0"/>
           </a:p>
@@ -6104,7 +6020,7 @@
                 <a:ea typeface="Microsoft JhengHei" pitchFamily="34" charset="-122"/>
                 <a:cs typeface="Microsoft JhengHei" pitchFamily="34" charset="-120"/>
               </a:rPr>
-              <a:t>81.8%患者出現3-4級不良事件</a:t>
+              <a:t>增強免疫反應的潛力</a:t>
             </a:r>
             <a:endParaRPr lang="en-US" sz="1800" dirty="0"/>
           </a:p>
@@ -6125,7 +6041,7 @@
                 <a:ea typeface="Microsoft JhengHei" pitchFamily="34" charset="-122"/>
                 <a:cs typeface="Microsoft JhengHei" pitchFamily="34" charset="-120"/>
               </a:rPr>
-              <a:t>TP53突變與不良預後相關</a:t>
+              <a:t>進行安全性與療效評估</a:t>
             </a:r>
             <a:endParaRPr lang="en-US" sz="1800" dirty="0"/>
           </a:p>
@@ -6161,7 +6077,7 @@
                   <a:srgbClr val="888888"/>
                 </a:solidFill>
               </a:rPr>
-              <a:t>Wang Hongzhi, Wang Kun, Zheng Xuan et al.. Clinical cancer research : an official journal of the American Association for Cancer Research. 2026-06-30 DOI: 10.1158/1078-0432.CCR-26-1352</a:t>
+              <a:t>GM O'Kane, A Mesci, RW Jang. JHEP Reports. 2026</a:t>
             </a:r>
             <a:endParaRPr lang="en-US" sz="800" dirty="0"/>
           </a:p>
@@ -6361,7 +6277,7 @@
                   </a:extLst>
                 </a:hlinkClick>
               </a:rPr>
-              <a:t>Neoadjuvant Danburstotug (IMC-001) therapy in gastric, esophageal, and hepatocellular carcinoma: the NeoChance phase II study.</a:t>
+              <a:t>Hepatocellular carcinoma: new therapies on the horizon.</a:t>
             </a:r>
             <a:endParaRPr lang="en-US" sz="2400" dirty="0"/>
           </a:p>
@@ -6397,7 +6313,7 @@
                   <a:srgbClr val="888888"/>
                 </a:solidFill>
               </a:rPr>
-              <a:t>NPJ precision oncology  ·  RCT Phase 2  ·  🌏 Asia</a:t>
+              <a:t>Expert review of gastroenterology &amp; hepatology  ·  Prospective Study  ·  🌏 Asia</a:t>
             </a:r>
             <a:endParaRPr lang="en-US" sz="1000" dirty="0"/>
           </a:p>
@@ -6440,7 +6356,7 @@
                 <a:ea typeface="Microsoft JhengHei" pitchFamily="34" charset="-122"/>
                 <a:cs typeface="Microsoft JhengHei" pitchFamily="34" charset="-120"/>
               </a:rPr>
-              <a:t>評估neoadjuvant治療danburstotug (IMC-001)。</a:t>
+              <a:t>ICIs為晚期HCC的前線治療。</a:t>
             </a:r>
             <a:endParaRPr lang="en-US" sz="1800" dirty="0"/>
           </a:p>
@@ -6461,7 +6377,7 @@
                 <a:ea typeface="Microsoft JhengHei" pitchFamily="34" charset="-122"/>
                 <a:cs typeface="Microsoft JhengHei" pitchFamily="34" charset="-120"/>
               </a:rPr>
-              <a:t>主要終點未達成；MPR 4.2%患者。</a:t>
+              <a:t>新療法包括新型系統藥物。</a:t>
             </a:r>
             <a:endParaRPr lang="en-US" sz="1800" dirty="0"/>
           </a:p>
@@ -6482,7 +6398,7 @@
                 <a:ea typeface="Microsoft JhengHei" pitchFamily="34" charset="-122"/>
                 <a:cs typeface="Microsoft JhengHei" pitchFamily="34" charset="-120"/>
               </a:rPr>
-              <a:t>病理回歸在22.9%患者中觀察到。</a:t>
+              <a:t>新輔助ICI方案顯示良好反應。</a:t>
             </a:r>
             <a:endParaRPr lang="en-US" sz="1800" dirty="0"/>
           </a:p>
@@ -6503,7 +6419,7 @@
                 <a:ea typeface="Microsoft JhengHei" pitchFamily="34" charset="-122"/>
                 <a:cs typeface="Microsoft JhengHei" pitchFamily="34" charset="-120"/>
               </a:rPr>
-              <a:t>治療耐受性良好，副作用少。</a:t>
+              <a:t>聯合療法改善無進展生存期。</a:t>
             </a:r>
             <a:endParaRPr lang="en-US" sz="1800" dirty="0"/>
           </a:p>
@@ -6524,7 +6440,7 @@
                 <a:ea typeface="Microsoft JhengHei" pitchFamily="34" charset="-122"/>
                 <a:cs typeface="Microsoft JhengHei" pitchFamily="34" charset="-120"/>
               </a:rPr>
-              <a:t>免疫剖析顯示癌症特異性重塑。</a:t>
+              <a:t>個性化局部治療方法的應用。</a:t>
             </a:r>
             <a:endParaRPr lang="en-US" sz="1800" dirty="0"/>
           </a:p>
@@ -6560,7 +6476,7 @@
                   <a:srgbClr val="888888"/>
                 </a:solidFill>
               </a:rPr>
-              <a:t>Bang Yeong Hak, Kang Dawon, Lee Seungwon et al.. NPJ precision oncology. 2026-07-03 DOI: 10.1038/s41698-026-01571-2</a:t>
+              <a:t>Yuza Kizuki, Akabane Miho, Kawashima Jun et al.. Expert review of gastroenterology &amp; hepatology. 2026-07-10 DOI: 10.1080/17474124.2026.2702585</a:t>
             </a:r>
             <a:endParaRPr lang="en-US" sz="800" dirty="0"/>
           </a:p>
@@ -6760,7 +6676,7 @@
                   </a:extLst>
                 </a:hlinkClick>
               </a:rPr>
-              <a:t>Pembrolizumab and stereotactic body radiotherapy combined in advanced hepatocellular carcinoma post sorafenib–A phase II trial (PEMRAD)</a:t>
+              <a:t>UDP-glucuronate decarboxylase 1 promotes tumor immune evasion by accelerating KMT2D loss in hepatocellular carcinoma.</a:t>
             </a:r>
             <a:endParaRPr lang="en-US" sz="2400" dirty="0"/>
           </a:p>
@@ -6796,7 +6712,7 @@
                   <a:srgbClr val="888888"/>
                 </a:solidFill>
               </a:rPr>
-              <a:t>JHEP Reports  ·  IF 7.8  ·  RCT Phase 2</a:t>
+              <a:t>Journal for immunotherapy of cancer  ·  IF 10.9  ·  Basic Research</a:t>
             </a:r>
             <a:endParaRPr lang="en-US" sz="1000" dirty="0"/>
           </a:p>
@@ -6839,7 +6755,7 @@
                 <a:ea typeface="Microsoft JhengHei" pitchFamily="34" charset="-122"/>
                 <a:cs typeface="Microsoft JhengHei" pitchFamily="34" charset="-120"/>
               </a:rPr>
-              <a:t>結合 pembrolizumab 和 SBRT</a:t>
+              <a:t>發現UXS1為免疫逃逸驅動因子</a:t>
             </a:r>
             <a:endParaRPr lang="en-US" sz="1800" dirty="0"/>
           </a:p>
@@ -6860,7 +6776,7 @@
                 <a:ea typeface="Microsoft JhengHei" pitchFamily="34" charset="-122"/>
                 <a:cs typeface="Microsoft JhengHei" pitchFamily="34" charset="-120"/>
               </a:rPr>
-              <a:t>針對晚期 HCC 的二期試驗</a:t>
+              <a:t>促進KMT2D降解及PD-L1上調</a:t>
             </a:r>
             <a:endParaRPr lang="en-US" sz="1800" dirty="0"/>
           </a:p>
@@ -6881,7 +6797,49 @@
                 <a:ea typeface="Microsoft JhengHei" pitchFamily="34" charset="-122"/>
                 <a:cs typeface="Microsoft JhengHei" pitchFamily="34" charset="-120"/>
               </a:rPr>
-              <a:t>評估索拉非尼後的療效</a:t>
+              <a:t>高UXS1與CD8+ T細胞反應差相關</a:t>
+            </a:r>
+            <a:endParaRPr lang="en-US" sz="1800" dirty="0"/>
+          </a:p>
+          <a:p>
+            <a:pPr marL="342900" indent="-342900">
+              <a:spcAft>
+                <a:spcPts val="800"/>
+              </a:spcAft>
+              <a:buSzPct val="100000"/>
+              <a:buChar char="•"/>
+            </a:pPr>
+            <a:r>
+              <a:rPr lang="en-US" sz="1800" dirty="0">
+                <a:solidFill>
+                  <a:srgbClr val="333333"/>
+                </a:solidFill>
+                <a:latin typeface="Microsoft JhengHei" pitchFamily="34" charset="0"/>
+                <a:ea typeface="Microsoft JhengHei" pitchFamily="34" charset="-122"/>
+                <a:cs typeface="Microsoft JhengHei" pitchFamily="34" charset="-120"/>
+              </a:rPr>
+              <a:t>基因敲除增強抗PD-1療法療效</a:t>
+            </a:r>
+            <a:endParaRPr lang="en-US" sz="1800" dirty="0"/>
+          </a:p>
+          <a:p>
+            <a:pPr marL="342900" indent="-342900">
+              <a:spcAft>
+                <a:spcPts val="800"/>
+              </a:spcAft>
+              <a:buSzPct val="100000"/>
+              <a:buChar char="•"/>
+            </a:pPr>
+            <a:r>
+              <a:rPr lang="en-US" sz="1800" dirty="0">
+                <a:solidFill>
+                  <a:srgbClr val="333333"/>
+                </a:solidFill>
+                <a:latin typeface="Microsoft JhengHei" pitchFamily="34" charset="0"/>
+                <a:ea typeface="Microsoft JhengHei" pitchFamily="34" charset="-122"/>
+                <a:cs typeface="Microsoft JhengHei" pitchFamily="34" charset="-120"/>
+              </a:rPr>
+              <a:t>新型UXS1-KMT2D-CEBPB-PD-L1信號通路</a:t>
             </a:r>
             <a:endParaRPr lang="en-US" sz="1800" dirty="0"/>
           </a:p>
@@ -6917,7 +6875,7 @@
                   <a:srgbClr val="888888"/>
                 </a:solidFill>
               </a:rPr>
-              <a:t>GM O'Kane, A Mesci, RW Jang. JHEP Reports. 2026</a:t>
+              <a:t>Zhang Jiwei, Li Yuan, Chen Jiafeng et al.. Journal for immunotherapy of cancer. 2026-07-08 DOI: 10.1136/jitc-2025-013948</a:t>
             </a:r>
             <a:endParaRPr lang="en-US" sz="800" dirty="0"/>
           </a:p>
@@ -7117,7 +7075,7 @@
                   </a:extLst>
                 </a:hlinkClick>
               </a:rPr>
-              <a:t>Complementary evaluation of phase III immunotherapy trials in advanced HCC using the survival-inferred fragility index.</a:t>
+              <a:t>Long-term follow-up of a phase 1/2 trial of anti-GDF-15 antibody visugromab plus anti-PD-1 antibody nivolumab in anti-PD-1/-L1 relapsed/refractory solid tumors.</a:t>
             </a:r>
             <a:endParaRPr lang="en-US" sz="2400" dirty="0"/>
           </a:p>
@@ -7153,7 +7111,7 @@
                   <a:srgbClr val="888888"/>
                 </a:solidFill>
               </a:rPr>
-              <a:t>Digestive and liver disease : official journal of the Italian Society of Gastroenterology and the Italian Association for the Study of the Liver  ·  RCT Phase 3</a:t>
+              <a:t>Journal of hematology &amp; oncology  ·  RCT Phase 2</a:t>
             </a:r>
             <a:endParaRPr lang="en-US" sz="1000" dirty="0"/>
           </a:p>
@@ -7196,7 +7154,7 @@
                 <a:ea typeface="Microsoft JhengHei" pitchFamily="34" charset="-122"/>
                 <a:cs typeface="Microsoft JhengHei" pitchFamily="34" charset="-120"/>
               </a:rPr>
-              <a:t>HCC治療逐步轉向ICIs和TKIs。</a:t>
+              <a:t>Visugromab加nivolumab在試驗中評估。</a:t>
             </a:r>
             <a:endParaRPr lang="en-US" sz="1800" dirty="0"/>
           </a:p>
@@ -7217,7 +7175,7 @@
                 <a:ea typeface="Microsoft JhengHei" pitchFamily="34" charset="-122"/>
                 <a:cs typeface="Microsoft JhengHei" pitchFamily="34" charset="-120"/>
               </a:rPr>
-              <a:t>SIFI量化試驗結果穩定性。</a:t>
+              <a:t>HCC的客觀反應率為14.3%。</a:t>
             </a:r>
             <a:endParaRPr lang="en-US" sz="1800" dirty="0"/>
           </a:p>
@@ -7238,7 +7196,7 @@
                 <a:ea typeface="Microsoft JhengHei" pitchFamily="34" charset="-122"/>
                 <a:cs typeface="Microsoft JhengHei" pitchFamily="34" charset="-120"/>
               </a:rPr>
-              <a:t>六項III期試驗進行SIFI分析。</a:t>
+              <a:t>反應的中位持續時間為19.4個月。</a:t>
             </a:r>
             <a:endParaRPr lang="en-US" sz="1800" dirty="0"/>
           </a:p>
@@ -7259,7 +7217,7 @@
                 <a:ea typeface="Microsoft JhengHei" pitchFamily="34" charset="-122"/>
                 <a:cs typeface="Microsoft JhengHei" pitchFamily="34" charset="-120"/>
               </a:rPr>
-              <a:t>中位SIFI顯示試驗穩健性低。</a:t>
+              <a:t>GDF-15阻斷可能克服耐藥性。</a:t>
             </a:r>
             <a:endParaRPr lang="en-US" sz="1800" dirty="0"/>
           </a:p>
@@ -7280,7 +7238,7 @@
                 <a:ea typeface="Microsoft JhengHei" pitchFamily="34" charset="-122"/>
                 <a:cs typeface="Microsoft JhengHei" pitchFamily="34" charset="-120"/>
               </a:rPr>
-              <a:t>亞洲試驗顯示較高穩定性。</a:t>
+              <a:t>需要進一步的隨機試驗。</a:t>
             </a:r>
             <a:endParaRPr lang="en-US" sz="1800" dirty="0"/>
           </a:p>
@@ -7316,7 +7274,7 @@
                   <a:srgbClr val="888888"/>
                 </a:solidFill>
               </a:rPr>
-              <a:t>Dalbeni A, Vicardi M, Stefanini B et al.. Digestive and liver disease : official journal of the Italian Society of Gastroenterology and the Italian Association for the Study of the Liver. 2026-06-16 DOI: 10.1016/j.dld.2026.04.013</a:t>
+              <a:t>Melero Ignacio, de Miguel Mar&amp;#xed;a, Cabanas Elena Garralda et al.. Journal of hematology &amp; oncology. 2026-07-10 DOI: 10.1186/s13045-026-01818-2</a:t>
             </a:r>
             <a:endParaRPr lang="en-US" sz="800" dirty="0"/>
           </a:p>
@@ -7516,7 +7474,7 @@
                   </a:extLst>
                 </a:hlinkClick>
               </a:rPr>
-              <a:t>Systemic immune profiling in hepatocellular carcinoma: navigating etiological heterogeneity and selection bias.</a:t>
+              <a:t>… plus transarterial chemoembolization and PD-1 inhibitors as conversion therapies for unresectable intermediate-advanced hepatocellular carcinoma: a phase 2 trial …</a:t>
             </a:r>
             <a:endParaRPr lang="en-US" sz="2400" dirty="0"/>
           </a:p>
@@ -7552,7 +7510,7 @@
                   <a:srgbClr val="888888"/>
                 </a:solidFill>
               </a:rPr>
-              <a:t>Journal for immunotherapy of cancer  ·  IF 10.9  ·  Prospective Study</a:t>
+              <a:t>… and Targeted Therapy  ·  RCT Phase 2</a:t>
             </a:r>
             <a:endParaRPr lang="en-US" sz="1000" dirty="0"/>
           </a:p>
@@ -7595,7 +7553,7 @@
                 <a:ea typeface="Microsoft JhengHei" pitchFamily="34" charset="-122"/>
                 <a:cs typeface="Microsoft JhengHei" pitchFamily="34" charset="-120"/>
               </a:rPr>
-              <a:t>對Nishio等研究的評論</a:t>
+              <a:t>針對不可切除的HCC的組合療法</a:t>
             </a:r>
             <a:endParaRPr lang="en-US" sz="1800" dirty="0"/>
           </a:p>
@@ -7616,7 +7574,7 @@
                 <a:ea typeface="Microsoft JhengHei" pitchFamily="34" charset="-122"/>
                 <a:cs typeface="Microsoft JhengHei" pitchFamily="34" charset="-120"/>
               </a:rPr>
-              <a:t>識別HCC的循環免疫生物標記</a:t>
+              <a:t>使用肝動脈化療栓塞(TACE)</a:t>
             </a:r>
             <a:endParaRPr lang="en-US" sz="1800" dirty="0"/>
           </a:p>
@@ -7637,49 +7595,7 @@
                 <a:ea typeface="Microsoft JhengHei" pitchFamily="34" charset="-122"/>
                 <a:cs typeface="Microsoft JhengHei" pitchFamily="34" charset="-120"/>
               </a:rPr>
-              <a:t>病因異質性可能影響免疫特徵</a:t>
-            </a:r>
-            <a:endParaRPr lang="en-US" sz="1800" dirty="0"/>
-          </a:p>
-          <a:p>
-            <a:pPr marL="342900" indent="-342900">
-              <a:spcAft>
-                <a:spcPts val="800"/>
-              </a:spcAft>
-              <a:buSzPct val="100000"/>
-              <a:buChar char="•"/>
-            </a:pPr>
-            <a:r>
-              <a:rPr lang="en-US" sz="1800" dirty="0">
-                <a:solidFill>
-                  <a:srgbClr val="333333"/>
-                </a:solidFill>
-                <a:latin typeface="Microsoft JhengHei" pitchFamily="34" charset="0"/>
-                <a:ea typeface="Microsoft JhengHei" pitchFamily="34" charset="-122"/>
-                <a:cs typeface="Microsoft JhengHei" pitchFamily="34" charset="-120"/>
-              </a:rPr>
-              <a:t>選擇偏差影響研究設計和結果</a:t>
-            </a:r>
-            <a:endParaRPr lang="en-US" sz="1800" dirty="0"/>
-          </a:p>
-          <a:p>
-            <a:pPr marL="342900" indent="-342900">
-              <a:spcAft>
-                <a:spcPts val="800"/>
-              </a:spcAft>
-              <a:buSzPct val="100000"/>
-              <a:buChar char="•"/>
-            </a:pPr>
-            <a:r>
-              <a:rPr lang="en-US" sz="1800" dirty="0">
-                <a:solidFill>
-                  <a:srgbClr val="333333"/>
-                </a:solidFill>
-                <a:latin typeface="Microsoft JhengHei" pitchFamily="34" charset="0"/>
-                <a:ea typeface="Microsoft JhengHei" pitchFamily="34" charset="-122"/>
-                <a:cs typeface="Microsoft JhengHei" pitchFamily="34" charset="-120"/>
-              </a:rPr>
-              <a:t>需在前瞻性隊列中驗證</a:t>
+              <a:t>PD-1抑制劑增強療效</a:t>
             </a:r>
             <a:endParaRPr lang="en-US" sz="1800" dirty="0"/>
           </a:p>
@@ -7715,7 +7631,7 @@
                   <a:srgbClr val="888888"/>
                 </a:solidFill>
               </a:rPr>
-              <a:t>Chen Rihui, Yang Xiaochuan. Journal for immunotherapy of cancer. 2026-07-01 DOI: 10.1136/jitc-2026-015777</a:t>
+              <a:t>X Zhang, H Cai, W Peng. … and Targeted Therapy. 2026</a:t>
             </a:r>
             <a:endParaRPr lang="en-US" sz="800" dirty="0"/>
           </a:p>

--- a/docs/digest-zh.pptx
+++ b/docs/digest-zh.pptx
@@ -2269,7 +2269,7 @@
                   <a:srgbClr val="888888"/>
                 </a:solidFill>
               </a:rPr>
-              <a:t>2026-07-06 — 2026-07-13</a:t>
+              <a:t>2026-07-13 — 2026-07-20</a:t>
             </a:r>
             <a:endParaRPr lang="en-US" sz="1400" dirty="0"/>
           </a:p>
@@ -2460,7 +2460,7 @@
                   </a:extLst>
                 </a:hlinkClick>
               </a:rPr>
-              <a:t>The immunological paradox: immune checkpoint inhibitors in liver transplantation.</a:t>
+              <a:t>… plus transarterial chemoembolization and PD-1 inhibitors as conversion therapies for unresectable intermediate-advanced hepatocellular carcinoma: a phase 2 trial …</a:t>
             </a:r>
             <a:endParaRPr lang="en-US" sz="2400" dirty="0"/>
           </a:p>
@@ -2496,7 +2496,7 @@
                   <a:srgbClr val="888888"/>
                 </a:solidFill>
               </a:rPr>
-              <a:t>International journal of clinical oncology  ·  Review  ·  🌏 Asia</a:t>
+              <a:t>… and Targeted Therapy  ·  RCT Phase 2</a:t>
             </a:r>
             <a:endParaRPr lang="en-US" sz="1000" dirty="0"/>
           </a:p>
@@ -2539,7 +2539,7 @@
                 <a:ea typeface="Microsoft JhengHei" pitchFamily="34" charset="-122"/>
                 <a:cs typeface="Microsoft JhengHei" pitchFamily="34" charset="-120"/>
               </a:rPr>
-              <a:t>ICIs 改變 HCC 治療格局。</a:t>
+              <a:t>針對不可切除HCC的組合療法</a:t>
             </a:r>
             <a:endParaRPr lang="en-US" sz="1800" dirty="0"/>
           </a:p>
@@ -2560,7 +2560,7 @@
                 <a:ea typeface="Microsoft JhengHei" pitchFamily="34" charset="-122"/>
                 <a:cs typeface="Microsoft JhengHei" pitchFamily="34" charset="-120"/>
               </a:rPr>
-              <a:t>LT 需要免疫耐受以成功。</a:t>
+              <a:t>使用肝動脈化療栓塞(TACE)</a:t>
             </a:r>
             <a:endParaRPr lang="en-US" sz="1800" dirty="0"/>
           </a:p>
@@ -2581,7 +2581,7 @@
                 <a:ea typeface="Microsoft JhengHei" pitchFamily="34" charset="-122"/>
                 <a:cs typeface="Microsoft JhengHei" pitchFamily="34" charset="-120"/>
               </a:rPr>
-              <a:t>ICIs 破壞耐受，增強免疫力。</a:t>
+              <a:t>PD-1抑制劑提升治療效果</a:t>
             </a:r>
             <a:endParaRPr lang="en-US" sz="1800" dirty="0"/>
           </a:p>
@@ -2602,7 +2602,7 @@
                 <a:ea typeface="Microsoft JhengHei" pitchFamily="34" charset="-122"/>
                 <a:cs typeface="Microsoft JhengHei" pitchFamily="34" charset="-120"/>
               </a:rPr>
-              <a:t>新興生物標記預測 ICI 拒絕。</a:t>
+              <a:t>第二期試驗顯示良好結果</a:t>
             </a:r>
             <a:endParaRPr lang="en-US" sz="1800" dirty="0"/>
           </a:p>
@@ -2623,7 +2623,7 @@
                 <a:ea typeface="Microsoft JhengHei" pitchFamily="34" charset="-122"/>
                 <a:cs typeface="Microsoft JhengHei" pitchFamily="34" charset="-120"/>
               </a:rPr>
-              <a:t>活體捐贈 LT 的倫理問題。</a:t>
+              <a:t>有潛力轉變為可切除疾病</a:t>
             </a:r>
             <a:endParaRPr lang="en-US" sz="1800" dirty="0"/>
           </a:p>
@@ -2659,7 +2659,7 @@
                   <a:srgbClr val="888888"/>
                 </a:solidFill>
               </a:rPr>
-              <a:t>Ito Takashi, Okumura Shinya, Sakamoto Katsunori et al.. International journal of clinical oncology. 2026-07-11 DOI: 10.1007/s10147-026-03091-2</a:t>
+              <a:t>X Zhang, H Cai, W Peng. … and Targeted Therapy. 2026</a:t>
             </a:r>
             <a:endParaRPr lang="en-US" sz="800" dirty="0"/>
           </a:p>
@@ -2859,7 +2859,7 @@
                   </a:extLst>
                 </a:hlinkClick>
               </a:rPr>
-              <a:t>Comparative Effectiveness and Safety of Atezolizumab-Bevacizumab and Durvalumab-Tremelimumab as First-Line Systemic Therapy for Hepatocellular Carcinoma: A Real-World Study.</a:t>
+              <a:t>Disrupting fumarylacetoacetate hydrolase by stratified nanoplatforms orchestrates metabolic-immune reprogramming and prevents post-ablation HCC relapse.</a:t>
             </a:r>
             <a:endParaRPr lang="en-US" sz="2400" dirty="0"/>
           </a:p>
@@ -2895,7 +2895,7 @@
                   <a:srgbClr val="888888"/>
                 </a:solidFill>
               </a:rPr>
-              <a:t>Journal of gastroenterology and hepatology  ·  Retrospective Study  ·  🌏 Asia</a:t>
+              <a:t>Nature communications  ·  IF 14.7</a:t>
             </a:r>
             <a:endParaRPr lang="en-US" sz="1000" dirty="0"/>
           </a:p>
@@ -2938,7 +2938,7 @@
                 <a:ea typeface="Microsoft JhengHei" pitchFamily="34" charset="-122"/>
                 <a:cs typeface="Microsoft JhengHei" pitchFamily="34" charset="-120"/>
               </a:rPr>
-              <a:t>Atezo/Bev 和 Durva/Treme 為一線療法。</a:t>
+              <a:t>FAH 上調促進 HCC 复发。</a:t>
             </a:r>
             <a:endParaRPr lang="en-US" sz="1800" dirty="0"/>
           </a:p>
@@ -2959,7 +2959,7 @@
                 <a:ea typeface="Microsoft JhengHei" pitchFamily="34" charset="-122"/>
                 <a:cs typeface="Microsoft JhengHei" pitchFamily="34" charset="-120"/>
               </a:rPr>
-              <a:t>研究納入3362名符合條件的HCC患者。</a:t>
+              <a:t>Fumarate 增強能量代謝及 CD8+ T 細胞受損。</a:t>
             </a:r>
             <a:endParaRPr lang="en-US" sz="1800" dirty="0"/>
           </a:p>
@@ -2980,7 +2980,7 @@
                 <a:ea typeface="Microsoft JhengHei" pitchFamily="34" charset="-122"/>
                 <a:cs typeface="Microsoft JhengHei" pitchFamily="34" charset="-120"/>
               </a:rPr>
-              <a:t>總體生存率相似：14.6 vs. 17.3個月。</a:t>
+              <a:t>工程納米平台破壞 FAH-fumarate-HSP70 軸。</a:t>
             </a:r>
             <a:endParaRPr lang="en-US" sz="1800" dirty="0"/>
           </a:p>
@@ -3001,7 +3001,7 @@
                 <a:ea typeface="Microsoft JhengHei" pitchFamily="34" charset="-122"/>
                 <a:cs typeface="Microsoft JhengHei" pitchFamily="34" charset="-120"/>
               </a:rPr>
-              <a:t>Atezo/Bev 需要治療的irAE較少。</a:t>
+              <a:t>靶向釋放治療劑改善療效。</a:t>
             </a:r>
             <a:endParaRPr lang="en-US" sz="1800" dirty="0"/>
           </a:p>
@@ -3022,7 +3022,7 @@
                 <a:ea typeface="Microsoft JhengHei" pitchFamily="34" charset="-122"/>
                 <a:cs typeface="Microsoft JhengHei" pitchFamily="34" charset="-120"/>
               </a:rPr>
-              <a:t>安全性概況大致相似。</a:t>
+              <a:t>結合代謝阻斷與免疫調節防止 HCC。</a:t>
             </a:r>
             <a:endParaRPr lang="en-US" sz="1800" dirty="0"/>
           </a:p>
@@ -3058,7 +3058,7 @@
                   <a:srgbClr val="888888"/>
                 </a:solidFill>
               </a:rPr>
-              <a:t>Lin Shu Hsien, Wu Jia-Ling, Tsai Ying-Nan et al.. Journal of gastroenterology and hepatology. 2026-07-10 DOI: 10.1111/jgh.70555</a:t>
+              <a:t>Hong Zhiwen, Liu Xiaolong, A Rouhan et al.. Nature communications. 2026-07-14 DOI: 10.1038/s41467-026-75422-w</a:t>
             </a:r>
             <a:endParaRPr lang="en-US" sz="800" dirty="0"/>
           </a:p>
@@ -3258,7 +3258,7 @@
                   </a:extLst>
                 </a:hlinkClick>
               </a:rPr>
-              <a:t>Survival Outcomes After Liver Resection for Barcelona Clinic Liver Cancer Stage B Hepatocellular Carcinoma Have Improved in the Contemporary Era.</a:t>
+              <a:t>Nrf2-mediated metabolic reprogramming drives regulatory T cell accumulation in hepatocellular carcinoma.</a:t>
             </a:r>
             <a:endParaRPr lang="en-US" sz="2400" dirty="0"/>
           </a:p>
@@ -3294,7 +3294,7 @@
                   <a:srgbClr val="888888"/>
                 </a:solidFill>
               </a:rPr>
-              <a:t>Hepatology research : the official journal of the Japan Society of Hepatology  ·  Retrospective Study  ·  🌏 Asia</a:t>
+              <a:t>Nature communications  ·  IF 14.7</a:t>
             </a:r>
             <a:endParaRPr lang="en-US" sz="1000" dirty="0"/>
           </a:p>
@@ -3337,7 +3337,7 @@
                 <a:ea typeface="Microsoft JhengHei" pitchFamily="34" charset="-122"/>
                 <a:cs typeface="Microsoft JhengHei" pitchFamily="34" charset="-120"/>
               </a:rPr>
-              <a:t>BCLC-B HCC 切除術結果改善。</a:t>
+              <a:t>HCC中的Tregs活化Nrf2途徑。</a:t>
             </a:r>
             <a:endParaRPr lang="en-US" sz="1800" dirty="0"/>
           </a:p>
@@ -3358,7 +3358,7 @@
                 <a:ea typeface="Microsoft JhengHei" pitchFamily="34" charset="-122"/>
                 <a:cs typeface="Microsoft JhengHei" pitchFamily="34" charset="-120"/>
               </a:rPr>
-              <a:t>5年總生存率從44%提升至74%。</a:t>
+              <a:t>Nrf2增強Treg的存活與功能。</a:t>
             </a:r>
             <a:endParaRPr lang="en-US" sz="1800" dirty="0"/>
           </a:p>
@@ -3379,7 +3379,49 @@
                 <a:ea typeface="Microsoft JhengHei" pitchFamily="34" charset="-122"/>
                 <a:cs typeface="Microsoft JhengHei" pitchFamily="34" charset="-120"/>
               </a:rPr>
-              <a:t>復發後管理轉向新療法。</a:t>
+              <a:t>靶向Nrf2可減少Treg積累。</a:t>
+            </a:r>
+            <a:endParaRPr lang="en-US" sz="1800" dirty="0"/>
+          </a:p>
+          <a:p>
+            <a:pPr marL="342900" indent="-342900">
+              <a:spcAft>
+                <a:spcPts val="800"/>
+              </a:spcAft>
+              <a:buSzPct val="100000"/>
+              <a:buChar char="•"/>
+            </a:pPr>
+            <a:r>
+              <a:rPr lang="en-US" sz="1800" dirty="0">
+                <a:solidFill>
+                  <a:srgbClr val="333333"/>
+                </a:solidFill>
+                <a:latin typeface="Microsoft JhengHei" pitchFamily="34" charset="0"/>
+                <a:ea typeface="Microsoft JhengHei" pitchFamily="34" charset="-122"/>
+                <a:cs typeface="Microsoft JhengHei" pitchFamily="34" charset="-120"/>
+              </a:rPr>
+              <a:t>Treg中高Nrf2與預後不良相關。</a:t>
+            </a:r>
+            <a:endParaRPr lang="en-US" sz="1800" dirty="0"/>
+          </a:p>
+          <a:p>
+            <a:pPr marL="342900" indent="-342900">
+              <a:spcAft>
+                <a:spcPts val="800"/>
+              </a:spcAft>
+              <a:buSzPct val="100000"/>
+              <a:buChar char="•"/>
+            </a:pPr>
+            <a:r>
+              <a:rPr lang="en-US" sz="1800" dirty="0">
+                <a:solidFill>
+                  <a:srgbClr val="333333"/>
+                </a:solidFill>
+                <a:latin typeface="Microsoft JhengHei" pitchFamily="34" charset="0"/>
+                <a:ea typeface="Microsoft JhengHei" pitchFamily="34" charset="-122"/>
+                <a:cs typeface="Microsoft JhengHei" pitchFamily="34" charset="-120"/>
+              </a:rPr>
+              <a:t>Nrf2調節可能改善免疫治療效果。</a:t>
             </a:r>
             <a:endParaRPr lang="en-US" sz="1800" dirty="0"/>
           </a:p>
@@ -3415,7 +3457,7 @@
                   <a:srgbClr val="888888"/>
                 </a:solidFill>
               </a:rPr>
-              <a:t>Yamamoto Yoichi, Asahi Yoh, Shichi Shunsuke et al.. Hepatology research : the official journal of the Japan Society of Hepatology. 2026-07-09 DOI: 10.1111/hepr.70240</a:t>
+              <a:t>Perpi&amp;#xf1;&amp;#xe1;n E, Sompairac N, Marin Correa D et al.. Nature communications. 2026-07-13 DOI: 10.1038/s41467-026-73485-3</a:t>
             </a:r>
             <a:endParaRPr lang="en-US" sz="800" dirty="0"/>
           </a:p>
@@ -3632,7 +3674,7 @@
                   <a:srgbClr val="FFFFFF"/>
                 </a:solidFill>
               </a:rPr>
-              <a:t>1. **免疫療法的潛力與挑戰**  </a:t>
+              <a:t>1. **免疫療法的潛力**  </a:t>
             </a:r>
             <a:endParaRPr lang="en-US" sz="1200" dirty="0"/>
           </a:p>
@@ -3649,7 +3691,7 @@
                   <a:srgbClr val="FFFFFF"/>
                 </a:solidFill>
               </a:rPr>
-              <a:t>   The integration of immune checkpoint inhibitors (ICIs) has revolutionized the treatment landscape for advanced hepatocellular carcinoma (HCC), yet challenges such as primary resistance and limited durability of responses remain significant hurdles.  </a:t>
+              <a:t>   Immunotherapy, particularly PD-1 blockade, shows significant promise in enhancing local immune responses against hepatocellular carcinoma (HCC), especially in patients with underlying hepatitis B virus infection.  </a:t>
             </a:r>
             <a:endParaRPr lang="en-US" sz="1200" dirty="0"/>
           </a:p>
@@ -3666,7 +3708,7 @@
                   <a:srgbClr val="FFFFFF"/>
                 </a:solidFill>
               </a:rPr>
-              <a:t>   免疫檢查點抑制劑（ICIs）的整合已徹底改變了晚期肝細胞癌（HCC）的治療格局，但初級耐藥性和反應持久性有限等挑戰仍然是重大障礙。</a:t>
+              <a:t>   免疫療法，特別是PD-1抑制劑，顯示出在增強對肝細胞癌（HCC）的局部免疫反應方面的顯著潛力，尤其是在有乙型肝炎病毒感染的患者中。</a:t>
             </a:r>
             <a:endParaRPr lang="en-US" sz="1200" dirty="0"/>
           </a:p>
@@ -3692,7 +3734,7 @@
                   <a:srgbClr val="FFFFFF"/>
                 </a:solidFill>
               </a:rPr>
-              <a:t>2. **表觀遺傳療法的興起**  </a:t>
+              <a:t>2. **長期生存率的提升**  </a:t>
             </a:r>
             <a:endParaRPr lang="en-US" sz="1200" dirty="0"/>
           </a:p>
@@ -3709,7 +3751,7 @@
                   <a:srgbClr val="FFFFFF"/>
                 </a:solidFill>
               </a:rPr>
-              <a:t>   Emerging epigenetic therapies present new avenues for HCC treatment, particularly in overcoming resistance mechanisms associated with conventional therapies.  </a:t>
+              <a:t>   Immune checkpoint inhibitors (ICIs) can lead to long-term survival and potential cures in HCC, indicating the need for further exploration of their efficacy in various stages of the disease.  </a:t>
             </a:r>
             <a:endParaRPr lang="en-US" sz="1200" dirty="0"/>
           </a:p>
@@ -3726,7 +3768,7 @@
                   <a:srgbClr val="FFFFFF"/>
                 </a:solidFill>
               </a:rPr>
-              <a:t>   新興的表觀遺傳療法為HCC治療提供了新的途徑，特別是在克服與傳統療法相關的耐藥機制方面。</a:t>
+              <a:t>   免疫檢查點抑制劑（ICIs）能夠提高HCC的長期生存率並有潛在治癒的可能，這表明需要進一步探索其在不同疾病階段的療效。</a:t>
             </a:r>
             <a:endParaRPr lang="en-US" sz="1200" dirty="0"/>
           </a:p>
@@ -3752,7 +3794,7 @@
                   <a:srgbClr val="FFFFFF"/>
                 </a:solidFill>
               </a:rPr>
-              <a:t>3. **局部治療與全身療法的協同作用**  </a:t>
+              <a:t>3. **腫瘤微環境的重塑**  </a:t>
             </a:r>
             <a:endParaRPr lang="en-US" sz="1200" dirty="0"/>
           </a:p>
@@ -3769,7 +3811,7 @@
                   <a:srgbClr val="FFFFFF"/>
                 </a:solidFill>
               </a:rPr>
-              <a:t>   Combining locoregional therapies, such as transarterial chemoembolization (TACE) and stereotactic body radiotherapy, with systemic therapies like ICIs shows promise in improving patient outcomes.  </a:t>
+              <a:t>   Combining immunotherapy with locoregional therapies, such as stereotactic body radiotherapy, can favorably remodel the tumor microenvironment, enhancing treatment outcomes.  </a:t>
             </a:r>
             <a:endParaRPr lang="en-US" sz="1200" dirty="0"/>
           </a:p>
@@ -3786,7 +3828,7 @@
                   <a:srgbClr val="FFFFFF"/>
                 </a:solidFill>
               </a:rPr>
-              <a:t>   將局部療法（如經動脈化療栓塞（TACE）和立體定向體放射治療）與全身療法（如ICIs）結合在一起，對改善患者預後顯示出希望。</a:t>
+              <a:t>   將免疫療法與局部治療（如立體定向體放療）結合，可以有利於重塑腫瘤微環境，從而改善治療結果。</a:t>
             </a:r>
             <a:endParaRPr lang="en-US" sz="1200" dirty="0"/>
           </a:p>
@@ -3812,7 +3854,7 @@
                   <a:srgbClr val="FFFFFF"/>
                 </a:solidFill>
               </a:rPr>
-              <a:t>4. **生物標誌物的缺乏**  </a:t>
+              <a:t>4. **抵抗機制的探索**  </a:t>
             </a:r>
             <a:endParaRPr lang="en-US" sz="1200" dirty="0"/>
           </a:p>
@@ -3829,7 +3871,7 @@
                   <a:srgbClr val="FFFFFF"/>
                 </a:solidFill>
               </a:rPr>
-              <a:t>   The absence of validated predictive biomarkers limits the ability to tailor treatments effectively, underscoring the need for further research in biomarker discovery for HCC.  </a:t>
+              <a:t>   Identifying novel regulators of immune responses, such as STK40, is crucial for understanding resistance mechanisms in HCC and developing more effective therapies.  </a:t>
             </a:r>
             <a:endParaRPr lang="en-US" sz="1200" dirty="0"/>
           </a:p>
@@ -3846,7 +3888,7 @@
                   <a:srgbClr val="FFFFFF"/>
                 </a:solidFill>
               </a:rPr>
-              <a:t>   缺乏經過驗證的預測生物標誌物限制了有效調整治療的能力，突顯了對HCC生物標誌物發現進一步研究的需求。</a:t>
+              <a:t>   確定免疫反應的新調節因子（如STK40）對於理解HCC中的抵抗機制和開發更有效的療法至關重要。</a:t>
             </a:r>
             <a:endParaRPr lang="en-US" sz="1200" dirty="0"/>
           </a:p>
@@ -3872,7 +3914,7 @@
                   <a:srgbClr val="FFFFFF"/>
                 </a:solidFill>
               </a:rPr>
-              <a:t>5. **多學科合作的重要性**  </a:t>
+              <a:t>5. **代謝和免疫重編程**  </a:t>
             </a:r>
             <a:endParaRPr lang="en-US" sz="1200" dirty="0"/>
           </a:p>
@@ -3889,7 +3931,7 @@
                   <a:srgbClr val="FFFFFF"/>
                 </a:solidFill>
               </a:rPr>
-              <a:t>   Advances in imaging and multidisciplinary approaches are essential for improving surgical outcomes and overall survival in HCC patients.</a:t>
+              <a:t>   Targeting metabolic pathways in HCC can disrupt immunosuppressive environments and prevent recurrence post-ablation, highlighting the interplay between metabolism and immunity.</a:t>
             </a:r>
             <a:endParaRPr lang="en-US" sz="1200" dirty="0"/>
           </a:p>
@@ -4035,7 +4077,7 @@
                   <a:srgbClr val="FFFFFF"/>
                 </a:solidFill>
               </a:rPr>
-              <a:t>成像技術的進步和多學科方法對改善HCC患者的手術結果和整體生存率至關重要。</a:t>
+              <a:t>針對HCC中的代謝途徑可以破壞免疫抑制環境並防止消融後的復發，突顯了代謝與免疫之間的相互作用。</a:t>
             </a:r>
             <a:endParaRPr lang="en-US" sz="1200" dirty="0"/>
           </a:p>
@@ -4087,7 +4129,7 @@
                   <a:srgbClr val="FFFFFF"/>
                 </a:solidFill>
               </a:rPr>
-              <a:t>1. **耐藥機制的深入研究**  </a:t>
+              <a:t>1. **個性化療法的發展**  </a:t>
             </a:r>
             <a:endParaRPr lang="en-US" sz="1200" dirty="0"/>
           </a:p>
@@ -4104,7 +4146,7 @@
                   <a:srgbClr val="FFFFFF"/>
                 </a:solidFill>
               </a:rPr>
-              <a:t>   Investigating the molecular mechanisms underlying resistance to ICIs and other therapies is critical for developing strategies to enhance treatment efficacy.  </a:t>
+              <a:t>   Further studies should focus on personalized immunotherapy approaches that consider the unique tumor microenvironment and patient-specific factors in HCC.  </a:t>
             </a:r>
             <a:endParaRPr lang="en-US" sz="1200" dirty="0"/>
           </a:p>
@@ -4121,7 +4163,7 @@
                   <a:srgbClr val="FFFFFF"/>
                 </a:solidFill>
               </a:rPr>
-              <a:t>   深入研究ICIs和其他療法耐藥的分子機制對於開發增強治療效果的策略至關重要。</a:t>
+              <a:t>   未來的研究應集中於個性化免疫療法的發展，考慮HCC中獨特的腫瘤微環境和患者特定因素。</a:t>
             </a:r>
             <a:endParaRPr lang="en-US" sz="1200" dirty="0"/>
           </a:p>
@@ -4147,7 +4189,7 @@
                   <a:srgbClr val="FFFFFF"/>
                 </a:solidFill>
               </a:rPr>
-              <a:t>2. **新型生物標誌物的探索**  </a:t>
+              <a:t>2. **多重療法的組合**  </a:t>
             </a:r>
             <a:endParaRPr lang="en-US" sz="1200" dirty="0"/>
           </a:p>
@@ -4164,7 +4206,7 @@
                   <a:srgbClr val="FFFFFF"/>
                 </a:solidFill>
               </a:rPr>
-              <a:t>   Future studies should focus on identifying and validating biomarkers that can predict response to immunotherapy and guide personalized treatment approaches.  </a:t>
+              <a:t>   Investigating the synergistic effects of combining immune checkpoint inhibitors with other treatments, such as targeted therapies and locoregional approaches, to improve patient outcomes.  </a:t>
             </a:r>
             <a:endParaRPr lang="en-US" sz="1200" dirty="0"/>
           </a:p>
@@ -4181,7 +4223,7 @@
                   <a:srgbClr val="FFFFFF"/>
                 </a:solidFill>
               </a:rPr>
-              <a:t>   未來的研究應集中於識別和驗證能預測免疫療法反應的生物標誌物，並指導個性化治療方法。</a:t>
+              <a:t>   探索將免疫檢查點抑制劑與其他治療（如靶向療法和局部療法）組合的協同效應，以改善患者預後。</a:t>
             </a:r>
             <a:endParaRPr lang="en-US" sz="1200" dirty="0"/>
           </a:p>
@@ -4207,7 +4249,7 @@
                   <a:srgbClr val="FFFFFF"/>
                 </a:solidFill>
               </a:rPr>
-              <a:t>3. **表觀遺傳療法的臨床應用**  </a:t>
+              <a:t>3. **抵抗機制的深入研究**  </a:t>
             </a:r>
             <a:endParaRPr lang="en-US" sz="1200" dirty="0"/>
           </a:p>
@@ -4224,7 +4266,7 @@
                   <a:srgbClr val="FFFFFF"/>
                 </a:solidFill>
               </a:rPr>
-              <a:t>   Clinical trials exploring the efficacy of epigenetic therapies in combination with existing treatments for HCC are necessary to establish their role in therapy.  </a:t>
+              <a:t>   More research is needed to elucidate the mechanisms of resistance to immunotherapy in HCC, particularly focusing on metabolic adaptations and immune evasion strategies.  </a:t>
             </a:r>
             <a:endParaRPr lang="en-US" sz="1200" dirty="0"/>
           </a:p>
@@ -4241,7 +4283,7 @@
                   <a:srgbClr val="FFFFFF"/>
                 </a:solidFill>
               </a:rPr>
-              <a:t>   探索表觀遺傳療法與現有HCC治療組合的臨床試驗是必要的，以確立其在治療中的角色。</a:t>
+              <a:t>   需要更多研究來闡明HCC中對免疫療法的抵抗機制，特別是集中於代謝適應和免疫逃逸策略。</a:t>
             </a:r>
             <a:endParaRPr lang="en-US" sz="1200" dirty="0"/>
           </a:p>
@@ -4267,7 +4309,7 @@
                   <a:srgbClr val="FFFFFF"/>
                 </a:solidFill>
               </a:rPr>
-              <a:t>4. **多模態治療策略的發展**  </a:t>
+              <a:t>4. **早期介入的臨床試驗**  </a:t>
             </a:r>
             <a:endParaRPr lang="en-US" sz="1200" dirty="0"/>
           </a:p>
@@ -4284,7 +4326,7 @@
                   <a:srgbClr val="FFFFFF"/>
                 </a:solidFill>
               </a:rPr>
-              <a:t>   Research should focus on developing multimodal treatment strategies that integrate systemic and locoregional therapies to optimize patient outcomes.  </a:t>
+              <a:t>   Conducting clinical trials on the efficacy of immunotherapy in earlier stages of HCC, to establish optimal treatment protocols and timing.  </a:t>
             </a:r>
             <a:endParaRPr lang="en-US" sz="1200" dirty="0"/>
           </a:p>
@@ -4301,7 +4343,7 @@
                   <a:srgbClr val="FFFFFF"/>
                 </a:solidFill>
               </a:rPr>
-              <a:t>   研究應集中於開發整合全身療法和局部療法的多模態治療策略，以優化患者預後。</a:t>
+              <a:t>   開展關於免疫療法在HCC早期階段療效的臨床試驗，以確立最佳治療方案和時機。</a:t>
             </a:r>
             <a:endParaRPr lang="en-US" sz="1200" dirty="0"/>
           </a:p>
@@ -4327,7 +4369,7 @@
                   <a:srgbClr val="FFFFFF"/>
                 </a:solidFill>
               </a:rPr>
-              <a:t>5. **長期隨訪與數據收集**  </a:t>
+              <a:t>5. **代謝與免疫的交互作用**  </a:t>
             </a:r>
             <a:endParaRPr lang="en-US" sz="1200" dirty="0"/>
           </a:p>
@@ -4344,7 +4386,7 @@
                   <a:srgbClr val="FFFFFF"/>
                 </a:solidFill>
               </a:rPr>
-              <a:t>   Long-term follow-up studies are essential to assess the durability of responses and overall survival in patients receiving novel therapies for HCC.  </a:t>
+              <a:t>   Investigating the metabolic reprogramming in HCC and its impact on immune cell function, aiming to develop strategies that can enhance anti-tumor immunity.  </a:t>
             </a:r>
             <a:endParaRPr lang="en-US" sz="1200" dirty="0"/>
           </a:p>
@@ -4361,7 +4403,7 @@
                   <a:srgbClr val="FFFFFF"/>
                 </a:solidFill>
               </a:rPr>
-              <a:t>   長期隨訪研究對於評估接受新療法的HCC患者的反應持久性和整體生存率至關重要。</a:t>
+              <a:t>   研究HCC中的代謝重編程及其對免疫細胞功能的影響，旨在開發可以增強抗腫瘤免疫的策略。</a:t>
             </a:r>
             <a:endParaRPr lang="en-US" sz="1200" dirty="0"/>
           </a:p>
@@ -4634,7 +4676,7 @@
                 <a:ea typeface="Arial" pitchFamily="34" charset="-122"/>
                 <a:cs typeface="Arial" pitchFamily="34" charset="-120"/>
               </a:rPr>
-              <a:t>Epigenetic therapies in hepatocellular carcinoma: emerging clinical tools and ap…</a:t>
+              <a:t>PD-1 blockade unleashes local hepatitis B virus-related B cell response inhibiti…</a:t>
             </a:r>
             <a:endParaRPr lang="en-US" sz="1400" dirty="0"/>
           </a:p>
@@ -4671,7 +4713,7 @@
                 <a:ea typeface="Arial" pitchFamily="34" charset="-122"/>
                 <a:cs typeface="Arial" pitchFamily="34" charset="-120"/>
               </a:rPr>
-              <a:t>Epigenetic therapies in hepatocellular carcinoma: emerging clinical tools and ap…</a:t>
+              <a:t>Long-term Survival and Cure Fraction in Patients with Advanced Hepatocellular Ca…</a:t>
             </a:r>
             <a:endParaRPr lang="en-US" sz="1400" dirty="0"/>
           </a:p>
@@ -4708,7 +4750,7 @@
                 <a:ea typeface="Arial" pitchFamily="34" charset="-122"/>
                 <a:cs typeface="Arial" pitchFamily="34" charset="-120"/>
               </a:rPr>
-              <a:t>Pembrolizumab and stereotactic body radiotherapy combined in advanced hepatocell…</a:t>
+              <a:t>Targeting tumor-intrinsic STK40 induces immune vulnerability and drives T cell r…</a:t>
             </a:r>
             <a:endParaRPr lang="en-US" sz="1400" dirty="0"/>
           </a:p>
@@ -4745,7 +4787,7 @@
                 <a:ea typeface="Arial" pitchFamily="34" charset="-122"/>
                 <a:cs typeface="Arial" pitchFamily="34" charset="-120"/>
               </a:rPr>
-              <a:t>Hepatocellular carcinoma: new therapies on the horizon.</a:t>
+              <a:t>Pembrolizumab and stereotactic body radiotherapy combined in advanced hepatocell…</a:t>
             </a:r>
             <a:endParaRPr lang="en-US" sz="1400" dirty="0"/>
           </a:p>
@@ -4782,7 +4824,7 @@
                 <a:ea typeface="Arial" pitchFamily="34" charset="-122"/>
                 <a:cs typeface="Arial" pitchFamily="34" charset="-120"/>
               </a:rPr>
-              <a:t>UDP-glucuronate decarboxylase 1 promotes tumor immune evasion by accelerating KM…</a:t>
+              <a:t>Neoadjuvant Stereotactic Body Radiotherapy plus Immune Therapy Favorably Remodel…</a:t>
             </a:r>
             <a:endParaRPr lang="en-US" sz="1400" dirty="0"/>
           </a:p>
@@ -4819,7 +4861,7 @@
                 <a:ea typeface="Arial" pitchFamily="34" charset="-122"/>
                 <a:cs typeface="Arial" pitchFamily="34" charset="-120"/>
               </a:rPr>
-              <a:t>Long-term follow-up of a phase 1/2 trial of anti-GDF-15 antibody visugromab plus…</a:t>
+              <a:t>Second-Line and Subsequent Therapies after Atezolizumab Plus Bevacizumab Treatme…</a:t>
             </a:r>
             <a:endParaRPr lang="en-US" sz="1400" dirty="0"/>
           </a:p>
@@ -4856,7 +4898,7 @@
                 <a:ea typeface="Arial" pitchFamily="34" charset="-122"/>
                 <a:cs typeface="Arial" pitchFamily="34" charset="-120"/>
               </a:rPr>
-              <a:t>… plus transarterial chemoembolization and PD-1 inhibitors as conversion therapi…</a:t>
+              <a:t>Mechanistic synergies and optimal sequencing of anti&amp;#x2011;VEGF plus immune che…</a:t>
             </a:r>
             <a:endParaRPr lang="en-US" sz="1400" dirty="0"/>
           </a:p>
@@ -4893,7 +4935,7 @@
                 <a:ea typeface="Arial" pitchFamily="34" charset="-122"/>
                 <a:cs typeface="Arial" pitchFamily="34" charset="-120"/>
               </a:rPr>
-              <a:t>The immunological paradox: immune checkpoint inhibitors in liver transplantation…</a:t>
+              <a:t>… plus transarterial chemoembolization and PD-1 inhibitors as conversion therapi…</a:t>
             </a:r>
             <a:endParaRPr lang="en-US" sz="1400" dirty="0"/>
           </a:p>
@@ -4930,7 +4972,7 @@
                 <a:ea typeface="Arial" pitchFamily="34" charset="-122"/>
                 <a:cs typeface="Arial" pitchFamily="34" charset="-120"/>
               </a:rPr>
-              <a:t>Comparative Effectiveness and Safety of Atezolizumab-Bevacizumab and Durvalumab-…</a:t>
+              <a:t>Disrupting fumarylacetoacetate hydrolase by stratified nanoplatforms orchestrate…</a:t>
             </a:r>
             <a:endParaRPr lang="en-US" sz="1400" dirty="0"/>
           </a:p>
@@ -4967,7 +5009,7 @@
                 <a:ea typeface="Arial" pitchFamily="34" charset="-122"/>
                 <a:cs typeface="Arial" pitchFamily="34" charset="-120"/>
               </a:rPr>
-              <a:t>Survival Outcomes After Liver Resection for Barcelona Clinic Liver Cancer Stage …</a:t>
+              <a:t>Nrf2-mediated metabolic reprogramming drives regulatory T cell accumulation in h…</a:t>
             </a:r>
             <a:endParaRPr lang="en-US" sz="1400" dirty="0"/>
           </a:p>
@@ -5122,7 +5164,7 @@
                   </a:extLst>
                 </a:hlinkClick>
               </a:rPr>
-              <a:t>Epigenetic therapies in hepatocellular carcinoma: emerging clinical tools and applications.</a:t>
+              <a:t>PD-1 blockade unleashes local hepatitis B virus-related B cell response inhibiting hepatocellular carcinoma.</a:t>
             </a:r>
             <a:endParaRPr lang="en-US" sz="2400" dirty="0"/>
           </a:p>
@@ -5158,7 +5200,7 @@
                   <a:srgbClr val="888888"/>
                 </a:solidFill>
               </a:rPr>
-              <a:t>Gut  ·  IF 24.5  ·  Review</a:t>
+              <a:t>Cancer cell  ·  IF 48.8  ·  RCT Phase 2</a:t>
             </a:r>
             <a:endParaRPr lang="en-US" sz="1000" dirty="0"/>
           </a:p>
@@ -5201,7 +5243,7 @@
                 <a:ea typeface="Microsoft JhengHei" pitchFamily="34" charset="-122"/>
                 <a:cs typeface="Microsoft JhengHei" pitchFamily="34" charset="-120"/>
               </a:rPr>
-              <a:t>HCC 是癌症死亡的主要原因。</a:t>
+              <a:t>PD-1 阻斷增強 B 細胞反應。</a:t>
             </a:r>
             <a:endParaRPr lang="en-US" sz="1800" dirty="0"/>
           </a:p>
@@ -5222,7 +5264,7 @@
                 <a:ea typeface="Microsoft JhengHei" pitchFamily="34" charset="-122"/>
                 <a:cs typeface="Microsoft JhengHei" pitchFamily="34" charset="-120"/>
               </a:rPr>
-              <a:t>現有療法在晚期效果有限。</a:t>
+              <a:t>識別出不同 T 細胞和 B 細胞亞型。</a:t>
             </a:r>
             <a:endParaRPr lang="en-US" sz="1800" dirty="0"/>
           </a:p>
@@ -5243,7 +5285,7 @@
                 <a:ea typeface="Microsoft JhengHei" pitchFamily="34" charset="-122"/>
                 <a:cs typeface="Microsoft JhengHei" pitchFamily="34" charset="-120"/>
               </a:rPr>
-              <a:t>表觀遺傳失調促進腫瘤進展。</a:t>
+              <a:t>HBcAg 觸發局部 B 細胞活化。</a:t>
             </a:r>
             <a:endParaRPr lang="en-US" sz="1800" dirty="0"/>
           </a:p>
@@ -5264,7 +5306,7 @@
                 <a:ea typeface="Microsoft JhengHei" pitchFamily="34" charset="-122"/>
                 <a:cs typeface="Microsoft JhengHei" pitchFamily="34" charset="-120"/>
               </a:rPr>
-              <a:t>新興 'epidrugs' 顯示臨床潛力。</a:t>
+              <a:t>補體活化介導抗腫瘤效果。</a:t>
             </a:r>
             <a:endParaRPr lang="en-US" sz="1800" dirty="0"/>
           </a:p>
@@ -5285,7 +5327,7 @@
                 <a:ea typeface="Microsoft JhengHei" pitchFamily="34" charset="-122"/>
                 <a:cs typeface="Microsoft JhengHei" pitchFamily="34" charset="-120"/>
               </a:rPr>
-              <a:t>針對表觀遺傳學可增強現有療法。</a:t>
+              <a:t>研究支持抗 PD-1 治療療效。</a:t>
             </a:r>
             <a:endParaRPr lang="en-US" sz="1800" dirty="0"/>
           </a:p>
@@ -5321,7 +5363,7 @@
                   <a:srgbClr val="888888"/>
                 </a:solidFill>
               </a:rPr>
-              <a:t>Bueloni Barbara, G Fernandez-Barrena Maite, Fiore Esteban et al.. Gut. 2026-07-08 DOI: 10.1136/gutjnl-2025-336317</a:t>
+              <a:t>Chen Shuling, Wang Yuanqi, Chen Jingying et al.. Cancer cell. 2026-07-16 DOI: 10.1016/j.ccell.2026.06.010</a:t>
             </a:r>
             <a:endParaRPr lang="en-US" sz="800" dirty="0"/>
           </a:p>
@@ -5521,7 +5563,7 @@
                   </a:extLst>
                 </a:hlinkClick>
               </a:rPr>
-              <a:t>Epigenetic therapies in hepatocellular carcinoma: emerging clinical tools and applications</a:t>
+              <a:t>Long-term Survival and Cure Fraction in Patients with Advanced Hepatocellular Carcinoma under Immunotherapy in Randomized Controlled Trials and Real-world Data.</a:t>
             </a:r>
             <a:endParaRPr lang="en-US" sz="2400" dirty="0"/>
           </a:p>
@@ -5557,7 +5599,7 @@
                   <a:srgbClr val="888888"/>
                 </a:solidFill>
               </a:rPr>
-              <a:t>Gut  ·  IF 24.5</a:t>
+              <a:t>Clinical cancer research : an official journal of the American Association for Cancer Research  ·  IF 11.5  ·  RCT Phase 3  ·  🌏 Asia</a:t>
             </a:r>
             <a:endParaRPr lang="en-US" sz="1000" dirty="0"/>
           </a:p>
@@ -5600,7 +5642,7 @@
                 <a:ea typeface="Microsoft JhengHei" pitchFamily="34" charset="-122"/>
                 <a:cs typeface="Microsoft JhengHei" pitchFamily="34" charset="-120"/>
               </a:rPr>
-              <a:t>表觀遺傳療法在HCC中展現潛力。</a:t>
+              <a:t>免疫檢查點抑制劑提升存活率。</a:t>
             </a:r>
             <a:endParaRPr lang="en-US" sz="1800" dirty="0"/>
           </a:p>
@@ -5621,7 +5663,7 @@
                 <a:ea typeface="Microsoft JhengHei" pitchFamily="34" charset="-122"/>
                 <a:cs typeface="Microsoft JhengHei" pitchFamily="34" charset="-120"/>
               </a:rPr>
-              <a:t>與ICIs結合提高治療效果。</a:t>
+              <a:t>長期存活率介於10%至15%。</a:t>
             </a:r>
             <a:endParaRPr lang="en-US" sz="1800" dirty="0"/>
           </a:p>
@@ -5642,7 +5684,49 @@
                 <a:ea typeface="Microsoft JhengHei" pitchFamily="34" charset="-122"/>
                 <a:cs typeface="Microsoft JhengHei" pitchFamily="34" charset="-120"/>
               </a:rPr>
-              <a:t>個性化醫療的新興工具。</a:t>
+              <a:t>治癒比例估計為7%至9%。</a:t>
+            </a:r>
+            <a:endParaRPr lang="en-US" sz="1800" dirty="0"/>
+          </a:p>
+          <a:p>
+            <a:pPr marL="342900" indent="-342900">
+              <a:spcAft>
+                <a:spcPts val="800"/>
+              </a:spcAft>
+              <a:buSzPct val="100000"/>
+              <a:buChar char="•"/>
+            </a:pPr>
+            <a:r>
+              <a:rPr lang="en-US" sz="1800" dirty="0">
+                <a:solidFill>
+                  <a:srgbClr val="333333"/>
+                </a:solidFill>
+                <a:latin typeface="Microsoft JhengHei" pitchFamily="34" charset="0"/>
+                <a:ea typeface="Microsoft JhengHei" pitchFamily="34" charset="-122"/>
+                <a:cs typeface="Microsoft JhengHei" pitchFamily="34" charset="-120"/>
+              </a:rPr>
+              <a:t>Durvalumab-tremelimumab顯示良好結果。</a:t>
+            </a:r>
+            <a:endParaRPr lang="en-US" sz="1800" dirty="0"/>
+          </a:p>
+          <a:p>
+            <a:pPr marL="342900" indent="-342900">
+              <a:spcAft>
+                <a:spcPts val="800"/>
+              </a:spcAft>
+              <a:buSzPct val="100000"/>
+              <a:buChar char="•"/>
+            </a:pPr>
+            <a:r>
+              <a:rPr lang="en-US" sz="1800" dirty="0">
+                <a:solidFill>
+                  <a:srgbClr val="333333"/>
+                </a:solidFill>
+                <a:latin typeface="Microsoft JhengHei" pitchFamily="34" charset="0"/>
+                <a:ea typeface="Microsoft JhengHei" pitchFamily="34" charset="-122"/>
+                <a:cs typeface="Microsoft JhengHei" pitchFamily="34" charset="-120"/>
+              </a:rPr>
+              <a:t>白蛋白-膽紅素得分預測存活結果。</a:t>
             </a:r>
             <a:endParaRPr lang="en-US" sz="1800" dirty="0"/>
           </a:p>
@@ -5678,7 +5762,7 @@
                   <a:srgbClr val="888888"/>
                 </a:solidFill>
               </a:rPr>
-              <a:t>B Bueloni, MG Fernandez-Barrena, E Fiore. Gut. 2026</a:t>
+              <a:t>Campani Claudia, Shim Ju Hyun, Bouattour Mohamed et al.. Clinical cancer research : an official journal of the American Association for Cancer Research. 2026-07-17 DOI: 10.1158/1078-0432.CCR-25-4943</a:t>
             </a:r>
             <a:endParaRPr lang="en-US" sz="800" dirty="0"/>
           </a:p>
@@ -5878,7 +5962,7 @@
                   </a:extLst>
                 </a:hlinkClick>
               </a:rPr>
-              <a:t>Pembrolizumab and stereotactic body radiotherapy combined in advanced hepatocellular carcinoma post sorafenib–A phase II trial (PEMRAD)</a:t>
+              <a:t>Targeting tumor-intrinsic STK40 induces immune vulnerability and drives T cell reinvigoration.</a:t>
             </a:r>
             <a:endParaRPr lang="en-US" sz="2400" dirty="0"/>
           </a:p>
@@ -5914,7 +5998,7 @@
                   <a:srgbClr val="888888"/>
                 </a:solidFill>
               </a:rPr>
-              <a:t>JHEP Reports  ·  IF 7.8  ·  RCT Phase 2</a:t>
+              <a:t>Cancer cell  ·  IF 48.8  ·  Basic Research</a:t>
             </a:r>
             <a:endParaRPr lang="en-US" sz="1000" dirty="0"/>
           </a:p>
@@ -5957,7 +6041,7 @@
                 <a:ea typeface="Microsoft JhengHei" pitchFamily="34" charset="-122"/>
                 <a:cs typeface="Microsoft JhengHei" pitchFamily="34" charset="-120"/>
               </a:rPr>
-              <a:t>結合 pembrolizumab 與 SBRT</a:t>
+              <a:t>STK40被認定為免疫逃逸調節因子</a:t>
             </a:r>
             <a:endParaRPr lang="en-US" sz="1800" dirty="0"/>
           </a:p>
@@ -5978,7 +6062,7 @@
                 <a:ea typeface="Microsoft JhengHei" pitchFamily="34" charset="-122"/>
                 <a:cs typeface="Microsoft JhengHei" pitchFamily="34" charset="-120"/>
               </a:rPr>
-              <a:t>針對晚期 HCC 的二期試驗</a:t>
+              <a:t>去除STK40增強PD-1療效</a:t>
             </a:r>
             <a:endParaRPr lang="en-US" sz="1800" dirty="0"/>
           </a:p>
@@ -5999,7 +6083,7 @@
                 <a:ea typeface="Microsoft JhengHei" pitchFamily="34" charset="-122"/>
                 <a:cs typeface="Microsoft JhengHei" pitchFamily="34" charset="-120"/>
               </a:rPr>
-              <a:t>評估索拉非尼後治療效果</a:t>
+              <a:t>STK40缺失防止HCC腫瘤形成</a:t>
             </a:r>
             <a:endParaRPr lang="en-US" sz="1800" dirty="0"/>
           </a:p>
@@ -6020,7 +6104,7 @@
                 <a:ea typeface="Microsoft JhengHei" pitchFamily="34" charset="-122"/>
                 <a:cs typeface="Microsoft JhengHei" pitchFamily="34" charset="-120"/>
               </a:rPr>
-              <a:t>增強免疫反應的潛力</a:t>
+              <a:t>STK40缺失穩定IFNGR1</a:t>
             </a:r>
             <a:endParaRPr lang="en-US" sz="1800" dirty="0"/>
           </a:p>
@@ -6041,7 +6125,7 @@
                 <a:ea typeface="Microsoft JhengHei" pitchFamily="34" charset="-122"/>
                 <a:cs typeface="Microsoft JhengHei" pitchFamily="34" charset="-120"/>
               </a:rPr>
-              <a:t>進行安全性與療效評估</a:t>
+              <a:t>藥物抑制顯示強效抗腫瘤效果</a:t>
             </a:r>
             <a:endParaRPr lang="en-US" sz="1800" dirty="0"/>
           </a:p>
@@ -6077,7 +6161,7 @@
                   <a:srgbClr val="888888"/>
                 </a:solidFill>
               </a:rPr>
-              <a:t>GM O'Kane, A Mesci, RW Jang. JHEP Reports. 2026</a:t>
+              <a:t>Zhu Lili, Zhang Sisi, Li Botai et al.. Cancer cell. 2026-07-14 DOI: 10.1016/j.ccell.2026.05.001</a:t>
             </a:r>
             <a:endParaRPr lang="en-US" sz="800" dirty="0"/>
           </a:p>
@@ -6277,7 +6361,7 @@
                   </a:extLst>
                 </a:hlinkClick>
               </a:rPr>
-              <a:t>Hepatocellular carcinoma: new therapies on the horizon.</a:t>
+              <a:t>Pembrolizumab and stereotactic body radiotherapy combined in advanced hepatocellular carcinoma post sorafenib–A phase II trial (PEMRAD)</a:t>
             </a:r>
             <a:endParaRPr lang="en-US" sz="2400" dirty="0"/>
           </a:p>
@@ -6313,7 +6397,7 @@
                   <a:srgbClr val="888888"/>
                 </a:solidFill>
               </a:rPr>
-              <a:t>Expert review of gastroenterology &amp; hepatology  ·  Prospective Study  ·  🌏 Asia</a:t>
+              <a:t>JHEP Reports  ·  IF 7.8  ·  RCT Phase 2</a:t>
             </a:r>
             <a:endParaRPr lang="en-US" sz="1000" dirty="0"/>
           </a:p>
@@ -6356,7 +6440,7 @@
                 <a:ea typeface="Microsoft JhengHei" pitchFamily="34" charset="-122"/>
                 <a:cs typeface="Microsoft JhengHei" pitchFamily="34" charset="-120"/>
               </a:rPr>
-              <a:t>ICIs為晚期HCC的前線治療。</a:t>
+              <a:t>結合 pembrolizumab 和 SBRT</a:t>
             </a:r>
             <a:endParaRPr lang="en-US" sz="1800" dirty="0"/>
           </a:p>
@@ -6377,7 +6461,7 @@
                 <a:ea typeface="Microsoft JhengHei" pitchFamily="34" charset="-122"/>
                 <a:cs typeface="Microsoft JhengHei" pitchFamily="34" charset="-120"/>
               </a:rPr>
-              <a:t>新療法包括新型系統藥物。</a:t>
+              <a:t>針對晚期 HCC 的二期試驗</a:t>
             </a:r>
             <a:endParaRPr lang="en-US" sz="1800" dirty="0"/>
           </a:p>
@@ -6398,7 +6482,7 @@
                 <a:ea typeface="Microsoft JhengHei" pitchFamily="34" charset="-122"/>
                 <a:cs typeface="Microsoft JhengHei" pitchFamily="34" charset="-120"/>
               </a:rPr>
-              <a:t>新輔助ICI方案顯示良好反應。</a:t>
+              <a:t>評估索拉非尼後療效</a:t>
             </a:r>
             <a:endParaRPr lang="en-US" sz="1800" dirty="0"/>
           </a:p>
@@ -6419,7 +6503,7 @@
                 <a:ea typeface="Microsoft JhengHei" pitchFamily="34" charset="-122"/>
                 <a:cs typeface="Microsoft JhengHei" pitchFamily="34" charset="-120"/>
               </a:rPr>
-              <a:t>聯合療法改善無進展生存期。</a:t>
+              <a:t>觀察到改善的病人結果</a:t>
             </a:r>
             <a:endParaRPr lang="en-US" sz="1800" dirty="0"/>
           </a:p>
@@ -6440,7 +6524,7 @@
                 <a:ea typeface="Microsoft JhengHei" pitchFamily="34" charset="-122"/>
                 <a:cs typeface="Microsoft JhengHei" pitchFamily="34" charset="-120"/>
               </a:rPr>
-              <a:t>個性化局部治療方法的應用。</a:t>
+              <a:t>增強免疫反應的潛力</a:t>
             </a:r>
             <a:endParaRPr lang="en-US" sz="1800" dirty="0"/>
           </a:p>
@@ -6476,7 +6560,7 @@
                   <a:srgbClr val="888888"/>
                 </a:solidFill>
               </a:rPr>
-              <a:t>Yuza Kizuki, Akabane Miho, Kawashima Jun et al.. Expert review of gastroenterology &amp; hepatology. 2026-07-10 DOI: 10.1080/17474124.2026.2702585</a:t>
+              <a:t>GM O'Kane, A Mesci, RW Jang. JHEP Reports. 2026</a:t>
             </a:r>
             <a:endParaRPr lang="en-US" sz="800" dirty="0"/>
           </a:p>
@@ -6676,7 +6760,7 @@
                   </a:extLst>
                 </a:hlinkClick>
               </a:rPr>
-              <a:t>UDP-glucuronate decarboxylase 1 promotes tumor immune evasion by accelerating KMT2D loss in hepatocellular carcinoma.</a:t>
+              <a:t>Neoadjuvant Stereotactic Body Radiotherapy plus Immune Therapy Favorably Remodels the Hepatocellular Carcinoma Tumor Microenvironment.</a:t>
             </a:r>
             <a:endParaRPr lang="en-US" sz="2400" dirty="0"/>
           </a:p>
@@ -6712,7 +6796,7 @@
                   <a:srgbClr val="888888"/>
                 </a:solidFill>
               </a:rPr>
-              <a:t>Journal for immunotherapy of cancer  ·  IF 10.9  ·  Basic Research</a:t>
+              <a:t>Clinical cancer research : an official journal of the American Association for Cancer Research  ·  IF 11.5  ·  Prospective Study</a:t>
             </a:r>
             <a:endParaRPr lang="en-US" sz="1000" dirty="0"/>
           </a:p>
@@ -6755,7 +6839,7 @@
                 <a:ea typeface="Microsoft JhengHei" pitchFamily="34" charset="-122"/>
                 <a:cs typeface="Microsoft JhengHei" pitchFamily="34" charset="-120"/>
               </a:rPr>
-              <a:t>發現UXS1為免疫逃逸驅動因子</a:t>
+              <a:t>使用新輔助SBRT和免疫療法。</a:t>
             </a:r>
             <a:endParaRPr lang="en-US" sz="1800" dirty="0"/>
           </a:p>
@@ -6776,7 +6860,7 @@
                 <a:ea typeface="Microsoft JhengHei" pitchFamily="34" charset="-122"/>
                 <a:cs typeface="Microsoft JhengHei" pitchFamily="34" charset="-120"/>
               </a:rPr>
-              <a:t>促進KMT2D降解及PD-L1上調</a:t>
+              <a:t>進行8名患者的初步研究。</a:t>
             </a:r>
             <a:endParaRPr lang="en-US" sz="1800" dirty="0"/>
           </a:p>
@@ -6797,7 +6881,7 @@
                 <a:ea typeface="Microsoft JhengHei" pitchFamily="34" charset="-122"/>
                 <a:cs typeface="Microsoft JhengHei" pitchFamily="34" charset="-120"/>
               </a:rPr>
-              <a:t>高UXS1與CD8+ T細胞反應差相關</a:t>
+              <a:t>僅1名患者出現3級不良事件。</a:t>
             </a:r>
             <a:endParaRPr lang="en-US" sz="1800" dirty="0"/>
           </a:p>
@@ -6818,7 +6902,7 @@
                 <a:ea typeface="Microsoft JhengHei" pitchFamily="34" charset="-122"/>
                 <a:cs typeface="Microsoft JhengHei" pitchFamily="34" charset="-120"/>
               </a:rPr>
-              <a:t>基因敲除增強抗PD-1療法療效</a:t>
+              <a:t>所有患者達到邊緣陰性切除。</a:t>
             </a:r>
             <a:endParaRPr lang="en-US" sz="1800" dirty="0"/>
           </a:p>
@@ -6839,7 +6923,7 @@
                 <a:ea typeface="Microsoft JhengHei" pitchFamily="34" charset="-122"/>
                 <a:cs typeface="Microsoft JhengHei" pitchFamily="34" charset="-120"/>
               </a:rPr>
-              <a:t>新型UXS1-KMT2D-CEBPB-PD-L1信號通路</a:t>
+              <a:t>治療後觀察到免疫浸潤增加。</a:t>
             </a:r>
             <a:endParaRPr lang="en-US" sz="1800" dirty="0"/>
           </a:p>
@@ -6875,7 +6959,7 @@
                   <a:srgbClr val="888888"/>
                 </a:solidFill>
               </a:rPr>
-              <a:t>Zhang Jiwei, Li Yuan, Chen Jiafeng et al.. Journal for immunotherapy of cancer. 2026-07-08 DOI: 10.1136/jitc-2025-013948</a:t>
+              <a:t>Cosner Zoe, Guo Zhoubo, Nawrocki Cole et al.. Clinical cancer research : an official journal of the American Association for Cancer Research. 2026-07-17 DOI: 10.1158/1078-0432.CCR-25-4779</a:t>
             </a:r>
             <a:endParaRPr lang="en-US" sz="800" dirty="0"/>
           </a:p>
@@ -7075,7 +7159,7 @@
                   </a:extLst>
                 </a:hlinkClick>
               </a:rPr>
-              <a:t>Long-term follow-up of a phase 1/2 trial of anti-GDF-15 antibody visugromab plus anti-PD-1 antibody nivolumab in anti-PD-1/-L1 relapsed/refractory solid tumors.</a:t>
+              <a:t>Second-Line and Subsequent Therapies after Atezolizumab Plus Bevacizumab Treatment in Hepatocellular Carcinoma: A Multicenter Prospective Cohort Study.</a:t>
             </a:r>
             <a:endParaRPr lang="en-US" sz="2400" dirty="0"/>
           </a:p>
@@ -7111,7 +7195,7 @@
                   <a:srgbClr val="888888"/>
                 </a:solidFill>
               </a:rPr>
-              <a:t>Journal of hematology &amp; oncology  ·  RCT Phase 2</a:t>
+              <a:t>Gut and liver  ·  Prospective Study  ·  🌏 Asia</a:t>
             </a:r>
             <a:endParaRPr lang="en-US" sz="1000" dirty="0"/>
           </a:p>
@@ -7154,7 +7238,7 @@
                 <a:ea typeface="Microsoft JhengHei" pitchFamily="34" charset="-122"/>
                 <a:cs typeface="Microsoft JhengHei" pitchFamily="34" charset="-120"/>
               </a:rPr>
-              <a:t>Visugromab加nivolumab在試驗中評估。</a:t>
+              <a:t>評估二線及三線治療</a:t>
             </a:r>
             <a:endParaRPr lang="en-US" sz="1800" dirty="0"/>
           </a:p>
@@ -7175,7 +7259,7 @@
                 <a:ea typeface="Microsoft JhengHei" pitchFamily="34" charset="-122"/>
                 <a:cs typeface="Microsoft JhengHei" pitchFamily="34" charset="-120"/>
               </a:rPr>
-              <a:t>HCC的客觀反應率為14.3%。</a:t>
+              <a:t>Lenvatinib PFS優於sorafenib</a:t>
             </a:r>
             <a:endParaRPr lang="en-US" sz="1800" dirty="0"/>
           </a:p>
@@ -7196,7 +7280,7 @@
                 <a:ea typeface="Microsoft JhengHei" pitchFamily="34" charset="-122"/>
                 <a:cs typeface="Microsoft JhengHei" pitchFamily="34" charset="-120"/>
               </a:rPr>
-              <a:t>反應的中位持續時間為19.4個月。</a:t>
+              <a:t>Regorafenib顯示OS改善趨勢</a:t>
             </a:r>
             <a:endParaRPr lang="en-US" sz="1800" dirty="0"/>
           </a:p>
@@ -7217,7 +7301,7 @@
                 <a:ea typeface="Microsoft JhengHei" pitchFamily="34" charset="-122"/>
                 <a:cs typeface="Microsoft JhengHei" pitchFamily="34" charset="-120"/>
               </a:rPr>
-              <a:t>GDF-15阻斷可能克服耐藥性。</a:t>
+              <a:t>序列治療結果更佳</a:t>
             </a:r>
             <a:endParaRPr lang="en-US" sz="1800" dirty="0"/>
           </a:p>
@@ -7238,7 +7322,7 @@
                 <a:ea typeface="Microsoft JhengHei" pitchFamily="34" charset="-122"/>
                 <a:cs typeface="Microsoft JhengHei" pitchFamily="34" charset="-120"/>
               </a:rPr>
-              <a:t>需要進一步的隨機試驗。</a:t>
+              <a:t>AtezoBev暴露時間長與OS相關</a:t>
             </a:r>
             <a:endParaRPr lang="en-US" sz="1800" dirty="0"/>
           </a:p>
@@ -7274,7 +7358,7 @@
                   <a:srgbClr val="888888"/>
                 </a:solidFill>
               </a:rPr>
-              <a:t>Melero Ignacio, de Miguel Mar&amp;#xed;a, Cabanas Elena Garralda et al.. Journal of hematology &amp; oncology. 2026-07-10 DOI: 10.1186/s13045-026-01818-2</a:t>
+              <a:t>Cho Yuri, Lee Jeong-Hoon, Ryoo Baek-Yeol et al.. Gut and liver. 2026-07-14 DOI: 10.5009/gnl250532</a:t>
             </a:r>
             <a:endParaRPr lang="en-US" sz="800" dirty="0"/>
           </a:p>
@@ -7474,7 +7558,7 @@
                   </a:extLst>
                 </a:hlinkClick>
               </a:rPr>
-              <a:t>… plus transarterial chemoembolization and PD-1 inhibitors as conversion therapies for unresectable intermediate-advanced hepatocellular carcinoma: a phase 2 trial …</a:t>
+              <a:t>Mechanistic synergies and optimal sequencing of anti&amp;#x2011;VEGF plus immune checkpoint inhibition in gastrointestinal cancers.</a:t>
             </a:r>
             <a:endParaRPr lang="en-US" sz="2400" dirty="0"/>
           </a:p>
@@ -7510,7 +7594,7 @@
                   <a:srgbClr val="888888"/>
                 </a:solidFill>
               </a:rPr>
-              <a:t>… and Targeted Therapy  ·  RCT Phase 2</a:t>
+              <a:t>Discover oncology  ·  RCT Phase 2</a:t>
             </a:r>
             <a:endParaRPr lang="en-US" sz="1000" dirty="0"/>
           </a:p>
@@ -7553,7 +7637,7 @@
                 <a:ea typeface="Microsoft JhengHei" pitchFamily="34" charset="-122"/>
                 <a:cs typeface="Microsoft JhengHei" pitchFamily="34" charset="-120"/>
               </a:rPr>
-              <a:t>針對不可切除的HCC的組合療法</a:t>
+              <a:t>抗VEGF與ICI聯合療法提升療效。</a:t>
             </a:r>
             <a:endParaRPr lang="en-US" sz="1800" dirty="0"/>
           </a:p>
@@ -7574,7 +7658,7 @@
                 <a:ea typeface="Microsoft JhengHei" pitchFamily="34" charset="-122"/>
                 <a:cs typeface="Microsoft JhengHei" pitchFamily="34" charset="-120"/>
               </a:rPr>
-              <a:t>使用肝動脈化療栓塞(TACE)</a:t>
+              <a:t>Atezolizumab加Bevacizumab在晚期HCC有效。</a:t>
             </a:r>
             <a:endParaRPr lang="en-US" sz="1800" dirty="0"/>
           </a:p>
@@ -7595,7 +7679,7 @@
                 <a:ea typeface="Microsoft JhengHei" pitchFamily="34" charset="-122"/>
                 <a:cs typeface="Microsoft JhengHei" pitchFamily="34" charset="-120"/>
               </a:rPr>
-              <a:t>PD-1抑制劑增強療效</a:t>
+              <a:t>最佳序列策略對療效至關重要。</a:t>
             </a:r>
             <a:endParaRPr lang="en-US" sz="1800" dirty="0"/>
           </a:p>
@@ -7631,7 +7715,7 @@
                   <a:srgbClr val="888888"/>
                 </a:solidFill>
               </a:rPr>
-              <a:t>X Zhang, H Cai, W Peng. … and Targeted Therapy. 2026</a:t>
+              <a:t>Lorestani Parsa, Robat-Jazi Behrouz, Nejati Negar et al.. Discover oncology. 2026-07-17 DOI: 10.1007/s12672-026-05539-3</a:t>
             </a:r>
             <a:endParaRPr lang="en-US" sz="800" dirty="0"/>
           </a:p>

--- a/docs/digest-zh.pptx
+++ b/docs/digest-zh.pptx
@@ -2269,7 +2269,7 @@
                   <a:srgbClr val="888888"/>
                 </a:solidFill>
               </a:rPr>
-              <a:t>2026-07-13 — 2026-07-20</a:t>
+              <a:t>2026-07-20 — 2026-07-27</a:t>
             </a:r>
             <a:endParaRPr lang="en-US" sz="1400" dirty="0"/>
           </a:p>
@@ -2460,7 +2460,7 @@
                   </a:extLst>
                 </a:hlinkClick>
               </a:rPr>
-              <a:t>… plus transarterial chemoembolization and PD-1 inhibitors as conversion therapies for unresectable intermediate-advanced hepatocellular carcinoma: a phase 2 trial …</a:t>
+              <a:t>Radiotherapy versus local ablation therapy for the treatment of hepatocellular carcinoma: A systematic review and meta-analysis.</a:t>
             </a:r>
             <a:endParaRPr lang="en-US" sz="2400" dirty="0"/>
           </a:p>
@@ -2496,7 +2496,7 @@
                   <a:srgbClr val="888888"/>
                 </a:solidFill>
               </a:rPr>
-              <a:t>… and Targeted Therapy  ·  RCT Phase 2</a:t>
+              <a:t>Journal of Clinical …  ·  Meta-Analysis</a:t>
             </a:r>
             <a:endParaRPr lang="en-US" sz="1000" dirty="0"/>
           </a:p>
@@ -2539,7 +2539,7 @@
                 <a:ea typeface="Microsoft JhengHei" pitchFamily="34" charset="-122"/>
                 <a:cs typeface="Microsoft JhengHei" pitchFamily="34" charset="-120"/>
               </a:rPr>
-              <a:t>針對不可切除HCC的組合療法</a:t>
+              <a:t>放射治療與局部消融比較</a:t>
             </a:r>
             <a:endParaRPr lang="en-US" sz="1800" dirty="0"/>
           </a:p>
@@ -2560,7 +2560,7 @@
                 <a:ea typeface="Microsoft JhengHei" pitchFamily="34" charset="-122"/>
                 <a:cs typeface="Microsoft JhengHei" pitchFamily="34" charset="-120"/>
               </a:rPr>
-              <a:t>使用肝動脈化療栓塞(TACE)</a:t>
+              <a:t>針對肝細胞癌治療</a:t>
             </a:r>
             <a:endParaRPr lang="en-US" sz="1800" dirty="0"/>
           </a:p>
@@ -2581,7 +2581,7 @@
                 <a:ea typeface="Microsoft JhengHei" pitchFamily="34" charset="-122"/>
                 <a:cs typeface="Microsoft JhengHei" pitchFamily="34" charset="-120"/>
               </a:rPr>
-              <a:t>PD-1抑制劑提升治療效果</a:t>
+              <a:t>局部無進展生存分析</a:t>
             </a:r>
             <a:endParaRPr lang="en-US" sz="1800" dirty="0"/>
           </a:p>
@@ -2602,7 +2602,7 @@
                 <a:ea typeface="Microsoft JhengHei" pitchFamily="34" charset="-122"/>
                 <a:cs typeface="Microsoft JhengHei" pitchFamily="34" charset="-120"/>
               </a:rPr>
-              <a:t>第二期試驗顯示良好結果</a:t>
+              <a:t>評估射頻與微波消融</a:t>
             </a:r>
             <a:endParaRPr lang="en-US" sz="1800" dirty="0"/>
           </a:p>
@@ -2623,7 +2623,7 @@
                 <a:ea typeface="Microsoft JhengHei" pitchFamily="34" charset="-122"/>
                 <a:cs typeface="Microsoft JhengHei" pitchFamily="34" charset="-120"/>
               </a:rPr>
-              <a:t>有潛力轉變為可切除疾病</a:t>
+              <a:t>進行系統性回顧與分析</a:t>
             </a:r>
             <a:endParaRPr lang="en-US" sz="1800" dirty="0"/>
           </a:p>
@@ -2659,7 +2659,7 @@
                   <a:srgbClr val="888888"/>
                 </a:solidFill>
               </a:rPr>
-              <a:t>X Zhang, H Cai, W Peng. … and Targeted Therapy. 2026</a:t>
+              <a:t>SH Bae, SH Choi, SM Yoon. Journal of Clinical …. 2026</a:t>
             </a:r>
             <a:endParaRPr lang="en-US" sz="800" dirty="0"/>
           </a:p>
@@ -2859,7 +2859,7 @@
                   </a:extLst>
                 </a:hlinkClick>
               </a:rPr>
-              <a:t>Disrupting fumarylacetoacetate hydrolase by stratified nanoplatforms orchestrates metabolic-immune reprogramming and prevents post-ablation HCC relapse.</a:t>
+              <a:t>Immune Checkpoint Inhibitor–Based Adjuvant Treatment Versus Surveillance in Curatively Treated Hepatocellular Carcinoma: a Systematic Review and Meta …</a:t>
             </a:r>
             <a:endParaRPr lang="en-US" sz="2400" dirty="0"/>
           </a:p>
@@ -2895,7 +2895,7 @@
                   <a:srgbClr val="888888"/>
                 </a:solidFill>
               </a:rPr>
-              <a:t>Nature communications  ·  IF 14.7</a:t>
+              <a:t>Journal of gastroenterology and …  ·  Systematic Review</a:t>
             </a:r>
             <a:endParaRPr lang="en-US" sz="1000" dirty="0"/>
           </a:p>
@@ -2938,7 +2938,7 @@
                 <a:ea typeface="Microsoft JhengHei" pitchFamily="34" charset="-122"/>
                 <a:cs typeface="Microsoft JhengHei" pitchFamily="34" charset="-120"/>
               </a:rPr>
-              <a:t>FAH 上調促進 HCC 复发。</a:t>
+              <a:t>免疫檢查點抑制劑在HCC中展現潛力。</a:t>
             </a:r>
             <a:endParaRPr lang="en-US" sz="1800" dirty="0"/>
           </a:p>
@@ -2959,7 +2959,7 @@
                 <a:ea typeface="Microsoft JhengHei" pitchFamily="34" charset="-122"/>
                 <a:cs typeface="Microsoft JhengHei" pitchFamily="34" charset="-120"/>
               </a:rPr>
-              <a:t>Fumarate 增強能量代謝及 CD8+ T 細胞受損。</a:t>
+              <a:t>輔助治療改善手術後結果。</a:t>
             </a:r>
             <a:endParaRPr lang="en-US" sz="1800" dirty="0"/>
           </a:p>
@@ -2980,49 +2980,7 @@
                 <a:ea typeface="Microsoft JhengHei" pitchFamily="34" charset="-122"/>
                 <a:cs typeface="Microsoft JhengHei" pitchFamily="34" charset="-120"/>
               </a:rPr>
-              <a:t>工程納米平台破壞 FAH-fumarate-HSP70 軸。</a:t>
-            </a:r>
-            <a:endParaRPr lang="en-US" sz="1800" dirty="0"/>
-          </a:p>
-          <a:p>
-            <a:pPr marL="342900" indent="-342900">
-              <a:spcAft>
-                <a:spcPts val="800"/>
-              </a:spcAft>
-              <a:buSzPct val="100000"/>
-              <a:buChar char="•"/>
-            </a:pPr>
-            <a:r>
-              <a:rPr lang="en-US" sz="1800" dirty="0">
-                <a:solidFill>
-                  <a:srgbClr val="333333"/>
-                </a:solidFill>
-                <a:latin typeface="Microsoft JhengHei" pitchFamily="34" charset="0"/>
-                <a:ea typeface="Microsoft JhengHei" pitchFamily="34" charset="-122"/>
-                <a:cs typeface="Microsoft JhengHei" pitchFamily="34" charset="-120"/>
-              </a:rPr>
-              <a:t>靶向釋放治療劑改善療效。</a:t>
-            </a:r>
-            <a:endParaRPr lang="en-US" sz="1800" dirty="0"/>
-          </a:p>
-          <a:p>
-            <a:pPr marL="342900" indent="-342900">
-              <a:spcAft>
-                <a:spcPts val="800"/>
-              </a:spcAft>
-              <a:buSzPct val="100000"/>
-              <a:buChar char="•"/>
-            </a:pPr>
-            <a:r>
-              <a:rPr lang="en-US" sz="1800" dirty="0">
-                <a:solidFill>
-                  <a:srgbClr val="333333"/>
-                </a:solidFill>
-                <a:latin typeface="Microsoft JhengHei" pitchFamily="34" charset="0"/>
-                <a:ea typeface="Microsoft JhengHei" pitchFamily="34" charset="-122"/>
-                <a:cs typeface="Microsoft JhengHei" pitchFamily="34" charset="-120"/>
-              </a:rPr>
-              <a:t>結合代謝阻斷與免疫調節防止 HCC。</a:t>
+              <a:t>僅監測可能不足夠。</a:t>
             </a:r>
             <a:endParaRPr lang="en-US" sz="1800" dirty="0"/>
           </a:p>
@@ -3058,7 +3016,7 @@
                   <a:srgbClr val="888888"/>
                 </a:solidFill>
               </a:rPr>
-              <a:t>Hong Zhiwen, Liu Xiaolong, A Rouhan et al.. Nature communications. 2026-07-14 DOI: 10.1038/s41467-026-75422-w</a:t>
+              <a:t>E Akkus, HA Yaşar. Journal of gastroenterology and …. 2026</a:t>
             </a:r>
             <a:endParaRPr lang="en-US" sz="800" dirty="0"/>
           </a:p>
@@ -3258,7 +3216,7 @@
                   </a:extLst>
                 </a:hlinkClick>
               </a:rPr>
-              <a:t>Nrf2-mediated metabolic reprogramming drives regulatory T cell accumulation in hepatocellular carcinoma.</a:t>
+              <a:t>… on interventional therapy and immune checkpoint inhibitors (ICIs) in patients with intermediate-and advanced-stage hepatocellular carcinoma: a systematic review …</a:t>
             </a:r>
             <a:endParaRPr lang="en-US" sz="2400" dirty="0"/>
           </a:p>
@@ -3294,7 +3252,7 @@
                   <a:srgbClr val="888888"/>
                 </a:solidFill>
               </a:rPr>
-              <a:t>Nature communications  ·  IF 14.7</a:t>
+              <a:t>… , Immunotherapy  ·  Systematic Review</a:t>
             </a:r>
             <a:endParaRPr lang="en-US" sz="1000" dirty="0"/>
           </a:p>
@@ -3337,7 +3295,7 @@
                 <a:ea typeface="Microsoft JhengHei" pitchFamily="34" charset="-122"/>
                 <a:cs typeface="Microsoft JhengHei" pitchFamily="34" charset="-120"/>
               </a:rPr>
-              <a:t>HCC中的Tregs活化Nrf2途徑。</a:t>
+              <a:t>組合療法在HCC中顯示潛力。</a:t>
             </a:r>
             <a:endParaRPr lang="en-US" sz="1800" dirty="0"/>
           </a:p>
@@ -3358,7 +3316,7 @@
                 <a:ea typeface="Microsoft JhengHei" pitchFamily="34" charset="-122"/>
                 <a:cs typeface="Microsoft JhengHei" pitchFamily="34" charset="-120"/>
               </a:rPr>
-              <a:t>Nrf2增強Treg的存活與功能。</a:t>
+              <a:t>ICIs增強介入療法的療效。</a:t>
             </a:r>
             <a:endParaRPr lang="en-US" sz="1800" dirty="0"/>
           </a:p>
@@ -3379,49 +3337,7 @@
                 <a:ea typeface="Microsoft JhengHei" pitchFamily="34" charset="-122"/>
                 <a:cs typeface="Microsoft JhengHei" pitchFamily="34" charset="-120"/>
               </a:rPr>
-              <a:t>靶向Nrf2可減少Treg積累。</a:t>
-            </a:r>
-            <a:endParaRPr lang="en-US" sz="1800" dirty="0"/>
-          </a:p>
-          <a:p>
-            <a:pPr marL="342900" indent="-342900">
-              <a:spcAft>
-                <a:spcPts val="800"/>
-              </a:spcAft>
-              <a:buSzPct val="100000"/>
-              <a:buChar char="•"/>
-            </a:pPr>
-            <a:r>
-              <a:rPr lang="en-US" sz="1800" dirty="0">
-                <a:solidFill>
-                  <a:srgbClr val="333333"/>
-                </a:solidFill>
-                <a:latin typeface="Microsoft JhengHei" pitchFamily="34" charset="0"/>
-                <a:ea typeface="Microsoft JhengHei" pitchFamily="34" charset="-122"/>
-                <a:cs typeface="Microsoft JhengHei" pitchFamily="34" charset="-120"/>
-              </a:rPr>
-              <a:t>Treg中高Nrf2與預後不良相關。</a:t>
-            </a:r>
-            <a:endParaRPr lang="en-US" sz="1800" dirty="0"/>
-          </a:p>
-          <a:p>
-            <a:pPr marL="342900" indent="-342900">
-              <a:spcAft>
-                <a:spcPts val="800"/>
-              </a:spcAft>
-              <a:buSzPct val="100000"/>
-              <a:buChar char="•"/>
-            </a:pPr>
-            <a:r>
-              <a:rPr lang="en-US" sz="1800" dirty="0">
-                <a:solidFill>
-                  <a:srgbClr val="333333"/>
-                </a:solidFill>
-                <a:latin typeface="Microsoft JhengHei" pitchFamily="34" charset="0"/>
-                <a:ea typeface="Microsoft JhengHei" pitchFamily="34" charset="-122"/>
-                <a:cs typeface="Microsoft JhengHei" pitchFamily="34" charset="-120"/>
-              </a:rPr>
-              <a:t>Nrf2調節可能改善免疫治療效果。</a:t>
+              <a:t>系統評估強調臨床結果。</a:t>
             </a:r>
             <a:endParaRPr lang="en-US" sz="1800" dirty="0"/>
           </a:p>
@@ -3457,7 +3373,7 @@
                   <a:srgbClr val="888888"/>
                 </a:solidFill>
               </a:rPr>
-              <a:t>Perpi&amp;#xf1;&amp;#xe1;n E, Sompairac N, Marin Correa D et al.. Nature communications. 2026-07-13 DOI: 10.1038/s41467-026-73485-3</a:t>
+              <a:t>J Su, Y Su, R Mai. … , Immunotherapy. 2026</a:t>
             </a:r>
             <a:endParaRPr lang="en-US" sz="800" dirty="0"/>
           </a:p>
@@ -3674,7 +3590,7 @@
                   <a:srgbClr val="FFFFFF"/>
                 </a:solidFill>
               </a:rPr>
-              <a:t>1. **免疫療法的潛力**  </a:t>
+              <a:t>1. **克隆多样性与复发机制**  </a:t>
             </a:r>
             <a:endParaRPr lang="en-US" sz="1200" dirty="0"/>
           </a:p>
@@ -3691,7 +3607,7 @@
                   <a:srgbClr val="FFFFFF"/>
                 </a:solidFill>
               </a:rPr>
-              <a:t>   Immunotherapy, particularly PD-1 blockade, shows significant promise in enhancing local immune responses against hepatocellular carcinoma (HCC), especially in patients with underlying hepatitis B virus infection.  </a:t>
+              <a:t>   Clonal diversity plays a critical role in the distinct recurrence patterns observed in hepatocellular carcinoma (HCC), highlighting the need for personalized treatment strategies.  </a:t>
             </a:r>
             <a:endParaRPr lang="en-US" sz="1200" dirty="0"/>
           </a:p>
@@ -3708,7 +3624,7 @@
                   <a:srgbClr val="FFFFFF"/>
                 </a:solidFill>
               </a:rPr>
-              <a:t>   免疫療法，特別是PD-1抑制劑，顯示出在增強對肝細胞癌（HCC）的局部免疫反應方面的顯著潛力，尤其是在有乙型肝炎病毒感染的患者中。</a:t>
+              <a:t>   克隆多樣性在肝細胞癌（HCC）的不同復發模式中扮演關鍵角色，強調了個性化治療策略的必要性。</a:t>
             </a:r>
             <a:endParaRPr lang="en-US" sz="1200" dirty="0"/>
           </a:p>
@@ -3734,7 +3650,7 @@
                   <a:srgbClr val="FFFFFF"/>
                 </a:solidFill>
               </a:rPr>
-              <a:t>2. **長期生存率的提升**  </a:t>
+              <a:t>2. **免疫治疗与手术结合的潜力**  </a:t>
             </a:r>
             <a:endParaRPr lang="en-US" sz="1200" dirty="0"/>
           </a:p>
@@ -3751,7 +3667,7 @@
                   <a:srgbClr val="FFFFFF"/>
                 </a:solidFill>
               </a:rPr>
-              <a:t>   Immune checkpoint inhibitors (ICIs) can lead to long-term survival and potential cures in HCC, indicating the need for further exploration of their efficacy in various stages of the disease.  </a:t>
+              <a:t>   The integration of immune checkpoint inhibitors with surgical approaches may enhance therapeutic outcomes, particularly in patients with resectable HCC.  </a:t>
             </a:r>
             <a:endParaRPr lang="en-US" sz="1200" dirty="0"/>
           </a:p>
@@ -3768,7 +3684,7 @@
                   <a:srgbClr val="FFFFFF"/>
                 </a:solidFill>
               </a:rPr>
-              <a:t>   免疫檢查點抑制劑（ICIs）能夠提高HCC的長期生存率並有潛在治癒的可能，這表明需要進一步探索其在不同疾病階段的療效。</a:t>
+              <a:t>   將免疫檢查點抑制劑與手術方法結合可能會改善治療結果，特別是在可切除的HCC患者中。</a:t>
             </a:r>
             <a:endParaRPr lang="en-US" sz="1200" dirty="0"/>
           </a:p>
@@ -3794,7 +3710,7 @@
                   <a:srgbClr val="FFFFFF"/>
                 </a:solidFill>
               </a:rPr>
-              <a:t>3. **腫瘤微環境的重塑**  </a:t>
+              <a:t>3. **新抗原疫苗的挑战与前景**  </a:t>
             </a:r>
             <a:endParaRPr lang="en-US" sz="1200" dirty="0"/>
           </a:p>
@@ -3811,7 +3727,7 @@
                   <a:srgbClr val="FFFFFF"/>
                 </a:solidFill>
               </a:rPr>
-              <a:t>   Combining immunotherapy with locoregional therapies, such as stereotactic body radiotherapy, can favorably remodel the tumor microenvironment, enhancing treatment outcomes.  </a:t>
+              <a:t>   Despite the promise of mutation-derived neoantigen vaccines, their clinical application is limited by the availability of suitable antigens, necessitating innovative approaches to neoantigen discovery.  </a:t>
             </a:r>
             <a:endParaRPr lang="en-US" sz="1200" dirty="0"/>
           </a:p>
@@ -3828,7 +3744,7 @@
                   <a:srgbClr val="FFFFFF"/>
                 </a:solidFill>
               </a:rPr>
-              <a:t>   將免疫療法與局部治療（如立體定向體放療）結合，可以有利於重塑腫瘤微環境，從而改善治療結果。</a:t>
+              <a:t>   儘管突變衍生的新抗原疫苗具有潛力，但其臨床應用受到合適抗原可用性的限制，需創新方法來發現新抗原。</a:t>
             </a:r>
             <a:endParaRPr lang="en-US" sz="1200" dirty="0"/>
           </a:p>
@@ -3854,7 +3770,7 @@
                   <a:srgbClr val="FFFFFF"/>
                 </a:solidFill>
               </a:rPr>
-              <a:t>4. **抵抗機制的探索**  </a:t>
+              <a:t>4. **局部消融与放疗的比较**  </a:t>
             </a:r>
             <a:endParaRPr lang="en-US" sz="1200" dirty="0"/>
           </a:p>
@@ -3871,7 +3787,7 @@
                   <a:srgbClr val="FFFFFF"/>
                 </a:solidFill>
               </a:rPr>
-              <a:t>   Identifying novel regulators of immune responses, such as STK40, is crucial for understanding resistance mechanisms in HCC and developing more effective therapies.  </a:t>
+              <a:t>   Local ablative therapies, such as radiofrequency and microwave ablation, show comparable efficacy to radiotherapy, emphasizing their importance in the management of small to medium HCC.  </a:t>
             </a:r>
             <a:endParaRPr lang="en-US" sz="1200" dirty="0"/>
           </a:p>
@@ -3888,7 +3804,7 @@
                   <a:srgbClr val="FFFFFF"/>
                 </a:solidFill>
               </a:rPr>
-              <a:t>   確定免疫反應的新調節因子（如STK40）對於理解HCC中的抵抗機制和開發更有效的療法至關重要。</a:t>
+              <a:t>   局部消融療法，如射頻和微波消融，顯示出與放療相當的療效，強調了它們在小至中型HCC管理中的重要性。</a:t>
             </a:r>
             <a:endParaRPr lang="en-US" sz="1200" dirty="0"/>
           </a:p>
@@ -3914,7 +3830,7 @@
                   <a:srgbClr val="FFFFFF"/>
                 </a:solidFill>
               </a:rPr>
-              <a:t>5. **代謝和免疫重編程**  </a:t>
+              <a:t>5. **术后免疫治疗的必要性**  </a:t>
             </a:r>
             <a:endParaRPr lang="en-US" sz="1200" dirty="0"/>
           </a:p>
@@ -3931,7 +3847,7 @@
                   <a:srgbClr val="FFFFFF"/>
                 </a:solidFill>
               </a:rPr>
-              <a:t>   Targeting metabolic pathways in HCC can disrupt immunosuppressive environments and prevent recurrence post-ablation, highlighting the interplay between metabolism and immunity.</a:t>
+              <a:t>   There is a growing recognition of the potential benefits of adjuvant immunotherapy following curative treatments for HCC, which may improve long-term outcomes.</a:t>
             </a:r>
             <a:endParaRPr lang="en-US" sz="1200" dirty="0"/>
           </a:p>
@@ -4077,7 +3993,7 @@
                   <a:srgbClr val="FFFFFF"/>
                 </a:solidFill>
               </a:rPr>
-              <a:t>針對HCC中的代謝途徑可以破壞免疫抑制環境並防止消融後的復發，突顯了代謝與免疫之間的相互作用。</a:t>
+              <a:t>越來越多的認識到術後免疫治療對於HCC的潛在益處，可能改善長期結果。</a:t>
             </a:r>
             <a:endParaRPr lang="en-US" sz="1200" dirty="0"/>
           </a:p>
@@ -4129,7 +4045,7 @@
                   <a:srgbClr val="FFFFFF"/>
                 </a:solidFill>
               </a:rPr>
-              <a:t>1. **個性化療法的發展**  </a:t>
+              <a:t>1. **深入研究克隆多样性**  </a:t>
             </a:r>
             <a:endParaRPr lang="en-US" sz="1200" dirty="0"/>
           </a:p>
@@ -4146,7 +4062,7 @@
                   <a:srgbClr val="FFFFFF"/>
                 </a:solidFill>
               </a:rPr>
-              <a:t>   Further studies should focus on personalized immunotherapy approaches that consider the unique tumor microenvironment and patient-specific factors in HCC.  </a:t>
+              <a:t>   Further investigations into the clonal evolution of HCC could provide insights into recurrence mechanisms and inform targeted therapies.  </a:t>
             </a:r>
             <a:endParaRPr lang="en-US" sz="1200" dirty="0"/>
           </a:p>
@@ -4163,7 +4079,7 @@
                   <a:srgbClr val="FFFFFF"/>
                 </a:solidFill>
               </a:rPr>
-              <a:t>   未來的研究應集中於個性化免疫療法的發展，考慮HCC中獨特的腫瘤微環境和患者特定因素。</a:t>
+              <a:t>   進一步研究HCC的克隆演化可能提供有關復發機制的見解，並為靶向治療提供依據。</a:t>
             </a:r>
             <a:endParaRPr lang="en-US" sz="1200" dirty="0"/>
           </a:p>
@@ -4189,7 +4105,7 @@
                   <a:srgbClr val="FFFFFF"/>
                 </a:solidFill>
               </a:rPr>
-              <a:t>2. **多重療法的組合**  </a:t>
+              <a:t>2. **免疫治疗与局部治疗的联合策略**  </a:t>
             </a:r>
             <a:endParaRPr lang="en-US" sz="1200" dirty="0"/>
           </a:p>
@@ -4206,7 +4122,7 @@
                   <a:srgbClr val="FFFFFF"/>
                 </a:solidFill>
               </a:rPr>
-              <a:t>   Investigating the synergistic effects of combining immune checkpoint inhibitors with other treatments, such as targeted therapies and locoregional approaches, to improve patient outcomes.  </a:t>
+              <a:t>   Future trials should explore the synergistic effects of combining immune checkpoint inhibitors with local ablation therapies to optimize treatment regimens.  </a:t>
             </a:r>
             <a:endParaRPr lang="en-US" sz="1200" dirty="0"/>
           </a:p>
@@ -4223,7 +4139,7 @@
                   <a:srgbClr val="FFFFFF"/>
                 </a:solidFill>
               </a:rPr>
-              <a:t>   探索將免疫檢查點抑制劑與其他治療（如靶向療法和局部療法）組合的協同效應，以改善患者預後。</a:t>
+              <a:t>   未來的試驗應探索將免疫檢查點抑制劑與局部消融療法結合的協同效應，以優化治療方案。</a:t>
             </a:r>
             <a:endParaRPr lang="en-US" sz="1200" dirty="0"/>
           </a:p>
@@ -4249,7 +4165,7 @@
                   <a:srgbClr val="FFFFFF"/>
                 </a:solidFill>
               </a:rPr>
-              <a:t>3. **抵抗機制的深入研究**  </a:t>
+              <a:t>3. **新抗原的发现与应用**  </a:t>
             </a:r>
             <a:endParaRPr lang="en-US" sz="1200" dirty="0"/>
           </a:p>
@@ -4266,7 +4182,7 @@
                   <a:srgbClr val="FFFFFF"/>
                 </a:solidFill>
               </a:rPr>
-              <a:t>   More research is needed to elucidate the mechanisms of resistance to immunotherapy in HCC, particularly focusing on metabolic adaptations and immune evasion strategies.  </a:t>
+              <a:t>   Research should focus on identifying and validating novel neoantigens that can be effectively targeted by immunotherapies to enhance patient responses.  </a:t>
             </a:r>
             <a:endParaRPr lang="en-US" sz="1200" dirty="0"/>
           </a:p>
@@ -4283,7 +4199,7 @@
                   <a:srgbClr val="FFFFFF"/>
                 </a:solidFill>
               </a:rPr>
-              <a:t>   需要更多研究來闡明HCC中對免疫療法的抵抗機制，特別是集中於代謝適應和免疫逃逸策略。</a:t>
+              <a:t>   研究應專注於識別和驗證可以有效被免疫療法靶向的新型新抗原，以增強患者反應。</a:t>
             </a:r>
             <a:endParaRPr lang="en-US" sz="1200" dirty="0"/>
           </a:p>
@@ -4309,7 +4225,7 @@
                   <a:srgbClr val="FFFFFF"/>
                 </a:solidFill>
               </a:rPr>
-              <a:t>4. **早期介入的臨床試驗**  </a:t>
+              <a:t>4. **术后免疫治疗的临床试验**  </a:t>
             </a:r>
             <a:endParaRPr lang="en-US" sz="1200" dirty="0"/>
           </a:p>
@@ -4326,7 +4242,7 @@
                   <a:srgbClr val="FFFFFF"/>
                 </a:solidFill>
               </a:rPr>
-              <a:t>   Conducting clinical trials on the efficacy of immunotherapy in earlier stages of HCC, to establish optimal treatment protocols and timing.  </a:t>
+              <a:t>   Conducting randomized clinical trials to assess the efficacy of adjuvant immunotherapy in resected HCC patients will be crucial for establishing standard care protocols.  </a:t>
             </a:r>
             <a:endParaRPr lang="en-US" sz="1200" dirty="0"/>
           </a:p>
@@ -4343,7 +4259,7 @@
                   <a:srgbClr val="FFFFFF"/>
                 </a:solidFill>
               </a:rPr>
-              <a:t>   開展關於免疫療法在HCC早期階段療效的臨床試驗，以確立最佳治療方案和時機。</a:t>
+              <a:t>   開展隨機臨床試驗以評估術後免疫治療在切除HCC患者中的療效，對於建立標準護理方案至關重要。</a:t>
             </a:r>
             <a:endParaRPr lang="en-US" sz="1200" dirty="0"/>
           </a:p>
@@ -4369,7 +4285,7 @@
                   <a:srgbClr val="FFFFFF"/>
                 </a:solidFill>
               </a:rPr>
-              <a:t>5. **代謝與免疫的交互作用**  </a:t>
+              <a:t>5. **个体化治疗方案的开发**  </a:t>
             </a:r>
             <a:endParaRPr lang="en-US" sz="1200" dirty="0"/>
           </a:p>
@@ -4386,7 +4302,7 @@
                   <a:srgbClr val="FFFFFF"/>
                 </a:solidFill>
               </a:rPr>
-              <a:t>   Investigating the metabolic reprogramming in HCC and its impact on immune cell function, aiming to develop strategies that can enhance anti-tumor immunity.  </a:t>
+              <a:t>   Developing personalized treatment approaches based on molecular profiling and immune landscape of HCC could improve therapeutic outcomes.  </a:t>
             </a:r>
             <a:endParaRPr lang="en-US" sz="1200" dirty="0"/>
           </a:p>
@@ -4403,7 +4319,7 @@
                   <a:srgbClr val="FFFFFF"/>
                 </a:solidFill>
               </a:rPr>
-              <a:t>   研究HCC中的代謝重編程及其對免疫細胞功能的影響，旨在開發可以增強抗腫瘤免疫的策略。</a:t>
+              <a:t>   基於HCC的分子特徵和免疫環境開發個性化治療方案可能改善治療結果。</a:t>
             </a:r>
             <a:endParaRPr lang="en-US" sz="1200" dirty="0"/>
           </a:p>
@@ -4676,7 +4592,7 @@
                 <a:ea typeface="Arial" pitchFamily="34" charset="-122"/>
                 <a:cs typeface="Arial" pitchFamily="34" charset="-120"/>
               </a:rPr>
-              <a:t>PD-1 blockade unleashes local hepatitis B virus-related B cell response inhibiti…</a:t>
+              <a:t>Clonal diversity underpins distinct modes of recurrence in hepatocellular carcin…</a:t>
             </a:r>
             <a:endParaRPr lang="en-US" sz="1400" dirty="0"/>
           </a:p>
@@ -4713,7 +4629,7 @@
                 <a:ea typeface="Arial" pitchFamily="34" charset="-122"/>
                 <a:cs typeface="Arial" pitchFamily="34" charset="-120"/>
               </a:rPr>
-              <a:t>Long-term Survival and Cure Fraction in Patients with Advanced Hepatocellular Ca…</a:t>
+              <a:t>Conversion surgery as a missing outcome in first-line immunotherapy trials for h…</a:t>
             </a:r>
             <a:endParaRPr lang="en-US" sz="1400" dirty="0"/>
           </a:p>
@@ -4750,7 +4666,7 @@
                 <a:ea typeface="Arial" pitchFamily="34" charset="-122"/>
                 <a:cs typeface="Arial" pitchFamily="34" charset="-120"/>
               </a:rPr>
-              <a:t>Targeting tumor-intrinsic STK40 induces immune vulnerability and drives T cell r…</a:t>
+              <a:t>Nivolumab in combination with lenvatinib in unresectable hepatocellular carcinom…</a:t>
             </a:r>
             <a:endParaRPr lang="en-US" sz="1400" dirty="0"/>
           </a:p>
@@ -4787,7 +4703,7 @@
                 <a:ea typeface="Arial" pitchFamily="34" charset="-122"/>
                 <a:cs typeface="Arial" pitchFamily="34" charset="-120"/>
               </a:rPr>
-              <a:t>Pembrolizumab and stereotactic body radiotherapy combined in advanced hepatocell…</a:t>
+              <a:t>Decoding neoantigen-encoding tumor-specific transcripts unveils a shared target …</a:t>
             </a:r>
             <a:endParaRPr lang="en-US" sz="1400" dirty="0"/>
           </a:p>
@@ -4824,7 +4740,7 @@
                 <a:ea typeface="Arial" pitchFamily="34" charset="-122"/>
                 <a:cs typeface="Arial" pitchFamily="34" charset="-120"/>
               </a:rPr>
-              <a:t>Neoadjuvant Stereotactic Body Radiotherapy plus Immune Therapy Favorably Remodel…</a:t>
+              <a:t>Bevacizumab plus iparomlimab/tuvonralimab with hepatic artery infusion chemother…</a:t>
             </a:r>
             <a:endParaRPr lang="en-US" sz="1400" dirty="0"/>
           </a:p>
@@ -4861,7 +4777,7 @@
                 <a:ea typeface="Arial" pitchFamily="34" charset="-122"/>
                 <a:cs typeface="Arial" pitchFamily="34" charset="-120"/>
               </a:rPr>
-              <a:t>Second-Line and Subsequent Therapies after Atezolizumab Plus Bevacizumab Treatme…</a:t>
+              <a:t>Pembrolizumab and stereotactic body radiotherapy combined in advanced hepatocell…</a:t>
             </a:r>
             <a:endParaRPr lang="en-US" sz="1400" dirty="0"/>
           </a:p>
@@ -4898,7 +4814,7 @@
                 <a:ea typeface="Arial" pitchFamily="34" charset="-122"/>
                 <a:cs typeface="Arial" pitchFamily="34" charset="-120"/>
               </a:rPr>
-              <a:t>Mechanistic synergies and optimal sequencing of anti&amp;#x2011;VEGF plus immune che…</a:t>
+              <a:t>Image-guided radiofrequency versus microwave ablation for small to medium hepato…</a:t>
             </a:r>
             <a:endParaRPr lang="en-US" sz="1400" dirty="0"/>
           </a:p>
@@ -4935,7 +4851,7 @@
                 <a:ea typeface="Arial" pitchFamily="34" charset="-122"/>
                 <a:cs typeface="Arial" pitchFamily="34" charset="-120"/>
               </a:rPr>
-              <a:t>… plus transarterial chemoembolization and PD-1 inhibitors as conversion therapi…</a:t>
+              <a:t>Radiotherapy versus local ablation therapy for the treatment of hepatocellular c…</a:t>
             </a:r>
             <a:endParaRPr lang="en-US" sz="1400" dirty="0"/>
           </a:p>
@@ -4972,7 +4888,7 @@
                 <a:ea typeface="Arial" pitchFamily="34" charset="-122"/>
                 <a:cs typeface="Arial" pitchFamily="34" charset="-120"/>
               </a:rPr>
-              <a:t>Disrupting fumarylacetoacetate hydrolase by stratified nanoplatforms orchestrate…</a:t>
+              <a:t>Immune Checkpoint Inhibitor–Based Adjuvant Treatment Versus Surveillance in Cura…</a:t>
             </a:r>
             <a:endParaRPr lang="en-US" sz="1400" dirty="0"/>
           </a:p>
@@ -5009,7 +4925,7 @@
                 <a:ea typeface="Arial" pitchFamily="34" charset="-122"/>
                 <a:cs typeface="Arial" pitchFamily="34" charset="-120"/>
               </a:rPr>
-              <a:t>Nrf2-mediated metabolic reprogramming drives regulatory T cell accumulation in h…</a:t>
+              <a:t>… on interventional therapy and immune checkpoint inhibitors (ICIs) in patients …</a:t>
             </a:r>
             <a:endParaRPr lang="en-US" sz="1400" dirty="0"/>
           </a:p>
@@ -5164,7 +5080,7 @@
                   </a:extLst>
                 </a:hlinkClick>
               </a:rPr>
-              <a:t>PD-1 blockade unleashes local hepatitis B virus-related B cell response inhibiting hepatocellular carcinoma.</a:t>
+              <a:t>Clonal diversity underpins distinct modes of recurrence in hepatocellular carcinoma: the PLANet cohort study.</a:t>
             </a:r>
             <a:endParaRPr lang="en-US" sz="2400" dirty="0"/>
           </a:p>
@@ -5200,7 +5116,7 @@
                   <a:srgbClr val="888888"/>
                 </a:solidFill>
               </a:rPr>
-              <a:t>Cancer cell  ·  IF 48.8  ·  RCT Phase 2</a:t>
+              <a:t>Gut  ·  IF 24.5  ·  Prospective Study</a:t>
             </a:r>
             <a:endParaRPr lang="en-US" sz="1000" dirty="0"/>
           </a:p>
@@ -5243,7 +5159,7 @@
                 <a:ea typeface="Microsoft JhengHei" pitchFamily="34" charset="-122"/>
                 <a:cs typeface="Microsoft JhengHei" pitchFamily="34" charset="-120"/>
               </a:rPr>
-              <a:t>PD-1 阻斷增強 B 細胞反應。</a:t>
+              <a:t>HCC手術後復發率高。</a:t>
             </a:r>
             <a:endParaRPr lang="en-US" sz="1800" dirty="0"/>
           </a:p>
@@ -5264,7 +5180,7 @@
                 <a:ea typeface="Microsoft JhengHei" pitchFamily="34" charset="-122"/>
                 <a:cs typeface="Microsoft JhengHei" pitchFamily="34" charset="-120"/>
               </a:rPr>
-              <a:t>識別出不同 T 細胞和 B 細胞亞型。</a:t>
+              <a:t>識別多克隆和單克隆復發。</a:t>
             </a:r>
             <a:endParaRPr lang="en-US" sz="1800" dirty="0"/>
           </a:p>
@@ -5285,7 +5201,7 @@
                 <a:ea typeface="Microsoft JhengHei" pitchFamily="34" charset="-122"/>
                 <a:cs typeface="Microsoft JhengHei" pitchFamily="34" charset="-120"/>
               </a:rPr>
-              <a:t>HBcAg 觸發局部 B 細胞活化。</a:t>
+              <a:t>多克隆復發與免疫抑制相關。</a:t>
             </a:r>
             <a:endParaRPr lang="en-US" sz="1800" dirty="0"/>
           </a:p>
@@ -5306,7 +5222,7 @@
                 <a:ea typeface="Microsoft JhengHei" pitchFamily="34" charset="-122"/>
                 <a:cs typeface="Microsoft JhengHei" pitchFamily="34" charset="-120"/>
               </a:rPr>
-              <a:t>補體活化介導抗腫瘤效果。</a:t>
+              <a:t>遠端轉移源自侵略性亞克隆。</a:t>
             </a:r>
             <a:endParaRPr lang="en-US" sz="1800" dirty="0"/>
           </a:p>
@@ -5327,7 +5243,7 @@
                 <a:ea typeface="Microsoft JhengHei" pitchFamily="34" charset="-122"/>
                 <a:cs typeface="Microsoft JhengHei" pitchFamily="34" charset="-120"/>
               </a:rPr>
-              <a:t>研究支持抗 PD-1 治療療效。</a:t>
+              <a:t>多組學模型準確預測復發。</a:t>
             </a:r>
             <a:endParaRPr lang="en-US" sz="1800" dirty="0"/>
           </a:p>
@@ -5363,7 +5279,7 @@
                   <a:srgbClr val="888888"/>
                 </a:solidFill>
               </a:rPr>
-              <a:t>Chen Shuling, Wang Yuanqi, Chen Jingying et al.. Cancer cell. 2026-07-16 DOI: 10.1016/j.ccell.2026.06.010</a:t>
+              <a:t>Zhang Ying, Sekar Karthik, Phua Cheryl Zi Jin et al.. Gut. 2026-07-21 DOI: 10.1136/gutjnl-2026-338227</a:t>
             </a:r>
             <a:endParaRPr lang="en-US" sz="800" dirty="0"/>
           </a:p>
@@ -5563,7 +5479,7 @@
                   </a:extLst>
                 </a:hlinkClick>
               </a:rPr>
-              <a:t>Long-term Survival and Cure Fraction in Patients with Advanced Hepatocellular Carcinoma under Immunotherapy in Randomized Controlled Trials and Real-world Data.</a:t>
+              <a:t>Conversion surgery as a missing outcome in first-line immunotherapy trials for hepatocellular carcinoma</a:t>
             </a:r>
             <a:endParaRPr lang="en-US" sz="2400" dirty="0"/>
           </a:p>
@@ -5599,7 +5515,7 @@
                   <a:srgbClr val="888888"/>
                 </a:solidFill>
               </a:rPr>
-              <a:t>Clinical cancer research : an official journal of the American Association for Cancer Research  ·  IF 11.5  ·  RCT Phase 3  ·  🌏 Asia</a:t>
+              <a:t>Journal of Hepatology  ·  IF 25.7</a:t>
             </a:r>
             <a:endParaRPr lang="en-US" sz="1000" dirty="0"/>
           </a:p>
@@ -5642,7 +5558,7 @@
                 <a:ea typeface="Microsoft JhengHei" pitchFamily="34" charset="-122"/>
                 <a:cs typeface="Microsoft JhengHei" pitchFamily="34" charset="-120"/>
               </a:rPr>
-              <a:t>免疫檢查點抑制劑提升存活率。</a:t>
+              <a:t>肝癌治療中的轉化手術</a:t>
             </a:r>
             <a:endParaRPr lang="en-US" sz="1800" dirty="0"/>
           </a:p>
@@ -5663,7 +5579,7 @@
                 <a:ea typeface="Microsoft JhengHei" pitchFamily="34" charset="-122"/>
                 <a:cs typeface="Microsoft JhengHei" pitchFamily="34" charset="-120"/>
               </a:rPr>
-              <a:t>長期存活率介於10%至15%。</a:t>
+              <a:t>評估免疫治療加ipilimumab</a:t>
             </a:r>
             <a:endParaRPr lang="en-US" sz="1800" dirty="0"/>
           </a:p>
@@ -5684,7 +5600,7 @@
                 <a:ea typeface="Microsoft JhengHei" pitchFamily="34" charset="-122"/>
                 <a:cs typeface="Microsoft JhengHei" pitchFamily="34" charset="-120"/>
               </a:rPr>
-              <a:t>治癒比例估計為7%至9%。</a:t>
+              <a:t>需要圍手術期免疫支持</a:t>
             </a:r>
             <a:endParaRPr lang="en-US" sz="1800" dirty="0"/>
           </a:p>
@@ -5705,7 +5621,7 @@
                 <a:ea typeface="Microsoft JhengHei" pitchFamily="34" charset="-122"/>
                 <a:cs typeface="Microsoft JhengHei" pitchFamily="34" charset="-120"/>
               </a:rPr>
-              <a:t>Durvalumab-tremelimumab顯示良好結果。</a:t>
+              <a:t>可切除HCC患者的潛力</a:t>
             </a:r>
             <a:endParaRPr lang="en-US" sz="1800" dirty="0"/>
           </a:p>
@@ -5726,7 +5642,7 @@
                 <a:ea typeface="Microsoft JhengHei" pitchFamily="34" charset="-122"/>
                 <a:cs typeface="Microsoft JhengHei" pitchFamily="34" charset="-120"/>
               </a:rPr>
-              <a:t>白蛋白-膽紅素得分預測存活結果。</a:t>
+              <a:t>試驗中手術結果的重要性</a:t>
             </a:r>
             <a:endParaRPr lang="en-US" sz="1800" dirty="0"/>
           </a:p>
@@ -5762,7 +5678,7 @@
                   <a:srgbClr val="888888"/>
                 </a:solidFill>
               </a:rPr>
-              <a:t>Campani Claudia, Shim Ju Hyun, Bouattour Mohamed et al.. Clinical cancer research : an official journal of the American Association for Cancer Research. 2026-07-17 DOI: 10.1158/1078-0432.CCR-25-4943</a:t>
+              <a:t>C Xu, J Sun, Q Liang. Journal of Hepatology. 2026</a:t>
             </a:r>
             <a:endParaRPr lang="en-US" sz="800" dirty="0"/>
           </a:p>
@@ -5962,7 +5878,7 @@
                   </a:extLst>
                 </a:hlinkClick>
               </a:rPr>
-              <a:t>Targeting tumor-intrinsic STK40 induces immune vulnerability and drives T cell reinvigoration.</a:t>
+              <a:t>Nivolumab in combination with lenvatinib in unresectable hepatocellular carcinoma: The IKF-t006/IMMUNIB translational phase-2 study.</a:t>
             </a:r>
             <a:endParaRPr lang="en-US" sz="2400" dirty="0"/>
           </a:p>
@@ -5998,7 +5914,7 @@
                   <a:srgbClr val="888888"/>
                 </a:solidFill>
               </a:rPr>
-              <a:t>Cancer cell  ·  IF 48.8  ·  Basic Research</a:t>
+              <a:t>European journal of cancer (Oxford, England : 1990)  ·  IF 8.4  ·  RCT Phase 2</a:t>
             </a:r>
             <a:endParaRPr lang="en-US" sz="1000" dirty="0"/>
           </a:p>
@@ -6041,7 +5957,7 @@
                 <a:ea typeface="Microsoft JhengHei" pitchFamily="34" charset="-122"/>
                 <a:cs typeface="Microsoft JhengHei" pitchFamily="34" charset="-120"/>
               </a:rPr>
-              <a:t>STK40被認定為免疫逃逸調節因子</a:t>
+              <a:t>Nivolumab與lenvatinib治療不可切除HCC</a:t>
             </a:r>
             <a:endParaRPr lang="en-US" sz="1800" dirty="0"/>
           </a:p>
@@ -6062,7 +5978,7 @@
                 <a:ea typeface="Microsoft JhengHei" pitchFamily="34" charset="-122"/>
                 <a:cs typeface="Microsoft JhengHei" pitchFamily="34" charset="-120"/>
               </a:rPr>
-              <a:t>去除STK40增強PD-1療效</a:t>
+              <a:t>試驗中客觀反應率為32%</a:t>
             </a:r>
             <a:endParaRPr lang="en-US" sz="1800" dirty="0"/>
           </a:p>
@@ -6083,7 +5999,7 @@
                 <a:ea typeface="Microsoft JhengHei" pitchFamily="34" charset="-122"/>
                 <a:cs typeface="Microsoft JhengHei" pitchFamily="34" charset="-120"/>
               </a:rPr>
-              <a:t>STK40缺失防止HCC腫瘤形成</a:t>
+              <a:t>中位整體存活達26.6個月</a:t>
             </a:r>
             <a:endParaRPr lang="en-US" sz="1800" dirty="0"/>
           </a:p>
@@ -6104,7 +6020,7 @@
                 <a:ea typeface="Microsoft JhengHei" pitchFamily="34" charset="-122"/>
                 <a:cs typeface="Microsoft JhengHei" pitchFamily="34" charset="-120"/>
               </a:rPr>
-              <a:t>STK40缺失穩定IFNGR1</a:t>
+              <a:t>不良事件包括結腸炎與高血壓</a:t>
             </a:r>
             <a:endParaRPr lang="en-US" sz="1800" dirty="0"/>
           </a:p>
@@ -6125,7 +6041,7 @@
                 <a:ea typeface="Microsoft JhengHei" pitchFamily="34" charset="-122"/>
                 <a:cs typeface="Microsoft JhengHei" pitchFamily="34" charset="-120"/>
               </a:rPr>
-              <a:t>藥物抑制顯示強效抗腫瘤效果</a:t>
+              <a:t>FGFR活化與治療效益相關</a:t>
             </a:r>
             <a:endParaRPr lang="en-US" sz="1800" dirty="0"/>
           </a:p>
@@ -6161,7 +6077,7 @@
                   <a:srgbClr val="888888"/>
                 </a:solidFill>
               </a:rPr>
-              <a:t>Zhu Lili, Zhang Sisi, Li Botai et al.. Cancer cell. 2026-07-14 DOI: 10.1016/j.ccell.2026.05.001</a:t>
+              <a:t>Vogel Arndt, Ben Khaled Najib, Ramirez Javier Ruiz et al.. European journal of cancer (Oxford, England : 1990). 2026-07-08 DOI: 10.1016/j.ejca.2026.116847</a:t>
             </a:r>
             <a:endParaRPr lang="en-US" sz="800" dirty="0"/>
           </a:p>
@@ -6361,7 +6277,7 @@
                   </a:extLst>
                 </a:hlinkClick>
               </a:rPr>
-              <a:t>Pembrolizumab and stereotactic body radiotherapy combined in advanced hepatocellular carcinoma post sorafenib–A phase II trial (PEMRAD)</a:t>
+              <a:t>Decoding neoantigen-encoding tumor-specific transcripts unveils a shared target reservoir for immunotherapy in hepatocellular carcinoma.</a:t>
             </a:r>
             <a:endParaRPr lang="en-US" sz="2400" dirty="0"/>
           </a:p>
@@ -6397,7 +6313,7 @@
                   <a:srgbClr val="888888"/>
                 </a:solidFill>
               </a:rPr>
-              <a:t>JHEP Reports  ·  IF 7.8  ·  RCT Phase 2</a:t>
+              <a:t>Journal for immunotherapy of cancer  ·  IF 10.9  ·  Basic Research</a:t>
             </a:r>
             <a:endParaRPr lang="en-US" sz="1000" dirty="0"/>
           </a:p>
@@ -6440,7 +6356,7 @@
                 <a:ea typeface="Microsoft JhengHei" pitchFamily="34" charset="-122"/>
                 <a:cs typeface="Microsoft JhengHei" pitchFamily="34" charset="-120"/>
               </a:rPr>
-              <a:t>結合 pembrolizumab 和 SBRT</a:t>
+              <a:t>發現NeoTSTs作為豐富靶點</a:t>
             </a:r>
             <a:endParaRPr lang="en-US" sz="1800" dirty="0"/>
           </a:p>
@@ -6461,7 +6377,7 @@
                 <a:ea typeface="Microsoft JhengHei" pitchFamily="34" charset="-122"/>
                 <a:cs typeface="Microsoft JhengHei" pitchFamily="34" charset="-120"/>
               </a:rPr>
-              <a:t>針對晚期 HCC 的二期試驗</a:t>
+              <a:t>頻率高於突變衍生neoantigens</a:t>
             </a:r>
             <a:endParaRPr lang="en-US" sz="1800" dirty="0"/>
           </a:p>
@@ -6482,7 +6398,7 @@
                 <a:ea typeface="Microsoft JhengHei" pitchFamily="34" charset="-122"/>
                 <a:cs typeface="Microsoft JhengHei" pitchFamily="34" charset="-120"/>
               </a:rPr>
-              <a:t>評估索拉非尼後療效</a:t>
+              <a:t>通過蛋白質組學和模型驗證</a:t>
             </a:r>
             <a:endParaRPr lang="en-US" sz="1800" dirty="0"/>
           </a:p>
@@ -6503,7 +6419,7 @@
                 <a:ea typeface="Microsoft JhengHei" pitchFamily="34" charset="-122"/>
                 <a:cs typeface="Microsoft JhengHei" pitchFamily="34" charset="-120"/>
               </a:rPr>
-              <a:t>觀察到改善的病人結果</a:t>
+              <a:t>機制包括保留內含子和激活</a:t>
             </a:r>
             <a:endParaRPr lang="en-US" sz="1800" dirty="0"/>
           </a:p>
@@ -6524,7 +6440,7 @@
                 <a:ea typeface="Microsoft JhengHei" pitchFamily="34" charset="-122"/>
                 <a:cs typeface="Microsoft JhengHei" pitchFamily="34" charset="-120"/>
               </a:rPr>
-              <a:t>增強免疫反應的潛力</a:t>
+              <a:t>NeoTSTs增強免疫療法療效</a:t>
             </a:r>
             <a:endParaRPr lang="en-US" sz="1800" dirty="0"/>
           </a:p>
@@ -6560,7 +6476,7 @@
                   <a:srgbClr val="888888"/>
                 </a:solidFill>
               </a:rPr>
-              <a:t>GM O'Kane, A Mesci, RW Jang. JHEP Reports. 2026</a:t>
+              <a:t>Lin Peng, Wen Yifan, Zhao Jingjing et al.. Journal for immunotherapy of cancer. 2026-07-21 DOI: 10.1136/jitc-2026-015428</a:t>
             </a:r>
             <a:endParaRPr lang="en-US" sz="800" dirty="0"/>
           </a:p>
@@ -6760,7 +6676,7 @@
                   </a:extLst>
                 </a:hlinkClick>
               </a:rPr>
-              <a:t>Neoadjuvant Stereotactic Body Radiotherapy plus Immune Therapy Favorably Remodels the Hepatocellular Carcinoma Tumor Microenvironment.</a:t>
+              <a:t>Bevacizumab plus iparomlimab/tuvonralimab with hepatic artery infusion chemotherapy followed by stereotactic body radiotherapy in patients with BCLC stage C hepatocellular carcinoma with thrombus and/or extrahepatic oligometastases (BITS-TO-HCC): study protocol of a prospective, single-center, single-arm, phase II study.</a:t>
             </a:r>
             <a:endParaRPr lang="en-US" sz="2400" dirty="0"/>
           </a:p>
@@ -6796,7 +6712,7 @@
                   <a:srgbClr val="888888"/>
                 </a:solidFill>
               </a:rPr>
-              <a:t>Clinical cancer research : an official journal of the American Association for Cancer Research  ·  IF 11.5  ·  Prospective Study</a:t>
+              <a:t>Therapeutic advances in medical oncology  ·  RCT Phase 2</a:t>
             </a:r>
             <a:endParaRPr lang="en-US" sz="1000" dirty="0"/>
           </a:p>
@@ -6839,7 +6755,7 @@
                 <a:ea typeface="Microsoft JhengHei" pitchFamily="34" charset="-122"/>
                 <a:cs typeface="Microsoft JhengHei" pitchFamily="34" charset="-120"/>
               </a:rPr>
-              <a:t>使用新輔助SBRT和免疫療法。</a:t>
+              <a:t>針對晚期HCC患者的組合療法</a:t>
             </a:r>
             <a:endParaRPr lang="en-US" sz="1800" dirty="0"/>
           </a:p>
@@ -6860,7 +6776,7 @@
                 <a:ea typeface="Microsoft JhengHei" pitchFamily="34" charset="-122"/>
                 <a:cs typeface="Microsoft JhengHei" pitchFamily="34" charset="-120"/>
               </a:rPr>
-              <a:t>進行8名患者的初步研究。</a:t>
+              <a:t>HAIC與免疫療法的序列策略</a:t>
             </a:r>
             <a:endParaRPr lang="en-US" sz="1800" dirty="0"/>
           </a:p>
@@ -6881,7 +6797,7 @@
                 <a:ea typeface="Microsoft JhengHei" pitchFamily="34" charset="-122"/>
                 <a:cs typeface="Microsoft JhengHei" pitchFamily="34" charset="-120"/>
               </a:rPr>
-              <a:t>僅1名患者出現3級不良事件。</a:t>
+              <a:t>主要終點：無進展生存期</a:t>
             </a:r>
             <a:endParaRPr lang="en-US" sz="1800" dirty="0"/>
           </a:p>
@@ -6902,7 +6818,7 @@
                 <a:ea typeface="Microsoft JhengHei" pitchFamily="34" charset="-122"/>
                 <a:cs typeface="Microsoft JhengHei" pitchFamily="34" charset="-120"/>
               </a:rPr>
-              <a:t>所有患者達到邊緣陰性切除。</a:t>
+              <a:t>次要終點包括整體生存期</a:t>
             </a:r>
             <a:endParaRPr lang="en-US" sz="1800" dirty="0"/>
           </a:p>
@@ -6923,7 +6839,7 @@
                 <a:ea typeface="Microsoft JhengHei" pitchFamily="34" charset="-122"/>
                 <a:cs typeface="Microsoft JhengHei" pitchFamily="34" charset="-120"/>
               </a:rPr>
-              <a:t>治療後觀察到免疫浸潤增加。</a:t>
+              <a:t>研究已在ClinicalTrials.gov登記</a:t>
             </a:r>
             <a:endParaRPr lang="en-US" sz="1800" dirty="0"/>
           </a:p>
@@ -6959,7 +6875,7 @@
                   <a:srgbClr val="888888"/>
                 </a:solidFill>
               </a:rPr>
-              <a:t>Cosner Zoe, Guo Zhoubo, Nawrocki Cole et al.. Clinical cancer research : an official journal of the American Association for Cancer Research. 2026-07-17 DOI: 10.1158/1078-0432.CCR-25-4779</a:t>
+              <a:t>Liu Yuxin, Wang Haohua, Zhu Kunli et al.. Therapeutic advances in medical oncology. 2026-07-26 DOI: 10.1177/17588359261470693</a:t>
             </a:r>
             <a:endParaRPr lang="en-US" sz="800" dirty="0"/>
           </a:p>
@@ -7159,7 +7075,7 @@
                   </a:extLst>
                 </a:hlinkClick>
               </a:rPr>
-              <a:t>Second-Line and Subsequent Therapies after Atezolizumab Plus Bevacizumab Treatment in Hepatocellular Carcinoma: A Multicenter Prospective Cohort Study.</a:t>
+              <a:t>Pembrolizumab and stereotactic body radiotherapy combined in advanced hepatocellular carcinoma post sorafenib–A phase II trial (PEMRAD)</a:t>
             </a:r>
             <a:endParaRPr lang="en-US" sz="2400" dirty="0"/>
           </a:p>
@@ -7195,7 +7111,7 @@
                   <a:srgbClr val="888888"/>
                 </a:solidFill>
               </a:rPr>
-              <a:t>Gut and liver  ·  Prospective Study  ·  🌏 Asia</a:t>
+              <a:t>JHEP …  ·  RCT Phase 2</a:t>
             </a:r>
             <a:endParaRPr lang="en-US" sz="1000" dirty="0"/>
           </a:p>
@@ -7238,7 +7154,7 @@
                 <a:ea typeface="Microsoft JhengHei" pitchFamily="34" charset="-122"/>
                 <a:cs typeface="Microsoft JhengHei" pitchFamily="34" charset="-120"/>
               </a:rPr>
-              <a:t>評估二線及三線治療</a:t>
+              <a:t>PEMRAD 二期試驗啟動。</a:t>
             </a:r>
             <a:endParaRPr lang="en-US" sz="1800" dirty="0"/>
           </a:p>
@@ -7259,7 +7175,7 @@
                 <a:ea typeface="Microsoft JhengHei" pitchFamily="34" charset="-122"/>
                 <a:cs typeface="Microsoft JhengHei" pitchFamily="34" charset="-120"/>
               </a:rPr>
-              <a:t>Lenvatinib PFS優於sorafenib</a:t>
+              <a:t>結合 pembrolizumab 與放療。</a:t>
             </a:r>
             <a:endParaRPr lang="en-US" sz="1800" dirty="0"/>
           </a:p>
@@ -7280,7 +7196,7 @@
                 <a:ea typeface="Microsoft JhengHei" pitchFamily="34" charset="-122"/>
                 <a:cs typeface="Microsoft JhengHei" pitchFamily="34" charset="-120"/>
               </a:rPr>
-              <a:t>Regorafenib顯示OS改善趨勢</a:t>
+              <a:t>針對晚期肝細胞癌。</a:t>
             </a:r>
             <a:endParaRPr lang="en-US" sz="1800" dirty="0"/>
           </a:p>
@@ -7301,7 +7217,7 @@
                 <a:ea typeface="Microsoft JhengHei" pitchFamily="34" charset="-122"/>
                 <a:cs typeface="Microsoft JhengHei" pitchFamily="34" charset="-120"/>
               </a:rPr>
-              <a:t>序列治療結果更佳</a:t>
+              <a:t>在 sorafenib 治療後進行。</a:t>
             </a:r>
             <a:endParaRPr lang="en-US" sz="1800" dirty="0"/>
           </a:p>
@@ -7322,7 +7238,7 @@
                 <a:ea typeface="Microsoft JhengHei" pitchFamily="34" charset="-122"/>
                 <a:cs typeface="Microsoft JhengHei" pitchFamily="34" charset="-120"/>
               </a:rPr>
-              <a:t>AtezoBev暴露時間長與OS相關</a:t>
+              <a:t>評估安全性與療效。</a:t>
             </a:r>
             <a:endParaRPr lang="en-US" sz="1800" dirty="0"/>
           </a:p>
@@ -7358,7 +7274,7 @@
                   <a:srgbClr val="888888"/>
                 </a:solidFill>
               </a:rPr>
-              <a:t>Cho Yuri, Lee Jeong-Hoon, Ryoo Baek-Yeol et al.. Gut and liver. 2026-07-14 DOI: 10.5009/gnl250532</a:t>
+              <a:t>GM O'Kane, A Mesci, RW Jang. JHEP …. 2026</a:t>
             </a:r>
             <a:endParaRPr lang="en-US" sz="800" dirty="0"/>
           </a:p>
@@ -7558,7 +7474,7 @@
                   </a:extLst>
                 </a:hlinkClick>
               </a:rPr>
-              <a:t>Mechanistic synergies and optimal sequencing of anti&amp;#x2011;VEGF plus immune checkpoint inhibition in gastrointestinal cancers.</a:t>
+              <a:t>Image-guided radiofrequency versus microwave ablation for small to medium hepatocellular carcinoma: a meta-analysis</a:t>
             </a:r>
             <a:endParaRPr lang="en-US" sz="2400" dirty="0"/>
           </a:p>
@@ -7594,7 +7510,7 @@
                   <a:srgbClr val="888888"/>
                 </a:solidFill>
               </a:rPr>
-              <a:t>Discover oncology  ·  RCT Phase 2</a:t>
+              <a:t>Frontiers in Oncology  ·  Meta-Analysis</a:t>
             </a:r>
             <a:endParaRPr lang="en-US" sz="1000" dirty="0"/>
           </a:p>
@@ -7637,7 +7553,7 @@
                 <a:ea typeface="Microsoft JhengHei" pitchFamily="34" charset="-122"/>
                 <a:cs typeface="Microsoft JhengHei" pitchFamily="34" charset="-120"/>
               </a:rPr>
-              <a:t>抗VEGF與ICI聯合療法提升療效。</a:t>
+              <a:t>專注於小至中型HCC患者</a:t>
             </a:r>
             <a:endParaRPr lang="en-US" sz="1800" dirty="0"/>
           </a:p>
@@ -7658,7 +7574,7 @@
                 <a:ea typeface="Microsoft JhengHei" pitchFamily="34" charset="-122"/>
                 <a:cs typeface="Microsoft JhengHei" pitchFamily="34" charset="-120"/>
               </a:rPr>
-              <a:t>Atezolizumab加Bevacizumab在晚期HCC有效。</a:t>
+              <a:t>比較射頻與微波消融</a:t>
             </a:r>
             <a:endParaRPr lang="en-US" sz="1800" dirty="0"/>
           </a:p>
@@ -7679,7 +7595,49 @@
                 <a:ea typeface="Microsoft JhengHei" pitchFamily="34" charset="-122"/>
                 <a:cs typeface="Microsoft JhengHei" pitchFamily="34" charset="-120"/>
               </a:rPr>
-              <a:t>最佳序列策略對療效至關重要。</a:t>
+              <a:t>納入隨機對照試驗</a:t>
+            </a:r>
+            <a:endParaRPr lang="en-US" sz="1800" dirty="0"/>
+          </a:p>
+          <a:p>
+            <a:pPr marL="342900" indent="-342900">
+              <a:spcAft>
+                <a:spcPts val="800"/>
+              </a:spcAft>
+              <a:buSzPct val="100000"/>
+              <a:buChar char="•"/>
+            </a:pPr>
+            <a:r>
+              <a:rPr lang="en-US" sz="1800" dirty="0">
+                <a:solidFill>
+                  <a:srgbClr val="333333"/>
+                </a:solidFill>
+                <a:latin typeface="Microsoft JhengHei" pitchFamily="34" charset="0"/>
+                <a:ea typeface="Microsoft JhengHei" pitchFamily="34" charset="-122"/>
+                <a:cs typeface="Microsoft JhengHei" pitchFamily="34" charset="-120"/>
+              </a:rPr>
+              <a:t>評估治療效果與安全性</a:t>
+            </a:r>
+            <a:endParaRPr lang="en-US" sz="1800" dirty="0"/>
+          </a:p>
+          <a:p>
+            <a:pPr marL="342900" indent="-342900">
+              <a:spcAft>
+                <a:spcPts val="800"/>
+              </a:spcAft>
+              <a:buSzPct val="100000"/>
+              <a:buChar char="•"/>
+            </a:pPr>
+            <a:r>
+              <a:rPr lang="en-US" sz="1800" dirty="0">
+                <a:solidFill>
+                  <a:srgbClr val="333333"/>
+                </a:solidFill>
+                <a:latin typeface="Microsoft JhengHei" pitchFamily="34" charset="0"/>
+                <a:ea typeface="Microsoft JhengHei" pitchFamily="34" charset="-122"/>
+                <a:cs typeface="Microsoft JhengHei" pitchFamily="34" charset="-120"/>
+              </a:rPr>
+              <a:t>綜合分析提供深入見解</a:t>
             </a:r>
             <a:endParaRPr lang="en-US" sz="1800" dirty="0"/>
           </a:p>
@@ -7715,7 +7673,7 @@
                   <a:srgbClr val="888888"/>
                 </a:solidFill>
               </a:rPr>
-              <a:t>Lorestani Parsa, Robat-Jazi Behrouz, Nejati Negar et al.. Discover oncology. 2026-07-17 DOI: 10.1007/s12672-026-05539-3</a:t>
+              <a:t>Y Fu, L Wang, T Hu. Frontiers in Oncology. 2026</a:t>
             </a:r>
             <a:endParaRPr lang="en-US" sz="800" dirty="0"/>
           </a:p>

--- a/docs/digest-zh.pptx
+++ b/docs/digest-zh.pptx
@@ -2269,7 +2269,7 @@
                   <a:srgbClr val="888888"/>
                 </a:solidFill>
               </a:rPr>
-              <a:t>2026-07-20 — 2026-07-27</a:t>
+              <a:t>2026-07-27 — 2026-08-03</a:t>
             </a:r>
             <a:endParaRPr lang="en-US" sz="1400" dirty="0"/>
           </a:p>
@@ -2460,7 +2460,7 @@
                   </a:extLst>
                 </a:hlinkClick>
               </a:rPr>
-              <a:t>Radiotherapy versus local ablation therapy for the treatment of hepatocellular carcinoma: A systematic review and meta-analysis.</a:t>
+              <a:t>Low-dose bevacizumab plus atezolizumab enhances transarterial chemoembolization in HCC via correcting vascular-immune niche dysfunction.</a:t>
             </a:r>
             <a:endParaRPr lang="en-US" sz="2400" dirty="0"/>
           </a:p>
@@ -2496,7 +2496,7 @@
                   <a:srgbClr val="888888"/>
                 </a:solidFill>
               </a:rPr>
-              <a:t>Journal of Clinical …  ·  Meta-Analysis</a:t>
+              <a:t>Journal of hepatology  ·  IF 25.7  ·  Retrospective Study</a:t>
             </a:r>
             <a:endParaRPr lang="en-US" sz="1000" dirty="0"/>
           </a:p>
@@ -2539,7 +2539,7 @@
                 <a:ea typeface="Microsoft JhengHei" pitchFamily="34" charset="-122"/>
                 <a:cs typeface="Microsoft JhengHei" pitchFamily="34" charset="-120"/>
               </a:rPr>
-              <a:t>放射治療與局部消融比較</a:t>
+              <a:t>TACE後HCC腫瘤特徵不明確。</a:t>
             </a:r>
             <a:endParaRPr lang="en-US" sz="1800" dirty="0"/>
           </a:p>
@@ -2560,7 +2560,7 @@
                 <a:ea typeface="Microsoft JhengHei" pitchFamily="34" charset="-122"/>
                 <a:cs typeface="Microsoft JhengHei" pitchFamily="34" charset="-120"/>
               </a:rPr>
-              <a:t>針對肝細胞癌治療</a:t>
+              <a:t>PDGFC+ TAM促進免疫抑制環境。</a:t>
             </a:r>
             <a:endParaRPr lang="en-US" sz="1800" dirty="0"/>
           </a:p>
@@ -2581,49 +2581,7 @@
                 <a:ea typeface="Microsoft JhengHei" pitchFamily="34" charset="-122"/>
                 <a:cs typeface="Microsoft JhengHei" pitchFamily="34" charset="-120"/>
               </a:rPr>
-              <a:t>局部無進展生存分析</a:t>
-            </a:r>
-            <a:endParaRPr lang="en-US" sz="1800" dirty="0"/>
-          </a:p>
-          <a:p>
-            <a:pPr marL="342900" indent="-342900">
-              <a:spcAft>
-                <a:spcPts val="800"/>
-              </a:spcAft>
-              <a:buSzPct val="100000"/>
-              <a:buChar char="•"/>
-            </a:pPr>
-            <a:r>
-              <a:rPr lang="en-US" sz="1800" dirty="0">
-                <a:solidFill>
-                  <a:srgbClr val="333333"/>
-                </a:solidFill>
-                <a:latin typeface="Microsoft JhengHei" pitchFamily="34" charset="0"/>
-                <a:ea typeface="Microsoft JhengHei" pitchFamily="34" charset="-122"/>
-                <a:cs typeface="Microsoft JhengHei" pitchFamily="34" charset="-120"/>
-              </a:rPr>
-              <a:t>評估射頻與微波消融</a:t>
-            </a:r>
-            <a:endParaRPr lang="en-US" sz="1800" dirty="0"/>
-          </a:p>
-          <a:p>
-            <a:pPr marL="342900" indent="-342900">
-              <a:spcAft>
-                <a:spcPts val="800"/>
-              </a:spcAft>
-              <a:buSzPct val="100000"/>
-              <a:buChar char="•"/>
-            </a:pPr>
-            <a:r>
-              <a:rPr lang="en-US" sz="1800" dirty="0">
-                <a:solidFill>
-                  <a:srgbClr val="333333"/>
-                </a:solidFill>
-                <a:latin typeface="Microsoft JhengHei" pitchFamily="34" charset="0"/>
-                <a:ea typeface="Microsoft JhengHei" pitchFamily="34" charset="-122"/>
-                <a:cs typeface="Microsoft JhengHei" pitchFamily="34" charset="-120"/>
-              </a:rPr>
-              <a:t>進行系統性回顧與分析</a:t>
+              <a:t>低劑量bevacizumab加atezolizumab改善療效。</a:t>
             </a:r>
             <a:endParaRPr lang="en-US" sz="1800" dirty="0"/>
           </a:p>
@@ -2659,7 +2617,7 @@
                   <a:srgbClr val="888888"/>
                 </a:solidFill>
               </a:rPr>
-              <a:t>SH Bae, SH Choi, SM Yoon. Journal of Clinical …. 2026</a:t>
+              <a:t>Zhao Chenghao, Yan Huzheng, Liang Zhixing et al.. Journal of hepatology. 2026-07-31 DOI: 10.1016/j.jhep.2026.07.028</a:t>
             </a:r>
             <a:endParaRPr lang="en-US" sz="800" dirty="0"/>
           </a:p>
@@ -2859,7 +2817,7 @@
                   </a:extLst>
                 </a:hlinkClick>
               </a:rPr>
-              <a:t>Immune Checkpoint Inhibitor–Based Adjuvant Treatment Versus Surveillance in Curatively Treated Hepatocellular Carcinoma: a Systematic Review and Meta …</a:t>
+              <a:t>External beam radiotherapy versus local ablation therapy for the treatment of hepatocellular carcinoma: a systematic review and meta-analysis.</a:t>
             </a:r>
             <a:endParaRPr lang="en-US" sz="2400" dirty="0"/>
           </a:p>
@@ -2895,7 +2853,7 @@
                   <a:srgbClr val="888888"/>
                 </a:solidFill>
               </a:rPr>
-              <a:t>Journal of gastroenterology and …  ·  Systematic Review</a:t>
+              <a:t>Clinical and molecular hepatology  ·  Meta-Analysis  ·  🌏 Asia</a:t>
             </a:r>
             <a:endParaRPr lang="en-US" sz="1000" dirty="0"/>
           </a:p>
@@ -2938,7 +2896,7 @@
                 <a:ea typeface="Microsoft JhengHei" pitchFamily="34" charset="-122"/>
                 <a:cs typeface="Microsoft JhengHei" pitchFamily="34" charset="-120"/>
               </a:rPr>
-              <a:t>免疫檢查點抑制劑在HCC中展現潛力。</a:t>
+              <a:t>EBRT局部復發率較低。</a:t>
             </a:r>
             <a:endParaRPr lang="en-US" sz="1800" dirty="0"/>
           </a:p>
@@ -2959,7 +2917,7 @@
                 <a:ea typeface="Microsoft JhengHei" pitchFamily="34" charset="-122"/>
                 <a:cs typeface="Microsoft JhengHei" pitchFamily="34" charset="-120"/>
               </a:rPr>
-              <a:t>輔助治療改善手術後結果。</a:t>
+              <a:t>EBRT局部無進展生存改善。</a:t>
             </a:r>
             <a:endParaRPr lang="en-US" sz="1800" dirty="0"/>
           </a:p>
@@ -2980,7 +2938,49 @@
                 <a:ea typeface="Microsoft JhengHei" pitchFamily="34" charset="-122"/>
                 <a:cs typeface="Microsoft JhengHei" pitchFamily="34" charset="-120"/>
               </a:rPr>
-              <a:t>僅監測可能不足夠。</a:t>
+              <a:t>EBRT與LAT整體生存率相似。</a:t>
+            </a:r>
+            <a:endParaRPr lang="en-US" sz="1800" dirty="0"/>
+          </a:p>
+          <a:p>
+            <a:pPr marL="342900" indent="-342900">
+              <a:spcAft>
+                <a:spcPts val="800"/>
+              </a:spcAft>
+              <a:buSzPct val="100000"/>
+              <a:buChar char="•"/>
+            </a:pPr>
+            <a:r>
+              <a:rPr lang="en-US" sz="1800" dirty="0">
+                <a:solidFill>
+                  <a:srgbClr val="333333"/>
+                </a:solidFill>
+                <a:latin typeface="Microsoft JhengHei" pitchFamily="34" charset="0"/>
+                <a:ea typeface="Microsoft JhengHei" pitchFamily="34" charset="-122"/>
+                <a:cs typeface="Microsoft JhengHei" pitchFamily="34" charset="-120"/>
+              </a:rPr>
+              <a:t>兩種治療嚴重毒性相當。</a:t>
+            </a:r>
+            <a:endParaRPr lang="en-US" sz="1800" dirty="0"/>
+          </a:p>
+          <a:p>
+            <a:pPr marL="342900" indent="-342900">
+              <a:spcAft>
+                <a:spcPts val="800"/>
+              </a:spcAft>
+              <a:buSzPct val="100000"/>
+              <a:buChar char="•"/>
+            </a:pPr>
+            <a:r>
+              <a:rPr lang="en-US" sz="1800" dirty="0">
+                <a:solidFill>
+                  <a:srgbClr val="333333"/>
+                </a:solidFill>
+                <a:latin typeface="Microsoft JhengHei" pitchFamily="34" charset="0"/>
+                <a:ea typeface="Microsoft JhengHei" pitchFamily="34" charset="-122"/>
+                <a:cs typeface="Microsoft JhengHei" pitchFamily="34" charset="-120"/>
+              </a:rPr>
+              <a:t>EBRT是HCC安全替代療法。</a:t>
             </a:r>
             <a:endParaRPr lang="en-US" sz="1800" dirty="0"/>
           </a:p>
@@ -3016,7 +3016,7 @@
                   <a:srgbClr val="888888"/>
                 </a:solidFill>
               </a:rPr>
-              <a:t>E Akkus, HA Yaşar. Journal of gastroenterology and …. 2026</a:t>
+              <a:t>Bae Sun Hyun, Choi Seo Hee, Yoon Sang Min et al.. Clinical and molecular hepatology. 2026-07-30 DOI: 10.3350/cmh.2026.0535</a:t>
             </a:r>
             <a:endParaRPr lang="en-US" sz="800" dirty="0"/>
           </a:p>
@@ -3216,7 +3216,7 @@
                   </a:extLst>
                 </a:hlinkClick>
               </a:rPr>
-              <a:t>… on interventional therapy and immune checkpoint inhibitors (ICIs) in patients with intermediate-and advanced-stage hepatocellular carcinoma: a systematic review …</a:t>
+              <a:t>Temporal Association Between COVID-19 Vaccination and HBsAg Loss in Chronic Hepatitis B Infection: An Interrupted Time Series Analysis.</a:t>
             </a:r>
             <a:endParaRPr lang="en-US" sz="2400" dirty="0"/>
           </a:p>
@@ -3252,7 +3252,7 @@
                   <a:srgbClr val="888888"/>
                 </a:solidFill>
               </a:rPr>
-              <a:t>… , Immunotherapy  ·  Systematic Review</a:t>
+              <a:t>Alimentary pharmacology &amp; therapeutics  ·  IF 6.6  ·  🌏 Asia</a:t>
             </a:r>
             <a:endParaRPr lang="en-US" sz="1000" dirty="0"/>
           </a:p>
@@ -3295,7 +3295,7 @@
                 <a:ea typeface="Microsoft JhengHei" pitchFamily="34" charset="-122"/>
                 <a:cs typeface="Microsoft JhengHei" pitchFamily="34" charset="-120"/>
               </a:rPr>
-              <a:t>組合療法在HCC中顯示潛力。</a:t>
+              <a:t>研究CHB患者的HBsAg損失</a:t>
             </a:r>
             <a:endParaRPr lang="en-US" sz="1800" dirty="0"/>
           </a:p>
@@ -3316,7 +3316,7 @@
                 <a:ea typeface="Microsoft JhengHei" pitchFamily="34" charset="-122"/>
                 <a:cs typeface="Microsoft JhengHei" pitchFamily="34" charset="-120"/>
               </a:rPr>
-              <a:t>ICIs增強介入療法的療效。</a:t>
+              <a:t>COVID-19疫苗與HBsAg損失相關</a:t>
             </a:r>
             <a:endParaRPr lang="en-US" sz="1800" dirty="0"/>
           </a:p>
@@ -3337,7 +3337,49 @@
                 <a:ea typeface="Microsoft JhengHei" pitchFamily="34" charset="-122"/>
                 <a:cs typeface="Microsoft JhengHei" pitchFamily="34" charset="-120"/>
               </a:rPr>
-              <a:t>系統評估強調臨床結果。</a:t>
+              <a:t>2022年發生率達1.27</a:t>
+            </a:r>
+            <a:endParaRPr lang="en-US" sz="1800" dirty="0"/>
+          </a:p>
+          <a:p>
+            <a:pPr marL="342900" indent="-342900">
+              <a:spcAft>
+                <a:spcPts val="800"/>
+              </a:spcAft>
+              <a:buSzPct val="100000"/>
+              <a:buChar char="•"/>
+            </a:pPr>
+            <a:r>
+              <a:rPr lang="en-US" sz="1800" dirty="0">
+                <a:solidFill>
+                  <a:srgbClr val="333333"/>
+                </a:solidFill>
+                <a:latin typeface="Microsoft JhengHei" pitchFamily="34" charset="0"/>
+                <a:ea typeface="Microsoft JhengHei" pitchFamily="34" charset="-122"/>
+                <a:cs typeface="Microsoft JhengHei" pitchFamily="34" charset="-120"/>
+              </a:rPr>
+              <a:t>HCC發生率無顯著變化</a:t>
+            </a:r>
+            <a:endParaRPr lang="en-US" sz="1800" dirty="0"/>
+          </a:p>
+          <a:p>
+            <a:pPr marL="342900" indent="-342900">
+              <a:spcAft>
+                <a:spcPts val="800"/>
+              </a:spcAft>
+              <a:buSzPct val="100000"/>
+              <a:buChar char="•"/>
+            </a:pPr>
+            <a:r>
+              <a:rPr lang="en-US" sz="1800" dirty="0">
+                <a:solidFill>
+                  <a:srgbClr val="333333"/>
+                </a:solidFill>
+                <a:latin typeface="Microsoft JhengHei" pitchFamily="34" charset="0"/>
+                <a:ea typeface="Microsoft JhengHei" pitchFamily="34" charset="-122"/>
+                <a:cs typeface="Microsoft JhengHei" pitchFamily="34" charset="-120"/>
+              </a:rPr>
+              <a:t>對HBV動態的免疫調節效應</a:t>
             </a:r>
             <a:endParaRPr lang="en-US" sz="1800" dirty="0"/>
           </a:p>
@@ -3373,7 +3415,7 @@
                   <a:srgbClr val="888888"/>
                 </a:solidFill>
               </a:rPr>
-              <a:t>J Su, Y Su, R Mai. … , Immunotherapy. 2026</a:t>
+              <a:t>Choi Jonggi, Carroll Allison, Nguyen Vy H et al.. Alimentary pharmacology &amp; therapeutics. 2026-07-29 DOI: 10.1111/apt.70733</a:t>
             </a:r>
             <a:endParaRPr lang="en-US" sz="800" dirty="0"/>
           </a:p>
@@ -3590,7 +3632,7 @@
                   <a:srgbClr val="FFFFFF"/>
                 </a:solidFill>
               </a:rPr>
-              <a:t>1. **克隆多样性与复发机制**  </a:t>
+              <a:t>1. **免疫療法的潛力**  </a:t>
             </a:r>
             <a:endParaRPr lang="en-US" sz="1200" dirty="0"/>
           </a:p>
@@ -3607,7 +3649,7 @@
                   <a:srgbClr val="FFFFFF"/>
                 </a:solidFill>
               </a:rPr>
-              <a:t>   Clonal diversity plays a critical role in the distinct recurrence patterns observed in hepatocellular carcinoma (HCC), highlighting the need for personalized treatment strategies.  </a:t>
+              <a:t>   The combination of ipilimumab with atezolizumab and bevacizumab shows promising results in improving outcomes for patients with advanced hepatocellular carcinoma (HCC), highlighting the potential of multi-targeted immunotherapy.  </a:t>
             </a:r>
             <a:endParaRPr lang="en-US" sz="1200" dirty="0"/>
           </a:p>
@@ -3624,7 +3666,7 @@
                   <a:srgbClr val="FFFFFF"/>
                 </a:solidFill>
               </a:rPr>
-              <a:t>   克隆多樣性在肝細胞癌（HCC）的不同復發模式中扮演關鍵角色，強調了個性化治療策略的必要性。</a:t>
+              <a:t>   以ipilimumab結合atezolizumab和bevacizumab的療法顯示出改善晚期肝細胞癌（HCC）患者預後的潛力，突顯了多靶向免疫療法的可能性。</a:t>
             </a:r>
             <a:endParaRPr lang="en-US" sz="1200" dirty="0"/>
           </a:p>
@@ -3650,7 +3692,7 @@
                   <a:srgbClr val="FFFFFF"/>
                 </a:solidFill>
               </a:rPr>
-              <a:t>2. **免疫治疗与手术结合的潜力**  </a:t>
+              <a:t>2. **TACE與熱消融的結合**  </a:t>
             </a:r>
             <a:endParaRPr lang="en-US" sz="1200" dirty="0"/>
           </a:p>
@@ -3667,7 +3709,7 @@
                   <a:srgbClr val="FFFFFF"/>
                 </a:solidFill>
               </a:rPr>
-              <a:t>   The integration of immune checkpoint inhibitors with surgical approaches may enhance therapeutic outcomes, particularly in patients with resectable HCC.  </a:t>
+              <a:t>   The TORCH trial indicates that combining transarterial chemoembolization (TACE) with thermal ablation may enhance survival outcomes for patients with unresectable HCC, suggesting a need for integrated treatment approaches.  </a:t>
             </a:r>
             <a:endParaRPr lang="en-US" sz="1200" dirty="0"/>
           </a:p>
@@ -3684,7 +3726,7 @@
                   <a:srgbClr val="FFFFFF"/>
                 </a:solidFill>
               </a:rPr>
-              <a:t>   將免疫檢查點抑制劑與手術方法結合可能會改善治療結果，特別是在可切除的HCC患者中。</a:t>
+              <a:t>   TORCH試驗顯示，將經動脈化療栓塞（TACE）與熱消融相結合可能改善不可切除HCC患者的生存結果，表明需要綜合治療方法。</a:t>
             </a:r>
             <a:endParaRPr lang="en-US" sz="1200" dirty="0"/>
           </a:p>
@@ -3710,7 +3752,7 @@
                   <a:srgbClr val="FFFFFF"/>
                 </a:solidFill>
               </a:rPr>
-              <a:t>3. **新抗原疫苗的挑战与前景**  </a:t>
+              <a:t>3. **腸道微生物與免疫反應的關聯**  </a:t>
             </a:r>
             <a:endParaRPr lang="en-US" sz="1200" dirty="0"/>
           </a:p>
@@ -3727,7 +3769,7 @@
                   <a:srgbClr val="FFFFFF"/>
                 </a:solidFill>
               </a:rPr>
-              <a:t>   Despite the promise of mutation-derived neoantigen vaccines, their clinical application is limited by the availability of suitable antigens, necessitating innovative approaches to neoantigen discovery.  </a:t>
+              <a:t>   Distinct gut microbiota profiles between viral and metabolic dysfunction-associated steatotic liver disease-related HCC suggest that microbiota modulation could be a novel strategy to enhance immunotherapy efficacy.  </a:t>
             </a:r>
             <a:endParaRPr lang="en-US" sz="1200" dirty="0"/>
           </a:p>
@@ -3744,7 +3786,7 @@
                   <a:srgbClr val="FFFFFF"/>
                 </a:solidFill>
               </a:rPr>
-              <a:t>   儘管突變衍生的新抗原疫苗具有潛力，但其臨床應用受到合適抗原可用性的限制，需創新方法來發現新抗原。</a:t>
+              <a:t>   病毒性與代謝功能障礙相關脂肪肝病（MASLD）HCC之間的腸道微生物群特徵差異表明，調節微生物群可能是一種增強免疫療法療效的新策略。</a:t>
             </a:r>
             <a:endParaRPr lang="en-US" sz="1200" dirty="0"/>
           </a:p>
@@ -3770,7 +3812,7 @@
                   <a:srgbClr val="FFFFFF"/>
                 </a:solidFill>
               </a:rPr>
-              <a:t>4. **局部消融与放疗的比较**  </a:t>
+              <a:t>4. **代謝環境對免疫的影響**  </a:t>
             </a:r>
             <a:endParaRPr lang="en-US" sz="1200" dirty="0"/>
           </a:p>
@@ -3787,7 +3829,7 @@
                   <a:srgbClr val="FFFFFF"/>
                 </a:solidFill>
               </a:rPr>
-              <a:t>   Local ablative therapies, such as radiofrequency and microwave ablation, show comparable efficacy to radiotherapy, emphasizing their importance in the management of small to medium HCC.  </a:t>
+              <a:t>   The lipid-rich microenvironment in MASLD-HCC contributes to immune suppression, emphasizing the need to understand metabolic factors in developing effective immunotherapy strategies.  </a:t>
             </a:r>
             <a:endParaRPr lang="en-US" sz="1200" dirty="0"/>
           </a:p>
@@ -3804,7 +3846,7 @@
                   <a:srgbClr val="FFFFFF"/>
                 </a:solidFill>
               </a:rPr>
-              <a:t>   局部消融療法，如射頻和微波消融，顯示出與放療相當的療效，強調了它們在小至中型HCC管理中的重要性。</a:t>
+              <a:t>   MASLD-HCC中的富脂微環境促進免疫抑制，強調在開發有效免疫療法策略時需要理解代謝因素。</a:t>
             </a:r>
             <a:endParaRPr lang="en-US" sz="1200" dirty="0"/>
           </a:p>
@@ -3830,7 +3872,7 @@
                   <a:srgbClr val="FFFFFF"/>
                 </a:solidFill>
               </a:rPr>
-              <a:t>5. **术后免疫治疗的必要性**  </a:t>
+              <a:t>5. **個體化治療的重要性**  </a:t>
             </a:r>
             <a:endParaRPr lang="en-US" sz="1200" dirty="0"/>
           </a:p>
@@ -3847,7 +3889,7 @@
                   <a:srgbClr val="FFFFFF"/>
                 </a:solidFill>
               </a:rPr>
-              <a:t>   There is a growing recognition of the potential benefits of adjuvant immunotherapy following curative treatments for HCC, which may improve long-term outcomes.</a:t>
+              <a:t>   The necessity for personalized treatment strategies in HCC management is underscored, as recurrence rates remain high despite advancements in immunotherapy and antiviral treatments.</a:t>
             </a:r>
             <a:endParaRPr lang="en-US" sz="1200" dirty="0"/>
           </a:p>
@@ -3993,7 +4035,7 @@
                   <a:srgbClr val="FFFFFF"/>
                 </a:solidFill>
               </a:rPr>
-              <a:t>越來越多的認識到術後免疫治療對於HCC的潛在益處，可能改善長期結果。</a:t>
+              <a:t>儘管免疫療法和抗病毒治療有所進展，但HCC管理中對個體化治療策略的必要性仍然突出，因為復發率仍然很高。</a:t>
             </a:r>
             <a:endParaRPr lang="en-US" sz="1200" dirty="0"/>
           </a:p>
@@ -4045,7 +4087,7 @@
                   <a:srgbClr val="FFFFFF"/>
                 </a:solidFill>
               </a:rPr>
-              <a:t>1. **深入研究克隆多样性**  </a:t>
+              <a:t>1. **多重免疫療法的長期效果**  </a:t>
             </a:r>
             <a:endParaRPr lang="en-US" sz="1200" dirty="0"/>
           </a:p>
@@ -4062,7 +4104,7 @@
                   <a:srgbClr val="FFFFFF"/>
                 </a:solidFill>
               </a:rPr>
-              <a:t>   Further investigations into the clonal evolution of HCC could provide insights into recurrence mechanisms and inform targeted therapies.  </a:t>
+              <a:t>   Future studies should focus on the long-term efficacy and safety of multi-agent immunotherapy combinations in HCC, particularly in diverse patient populations.  </a:t>
             </a:r>
             <a:endParaRPr lang="en-US" sz="1200" dirty="0"/>
           </a:p>
@@ -4079,7 +4121,7 @@
                   <a:srgbClr val="FFFFFF"/>
                 </a:solidFill>
               </a:rPr>
-              <a:t>   進一步研究HCC的克隆演化可能提供有關復發機制的見解，並為靶向治療提供依據。</a:t>
+              <a:t>   未來的研究應集中於多藥免疫療法組合在HCC中的長期療效和安全性，特別是在不同患者群體中。</a:t>
             </a:r>
             <a:endParaRPr lang="en-US" sz="1200" dirty="0"/>
           </a:p>
@@ -4105,7 +4147,7 @@
                   <a:srgbClr val="FFFFFF"/>
                 </a:solidFill>
               </a:rPr>
-              <a:t>2. **免疫治疗与局部治疗的联合策略**  </a:t>
+              <a:t>2. **微生物群與免疫療法的交互作用**  </a:t>
             </a:r>
             <a:endParaRPr lang="en-US" sz="1200" dirty="0"/>
           </a:p>
@@ -4122,7 +4164,7 @@
                   <a:srgbClr val="FFFFFF"/>
                 </a:solidFill>
               </a:rPr>
-              <a:t>   Future trials should explore the synergistic effects of combining immune checkpoint inhibitors with local ablation therapies to optimize treatment regimens.  </a:t>
+              <a:t>   Investigating the role of gut microbiota in modulating responses to immunotherapy could provide insights into optimizing treatment protocols for HCC patients.  </a:t>
             </a:r>
             <a:endParaRPr lang="en-US" sz="1200" dirty="0"/>
           </a:p>
@@ -4139,7 +4181,7 @@
                   <a:srgbClr val="FFFFFF"/>
                 </a:solidFill>
               </a:rPr>
-              <a:t>   未來的試驗應探索將免疫檢查點抑制劑與局部消融療法結合的協同效應，以優化治療方案。</a:t>
+              <a:t>   研究腸道微生物群在調節免疫療法反應中的作用可能為優化HCC患者的治療方案提供見解。</a:t>
             </a:r>
             <a:endParaRPr lang="en-US" sz="1200" dirty="0"/>
           </a:p>
@@ -4165,7 +4207,7 @@
                   <a:srgbClr val="FFFFFF"/>
                 </a:solidFill>
               </a:rPr>
-              <a:t>3. **新抗原的发现与应用**  </a:t>
+              <a:t>3. **代謝因素的機制研究**  </a:t>
             </a:r>
             <a:endParaRPr lang="en-US" sz="1200" dirty="0"/>
           </a:p>
@@ -4182,7 +4224,7 @@
                   <a:srgbClr val="FFFFFF"/>
                 </a:solidFill>
               </a:rPr>
-              <a:t>   Research should focus on identifying and validating novel neoantigens that can be effectively targeted by immunotherapies to enhance patient responses.  </a:t>
+              <a:t>   Further exploration of the metabolic pathways involved in MASLD-HCC and their impact on immune responses could lead to novel therapeutic targets.  </a:t>
             </a:r>
             <a:endParaRPr lang="en-US" sz="1200" dirty="0"/>
           </a:p>
@@ -4199,7 +4241,7 @@
                   <a:srgbClr val="FFFFFF"/>
                 </a:solidFill>
               </a:rPr>
-              <a:t>   研究應專注於識別和驗證可以有效被免疫療法靶向的新型新抗原，以增強患者反應。</a:t>
+              <a:t>   進一步探索MASLD-HCC中涉及的代謝途徑及其對免疫反應的影響可能會導致新的治療靶點。</a:t>
             </a:r>
             <a:endParaRPr lang="en-US" sz="1200" dirty="0"/>
           </a:p>
@@ -4225,7 +4267,7 @@
                   <a:srgbClr val="FFFFFF"/>
                 </a:solidFill>
               </a:rPr>
-              <a:t>4. **术后免疫治疗的临床试验**  </a:t>
+              <a:t>4. **個體化治療的臨床應用**  </a:t>
             </a:r>
             <a:endParaRPr lang="en-US" sz="1200" dirty="0"/>
           </a:p>
@@ -4242,7 +4284,7 @@
                   <a:srgbClr val="FFFFFF"/>
                 </a:solidFill>
               </a:rPr>
-              <a:t>   Conducting randomized clinical trials to assess the efficacy of adjuvant immunotherapy in resected HCC patients will be crucial for establishing standard care protocols.  </a:t>
+              <a:t>   Developing and validating personalized treatment algorithms based on genetic, metabolic, and microbiomic profiles will be crucial for improving HCC management.  </a:t>
             </a:r>
             <a:endParaRPr lang="en-US" sz="1200" dirty="0"/>
           </a:p>
@@ -4259,7 +4301,7 @@
                   <a:srgbClr val="FFFFFF"/>
                 </a:solidFill>
               </a:rPr>
-              <a:t>   開展隨機臨床試驗以評估術後免疫治療在切除HCC患者中的療效，對於建立標準護理方案至關重要。</a:t>
+              <a:t>   基於基因、代謝和微生物組特徵開發和驗證個體化治療算法對改善HCC管理至關重要。</a:t>
             </a:r>
             <a:endParaRPr lang="en-US" sz="1200" dirty="0"/>
           </a:p>
@@ -4285,7 +4327,7 @@
                   <a:srgbClr val="FFFFFF"/>
                 </a:solidFill>
               </a:rPr>
-              <a:t>5. **个体化治疗方案的开发**  </a:t>
+              <a:t>5. **新型治療組合的探索**  </a:t>
             </a:r>
             <a:endParaRPr lang="en-US" sz="1200" dirty="0"/>
           </a:p>
@@ -4302,7 +4344,7 @@
                   <a:srgbClr val="FFFFFF"/>
                 </a:solidFill>
               </a:rPr>
-              <a:t>   Developing personalized treatment approaches based on molecular profiling and immune landscape of HCC could improve therapeutic outcomes.  </a:t>
+              <a:t>   Research should continue to explore novel combinations of immunotherapy with locoregional treatments such as TACE and thermal ablation to maximize therapeutic benefits.  </a:t>
             </a:r>
             <a:endParaRPr lang="en-US" sz="1200" dirty="0"/>
           </a:p>
@@ -4319,7 +4361,7 @@
                   <a:srgbClr val="FFFFFF"/>
                 </a:solidFill>
               </a:rPr>
-              <a:t>   基於HCC的分子特徵和免疫環境開發個性化治療方案可能改善治療結果。</a:t>
+              <a:t>   研究應持續探索免疫療法與局部治療（如TACE和熱消融）的新型組合，以最大化治療效益。</a:t>
             </a:r>
             <a:endParaRPr lang="en-US" sz="1200" dirty="0"/>
           </a:p>
@@ -4592,7 +4634,7 @@
                 <a:ea typeface="Arial" pitchFamily="34" charset="-122"/>
                 <a:cs typeface="Arial" pitchFamily="34" charset="-120"/>
               </a:rPr>
-              <a:t>Clonal diversity underpins distinct modes of recurrence in hepatocellular carcin…</a:t>
+              <a:t>Addition of ipilimumab to atezolizumab plus bevacizumab in advanced hepatocellul…</a:t>
             </a:r>
             <a:endParaRPr lang="en-US" sz="1400" dirty="0"/>
           </a:p>
@@ -4629,7 +4671,7 @@
                 <a:ea typeface="Arial" pitchFamily="34" charset="-122"/>
                 <a:cs typeface="Arial" pitchFamily="34" charset="-120"/>
               </a:rPr>
-              <a:t>Conversion surgery as a missing outcome in first-line immunotherapy trials for h…</a:t>
+              <a:t>Transarterial Chemoembolization Plus Thermal Ablation in Unresectable Hepatocell…</a:t>
             </a:r>
             <a:endParaRPr lang="en-US" sz="1400" dirty="0"/>
           </a:p>
@@ -4666,7 +4708,7 @@
                 <a:ea typeface="Arial" pitchFamily="34" charset="-122"/>
                 <a:cs typeface="Arial" pitchFamily="34" charset="-120"/>
               </a:rPr>
-              <a:t>Nivolumab in combination with lenvatinib in unresectable hepatocellular carcinom…</a:t>
+              <a:t>Distinct molecular pathways regulated by activated AKT and YAP signaling during …</a:t>
             </a:r>
             <a:endParaRPr lang="en-US" sz="1400" dirty="0"/>
           </a:p>
@@ -4703,7 +4745,7 @@
                 <a:ea typeface="Arial" pitchFamily="34" charset="-122"/>
                 <a:cs typeface="Arial" pitchFamily="34" charset="-120"/>
               </a:rPr>
-              <a:t>Decoding neoantigen-encoding tumor-specific transcripts unveils a shared target …</a:t>
+              <a:t>Distinct gut microbiota but common metabolomic signatures between viral and MASL…</a:t>
             </a:r>
             <a:endParaRPr lang="en-US" sz="1400" dirty="0"/>
           </a:p>
@@ -4740,7 +4782,7 @@
                 <a:ea typeface="Arial" pitchFamily="34" charset="-122"/>
                 <a:cs typeface="Arial" pitchFamily="34" charset="-120"/>
               </a:rPr>
-              <a:t>Bevacizumab plus iparomlimab/tuvonralimab with hepatic artery infusion chemother…</a:t>
+              <a:t>Optimal treatment selection for hepatocellular carcinoma in the era of immunothe…</a:t>
             </a:r>
             <a:endParaRPr lang="en-US" sz="1400" dirty="0"/>
           </a:p>
@@ -4777,7 +4819,7 @@
                 <a:ea typeface="Arial" pitchFamily="34" charset="-122"/>
                 <a:cs typeface="Arial" pitchFamily="34" charset="-120"/>
               </a:rPr>
-              <a:t>Pembrolizumab and stereotactic body radiotherapy combined in advanced hepatocell…</a:t>
+              <a:t>Tim-3 facilitates dendritic cell ferroptosis and impairs antitumor immunity in s…</a:t>
             </a:r>
             <a:endParaRPr lang="en-US" sz="1400" dirty="0"/>
           </a:p>
@@ -4814,7 +4856,7 @@
                 <a:ea typeface="Arial" pitchFamily="34" charset="-122"/>
                 <a:cs typeface="Arial" pitchFamily="34" charset="-120"/>
               </a:rPr>
-              <a:t>Image-guided radiofrequency versus microwave ablation for small to medium hepato…</a:t>
+              <a:t>When lipids silence immunity: Dendritic cell death in MASLD-associated HCC.</a:t>
             </a:r>
             <a:endParaRPr lang="en-US" sz="1400" dirty="0"/>
           </a:p>
@@ -4851,7 +4893,7 @@
                 <a:ea typeface="Arial" pitchFamily="34" charset="-122"/>
                 <a:cs typeface="Arial" pitchFamily="34" charset="-120"/>
               </a:rPr>
-              <a:t>Radiotherapy versus local ablation therapy for the treatment of hepatocellular c…</a:t>
+              <a:t>Low-dose bevacizumab plus atezolizumab enhances transarterial chemoembolization …</a:t>
             </a:r>
             <a:endParaRPr lang="en-US" sz="1400" dirty="0"/>
           </a:p>
@@ -4888,7 +4930,7 @@
                 <a:ea typeface="Arial" pitchFamily="34" charset="-122"/>
                 <a:cs typeface="Arial" pitchFamily="34" charset="-120"/>
               </a:rPr>
-              <a:t>Immune Checkpoint Inhibitor–Based Adjuvant Treatment Versus Surveillance in Cura…</a:t>
+              <a:t>External beam radiotherapy versus local ablation therapy for the treatment of he…</a:t>
             </a:r>
             <a:endParaRPr lang="en-US" sz="1400" dirty="0"/>
           </a:p>
@@ -4925,7 +4967,7 @@
                 <a:ea typeface="Arial" pitchFamily="34" charset="-122"/>
                 <a:cs typeface="Arial" pitchFamily="34" charset="-120"/>
               </a:rPr>
-              <a:t>… on interventional therapy and immune checkpoint inhibitors (ICIs) in patients …</a:t>
+              <a:t>Temporal Association Between COVID-19 Vaccination and HBsAg Loss in Chronic Hepa…</a:t>
             </a:r>
             <a:endParaRPr lang="en-US" sz="1400" dirty="0"/>
           </a:p>
@@ -5080,7 +5122,7 @@
                   </a:extLst>
                 </a:hlinkClick>
               </a:rPr>
-              <a:t>Clonal diversity underpins distinct modes of recurrence in hepatocellular carcinoma: the PLANet cohort study.</a:t>
+              <a:t>Addition of ipilimumab to atezolizumab plus bevacizumab in advanced hepatocellular carcinoma (PRODIGE 81-FFCD 2101-TRIPLET HCC): phase 2 results from a randomised, multicentre, open-label, phase 2-3 trial.</a:t>
             </a:r>
             <a:endParaRPr lang="en-US" sz="2400" dirty="0"/>
           </a:p>
@@ -5116,7 +5158,7 @@
                   <a:srgbClr val="888888"/>
                 </a:solidFill>
               </a:rPr>
-              <a:t>Gut  ·  IF 24.5  ·  Prospective Study</a:t>
+              <a:t>The lancet. Gastroenterology &amp; hepatology  ·  IF 35.7  ·  RCT Phase 3</a:t>
             </a:r>
             <a:endParaRPr lang="en-US" sz="1000" dirty="0"/>
           </a:p>
@@ -5159,7 +5201,7 @@
                 <a:ea typeface="Microsoft JhengHei" pitchFamily="34" charset="-122"/>
                 <a:cs typeface="Microsoft JhengHei" pitchFamily="34" charset="-120"/>
               </a:rPr>
-              <a:t>HCC手術後復發率高。</a:t>
+              <a:t>三重療法未改善生存結果。</a:t>
             </a:r>
             <a:endParaRPr lang="en-US" sz="1800" dirty="0"/>
           </a:p>
@@ -5180,7 +5222,7 @@
                 <a:ea typeface="Microsoft JhengHei" pitchFamily="34" charset="-122"/>
                 <a:cs typeface="Microsoft JhengHei" pitchFamily="34" charset="-120"/>
               </a:rPr>
-              <a:t>識別多克隆和單克隆復發。</a:t>
+              <a:t>三重組30%有客觀反應。</a:t>
             </a:r>
             <a:endParaRPr lang="en-US" sz="1800" dirty="0"/>
           </a:p>
@@ -5201,7 +5243,7 @@
                 <a:ea typeface="Microsoft JhengHei" pitchFamily="34" charset="-122"/>
                 <a:cs typeface="Microsoft JhengHei" pitchFamily="34" charset="-120"/>
               </a:rPr>
-              <a:t>多克隆復發與免疫抑制相關。</a:t>
+              <a:t>治療相關不良事件發生率高。</a:t>
             </a:r>
             <a:endParaRPr lang="en-US" sz="1800" dirty="0"/>
           </a:p>
@@ -5222,7 +5264,7 @@
                 <a:ea typeface="Microsoft JhengHei" pitchFamily="34" charset="-122"/>
                 <a:cs typeface="Microsoft JhengHei" pitchFamily="34" charset="-120"/>
               </a:rPr>
-              <a:t>遠端轉移源自侵略性亞克隆。</a:t>
+              <a:t>研究未進入第三階段。</a:t>
             </a:r>
             <a:endParaRPr lang="en-US" sz="1800" dirty="0"/>
           </a:p>
@@ -5243,7 +5285,7 @@
                 <a:ea typeface="Microsoft JhengHei" pitchFamily="34" charset="-122"/>
                 <a:cs typeface="Microsoft JhengHei" pitchFamily="34" charset="-120"/>
               </a:rPr>
-              <a:t>多組學模型準確預測復發。</a:t>
+              <a:t>添加ipilimumab無益處。</a:t>
             </a:r>
             <a:endParaRPr lang="en-US" sz="1800" dirty="0"/>
           </a:p>
@@ -5279,7 +5321,7 @@
                   <a:srgbClr val="888888"/>
                 </a:solidFill>
               </a:rPr>
-              <a:t>Zhang Ying, Sekar Karthik, Phua Cheryl Zi Jin et al.. Gut. 2026-07-21 DOI: 10.1136/gutjnl-2026-338227</a:t>
+              <a:t>Merle Philippe, Blanc Jean-Frederic, Le Malicot Karine et al.. The lancet. Gastroenterology &amp; hepatology. 2026-07-08 DOI: 10.1016/S2468-1253(26)00115-9</a:t>
             </a:r>
             <a:endParaRPr lang="en-US" sz="800" dirty="0"/>
           </a:p>
@@ -5479,7 +5521,7 @@
                   </a:extLst>
                 </a:hlinkClick>
               </a:rPr>
-              <a:t>Conversion surgery as a missing outcome in first-line immunotherapy trials for hepatocellular carcinoma</a:t>
+              <a:t>Transarterial Chemoembolization Plus Thermal Ablation in Unresectable Hepatocellular Carcinoma: The Phase 3 TORCH Randomized Clinical Trial.</a:t>
             </a:r>
             <a:endParaRPr lang="en-US" sz="2400" dirty="0"/>
           </a:p>
@@ -5515,7 +5557,7 @@
                   <a:srgbClr val="888888"/>
                 </a:solidFill>
               </a:rPr>
-              <a:t>Journal of Hepatology  ·  IF 25.7</a:t>
+              <a:t>JAMA oncology  ·  IF 28.4  ·  RCT Phase 3</a:t>
             </a:r>
             <a:endParaRPr lang="en-US" sz="1000" dirty="0"/>
           </a:p>
@@ -5558,7 +5600,7 @@
                 <a:ea typeface="Microsoft JhengHei" pitchFamily="34" charset="-122"/>
                 <a:cs typeface="Microsoft JhengHei" pitchFamily="34" charset="-120"/>
               </a:rPr>
-              <a:t>肝癌治療中的轉化手術</a:t>
+              <a:t>TACE加熱消融提高PFS。</a:t>
             </a:r>
             <a:endParaRPr lang="en-US" sz="1800" dirty="0"/>
           </a:p>
@@ -5579,7 +5621,7 @@
                 <a:ea typeface="Microsoft JhengHei" pitchFamily="34" charset="-122"/>
                 <a:cs typeface="Microsoft JhengHei" pitchFamily="34" charset="-120"/>
               </a:rPr>
-              <a:t>評估免疫治療加ipilimumab</a:t>
+              <a:t>TACE-ablation的中位OS顯著延長。</a:t>
             </a:r>
             <a:endParaRPr lang="en-US" sz="1800" dirty="0"/>
           </a:p>
@@ -5600,49 +5642,7 @@
                 <a:ea typeface="Microsoft JhengHei" pitchFamily="34" charset="-122"/>
                 <a:cs typeface="Microsoft JhengHei" pitchFamily="34" charset="-120"/>
               </a:rPr>
-              <a:t>需要圍手術期免疫支持</a:t>
-            </a:r>
-            <a:endParaRPr lang="en-US" sz="1800" dirty="0"/>
-          </a:p>
-          <a:p>
-            <a:pPr marL="342900" indent="-342900">
-              <a:spcAft>
-                <a:spcPts val="800"/>
-              </a:spcAft>
-              <a:buSzPct val="100000"/>
-              <a:buChar char="•"/>
-            </a:pPr>
-            <a:r>
-              <a:rPr lang="en-US" sz="1800" dirty="0">
-                <a:solidFill>
-                  <a:srgbClr val="333333"/>
-                </a:solidFill>
-                <a:latin typeface="Microsoft JhengHei" pitchFamily="34" charset="0"/>
-                <a:ea typeface="Microsoft JhengHei" pitchFamily="34" charset="-122"/>
-                <a:cs typeface="Microsoft JhengHei" pitchFamily="34" charset="-120"/>
-              </a:rPr>
-              <a:t>可切除HCC患者的潛力</a:t>
-            </a:r>
-            <a:endParaRPr lang="en-US" sz="1800" dirty="0"/>
-          </a:p>
-          <a:p>
-            <a:pPr marL="342900" indent="-342900">
-              <a:spcAft>
-                <a:spcPts val="800"/>
-              </a:spcAft>
-              <a:buSzPct val="100000"/>
-              <a:buChar char="•"/>
-            </a:pPr>
-            <a:r>
-              <a:rPr lang="en-US" sz="1800" dirty="0">
-                <a:solidFill>
-                  <a:srgbClr val="333333"/>
-                </a:solidFill>
-                <a:latin typeface="Microsoft JhengHei" pitchFamily="34" charset="0"/>
-                <a:ea typeface="Microsoft JhengHei" pitchFamily="34" charset="-122"/>
-                <a:cs typeface="Microsoft JhengHei" pitchFamily="34" charset="-120"/>
-              </a:rPr>
-              <a:t>試驗中手術結果的重要性</a:t>
+              <a:t>低至中等腫瘤負擔得益最多。</a:t>
             </a:r>
             <a:endParaRPr lang="en-US" sz="1800" dirty="0"/>
           </a:p>
@@ -5678,7 +5678,7 @@
                   <a:srgbClr val="888888"/>
                 </a:solidFill>
               </a:rPr>
-              <a:t>C Xu, J Sun, Q Liang. Journal of Hepatology. 2026</a:t>
+              <a:t>Lyu Ning, Yi Jun-Zhe, Wu Xin-Tong et al.. JAMA oncology. 2026-08-02 DOI: 10.1001/jamaoncol.2026.2366</a:t>
             </a:r>
             <a:endParaRPr lang="en-US" sz="800" dirty="0"/>
           </a:p>
@@ -5878,7 +5878,7 @@
                   </a:extLst>
                 </a:hlinkClick>
               </a:rPr>
-              <a:t>Nivolumab in combination with lenvatinib in unresectable hepatocellular carcinoma: The IKF-t006/IMMUNIB translational phase-2 study.</a:t>
+              <a:t>Distinct molecular pathways regulated by activated AKT and YAP signaling during intrahepatic cholangiocarcinoma progression.</a:t>
             </a:r>
             <a:endParaRPr lang="en-US" sz="2400" dirty="0"/>
           </a:p>
@@ -5914,7 +5914,7 @@
                   <a:srgbClr val="888888"/>
                 </a:solidFill>
               </a:rPr>
-              <a:t>European journal of cancer (Oxford, England : 1990)  ·  IF 8.4  ·  RCT Phase 2</a:t>
+              <a:t>Journal of hepatology  ·  IF 25.7  ·  Basic Research  ·  🌏 Asia</a:t>
             </a:r>
             <a:endParaRPr lang="en-US" sz="1000" dirty="0"/>
           </a:p>
@@ -5957,7 +5957,7 @@
                 <a:ea typeface="Microsoft JhengHei" pitchFamily="34" charset="-122"/>
                 <a:cs typeface="Microsoft JhengHei" pitchFamily="34" charset="-120"/>
               </a:rPr>
-              <a:t>Nivolumab與lenvatinib治療不可切除HCC</a:t>
+              <a:t>AKT 和 YAP 參與 iCCA 進展。</a:t>
             </a:r>
             <a:endParaRPr lang="en-US" sz="1800" dirty="0"/>
           </a:p>
@@ -5978,7 +5978,7 @@
                 <a:ea typeface="Microsoft JhengHei" pitchFamily="34" charset="-122"/>
                 <a:cs typeface="Microsoft JhengHei" pitchFamily="34" charset="-120"/>
               </a:rPr>
-              <a:t>試驗中客觀反應率為32%</a:t>
+              <a:t>YAP 抑制改變免疫微環境。</a:t>
             </a:r>
             <a:endParaRPr lang="en-US" sz="1800" dirty="0"/>
           </a:p>
@@ -5999,49 +5999,7 @@
                 <a:ea typeface="Microsoft JhengHei" pitchFamily="34" charset="-122"/>
                 <a:cs typeface="Microsoft JhengHei" pitchFamily="34" charset="-120"/>
               </a:rPr>
-              <a:t>中位整體存活達26.6個月</a:t>
-            </a:r>
-            <a:endParaRPr lang="en-US" sz="1800" dirty="0"/>
-          </a:p>
-          <a:p>
-            <a:pPr marL="342900" indent="-342900">
-              <a:spcAft>
-                <a:spcPts val="800"/>
-              </a:spcAft>
-              <a:buSzPct val="100000"/>
-              <a:buChar char="•"/>
-            </a:pPr>
-            <a:r>
-              <a:rPr lang="en-US" sz="1800" dirty="0">
-                <a:solidFill>
-                  <a:srgbClr val="333333"/>
-                </a:solidFill>
-                <a:latin typeface="Microsoft JhengHei" pitchFamily="34" charset="0"/>
-                <a:ea typeface="Microsoft JhengHei" pitchFamily="34" charset="-122"/>
-                <a:cs typeface="Microsoft JhengHei" pitchFamily="34" charset="-120"/>
-              </a:rPr>
-              <a:t>不良事件包括結腸炎與高血壓</a:t>
-            </a:r>
-            <a:endParaRPr lang="en-US" sz="1800" dirty="0"/>
-          </a:p>
-          <a:p>
-            <a:pPr marL="342900" indent="-342900">
-              <a:spcAft>
-                <a:spcPts val="800"/>
-              </a:spcAft>
-              <a:buSzPct val="100000"/>
-              <a:buChar char="•"/>
-            </a:pPr>
-            <a:r>
-              <a:rPr lang="en-US" sz="1800" dirty="0">
-                <a:solidFill>
-                  <a:srgbClr val="333333"/>
-                </a:solidFill>
-                <a:latin typeface="Microsoft JhengHei" pitchFamily="34" charset="0"/>
-                <a:ea typeface="Microsoft JhengHei" pitchFamily="34" charset="-122"/>
-                <a:cs typeface="Microsoft JhengHei" pitchFamily="34" charset="-120"/>
-              </a:rPr>
-              <a:t>FGFR活化與治療效益相關</a:t>
+              <a:t>YAP 抑制與抗 PD-L1 結合增強腫瘤退化。</a:t>
             </a:r>
             <a:endParaRPr lang="en-US" sz="1800" dirty="0"/>
           </a:p>
@@ -6077,7 +6035,7 @@
                   <a:srgbClr val="888888"/>
                 </a:solidFill>
               </a:rPr>
-              <a:t>Vogel Arndt, Ben Khaled Najib, Ramirez Javier Ruiz et al.. European journal of cancer (Oxford, England : 1990). 2026-07-08 DOI: 10.1016/j.ejca.2026.116847</a:t>
+              <a:t>Zhao Jinqiu, Yang Lian, Qin Yujia et al.. Journal of hepatology. 2026-07-16 DOI: 10.1016/j.jhep.2026.02.025</a:t>
             </a:r>
             <a:endParaRPr lang="en-US" sz="800" dirty="0"/>
           </a:p>
@@ -6277,7 +6235,7 @@
                   </a:extLst>
                 </a:hlinkClick>
               </a:rPr>
-              <a:t>Decoding neoantigen-encoding tumor-specific transcripts unveils a shared target reservoir for immunotherapy in hepatocellular carcinoma.</a:t>
+              <a:t>Distinct gut microbiota but common metabolomic signatures between viral and MASLD HCC contribute to outcomes of combination immunotherapy.</a:t>
             </a:r>
             <a:endParaRPr lang="en-US" sz="2400" dirty="0"/>
           </a:p>
@@ -6313,7 +6271,7 @@
                   <a:srgbClr val="888888"/>
                 </a:solidFill>
               </a:rPr>
-              <a:t>Journal for immunotherapy of cancer  ·  IF 10.9  ·  Basic Research</a:t>
+              <a:t>Hepatology (Baltimore, Md.)  ·  IF 12.9  ·  Prospective Study  ·  🌏 Asia</a:t>
             </a:r>
             <a:endParaRPr lang="en-US" sz="1000" dirty="0"/>
           </a:p>
@@ -6356,7 +6314,7 @@
                 <a:ea typeface="Microsoft JhengHei" pitchFamily="34" charset="-122"/>
                 <a:cs typeface="Microsoft JhengHei" pitchFamily="34" charset="-120"/>
               </a:rPr>
-              <a:t>發現NeoTSTs作為豐富靶點</a:t>
+              <a:t>MASLD-HCC與V-HCC的微生物群不同。</a:t>
             </a:r>
             <a:endParaRPr lang="en-US" sz="1800" dirty="0"/>
           </a:p>
@@ -6377,7 +6335,7 @@
                 <a:ea typeface="Microsoft JhengHei" pitchFamily="34" charset="-122"/>
                 <a:cs typeface="Microsoft JhengHei" pitchFamily="34" charset="-120"/>
               </a:rPr>
-              <a:t>頻率高於突變衍生neoantigens</a:t>
+              <a:t>共同代謝特徵：糞便醋酸。</a:t>
             </a:r>
             <a:endParaRPr lang="en-US" sz="1800" dirty="0"/>
           </a:p>
@@ -6398,7 +6356,7 @@
                 <a:ea typeface="Microsoft JhengHei" pitchFamily="34" charset="-122"/>
                 <a:cs typeface="Microsoft JhengHei" pitchFamily="34" charset="-120"/>
               </a:rPr>
-              <a:t>通過蛋白質組學和模型驗證</a:t>
+              <a:t>醋酸水平高者生存更佳。</a:t>
             </a:r>
             <a:endParaRPr lang="en-US" sz="1800" dirty="0"/>
           </a:p>
@@ -6419,7 +6377,7 @@
                 <a:ea typeface="Microsoft JhengHei" pitchFamily="34" charset="-122"/>
                 <a:cs typeface="Microsoft JhengHei" pitchFamily="34" charset="-120"/>
               </a:rPr>
-              <a:t>機制包括保留內含子和激活</a:t>
+              <a:t>持久反應者顯示SCFAs增強。</a:t>
             </a:r>
             <a:endParaRPr lang="en-US" sz="1800" dirty="0"/>
           </a:p>
@@ -6440,7 +6398,7 @@
                 <a:ea typeface="Microsoft JhengHei" pitchFamily="34" charset="-122"/>
                 <a:cs typeface="Microsoft JhengHei" pitchFamily="34" charset="-120"/>
               </a:rPr>
-              <a:t>NeoTSTs增強免疫療法療效</a:t>
+              <a:t>糞便醋酸作為潛在生物標記。</a:t>
             </a:r>
             <a:endParaRPr lang="en-US" sz="1800" dirty="0"/>
           </a:p>
@@ -6476,7 +6434,7 @@
                   <a:srgbClr val="888888"/>
                 </a:solidFill>
               </a:rPr>
-              <a:t>Lin Peng, Wen Yifan, Zhao Jingjing et al.. Journal for immunotherapy of cancer. 2026-07-21 DOI: 10.1136/jitc-2026-015428</a:t>
+              <a:t>Lee Pei-Chang, Wu Chi-Jung, Hung Ya-Wen et al.. Hepatology (Baltimore, Md.). 2026-07-17 DOI: 10.1097/HEP.0000000000001446</a:t>
             </a:r>
             <a:endParaRPr lang="en-US" sz="800" dirty="0"/>
           </a:p>
@@ -6676,7 +6634,7 @@
                   </a:extLst>
                 </a:hlinkClick>
               </a:rPr>
-              <a:t>Bevacizumab plus iparomlimab/tuvonralimab with hepatic artery infusion chemotherapy followed by stereotactic body radiotherapy in patients with BCLC stage C hepatocellular carcinoma with thrombus and/or extrahepatic oligometastases (BITS-TO-HCC): study protocol of a prospective, single-center, single-arm, phase II study.</a:t>
+              <a:t>Optimal treatment selection for hepatocellular carcinoma in the era of immunotherapy.</a:t>
             </a:r>
             <a:endParaRPr lang="en-US" sz="2400" dirty="0"/>
           </a:p>
@@ -6712,7 +6670,7 @@
                   <a:srgbClr val="888888"/>
                 </a:solidFill>
               </a:rPr>
-              <a:t>Therapeutic advances in medical oncology  ·  RCT Phase 2</a:t>
+              <a:t>Journal of gastroenterology  ·  RCT Phase 3  ·  🌏 Asia</a:t>
             </a:r>
             <a:endParaRPr lang="en-US" sz="1000" dirty="0"/>
           </a:p>
@@ -6755,7 +6713,7 @@
                 <a:ea typeface="Microsoft JhengHei" pitchFamily="34" charset="-122"/>
                 <a:cs typeface="Microsoft JhengHei" pitchFamily="34" charset="-120"/>
               </a:rPr>
-              <a:t>針對晚期HCC患者的組合療法</a:t>
+              <a:t>免疫治療改變HCC管理策略。</a:t>
             </a:r>
             <a:endParaRPr lang="en-US" sz="1800" dirty="0"/>
           </a:p>
@@ -6776,7 +6734,7 @@
                 <a:ea typeface="Microsoft JhengHei" pitchFamily="34" charset="-122"/>
                 <a:cs typeface="Microsoft JhengHei" pitchFamily="34" charset="-120"/>
               </a:rPr>
-              <a:t>HAIC與免疫療法的序列策略</a:t>
+              <a:t>早期HCC復發率仍然高。</a:t>
             </a:r>
             <a:endParaRPr lang="en-US" sz="1800" dirty="0"/>
           </a:p>
@@ -6797,7 +6755,7 @@
                 <a:ea typeface="Microsoft JhengHei" pitchFamily="34" charset="-122"/>
                 <a:cs typeface="Microsoft JhengHei" pitchFamily="34" charset="-120"/>
               </a:rPr>
-              <a:t>主要終點：無進展生存期</a:t>
+              <a:t>AI模型有效預測術後復發。</a:t>
             </a:r>
             <a:endParaRPr lang="en-US" sz="1800" dirty="0"/>
           </a:p>
@@ -6818,7 +6776,7 @@
                 <a:ea typeface="Microsoft JhengHei" pitchFamily="34" charset="-122"/>
                 <a:cs typeface="Microsoft JhengHei" pitchFamily="34" charset="-120"/>
               </a:rPr>
-              <a:t>次要終點包括整體生存期</a:t>
+              <a:t>TACE結合TKI改善治療結果。</a:t>
             </a:r>
             <a:endParaRPr lang="en-US" sz="1800" dirty="0"/>
           </a:p>
@@ -6839,7 +6797,7 @@
                 <a:ea typeface="Microsoft JhengHei" pitchFamily="34" charset="-122"/>
                 <a:cs typeface="Microsoft JhengHei" pitchFamily="34" charset="-120"/>
               </a:rPr>
-              <a:t>研究已在ClinicalTrials.gov登記</a:t>
+              <a:t>新興生物標記可能優化免疫治療。</a:t>
             </a:r>
             <a:endParaRPr lang="en-US" sz="1800" dirty="0"/>
           </a:p>
@@ -6875,7 +6833,7 @@
                   <a:srgbClr val="888888"/>
                 </a:solidFill>
               </a:rPr>
-              <a:t>Liu Yuxin, Wang Haohua, Zhu Kunli et al.. Therapeutic advances in medical oncology. 2026-07-26 DOI: 10.1177/17588359261470693</a:t>
+              <a:t>Chi Chen-Ta, Huang Yi-Hsiang. Journal of gastroenterology. 2026-07-27 DOI: 10.1007/s00535-026-02411-7</a:t>
             </a:r>
             <a:endParaRPr lang="en-US" sz="800" dirty="0"/>
           </a:p>
@@ -7075,7 +7033,7 @@
                   </a:extLst>
                 </a:hlinkClick>
               </a:rPr>
-              <a:t>Pembrolizumab and stereotactic body radiotherapy combined in advanced hepatocellular carcinoma post sorafenib–A phase II trial (PEMRAD)</a:t>
+              <a:t>Tim-3 facilitates dendritic cell ferroptosis and impairs antitumor immunity in steatohepatitis-related HCC.</a:t>
             </a:r>
             <a:endParaRPr lang="en-US" sz="2400" dirty="0"/>
           </a:p>
@@ -7111,7 +7069,7 @@
                   <a:srgbClr val="888888"/>
                 </a:solidFill>
               </a:rPr>
-              <a:t>JHEP …  ·  RCT Phase 2</a:t>
+              <a:t>Journal of hepatology  ·  IF 25.7  ·  Basic Research</a:t>
             </a:r>
             <a:endParaRPr lang="en-US" sz="1000" dirty="0"/>
           </a:p>
@@ -7154,7 +7112,7 @@
                 <a:ea typeface="Microsoft JhengHei" pitchFamily="34" charset="-122"/>
                 <a:cs typeface="Microsoft JhengHei" pitchFamily="34" charset="-120"/>
               </a:rPr>
-              <a:t>PEMRAD 二期試驗啟動。</a:t>
+              <a:t>Tim-3調控樹突細胞鐵死亡。</a:t>
             </a:r>
             <a:endParaRPr lang="en-US" sz="1800" dirty="0"/>
           </a:p>
@@ -7175,7 +7133,7 @@
                 <a:ea typeface="Microsoft JhengHei" pitchFamily="34" charset="-122"/>
                 <a:cs typeface="Microsoft JhengHei" pitchFamily="34" charset="-120"/>
               </a:rPr>
-              <a:t>結合 pembrolizumab 與放療。</a:t>
+              <a:t>高脂飲食引發免疫抑制。</a:t>
             </a:r>
             <a:endParaRPr lang="en-US" sz="1800" dirty="0"/>
           </a:p>
@@ -7196,7 +7154,7 @@
                 <a:ea typeface="Microsoft JhengHei" pitchFamily="34" charset="-122"/>
                 <a:cs typeface="Microsoft JhengHei" pitchFamily="34" charset="-120"/>
               </a:rPr>
-              <a:t>針對晚期肝細胞癌。</a:t>
+              <a:t>Tim-3阻斷增強抗腫瘤免疫。</a:t>
             </a:r>
             <a:endParaRPr lang="en-US" sz="1800" dirty="0"/>
           </a:p>
@@ -7217,7 +7175,7 @@
                 <a:ea typeface="Microsoft JhengHei" pitchFamily="34" charset="-122"/>
                 <a:cs typeface="Microsoft JhengHei" pitchFamily="34" charset="-120"/>
               </a:rPr>
-              <a:t>在 sorafenib 治療後進行。</a:t>
+              <a:t>樹突細胞耗竭與預後不良相關。</a:t>
             </a:r>
             <a:endParaRPr lang="en-US" sz="1800" dirty="0"/>
           </a:p>
@@ -7238,7 +7196,7 @@
                 <a:ea typeface="Microsoft JhengHei" pitchFamily="34" charset="-122"/>
                 <a:cs typeface="Microsoft JhengHei" pitchFamily="34" charset="-120"/>
               </a:rPr>
-              <a:t>評估安全性與療效。</a:t>
+              <a:t>聯合療法改善腫瘤控制。</a:t>
             </a:r>
             <a:endParaRPr lang="en-US" sz="1800" dirty="0"/>
           </a:p>
@@ -7274,7 +7232,7 @@
                   <a:srgbClr val="888888"/>
                 </a:solidFill>
               </a:rPr>
-              <a:t>GM O'Kane, A Mesci, RW Jang. JHEP …. 2026</a:t>
+              <a:t>Li Na, Song Xiaojia, Peng Xueqi et al.. Journal of hepatology. 2026-07-16 DOI: 10.1016/j.jhep.2026.04.010</a:t>
             </a:r>
             <a:endParaRPr lang="en-US" sz="800" dirty="0"/>
           </a:p>
@@ -7474,7 +7432,7 @@
                   </a:extLst>
                 </a:hlinkClick>
               </a:rPr>
-              <a:t>Image-guided radiofrequency versus microwave ablation for small to medium hepatocellular carcinoma: a meta-analysis</a:t>
+              <a:t>When lipids silence immunity: Dendritic cell death in MASLD-associated HCC.</a:t>
             </a:r>
             <a:endParaRPr lang="en-US" sz="2400" dirty="0"/>
           </a:p>
@@ -7510,7 +7468,7 @@
                   <a:srgbClr val="888888"/>
                 </a:solidFill>
               </a:rPr>
-              <a:t>Frontiers in Oncology  ·  Meta-Analysis</a:t>
+              <a:t>Journal of hepatology  ·  IF 25.7</a:t>
             </a:r>
             <a:endParaRPr lang="en-US" sz="1000" dirty="0"/>
           </a:p>
@@ -7553,7 +7511,7 @@
                 <a:ea typeface="Microsoft JhengHei" pitchFamily="34" charset="-122"/>
                 <a:cs typeface="Microsoft JhengHei" pitchFamily="34" charset="-120"/>
               </a:rPr>
-              <a:t>專注於小至中型HCC患者</a:t>
+              <a:t>研究聚焦於MASLD與HCC。</a:t>
             </a:r>
             <a:endParaRPr lang="en-US" sz="1800" dirty="0"/>
           </a:p>
@@ -7574,7 +7532,7 @@
                 <a:ea typeface="Microsoft JhengHei" pitchFamily="34" charset="-122"/>
                 <a:cs typeface="Microsoft JhengHei" pitchFamily="34" charset="-120"/>
               </a:rPr>
-              <a:t>比較射頻與微波消融</a:t>
+              <a:t>樹突細胞死亡與脂質相關。</a:t>
             </a:r>
             <a:endParaRPr lang="en-US" sz="1800" dirty="0"/>
           </a:p>
@@ -7595,7 +7553,7 @@
                 <a:ea typeface="Microsoft JhengHei" pitchFamily="34" charset="-122"/>
                 <a:cs typeface="Microsoft JhengHei" pitchFamily="34" charset="-120"/>
               </a:rPr>
-              <a:t>納入隨機對照試驗</a:t>
+              <a:t>HCC中觀察到免疫抑制。</a:t>
             </a:r>
             <a:endParaRPr lang="en-US" sz="1800" dirty="0"/>
           </a:p>
@@ -7616,7 +7574,7 @@
                 <a:ea typeface="Microsoft JhengHei" pitchFamily="34" charset="-122"/>
                 <a:cs typeface="Microsoft JhengHei" pitchFamily="34" charset="-120"/>
               </a:rPr>
-              <a:t>評估治療效果與安全性</a:t>
+              <a:t>潛在治療靶點被識別。</a:t>
             </a:r>
             <a:endParaRPr lang="en-US" sz="1800" dirty="0"/>
           </a:p>
@@ -7637,7 +7595,7 @@
                 <a:ea typeface="Microsoft JhengHei" pitchFamily="34" charset="-122"/>
                 <a:cs typeface="Microsoft JhengHei" pitchFamily="34" charset="-120"/>
               </a:rPr>
-              <a:t>綜合分析提供深入見解</a:t>
+              <a:t>需進一步研究脂質影響。</a:t>
             </a:r>
             <a:endParaRPr lang="en-US" sz="1800" dirty="0"/>
           </a:p>
@@ -7673,7 +7631,7 @@
                   <a:srgbClr val="888888"/>
                 </a:solidFill>
               </a:rPr>
-              <a:t>Y Fu, L Wang, T Hu. Frontiers in Oncology. 2026</a:t>
+              <a:t>Kocheise Lorenz, Schneider Kai Markus. Journal of hepatology. 2026-07-15 DOI: 10.1016/j.jhep.2026.06.008</a:t>
             </a:r>
             <a:endParaRPr lang="en-US" sz="800" dirty="0"/>
           </a:p>

--- a/docs/digest-zh.pptx
+++ b/docs/digest-zh.pptx
@@ -2269,7 +2269,7 @@
                   <a:srgbClr val="888888"/>
                 </a:solidFill>
               </a:rPr>
-              <a:t>2026-07-27 — 2026-08-03</a:t>
+              <a:t>2026-08-03 — 2026-08-10</a:t>
             </a:r>
             <a:endParaRPr lang="en-US" sz="1400" dirty="0"/>
           </a:p>
@@ -2460,7 +2460,7 @@
                   </a:extLst>
                 </a:hlinkClick>
               </a:rPr>
-              <a:t>Low-dose bevacizumab plus atezolizumab enhances transarterial chemoembolization in HCC via correcting vascular-immune niche dysfunction.</a:t>
+              <a:t>Radiotherapy versus local ablation therapy for the treatment of hepatocellular carcinoma: A systematic review and meta-analysis.</a:t>
             </a:r>
             <a:endParaRPr lang="en-US" sz="2400" dirty="0"/>
           </a:p>
@@ -2496,7 +2496,7 @@
                   <a:srgbClr val="888888"/>
                 </a:solidFill>
               </a:rPr>
-              <a:t>Journal of hepatology  ·  IF 25.7  ·  Retrospective Study</a:t>
+              <a:t>Journal of Clinical …  ·  Meta-Analysis</a:t>
             </a:r>
             <a:endParaRPr lang="en-US" sz="1000" dirty="0"/>
           </a:p>
@@ -2539,7 +2539,7 @@
                 <a:ea typeface="Microsoft JhengHei" pitchFamily="34" charset="-122"/>
                 <a:cs typeface="Microsoft JhengHei" pitchFamily="34" charset="-120"/>
               </a:rPr>
-              <a:t>TACE後HCC腫瘤特徵不明確。</a:t>
+              <a:t>放射治療與局部消融比較</a:t>
             </a:r>
             <a:endParaRPr lang="en-US" sz="1800" dirty="0"/>
           </a:p>
@@ -2560,7 +2560,7 @@
                 <a:ea typeface="Microsoft JhengHei" pitchFamily="34" charset="-122"/>
                 <a:cs typeface="Microsoft JhengHei" pitchFamily="34" charset="-120"/>
               </a:rPr>
-              <a:t>PDGFC+ TAM促進免疫抑制環境。</a:t>
+              <a:t>針對肝細胞癌（HCC）治療</a:t>
             </a:r>
             <a:endParaRPr lang="en-US" sz="1800" dirty="0"/>
           </a:p>
@@ -2581,7 +2581,49 @@
                 <a:ea typeface="Microsoft JhengHei" pitchFamily="34" charset="-122"/>
                 <a:cs typeface="Microsoft JhengHei" pitchFamily="34" charset="-120"/>
               </a:rPr>
-              <a:t>低劑量bevacizumab加atezolizumab改善療效。</a:t>
+              <a:t>評估局部無進展生存期</a:t>
+            </a:r>
+            <a:endParaRPr lang="en-US" sz="1800" dirty="0"/>
+          </a:p>
+          <a:p>
+            <a:pPr marL="342900" indent="-342900">
+              <a:spcAft>
+                <a:spcPts val="800"/>
+              </a:spcAft>
+              <a:buSzPct val="100000"/>
+              <a:buChar char="•"/>
+            </a:pPr>
+            <a:r>
+              <a:rPr lang="en-US" sz="1800" dirty="0">
+                <a:solidFill>
+                  <a:srgbClr val="333333"/>
+                </a:solidFill>
+                <a:latin typeface="Microsoft JhengHei" pitchFamily="34" charset="0"/>
+                <a:ea typeface="Microsoft JhengHei" pitchFamily="34" charset="-122"/>
+                <a:cs typeface="Microsoft JhengHei" pitchFamily="34" charset="-120"/>
+              </a:rPr>
+              <a:t>包括射頻與微波消融</a:t>
+            </a:r>
+            <a:endParaRPr lang="en-US" sz="1800" dirty="0"/>
+          </a:p>
+          <a:p>
+            <a:pPr marL="342900" indent="-342900">
+              <a:spcAft>
+                <a:spcPts val="800"/>
+              </a:spcAft>
+              <a:buSzPct val="100000"/>
+              <a:buChar char="•"/>
+            </a:pPr>
+            <a:r>
+              <a:rPr lang="en-US" sz="1800" dirty="0">
+                <a:solidFill>
+                  <a:srgbClr val="333333"/>
+                </a:solidFill>
+                <a:latin typeface="Microsoft JhengHei" pitchFamily="34" charset="0"/>
+                <a:ea typeface="Microsoft JhengHei" pitchFamily="34" charset="-122"/>
+                <a:cs typeface="Microsoft JhengHei" pitchFamily="34" charset="-120"/>
+              </a:rPr>
+              <a:t>進行系統性回顧與統合分析</a:t>
             </a:r>
             <a:endParaRPr lang="en-US" sz="1800" dirty="0"/>
           </a:p>
@@ -2617,7 +2659,7 @@
                   <a:srgbClr val="888888"/>
                 </a:solidFill>
               </a:rPr>
-              <a:t>Zhao Chenghao, Yan Huzheng, Liang Zhixing et al.. Journal of hepatology. 2026-07-31 DOI: 10.1016/j.jhep.2026.07.028</a:t>
+              <a:t>SH Bae, SH Choi, SM Yoon. Journal of Clinical …. 2026</a:t>
             </a:r>
             <a:endParaRPr lang="en-US" sz="800" dirty="0"/>
           </a:p>
@@ -2817,7 +2859,7 @@
                   </a:extLst>
                 </a:hlinkClick>
               </a:rPr>
-              <a:t>External beam radiotherapy versus local ablation therapy for the treatment of hepatocellular carcinoma: a systematic review and meta-analysis.</a:t>
+              <a:t>… on interventional therapy and immune checkpoint inhibitors (ICIs) in patients with intermediate-and advanced-stage hepatocellular carcinoma: a systematic review …</a:t>
             </a:r>
             <a:endParaRPr lang="en-US" sz="2400" dirty="0"/>
           </a:p>
@@ -2853,7 +2895,7 @@
                   <a:srgbClr val="888888"/>
                 </a:solidFill>
               </a:rPr>
-              <a:t>Clinical and molecular hepatology  ·  Meta-Analysis  ·  🌏 Asia</a:t>
+              <a:t>… , Immunotherapy  ·  Systematic Review</a:t>
             </a:r>
             <a:endParaRPr lang="en-US" sz="1000" dirty="0"/>
           </a:p>
@@ -2896,7 +2938,7 @@
                 <a:ea typeface="Microsoft JhengHei" pitchFamily="34" charset="-122"/>
                 <a:cs typeface="Microsoft JhengHei" pitchFamily="34" charset="-120"/>
               </a:rPr>
-              <a:t>EBRT局部復發率較低。</a:t>
+              <a:t>聯合療法顯示改善效果。</a:t>
             </a:r>
             <a:endParaRPr lang="en-US" sz="1800" dirty="0"/>
           </a:p>
@@ -2917,7 +2959,7 @@
                 <a:ea typeface="Microsoft JhengHei" pitchFamily="34" charset="-122"/>
                 <a:cs typeface="Microsoft JhengHei" pitchFamily="34" charset="-120"/>
               </a:rPr>
-              <a:t>EBRT局部無進展生存改善。</a:t>
+              <a:t>ICIs增強HCC免疫反應。</a:t>
             </a:r>
             <a:endParaRPr lang="en-US" sz="1800" dirty="0"/>
           </a:p>
@@ -2938,49 +2980,7 @@
                 <a:ea typeface="Microsoft JhengHei" pitchFamily="34" charset="-122"/>
                 <a:cs typeface="Microsoft JhengHei" pitchFamily="34" charset="-120"/>
               </a:rPr>
-              <a:t>EBRT與LAT整體生存率相似。</a:t>
-            </a:r>
-            <a:endParaRPr lang="en-US" sz="1800" dirty="0"/>
-          </a:p>
-          <a:p>
-            <a:pPr marL="342900" indent="-342900">
-              <a:spcAft>
-                <a:spcPts val="800"/>
-              </a:spcAft>
-              <a:buSzPct val="100000"/>
-              <a:buChar char="•"/>
-            </a:pPr>
-            <a:r>
-              <a:rPr lang="en-US" sz="1800" dirty="0">
-                <a:solidFill>
-                  <a:srgbClr val="333333"/>
-                </a:solidFill>
-                <a:latin typeface="Microsoft JhengHei" pitchFamily="34" charset="0"/>
-                <a:ea typeface="Microsoft JhengHei" pitchFamily="34" charset="-122"/>
-                <a:cs typeface="Microsoft JhengHei" pitchFamily="34" charset="-120"/>
-              </a:rPr>
-              <a:t>兩種治療嚴重毒性相當。</a:t>
-            </a:r>
-            <a:endParaRPr lang="en-US" sz="1800" dirty="0"/>
-          </a:p>
-          <a:p>
-            <a:pPr marL="342900" indent="-342900">
-              <a:spcAft>
-                <a:spcPts val="800"/>
-              </a:spcAft>
-              <a:buSzPct val="100000"/>
-              <a:buChar char="•"/>
-            </a:pPr>
-            <a:r>
-              <a:rPr lang="en-US" sz="1800" dirty="0">
-                <a:solidFill>
-                  <a:srgbClr val="333333"/>
-                </a:solidFill>
-                <a:latin typeface="Microsoft JhengHei" pitchFamily="34" charset="0"/>
-                <a:ea typeface="Microsoft JhengHei" pitchFamily="34" charset="-122"/>
-                <a:cs typeface="Microsoft JhengHei" pitchFamily="34" charset="-120"/>
-              </a:rPr>
-              <a:t>EBRT是HCC安全替代療法。</a:t>
+              <a:t>介入療法選擇包括消融。</a:t>
             </a:r>
             <a:endParaRPr lang="en-US" sz="1800" dirty="0"/>
           </a:p>
@@ -3016,7 +3016,7 @@
                   <a:srgbClr val="888888"/>
                 </a:solidFill>
               </a:rPr>
-              <a:t>Bae Sun Hyun, Choi Seo Hee, Yoon Sang Min et al.. Clinical and molecular hepatology. 2026-07-30 DOI: 10.3350/cmh.2026.0535</a:t>
+              <a:t>J Su, Y Su, R Mai. … , Immunotherapy. 2026</a:t>
             </a:r>
             <a:endParaRPr lang="en-US" sz="800" dirty="0"/>
           </a:p>
@@ -3216,7 +3216,7 @@
                   </a:extLst>
                 </a:hlinkClick>
               </a:rPr>
-              <a:t>Temporal Association Between COVID-19 Vaccination and HBsAg Loss in Chronic Hepatitis B Infection: An Interrupted Time Series Analysis.</a:t>
+              <a:t>Immune Checkpoint Inhibitors in Hepatocellular Carcinoma Before and After Liver Transplantation: A Systematic Review</a:t>
             </a:r>
             <a:endParaRPr lang="en-US" sz="2400" dirty="0"/>
           </a:p>
@@ -3252,7 +3252,7 @@
                   <a:srgbClr val="888888"/>
                 </a:solidFill>
               </a:rPr>
-              <a:t>Alimentary pharmacology &amp; therapeutics  ·  IF 6.6  ·  🌏 Asia</a:t>
+              <a:t>Cancers  ·  Systematic Review</a:t>
             </a:r>
             <a:endParaRPr lang="en-US" sz="1000" dirty="0"/>
           </a:p>
@@ -3295,7 +3295,7 @@
                 <a:ea typeface="Microsoft JhengHei" pitchFamily="34" charset="-122"/>
                 <a:cs typeface="Microsoft JhengHei" pitchFamily="34" charset="-120"/>
               </a:rPr>
-              <a:t>研究CHB患者的HBsAg損失</a:t>
+              <a:t>肝癌免疫檢查點抑制劑回顧</a:t>
             </a:r>
             <a:endParaRPr lang="en-US" sz="1800" dirty="0"/>
           </a:p>
@@ -3316,7 +3316,7 @@
                 <a:ea typeface="Microsoft JhengHei" pitchFamily="34" charset="-122"/>
                 <a:cs typeface="Microsoft JhengHei" pitchFamily="34" charset="-120"/>
               </a:rPr>
-              <a:t>COVID-19疫苗與HBsAg損失相關</a:t>
+              <a:t>關注肝移植前後的療效</a:t>
             </a:r>
             <a:endParaRPr lang="en-US" sz="1800" dirty="0"/>
           </a:p>
@@ -3337,7 +3337,7 @@
                 <a:ea typeface="Microsoft JhengHei" pitchFamily="34" charset="-122"/>
                 <a:cs typeface="Microsoft JhengHei" pitchFamily="34" charset="-120"/>
               </a:rPr>
-              <a:t>2022年發生率達1.27</a:t>
+              <a:t>涵蓋PD-1、PD-L1和CTLA-4療法</a:t>
             </a:r>
             <a:endParaRPr lang="en-US" sz="1800" dirty="0"/>
           </a:p>
@@ -3358,7 +3358,7 @@
                 <a:ea typeface="Microsoft JhengHei" pitchFamily="34" charset="-122"/>
                 <a:cs typeface="Microsoft JhengHei" pitchFamily="34" charset="-120"/>
               </a:rPr>
-              <a:t>HCC發生率無顯著變化</a:t>
+              <a:t>評估療效與安全性結果</a:t>
             </a:r>
             <a:endParaRPr lang="en-US" sz="1800" dirty="0"/>
           </a:p>
@@ -3379,7 +3379,7 @@
                 <a:ea typeface="Microsoft JhengHei" pitchFamily="34" charset="-122"/>
                 <a:cs typeface="Microsoft JhengHei" pitchFamily="34" charset="-120"/>
               </a:rPr>
-              <a:t>對HBV動態的免疫調節效應</a:t>
+              <a:t>強調改善患者生存的潛力</a:t>
             </a:r>
             <a:endParaRPr lang="en-US" sz="1800" dirty="0"/>
           </a:p>
@@ -3415,7 +3415,7 @@
                   <a:srgbClr val="888888"/>
                 </a:solidFill>
               </a:rPr>
-              <a:t>Choi Jonggi, Carroll Allison, Nguyen Vy H et al.. Alimentary pharmacology &amp; therapeutics. 2026-07-29 DOI: 10.1111/apt.70733</a:t>
+              <a:t>F Dituri, L Carrieri, M Mosaico. Cancers. 2026</a:t>
             </a:r>
             <a:endParaRPr lang="en-US" sz="800" dirty="0"/>
           </a:p>
@@ -3632,7 +3632,7 @@
                   <a:srgbClr val="FFFFFF"/>
                 </a:solidFill>
               </a:rPr>
-              <a:t>1. **免疫療法的潛力**  </a:t>
+              <a:t>1. **生物標記物的必要性 (Necessity of Biomarkers)**  </a:t>
             </a:r>
             <a:endParaRPr lang="en-US" sz="1200" dirty="0"/>
           </a:p>
@@ -3649,7 +3649,7 @@
                   <a:srgbClr val="FFFFFF"/>
                 </a:solidFill>
               </a:rPr>
-              <a:t>   The combination of ipilimumab with atezolizumab and bevacizumab shows promising results in improving outcomes for patients with advanced hepatocellular carcinoma (HCC), highlighting the potential of multi-targeted immunotherapy.  </a:t>
+              <a:t>   免疫檢查點抑制劑（ICI）在肝細胞癌（HCC）中的應用顯示，僅約30%的患者對治療有反應，強調了基於生物標記物的患者選擇的重要性。  </a:t>
             </a:r>
             <a:endParaRPr lang="en-US" sz="1200" dirty="0"/>
           </a:p>
@@ -3666,7 +3666,7 @@
                   <a:srgbClr val="FFFFFF"/>
                 </a:solidFill>
               </a:rPr>
-              <a:t>   以ipilimumab結合atezolizumab和bevacizumab的療法顯示出改善晚期肝細胞癌（HCC）患者預後的潛力，突顯了多靶向免疫療法的可能性。</a:t>
+              <a:t>   The application of immune checkpoint inhibitors (ICIs) in hepatocellular carcinoma (HCC) reveals that only about 30% of patients respond to treatment, highlighting the importance of biomarker-driven patient selection.</a:t>
             </a:r>
             <a:endParaRPr lang="en-US" sz="1200" dirty="0"/>
           </a:p>
@@ -3692,7 +3692,7 @@
                   <a:srgbClr val="FFFFFF"/>
                 </a:solidFill>
               </a:rPr>
-              <a:t>2. **TACE與熱消融的結合**  </a:t>
+              <a:t>2. **代謝重編程的影響 (Impact of Metabolic Reprogramming)**  </a:t>
             </a:r>
             <a:endParaRPr lang="en-US" sz="1200" dirty="0"/>
           </a:p>
@@ -3709,7 +3709,7 @@
                   <a:srgbClr val="FFFFFF"/>
                 </a:solidFill>
               </a:rPr>
-              <a:t>   The TORCH trial indicates that combining transarterial chemoembolization (TACE) with thermal ablation may enhance survival outcomes for patients with unresectable HCC, suggesting a need for integrated treatment approaches.  </a:t>
+              <a:t>   代謝功能障礙相關的肝炎（MASH-HCC）對免疫檢查點抑制劑的反應較差，這可能與腫瘤細胞的代謝重編程及腫瘤微環境的異常有關。  </a:t>
             </a:r>
             <a:endParaRPr lang="en-US" sz="1200" dirty="0"/>
           </a:p>
@@ -3726,7 +3726,7 @@
                   <a:srgbClr val="FFFFFF"/>
                 </a:solidFill>
               </a:rPr>
-              <a:t>   TORCH試驗顯示，將經動脈化療栓塞（TACE）與熱消融相結合可能改善不可切除HCC患者的生存結果，表明需要綜合治療方法。</a:t>
+              <a:t>   Metabolic dysfunction-associated steatohepatitis-related hepatocellular carcinoma (MASH-HCC) shows poor response to immune checkpoint inhibitors, potentially linked to metabolic reprogramming of tumor cells and abnormal tumor microenvironment.</a:t>
             </a:r>
             <a:endParaRPr lang="en-US" sz="1200" dirty="0"/>
           </a:p>
@@ -3752,7 +3752,7 @@
                   <a:srgbClr val="FFFFFF"/>
                 </a:solidFill>
               </a:rPr>
-              <a:t>3. **腸道微生物與免疫反應的關聯**  </a:t>
+              <a:t>3. **免疫微環境的時空動態 (Spatiotemporal Dynamics of Immune Microenvironment)**  </a:t>
             </a:r>
             <a:endParaRPr lang="en-US" sz="1200" dirty="0"/>
           </a:p>
@@ -3769,7 +3769,7 @@
                   <a:srgbClr val="FFFFFF"/>
                 </a:solidFill>
               </a:rPr>
-              <a:t>   Distinct gut microbiota profiles between viral and metabolic dysfunction-associated steatotic liver disease-related HCC suggest that microbiota modulation could be a novel strategy to enhance immunotherapy efficacy.  </a:t>
+              <a:t>   Atezolizumab與Bevacizumab的聯合療法在HCC中的免疫重塑過程尚未完全了解，這對治療效果的預測至關重要。  </a:t>
             </a:r>
             <a:endParaRPr lang="en-US" sz="1200" dirty="0"/>
           </a:p>
@@ -3786,7 +3786,7 @@
                   <a:srgbClr val="FFFFFF"/>
                 </a:solidFill>
               </a:rPr>
-              <a:t>   病毒性與代謝功能障礙相關脂肪肝病（MASLD）HCC之間的腸道微生物群特徵差異表明，調節微生物群可能是一種增強免疫療法療效的新策略。</a:t>
+              <a:t>   The spatiotemporal immune remodeling associated with the combination therapy of Atezolizumab and Bevacizumab in HCC remains poorly understood, which is crucial for predicting treatment outcomes.</a:t>
             </a:r>
             <a:endParaRPr lang="en-US" sz="1200" dirty="0"/>
           </a:p>
@@ -3812,7 +3812,7 @@
                   <a:srgbClr val="FFFFFF"/>
                 </a:solidFill>
               </a:rPr>
-              <a:t>4. **代謝環境對免疫的影響**  </a:t>
+              <a:t>4. **局部消融與免疫治療的結合 (Combination of Local Ablation and Immunotherapy)**  </a:t>
             </a:r>
             <a:endParaRPr lang="en-US" sz="1200" dirty="0"/>
           </a:p>
@@ -3829,7 +3829,7 @@
                   <a:srgbClr val="FFFFFF"/>
                 </a:solidFill>
               </a:rPr>
-              <a:t>   The lipid-rich microenvironment in MASLD-HCC contributes to immune suppression, emphasizing the need to understand metabolic factors in developing effective immunotherapy strategies.  </a:t>
+              <a:t>   局部消融技術如不可逆電穿孔（IRE）顯示出與免疫治療結合的潛力，能夠減輕免疫抑制並降低肝癌的再生長。  </a:t>
             </a:r>
             <a:endParaRPr lang="en-US" sz="1200" dirty="0"/>
           </a:p>
@@ -3846,7 +3846,7 @@
                   <a:srgbClr val="FFFFFF"/>
                 </a:solidFill>
               </a:rPr>
-              <a:t>   MASLD-HCC中的富脂微環境促進免疫抑制，強調在開發有效免疫療法策略時需要理解代謝因素。</a:t>
+              <a:t>   Local ablation techniques such as irreversible electroporation (IRE) demonstrate potential when combined with immunotherapy, alleviating immunosuppression and reducing hepatocellular carcinoma regrowth.</a:t>
             </a:r>
             <a:endParaRPr lang="en-US" sz="1200" dirty="0"/>
           </a:p>
@@ -3872,7 +3872,7 @@
                   <a:srgbClr val="FFFFFF"/>
                 </a:solidFill>
               </a:rPr>
-              <a:t>5. **個體化治療的重要性**  </a:t>
+              <a:t>5. **不同組合療法的效果 (Effects of Different Combination Therapies)**  </a:t>
             </a:r>
             <a:endParaRPr lang="en-US" sz="1200" dirty="0"/>
           </a:p>
@@ -3889,7 +3889,7 @@
                   <a:srgbClr val="FFFFFF"/>
                 </a:solidFill>
               </a:rPr>
-              <a:t>   The necessity for personalized treatment strategies in HCC management is underscored, as recurrence rates remain high despite advancements in immunotherapy and antiviral treatments.</a:t>
+              <a:t>   將免疫檢查點抑制劑與介入療法結合的策略顯示出潛在的療效，但仍需進一步研究以確定最佳的治療組合。</a:t>
             </a:r>
             <a:endParaRPr lang="en-US" sz="1200" dirty="0"/>
           </a:p>
@@ -4035,7 +4035,7 @@
                   <a:srgbClr val="FFFFFF"/>
                 </a:solidFill>
               </a:rPr>
-              <a:t>儘管免疫療法和抗病毒治療有所進展，但HCC管理中對個體化治療策略的必要性仍然突出，因為復發率仍然很高。</a:t>
+              <a:t>Strategies combining immune checkpoint inhibitors with interventional therapies show potential efficacy, but further research is needed to determine the optimal treatment combinations.</a:t>
             </a:r>
             <a:endParaRPr lang="en-US" sz="1200" dirty="0"/>
           </a:p>
@@ -4087,7 +4087,7 @@
                   <a:srgbClr val="FFFFFF"/>
                 </a:solidFill>
               </a:rPr>
-              <a:t>1. **多重免疫療法的長期效果**  </a:t>
+              <a:t>1. **生物標記物的開發 (Development of Biomarkers)**  </a:t>
             </a:r>
             <a:endParaRPr lang="en-US" sz="1200" dirty="0"/>
           </a:p>
@@ -4104,7 +4104,7 @@
                   <a:srgbClr val="FFFFFF"/>
                 </a:solidFill>
               </a:rPr>
-              <a:t>   Future studies should focus on the long-term efficacy and safety of multi-agent immunotherapy combinations in HCC, particularly in diverse patient populations.  </a:t>
+              <a:t>   需要進一步開發和驗證能夠預測HCC患者對免疫檢查點抑制劑反應的生物標記物，以實現個性化治療。  </a:t>
             </a:r>
             <a:endParaRPr lang="en-US" sz="1200" dirty="0"/>
           </a:p>
@@ -4121,7 +4121,7 @@
                   <a:srgbClr val="FFFFFF"/>
                 </a:solidFill>
               </a:rPr>
-              <a:t>   未來的研究應集中於多藥免疫療法組合在HCC中的長期療效和安全性，特別是在不同患者群體中。</a:t>
+              <a:t>   Further development and validation of biomarkers that can predict HCC patient responses to immune checkpoint inhibitors are needed for personalized treatment.</a:t>
             </a:r>
             <a:endParaRPr lang="en-US" sz="1200" dirty="0"/>
           </a:p>
@@ -4147,7 +4147,7 @@
                   <a:srgbClr val="FFFFFF"/>
                 </a:solidFill>
               </a:rPr>
-              <a:t>2. **微生物群與免疫療法的交互作用**  </a:t>
+              <a:t>2. **代謝機制的深入研究 (In-depth Study of Metabolic Mechanisms)**  </a:t>
             </a:r>
             <a:endParaRPr lang="en-US" sz="1200" dirty="0"/>
           </a:p>
@@ -4164,7 +4164,7 @@
                   <a:srgbClr val="FFFFFF"/>
                 </a:solidFill>
               </a:rPr>
-              <a:t>   Investigating the role of gut microbiota in modulating responses to immunotherapy could provide insights into optimizing treatment protocols for HCC patients.  </a:t>
+              <a:t>   研究MASH-HCC的代謝機制及其對免疫治療的影響，以探索新的治療策略。  </a:t>
             </a:r>
             <a:endParaRPr lang="en-US" sz="1200" dirty="0"/>
           </a:p>
@@ -4181,7 +4181,7 @@
                   <a:srgbClr val="FFFFFF"/>
                 </a:solidFill>
               </a:rPr>
-              <a:t>   研究腸道微生物群在調節免疫療法反應中的作用可能為優化HCC患者的治療方案提供見解。</a:t>
+              <a:t>   Investigating the metabolic mechanisms of MASH-HCC and their impact on immunotherapy could uncover new therapeutic strategies.</a:t>
             </a:r>
             <a:endParaRPr lang="en-US" sz="1200" dirty="0"/>
           </a:p>
@@ -4207,7 +4207,7 @@
                   <a:srgbClr val="FFFFFF"/>
                 </a:solidFill>
               </a:rPr>
-              <a:t>3. **代謝因素的機制研究**  </a:t>
+              <a:t>3. **腫瘤微環境的動態觀察 (Dynamic Observation of Tumor Microenvironment)**  </a:t>
             </a:r>
             <a:endParaRPr lang="en-US" sz="1200" dirty="0"/>
           </a:p>
@@ -4224,7 +4224,7 @@
                   <a:srgbClr val="FFFFFF"/>
                 </a:solidFill>
               </a:rPr>
-              <a:t>   Further exploration of the metabolic pathways involved in MASLD-HCC and their impact on immune responses could lead to novel therapeutic targets.  </a:t>
+              <a:t>   進行長期的腫瘤微環境動態觀察，以更好地理解免疫重塑對治療結果的影響。  </a:t>
             </a:r>
             <a:endParaRPr lang="en-US" sz="1200" dirty="0"/>
           </a:p>
@@ -4241,7 +4241,7 @@
                   <a:srgbClr val="FFFFFF"/>
                 </a:solidFill>
               </a:rPr>
-              <a:t>   進一步探索MASLD-HCC中涉及的代謝途徑及其對免疫反應的影響可能會導致新的治療靶點。</a:t>
+              <a:t>   Conducting long-term dynamic observations of the tumor microenvironment to better understand the impact of immune remodeling on treatment outcomes.</a:t>
             </a:r>
             <a:endParaRPr lang="en-US" sz="1200" dirty="0"/>
           </a:p>
@@ -4267,7 +4267,7 @@
                   <a:srgbClr val="FFFFFF"/>
                 </a:solidFill>
               </a:rPr>
-              <a:t>4. **個體化治療的臨床應用**  </a:t>
+              <a:t>4. **新型局部消融技術的評估 (Evaluation of Novel Local Ablation Techniques)**  </a:t>
             </a:r>
             <a:endParaRPr lang="en-US" sz="1200" dirty="0"/>
           </a:p>
@@ -4284,7 +4284,7 @@
                   <a:srgbClr val="FFFFFF"/>
                 </a:solidFill>
               </a:rPr>
-              <a:t>   Developing and validating personalized treatment algorithms based on genetic, metabolic, and microbiomic profiles will be crucial for improving HCC management.  </a:t>
+              <a:t>   評估新型局部消融技術與免疫治療結合的效果，以提高HCC的治療效果。  </a:t>
             </a:r>
             <a:endParaRPr lang="en-US" sz="1200" dirty="0"/>
           </a:p>
@@ -4301,7 +4301,7 @@
                   <a:srgbClr val="FFFFFF"/>
                 </a:solidFill>
               </a:rPr>
-              <a:t>   基於基因、代謝和微生物組特徵開發和驗證個體化治療算法對改善HCC管理至關重要。</a:t>
+              <a:t>   Evaluating the efficacy of novel local ablation techniques in combination with immunotherapy to enhance treatment outcomes for HCC.</a:t>
             </a:r>
             <a:endParaRPr lang="en-US" sz="1200" dirty="0"/>
           </a:p>
@@ -4327,7 +4327,7 @@
                   <a:srgbClr val="FFFFFF"/>
                 </a:solidFill>
               </a:rPr>
-              <a:t>5. **新型治療組合的探索**  </a:t>
+              <a:t>5. **臨床試驗的設計 (Design of Clinical Trials)**  </a:t>
             </a:r>
             <a:endParaRPr lang="en-US" sz="1200" dirty="0"/>
           </a:p>
@@ -4344,7 +4344,7 @@
                   <a:srgbClr val="FFFFFF"/>
                 </a:solidFill>
               </a:rPr>
-              <a:t>   Research should continue to explore novel combinations of immunotherapy with locoregional treatments such as TACE and thermal ablation to maximize therapeutic benefits.  </a:t>
+              <a:t>   設計針對不同組合療法的臨床試驗，以確定最佳的治療方案和患者選擇策略。  </a:t>
             </a:r>
             <a:endParaRPr lang="en-US" sz="1200" dirty="0"/>
           </a:p>
@@ -4361,7 +4361,7 @@
                   <a:srgbClr val="FFFFFF"/>
                 </a:solidFill>
               </a:rPr>
-              <a:t>   研究應持續探索免疫療法與局部治療（如TACE和熱消融）的新型組合，以最大化治療效益。</a:t>
+              <a:t>   Designing clinical trials targeting various combination therapies to determine the best treatment regimens and patient selection strategies.</a:t>
             </a:r>
             <a:endParaRPr lang="en-US" sz="1200" dirty="0"/>
           </a:p>
@@ -4634,7 +4634,7 @@
                 <a:ea typeface="Arial" pitchFamily="34" charset="-122"/>
                 <a:cs typeface="Arial" pitchFamily="34" charset="-120"/>
               </a:rPr>
-              <a:t>Addition of ipilimumab to atezolizumab plus bevacizumab in advanced hepatocellul…</a:t>
+              <a:t>Circulating extracellular vesicles carrying PD-1, PD-L1 and CTLA-4 inform resist…</a:t>
             </a:r>
             <a:endParaRPr lang="en-US" sz="1400" dirty="0"/>
           </a:p>
@@ -4671,7 +4671,7 @@
                 <a:ea typeface="Arial" pitchFamily="34" charset="-122"/>
                 <a:cs typeface="Arial" pitchFamily="34" charset="-120"/>
               </a:rPr>
-              <a:t>Transarterial Chemoembolization Plus Thermal Ablation in Unresectable Hepatocell…</a:t>
+              <a:t>PCK1 deficiency promotes MASH-HCC progression by 12-HETE-induced CD8+ T cell dys…</a:t>
             </a:r>
             <a:endParaRPr lang="en-US" sz="1400" dirty="0"/>
           </a:p>
@@ -4708,7 +4708,7 @@
                 <a:ea typeface="Arial" pitchFamily="34" charset="-122"/>
                 <a:cs typeface="Arial" pitchFamily="34" charset="-120"/>
               </a:rPr>
-              <a:t>Distinct molecular pathways regulated by activated AKT and YAP signaling during …</a:t>
+              <a:t>Spatiotemporal dynamics of the tumor microenvironment in hepatocellular carcinom…</a:t>
             </a:r>
             <a:endParaRPr lang="en-US" sz="1400" dirty="0"/>
           </a:p>
@@ -4745,7 +4745,7 @@
                 <a:ea typeface="Arial" pitchFamily="34" charset="-122"/>
                 <a:cs typeface="Arial" pitchFamily="34" charset="-120"/>
               </a:rPr>
-              <a:t>Distinct gut microbiota but common metabolomic signatures between viral and MASL…</a:t>
+              <a:t>… plus transarterial chemoembolization and PD-1 inhibitors as conversion therapi…</a:t>
             </a:r>
             <a:endParaRPr lang="en-US" sz="1400" dirty="0"/>
           </a:p>
@@ -4782,7 +4782,7 @@
                 <a:ea typeface="Arial" pitchFamily="34" charset="-122"/>
                 <a:cs typeface="Arial" pitchFamily="34" charset="-120"/>
               </a:rPr>
-              <a:t>Optimal treatment selection for hepatocellular carcinoma in the era of immunothe…</a:t>
+              <a:t>… (PD-1 inhibitor) plus lenvatinib as conversion therapy followed by sequential …</a:t>
             </a:r>
             <a:endParaRPr lang="en-US" sz="1400" dirty="0"/>
           </a:p>
@@ -4819,7 +4819,7 @@
                 <a:ea typeface="Arial" pitchFamily="34" charset="-122"/>
                 <a:cs typeface="Arial" pitchFamily="34" charset="-120"/>
               </a:rPr>
-              <a:t>Tim-3 facilitates dendritic cell ferroptosis and impairs antitumor immunity in s…</a:t>
+              <a:t>Aggressive Histologic Subtypes Drive Poor Outcomes after Percutaneous Ablation f…</a:t>
             </a:r>
             <a:endParaRPr lang="en-US" sz="1400" dirty="0"/>
           </a:p>
@@ -4856,7 +4856,7 @@
                 <a:ea typeface="Arial" pitchFamily="34" charset="-122"/>
                 <a:cs typeface="Arial" pitchFamily="34" charset="-120"/>
               </a:rPr>
-              <a:t>When lipids silence immunity: Dendritic cell death in MASLD-associated HCC.</a:t>
+              <a:t>Combined anti-PD-1 with irreversible electroporation relieves immunosuppression …</a:t>
             </a:r>
             <a:endParaRPr lang="en-US" sz="1400" dirty="0"/>
           </a:p>
@@ -4893,7 +4893,7 @@
                 <a:ea typeface="Arial" pitchFamily="34" charset="-122"/>
                 <a:cs typeface="Arial" pitchFamily="34" charset="-120"/>
               </a:rPr>
-              <a:t>Low-dose bevacizumab plus atezolizumab enhances transarterial chemoembolization …</a:t>
+              <a:t>Radiotherapy versus local ablation therapy for the treatment of hepatocellular c…</a:t>
             </a:r>
             <a:endParaRPr lang="en-US" sz="1400" dirty="0"/>
           </a:p>
@@ -4930,7 +4930,7 @@
                 <a:ea typeface="Arial" pitchFamily="34" charset="-122"/>
                 <a:cs typeface="Arial" pitchFamily="34" charset="-120"/>
               </a:rPr>
-              <a:t>External beam radiotherapy versus local ablation therapy for the treatment of he…</a:t>
+              <a:t>… on interventional therapy and immune checkpoint inhibitors (ICIs) in patients …</a:t>
             </a:r>
             <a:endParaRPr lang="en-US" sz="1400" dirty="0"/>
           </a:p>
@@ -4967,7 +4967,7 @@
                 <a:ea typeface="Arial" pitchFamily="34" charset="-122"/>
                 <a:cs typeface="Arial" pitchFamily="34" charset="-120"/>
               </a:rPr>
-              <a:t>Temporal Association Between COVID-19 Vaccination and HBsAg Loss in Chronic Hepa…</a:t>
+              <a:t>Immune Checkpoint Inhibitors in Hepatocellular Carcinoma Before and After Liver …</a:t>
             </a:r>
             <a:endParaRPr lang="en-US" sz="1400" dirty="0"/>
           </a:p>
@@ -5122,7 +5122,7 @@
                   </a:extLst>
                 </a:hlinkClick>
               </a:rPr>
-              <a:t>Addition of ipilimumab to atezolizumab plus bevacizumab in advanced hepatocellular carcinoma (PRODIGE 81-FFCD 2101-TRIPLET HCC): phase 2 results from a randomised, multicentre, open-label, phase 2-3 trial.</a:t>
+              <a:t>Circulating extracellular vesicles carrying PD-1, PD-L1 and CTLA-4 inform resistance to anti-PD-L1-based therapy in HCC.</a:t>
             </a:r>
             <a:endParaRPr lang="en-US" sz="2400" dirty="0"/>
           </a:p>
@@ -5158,7 +5158,7 @@
                   <a:srgbClr val="888888"/>
                 </a:solidFill>
               </a:rPr>
-              <a:t>The lancet. Gastroenterology &amp; hepatology  ·  IF 35.7  ·  RCT Phase 3</a:t>
+              <a:t>Gut  ·  IF 24.5</a:t>
             </a:r>
             <a:endParaRPr lang="en-US" sz="1000" dirty="0"/>
           </a:p>
@@ -5201,7 +5201,7 @@
                 <a:ea typeface="Microsoft JhengHei" pitchFamily="34" charset="-122"/>
                 <a:cs typeface="Microsoft JhengHei" pitchFamily="34" charset="-120"/>
               </a:rPr>
-              <a:t>三重療法未改善生存結果。</a:t>
+              <a:t>循環EV攜帶PD-1、PD-L1、CTLA-4。</a:t>
             </a:r>
             <a:endParaRPr lang="en-US" sz="1800" dirty="0"/>
           </a:p>
@@ -5222,7 +5222,7 @@
                 <a:ea typeface="Microsoft JhengHei" pitchFamily="34" charset="-122"/>
                 <a:cs typeface="Microsoft JhengHei" pitchFamily="34" charset="-120"/>
               </a:rPr>
-              <a:t>三重組30%有客觀反應。</a:t>
+              <a:t>基線EV-IC水平預測治療反應。</a:t>
             </a:r>
             <a:endParaRPr lang="en-US" sz="1800" dirty="0"/>
           </a:p>
@@ -5243,7 +5243,7 @@
                 <a:ea typeface="Microsoft JhengHei" pitchFamily="34" charset="-122"/>
                 <a:cs typeface="Microsoft JhengHei" pitchFamily="34" charset="-120"/>
               </a:rPr>
-              <a:t>治療相關不良事件發生率高。</a:t>
+              <a:t>動態EV-IC變化顯示獲得性耐藥。</a:t>
             </a:r>
             <a:endParaRPr lang="en-US" sz="1800" dirty="0"/>
           </a:p>
@@ -5264,7 +5264,7 @@
                 <a:ea typeface="Microsoft JhengHei" pitchFamily="34" charset="-122"/>
                 <a:cs typeface="Microsoft JhengHei" pitchFamily="34" charset="-120"/>
               </a:rPr>
-              <a:t>研究未進入第三階段。</a:t>
+              <a:t>液體活檢提供非侵入性生物標記潛力。</a:t>
             </a:r>
             <a:endParaRPr lang="en-US" sz="1800" dirty="0"/>
           </a:p>
@@ -5285,7 +5285,7 @@
                 <a:ea typeface="Microsoft JhengHei" pitchFamily="34" charset="-122"/>
                 <a:cs typeface="Microsoft JhengHei" pitchFamily="34" charset="-120"/>
               </a:rPr>
-              <a:t>添加ipilimumab無益處。</a:t>
+              <a:t>在TKI治療組中無法重現結果。</a:t>
             </a:r>
             <a:endParaRPr lang="en-US" sz="1800" dirty="0"/>
           </a:p>
@@ -5321,7 +5321,7 @@
                   <a:srgbClr val="888888"/>
                 </a:solidFill>
               </a:rPr>
-              <a:t>Merle Philippe, Blanc Jean-Frederic, Le Malicot Karine et al.. The lancet. Gastroenterology &amp; hepatology. 2026-07-08 DOI: 10.1016/S2468-1253(26)00115-9</a:t>
+              <a:t>Gorgulho Jo&amp;#xe3;o, Masood Ramsha, Buescher Gustav et al.. Gut. 2026-08-06 DOI: 10.1136/gutjnl-2025-337617</a:t>
             </a:r>
             <a:endParaRPr lang="en-US" sz="800" dirty="0"/>
           </a:p>
@@ -5521,7 +5521,7 @@
                   </a:extLst>
                 </a:hlinkClick>
               </a:rPr>
-              <a:t>Transarterial Chemoembolization Plus Thermal Ablation in Unresectable Hepatocellular Carcinoma: The Phase 3 TORCH Randomized Clinical Trial.</a:t>
+              <a:t>PCK1 deficiency promotes MASH-HCC progression by 12-HETE-induced CD8+ T cell dysfunction.</a:t>
             </a:r>
             <a:endParaRPr lang="en-US" sz="2400" dirty="0"/>
           </a:p>
@@ -5557,7 +5557,7 @@
                   <a:srgbClr val="888888"/>
                 </a:solidFill>
               </a:rPr>
-              <a:t>JAMA oncology  ·  IF 28.4  ·  RCT Phase 3</a:t>
+              <a:t>Gut  ·  IF 24.5</a:t>
             </a:r>
             <a:endParaRPr lang="en-US" sz="1000" dirty="0"/>
           </a:p>
@@ -5600,7 +5600,7 @@
                 <a:ea typeface="Microsoft JhengHei" pitchFamily="34" charset="-122"/>
                 <a:cs typeface="Microsoft JhengHei" pitchFamily="34" charset="-120"/>
               </a:rPr>
-              <a:t>TACE加熱消融提高PFS。</a:t>
+              <a:t>PCK1缺失與MASH-HCC進展相關。</a:t>
             </a:r>
             <a:endParaRPr lang="en-US" sz="1800" dirty="0"/>
           </a:p>
@@ -5621,7 +5621,7 @@
                 <a:ea typeface="Microsoft JhengHei" pitchFamily="34" charset="-122"/>
                 <a:cs typeface="Microsoft JhengHei" pitchFamily="34" charset="-120"/>
               </a:rPr>
-              <a:t>TACE-ablation的中位OS顯著延長。</a:t>
+              <a:t>12-HETE引起CD8+ T細胞功能障礙。</a:t>
             </a:r>
             <a:endParaRPr lang="en-US" sz="1800" dirty="0"/>
           </a:p>
@@ -5642,7 +5642,7 @@
                 <a:ea typeface="Microsoft JhengHei" pitchFamily="34" charset="-122"/>
                 <a:cs typeface="Microsoft JhengHei" pitchFamily="34" charset="-120"/>
               </a:rPr>
-              <a:t>低至中等腫瘤負擔得益最多。</a:t>
+              <a:t>PCK1恢復增強抗PD-1療效。</a:t>
             </a:r>
             <a:endParaRPr lang="en-US" sz="1800" dirty="0"/>
           </a:p>
@@ -5678,7 +5678,7 @@
                   <a:srgbClr val="888888"/>
                 </a:solidFill>
               </a:rPr>
-              <a:t>Lyu Ning, Yi Jun-Zhe, Wu Xin-Tong et al.. JAMA oncology. 2026-08-02 DOI: 10.1001/jamaoncol.2026.2366</a:t>
+              <a:t>Wu Kang, Li Luo, Liu Yi et al.. Gut. 2026-08-06 DOI: 10.1136/gutjnl-2024-334562</a:t>
             </a:r>
             <a:endParaRPr lang="en-US" sz="800" dirty="0"/>
           </a:p>
@@ -5878,7 +5878,7 @@
                   </a:extLst>
                 </a:hlinkClick>
               </a:rPr>
-              <a:t>Distinct molecular pathways regulated by activated AKT and YAP signaling during intrahepatic cholangiocarcinoma progression.</a:t>
+              <a:t>Spatiotemporal dynamics of the tumor microenvironment in hepatocellular carcinoma during combination immunotherapy.</a:t>
             </a:r>
             <a:endParaRPr lang="en-US" sz="2400" dirty="0"/>
           </a:p>
@@ -5914,7 +5914,7 @@
                   <a:srgbClr val="888888"/>
                 </a:solidFill>
               </a:rPr>
-              <a:t>Journal of hepatology  ·  IF 25.7  ·  Basic Research  ·  🌏 Asia</a:t>
+              <a:t>Hepatology communications  ·  IF 5.6  ·  🌏 Asia</a:t>
             </a:r>
             <a:endParaRPr lang="en-US" sz="1000" dirty="0"/>
           </a:p>
@@ -5957,7 +5957,7 @@
                 <a:ea typeface="Microsoft JhengHei" pitchFamily="34" charset="-122"/>
                 <a:cs typeface="Microsoft JhengHei" pitchFamily="34" charset="-120"/>
               </a:rPr>
-              <a:t>AKT 和 YAP 參與 iCCA 進展。</a:t>
+              <a:t>ATZ/BEV療法腫瘤回歸有限。</a:t>
             </a:r>
             <a:endParaRPr lang="en-US" sz="1800" dirty="0"/>
           </a:p>
@@ -5978,7 +5978,7 @@
                 <a:ea typeface="Microsoft JhengHei" pitchFamily="34" charset="-122"/>
                 <a:cs typeface="Microsoft JhengHei" pitchFamily="34" charset="-120"/>
               </a:rPr>
-              <a:t>YAP 抑制改變免疫微環境。</a:t>
+              <a:t>單細胞RNA測序揭示免疫重塑。</a:t>
             </a:r>
             <a:endParaRPr lang="en-US" sz="1800" dirty="0"/>
           </a:p>
@@ -5999,7 +5999,49 @@
                 <a:ea typeface="Microsoft JhengHei" pitchFamily="34" charset="-122"/>
                 <a:cs typeface="Microsoft JhengHei" pitchFamily="34" charset="-120"/>
               </a:rPr>
-              <a:t>YAP 抑制與抗 PD-L1 結合增強腫瘤退化。</a:t>
+              <a:t>CD8+ T細胞增加伴隨耗竭標誌。</a:t>
+            </a:r>
+            <a:endParaRPr lang="en-US" sz="1800" dirty="0"/>
+          </a:p>
+          <a:p>
+            <a:pPr marL="342900" indent="-342900">
+              <a:spcAft>
+                <a:spcPts val="800"/>
+              </a:spcAft>
+              <a:buSzPct val="100000"/>
+              <a:buChar char="•"/>
+            </a:pPr>
+            <a:r>
+              <a:rPr lang="en-US" sz="1800" dirty="0">
+                <a:solidFill>
+                  <a:srgbClr val="333333"/>
+                </a:solidFill>
+                <a:latin typeface="Microsoft JhengHei" pitchFamily="34" charset="0"/>
+                <a:ea typeface="Microsoft JhengHei" pitchFamily="34" charset="-122"/>
+                <a:cs typeface="Microsoft JhengHei" pitchFamily="34" charset="-120"/>
+              </a:rPr>
+              <a:t>TIGIT-PVR/NECTIN2軸在治療後激活。</a:t>
+            </a:r>
+            <a:endParaRPr lang="en-US" sz="1800" dirty="0"/>
+          </a:p>
+          <a:p>
+            <a:pPr marL="342900" indent="-342900">
+              <a:spcAft>
+                <a:spcPts val="800"/>
+              </a:spcAft>
+              <a:buSzPct val="100000"/>
+              <a:buChar char="•"/>
+            </a:pPr>
+            <a:r>
+              <a:rPr lang="en-US" sz="1800" dirty="0">
+                <a:solidFill>
+                  <a:srgbClr val="333333"/>
+                </a:solidFill>
+                <a:latin typeface="Microsoft JhengHei" pitchFamily="34" charset="0"/>
+                <a:ea typeface="Microsoft JhengHei" pitchFamily="34" charset="-122"/>
+                <a:cs typeface="Microsoft JhengHei" pitchFamily="34" charset="-120"/>
+              </a:rPr>
+              <a:t>腫瘤邊緣免疫活性更強。</a:t>
             </a:r>
             <a:endParaRPr lang="en-US" sz="1800" dirty="0"/>
           </a:p>
@@ -6035,7 +6077,7 @@
                   <a:srgbClr val="888888"/>
                 </a:solidFill>
               </a:rPr>
-              <a:t>Zhao Jinqiu, Yang Lian, Qin Yujia et al.. Journal of hepatology. 2026-07-16 DOI: 10.1016/j.jhep.2026.02.025</a:t>
+              <a:t>Iwasaki Hitoshi, Itoh Shinji, Toshida Katsuya et al.. Hepatology communications. 2026-08-07 DOI: 10.1097/HC9.0000000000001014</a:t>
             </a:r>
             <a:endParaRPr lang="en-US" sz="800" dirty="0"/>
           </a:p>
@@ -6235,7 +6277,7 @@
                   </a:extLst>
                 </a:hlinkClick>
               </a:rPr>
-              <a:t>Distinct gut microbiota but common metabolomic signatures between viral and MASLD HCC contribute to outcomes of combination immunotherapy.</a:t>
+              <a:t>… plus transarterial chemoembolization and PD-1 inhibitors as conversion therapies for unresectable intermediate-advanced hepatocellular carcinoma: a phase 2 trial …</a:t>
             </a:r>
             <a:endParaRPr lang="en-US" sz="2400" dirty="0"/>
           </a:p>
@@ -6271,7 +6313,7 @@
                   <a:srgbClr val="888888"/>
                 </a:solidFill>
               </a:rPr>
-              <a:t>Hepatology (Baltimore, Md.)  ·  IF 12.9  ·  Prospective Study  ·  🌏 Asia</a:t>
+              <a:t>… and Targeted Therapy  ·  RCT Phase 2</a:t>
             </a:r>
             <a:endParaRPr lang="en-US" sz="1000" dirty="0"/>
           </a:p>
@@ -6314,7 +6356,7 @@
                 <a:ea typeface="Microsoft JhengHei" pitchFamily="34" charset="-122"/>
                 <a:cs typeface="Microsoft JhengHei" pitchFamily="34" charset="-120"/>
               </a:rPr>
-              <a:t>MASLD-HCC與V-HCC的微生物群不同。</a:t>
+              <a:t>評估uHCC的組合療法</a:t>
             </a:r>
             <a:endParaRPr lang="en-US" sz="1800" dirty="0"/>
           </a:p>
@@ -6335,7 +6377,7 @@
                 <a:ea typeface="Microsoft JhengHei" pitchFamily="34" charset="-122"/>
                 <a:cs typeface="Microsoft JhengHei" pitchFamily="34" charset="-120"/>
               </a:rPr>
-              <a:t>共同代謝特徵：糞便醋酸。</a:t>
+              <a:t>使用肝動脈化療栓塞(TACE)</a:t>
             </a:r>
             <a:endParaRPr lang="en-US" sz="1800" dirty="0"/>
           </a:p>
@@ -6356,7 +6398,7 @@
                 <a:ea typeface="Microsoft JhengHei" pitchFamily="34" charset="-122"/>
                 <a:cs typeface="Microsoft JhengHei" pitchFamily="34" charset="-120"/>
               </a:rPr>
-              <a:t>醋酸水平高者生存更佳。</a:t>
+              <a:t>增加PD-1抑制劑的效果</a:t>
             </a:r>
             <a:endParaRPr lang="en-US" sz="1800" dirty="0"/>
           </a:p>
@@ -6377,7 +6419,7 @@
                 <a:ea typeface="Microsoft JhengHei" pitchFamily="34" charset="-122"/>
                 <a:cs typeface="Microsoft JhengHei" pitchFamily="34" charset="-120"/>
               </a:rPr>
-              <a:t>持久反應者顯示SCFAs增強。</a:t>
+              <a:t>呈現第二期臨床試驗結果</a:t>
             </a:r>
             <a:endParaRPr lang="en-US" sz="1800" dirty="0"/>
           </a:p>
@@ -6398,7 +6440,7 @@
                 <a:ea typeface="Microsoft JhengHei" pitchFamily="34" charset="-122"/>
                 <a:cs typeface="Microsoft JhengHei" pitchFamily="34" charset="-120"/>
               </a:rPr>
-              <a:t>糞便醋酸作為潛在生物標記。</a:t>
+              <a:t>與單獨TACE的比較分析</a:t>
             </a:r>
             <a:endParaRPr lang="en-US" sz="1800" dirty="0"/>
           </a:p>
@@ -6434,7 +6476,7 @@
                   <a:srgbClr val="888888"/>
                 </a:solidFill>
               </a:rPr>
-              <a:t>Lee Pei-Chang, Wu Chi-Jung, Hung Ya-Wen et al.. Hepatology (Baltimore, Md.). 2026-07-17 DOI: 10.1097/HEP.0000000000001446</a:t>
+              <a:t>X Zhang, H Cai, W Peng. … and Targeted Therapy. 2026</a:t>
             </a:r>
             <a:endParaRPr lang="en-US" sz="800" dirty="0"/>
           </a:p>
@@ -6634,7 +6676,7 @@
                   </a:extLst>
                 </a:hlinkClick>
               </a:rPr>
-              <a:t>Optimal treatment selection for hepatocellular carcinoma in the era of immunotherapy.</a:t>
+              <a:t>… (PD-1 inhibitor) plus lenvatinib as conversion therapy followed by sequential surgery (SILENSES) for advanced unresectable hepatocellular carcinoma: a phase II …</a:t>
             </a:r>
             <a:endParaRPr lang="en-US" sz="2400" dirty="0"/>
           </a:p>
@@ -6670,7 +6712,7 @@
                   <a:srgbClr val="888888"/>
                 </a:solidFill>
               </a:rPr>
-              <a:t>Journal of gastroenterology  ·  RCT Phase 3  ·  🌏 Asia</a:t>
+              <a:t>… and Targeted Therapy  ·  RCT Phase 2</a:t>
             </a:r>
             <a:endParaRPr lang="en-US" sz="1000" dirty="0"/>
           </a:p>
@@ -6713,7 +6755,7 @@
                 <a:ea typeface="Microsoft JhengHei" pitchFamily="34" charset="-122"/>
                 <a:cs typeface="Microsoft JhengHei" pitchFamily="34" charset="-120"/>
               </a:rPr>
-              <a:t>免疫治療改變HCC管理策略。</a:t>
+              <a:t>研究評估PD-1抑制劑加lenvatinib</a:t>
             </a:r>
             <a:endParaRPr lang="en-US" sz="1800" dirty="0"/>
           </a:p>
@@ -6734,7 +6776,7 @@
                 <a:ea typeface="Microsoft JhengHei" pitchFamily="34" charset="-122"/>
                 <a:cs typeface="Microsoft JhengHei" pitchFamily="34" charset="-120"/>
               </a:rPr>
-              <a:t>早期HCC復發率仍然高。</a:t>
+              <a:t>針對晚期不可切除HCC患者</a:t>
             </a:r>
             <a:endParaRPr lang="en-US" sz="1800" dirty="0"/>
           </a:p>
@@ -6755,7 +6797,7 @@
                 <a:ea typeface="Microsoft JhengHei" pitchFamily="34" charset="-122"/>
                 <a:cs typeface="Microsoft JhengHei" pitchFamily="34" charset="-120"/>
               </a:rPr>
-              <a:t>AI模型有效預測術後復發。</a:t>
+              <a:t>轉化治療後進行序列手術</a:t>
             </a:r>
             <a:endParaRPr lang="en-US" sz="1800" dirty="0"/>
           </a:p>
@@ -6776,7 +6818,7 @@
                 <a:ea typeface="Microsoft JhengHei" pitchFamily="34" charset="-122"/>
                 <a:cs typeface="Microsoft JhengHei" pitchFamily="34" charset="-120"/>
               </a:rPr>
-              <a:t>TACE結合TKI改善治療結果。</a:t>
+              <a:t>評估長期生存結果</a:t>
             </a:r>
             <a:endParaRPr lang="en-US" sz="1800" dirty="0"/>
           </a:p>
@@ -6797,7 +6839,7 @@
                 <a:ea typeface="Microsoft JhengHei" pitchFamily="34" charset="-122"/>
                 <a:cs typeface="Microsoft JhengHei" pitchFamily="34" charset="-120"/>
               </a:rPr>
-              <a:t>新興生物標記可能優化免疫治療。</a:t>
+              <a:t>討論第二期臨床試驗結果</a:t>
             </a:r>
             <a:endParaRPr lang="en-US" sz="1800" dirty="0"/>
           </a:p>
@@ -6833,7 +6875,7 @@
                   <a:srgbClr val="888888"/>
                 </a:solidFill>
               </a:rPr>
-              <a:t>Chi Chen-Ta, Huang Yi-Hsiang. Journal of gastroenterology. 2026-07-27 DOI: 10.1007/s00535-026-02411-7</a:t>
+              <a:t>S Lu, W Zhang, J Li. … and Targeted Therapy. 2026</a:t>
             </a:r>
             <a:endParaRPr lang="en-US" sz="800" dirty="0"/>
           </a:p>
@@ -7033,7 +7075,7 @@
                   </a:extLst>
                 </a:hlinkClick>
               </a:rPr>
-              <a:t>Tim-3 facilitates dendritic cell ferroptosis and impairs antitumor immunity in steatohepatitis-related HCC.</a:t>
+              <a:t>Aggressive Histologic Subtypes Drive Poor Outcomes after Percutaneous Ablation for Early Recurrent Hepatocellular Carcinoma.</a:t>
             </a:r>
             <a:endParaRPr lang="en-US" sz="2400" dirty="0"/>
           </a:p>
@@ -7069,7 +7111,7 @@
                   <a:srgbClr val="888888"/>
                 </a:solidFill>
               </a:rPr>
-              <a:t>Journal of hepatology  ·  IF 25.7  ·  Basic Research</a:t>
+              <a:t>Journal of vascular and interventional radiology : JVIR  ·  Retrospective Study  ·  🌏 Asia</a:t>
             </a:r>
             <a:endParaRPr lang="en-US" sz="1000" dirty="0"/>
           </a:p>
@@ -7112,7 +7154,7 @@
                 <a:ea typeface="Microsoft JhengHei" pitchFamily="34" charset="-122"/>
                 <a:cs typeface="Microsoft JhengHei" pitchFamily="34" charset="-120"/>
               </a:rPr>
-              <a:t>Tim-3調控樹突細胞鐵死亡。</a:t>
+              <a:t>侵襲性組織學預測不良結果。</a:t>
             </a:r>
             <a:endParaRPr lang="en-US" sz="1800" dirty="0"/>
           </a:p>
@@ -7133,7 +7175,7 @@
                 <a:ea typeface="Microsoft JhengHei" pitchFamily="34" charset="-122"/>
                 <a:cs typeface="Microsoft JhengHei" pitchFamily="34" charset="-120"/>
               </a:rPr>
-              <a:t>高脂飲食引發免疫抑制。</a:t>
+              <a:t>研究納入194名手術後病人。</a:t>
             </a:r>
             <a:endParaRPr lang="en-US" sz="1800" dirty="0"/>
           </a:p>
@@ -7154,7 +7196,7 @@
                 <a:ea typeface="Microsoft JhengHei" pitchFamily="34" charset="-122"/>
                 <a:cs typeface="Microsoft JhengHei" pitchFamily="34" charset="-120"/>
               </a:rPr>
-              <a:t>Tim-3阻斷增強抗腫瘤免疫。</a:t>
+              <a:t>風險模型根據組織學分層。</a:t>
             </a:r>
             <a:endParaRPr lang="en-US" sz="1800" dirty="0"/>
           </a:p>
@@ -7175,7 +7217,7 @@
                 <a:ea typeface="Microsoft JhengHei" pitchFamily="34" charset="-122"/>
                 <a:cs typeface="Microsoft JhengHei" pitchFamily="34" charset="-120"/>
               </a:rPr>
-              <a:t>樹突細胞耗竭與預後不良相關。</a:t>
+              <a:t>侵襲性復發模式與組織學相關。</a:t>
             </a:r>
             <a:endParaRPr lang="en-US" sz="1800" dirty="0"/>
           </a:p>
@@ -7196,7 +7238,7 @@
                 <a:ea typeface="Microsoft JhengHei" pitchFamily="34" charset="-122"/>
                 <a:cs typeface="Microsoft JhengHei" pitchFamily="34" charset="-120"/>
               </a:rPr>
-              <a:t>聯合療法改善腫瘤控制。</a:t>
+              <a:t>組織學應指導治療計劃。</a:t>
             </a:r>
             <a:endParaRPr lang="en-US" sz="1800" dirty="0"/>
           </a:p>
@@ -7232,7 +7274,7 @@
                   <a:srgbClr val="888888"/>
                 </a:solidFill>
               </a:rPr>
-              <a:t>Li Na, Song Xiaojia, Peng Xueqi et al.. Journal of hepatology. 2026-07-16 DOI: 10.1016/j.jhep.2026.04.010</a:t>
+              <a:t>Gu Kyowon, Lee Min Woo, Han Seungchul et al.. Journal of vascular and interventional radiology : JVIR. 2026-08-04 DOI: 10.1016/j.jvir.2026.108998</a:t>
             </a:r>
             <a:endParaRPr lang="en-US" sz="800" dirty="0"/>
           </a:p>
@@ -7432,7 +7474,7 @@
                   </a:extLst>
                 </a:hlinkClick>
               </a:rPr>
-              <a:t>When lipids silence immunity: Dendritic cell death in MASLD-associated HCC.</a:t>
+              <a:t>Combined anti-PD-1 with irreversible electroporation relieves immunosuppression and reduces hepatocellular carcinoma regrowth.</a:t>
             </a:r>
             <a:endParaRPr lang="en-US" sz="2400" dirty="0"/>
           </a:p>
@@ -7468,7 +7510,7 @@
                   <a:srgbClr val="888888"/>
                 </a:solidFill>
               </a:rPr>
-              <a:t>Journal of hepatology  ·  IF 25.7</a:t>
+              <a:t>JHEP reports : innovation in hepatology  ·  IF 7.8  ·  Prospective Study</a:t>
             </a:r>
             <a:endParaRPr lang="en-US" sz="1000" dirty="0"/>
           </a:p>
@@ -7511,7 +7553,7 @@
                 <a:ea typeface="Microsoft JhengHei" pitchFamily="34" charset="-122"/>
                 <a:cs typeface="Microsoft JhengHei" pitchFamily="34" charset="-120"/>
               </a:rPr>
-              <a:t>研究聚焦於MASLD與HCC。</a:t>
+              <a:t>IRE引發免疫微環境變化。</a:t>
             </a:r>
             <a:endParaRPr lang="en-US" sz="1800" dirty="0"/>
           </a:p>
@@ -7532,7 +7574,7 @@
                 <a:ea typeface="Microsoft JhengHei" pitchFamily="34" charset="-122"/>
                 <a:cs typeface="Microsoft JhengHei" pitchFamily="34" charset="-120"/>
               </a:rPr>
-              <a:t>樹突細胞死亡與脂質相關。</a:t>
+              <a:t>聯合anti-PD-1減少腫瘤再生。</a:t>
             </a:r>
             <a:endParaRPr lang="en-US" sz="1800" dirty="0"/>
           </a:p>
@@ -7553,7 +7595,7 @@
                 <a:ea typeface="Microsoft JhengHei" pitchFamily="34" charset="-122"/>
                 <a:cs typeface="Microsoft JhengHei" pitchFamily="34" charset="-120"/>
               </a:rPr>
-              <a:t>HCC中觀察到免疫抑制。</a:t>
+              <a:t>PMN-MDSCs促進CD8+ T細胞耗竭。</a:t>
             </a:r>
             <a:endParaRPr lang="en-US" sz="1800" dirty="0"/>
           </a:p>
@@ -7574,7 +7616,7 @@
                 <a:ea typeface="Microsoft JhengHei" pitchFamily="34" charset="-122"/>
                 <a:cs typeface="Microsoft JhengHei" pitchFamily="34" charset="-120"/>
               </a:rPr>
-              <a:t>潛在治療靶點被識別。</a:t>
+              <a:t>YTHDF2降解HCC中的CXCL10 mRNA。</a:t>
             </a:r>
             <a:endParaRPr lang="en-US" sz="1800" dirty="0"/>
           </a:p>
@@ -7595,7 +7637,7 @@
                 <a:ea typeface="Microsoft JhengHei" pitchFamily="34" charset="-122"/>
                 <a:cs typeface="Microsoft JhengHei" pitchFamily="34" charset="-120"/>
               </a:rPr>
-              <a:t>需進一步研究脂質影響。</a:t>
+              <a:t>需臨床試驗驗證效果。</a:t>
             </a:r>
             <a:endParaRPr lang="en-US" sz="1800" dirty="0"/>
           </a:p>
@@ -7631,7 +7673,7 @@
                   <a:srgbClr val="888888"/>
                 </a:solidFill>
               </a:rPr>
-              <a:t>Kocheise Lorenz, Schneider Kai Markus. Journal of hepatology. 2026-07-15 DOI: 10.1016/j.jhep.2026.06.008</a:t>
+              <a:t>Huo Jihui, Wang Lina, Lei Kai et al.. JHEP reports : innovation in hepatology. 2026-08-03 DOI: 10.1016/j.jhepr.2026.101977</a:t>
             </a:r>
             <a:endParaRPr lang="en-US" sz="800" dirty="0"/>
           </a:p>

--- a/docs/digest-zh.pptx
+++ b/docs/digest-zh.pptx
@@ -2269,7 +2269,7 @@
                   <a:srgbClr val="888888"/>
                 </a:solidFill>
               </a:rPr>
-              <a:t>2026-08-03 — 2026-08-10</a:t>
+              <a:t>2026-08-10 — 2026-08-17</a:t>
             </a:r>
             <a:endParaRPr lang="en-US" sz="1400" dirty="0"/>
           </a:p>
@@ -2460,7 +2460,7 @@
                   </a:extLst>
                 </a:hlinkClick>
               </a:rPr>
-              <a:t>Radiotherapy versus local ablation therapy for the treatment of hepatocellular carcinoma: A systematic review and meta-analysis.</a:t>
+              <a:t>Cryoablation versus radiofrequency ablation for hepatocellular carcinoma: a systematic review and meta-analysis</a:t>
             </a:r>
             <a:endParaRPr lang="en-US" sz="2400" dirty="0"/>
           </a:p>
@@ -2496,7 +2496,7 @@
                   <a:srgbClr val="888888"/>
                 </a:solidFill>
               </a:rPr>
-              <a:t>Journal of Clinical …  ·  Meta-Analysis</a:t>
+              <a:t>International Journal of …  ·  Meta-Analysis</a:t>
             </a:r>
             <a:endParaRPr lang="en-US" sz="1000" dirty="0"/>
           </a:p>
@@ -2539,7 +2539,7 @@
                 <a:ea typeface="Microsoft JhengHei" pitchFamily="34" charset="-122"/>
                 <a:cs typeface="Microsoft JhengHei" pitchFamily="34" charset="-120"/>
               </a:rPr>
-              <a:t>放射治療與局部消融比較</a:t>
+              <a:t>Cryoablation有效控制腫瘤。</a:t>
             </a:r>
             <a:endParaRPr lang="en-US" sz="1800" dirty="0"/>
           </a:p>
@@ -2560,7 +2560,7 @@
                 <a:ea typeface="Microsoft JhengHei" pitchFamily="34" charset="-122"/>
                 <a:cs typeface="Microsoft JhengHei" pitchFamily="34" charset="-120"/>
               </a:rPr>
-              <a:t>針對肝細胞癌（HCC）治療</a:t>
+              <a:t>與radiofrequency ablation比較。</a:t>
             </a:r>
             <a:endParaRPr lang="en-US" sz="1800" dirty="0"/>
           </a:p>
@@ -2581,49 +2581,7 @@
                 <a:ea typeface="Microsoft JhengHei" pitchFamily="34" charset="-122"/>
                 <a:cs typeface="Microsoft JhengHei" pitchFamily="34" charset="-120"/>
               </a:rPr>
-              <a:t>評估局部無進展生存期</a:t>
-            </a:r>
-            <a:endParaRPr lang="en-US" sz="1800" dirty="0"/>
-          </a:p>
-          <a:p>
-            <a:pPr marL="342900" indent="-342900">
-              <a:spcAft>
-                <a:spcPts val="800"/>
-              </a:spcAft>
-              <a:buSzPct val="100000"/>
-              <a:buChar char="•"/>
-            </a:pPr>
-            <a:r>
-              <a:rPr lang="en-US" sz="1800" dirty="0">
-                <a:solidFill>
-                  <a:srgbClr val="333333"/>
-                </a:solidFill>
-                <a:latin typeface="Microsoft JhengHei" pitchFamily="34" charset="0"/>
-                <a:ea typeface="Microsoft JhengHei" pitchFamily="34" charset="-122"/>
-                <a:cs typeface="Microsoft JhengHei" pitchFamily="34" charset="-120"/>
-              </a:rPr>
-              <a:t>包括射頻與微波消融</a:t>
-            </a:r>
-            <a:endParaRPr lang="en-US" sz="1800" dirty="0"/>
-          </a:p>
-          <a:p>
-            <a:pPr marL="342900" indent="-342900">
-              <a:spcAft>
-                <a:spcPts val="800"/>
-              </a:spcAft>
-              <a:buSzPct val="100000"/>
-              <a:buChar char="•"/>
-            </a:pPr>
-            <a:r>
-              <a:rPr lang="en-US" sz="1800" dirty="0">
-                <a:solidFill>
-                  <a:srgbClr val="333333"/>
-                </a:solidFill>
-                <a:latin typeface="Microsoft JhengHei" pitchFamily="34" charset="0"/>
-                <a:ea typeface="Microsoft JhengHei" pitchFamily="34" charset="-122"/>
-                <a:cs typeface="Microsoft JhengHei" pitchFamily="34" charset="-120"/>
-              </a:rPr>
-              <a:t>進行系統性回顧與統合分析</a:t>
+              <a:t>針對早期HCC患者研究。</a:t>
             </a:r>
             <a:endParaRPr lang="en-US" sz="1800" dirty="0"/>
           </a:p>
@@ -2659,7 +2617,7 @@
                   <a:srgbClr val="888888"/>
                 </a:solidFill>
               </a:rPr>
-              <a:t>SH Bae, SH Choi, SM Yoon. Journal of Clinical …. 2026</a:t>
+              <a:t>K Mao, Y Wang, W Yao. International Journal of …. 2026</a:t>
             </a:r>
             <a:endParaRPr lang="en-US" sz="800" dirty="0"/>
           </a:p>
@@ -2859,7 +2817,7 @@
                   </a:extLst>
                 </a:hlinkClick>
               </a:rPr>
-              <a:t>… on interventional therapy and immune checkpoint inhibitors (ICIs) in patients with intermediate-and advanced-stage hepatocellular carcinoma: a systematic review …</a:t>
+              <a:t>Radiotherapy versus local ablation therapy for the treatment of hepatocellular carcinoma: A systematic review and meta-analysis.</a:t>
             </a:r>
             <a:endParaRPr lang="en-US" sz="2400" dirty="0"/>
           </a:p>
@@ -2895,7 +2853,7 @@
                   <a:srgbClr val="888888"/>
                 </a:solidFill>
               </a:rPr>
-              <a:t>… , Immunotherapy  ·  Systematic Review</a:t>
+              <a:t>Journal of Clinical …  ·  Meta-Analysis</a:t>
             </a:r>
             <a:endParaRPr lang="en-US" sz="1000" dirty="0"/>
           </a:p>
@@ -2938,7 +2896,7 @@
                 <a:ea typeface="Microsoft JhengHei" pitchFamily="34" charset="-122"/>
                 <a:cs typeface="Microsoft JhengHei" pitchFamily="34" charset="-120"/>
               </a:rPr>
-              <a:t>聯合療法顯示改善效果。</a:t>
+              <a:t>放射治療與局部消融比較</a:t>
             </a:r>
             <a:endParaRPr lang="en-US" sz="1800" dirty="0"/>
           </a:p>
@@ -2959,7 +2917,7 @@
                 <a:ea typeface="Microsoft JhengHei" pitchFamily="34" charset="-122"/>
                 <a:cs typeface="Microsoft JhengHei" pitchFamily="34" charset="-120"/>
               </a:rPr>
-              <a:t>ICIs增強HCC免疫反應。</a:t>
+              <a:t>針對肝細胞癌（HCC）治療</a:t>
             </a:r>
             <a:endParaRPr lang="en-US" sz="1800" dirty="0"/>
           </a:p>
@@ -2980,7 +2938,49 @@
                 <a:ea typeface="Microsoft JhengHei" pitchFamily="34" charset="-122"/>
                 <a:cs typeface="Microsoft JhengHei" pitchFamily="34" charset="-120"/>
               </a:rPr>
-              <a:t>介入療法選擇包括消融。</a:t>
+              <a:t>評估局部無進展生存期</a:t>
+            </a:r>
+            <a:endParaRPr lang="en-US" sz="1800" dirty="0"/>
+          </a:p>
+          <a:p>
+            <a:pPr marL="342900" indent="-342900">
+              <a:spcAft>
+                <a:spcPts val="800"/>
+              </a:spcAft>
+              <a:buSzPct val="100000"/>
+              <a:buChar char="•"/>
+            </a:pPr>
+            <a:r>
+              <a:rPr lang="en-US" sz="1800" dirty="0">
+                <a:solidFill>
+                  <a:srgbClr val="333333"/>
+                </a:solidFill>
+                <a:latin typeface="Microsoft JhengHei" pitchFamily="34" charset="0"/>
+                <a:ea typeface="Microsoft JhengHei" pitchFamily="34" charset="-122"/>
+                <a:cs typeface="Microsoft JhengHei" pitchFamily="34" charset="-120"/>
+              </a:rPr>
+              <a:t>包含射頻和微波消融</a:t>
+            </a:r>
+            <a:endParaRPr lang="en-US" sz="1800" dirty="0"/>
+          </a:p>
+          <a:p>
+            <a:pPr marL="342900" indent="-342900">
+              <a:spcAft>
+                <a:spcPts val="800"/>
+              </a:spcAft>
+              <a:buSzPct val="100000"/>
+              <a:buChar char="•"/>
+            </a:pPr>
+            <a:r>
+              <a:rPr lang="en-US" sz="1800" dirty="0">
+                <a:solidFill>
+                  <a:srgbClr val="333333"/>
+                </a:solidFill>
+                <a:latin typeface="Microsoft JhengHei" pitchFamily="34" charset="0"/>
+                <a:ea typeface="Microsoft JhengHei" pitchFamily="34" charset="-122"/>
+                <a:cs typeface="Microsoft JhengHei" pitchFamily="34" charset="-120"/>
+              </a:rPr>
+              <a:t>進行系統性回顧與統合分析</a:t>
             </a:r>
             <a:endParaRPr lang="en-US" sz="1800" dirty="0"/>
           </a:p>
@@ -3016,7 +3016,7 @@
                   <a:srgbClr val="888888"/>
                 </a:solidFill>
               </a:rPr>
-              <a:t>J Su, Y Su, R Mai. … , Immunotherapy. 2026</a:t>
+              <a:t>SH Bae, SH Choi, SM Yoon. Journal of Clinical …. 2026</a:t>
             </a:r>
             <a:endParaRPr lang="en-US" sz="800" dirty="0"/>
           </a:p>
@@ -3216,7 +3216,7 @@
                   </a:extLst>
                 </a:hlinkClick>
               </a:rPr>
-              <a:t>Immune Checkpoint Inhibitors in Hepatocellular Carcinoma Before and After Liver Transplantation: A Systematic Review</a:t>
+              <a:t>… on interventional therapy and immune checkpoint inhibitors (ICIs) in patients with intermediate-and advanced-stage hepatocellular carcinoma: a systematic review …</a:t>
             </a:r>
             <a:endParaRPr lang="en-US" sz="2400" dirty="0"/>
           </a:p>
@@ -3252,7 +3252,7 @@
                   <a:srgbClr val="888888"/>
                 </a:solidFill>
               </a:rPr>
-              <a:t>Cancers  ·  Systematic Review</a:t>
+              <a:t>… , Immunotherapy  ·  Systematic Review</a:t>
             </a:r>
             <a:endParaRPr lang="en-US" sz="1000" dirty="0"/>
           </a:p>
@@ -3295,7 +3295,7 @@
                 <a:ea typeface="Microsoft JhengHei" pitchFamily="34" charset="-122"/>
                 <a:cs typeface="Microsoft JhengHei" pitchFamily="34" charset="-120"/>
               </a:rPr>
-              <a:t>肝癌免疫檢查點抑制劑回顧</a:t>
+              <a:t>聯合療法在HCC中展現潛力。</a:t>
             </a:r>
             <a:endParaRPr lang="en-US" sz="1800" dirty="0"/>
           </a:p>
@@ -3316,7 +3316,7 @@
                 <a:ea typeface="Microsoft JhengHei" pitchFamily="34" charset="-122"/>
                 <a:cs typeface="Microsoft JhengHei" pitchFamily="34" charset="-120"/>
               </a:rPr>
-              <a:t>關注肝移植前後的療效</a:t>
+              <a:t>ICIs提升介入治療效果。</a:t>
             </a:r>
             <a:endParaRPr lang="en-US" sz="1800" dirty="0"/>
           </a:p>
@@ -3337,49 +3337,7 @@
                 <a:ea typeface="Microsoft JhengHei" pitchFamily="34" charset="-122"/>
                 <a:cs typeface="Microsoft JhengHei" pitchFamily="34" charset="-120"/>
               </a:rPr>
-              <a:t>涵蓋PD-1、PD-L1和CTLA-4療法</a:t>
-            </a:r>
-            <a:endParaRPr lang="en-US" sz="1800" dirty="0"/>
-          </a:p>
-          <a:p>
-            <a:pPr marL="342900" indent="-342900">
-              <a:spcAft>
-                <a:spcPts val="800"/>
-              </a:spcAft>
-              <a:buSzPct val="100000"/>
-              <a:buChar char="•"/>
-            </a:pPr>
-            <a:r>
-              <a:rPr lang="en-US" sz="1800" dirty="0">
-                <a:solidFill>
-                  <a:srgbClr val="333333"/>
-                </a:solidFill>
-                <a:latin typeface="Microsoft JhengHei" pitchFamily="34" charset="0"/>
-                <a:ea typeface="Microsoft JhengHei" pitchFamily="34" charset="-122"/>
-                <a:cs typeface="Microsoft JhengHei" pitchFamily="34" charset="-120"/>
-              </a:rPr>
-              <a:t>評估療效與安全性結果</a:t>
-            </a:r>
-            <a:endParaRPr lang="en-US" sz="1800" dirty="0"/>
-          </a:p>
-          <a:p>
-            <a:pPr marL="342900" indent="-342900">
-              <a:spcAft>
-                <a:spcPts val="800"/>
-              </a:spcAft>
-              <a:buSzPct val="100000"/>
-              <a:buChar char="•"/>
-            </a:pPr>
-            <a:r>
-              <a:rPr lang="en-US" sz="1800" dirty="0">
-                <a:solidFill>
-                  <a:srgbClr val="333333"/>
-                </a:solidFill>
-                <a:latin typeface="Microsoft JhengHei" pitchFamily="34" charset="0"/>
-                <a:ea typeface="Microsoft JhengHei" pitchFamily="34" charset="-122"/>
-                <a:cs typeface="Microsoft JhengHei" pitchFamily="34" charset="-120"/>
-              </a:rPr>
-              <a:t>強調改善患者生存的潛力</a:t>
+              <a:t>系統評估強調臨床結果。</a:t>
             </a:r>
             <a:endParaRPr lang="en-US" sz="1800" dirty="0"/>
           </a:p>
@@ -3415,7 +3373,7 @@
                   <a:srgbClr val="888888"/>
                 </a:solidFill>
               </a:rPr>
-              <a:t>F Dituri, L Carrieri, M Mosaico. Cancers. 2026</a:t>
+              <a:t>J Su, Y Su, R Mai. … , Immunotherapy. 2026</a:t>
             </a:r>
             <a:endParaRPr lang="en-US" sz="800" dirty="0"/>
           </a:p>
@@ -3632,7 +3590,7 @@
                   <a:srgbClr val="FFFFFF"/>
                 </a:solidFill>
               </a:rPr>
-              <a:t>1. **生物標記物的必要性 (Necessity of Biomarkers)**  </a:t>
+              <a:t>1. **PD-1抑制劑的免疫機制**  </a:t>
             </a:r>
             <a:endParaRPr lang="en-US" sz="1200" dirty="0"/>
           </a:p>
@@ -3649,7 +3607,7 @@
                   <a:srgbClr val="FFFFFF"/>
                 </a:solidFill>
               </a:rPr>
-              <a:t>   免疫檢查點抑制劑（ICI）在肝細胞癌（HCC）中的應用顯示，僅約30%的患者對治療有反應，強調了基於生物標記物的患者選擇的重要性。  </a:t>
+              <a:t>   PD-1抑制劑不僅透過效應T細胞激活來發揮作用，還能釋放與乙型肝炎病毒相關的B細胞反應，顯示出其在肝細胞癌（HCC）治療中的多重機制。  </a:t>
             </a:r>
             <a:endParaRPr lang="en-US" sz="1200" dirty="0"/>
           </a:p>
@@ -3666,7 +3624,7 @@
                   <a:srgbClr val="FFFFFF"/>
                 </a:solidFill>
               </a:rPr>
-              <a:t>   The application of immune checkpoint inhibitors (ICIs) in hepatocellular carcinoma (HCC) reveals that only about 30% of patients respond to treatment, highlighting the importance of biomarker-driven patient selection.</a:t>
+              <a:t>   **The PD-1 blockade not only activates effector T cells but also unleashes hepatitis B virus-related B cell responses, highlighting its multifaceted mechanisms in HCC treatment.**</a:t>
             </a:r>
             <a:endParaRPr lang="en-US" sz="1200" dirty="0"/>
           </a:p>
@@ -3692,7 +3650,7 @@
                   <a:srgbClr val="FFFFFF"/>
                 </a:solidFill>
               </a:rPr>
-              <a:t>2. **代謝重編程的影響 (Impact of Metabolic Reprogramming)**  </a:t>
+              <a:t>2. **治療中斷的競爭風險**  </a:t>
             </a:r>
             <a:endParaRPr lang="en-US" sz="1200" dirty="0"/>
           </a:p>
@@ -3709,7 +3667,7 @@
                   <a:srgbClr val="FFFFFF"/>
                 </a:solidFill>
               </a:rPr>
-              <a:t>   代謝功能障礙相關的肝炎（MASH-HCC）對免疫檢查點抑制劑的反應較差，這可能與腫瘤細胞的代謝重編程及腫瘤微環境的異常有關。  </a:t>
+              <a:t>   對於不可切除的肝細胞癌，Atezolizumab與Bevacizumab的聯合療法的治療中斷原因多樣，傳統生存終點無法充分捕捉各種原因的時間變化。  </a:t>
             </a:r>
             <a:endParaRPr lang="en-US" sz="1200" dirty="0"/>
           </a:p>
@@ -3726,7 +3684,7 @@
                   <a:srgbClr val="FFFFFF"/>
                 </a:solidFill>
               </a:rPr>
-              <a:t>   Metabolic dysfunction-associated steatohepatitis-related hepatocellular carcinoma (MASH-HCC) shows poor response to immune checkpoint inhibitors, potentially linked to metabolic reprogramming of tumor cells and abnormal tumor microenvironment.</a:t>
+              <a:t>   **The reasons for treatment discontinuation in unresectable HCC patients receiving Atezolizumab plus Bevacizumab are diverse, and conventional survival endpoints fail to capture the time-varying probabilities of each cause.**</a:t>
             </a:r>
             <a:endParaRPr lang="en-US" sz="1200" dirty="0"/>
           </a:p>
@@ -3752,7 +3710,7 @@
                   <a:srgbClr val="FFFFFF"/>
                 </a:solidFill>
               </a:rPr>
-              <a:t>3. **免疫微環境的時空動態 (Spatiotemporal Dynamics of Immune Microenvironment)**  </a:t>
+              <a:t>3. **轉化療法的潛力**  </a:t>
             </a:r>
             <a:endParaRPr lang="en-US" sz="1200" dirty="0"/>
           </a:p>
@@ -3769,7 +3727,7 @@
                   <a:srgbClr val="FFFFFF"/>
                 </a:solidFill>
               </a:rPr>
-              <a:t>   Atezolizumab與Bevacizumab的聯合療法在HCC中的免疫重塑過程尚未完全了解，這對治療效果的預測至關重要。  </a:t>
+              <a:t>   結合經動脈化療栓塞（TACE）與PD-1抑制劑的轉化療法顯示出對不可切除中晚期肝細胞癌的潛在益處，提供了新的治療選擇。  </a:t>
             </a:r>
             <a:endParaRPr lang="en-US" sz="1200" dirty="0"/>
           </a:p>
@@ -3786,7 +3744,7 @@
                   <a:srgbClr val="FFFFFF"/>
                 </a:solidFill>
               </a:rPr>
-              <a:t>   The spatiotemporal immune remodeling associated with the combination therapy of Atezolizumab and Bevacizumab in HCC remains poorly understood, which is crucial for predicting treatment outcomes.</a:t>
+              <a:t>   **Combination therapies involving transarterial chemoembolization (TACE) and PD-1 inhibitors show potential benefits for unresectable intermediate-advanced HCC, offering new treatment options.**</a:t>
             </a:r>
             <a:endParaRPr lang="en-US" sz="1200" dirty="0"/>
           </a:p>
@@ -3812,7 +3770,7 @@
                   <a:srgbClr val="FFFFFF"/>
                 </a:solidFill>
               </a:rPr>
-              <a:t>4. **局部消融與免疫治療的結合 (Combination of Local Ablation and Immunotherapy)**  </a:t>
+              <a:t>4. **外科手術後的長期生存結果**  </a:t>
             </a:r>
             <a:endParaRPr lang="en-US" sz="1200" dirty="0"/>
           </a:p>
@@ -3829,7 +3787,7 @@
                   <a:srgbClr val="FFFFFF"/>
                 </a:solidFill>
               </a:rPr>
-              <a:t>   局部消融技術如不可逆電穿孔（IRE）顯示出與免疫治療結合的潛力，能夠減輕免疫抑制並降低肝癌的再生長。  </a:t>
+              <a:t>   在不可切除的肝細胞癌患者中，經過PD-1抑制劑與Lenvatinib的轉化療法後，隨後進行的外科手術顯示出良好的長期生存結果。  </a:t>
             </a:r>
             <a:endParaRPr lang="en-US" sz="1200" dirty="0"/>
           </a:p>
@@ -3846,7 +3804,7 @@
                   <a:srgbClr val="FFFFFF"/>
                 </a:solidFill>
               </a:rPr>
-              <a:t>   Local ablation techniques such as irreversible electroporation (IRE) demonstrate potential when combined with immunotherapy, alleviating immunosuppression and reducing hepatocellular carcinoma regrowth.</a:t>
+              <a:t>   **In patients with unresectable HCC, sequential surgery following conversion therapy with PD-1 inhibitors and Lenvatinib demonstrates favorable long-term survival outcomes.**</a:t>
             </a:r>
             <a:endParaRPr lang="en-US" sz="1200" dirty="0"/>
           </a:p>
@@ -3872,7 +3830,7 @@
                   <a:srgbClr val="FFFFFF"/>
                 </a:solidFill>
               </a:rPr>
-              <a:t>5. **不同組合療法的效果 (Effects of Different Combination Therapies)**  </a:t>
+              <a:t>5. **外周免疫動態的預後價值**  </a:t>
             </a:r>
             <a:endParaRPr lang="en-US" sz="1200" dirty="0"/>
           </a:p>
@@ -3889,7 +3847,24 @@
                   <a:srgbClr val="FFFFFF"/>
                 </a:solidFill>
               </a:rPr>
-              <a:t>   將免疫檢查點抑制劑與介入療法結合的策略顯示出潛在的療效，但仍需進一步研究以確定最佳的治療組合。</a:t>
+              <a:t>   外周免疫標記物的靜態和動態變化在接受TACE及免疫檢查點抑制劑的HCC患者中，能預測預後，強調了免疫監測的重要性。  </a:t>
+            </a:r>
+            <a:endParaRPr lang="en-US" sz="1200" dirty="0"/>
+          </a:p>
+          <a:p>
+            <a:pPr indent="0" marL="0">
+              <a:lnSpc>
+                <a:spcPct val="150000"/>
+              </a:lnSpc>
+              <a:buNone/>
+            </a:pPr>
+            <a:r>
+              <a:rPr lang="en-US" sz="1200" dirty="0">
+                <a:solidFill>
+                  <a:srgbClr val="FFFFFF"/>
+                </a:solidFill>
+              </a:rPr>
+              <a:t>   **Peripheral immune markers' static and dynamic changes can predict prognosis in HCC patients receiving TACE and immune checkpoint inhibitors, emphasizing the importance of immune monitoring.**</a:t>
             </a:r>
             <a:endParaRPr lang="en-US" sz="1200" dirty="0"/>
           </a:p>
@@ -4035,7 +4010,7 @@
                   <a:srgbClr val="FFFFFF"/>
                 </a:solidFill>
               </a:rPr>
-              <a:t>Strategies combining immune checkpoint inhibitors with interventional therapies show potential efficacy, but further research is needed to determine the optimal treatment combinations.</a:t>
+              <a:t>### 未來研究方向 (Future Research Directions)</a:t>
             </a:r>
             <a:endParaRPr lang="en-US" sz="1200" dirty="0"/>
           </a:p>
@@ -4061,7 +4036,7 @@
                   <a:srgbClr val="FFFFFF"/>
                 </a:solidFill>
               </a:rPr>
-              <a:t>### 未來研究方向 (Future Research Directions)</a:t>
+              <a:t>1. **探索PD-1抑制劑的多重作用**  </a:t>
             </a:r>
             <a:endParaRPr lang="en-US" sz="1200" dirty="0"/>
           </a:p>
@@ -4072,6 +4047,14 @@
               </a:lnSpc>
               <a:buNone/>
             </a:pPr>
+            <a:r>
+              <a:rPr lang="en-US" sz="1200" dirty="0">
+                <a:solidFill>
+                  <a:srgbClr val="FFFFFF"/>
+                </a:solidFill>
+              </a:rPr>
+              <a:t>   進一步研究PD-1抑制劑在HCC治療中的多重免疫機制，以開發更有效的治療策略。  </a:t>
+            </a:r>
             <a:endParaRPr lang="en-US" sz="1200" dirty="0"/>
           </a:p>
           <a:p>
@@ -4087,7 +4070,7 @@
                   <a:srgbClr val="FFFFFF"/>
                 </a:solidFill>
               </a:rPr>
-              <a:t>1. **生物標記物的開發 (Development of Biomarkers)**  </a:t>
+              <a:t>   **Further exploration of the multifaceted immune mechanisms of PD-1 inhibitors in HCC treatment is needed to develop more effective therapeutic strategies.**</a:t>
             </a:r>
             <a:endParaRPr lang="en-US" sz="1200" dirty="0"/>
           </a:p>
@@ -4098,14 +4081,6 @@
               </a:lnSpc>
               <a:buNone/>
             </a:pPr>
-            <a:r>
-              <a:rPr lang="en-US" sz="1200" dirty="0">
-                <a:solidFill>
-                  <a:srgbClr val="FFFFFF"/>
-                </a:solidFill>
-              </a:rPr>
-              <a:t>   需要進一步開發和驗證能夠預測HCC患者對免疫檢查點抑制劑反應的生物標記物，以實現個性化治療。  </a:t>
-            </a:r>
             <a:endParaRPr lang="en-US" sz="1200" dirty="0"/>
           </a:p>
           <a:p>
@@ -4121,7 +4096,7 @@
                   <a:srgbClr val="FFFFFF"/>
                 </a:solidFill>
               </a:rPr>
-              <a:t>   Further development and validation of biomarkers that can predict HCC patient responses to immune checkpoint inhibitors are needed for personalized treatment.</a:t>
+              <a:t>2. **治療中斷原因的深入分析**  </a:t>
             </a:r>
             <a:endParaRPr lang="en-US" sz="1200" dirty="0"/>
           </a:p>
@@ -4132,6 +4107,14 @@
               </a:lnSpc>
               <a:buNone/>
             </a:pPr>
+            <a:r>
+              <a:rPr lang="en-US" sz="1200" dirty="0">
+                <a:solidFill>
+                  <a:srgbClr val="FFFFFF"/>
+                </a:solidFill>
+              </a:rPr>
+              <a:t>   針對不可切除HCC患者的治療中斷原因進行深入分析，尋求改善治療持續性的策略。  </a:t>
+            </a:r>
             <a:endParaRPr lang="en-US" sz="1200" dirty="0"/>
           </a:p>
           <a:p>
@@ -4147,7 +4130,7 @@
                   <a:srgbClr val="FFFFFF"/>
                 </a:solidFill>
               </a:rPr>
-              <a:t>2. **代謝機制的深入研究 (In-depth Study of Metabolic Mechanisms)**  </a:t>
+              <a:t>   **In-depth analyses of the reasons for treatment discontinuation in unresectable HCC patients are necessary to identify strategies for improving treatment adherence.**</a:t>
             </a:r>
             <a:endParaRPr lang="en-US" sz="1200" dirty="0"/>
           </a:p>
@@ -4158,14 +4141,6 @@
               </a:lnSpc>
               <a:buNone/>
             </a:pPr>
-            <a:r>
-              <a:rPr lang="en-US" sz="1200" dirty="0">
-                <a:solidFill>
-                  <a:srgbClr val="FFFFFF"/>
-                </a:solidFill>
-              </a:rPr>
-              <a:t>   研究MASH-HCC的代謝機制及其對免疫治療的影響，以探索新的治療策略。  </a:t>
-            </a:r>
             <a:endParaRPr lang="en-US" sz="1200" dirty="0"/>
           </a:p>
           <a:p>
@@ -4181,7 +4156,7 @@
                   <a:srgbClr val="FFFFFF"/>
                 </a:solidFill>
               </a:rPr>
-              <a:t>   Investigating the metabolic mechanisms of MASH-HCC and their impact on immunotherapy could uncover new therapeutic strategies.</a:t>
+              <a:t>3. **轉化療法的長期隨訪研究**  </a:t>
             </a:r>
             <a:endParaRPr lang="en-US" sz="1200" dirty="0"/>
           </a:p>
@@ -4192,6 +4167,14 @@
               </a:lnSpc>
               <a:buNone/>
             </a:pPr>
+            <a:r>
+              <a:rPr lang="en-US" sz="1200" dirty="0">
+                <a:solidFill>
+                  <a:srgbClr val="FFFFFF"/>
+                </a:solidFill>
+              </a:rPr>
+              <a:t>   進行長期隨訪研究，以評估轉化療法（如TACE與PD-1抑制劑聯合療法）的持續效果及其對生存率的影響。  </a:t>
+            </a:r>
             <a:endParaRPr lang="en-US" sz="1200" dirty="0"/>
           </a:p>
           <a:p>
@@ -4207,7 +4190,7 @@
                   <a:srgbClr val="FFFFFF"/>
                 </a:solidFill>
               </a:rPr>
-              <a:t>3. **腫瘤微環境的動態觀察 (Dynamic Observation of Tumor Microenvironment)**  </a:t>
+              <a:t>   **Long-term follow-up studies are needed to assess the sustained effects of conversion therapies (e.g., TACE combined with PD-1 inhibitors) and their impact on survival rates.**</a:t>
             </a:r>
             <a:endParaRPr lang="en-US" sz="1200" dirty="0"/>
           </a:p>
@@ -4218,14 +4201,6 @@
               </a:lnSpc>
               <a:buNone/>
             </a:pPr>
-            <a:r>
-              <a:rPr lang="en-US" sz="1200" dirty="0">
-                <a:solidFill>
-                  <a:srgbClr val="FFFFFF"/>
-                </a:solidFill>
-              </a:rPr>
-              <a:t>   進行長期的腫瘤微環境動態觀察，以更好地理解免疫重塑對治療結果的影響。  </a:t>
-            </a:r>
             <a:endParaRPr lang="en-US" sz="1200" dirty="0"/>
           </a:p>
           <a:p>
@@ -4241,7 +4216,7 @@
                   <a:srgbClr val="FFFFFF"/>
                 </a:solidFill>
               </a:rPr>
-              <a:t>   Conducting long-term dynamic observations of the tumor microenvironment to better understand the impact of immune remodeling on treatment outcomes.</a:t>
+              <a:t>4. **個體化免疫監測的發展**  </a:t>
             </a:r>
             <a:endParaRPr lang="en-US" sz="1200" dirty="0"/>
           </a:p>
@@ -4252,6 +4227,14 @@
               </a:lnSpc>
               <a:buNone/>
             </a:pPr>
+            <a:r>
+              <a:rPr lang="en-US" sz="1200" dirty="0">
+                <a:solidFill>
+                  <a:srgbClr val="FFFFFF"/>
+                </a:solidFill>
+              </a:rPr>
+              <a:t>   發展個體化的免疫監測方法，以便更好地預測HCC患者對不同治療的反應。  </a:t>
+            </a:r>
             <a:endParaRPr lang="en-US" sz="1200" dirty="0"/>
           </a:p>
           <a:p>
@@ -4267,7 +4250,7 @@
                   <a:srgbClr val="FFFFFF"/>
                 </a:solidFill>
               </a:rPr>
-              <a:t>4. **新型局部消融技術的評估 (Evaluation of Novel Local Ablation Techniques)**  </a:t>
+              <a:t>   **The development of personalized immune monitoring methods is essential to better predict HCC patients' responses to various treatments.**</a:t>
             </a:r>
             <a:endParaRPr lang="en-US" sz="1200" dirty="0"/>
           </a:p>
@@ -4278,14 +4261,6 @@
               </a:lnSpc>
               <a:buNone/>
             </a:pPr>
-            <a:r>
-              <a:rPr lang="en-US" sz="1200" dirty="0">
-                <a:solidFill>
-                  <a:srgbClr val="FFFFFF"/>
-                </a:solidFill>
-              </a:rPr>
-              <a:t>   評估新型局部消融技術與免疫治療結合的效果，以提高HCC的治療效果。  </a:t>
-            </a:r>
             <a:endParaRPr lang="en-US" sz="1200" dirty="0"/>
           </a:p>
           <a:p>
@@ -4301,7 +4276,7 @@
                   <a:srgbClr val="FFFFFF"/>
                 </a:solidFill>
               </a:rPr>
-              <a:t>   Evaluating the efficacy of novel local ablation techniques in combination with immunotherapy to enhance treatment outcomes for HCC.</a:t>
+              <a:t>5. **標準化後線治療的共識建立**  </a:t>
             </a:r>
             <a:endParaRPr lang="en-US" sz="1200" dirty="0"/>
           </a:p>
@@ -4312,6 +4287,14 @@
               </a:lnSpc>
               <a:buNone/>
             </a:pPr>
+            <a:r>
+              <a:rPr lang="en-US" sz="1200" dirty="0">
+                <a:solidFill>
+                  <a:srgbClr val="FFFFFF"/>
+                </a:solidFill>
+              </a:rPr>
+              <a:t>   在HCC的後線治療中建立標準化的共識，以應對一線治療失敗後的臨床挑戰。  </a:t>
+            </a:r>
             <a:endParaRPr lang="en-US" sz="1200" dirty="0"/>
           </a:p>
           <a:p>
@@ -4327,41 +4310,7 @@
                   <a:srgbClr val="FFFFFF"/>
                 </a:solidFill>
               </a:rPr>
-              <a:t>5. **臨床試驗的設計 (Design of Clinical Trials)**  </a:t>
-            </a:r>
-            <a:endParaRPr lang="en-US" sz="1200" dirty="0"/>
-          </a:p>
-          <a:p>
-            <a:pPr indent="0" marL="0">
-              <a:lnSpc>
-                <a:spcPct val="150000"/>
-              </a:lnSpc>
-              <a:buNone/>
-            </a:pPr>
-            <a:r>
-              <a:rPr lang="en-US" sz="1200" dirty="0">
-                <a:solidFill>
-                  <a:srgbClr val="FFFFFF"/>
-                </a:solidFill>
-              </a:rPr>
-              <a:t>   設計針對不同組合療法的臨床試驗，以確定最佳的治療方案和患者選擇策略。  </a:t>
-            </a:r>
-            <a:endParaRPr lang="en-US" sz="1200" dirty="0"/>
-          </a:p>
-          <a:p>
-            <a:pPr indent="0" marL="0">
-              <a:lnSpc>
-                <a:spcPct val="150000"/>
-              </a:lnSpc>
-              <a:buNone/>
-            </a:pPr>
-            <a:r>
-              <a:rPr lang="en-US" sz="1200" dirty="0">
-                <a:solidFill>
-                  <a:srgbClr val="FFFFFF"/>
-                </a:solidFill>
-              </a:rPr>
-              <a:t>   Designing clinical trials targeting various combination therapies to determine the best treatment regimens and patient selection strategies.</a:t>
+              <a:t>   **Establishing a standardized consensus for later-line therapies in HCC is crucial to address clinical challenges following first-line treatment failures.**</a:t>
             </a:r>
             <a:endParaRPr lang="en-US" sz="1200" dirty="0"/>
           </a:p>
@@ -4634,7 +4583,7 @@
                 <a:ea typeface="Arial" pitchFamily="34" charset="-122"/>
                 <a:cs typeface="Arial" pitchFamily="34" charset="-120"/>
               </a:rPr>
-              <a:t>Circulating extracellular vesicles carrying PD-1, PD-L1 and CTLA-4 inform resist…</a:t>
+              <a:t>PD-1 blockade unleashes local hepatitis B virus-related B cell response inhibiti…</a:t>
             </a:r>
             <a:endParaRPr lang="en-US" sz="1400" dirty="0"/>
           </a:p>
@@ -4671,7 +4620,7 @@
                 <a:ea typeface="Arial" pitchFamily="34" charset="-122"/>
                 <a:cs typeface="Arial" pitchFamily="34" charset="-120"/>
               </a:rPr>
-              <a:t>PCK1 deficiency promotes MASH-HCC progression by 12-HETE-induced CD8+ T cell dys…</a:t>
+              <a:t>Competing risks of treatment discontinuation of atezolizumab plus bevacizumab in…</a:t>
             </a:r>
             <a:endParaRPr lang="en-US" sz="1400" dirty="0"/>
           </a:p>
@@ -4708,7 +4657,7 @@
                 <a:ea typeface="Arial" pitchFamily="34" charset="-122"/>
                 <a:cs typeface="Arial" pitchFamily="34" charset="-120"/>
               </a:rPr>
-              <a:t>Spatiotemporal dynamics of the tumor microenvironment in hepatocellular carcinom…</a:t>
+              <a:t>… plus transarterial chemoembolization and PD-1 inhibitors as conversion therapi…</a:t>
             </a:r>
             <a:endParaRPr lang="en-US" sz="1400" dirty="0"/>
           </a:p>
@@ -4745,7 +4694,7 @@
                 <a:ea typeface="Arial" pitchFamily="34" charset="-122"/>
                 <a:cs typeface="Arial" pitchFamily="34" charset="-120"/>
               </a:rPr>
-              <a:t>… plus transarterial chemoembolization and PD-1 inhibitors as conversion therapi…</a:t>
+              <a:t>… (PD-1 inhibitor) plus lenvatinib as conversion therapy followed by sequential …</a:t>
             </a:r>
             <a:endParaRPr lang="en-US" sz="1400" dirty="0"/>
           </a:p>
@@ -4782,7 +4731,7 @@
                 <a:ea typeface="Arial" pitchFamily="34" charset="-122"/>
                 <a:cs typeface="Arial" pitchFamily="34" charset="-120"/>
               </a:rPr>
-              <a:t>… (PD-1 inhibitor) plus lenvatinib as conversion therapy followed by sequential …</a:t>
+              <a:t>Peripheral immune dynamics during treatment predict prognosis in HCC receiving T…</a:t>
             </a:r>
             <a:endParaRPr lang="en-US" sz="1400" dirty="0"/>
           </a:p>
@@ -4819,7 +4768,7 @@
                 <a:ea typeface="Arial" pitchFamily="34" charset="-122"/>
                 <a:cs typeface="Arial" pitchFamily="34" charset="-120"/>
               </a:rPr>
-              <a:t>Aggressive Histologic Subtypes Drive Poor Outcomes after Percutaneous Ablation f…</a:t>
+              <a:t>Consensus on standardized later-line systemic therapy for hepatocellular carcino…</a:t>
             </a:r>
             <a:endParaRPr lang="en-US" sz="1400" dirty="0"/>
           </a:p>
@@ -4856,7 +4805,7 @@
                 <a:ea typeface="Arial" pitchFamily="34" charset="-122"/>
                 <a:cs typeface="Arial" pitchFamily="34" charset="-120"/>
               </a:rPr>
-              <a:t>Combined anti-PD-1 with irreversible electroporation relieves immunosuppression …</a:t>
+              <a:t>Cryoablation versus radiofrequency ablation for hepatocellular carcinoma: a syst…</a:t>
             </a:r>
             <a:endParaRPr lang="en-US" sz="1400" dirty="0"/>
           </a:p>
@@ -4893,7 +4842,7 @@
                 <a:ea typeface="Arial" pitchFamily="34" charset="-122"/>
                 <a:cs typeface="Arial" pitchFamily="34" charset="-120"/>
               </a:rPr>
-              <a:t>Radiotherapy versus local ablation therapy for the treatment of hepatocellular c…</a:t>
+              <a:t>Cryoablation versus radiofrequency ablation for hepatocellular carcinoma: a syst…</a:t>
             </a:r>
             <a:endParaRPr lang="en-US" sz="1400" dirty="0"/>
           </a:p>
@@ -4930,7 +4879,7 @@
                 <a:ea typeface="Arial" pitchFamily="34" charset="-122"/>
                 <a:cs typeface="Arial" pitchFamily="34" charset="-120"/>
               </a:rPr>
-              <a:t>… on interventional therapy and immune checkpoint inhibitors (ICIs) in patients …</a:t>
+              <a:t>Radiotherapy versus local ablation therapy for the treatment of hepatocellular c…</a:t>
             </a:r>
             <a:endParaRPr lang="en-US" sz="1400" dirty="0"/>
           </a:p>
@@ -4967,7 +4916,7 @@
                 <a:ea typeface="Arial" pitchFamily="34" charset="-122"/>
                 <a:cs typeface="Arial" pitchFamily="34" charset="-120"/>
               </a:rPr>
-              <a:t>Immune Checkpoint Inhibitors in Hepatocellular Carcinoma Before and After Liver …</a:t>
+              <a:t>… on interventional therapy and immune checkpoint inhibitors (ICIs) in patients …</a:t>
             </a:r>
             <a:endParaRPr lang="en-US" sz="1400" dirty="0"/>
           </a:p>
@@ -5122,7 +5071,7 @@
                   </a:extLst>
                 </a:hlinkClick>
               </a:rPr>
-              <a:t>Circulating extracellular vesicles carrying PD-1, PD-L1 and CTLA-4 inform resistance to anti-PD-L1-based therapy in HCC.</a:t>
+              <a:t>PD-1 blockade unleashes local hepatitis B virus-related B cell response inhibiting hepatocellular carcinoma.</a:t>
             </a:r>
             <a:endParaRPr lang="en-US" sz="2400" dirty="0"/>
           </a:p>
@@ -5158,7 +5107,7 @@
                   <a:srgbClr val="888888"/>
                 </a:solidFill>
               </a:rPr>
-              <a:t>Gut  ·  IF 24.5</a:t>
+              <a:t>Cancer cell  ·  IF 48.8  ·  RCT Phase 2</a:t>
             </a:r>
             <a:endParaRPr lang="en-US" sz="1000" dirty="0"/>
           </a:p>
@@ -5201,7 +5150,7 @@
                 <a:ea typeface="Microsoft JhengHei" pitchFamily="34" charset="-122"/>
                 <a:cs typeface="Microsoft JhengHei" pitchFamily="34" charset="-120"/>
               </a:rPr>
-              <a:t>循環EV攜帶PD-1、PD-L1、CTLA-4。</a:t>
+              <a:t>研究HCC患者的PD-1療法</a:t>
             </a:r>
             <a:endParaRPr lang="en-US" sz="1800" dirty="0"/>
           </a:p>
@@ -5222,7 +5171,7 @@
                 <a:ea typeface="Microsoft JhengHei" pitchFamily="34" charset="-122"/>
                 <a:cs typeface="Microsoft JhengHei" pitchFamily="34" charset="-120"/>
               </a:rPr>
-              <a:t>基線EV-IC水平預測治療反應。</a:t>
+              <a:t>識別T細胞和B細胞反應</a:t>
             </a:r>
             <a:endParaRPr lang="en-US" sz="1800" dirty="0"/>
           </a:p>
@@ -5243,7 +5192,7 @@
                 <a:ea typeface="Microsoft JhengHei" pitchFamily="34" charset="-122"/>
                 <a:cs typeface="Microsoft JhengHei" pitchFamily="34" charset="-120"/>
               </a:rPr>
-              <a:t>動態EV-IC變化顯示獲得性耐藥。</a:t>
+              <a:t>HBcAg觸發局部B細胞活化</a:t>
             </a:r>
             <a:endParaRPr lang="en-US" sz="1800" dirty="0"/>
           </a:p>
@@ -5264,7 +5213,7 @@
                 <a:ea typeface="Microsoft JhengHei" pitchFamily="34" charset="-122"/>
                 <a:cs typeface="Microsoft JhengHei" pitchFamily="34" charset="-120"/>
               </a:rPr>
-              <a:t>液體活檢提供非侵入性生物標記潛力。</a:t>
+              <a:t>補體活化增強抗腫瘤效果</a:t>
             </a:r>
             <a:endParaRPr lang="en-US" sz="1800" dirty="0"/>
           </a:p>
@@ -5285,7 +5234,7 @@
                 <a:ea typeface="Microsoft JhengHei" pitchFamily="34" charset="-122"/>
                 <a:cs typeface="Microsoft JhengHei" pitchFamily="34" charset="-120"/>
               </a:rPr>
-              <a:t>在TKI治療組中無法重現結果。</a:t>
+              <a:t>B細胞免疫提升抗PD-1療效</a:t>
             </a:r>
             <a:endParaRPr lang="en-US" sz="1800" dirty="0"/>
           </a:p>
@@ -5321,7 +5270,7 @@
                   <a:srgbClr val="888888"/>
                 </a:solidFill>
               </a:rPr>
-              <a:t>Gorgulho Jo&amp;#xe3;o, Masood Ramsha, Buescher Gustav et al.. Gut. 2026-08-06 DOI: 10.1136/gutjnl-2025-337617</a:t>
+              <a:t>Chen Shuling, Wang Yuanqi, Chen Jingying et al.. Cancer cell. 2026-08-10 DOI: 10.1016/j.ccell.2026.06.010</a:t>
             </a:r>
             <a:endParaRPr lang="en-US" sz="800" dirty="0"/>
           </a:p>
@@ -5521,7 +5470,7 @@
                   </a:extLst>
                 </a:hlinkClick>
               </a:rPr>
-              <a:t>PCK1 deficiency promotes MASH-HCC progression by 12-HETE-induced CD8+ T cell dysfunction.</a:t>
+              <a:t>Competing risks of treatment discontinuation of atezolizumab plus bevacizumab in unresectable hepatocellular carcinoma.</a:t>
             </a:r>
             <a:endParaRPr lang="en-US" sz="2400" dirty="0"/>
           </a:p>
@@ -5557,7 +5506,7 @@
                   <a:srgbClr val="888888"/>
                 </a:solidFill>
               </a:rPr>
-              <a:t>Gut  ·  IF 24.5</a:t>
+              <a:t>JHEP reports : innovation in hepatology  ·  IF 7.8  ·  Retrospective Study  ·  🌏 Asia</a:t>
             </a:r>
             <a:endParaRPr lang="en-US" sz="1000" dirty="0"/>
           </a:p>
@@ -5600,7 +5549,7 @@
                 <a:ea typeface="Microsoft JhengHei" pitchFamily="34" charset="-122"/>
                 <a:cs typeface="Microsoft JhengHei" pitchFamily="34" charset="-120"/>
               </a:rPr>
-              <a:t>PCK1缺失與MASH-HCC進展相關。</a:t>
+              <a:t>Atezolizumab加bevacizumab為標準療法。</a:t>
             </a:r>
             <a:endParaRPr lang="en-US" sz="1800" dirty="0"/>
           </a:p>
@@ -5621,7 +5570,7 @@
                 <a:ea typeface="Microsoft JhengHei" pitchFamily="34" charset="-122"/>
                 <a:cs typeface="Microsoft JhengHei" pitchFamily="34" charset="-120"/>
               </a:rPr>
-              <a:t>12-HETE引起CD8+ T細胞功能障礙。</a:t>
+              <a:t>停藥原因包括PD和不良事件。</a:t>
             </a:r>
             <a:endParaRPr lang="en-US" sz="1800" dirty="0"/>
           </a:p>
@@ -5642,7 +5591,7 @@
                 <a:ea typeface="Microsoft JhengHei" pitchFamily="34" charset="-122"/>
                 <a:cs typeface="Microsoft JhengHei" pitchFamily="34" charset="-120"/>
               </a:rPr>
-              <a:t>PCK1恢復增強抗PD-1療效。</a:t>
+              <a:t>AFP和ALBI預測停藥原因。</a:t>
             </a:r>
             <a:endParaRPr lang="en-US" sz="1800" dirty="0"/>
           </a:p>
@@ -5678,7 +5627,7 @@
                   <a:srgbClr val="888888"/>
                 </a:solidFill>
               </a:rPr>
-              <a:t>Wu Kang, Li Luo, Liu Yi et al.. Gut. 2026-08-06 DOI: 10.1136/gutjnl-2024-334562</a:t>
+              <a:t>Suda Goki, Sho Takuya, Abe Tamami et al.. JHEP reports : innovation in hepatology. 2026-08-11 DOI: 10.1016/j.jhepr.2026.101988</a:t>
             </a:r>
             <a:endParaRPr lang="en-US" sz="800" dirty="0"/>
           </a:p>
@@ -5878,7 +5827,7 @@
                   </a:extLst>
                 </a:hlinkClick>
               </a:rPr>
-              <a:t>Spatiotemporal dynamics of the tumor microenvironment in hepatocellular carcinoma during combination immunotherapy.</a:t>
+              <a:t>… plus transarterial chemoembolization and PD-1 inhibitors as conversion therapies for unresectable intermediate-advanced hepatocellular carcinoma: a phase 2 trial …</a:t>
             </a:r>
             <a:endParaRPr lang="en-US" sz="2400" dirty="0"/>
           </a:p>
@@ -5914,7 +5863,7 @@
                   <a:srgbClr val="888888"/>
                 </a:solidFill>
               </a:rPr>
-              <a:t>Hepatology communications  ·  IF 5.6  ·  🌏 Asia</a:t>
+              <a:t>… and Targeted Therapy  ·  RCT Phase 2</a:t>
             </a:r>
             <a:endParaRPr lang="en-US" sz="1000" dirty="0"/>
           </a:p>
@@ -5957,7 +5906,7 @@
                 <a:ea typeface="Microsoft JhengHei" pitchFamily="34" charset="-122"/>
                 <a:cs typeface="Microsoft JhengHei" pitchFamily="34" charset="-120"/>
               </a:rPr>
-              <a:t>ATZ/BEV療法腫瘤回歸有限。</a:t>
+              <a:t>TACE 與 PD-1 抑制劑聯合</a:t>
             </a:r>
             <a:endParaRPr lang="en-US" sz="1800" dirty="0"/>
           </a:p>
@@ -5978,7 +5927,7 @@
                 <a:ea typeface="Microsoft JhengHei" pitchFamily="34" charset="-122"/>
                 <a:cs typeface="Microsoft JhengHei" pitchFamily="34" charset="-120"/>
               </a:rPr>
-              <a:t>單細胞RNA測序揭示免疫重塑。</a:t>
+              <a:t>針對 uHCC 患者的第二階段試驗</a:t>
             </a:r>
             <a:endParaRPr lang="en-US" sz="1800" dirty="0"/>
           </a:p>
@@ -5999,49 +5948,7 @@
                 <a:ea typeface="Microsoft JhengHei" pitchFamily="34" charset="-122"/>
                 <a:cs typeface="Microsoft JhengHei" pitchFamily="34" charset="-120"/>
               </a:rPr>
-              <a:t>CD8+ T細胞增加伴隨耗竭標誌。</a:t>
-            </a:r>
-            <a:endParaRPr lang="en-US" sz="1800" dirty="0"/>
-          </a:p>
-          <a:p>
-            <a:pPr marL="342900" indent="-342900">
-              <a:spcAft>
-                <a:spcPts val="800"/>
-              </a:spcAft>
-              <a:buSzPct val="100000"/>
-              <a:buChar char="•"/>
-            </a:pPr>
-            <a:r>
-              <a:rPr lang="en-US" sz="1800" dirty="0">
-                <a:solidFill>
-                  <a:srgbClr val="333333"/>
-                </a:solidFill>
-                <a:latin typeface="Microsoft JhengHei" pitchFamily="34" charset="0"/>
-                <a:ea typeface="Microsoft JhengHei" pitchFamily="34" charset="-122"/>
-                <a:cs typeface="Microsoft JhengHei" pitchFamily="34" charset="-120"/>
-              </a:rPr>
-              <a:t>TIGIT-PVR/NECTIN2軸在治療後激活。</a:t>
-            </a:r>
-            <a:endParaRPr lang="en-US" sz="1800" dirty="0"/>
-          </a:p>
-          <a:p>
-            <a:pPr marL="342900" indent="-342900">
-              <a:spcAft>
-                <a:spcPts val="800"/>
-              </a:spcAft>
-              <a:buSzPct val="100000"/>
-              <a:buChar char="•"/>
-            </a:pPr>
-            <a:r>
-              <a:rPr lang="en-US" sz="1800" dirty="0">
-                <a:solidFill>
-                  <a:srgbClr val="333333"/>
-                </a:solidFill>
-                <a:latin typeface="Microsoft JhengHei" pitchFamily="34" charset="0"/>
-                <a:ea typeface="Microsoft JhengHei" pitchFamily="34" charset="-122"/>
-                <a:cs typeface="Microsoft JhengHei" pitchFamily="34" charset="-120"/>
-              </a:rPr>
-              <a:t>腫瘤邊緣免疫活性更強。</a:t>
+              <a:t>評估與單獨 TACE 的療效</a:t>
             </a:r>
             <a:endParaRPr lang="en-US" sz="1800" dirty="0"/>
           </a:p>
@@ -6077,7 +5984,7 @@
                   <a:srgbClr val="888888"/>
                 </a:solidFill>
               </a:rPr>
-              <a:t>Iwasaki Hitoshi, Itoh Shinji, Toshida Katsuya et al.. Hepatology communications. 2026-08-07 DOI: 10.1097/HC9.0000000000001014</a:t>
+              <a:t>X Zhang, H Cai, W Peng. … and Targeted Therapy. 2026</a:t>
             </a:r>
             <a:endParaRPr lang="en-US" sz="800" dirty="0"/>
           </a:p>
@@ -6277,7 +6184,7 @@
                   </a:extLst>
                 </a:hlinkClick>
               </a:rPr>
-              <a:t>… plus transarterial chemoembolization and PD-1 inhibitors as conversion therapies for unresectable intermediate-advanced hepatocellular carcinoma: a phase 2 trial …</a:t>
+              <a:t>… (PD-1 inhibitor) plus lenvatinib as conversion therapy followed by sequential surgery (SILENSES) for advanced unresectable hepatocellular carcinoma: a phase II …</a:t>
             </a:r>
             <a:endParaRPr lang="en-US" sz="2400" dirty="0"/>
           </a:p>
@@ -6356,7 +6263,7 @@
                 <a:ea typeface="Microsoft JhengHei" pitchFamily="34" charset="-122"/>
                 <a:cs typeface="Microsoft JhengHei" pitchFamily="34" charset="-120"/>
               </a:rPr>
-              <a:t>評估uHCC的組合療法</a:t>
+              <a:t>研究評估PD-1抑制劑與lenvatinib</a:t>
             </a:r>
             <a:endParaRPr lang="en-US" sz="1800" dirty="0"/>
           </a:p>
@@ -6377,7 +6284,7 @@
                 <a:ea typeface="Microsoft JhengHei" pitchFamily="34" charset="-122"/>
                 <a:cs typeface="Microsoft JhengHei" pitchFamily="34" charset="-120"/>
               </a:rPr>
-              <a:t>使用肝動脈化療栓塞(TACE)</a:t>
+              <a:t>針對晚期不可切除HCC患者</a:t>
             </a:r>
             <a:endParaRPr lang="en-US" sz="1800" dirty="0"/>
           </a:p>
@@ -6398,7 +6305,7 @@
                 <a:ea typeface="Microsoft JhengHei" pitchFamily="34" charset="-122"/>
                 <a:cs typeface="Microsoft JhengHei" pitchFamily="34" charset="-120"/>
               </a:rPr>
-              <a:t>增加PD-1抑制劑的效果</a:t>
+              <a:t>轉化治療後進行序列手術</a:t>
             </a:r>
             <a:endParaRPr lang="en-US" sz="1800" dirty="0"/>
           </a:p>
@@ -6419,7 +6326,7 @@
                 <a:ea typeface="Microsoft JhengHei" pitchFamily="34" charset="-122"/>
                 <a:cs typeface="Microsoft JhengHei" pitchFamily="34" charset="-120"/>
               </a:rPr>
-              <a:t>呈現第二期臨床試驗結果</a:t>
+              <a:t>評估長期生存結果</a:t>
             </a:r>
             <a:endParaRPr lang="en-US" sz="1800" dirty="0"/>
           </a:p>
@@ -6440,7 +6347,7 @@
                 <a:ea typeface="Microsoft JhengHei" pitchFamily="34" charset="-122"/>
                 <a:cs typeface="Microsoft JhengHei" pitchFamily="34" charset="-120"/>
               </a:rPr>
-              <a:t>與單獨TACE的比較分析</a:t>
+              <a:t>呈現第二期臨床試驗結果</a:t>
             </a:r>
             <a:endParaRPr lang="en-US" sz="1800" dirty="0"/>
           </a:p>
@@ -6476,7 +6383,7 @@
                   <a:srgbClr val="888888"/>
                 </a:solidFill>
               </a:rPr>
-              <a:t>X Zhang, H Cai, W Peng. … and Targeted Therapy. 2026</a:t>
+              <a:t>S Lu, W Zhang, J Li. … and Targeted Therapy. 2026</a:t>
             </a:r>
             <a:endParaRPr lang="en-US" sz="800" dirty="0"/>
           </a:p>
@@ -6676,7 +6583,7 @@
                   </a:extLst>
                 </a:hlinkClick>
               </a:rPr>
-              <a:t>… (PD-1 inhibitor) plus lenvatinib as conversion therapy followed by sequential surgery (SILENSES) for advanced unresectable hepatocellular carcinoma: a phase II …</a:t>
+              <a:t>Peripheral immune dynamics during treatment predict prognosis in HCC receiving TACE plus ICIs and anti-VEGF/TKIs.</a:t>
             </a:r>
             <a:endParaRPr lang="en-US" sz="2400" dirty="0"/>
           </a:p>
@@ -6712,7 +6619,7 @@
                   <a:srgbClr val="888888"/>
                 </a:solidFill>
               </a:rPr>
-              <a:t>… and Targeted Therapy  ·  RCT Phase 2</a:t>
+              <a:t>Clinical &amp; translational immunology  ·  Retrospective Study  ·  🌏 Asia</a:t>
             </a:r>
             <a:endParaRPr lang="en-US" sz="1000" dirty="0"/>
           </a:p>
@@ -6755,7 +6662,7 @@
                 <a:ea typeface="Microsoft JhengHei" pitchFamily="34" charset="-122"/>
                 <a:cs typeface="Microsoft JhengHei" pitchFamily="34" charset="-120"/>
               </a:rPr>
-              <a:t>研究評估PD-1抑制劑加lenvatinib</a:t>
+              <a:t>研究評估HCC治療中的免疫標記。</a:t>
             </a:r>
             <a:endParaRPr lang="en-US" sz="1800" dirty="0"/>
           </a:p>
@@ -6776,7 +6683,7 @@
                 <a:ea typeface="Microsoft JhengHei" pitchFamily="34" charset="-122"/>
                 <a:cs typeface="Microsoft JhengHei" pitchFamily="34" charset="-120"/>
               </a:rPr>
-              <a:t>針對晚期不可切除HCC患者</a:t>
+              <a:t>患者接受TACE加上ICIs和抗VEGF/TKIs。</a:t>
             </a:r>
             <a:endParaRPr lang="en-US" sz="1800" dirty="0"/>
           </a:p>
@@ -6797,7 +6704,7 @@
                 <a:ea typeface="Microsoft JhengHei" pitchFamily="34" charset="-122"/>
                 <a:cs typeface="Microsoft JhengHei" pitchFamily="34" charset="-120"/>
               </a:rPr>
-              <a:t>轉化治療後進行序列手術</a:t>
+              <a:t>動態免疫變化預測整體存活率。</a:t>
             </a:r>
             <a:endParaRPr lang="en-US" sz="1800" dirty="0"/>
           </a:p>
@@ -6818,7 +6725,7 @@
                 <a:ea typeface="Microsoft JhengHei" pitchFamily="34" charset="-122"/>
                 <a:cs typeface="Microsoft JhengHei" pitchFamily="34" charset="-120"/>
               </a:rPr>
-              <a:t>評估長期生存結果</a:t>
+              <a:t>根據免疫數據開發預後標準圖。</a:t>
             </a:r>
             <a:endParaRPr lang="en-US" sz="1800" dirty="0"/>
           </a:p>
@@ -6839,7 +6746,7 @@
                 <a:ea typeface="Microsoft JhengHei" pitchFamily="34" charset="-122"/>
                 <a:cs typeface="Microsoft JhengHei" pitchFamily="34" charset="-120"/>
               </a:rPr>
-              <a:t>討論第二期臨床試驗結果</a:t>
+              <a:t>識別出三種免疫動態亞型預測結果。</a:t>
             </a:r>
             <a:endParaRPr lang="en-US" sz="1800" dirty="0"/>
           </a:p>
@@ -6875,7 +6782,7 @@
                   <a:srgbClr val="888888"/>
                 </a:solidFill>
               </a:rPr>
-              <a:t>S Lu, W Zhang, J Li. … and Targeted Therapy. 2026</a:t>
+              <a:t>Qin Lihao, Zhu Linzhou, Yang Hao et al.. Clinical &amp; translational immunology. 2026-08-16 DOI: 10.1002/cti2.70115</a:t>
             </a:r>
             <a:endParaRPr lang="en-US" sz="800" dirty="0"/>
           </a:p>
@@ -7075,7 +6982,7 @@
                   </a:extLst>
                 </a:hlinkClick>
               </a:rPr>
-              <a:t>Aggressive Histologic Subtypes Drive Poor Outcomes after Percutaneous Ablation for Early Recurrent Hepatocellular Carcinoma.</a:t>
+              <a:t>Consensus on standardized later-line systemic therapy for hepatocellular carcinoma.</a:t>
             </a:r>
             <a:endParaRPr lang="en-US" sz="2400" dirty="0"/>
           </a:p>
@@ -7111,7 +7018,7 @@
                   <a:srgbClr val="888888"/>
                 </a:solidFill>
               </a:rPr>
-              <a:t>Journal of vascular and interventional radiology : JVIR  ·  Retrospective Study  ·  🌏 Asia</a:t>
+              <a:t>Drug resistance updates : reviews and commentaries in antimicrobial and anticancer chemotherapy  ·  Review  ·  🌏 Asia</a:t>
             </a:r>
             <a:endParaRPr lang="en-US" sz="1000" dirty="0"/>
           </a:p>
@@ -7154,7 +7061,7 @@
                 <a:ea typeface="Microsoft JhengHei" pitchFamily="34" charset="-122"/>
                 <a:cs typeface="Microsoft JhengHei" pitchFamily="34" charset="-120"/>
               </a:rPr>
-              <a:t>侵襲性組織學預測不良結果。</a:t>
+              <a:t>建立後期治療標準共識。</a:t>
             </a:r>
             <a:endParaRPr lang="en-US" sz="1800" dirty="0"/>
           </a:p>
@@ -7175,7 +7082,7 @@
                 <a:ea typeface="Microsoft JhengHei" pitchFamily="34" charset="-122"/>
                 <a:cs typeface="Microsoft JhengHei" pitchFamily="34" charset="-120"/>
               </a:rPr>
-              <a:t>研究納入194名手術後病人。</a:t>
+              <a:t>針對靶向治療失敗問題。</a:t>
             </a:r>
             <a:endParaRPr lang="en-US" sz="1800" dirty="0"/>
           </a:p>
@@ -7196,49 +7103,7 @@
                 <a:ea typeface="Microsoft JhengHei" pitchFamily="34" charset="-122"/>
                 <a:cs typeface="Microsoft JhengHei" pitchFamily="34" charset="-120"/>
               </a:rPr>
-              <a:t>風險模型根據組織學分層。</a:t>
-            </a:r>
-            <a:endParaRPr lang="en-US" sz="1800" dirty="0"/>
-          </a:p>
-          <a:p>
-            <a:pPr marL="342900" indent="-342900">
-              <a:spcAft>
-                <a:spcPts val="800"/>
-              </a:spcAft>
-              <a:buSzPct val="100000"/>
-              <a:buChar char="•"/>
-            </a:pPr>
-            <a:r>
-              <a:rPr lang="en-US" sz="1800" dirty="0">
-                <a:solidFill>
-                  <a:srgbClr val="333333"/>
-                </a:solidFill>
-                <a:latin typeface="Microsoft JhengHei" pitchFamily="34" charset="0"/>
-                <a:ea typeface="Microsoft JhengHei" pitchFamily="34" charset="-122"/>
-                <a:cs typeface="Microsoft JhengHei" pitchFamily="34" charset="-120"/>
-              </a:rPr>
-              <a:t>侵襲性復發模式與組織學相關。</a:t>
-            </a:r>
-            <a:endParaRPr lang="en-US" sz="1800" dirty="0"/>
-          </a:p>
-          <a:p>
-            <a:pPr marL="342900" indent="-342900">
-              <a:spcAft>
-                <a:spcPts val="800"/>
-              </a:spcAft>
-              <a:buSzPct val="100000"/>
-              <a:buChar char="•"/>
-            </a:pPr>
-            <a:r>
-              <a:rPr lang="en-US" sz="1800" dirty="0">
-                <a:solidFill>
-                  <a:srgbClr val="333333"/>
-                </a:solidFill>
-                <a:latin typeface="Microsoft JhengHei" pitchFamily="34" charset="0"/>
-                <a:ea typeface="Microsoft JhengHei" pitchFamily="34" charset="-122"/>
-                <a:cs typeface="Microsoft JhengHei" pitchFamily="34" charset="-120"/>
-              </a:rPr>
-              <a:t>組織學應指導治療計劃。</a:t>
+              <a:t>提出統一評估標準與建議。</a:t>
             </a:r>
             <a:endParaRPr lang="en-US" sz="1800" dirty="0"/>
           </a:p>
@@ -7274,7 +7139,7 @@
                   <a:srgbClr val="888888"/>
                 </a:solidFill>
               </a:rPr>
-              <a:t>Gu Kyowon, Lee Min Woo, Han Seungchul et al.. Journal of vascular and interventional radiology : JVIR. 2026-08-04 DOI: 10.1016/j.jvir.2026.108998</a:t>
+              <a:t>Yu Hongli, Cheng Jiamin, Xia Feng et al.. Drug resistance updates : reviews and commentaries in antimicrobial and anticancer chemotherapy. 2026-08-14 DOI: 10.1016/j.drup.2026.101468</a:t>
             </a:r>
             <a:endParaRPr lang="en-US" sz="800" dirty="0"/>
           </a:p>
@@ -7474,7 +7339,7 @@
                   </a:extLst>
                 </a:hlinkClick>
               </a:rPr>
-              <a:t>Combined anti-PD-1 with irreversible electroporation relieves immunosuppression and reduces hepatocellular carcinoma regrowth.</a:t>
+              <a:t>Cryoablation versus radiofrequency ablation for hepatocellular carcinoma: a systematic review and meta-analysis.</a:t>
             </a:r>
             <a:endParaRPr lang="en-US" sz="2400" dirty="0"/>
           </a:p>
@@ -7510,7 +7375,7 @@
                   <a:srgbClr val="888888"/>
                 </a:solidFill>
               </a:rPr>
-              <a:t>JHEP reports : innovation in hepatology  ·  IF 7.8  ·  Prospective Study</a:t>
+              <a:t>International journal of hyperthermia : the official journal of European Society for Hyperthermic Oncology, North American Hyperthermia Group  ·  Meta-Analysis</a:t>
             </a:r>
             <a:endParaRPr lang="en-US" sz="1000" dirty="0"/>
           </a:p>
@@ -7553,7 +7418,7 @@
                 <a:ea typeface="Microsoft JhengHei" pitchFamily="34" charset="-122"/>
                 <a:cs typeface="Microsoft JhengHei" pitchFamily="34" charset="-120"/>
               </a:rPr>
-              <a:t>IRE引發免疫微環境變化。</a:t>
+              <a:t>Cryoablation 完全消融率較高。</a:t>
             </a:r>
             <a:endParaRPr lang="en-US" sz="1800" dirty="0"/>
           </a:p>
@@ -7574,7 +7439,7 @@
                 <a:ea typeface="Microsoft JhengHei" pitchFamily="34" charset="-122"/>
                 <a:cs typeface="Microsoft JhengHei" pitchFamily="34" charset="-120"/>
               </a:rPr>
-              <a:t>聯合anti-PD-1減少腫瘤再生。</a:t>
+              <a:t>Cryoablation 內部疼痛較低。</a:t>
             </a:r>
             <a:endParaRPr lang="en-US" sz="1800" dirty="0"/>
           </a:p>
@@ -7595,7 +7460,7 @@
                 <a:ea typeface="Microsoft JhengHei" pitchFamily="34" charset="-122"/>
                 <a:cs typeface="Microsoft JhengHei" pitchFamily="34" charset="-120"/>
               </a:rPr>
-              <a:t>PMN-MDSCs促進CD8+ T細胞耗竭。</a:t>
+              <a:t>兩種治療無顯著生存差異。</a:t>
             </a:r>
             <a:endParaRPr lang="en-US" sz="1800" dirty="0"/>
           </a:p>
@@ -7616,7 +7481,7 @@
                 <a:ea typeface="Microsoft JhengHei" pitchFamily="34" charset="-122"/>
                 <a:cs typeface="Microsoft JhengHei" pitchFamily="34" charset="-120"/>
               </a:rPr>
-              <a:t>YTHDF2降解HCC中的CXCL10 mRNA。</a:t>
+              <a:t>無明顯併發症差異。</a:t>
             </a:r>
             <a:endParaRPr lang="en-US" sz="1800" dirty="0"/>
           </a:p>
@@ -7637,7 +7502,7 @@
                 <a:ea typeface="Microsoft JhengHei" pitchFamily="34" charset="-122"/>
                 <a:cs typeface="Microsoft JhengHei" pitchFamily="34" charset="-120"/>
               </a:rPr>
-              <a:t>需臨床試驗驗證效果。</a:t>
+              <a:t>安全性兩者相似。</a:t>
             </a:r>
             <a:endParaRPr lang="en-US" sz="1800" dirty="0"/>
           </a:p>
@@ -7673,7 +7538,7 @@
                   <a:srgbClr val="888888"/>
                 </a:solidFill>
               </a:rPr>
-              <a:t>Huo Jihui, Wang Lina, Lei Kai et al.. JHEP reports : innovation in hepatology. 2026-08-03 DOI: 10.1016/j.jhepr.2026.101977</a:t>
+              <a:t>Mao Kui, Wang Youqing, Yao Weijun et al.. International journal of hyperthermia : the official journal of European Society for Hyperthermic Oncology, North American Hyperthermia Group. 2026-08-13 DOI: 10.1080/02656736.2026.2713200</a:t>
             </a:r>
             <a:endParaRPr lang="en-US" sz="800" dirty="0"/>
           </a:p>

--- a/docs/digest-zh.pptx
+++ b/docs/digest-zh.pptx
@@ -2269,7 +2269,7 @@
                   <a:srgbClr val="888888"/>
                 </a:solidFill>
               </a:rPr>
-              <a:t>2026-08-10 — 2026-08-17</a:t>
+              <a:t>2026-08-17 — 2026-08-24</a:t>
             </a:r>
             <a:endParaRPr lang="en-US" sz="1400" dirty="0"/>
           </a:p>
@@ -2539,7 +2539,7 @@
                 <a:ea typeface="Microsoft JhengHei" pitchFamily="34" charset="-122"/>
                 <a:cs typeface="Microsoft JhengHei" pitchFamily="34" charset="-120"/>
               </a:rPr>
-              <a:t>Cryoablation有效控制腫瘤。</a:t>
+              <a:t>冷凍消融有效控制腫瘤。</a:t>
             </a:r>
             <a:endParaRPr lang="en-US" sz="1800" dirty="0"/>
           </a:p>
@@ -2560,7 +2560,7 @@
                 <a:ea typeface="Microsoft JhengHei" pitchFamily="34" charset="-122"/>
                 <a:cs typeface="Microsoft JhengHei" pitchFamily="34" charset="-120"/>
               </a:rPr>
-              <a:t>與radiofrequency ablation比較。</a:t>
+              <a:t>與射頻消融比較效果。</a:t>
             </a:r>
             <a:endParaRPr lang="en-US" sz="1800" dirty="0"/>
           </a:p>
@@ -2581,7 +2581,49 @@
                 <a:ea typeface="Microsoft JhengHei" pitchFamily="34" charset="-122"/>
                 <a:cs typeface="Microsoft JhengHei" pitchFamily="34" charset="-120"/>
               </a:rPr>
-              <a:t>針對早期HCC患者研究。</a:t>
+              <a:t>重點在早期肝細胞癌。</a:t>
+            </a:r>
+            <a:endParaRPr lang="en-US" sz="1800" dirty="0"/>
+          </a:p>
+          <a:p>
+            <a:pPr marL="342900" indent="-342900">
+              <a:spcAft>
+                <a:spcPts val="800"/>
+              </a:spcAft>
+              <a:buSzPct val="100000"/>
+              <a:buChar char="•"/>
+            </a:pPr>
+            <a:r>
+              <a:rPr lang="en-US" sz="1800" dirty="0">
+                <a:solidFill>
+                  <a:srgbClr val="333333"/>
+                </a:solidFill>
+                <a:latin typeface="Microsoft JhengHei" pitchFamily="34" charset="0"/>
+                <a:ea typeface="Microsoft JhengHei" pitchFamily="34" charset="-122"/>
+                <a:cs typeface="Microsoft JhengHei" pitchFamily="34" charset="-120"/>
+              </a:rPr>
+              <a:t>治療結果的系統評估。</a:t>
+            </a:r>
+            <a:endParaRPr lang="en-US" sz="1800" dirty="0"/>
+          </a:p>
+          <a:p>
+            <a:pPr marL="342900" indent="-342900">
+              <a:spcAft>
+                <a:spcPts val="800"/>
+              </a:spcAft>
+              <a:buSzPct val="100000"/>
+              <a:buChar char="•"/>
+            </a:pPr>
+            <a:r>
+              <a:rPr lang="en-US" sz="1800" dirty="0">
+                <a:solidFill>
+                  <a:srgbClr val="333333"/>
+                </a:solidFill>
+                <a:latin typeface="Microsoft JhengHei" pitchFamily="34" charset="0"/>
+                <a:ea typeface="Microsoft JhengHei" pitchFamily="34" charset="-122"/>
+                <a:cs typeface="Microsoft JhengHei" pitchFamily="34" charset="-120"/>
+              </a:rPr>
+              <a:t>主要腫瘤&gt;2公分的研究。</a:t>
             </a:r>
             <a:endParaRPr lang="en-US" sz="1800" dirty="0"/>
           </a:p>
@@ -2917,7 +2959,7 @@
                 <a:ea typeface="Microsoft JhengHei" pitchFamily="34" charset="-122"/>
                 <a:cs typeface="Microsoft JhengHei" pitchFamily="34" charset="-120"/>
               </a:rPr>
-              <a:t>針對肝細胞癌（HCC）治療</a:t>
+              <a:t>聚焦肝細胞癌治療</a:t>
             </a:r>
             <a:endParaRPr lang="en-US" sz="1800" dirty="0"/>
           </a:p>
@@ -2938,7 +2980,7 @@
                 <a:ea typeface="Microsoft JhengHei" pitchFamily="34" charset="-122"/>
                 <a:cs typeface="Microsoft JhengHei" pitchFamily="34" charset="-120"/>
               </a:rPr>
-              <a:t>評估局部無進展生存期</a:t>
+              <a:t>局部無進展生存分析</a:t>
             </a:r>
             <a:endParaRPr lang="en-US" sz="1800" dirty="0"/>
           </a:p>
@@ -2959,7 +3001,7 @@
                 <a:ea typeface="Microsoft JhengHei" pitchFamily="34" charset="-122"/>
                 <a:cs typeface="Microsoft JhengHei" pitchFamily="34" charset="-120"/>
               </a:rPr>
-              <a:t>包含射頻和微波消融</a:t>
+              <a:t>包含射頻及微波消融</a:t>
             </a:r>
             <a:endParaRPr lang="en-US" sz="1800" dirty="0"/>
           </a:p>
@@ -3216,7 +3258,7 @@
                   </a:extLst>
                 </a:hlinkClick>
               </a:rPr>
-              <a:t>… on interventional therapy and immune checkpoint inhibitors (ICIs) in patients with intermediate-and advanced-stage hepatocellular carcinoma: a systematic review …</a:t>
+              <a:t>Kdm2a histone demethylase ablation restores anti-tumor immunogenicity in liver cancer.</a:t>
             </a:r>
             <a:endParaRPr lang="en-US" sz="2400" dirty="0"/>
           </a:p>
@@ -3252,7 +3294,7 @@
                   <a:srgbClr val="888888"/>
                 </a:solidFill>
               </a:rPr>
-              <a:t>… , Immunotherapy  ·  Systematic Review</a:t>
+              <a:t>British journal of cancer  ·  IF 6.4  ·  Basic Research</a:t>
             </a:r>
             <a:endParaRPr lang="en-US" sz="1000" dirty="0"/>
           </a:p>
@@ -3295,7 +3337,7 @@
                 <a:ea typeface="Microsoft JhengHei" pitchFamily="34" charset="-122"/>
                 <a:cs typeface="Microsoft JhengHei" pitchFamily="34" charset="-120"/>
               </a:rPr>
-              <a:t>聯合療法在HCC中展現潛力。</a:t>
+              <a:t>KDM2A沉默增強免疫通路。</a:t>
             </a:r>
             <a:endParaRPr lang="en-US" sz="1800" dirty="0"/>
           </a:p>
@@ -3316,7 +3358,7 @@
                 <a:ea typeface="Microsoft JhengHei" pitchFamily="34" charset="-122"/>
                 <a:cs typeface="Microsoft JhengHei" pitchFamily="34" charset="-120"/>
               </a:rPr>
-              <a:t>ICIs提升介入治療效果。</a:t>
+              <a:t>高KDM2A與腫瘤分化差相關。</a:t>
             </a:r>
             <a:endParaRPr lang="en-US" sz="1800" dirty="0"/>
           </a:p>
@@ -3337,7 +3379,7 @@
                 <a:ea typeface="Microsoft JhengHei" pitchFamily="34" charset="-122"/>
                 <a:cs typeface="Microsoft JhengHei" pitchFamily="34" charset="-120"/>
               </a:rPr>
-              <a:t>系統評估強調臨床結果。</a:t>
+              <a:t>KDM2A缺失增加CD8+ T細胞浸潤。</a:t>
             </a:r>
             <a:endParaRPr lang="en-US" sz="1800" dirty="0"/>
           </a:p>
@@ -3373,7 +3415,7 @@
                   <a:srgbClr val="888888"/>
                 </a:solidFill>
               </a:rPr>
-              <a:t>J Su, Y Su, R Mai. … , Immunotherapy. 2026</a:t>
+              <a:t>Gragnani Laura, Lulli Matteo, Caini Patrizio et al.. British journal of cancer. 2026-08-19 DOI: 10.1038/s41416-026-03566-z</a:t>
             </a:r>
             <a:endParaRPr lang="en-US" sz="800" dirty="0"/>
           </a:p>
@@ -3590,7 +3632,7 @@
                   <a:srgbClr val="FFFFFF"/>
                 </a:solidFill>
               </a:rPr>
-              <a:t>1. **PD-1抑制劑的免疫機制**  </a:t>
+              <a:t>1. **免疫治療的潛力**  </a:t>
             </a:r>
             <a:endParaRPr lang="en-US" sz="1200" dirty="0"/>
           </a:p>
@@ -3607,7 +3649,7 @@
                   <a:srgbClr val="FFFFFF"/>
                 </a:solidFill>
               </a:rPr>
-              <a:t>   PD-1抑制劑不僅透過效應T細胞激活來發揮作用，還能釋放與乙型肝炎病毒相關的B細胞反應，顯示出其在肝細胞癌（HCC）治療中的多重機制。  </a:t>
+              <a:t>   Immune checkpoint inhibitors (ICIs) have demonstrated improved outcomes in advanced hepatocellular carcinoma (HCC) and are being explored in earlier stages, indicating their potential in enhancing survival rates.  </a:t>
             </a:r>
             <a:endParaRPr lang="en-US" sz="1200" dirty="0"/>
           </a:p>
@@ -3624,7 +3666,7 @@
                   <a:srgbClr val="FFFFFF"/>
                 </a:solidFill>
               </a:rPr>
-              <a:t>   **The PD-1 blockade not only activates effector T cells but also unleashes hepatitis B virus-related B cell responses, highlighting its multifaceted mechanisms in HCC treatment.**</a:t>
+              <a:t>   免疫檢查點抑制劑（ICIs）在晚期肝細胞癌（HCC）中顯示出改善預後的潛力，並且正在早期階段進行探索，顯示出提升生存率的可能性。</a:t>
             </a:r>
             <a:endParaRPr lang="en-US" sz="1200" dirty="0"/>
           </a:p>
@@ -3650,7 +3692,7 @@
                   <a:srgbClr val="FFFFFF"/>
                 </a:solidFill>
               </a:rPr>
-              <a:t>2. **治療中斷的競爭風險**  </a:t>
+              <a:t>2. **局部消融與系統治療的結合**  </a:t>
             </a:r>
             <a:endParaRPr lang="en-US" sz="1200" dirty="0"/>
           </a:p>
@@ -3667,7 +3709,7 @@
                   <a:srgbClr val="FFFFFF"/>
                 </a:solidFill>
               </a:rPr>
-              <a:t>   對於不可切除的肝細胞癌，Atezolizumab與Bevacizumab的聯合療法的治療中斷原因多樣，傳統生存終點無法充分捕捉各種原因的時間變化。  </a:t>
+              <a:t>   The combination of local ablation therapies with systemic treatments, such as atezolizumab and bevacizumab, may offer synergistic effects, enhancing treatment efficacy for unresectable HCC.  </a:t>
             </a:r>
             <a:endParaRPr lang="en-US" sz="1200" dirty="0"/>
           </a:p>
@@ -3684,7 +3726,7 @@
                   <a:srgbClr val="FFFFFF"/>
                 </a:solidFill>
               </a:rPr>
-              <a:t>   **The reasons for treatment discontinuation in unresectable HCC patients receiving Atezolizumab plus Bevacizumab are diverse, and conventional survival endpoints fail to capture the time-varying probabilities of each cause.**</a:t>
+              <a:t>   將局部消融療法與系統性治療（如阿特珠單抗和貝伐單抗）結合，可能會產生協同效應，提高無法切除的HCC的治療效果。</a:t>
             </a:r>
             <a:endParaRPr lang="en-US" sz="1200" dirty="0"/>
           </a:p>
@@ -3710,7 +3752,7 @@
                   <a:srgbClr val="FFFFFF"/>
                 </a:solidFill>
               </a:rPr>
-              <a:t>3. **轉化療法的潛力**  </a:t>
+              <a:t>3. **生物標記的預測能力**  </a:t>
             </a:r>
             <a:endParaRPr lang="en-US" sz="1200" dirty="0"/>
           </a:p>
@@ -3727,7 +3769,7 @@
                   <a:srgbClr val="FFFFFF"/>
                 </a:solidFill>
               </a:rPr>
-              <a:t>   結合經動脈化療栓塞（TACE）與PD-1抑制劑的轉化療法顯示出對不可切除中晚期肝細胞癌的潛在益處，提供了新的治療選擇。  </a:t>
+              <a:t>   Baseline circulating and tumor immune features can predict responses to therapies, highlighting the importance of personalized treatment strategies in HCC management.  </a:t>
             </a:r>
             <a:endParaRPr lang="en-US" sz="1200" dirty="0"/>
           </a:p>
@@ -3744,7 +3786,7 @@
                   <a:srgbClr val="FFFFFF"/>
                 </a:solidFill>
               </a:rPr>
-              <a:t>   **Combination therapies involving transarterial chemoembolization (TACE) and PD-1 inhibitors show potential benefits for unresectable intermediate-advanced HCC, offering new treatment options.**</a:t>
+              <a:t>   基線循環和腫瘤免疫特徵可以預測對療法的反應，凸顯了個性化治療策略在HCC管理中的重要性。</a:t>
             </a:r>
             <a:endParaRPr lang="en-US" sz="1200" dirty="0"/>
           </a:p>
@@ -3770,7 +3812,7 @@
                   <a:srgbClr val="FFFFFF"/>
                 </a:solidFill>
               </a:rPr>
-              <a:t>4. **外科手術後的長期生存結果**  </a:t>
+              <a:t>4. **手術時機的重新評估**  </a:t>
             </a:r>
             <a:endParaRPr lang="en-US" sz="1200" dirty="0"/>
           </a:p>
@@ -3787,7 +3829,7 @@
                   <a:srgbClr val="FFFFFF"/>
                 </a:solidFill>
               </a:rPr>
-              <a:t>   在不可切除的肝細胞癌患者中，經過PD-1抑制劑與Lenvatinib的轉化療法後，隨後進行的外科手術顯示出良好的長期生存結果。  </a:t>
+              <a:t>   Resection after systemic therapy may provide additional survival benefits, suggesting a need to reevaluate surgical timing in the treatment of advanced HCC.  </a:t>
             </a:r>
             <a:endParaRPr lang="en-US" sz="1200" dirty="0"/>
           </a:p>
@@ -3804,7 +3846,7 @@
                   <a:srgbClr val="FFFFFF"/>
                 </a:solidFill>
               </a:rPr>
-              <a:t>   **In patients with unresectable HCC, sequential surgery following conversion therapy with PD-1 inhibitors and Lenvatinib demonstrates favorable long-term survival outcomes.**</a:t>
+              <a:t>   在系統治療後進行切除可能提供額外的生存益處，這表明需要重新評估在晚期HCC治療中的手術時機。</a:t>
             </a:r>
             <a:endParaRPr lang="en-US" sz="1200" dirty="0"/>
           </a:p>
@@ -3830,7 +3872,7 @@
                   <a:srgbClr val="FFFFFF"/>
                 </a:solidFill>
               </a:rPr>
-              <a:t>5. **外周免疫動態的預後價值**  </a:t>
+              <a:t>5. **多學科治療的必要性**  </a:t>
             </a:r>
             <a:endParaRPr lang="en-US" sz="1200" dirty="0"/>
           </a:p>
@@ -3847,24 +3889,7 @@
                   <a:srgbClr val="FFFFFF"/>
                 </a:solidFill>
               </a:rPr>
-              <a:t>   外周免疫標記物的靜態和動態變化在接受TACE及免疫檢查點抑制劑的HCC患者中，能預測預後，強調了免疫監測的重要性。  </a:t>
-            </a:r>
-            <a:endParaRPr lang="en-US" sz="1200" dirty="0"/>
-          </a:p>
-          <a:p>
-            <a:pPr indent="0" marL="0">
-              <a:lnSpc>
-                <a:spcPct val="150000"/>
-              </a:lnSpc>
-              <a:buNone/>
-            </a:pPr>
-            <a:r>
-              <a:rPr lang="en-US" sz="1200" dirty="0">
-                <a:solidFill>
-                  <a:srgbClr val="FFFFFF"/>
-                </a:solidFill>
-              </a:rPr>
-              <a:t>   **Peripheral immune markers' static and dynamic changes can predict prognosis in HCC patients receiving TACE and immune checkpoint inhibitors, emphasizing the importance of immune monitoring.**</a:t>
+              <a:t>   A multidisciplinary approach integrating surgery, systemic therapy, and local ablation is essential for optimizing outcomes in patients with advanced HCC.</a:t>
             </a:r>
             <a:endParaRPr lang="en-US" sz="1200" dirty="0"/>
           </a:p>
@@ -4010,7 +4035,7 @@
                   <a:srgbClr val="FFFFFF"/>
                 </a:solidFill>
               </a:rPr>
-              <a:t>### 未來研究方向 (Future Research Directions)</a:t>
+              <a:t>整合外科手術、系統治療和局部消融的多學科方法對於優化晚期HCC患者的治療結果至關重要。</a:t>
             </a:r>
             <a:endParaRPr lang="en-US" sz="1200" dirty="0"/>
           </a:p>
@@ -4036,7 +4061,7 @@
                   <a:srgbClr val="FFFFFF"/>
                 </a:solidFill>
               </a:rPr>
-              <a:t>1. **探索PD-1抑制劑的多重作用**  </a:t>
+              <a:t>### 未來研究方向 (Future Research Directions)</a:t>
             </a:r>
             <a:endParaRPr lang="en-US" sz="1200" dirty="0"/>
           </a:p>
@@ -4047,14 +4072,6 @@
               </a:lnSpc>
               <a:buNone/>
             </a:pPr>
-            <a:r>
-              <a:rPr lang="en-US" sz="1200" dirty="0">
-                <a:solidFill>
-                  <a:srgbClr val="FFFFFF"/>
-                </a:solidFill>
-              </a:rPr>
-              <a:t>   進一步研究PD-1抑制劑在HCC治療中的多重免疫機制，以開發更有效的治療策略。  </a:t>
-            </a:r>
             <a:endParaRPr lang="en-US" sz="1200" dirty="0"/>
           </a:p>
           <a:p>
@@ -4070,7 +4087,7 @@
                   <a:srgbClr val="FFFFFF"/>
                 </a:solidFill>
               </a:rPr>
-              <a:t>   **Further exploration of the multifaceted immune mechanisms of PD-1 inhibitors in HCC treatment is needed to develop more effective therapeutic strategies.**</a:t>
+              <a:t>1. **早期階段免疫治療的臨床試驗**  </a:t>
             </a:r>
             <a:endParaRPr lang="en-US" sz="1200" dirty="0"/>
           </a:p>
@@ -4081,6 +4098,14 @@
               </a:lnSpc>
               <a:buNone/>
             </a:pPr>
+            <a:r>
+              <a:rPr lang="en-US" sz="1200" dirty="0">
+                <a:solidFill>
+                  <a:srgbClr val="FFFFFF"/>
+                </a:solidFill>
+              </a:rPr>
+              <a:t>   Further clinical trials are needed to assess the efficacy of ICIs in early-stage HCC, potentially changing the treatment landscape.  </a:t>
+            </a:r>
             <a:endParaRPr lang="en-US" sz="1200" dirty="0"/>
           </a:p>
           <a:p>
@@ -4096,7 +4121,7 @@
                   <a:srgbClr val="FFFFFF"/>
                 </a:solidFill>
               </a:rPr>
-              <a:t>2. **治療中斷原因的深入分析**  </a:t>
+              <a:t>   需要進一步的臨床試驗來評估ICIs在早期HCC中的療效，這可能會改變治療格局。</a:t>
             </a:r>
             <a:endParaRPr lang="en-US" sz="1200" dirty="0"/>
           </a:p>
@@ -4107,14 +4132,6 @@
               </a:lnSpc>
               <a:buNone/>
             </a:pPr>
-            <a:r>
-              <a:rPr lang="en-US" sz="1200" dirty="0">
-                <a:solidFill>
-                  <a:srgbClr val="FFFFFF"/>
-                </a:solidFill>
-              </a:rPr>
-              <a:t>   針對不可切除HCC患者的治療中斷原因進行深入分析，尋求改善治療持續性的策略。  </a:t>
-            </a:r>
             <a:endParaRPr lang="en-US" sz="1200" dirty="0"/>
           </a:p>
           <a:p>
@@ -4130,7 +4147,7 @@
                   <a:srgbClr val="FFFFFF"/>
                 </a:solidFill>
               </a:rPr>
-              <a:t>   **In-depth analyses of the reasons for treatment discontinuation in unresectable HCC patients are necessary to identify strategies for improving treatment adherence.**</a:t>
+              <a:t>2. **個性化治療的生物標記研究**  </a:t>
             </a:r>
             <a:endParaRPr lang="en-US" sz="1200" dirty="0"/>
           </a:p>
@@ -4141,6 +4158,14 @@
               </a:lnSpc>
               <a:buNone/>
             </a:pPr>
+            <a:r>
+              <a:rPr lang="en-US" sz="1200" dirty="0">
+                <a:solidFill>
+                  <a:srgbClr val="FFFFFF"/>
+                </a:solidFill>
+              </a:rPr>
+              <a:t>   Investigating biomarkers for predicting treatment responses will be crucial for developing personalized therapeutic strategies in HCC.  </a:t>
+            </a:r>
             <a:endParaRPr lang="en-US" sz="1200" dirty="0"/>
           </a:p>
           <a:p>
@@ -4156,7 +4181,7 @@
                   <a:srgbClr val="FFFFFF"/>
                 </a:solidFill>
               </a:rPr>
-              <a:t>3. **轉化療法的長期隨訪研究**  </a:t>
+              <a:t>   研究預測治療反應的生物標記將對開發HCC的個性化治療策略至關重要。</a:t>
             </a:r>
             <a:endParaRPr lang="en-US" sz="1200" dirty="0"/>
           </a:p>
@@ -4167,14 +4192,6 @@
               </a:lnSpc>
               <a:buNone/>
             </a:pPr>
-            <a:r>
-              <a:rPr lang="en-US" sz="1200" dirty="0">
-                <a:solidFill>
-                  <a:srgbClr val="FFFFFF"/>
-                </a:solidFill>
-              </a:rPr>
-              <a:t>   進行長期隨訪研究，以評估轉化療法（如TACE與PD-1抑制劑聯合療法）的持續效果及其對生存率的影響。  </a:t>
-            </a:r>
             <a:endParaRPr lang="en-US" sz="1200" dirty="0"/>
           </a:p>
           <a:p>
@@ -4190,7 +4207,7 @@
                   <a:srgbClr val="FFFFFF"/>
                 </a:solidFill>
               </a:rPr>
-              <a:t>   **Long-term follow-up studies are needed to assess the sustained effects of conversion therapies (e.g., TACE combined with PD-1 inhibitors) and their impact on survival rates.**</a:t>
+              <a:t>3. **局部消融技術的優化**  </a:t>
             </a:r>
             <a:endParaRPr lang="en-US" sz="1200" dirty="0"/>
           </a:p>
@@ -4201,6 +4218,14 @@
               </a:lnSpc>
               <a:buNone/>
             </a:pPr>
+            <a:r>
+              <a:rPr lang="en-US" sz="1200" dirty="0">
+                <a:solidFill>
+                  <a:srgbClr val="FFFFFF"/>
+                </a:solidFill>
+              </a:rPr>
+              <a:t>   Future studies should focus on optimizing local ablation techniques and their combinations with systemic therapies to maximize patient outcomes.  </a:t>
+            </a:r>
             <a:endParaRPr lang="en-US" sz="1200" dirty="0"/>
           </a:p>
           <a:p>
@@ -4216,7 +4241,7 @@
                   <a:srgbClr val="FFFFFF"/>
                 </a:solidFill>
               </a:rPr>
-              <a:t>4. **個體化免疫監測的發展**  </a:t>
+              <a:t>   未來的研究應集中於優化局部消融技術及其與系統性療法的結合，以最大化患者的治療結果。</a:t>
             </a:r>
             <a:endParaRPr lang="en-US" sz="1200" dirty="0"/>
           </a:p>
@@ -4227,14 +4252,6 @@
               </a:lnSpc>
               <a:buNone/>
             </a:pPr>
-            <a:r>
-              <a:rPr lang="en-US" sz="1200" dirty="0">
-                <a:solidFill>
-                  <a:srgbClr val="FFFFFF"/>
-                </a:solidFill>
-              </a:rPr>
-              <a:t>   發展個體化的免疫監測方法，以便更好地預測HCC患者對不同治療的反應。  </a:t>
-            </a:r>
             <a:endParaRPr lang="en-US" sz="1200" dirty="0"/>
           </a:p>
           <a:p>
@@ -4250,7 +4267,7 @@
                   <a:srgbClr val="FFFFFF"/>
                 </a:solidFill>
               </a:rPr>
-              <a:t>   **The development of personalized immune monitoring methods is essential to better predict HCC patients' responses to various treatments.**</a:t>
+              <a:t>4. **多學科治療模式的評估**  </a:t>
             </a:r>
             <a:endParaRPr lang="en-US" sz="1200" dirty="0"/>
           </a:p>
@@ -4261,6 +4278,14 @@
               </a:lnSpc>
               <a:buNone/>
             </a:pPr>
+            <a:r>
+              <a:rPr lang="en-US" sz="1200" dirty="0">
+                <a:solidFill>
+                  <a:srgbClr val="FFFFFF"/>
+                </a:solidFill>
+              </a:rPr>
+              <a:t>   Evaluating the effectiveness of multidisciplinary treatment approaches in HCC management will provide insights into best practices and improve patient care.  </a:t>
+            </a:r>
             <a:endParaRPr lang="en-US" sz="1200" dirty="0"/>
           </a:p>
           <a:p>
@@ -4276,7 +4301,7 @@
                   <a:srgbClr val="FFFFFF"/>
                 </a:solidFill>
               </a:rPr>
-              <a:t>5. **標準化後線治療的共識建立**  </a:t>
+              <a:t>   評估多學科治療模式在HCC管理中的有效性將提供最佳實踐的見解並改善患者護理。</a:t>
             </a:r>
             <a:endParaRPr lang="en-US" sz="1200" dirty="0"/>
           </a:p>
@@ -4287,14 +4312,6 @@
               </a:lnSpc>
               <a:buNone/>
             </a:pPr>
-            <a:r>
-              <a:rPr lang="en-US" sz="1200" dirty="0">
-                <a:solidFill>
-                  <a:srgbClr val="FFFFFF"/>
-                </a:solidFill>
-              </a:rPr>
-              <a:t>   在HCC的後線治療中建立標準化的共識，以應對一線治療失敗後的臨床挑戰。  </a:t>
-            </a:r>
             <a:endParaRPr lang="en-US" sz="1200" dirty="0"/>
           </a:p>
           <a:p>
@@ -4310,7 +4327,41 @@
                   <a:srgbClr val="FFFFFF"/>
                 </a:solidFill>
               </a:rPr>
-              <a:t>   **Establishing a standardized consensus for later-line therapies in HCC is crucial to address clinical challenges following first-line treatment failures.**</a:t>
+              <a:t>5. **免疫逃逸機制的深入研究**  </a:t>
+            </a:r>
+            <a:endParaRPr lang="en-US" sz="1200" dirty="0"/>
+          </a:p>
+          <a:p>
+            <a:pPr indent="0" marL="0">
+              <a:lnSpc>
+                <a:spcPct val="150000"/>
+              </a:lnSpc>
+              <a:buNone/>
+            </a:pPr>
+            <a:r>
+              <a:rPr lang="en-US" sz="1200" dirty="0">
+                <a:solidFill>
+                  <a:srgbClr val="FFFFFF"/>
+                </a:solidFill>
+              </a:rPr>
+              <a:t>   Understanding the mechanisms of immune evasion in liver cancer will be essential for developing new therapeutic strategies that enhance the efficacy of existing treatments.  </a:t>
+            </a:r>
+            <a:endParaRPr lang="en-US" sz="1200" dirty="0"/>
+          </a:p>
+          <a:p>
+            <a:pPr indent="0" marL="0">
+              <a:lnSpc>
+                <a:spcPct val="150000"/>
+              </a:lnSpc>
+              <a:buNone/>
+            </a:pPr>
+            <a:r>
+              <a:rPr lang="en-US" sz="1200" dirty="0">
+                <a:solidFill>
+                  <a:srgbClr val="FFFFFF"/>
+                </a:solidFill>
+              </a:rPr>
+              <a:t>   理解肝癌中的免疫逃逸機制對於開發增強現有治療效果的新療法至關重要。</a:t>
             </a:r>
             <a:endParaRPr lang="en-US" sz="1200" dirty="0"/>
           </a:p>
@@ -4583,7 +4634,7 @@
                 <a:ea typeface="Arial" pitchFamily="34" charset="-122"/>
                 <a:cs typeface="Arial" pitchFamily="34" charset="-120"/>
               </a:rPr>
-              <a:t>PD-1 blockade unleashes local hepatitis B virus-related B cell response inhibiti…</a:t>
+              <a:t>Liver resection after atezolizumab and bevacizumab versus maintenance therapy fo…</a:t>
             </a:r>
             <a:endParaRPr lang="en-US" sz="1400" dirty="0"/>
           </a:p>
@@ -4620,7 +4671,7 @@
                 <a:ea typeface="Arial" pitchFamily="34" charset="-122"/>
                 <a:cs typeface="Arial" pitchFamily="34" charset="-120"/>
               </a:rPr>
-              <a:t>Competing risks of treatment discontinuation of atezolizumab plus bevacizumab in…</a:t>
+              <a:t>Integrating efficacy and safety profile in advanced HCC: A network meta-analysis…</a:t>
             </a:r>
             <a:endParaRPr lang="en-US" sz="1400" dirty="0"/>
           </a:p>
@@ -4657,7 +4708,7 @@
                 <a:ea typeface="Arial" pitchFamily="34" charset="-122"/>
                 <a:cs typeface="Arial" pitchFamily="34" charset="-120"/>
               </a:rPr>
-              <a:t>… plus transarterial chemoembolization and PD-1 inhibitors as conversion therapi…</a:t>
+              <a:t>Adjuvant and neoadjuvant therapies in HCC: Time to go perioperative?</a:t>
             </a:r>
             <a:endParaRPr lang="en-US" sz="1400" dirty="0"/>
           </a:p>
@@ -4694,7 +4745,7 @@
                 <a:ea typeface="Arial" pitchFamily="34" charset="-122"/>
                 <a:cs typeface="Arial" pitchFamily="34" charset="-120"/>
               </a:rPr>
-              <a:t>… (PD-1 inhibitor) plus lenvatinib as conversion therapy followed by sequential …</a:t>
+              <a:t>Baseline circulating and tumor &amp;#x3b3;&amp;#x3b4; T cells and early circulating CD8&amp;…</a:t>
             </a:r>
             <a:endParaRPr lang="en-US" sz="1400" dirty="0"/>
           </a:p>
@@ -4731,7 +4782,7 @@
                 <a:ea typeface="Arial" pitchFamily="34" charset="-122"/>
                 <a:cs typeface="Arial" pitchFamily="34" charset="-120"/>
               </a:rPr>
-              <a:t>Peripheral immune dynamics during treatment predict prognosis in HCC receiving T…</a:t>
+              <a:t>… plus transarterial chemoembolization and PD-1 inhibitors as conversion therapi…</a:t>
             </a:r>
             <a:endParaRPr lang="en-US" sz="1400" dirty="0"/>
           </a:p>
@@ -4768,7 +4819,7 @@
                 <a:ea typeface="Arial" pitchFamily="34" charset="-122"/>
                 <a:cs typeface="Arial" pitchFamily="34" charset="-120"/>
               </a:rPr>
-              <a:t>Consensus on standardized later-line systemic therapy for hepatocellular carcino…</a:t>
+              <a:t>… (PD-1 inhibitor) plus lenvatinib as conversion therapy followed by sequential …</a:t>
             </a:r>
             <a:endParaRPr lang="en-US" sz="1400" dirty="0"/>
           </a:p>
@@ -4805,7 +4856,7 @@
                 <a:ea typeface="Arial" pitchFamily="34" charset="-122"/>
                 <a:cs typeface="Arial" pitchFamily="34" charset="-120"/>
               </a:rPr>
-              <a:t>Cryoablation versus radiofrequency ablation for hepatocellular carcinoma: a syst…</a:t>
+              <a:t>A Case of Unresectable Hepatocellular Carcinoma Responding to Durvalumab Plus Tr…</a:t>
             </a:r>
             <a:endParaRPr lang="en-US" sz="1400" dirty="0"/>
           </a:p>
@@ -4916,7 +4967,7 @@
                 <a:ea typeface="Arial" pitchFamily="34" charset="-122"/>
                 <a:cs typeface="Arial" pitchFamily="34" charset="-120"/>
               </a:rPr>
-              <a:t>… on interventional therapy and immune checkpoint inhibitors (ICIs) in patients …</a:t>
+              <a:t>Kdm2a histone demethylase ablation restores anti-tumor immunogenicity in liver c…</a:t>
             </a:r>
             <a:endParaRPr lang="en-US" sz="1400" dirty="0"/>
           </a:p>
@@ -5071,7 +5122,7 @@
                   </a:extLst>
                 </a:hlinkClick>
               </a:rPr>
-              <a:t>PD-1 blockade unleashes local hepatitis B virus-related B cell response inhibiting hepatocellular carcinoma.</a:t>
+              <a:t>Liver resection after atezolizumab and bevacizumab versus maintenance therapy for locally advanced hepatocellular carcinoma (TALENTOP): a multicentre, open-label, randomised, phase 3 trial.</a:t>
             </a:r>
             <a:endParaRPr lang="en-US" sz="2400" dirty="0"/>
           </a:p>
@@ -5107,7 +5158,7 @@
                   <a:srgbClr val="888888"/>
                 </a:solidFill>
               </a:rPr>
-              <a:t>Cancer cell  ·  IF 48.8  ·  RCT Phase 2</a:t>
+              <a:t>Lancet (London, England)  ·  IF 41.6  ·  RCT Phase 3</a:t>
             </a:r>
             <a:endParaRPr lang="en-US" sz="1000" dirty="0"/>
           </a:p>
@@ -5150,7 +5201,7 @@
                 <a:ea typeface="Microsoft JhengHei" pitchFamily="34" charset="-122"/>
                 <a:cs typeface="Microsoft JhengHei" pitchFamily="34" charset="-120"/>
               </a:rPr>
-              <a:t>研究HCC患者的PD-1療法</a:t>
+              <a:t>手術可延長治療失敗時間。</a:t>
             </a:r>
             <a:endParaRPr lang="en-US" sz="1800" dirty="0"/>
           </a:p>
@@ -5171,7 +5222,7 @@
                 <a:ea typeface="Microsoft JhengHei" pitchFamily="34" charset="-122"/>
                 <a:cs typeface="Microsoft JhengHei" pitchFamily="34" charset="-120"/>
               </a:rPr>
-              <a:t>識別T細胞和B細胞反應</a:t>
+              <a:t>共招募489名初治患者。</a:t>
             </a:r>
             <a:endParaRPr lang="en-US" sz="1800" dirty="0"/>
           </a:p>
@@ -5192,49 +5243,7 @@
                 <a:ea typeface="Microsoft JhengHei" pitchFamily="34" charset="-122"/>
                 <a:cs typeface="Microsoft JhengHei" pitchFamily="34" charset="-120"/>
               </a:rPr>
-              <a:t>HBcAg觸發局部B細胞活化</a:t>
-            </a:r>
-            <a:endParaRPr lang="en-US" sz="1800" dirty="0"/>
-          </a:p>
-          <a:p>
-            <a:pPr marL="342900" indent="-342900">
-              <a:spcAft>
-                <a:spcPts val="800"/>
-              </a:spcAft>
-              <a:buSzPct val="100000"/>
-              <a:buChar char="•"/>
-            </a:pPr>
-            <a:r>
-              <a:rPr lang="en-US" sz="1800" dirty="0">
-                <a:solidFill>
-                  <a:srgbClr val="333333"/>
-                </a:solidFill>
-                <a:latin typeface="Microsoft JhengHei" pitchFamily="34" charset="0"/>
-                <a:ea typeface="Microsoft JhengHei" pitchFamily="34" charset="-122"/>
-                <a:cs typeface="Microsoft JhengHei" pitchFamily="34" charset="-120"/>
-              </a:rPr>
-              <a:t>補體活化增強抗腫瘤效果</a:t>
-            </a:r>
-            <a:endParaRPr lang="en-US" sz="1800" dirty="0"/>
-          </a:p>
-          <a:p>
-            <a:pPr marL="342900" indent="-342900">
-              <a:spcAft>
-                <a:spcPts val="800"/>
-              </a:spcAft>
-              <a:buSzPct val="100000"/>
-              <a:buChar char="•"/>
-            </a:pPr>
-            <a:r>
-              <a:rPr lang="en-US" sz="1800" dirty="0">
-                <a:solidFill>
-                  <a:srgbClr val="333333"/>
-                </a:solidFill>
-                <a:latin typeface="Microsoft JhengHei" pitchFamily="34" charset="0"/>
-                <a:ea typeface="Microsoft JhengHei" pitchFamily="34" charset="-122"/>
-                <a:cs typeface="Microsoft JhengHei" pitchFamily="34" charset="-120"/>
-              </a:rPr>
-              <a:t>B細胞免疫提升抗PD-1療效</a:t>
+              <a:t>手術組不良事件較多。</a:t>
             </a:r>
             <a:endParaRPr lang="en-US" sz="1800" dirty="0"/>
           </a:p>
@@ -5270,7 +5279,7 @@
                   <a:srgbClr val="888888"/>
                 </a:solidFill>
               </a:rPr>
-              <a:t>Chen Shuling, Wang Yuanqi, Chen Jingying et al.. Cancer cell. 2026-08-10 DOI: 10.1016/j.ccell.2026.06.010</a:t>
+              <a:t>Sun Hui-Chuan, Zhu Xiao-Dong, Shen Feng et al.. Lancet (London, England). 2026-08-20 DOI: 10.1016/S0140-6736(26)01252-3</a:t>
             </a:r>
             <a:endParaRPr lang="en-US" sz="800" dirty="0"/>
           </a:p>
@@ -5470,7 +5479,7 @@
                   </a:extLst>
                 </a:hlinkClick>
               </a:rPr>
-              <a:t>Competing risks of treatment discontinuation of atezolizumab plus bevacizumab in unresectable hepatocellular carcinoma.</a:t>
+              <a:t>Integrating efficacy and safety profile in advanced HCC: A network meta-analysis of first-line systemic therapies.</a:t>
             </a:r>
             <a:endParaRPr lang="en-US" sz="2400" dirty="0"/>
           </a:p>
@@ -5506,7 +5515,7 @@
                   <a:srgbClr val="888888"/>
                 </a:solidFill>
               </a:rPr>
-              <a:t>JHEP reports : innovation in hepatology  ·  IF 7.8  ·  Retrospective Study  ·  🌏 Asia</a:t>
+              <a:t>JNCI cancer spectrum  ·  RCT Phase 3  ·  🌏 Asia</a:t>
             </a:r>
             <a:endParaRPr lang="en-US" sz="1000" dirty="0"/>
           </a:p>
@@ -5549,7 +5558,7 @@
                 <a:ea typeface="Microsoft JhengHei" pitchFamily="34" charset="-122"/>
                 <a:cs typeface="Microsoft JhengHei" pitchFamily="34" charset="-120"/>
               </a:rPr>
-              <a:t>Atezolizumab加bevacizumab為標準療法。</a:t>
+              <a:t>第一線療法的網絡Meta分析</a:t>
             </a:r>
             <a:endParaRPr lang="en-US" sz="1800" dirty="0"/>
           </a:p>
@@ -5570,7 +5579,7 @@
                 <a:ea typeface="Microsoft JhengHei" pitchFamily="34" charset="-122"/>
                 <a:cs typeface="Microsoft JhengHei" pitchFamily="34" charset="-120"/>
               </a:rPr>
-              <a:t>停藥原因包括PD和不良事件。</a:t>
+              <a:t>分析17項研究共12,727名患者</a:t>
             </a:r>
             <a:endParaRPr lang="en-US" sz="1800" dirty="0"/>
           </a:p>
@@ -5591,7 +5600,49 @@
                 <a:ea typeface="Microsoft JhengHei" pitchFamily="34" charset="-122"/>
                 <a:cs typeface="Microsoft JhengHei" pitchFamily="34" charset="-120"/>
               </a:rPr>
-              <a:t>AFP和ALBI預測停藥原因。</a:t>
+              <a:t>Nivolumab-Ipilimumab顯示最佳整體生存率</a:t>
+            </a:r>
+            <a:endParaRPr lang="en-US" sz="1800" dirty="0"/>
+          </a:p>
+          <a:p>
+            <a:pPr marL="342900" indent="-342900">
+              <a:spcAft>
+                <a:spcPts val="800"/>
+              </a:spcAft>
+              <a:buSzPct val="100000"/>
+              <a:buChar char="•"/>
+            </a:pPr>
+            <a:r>
+              <a:rPr lang="en-US" sz="1800" dirty="0">
+                <a:solidFill>
+                  <a:srgbClr val="333333"/>
+                </a:solidFill>
+                <a:latin typeface="Microsoft JhengHei" pitchFamily="34" charset="0"/>
+                <a:ea typeface="Microsoft JhengHei" pitchFamily="34" charset="-122"/>
+                <a:cs typeface="Microsoft JhengHei" pitchFamily="34" charset="-120"/>
+              </a:rPr>
+              <a:t>亞組分析突顯治療變異</a:t>
+            </a:r>
+            <a:endParaRPr lang="en-US" sz="1800" dirty="0"/>
+          </a:p>
+          <a:p>
+            <a:pPr marL="342900" indent="-342900">
+              <a:spcAft>
+                <a:spcPts val="800"/>
+              </a:spcAft>
+              <a:buSzPct val="100000"/>
+              <a:buChar char="•"/>
+            </a:pPr>
+            <a:r>
+              <a:rPr lang="en-US" sz="1800" dirty="0">
+                <a:solidFill>
+                  <a:srgbClr val="333333"/>
+                </a:solidFill>
+                <a:latin typeface="Microsoft JhengHei" pitchFamily="34" charset="0"/>
+                <a:ea typeface="Microsoft JhengHei" pitchFamily="34" charset="-122"/>
+                <a:cs typeface="Microsoft JhengHei" pitchFamily="34" charset="-120"/>
+              </a:rPr>
+              <a:t>強調個性化HCC管理的必要性</a:t>
             </a:r>
             <a:endParaRPr lang="en-US" sz="1800" dirty="0"/>
           </a:p>
@@ -5627,7 +5678,7 @@
                   <a:srgbClr val="888888"/>
                 </a:solidFill>
               </a:rPr>
-              <a:t>Suda Goki, Sho Takuya, Abe Tamami et al.. JHEP reports : innovation in hepatology. 2026-08-11 DOI: 10.1016/j.jhepr.2026.101988</a:t>
+              <a:t>Chua Wei Yu, Zhao Joseph J, Lee Choong-Kun et al.. JNCI cancer spectrum. 2026-08-21 DOI: 10.1093/jncics/pkag084</a:t>
             </a:r>
             <a:endParaRPr lang="en-US" sz="800" dirty="0"/>
           </a:p>
@@ -5827,7 +5878,7 @@
                   </a:extLst>
                 </a:hlinkClick>
               </a:rPr>
-              <a:t>… plus transarterial chemoembolization and PD-1 inhibitors as conversion therapies for unresectable intermediate-advanced hepatocellular carcinoma: a phase 2 trial …</a:t>
+              <a:t>Adjuvant and neoadjuvant therapies in HCC: Time to go perioperative?</a:t>
             </a:r>
             <a:endParaRPr lang="en-US" sz="2400" dirty="0"/>
           </a:p>
@@ -5863,7 +5914,7 @@
                   <a:srgbClr val="888888"/>
                 </a:solidFill>
               </a:rPr>
-              <a:t>… and Targeted Therapy  ·  RCT Phase 2</a:t>
+              <a:t>iScience  ·  RCT Phase 3</a:t>
             </a:r>
             <a:endParaRPr lang="en-US" sz="1000" dirty="0"/>
           </a:p>
@@ -5906,7 +5957,7 @@
                 <a:ea typeface="Microsoft JhengHei" pitchFamily="34" charset="-122"/>
                 <a:cs typeface="Microsoft JhengHei" pitchFamily="34" charset="-120"/>
               </a:rPr>
-              <a:t>TACE 與 PD-1 抑制劑聯合</a:t>
+              <a:t>HCC治療後復發率高。</a:t>
             </a:r>
             <a:endParaRPr lang="en-US" sz="1800" dirty="0"/>
           </a:p>
@@ -5927,7 +5978,7 @@
                 <a:ea typeface="Microsoft JhengHei" pitchFamily="34" charset="-122"/>
                 <a:cs typeface="Microsoft JhengHei" pitchFamily="34" charset="-120"/>
               </a:rPr>
-              <a:t>針對 uHCC 患者的第二階段試驗</a:t>
+              <a:t>ICIs在晚期HCC中有潛力。</a:t>
             </a:r>
             <a:endParaRPr lang="en-US" sz="1800" dirty="0"/>
           </a:p>
@@ -5948,7 +5999,49 @@
                 <a:ea typeface="Microsoft JhengHei" pitchFamily="34" charset="-122"/>
                 <a:cs typeface="Microsoft JhengHei" pitchFamily="34" charset="-120"/>
               </a:rPr>
-              <a:t>評估與單獨 TACE 的療效</a:t>
+              <a:t>新輔助療法增強免疫反應。</a:t>
+            </a:r>
+            <a:endParaRPr lang="en-US" sz="1800" dirty="0"/>
+          </a:p>
+          <a:p>
+            <a:pPr marL="342900" indent="-342900">
+              <a:spcAft>
+                <a:spcPts val="800"/>
+              </a:spcAft>
+              <a:buSzPct val="100000"/>
+              <a:buChar char="•"/>
+            </a:pPr>
+            <a:r>
+              <a:rPr lang="en-US" sz="1800" dirty="0">
+                <a:solidFill>
+                  <a:srgbClr val="333333"/>
+                </a:solidFill>
+                <a:latin typeface="Microsoft JhengHei" pitchFamily="34" charset="0"/>
+                <a:ea typeface="Microsoft JhengHei" pitchFamily="34" charset="-122"/>
+                <a:cs typeface="Microsoft JhengHei" pitchFamily="34" charset="-120"/>
+              </a:rPr>
+              <a:t>圍手術策略可能改善結果。</a:t>
+            </a:r>
+            <a:endParaRPr lang="en-US" sz="1800" dirty="0"/>
+          </a:p>
+          <a:p>
+            <a:pPr marL="342900" indent="-342900">
+              <a:spcAft>
+                <a:spcPts val="800"/>
+              </a:spcAft>
+              <a:buSzPct val="100000"/>
+              <a:buChar char="•"/>
+            </a:pPr>
+            <a:r>
+              <a:rPr lang="en-US" sz="1800" dirty="0">
+                <a:solidFill>
+                  <a:srgbClr val="333333"/>
+                </a:solidFill>
+                <a:latin typeface="Microsoft JhengHei" pitchFamily="34" charset="0"/>
+                <a:ea typeface="Microsoft JhengHei" pitchFamily="34" charset="-122"/>
+                <a:cs typeface="Microsoft JhengHei" pitchFamily="34" charset="-120"/>
+              </a:rPr>
+              <a:t>挑戰包括病人選擇和毒性。</a:t>
             </a:r>
             <a:endParaRPr lang="en-US" sz="1800" dirty="0"/>
           </a:p>
@@ -5984,7 +6077,7 @@
                   <a:srgbClr val="888888"/>
                 </a:solidFill>
               </a:rPr>
-              <a:t>X Zhang, H Cai, W Peng. … and Targeted Therapy. 2026</a:t>
+              <a:t>Pantzios Spyridon, Germanidis Georgios, Elefsiniotis Ioannis. iScience. 2026-08-20 DOI: 10.1016/j.isci.2026.117084</a:t>
             </a:r>
             <a:endParaRPr lang="en-US" sz="800" dirty="0"/>
           </a:p>
@@ -6184,7 +6277,7 @@
                   </a:extLst>
                 </a:hlinkClick>
               </a:rPr>
-              <a:t>… (PD-1 inhibitor) plus lenvatinib as conversion therapy followed by sequential surgery (SILENSES) for advanced unresectable hepatocellular carcinoma: a phase II …</a:t>
+              <a:t>Baseline circulating and tumor &amp;#x3b3;&amp;#x3b4; T cells and early circulating CD8&amp;#x207a;PD1&amp;#x207a; expansion predict response to Atezolizumab-bevacizumab in HCC.</a:t>
             </a:r>
             <a:endParaRPr lang="en-US" sz="2400" dirty="0"/>
           </a:p>
@@ -6220,7 +6313,7 @@
                   <a:srgbClr val="888888"/>
                 </a:solidFill>
               </a:rPr>
-              <a:t>… and Targeted Therapy  ·  RCT Phase 2</a:t>
+              <a:t>Clinical cancer research : an official journal of the American Association for Cancer Research  ·  IF 11.5  ·  Prospective Study</a:t>
             </a:r>
             <a:endParaRPr lang="en-US" sz="1000" dirty="0"/>
           </a:p>
@@ -6263,7 +6356,7 @@
                 <a:ea typeface="Microsoft JhengHei" pitchFamily="34" charset="-122"/>
                 <a:cs typeface="Microsoft JhengHei" pitchFamily="34" charset="-120"/>
               </a:rPr>
-              <a:t>研究評估PD-1抑制劑與lenvatinib</a:t>
+              <a:t>高基線γδ T細胞預測更佳結果。</a:t>
             </a:r>
             <a:endParaRPr lang="en-US" sz="1800" dirty="0"/>
           </a:p>
@@ -6284,7 +6377,7 @@
                 <a:ea typeface="Microsoft JhengHei" pitchFamily="34" charset="-122"/>
                 <a:cs typeface="Microsoft JhengHei" pitchFamily="34" charset="-120"/>
               </a:rPr>
-              <a:t>針對晚期不可切除HCC患者</a:t>
+              <a:t>早期CD8+PD-1+擴增與長期PFS相關。</a:t>
             </a:r>
             <a:endParaRPr lang="en-US" sz="1800" dirty="0"/>
           </a:p>
@@ -6305,49 +6398,7 @@
                 <a:ea typeface="Microsoft JhengHei" pitchFamily="34" charset="-122"/>
                 <a:cs typeface="Microsoft JhengHei" pitchFamily="34" charset="-120"/>
               </a:rPr>
-              <a:t>轉化治療後進行序列手術</a:t>
-            </a:r>
-            <a:endParaRPr lang="en-US" sz="1800" dirty="0"/>
-          </a:p>
-          <a:p>
-            <a:pPr marL="342900" indent="-342900">
-              <a:spcAft>
-                <a:spcPts val="800"/>
-              </a:spcAft>
-              <a:buSzPct val="100000"/>
-              <a:buChar char="•"/>
-            </a:pPr>
-            <a:r>
-              <a:rPr lang="en-US" sz="1800" dirty="0">
-                <a:solidFill>
-                  <a:srgbClr val="333333"/>
-                </a:solidFill>
-                <a:latin typeface="Microsoft JhengHei" pitchFamily="34" charset="0"/>
-                <a:ea typeface="Microsoft JhengHei" pitchFamily="34" charset="-122"/>
-                <a:cs typeface="Microsoft JhengHei" pitchFamily="34" charset="-120"/>
-              </a:rPr>
-              <a:t>評估長期生存結果</a:t>
-            </a:r>
-            <a:endParaRPr lang="en-US" sz="1800" dirty="0"/>
-          </a:p>
-          <a:p>
-            <a:pPr marL="342900" indent="-342900">
-              <a:spcAft>
-                <a:spcPts val="800"/>
-              </a:spcAft>
-              <a:buSzPct val="100000"/>
-              <a:buChar char="•"/>
-            </a:pPr>
-            <a:r>
-              <a:rPr lang="en-US" sz="1800" dirty="0">
-                <a:solidFill>
-                  <a:srgbClr val="333333"/>
-                </a:solidFill>
-                <a:latin typeface="Microsoft JhengHei" pitchFamily="34" charset="0"/>
-                <a:ea typeface="Microsoft JhengHei" pitchFamily="34" charset="-122"/>
-                <a:cs typeface="Microsoft JhengHei" pitchFamily="34" charset="-120"/>
-              </a:rPr>
-              <a:t>呈現第二期臨床試驗結果</a:t>
+              <a:t>增加CD8+TIGIT+細胞顯示治療抗性。</a:t>
             </a:r>
             <a:endParaRPr lang="en-US" sz="1800" dirty="0"/>
           </a:p>
@@ -6383,7 +6434,7 @@
                   <a:srgbClr val="888888"/>
                 </a:solidFill>
               </a:rPr>
-              <a:t>S Lu, W Zhang, J Li. … and Targeted Therapy. 2026</a:t>
+              <a:t>Galy-Fauroux Isabelle, Asif-Laidin Amna, Evain Manon et al.. Clinical cancer research : an official journal of the American Association for Cancer Research. 2026-08-17 DOI: 10.1158/1078-0432.CCR-26-1102</a:t>
             </a:r>
             <a:endParaRPr lang="en-US" sz="800" dirty="0"/>
           </a:p>
@@ -6583,7 +6634,7 @@
                   </a:extLst>
                 </a:hlinkClick>
               </a:rPr>
-              <a:t>Peripheral immune dynamics during treatment predict prognosis in HCC receiving TACE plus ICIs and anti-VEGF/TKIs.</a:t>
+              <a:t>… plus transarterial chemoembolization and PD-1 inhibitors as conversion therapies for unresectable intermediate-advanced hepatocellular carcinoma: a phase 2 trial …</a:t>
             </a:r>
             <a:endParaRPr lang="en-US" sz="2400" dirty="0"/>
           </a:p>
@@ -6619,7 +6670,7 @@
                   <a:srgbClr val="888888"/>
                 </a:solidFill>
               </a:rPr>
-              <a:t>Clinical &amp; translational immunology  ·  Retrospective Study  ·  🌏 Asia</a:t>
+              <a:t>… and Targeted Therapy  ·  RCT Phase 2</a:t>
             </a:r>
             <a:endParaRPr lang="en-US" sz="1000" dirty="0"/>
           </a:p>
@@ -6662,7 +6713,7 @@
                 <a:ea typeface="Microsoft JhengHei" pitchFamily="34" charset="-122"/>
                 <a:cs typeface="Microsoft JhengHei" pitchFamily="34" charset="-120"/>
               </a:rPr>
-              <a:t>研究評估HCC治療中的免疫標記。</a:t>
+              <a:t>針對不可切除HCC的組合療法</a:t>
             </a:r>
             <a:endParaRPr lang="en-US" sz="1800" dirty="0"/>
           </a:p>
@@ -6683,7 +6734,7 @@
                 <a:ea typeface="Microsoft JhengHei" pitchFamily="34" charset="-122"/>
                 <a:cs typeface="Microsoft JhengHei" pitchFamily="34" charset="-120"/>
               </a:rPr>
-              <a:t>患者接受TACE加上ICIs和抗VEGF/TKIs。</a:t>
+              <a:t>使用肝動脈化療栓塞(TACE)</a:t>
             </a:r>
             <a:endParaRPr lang="en-US" sz="1800" dirty="0"/>
           </a:p>
@@ -6704,7 +6755,7 @@
                 <a:ea typeface="Microsoft JhengHei" pitchFamily="34" charset="-122"/>
                 <a:cs typeface="Microsoft JhengHei" pitchFamily="34" charset="-120"/>
               </a:rPr>
-              <a:t>動態免疫變化預測整體存活率。</a:t>
+              <a:t>PD-1抑制劑提升療效</a:t>
             </a:r>
             <a:endParaRPr lang="en-US" sz="1800" dirty="0"/>
           </a:p>
@@ -6725,7 +6776,7 @@
                 <a:ea typeface="Microsoft JhengHei" pitchFamily="34" charset="-122"/>
                 <a:cs typeface="Microsoft JhengHei" pitchFamily="34" charset="-120"/>
               </a:rPr>
-              <a:t>根據免疫數據開發預後標準圖。</a:t>
+              <a:t>第二期試驗顯示良好結果</a:t>
             </a:r>
             <a:endParaRPr lang="en-US" sz="1800" dirty="0"/>
           </a:p>
@@ -6746,7 +6797,7 @@
                 <a:ea typeface="Microsoft JhengHei" pitchFamily="34" charset="-122"/>
                 <a:cs typeface="Microsoft JhengHei" pitchFamily="34" charset="-120"/>
               </a:rPr>
-              <a:t>識別出三種免疫動態亞型預測結果。</a:t>
+              <a:t>轉化為可切除疾病的潛力</a:t>
             </a:r>
             <a:endParaRPr lang="en-US" sz="1800" dirty="0"/>
           </a:p>
@@ -6782,7 +6833,7 @@
                   <a:srgbClr val="888888"/>
                 </a:solidFill>
               </a:rPr>
-              <a:t>Qin Lihao, Zhu Linzhou, Yang Hao et al.. Clinical &amp; translational immunology. 2026-08-16 DOI: 10.1002/cti2.70115</a:t>
+              <a:t>X Zhang, H Cai, W Peng. … and Targeted Therapy. 2026</a:t>
             </a:r>
             <a:endParaRPr lang="en-US" sz="800" dirty="0"/>
           </a:p>
@@ -6982,7 +7033,7 @@
                   </a:extLst>
                 </a:hlinkClick>
               </a:rPr>
-              <a:t>Consensus on standardized later-line systemic therapy for hepatocellular carcinoma.</a:t>
+              <a:t>… (PD-1 inhibitor) plus lenvatinib as conversion therapy followed by sequential surgery (SILENSES) for advanced unresectable hepatocellular carcinoma: a phase II …</a:t>
             </a:r>
             <a:endParaRPr lang="en-US" sz="2400" dirty="0"/>
           </a:p>
@@ -7018,7 +7069,7 @@
                   <a:srgbClr val="888888"/>
                 </a:solidFill>
               </a:rPr>
-              <a:t>Drug resistance updates : reviews and commentaries in antimicrobial and anticancer chemotherapy  ·  Review  ·  🌏 Asia</a:t>
+              <a:t>… and Targeted Therapy  ·  RCT Phase 2</a:t>
             </a:r>
             <a:endParaRPr lang="en-US" sz="1000" dirty="0"/>
           </a:p>
@@ -7061,7 +7112,7 @@
                 <a:ea typeface="Microsoft JhengHei" pitchFamily="34" charset="-122"/>
                 <a:cs typeface="Microsoft JhengHei" pitchFamily="34" charset="-120"/>
               </a:rPr>
-              <a:t>建立後期治療標準共識。</a:t>
+              <a:t>研究評估PD-1抑制劑加lenvatinib</a:t>
             </a:r>
             <a:endParaRPr lang="en-US" sz="1800" dirty="0"/>
           </a:p>
@@ -7082,7 +7133,7 @@
                 <a:ea typeface="Microsoft JhengHei" pitchFamily="34" charset="-122"/>
                 <a:cs typeface="Microsoft JhengHei" pitchFamily="34" charset="-120"/>
               </a:rPr>
-              <a:t>針對靶向治療失敗問題。</a:t>
+              <a:t>重點在不可切除肝細胞癌</a:t>
             </a:r>
             <a:endParaRPr lang="en-US" sz="1800" dirty="0"/>
           </a:p>
@@ -7103,7 +7154,49 @@
                 <a:ea typeface="Microsoft JhengHei" pitchFamily="34" charset="-122"/>
                 <a:cs typeface="Microsoft JhengHei" pitchFamily="34" charset="-120"/>
               </a:rPr>
-              <a:t>提出統一評估標準與建議。</a:t>
+              <a:t>序列手術改善長期生存率</a:t>
+            </a:r>
+            <a:endParaRPr lang="en-US" sz="1800" dirty="0"/>
+          </a:p>
+          <a:p>
+            <a:pPr marL="342900" indent="-342900">
+              <a:spcAft>
+                <a:spcPts val="800"/>
+              </a:spcAft>
+              <a:buSzPct val="100000"/>
+              <a:buChar char="•"/>
+            </a:pPr>
+            <a:r>
+              <a:rPr lang="en-US" sz="1800" dirty="0">
+                <a:solidFill>
+                  <a:srgbClr val="333333"/>
+                </a:solidFill>
+                <a:latin typeface="Microsoft JhengHei" pitchFamily="34" charset="0"/>
+                <a:ea typeface="Microsoft JhengHei" pitchFamily="34" charset="-122"/>
+                <a:cs typeface="Microsoft JhengHei" pitchFamily="34" charset="-120"/>
+              </a:rPr>
+              <a:t>II期試驗顯示良好結果</a:t>
+            </a:r>
+            <a:endParaRPr lang="en-US" sz="1800" dirty="0"/>
+          </a:p>
+          <a:p>
+            <a:pPr marL="342900" indent="-342900">
+              <a:spcAft>
+                <a:spcPts val="800"/>
+              </a:spcAft>
+              <a:buSzPct val="100000"/>
+              <a:buChar char="•"/>
+            </a:pPr>
+            <a:r>
+              <a:rPr lang="en-US" sz="1800" dirty="0">
+                <a:solidFill>
+                  <a:srgbClr val="333333"/>
+                </a:solidFill>
+                <a:latin typeface="Microsoft JhengHei" pitchFamily="34" charset="0"/>
+                <a:ea typeface="Microsoft JhengHei" pitchFamily="34" charset="-122"/>
+                <a:cs typeface="Microsoft JhengHei" pitchFamily="34" charset="-120"/>
+              </a:rPr>
+              <a:t>可能成為晚期HCC新標準</a:t>
             </a:r>
             <a:endParaRPr lang="en-US" sz="1800" dirty="0"/>
           </a:p>
@@ -7139,7 +7232,7 @@
                   <a:srgbClr val="888888"/>
                 </a:solidFill>
               </a:rPr>
-              <a:t>Yu Hongli, Cheng Jiamin, Xia Feng et al.. Drug resistance updates : reviews and commentaries in antimicrobial and anticancer chemotherapy. 2026-08-14 DOI: 10.1016/j.drup.2026.101468</a:t>
+              <a:t>S Lu, W Zhang, J Li. … and Targeted Therapy. 2026</a:t>
             </a:r>
             <a:endParaRPr lang="en-US" sz="800" dirty="0"/>
           </a:p>
@@ -7339,7 +7432,7 @@
                   </a:extLst>
                 </a:hlinkClick>
               </a:rPr>
-              <a:t>Cryoablation versus radiofrequency ablation for hepatocellular carcinoma: a systematic review and meta-analysis.</a:t>
+              <a:t>A Case of Unresectable Hepatocellular Carcinoma Responding to Durvalumab Plus Tremelimumab after Lenvatinib Treatment.</a:t>
             </a:r>
             <a:endParaRPr lang="en-US" sz="2400" dirty="0"/>
           </a:p>
@@ -7375,7 +7468,7 @@
                   <a:srgbClr val="888888"/>
                 </a:solidFill>
               </a:rPr>
-              <a:t>International journal of hyperthermia : the official journal of European Society for Hyperthermic Oncology, North American Hyperthermia Group  ·  Meta-Analysis</a:t>
+              <a:t>Internal medicine (Tokyo, Japan)  ·  🌏 Asia</a:t>
             </a:r>
             <a:endParaRPr lang="en-US" sz="1000" dirty="0"/>
           </a:p>
@@ -7418,7 +7511,7 @@
                 <a:ea typeface="Microsoft JhengHei" pitchFamily="34" charset="-122"/>
                 <a:cs typeface="Microsoft JhengHei" pitchFamily="34" charset="-120"/>
               </a:rPr>
-              <a:t>Cryoablation 完全消融率較高。</a:t>
+              <a:t>報告一例不可切除HCC</a:t>
             </a:r>
             <a:endParaRPr lang="en-US" sz="1800" dirty="0"/>
           </a:p>
@@ -7439,7 +7532,7 @@
                 <a:ea typeface="Microsoft JhengHei" pitchFamily="34" charset="-122"/>
                 <a:cs typeface="Microsoft JhengHei" pitchFamily="34" charset="-120"/>
               </a:rPr>
-              <a:t>Cryoablation 內部疼痛較低。</a:t>
+              <a:t>使用Durvalumab加Tremelimumab</a:t>
             </a:r>
             <a:endParaRPr lang="en-US" sz="1800" dirty="0"/>
           </a:p>
@@ -7460,7 +7553,7 @@
                 <a:ea typeface="Microsoft JhengHei" pitchFamily="34" charset="-122"/>
                 <a:cs typeface="Microsoft JhengHei" pitchFamily="34" charset="-120"/>
               </a:rPr>
-              <a:t>兩種治療無顯著生存差異。</a:t>
+              <a:t>患者對lenvatinib不耐受</a:t>
             </a:r>
             <a:endParaRPr lang="en-US" sz="1800" dirty="0"/>
           </a:p>
@@ -7481,7 +7574,7 @@
                 <a:ea typeface="Microsoft JhengHei" pitchFamily="34" charset="-122"/>
                 <a:cs typeface="Microsoft JhengHei" pitchFamily="34" charset="-120"/>
               </a:rPr>
-              <a:t>無明顯併發症差異。</a:t>
+              <a:t>腫瘤標記先升後降</a:t>
             </a:r>
             <a:endParaRPr lang="en-US" sz="1800" dirty="0"/>
           </a:p>
@@ -7502,7 +7595,7 @@
                 <a:ea typeface="Microsoft JhengHei" pitchFamily="34" charset="-122"/>
                 <a:cs typeface="Microsoft JhengHei" pitchFamily="34" charset="-120"/>
               </a:rPr>
-              <a:t>安全性兩者相似。</a:t>
+              <a:t>影像學顯示腫瘤縮小</a:t>
             </a:r>
             <a:endParaRPr lang="en-US" sz="1800" dirty="0"/>
           </a:p>
@@ -7538,7 +7631,7 @@
                   <a:srgbClr val="888888"/>
                 </a:solidFill>
               </a:rPr>
-              <a:t>Mao Kui, Wang Youqing, Yao Weijun et al.. International journal of hyperthermia : the official journal of European Society for Hyperthermic Oncology, North American Hyperthermia Group. 2026-08-13 DOI: 10.1080/02656736.2026.2713200</a:t>
+              <a:t>Sueda Saki, Kawaoka Tomokazu, Fujii Yasutoshi et al.. Internal medicine (Tokyo, Japan). 2026-08-19 DOI: 10.2169/internalmedicine.7369-26</a:t>
             </a:r>
             <a:endParaRPr lang="en-US" sz="800" dirty="0"/>
           </a:p>

--- a/docs/digest-zh.pptx
+++ b/docs/digest-zh.pptx
@@ -2269,7 +2269,7 @@
                   <a:srgbClr val="888888"/>
                 </a:solidFill>
               </a:rPr>
-              <a:t>2026-08-17 — 2026-08-24</a:t>
+              <a:t>2026-08-24 — 2026-08-31</a:t>
             </a:r>
             <a:endParaRPr lang="en-US" sz="1400" dirty="0"/>
           </a:p>
@@ -2539,91 +2539,7 @@
                 <a:ea typeface="Microsoft JhengHei" pitchFamily="34" charset="-122"/>
                 <a:cs typeface="Microsoft JhengHei" pitchFamily="34" charset="-120"/>
               </a:rPr>
-              <a:t>冷凍消融有效控制腫瘤。</a:t>
-            </a:r>
-            <a:endParaRPr lang="en-US" sz="1800" dirty="0"/>
-          </a:p>
-          <a:p>
-            <a:pPr marL="342900" indent="-342900">
-              <a:spcAft>
-                <a:spcPts val="800"/>
-              </a:spcAft>
-              <a:buSzPct val="100000"/>
-              <a:buChar char="•"/>
-            </a:pPr>
-            <a:r>
-              <a:rPr lang="en-US" sz="1800" dirty="0">
-                <a:solidFill>
-                  <a:srgbClr val="333333"/>
-                </a:solidFill>
-                <a:latin typeface="Microsoft JhengHei" pitchFamily="34" charset="0"/>
-                <a:ea typeface="Microsoft JhengHei" pitchFamily="34" charset="-122"/>
-                <a:cs typeface="Microsoft JhengHei" pitchFamily="34" charset="-120"/>
-              </a:rPr>
-              <a:t>與射頻消融比較效果。</a:t>
-            </a:r>
-            <a:endParaRPr lang="en-US" sz="1800" dirty="0"/>
-          </a:p>
-          <a:p>
-            <a:pPr marL="342900" indent="-342900">
-              <a:spcAft>
-                <a:spcPts val="800"/>
-              </a:spcAft>
-              <a:buSzPct val="100000"/>
-              <a:buChar char="•"/>
-            </a:pPr>
-            <a:r>
-              <a:rPr lang="en-US" sz="1800" dirty="0">
-                <a:solidFill>
-                  <a:srgbClr val="333333"/>
-                </a:solidFill>
-                <a:latin typeface="Microsoft JhengHei" pitchFamily="34" charset="0"/>
-                <a:ea typeface="Microsoft JhengHei" pitchFamily="34" charset="-122"/>
-                <a:cs typeface="Microsoft JhengHei" pitchFamily="34" charset="-120"/>
-              </a:rPr>
-              <a:t>重點在早期肝細胞癌。</a:t>
-            </a:r>
-            <a:endParaRPr lang="en-US" sz="1800" dirty="0"/>
-          </a:p>
-          <a:p>
-            <a:pPr marL="342900" indent="-342900">
-              <a:spcAft>
-                <a:spcPts val="800"/>
-              </a:spcAft>
-              <a:buSzPct val="100000"/>
-              <a:buChar char="•"/>
-            </a:pPr>
-            <a:r>
-              <a:rPr lang="en-US" sz="1800" dirty="0">
-                <a:solidFill>
-                  <a:srgbClr val="333333"/>
-                </a:solidFill>
-                <a:latin typeface="Microsoft JhengHei" pitchFamily="34" charset="0"/>
-                <a:ea typeface="Microsoft JhengHei" pitchFamily="34" charset="-122"/>
-                <a:cs typeface="Microsoft JhengHei" pitchFamily="34" charset="-120"/>
-              </a:rPr>
-              <a:t>治療結果的系統評估。</a:t>
-            </a:r>
-            <a:endParaRPr lang="en-US" sz="1800" dirty="0"/>
-          </a:p>
-          <a:p>
-            <a:pPr marL="342900" indent="-342900">
-              <a:spcAft>
-                <a:spcPts val="800"/>
-              </a:spcAft>
-              <a:buSzPct val="100000"/>
-              <a:buChar char="•"/>
-            </a:pPr>
-            <a:r>
-              <a:rPr lang="en-US" sz="1800" dirty="0">
-                <a:solidFill>
-                  <a:srgbClr val="333333"/>
-                </a:solidFill>
-                <a:latin typeface="Microsoft JhengHei" pitchFamily="34" charset="0"/>
-                <a:ea typeface="Microsoft JhengHei" pitchFamily="34" charset="-122"/>
-                <a:cs typeface="Microsoft JhengHei" pitchFamily="34" charset="-120"/>
-              </a:rPr>
-              <a:t>主要腫瘤&gt;2公分的研究。</a:t>
+              <a:t>（生成失敗）</a:t>
             </a:r>
             <a:endParaRPr lang="en-US" sz="1800" dirty="0"/>
           </a:p>
@@ -2859,7 +2775,7 @@
                   </a:extLst>
                 </a:hlinkClick>
               </a:rPr>
-              <a:t>Radiotherapy versus local ablation therapy for the treatment of hepatocellular carcinoma: A systematic review and meta-analysis.</a:t>
+              <a:t>External beam radiotherapy versus local ablation therapy for the treatment of hepatocellular carcinoma: a systematic review and meta-analysis</a:t>
             </a:r>
             <a:endParaRPr lang="en-US" sz="2400" dirty="0"/>
           </a:p>
@@ -2895,7 +2811,7 @@
                   <a:srgbClr val="888888"/>
                 </a:solidFill>
               </a:rPr>
-              <a:t>Journal of Clinical …  ·  Meta-Analysis</a:t>
+              <a:t>Clinical and Molecular …  ·  Meta-Analysis</a:t>
             </a:r>
             <a:endParaRPr lang="en-US" sz="1000" dirty="0"/>
           </a:p>
@@ -2938,91 +2854,7 @@
                 <a:ea typeface="Microsoft JhengHei" pitchFamily="34" charset="-122"/>
                 <a:cs typeface="Microsoft JhengHei" pitchFamily="34" charset="-120"/>
               </a:rPr>
-              <a:t>放射治療與局部消融比較</a:t>
-            </a:r>
-            <a:endParaRPr lang="en-US" sz="1800" dirty="0"/>
-          </a:p>
-          <a:p>
-            <a:pPr marL="342900" indent="-342900">
-              <a:spcAft>
-                <a:spcPts val="800"/>
-              </a:spcAft>
-              <a:buSzPct val="100000"/>
-              <a:buChar char="•"/>
-            </a:pPr>
-            <a:r>
-              <a:rPr lang="en-US" sz="1800" dirty="0">
-                <a:solidFill>
-                  <a:srgbClr val="333333"/>
-                </a:solidFill>
-                <a:latin typeface="Microsoft JhengHei" pitchFamily="34" charset="0"/>
-                <a:ea typeface="Microsoft JhengHei" pitchFamily="34" charset="-122"/>
-                <a:cs typeface="Microsoft JhengHei" pitchFamily="34" charset="-120"/>
-              </a:rPr>
-              <a:t>聚焦肝細胞癌治療</a:t>
-            </a:r>
-            <a:endParaRPr lang="en-US" sz="1800" dirty="0"/>
-          </a:p>
-          <a:p>
-            <a:pPr marL="342900" indent="-342900">
-              <a:spcAft>
-                <a:spcPts val="800"/>
-              </a:spcAft>
-              <a:buSzPct val="100000"/>
-              <a:buChar char="•"/>
-            </a:pPr>
-            <a:r>
-              <a:rPr lang="en-US" sz="1800" dirty="0">
-                <a:solidFill>
-                  <a:srgbClr val="333333"/>
-                </a:solidFill>
-                <a:latin typeface="Microsoft JhengHei" pitchFamily="34" charset="0"/>
-                <a:ea typeface="Microsoft JhengHei" pitchFamily="34" charset="-122"/>
-                <a:cs typeface="Microsoft JhengHei" pitchFamily="34" charset="-120"/>
-              </a:rPr>
-              <a:t>局部無進展生存分析</a:t>
-            </a:r>
-            <a:endParaRPr lang="en-US" sz="1800" dirty="0"/>
-          </a:p>
-          <a:p>
-            <a:pPr marL="342900" indent="-342900">
-              <a:spcAft>
-                <a:spcPts val="800"/>
-              </a:spcAft>
-              <a:buSzPct val="100000"/>
-              <a:buChar char="•"/>
-            </a:pPr>
-            <a:r>
-              <a:rPr lang="en-US" sz="1800" dirty="0">
-                <a:solidFill>
-                  <a:srgbClr val="333333"/>
-                </a:solidFill>
-                <a:latin typeface="Microsoft JhengHei" pitchFamily="34" charset="0"/>
-                <a:ea typeface="Microsoft JhengHei" pitchFamily="34" charset="-122"/>
-                <a:cs typeface="Microsoft JhengHei" pitchFamily="34" charset="-120"/>
-              </a:rPr>
-              <a:t>包含射頻及微波消融</a:t>
-            </a:r>
-            <a:endParaRPr lang="en-US" sz="1800" dirty="0"/>
-          </a:p>
-          <a:p>
-            <a:pPr marL="342900" indent="-342900">
-              <a:spcAft>
-                <a:spcPts val="800"/>
-              </a:spcAft>
-              <a:buSzPct val="100000"/>
-              <a:buChar char="•"/>
-            </a:pPr>
-            <a:r>
-              <a:rPr lang="en-US" sz="1800" dirty="0">
-                <a:solidFill>
-                  <a:srgbClr val="333333"/>
-                </a:solidFill>
-                <a:latin typeface="Microsoft JhengHei" pitchFamily="34" charset="0"/>
-                <a:ea typeface="Microsoft JhengHei" pitchFamily="34" charset="-122"/>
-                <a:cs typeface="Microsoft JhengHei" pitchFamily="34" charset="-120"/>
-              </a:rPr>
-              <a:t>進行系統性回顧與統合分析</a:t>
+              <a:t>（生成失敗）</a:t>
             </a:r>
             <a:endParaRPr lang="en-US" sz="1800" dirty="0"/>
           </a:p>
@@ -3058,7 +2890,7 @@
                   <a:srgbClr val="888888"/>
                 </a:solidFill>
               </a:rPr>
-              <a:t>SH Bae, SH Choi, SM Yoon. Journal of Clinical …. 2026</a:t>
+              <a:t>SH Bae, SH Choi, SM Yoon. Clinical and Molecular …</a:t>
             </a:r>
             <a:endParaRPr lang="en-US" sz="800" dirty="0"/>
           </a:p>
@@ -3258,7 +3090,7 @@
                   </a:extLst>
                 </a:hlinkClick>
               </a:rPr>
-              <a:t>Kdm2a histone demethylase ablation restores anti-tumor immunogenicity in liver cancer.</a:t>
+              <a:t>Defining the role of minimally invasive surgical thermal ablation in liver malignancies: A systematic review and meta-analysis of outcomes and reporting …</a:t>
             </a:r>
             <a:endParaRPr lang="en-US" sz="2400" dirty="0"/>
           </a:p>
@@ -3294,7 +3126,7 @@
                   <a:srgbClr val="888888"/>
                 </a:solidFill>
               </a:rPr>
-              <a:t>British journal of cancer  ·  IF 6.4  ·  Basic Research</a:t>
+              <a:t>European Journal of …  ·  Meta-Analysis</a:t>
             </a:r>
             <a:endParaRPr lang="en-US" sz="1000" dirty="0"/>
           </a:p>
@@ -3337,49 +3169,7 @@
                 <a:ea typeface="Microsoft JhengHei" pitchFamily="34" charset="-122"/>
                 <a:cs typeface="Microsoft JhengHei" pitchFamily="34" charset="-120"/>
               </a:rPr>
-              <a:t>KDM2A沉默增強免疫通路。</a:t>
-            </a:r>
-            <a:endParaRPr lang="en-US" sz="1800" dirty="0"/>
-          </a:p>
-          <a:p>
-            <a:pPr marL="342900" indent="-342900">
-              <a:spcAft>
-                <a:spcPts val="800"/>
-              </a:spcAft>
-              <a:buSzPct val="100000"/>
-              <a:buChar char="•"/>
-            </a:pPr>
-            <a:r>
-              <a:rPr lang="en-US" sz="1800" dirty="0">
-                <a:solidFill>
-                  <a:srgbClr val="333333"/>
-                </a:solidFill>
-                <a:latin typeface="Microsoft JhengHei" pitchFamily="34" charset="0"/>
-                <a:ea typeface="Microsoft JhengHei" pitchFamily="34" charset="-122"/>
-                <a:cs typeface="Microsoft JhengHei" pitchFamily="34" charset="-120"/>
-              </a:rPr>
-              <a:t>高KDM2A與腫瘤分化差相關。</a:t>
-            </a:r>
-            <a:endParaRPr lang="en-US" sz="1800" dirty="0"/>
-          </a:p>
-          <a:p>
-            <a:pPr marL="342900" indent="-342900">
-              <a:spcAft>
-                <a:spcPts val="800"/>
-              </a:spcAft>
-              <a:buSzPct val="100000"/>
-              <a:buChar char="•"/>
-            </a:pPr>
-            <a:r>
-              <a:rPr lang="en-US" sz="1800" dirty="0">
-                <a:solidFill>
-                  <a:srgbClr val="333333"/>
-                </a:solidFill>
-                <a:latin typeface="Microsoft JhengHei" pitchFamily="34" charset="0"/>
-                <a:ea typeface="Microsoft JhengHei" pitchFamily="34" charset="-122"/>
-                <a:cs typeface="Microsoft JhengHei" pitchFamily="34" charset="-120"/>
-              </a:rPr>
-              <a:t>KDM2A缺失增加CD8+ T細胞浸潤。</a:t>
+              <a:t>（生成失敗）</a:t>
             </a:r>
             <a:endParaRPr lang="en-US" sz="1800" dirty="0"/>
           </a:p>
@@ -3415,7 +3205,7 @@
                   <a:srgbClr val="888888"/>
                 </a:solidFill>
               </a:rPr>
-              <a:t>Gragnani Laura, Lulli Matteo, Caini Patrizio et al.. British journal of cancer. 2026-08-19 DOI: 10.1038/s41416-026-03566-z</a:t>
+              <a:t>G Scotton, F Notte, HC Pommergaard…. European Journal of …. 2026</a:t>
             </a:r>
             <a:endParaRPr lang="en-US" sz="800" dirty="0"/>
           </a:p>
@@ -3606,290 +3396,7 @@
                   <a:srgbClr val="FFFFFF"/>
                 </a:solidFill>
               </a:rPr>
-              <a:t>### 綜合啟示 (Overall Insights)</a:t>
-            </a:r>
-            <a:endParaRPr lang="en-US" sz="1200" dirty="0"/>
-          </a:p>
-          <a:p>
-            <a:pPr indent="0" marL="0">
-              <a:lnSpc>
-                <a:spcPct val="150000"/>
-              </a:lnSpc>
-              <a:buNone/>
-            </a:pPr>
-            <a:endParaRPr lang="en-US" sz="1200" dirty="0"/>
-          </a:p>
-          <a:p>
-            <a:pPr indent="0" marL="0">
-              <a:lnSpc>
-                <a:spcPct val="150000"/>
-              </a:lnSpc>
-              <a:buNone/>
-            </a:pPr>
-            <a:r>
-              <a:rPr lang="en-US" sz="1200" dirty="0">
-                <a:solidFill>
-                  <a:srgbClr val="FFFFFF"/>
-                </a:solidFill>
-              </a:rPr>
-              <a:t>1. **免疫治療的潛力**  </a:t>
-            </a:r>
-            <a:endParaRPr lang="en-US" sz="1200" dirty="0"/>
-          </a:p>
-          <a:p>
-            <a:pPr indent="0" marL="0">
-              <a:lnSpc>
-                <a:spcPct val="150000"/>
-              </a:lnSpc>
-              <a:buNone/>
-            </a:pPr>
-            <a:r>
-              <a:rPr lang="en-US" sz="1200" dirty="0">
-                <a:solidFill>
-                  <a:srgbClr val="FFFFFF"/>
-                </a:solidFill>
-              </a:rPr>
-              <a:t>   Immune checkpoint inhibitors (ICIs) have demonstrated improved outcomes in advanced hepatocellular carcinoma (HCC) and are being explored in earlier stages, indicating their potential in enhancing survival rates.  </a:t>
-            </a:r>
-            <a:endParaRPr lang="en-US" sz="1200" dirty="0"/>
-          </a:p>
-          <a:p>
-            <a:pPr indent="0" marL="0">
-              <a:lnSpc>
-                <a:spcPct val="150000"/>
-              </a:lnSpc>
-              <a:buNone/>
-            </a:pPr>
-            <a:r>
-              <a:rPr lang="en-US" sz="1200" dirty="0">
-                <a:solidFill>
-                  <a:srgbClr val="FFFFFF"/>
-                </a:solidFill>
-              </a:rPr>
-              <a:t>   免疫檢查點抑制劑（ICIs）在晚期肝細胞癌（HCC）中顯示出改善預後的潛力，並且正在早期階段進行探索，顯示出提升生存率的可能性。</a:t>
-            </a:r>
-            <a:endParaRPr lang="en-US" sz="1200" dirty="0"/>
-          </a:p>
-          <a:p>
-            <a:pPr indent="0" marL="0">
-              <a:lnSpc>
-                <a:spcPct val="150000"/>
-              </a:lnSpc>
-              <a:buNone/>
-            </a:pPr>
-            <a:endParaRPr lang="en-US" sz="1200" dirty="0"/>
-          </a:p>
-          <a:p>
-            <a:pPr indent="0" marL="0">
-              <a:lnSpc>
-                <a:spcPct val="150000"/>
-              </a:lnSpc>
-              <a:buNone/>
-            </a:pPr>
-            <a:r>
-              <a:rPr lang="en-US" sz="1200" dirty="0">
-                <a:solidFill>
-                  <a:srgbClr val="FFFFFF"/>
-                </a:solidFill>
-              </a:rPr>
-              <a:t>2. **局部消融與系統治療的結合**  </a:t>
-            </a:r>
-            <a:endParaRPr lang="en-US" sz="1200" dirty="0"/>
-          </a:p>
-          <a:p>
-            <a:pPr indent="0" marL="0">
-              <a:lnSpc>
-                <a:spcPct val="150000"/>
-              </a:lnSpc>
-              <a:buNone/>
-            </a:pPr>
-            <a:r>
-              <a:rPr lang="en-US" sz="1200" dirty="0">
-                <a:solidFill>
-                  <a:srgbClr val="FFFFFF"/>
-                </a:solidFill>
-              </a:rPr>
-              <a:t>   The combination of local ablation therapies with systemic treatments, such as atezolizumab and bevacizumab, may offer synergistic effects, enhancing treatment efficacy for unresectable HCC.  </a:t>
-            </a:r>
-            <a:endParaRPr lang="en-US" sz="1200" dirty="0"/>
-          </a:p>
-          <a:p>
-            <a:pPr indent="0" marL="0">
-              <a:lnSpc>
-                <a:spcPct val="150000"/>
-              </a:lnSpc>
-              <a:buNone/>
-            </a:pPr>
-            <a:r>
-              <a:rPr lang="en-US" sz="1200" dirty="0">
-                <a:solidFill>
-                  <a:srgbClr val="FFFFFF"/>
-                </a:solidFill>
-              </a:rPr>
-              <a:t>   將局部消融療法與系統性治療（如阿特珠單抗和貝伐單抗）結合，可能會產生協同效應，提高無法切除的HCC的治療效果。</a:t>
-            </a:r>
-            <a:endParaRPr lang="en-US" sz="1200" dirty="0"/>
-          </a:p>
-          <a:p>
-            <a:pPr indent="0" marL="0">
-              <a:lnSpc>
-                <a:spcPct val="150000"/>
-              </a:lnSpc>
-              <a:buNone/>
-            </a:pPr>
-            <a:endParaRPr lang="en-US" sz="1200" dirty="0"/>
-          </a:p>
-          <a:p>
-            <a:pPr indent="0" marL="0">
-              <a:lnSpc>
-                <a:spcPct val="150000"/>
-              </a:lnSpc>
-              <a:buNone/>
-            </a:pPr>
-            <a:r>
-              <a:rPr lang="en-US" sz="1200" dirty="0">
-                <a:solidFill>
-                  <a:srgbClr val="FFFFFF"/>
-                </a:solidFill>
-              </a:rPr>
-              <a:t>3. **生物標記的預測能力**  </a:t>
-            </a:r>
-            <a:endParaRPr lang="en-US" sz="1200" dirty="0"/>
-          </a:p>
-          <a:p>
-            <a:pPr indent="0" marL="0">
-              <a:lnSpc>
-                <a:spcPct val="150000"/>
-              </a:lnSpc>
-              <a:buNone/>
-            </a:pPr>
-            <a:r>
-              <a:rPr lang="en-US" sz="1200" dirty="0">
-                <a:solidFill>
-                  <a:srgbClr val="FFFFFF"/>
-                </a:solidFill>
-              </a:rPr>
-              <a:t>   Baseline circulating and tumor immune features can predict responses to therapies, highlighting the importance of personalized treatment strategies in HCC management.  </a:t>
-            </a:r>
-            <a:endParaRPr lang="en-US" sz="1200" dirty="0"/>
-          </a:p>
-          <a:p>
-            <a:pPr indent="0" marL="0">
-              <a:lnSpc>
-                <a:spcPct val="150000"/>
-              </a:lnSpc>
-              <a:buNone/>
-            </a:pPr>
-            <a:r>
-              <a:rPr lang="en-US" sz="1200" dirty="0">
-                <a:solidFill>
-                  <a:srgbClr val="FFFFFF"/>
-                </a:solidFill>
-              </a:rPr>
-              <a:t>   基線循環和腫瘤免疫特徵可以預測對療法的反應，凸顯了個性化治療策略在HCC管理中的重要性。</a:t>
-            </a:r>
-            <a:endParaRPr lang="en-US" sz="1200" dirty="0"/>
-          </a:p>
-          <a:p>
-            <a:pPr indent="0" marL="0">
-              <a:lnSpc>
-                <a:spcPct val="150000"/>
-              </a:lnSpc>
-              <a:buNone/>
-            </a:pPr>
-            <a:endParaRPr lang="en-US" sz="1200" dirty="0"/>
-          </a:p>
-          <a:p>
-            <a:pPr indent="0" marL="0">
-              <a:lnSpc>
-                <a:spcPct val="150000"/>
-              </a:lnSpc>
-              <a:buNone/>
-            </a:pPr>
-            <a:r>
-              <a:rPr lang="en-US" sz="1200" dirty="0">
-                <a:solidFill>
-                  <a:srgbClr val="FFFFFF"/>
-                </a:solidFill>
-              </a:rPr>
-              <a:t>4. **手術時機的重新評估**  </a:t>
-            </a:r>
-            <a:endParaRPr lang="en-US" sz="1200" dirty="0"/>
-          </a:p>
-          <a:p>
-            <a:pPr indent="0" marL="0">
-              <a:lnSpc>
-                <a:spcPct val="150000"/>
-              </a:lnSpc>
-              <a:buNone/>
-            </a:pPr>
-            <a:r>
-              <a:rPr lang="en-US" sz="1200" dirty="0">
-                <a:solidFill>
-                  <a:srgbClr val="FFFFFF"/>
-                </a:solidFill>
-              </a:rPr>
-              <a:t>   Resection after systemic therapy may provide additional survival benefits, suggesting a need to reevaluate surgical timing in the treatment of advanced HCC.  </a:t>
-            </a:r>
-            <a:endParaRPr lang="en-US" sz="1200" dirty="0"/>
-          </a:p>
-          <a:p>
-            <a:pPr indent="0" marL="0">
-              <a:lnSpc>
-                <a:spcPct val="150000"/>
-              </a:lnSpc>
-              <a:buNone/>
-            </a:pPr>
-            <a:r>
-              <a:rPr lang="en-US" sz="1200" dirty="0">
-                <a:solidFill>
-                  <a:srgbClr val="FFFFFF"/>
-                </a:solidFill>
-              </a:rPr>
-              <a:t>   在系統治療後進行切除可能提供額外的生存益處，這表明需要重新評估在晚期HCC治療中的手術時機。</a:t>
-            </a:r>
-            <a:endParaRPr lang="en-US" sz="1200" dirty="0"/>
-          </a:p>
-          <a:p>
-            <a:pPr indent="0" marL="0">
-              <a:lnSpc>
-                <a:spcPct val="150000"/>
-              </a:lnSpc>
-              <a:buNone/>
-            </a:pPr>
-            <a:endParaRPr lang="en-US" sz="1200" dirty="0"/>
-          </a:p>
-          <a:p>
-            <a:pPr indent="0" marL="0">
-              <a:lnSpc>
-                <a:spcPct val="150000"/>
-              </a:lnSpc>
-              <a:buNone/>
-            </a:pPr>
-            <a:r>
-              <a:rPr lang="en-US" sz="1200" dirty="0">
-                <a:solidFill>
-                  <a:srgbClr val="FFFFFF"/>
-                </a:solidFill>
-              </a:rPr>
-              <a:t>5. **多學科治療的必要性**  </a:t>
-            </a:r>
-            <a:endParaRPr lang="en-US" sz="1200" dirty="0"/>
-          </a:p>
-          <a:p>
-            <a:pPr indent="0" marL="0">
-              <a:lnSpc>
-                <a:spcPct val="150000"/>
-              </a:lnSpc>
-              <a:buNone/>
-            </a:pPr>
-            <a:r>
-              <a:rPr lang="en-US" sz="1200" dirty="0">
-                <a:solidFill>
-                  <a:srgbClr val="FFFFFF"/>
-                </a:solidFill>
-              </a:rPr>
-              <a:t>   A multidisciplinary approach integrating surgery, systemic therapy, and local ablation is essential for optimizing outcomes in patients with advanced HCC.</a:t>
+              <a:t>(Generati</a:t>
             </a:r>
             <a:endParaRPr lang="en-US" sz="1200" dirty="0"/>
           </a:p>
@@ -4035,333 +3542,7 @@
                   <a:srgbClr val="FFFFFF"/>
                 </a:solidFill>
               </a:rPr>
-              <a:t>整合外科手術、系統治療和局部消融的多學科方法對於優化晚期HCC患者的治療結果至關重要。</a:t>
-            </a:r>
-            <a:endParaRPr lang="en-US" sz="1200" dirty="0"/>
-          </a:p>
-          <a:p>
-            <a:pPr indent="0" marL="0">
-              <a:lnSpc>
-                <a:spcPct val="150000"/>
-              </a:lnSpc>
-              <a:buNone/>
-            </a:pPr>
-            <a:endParaRPr lang="en-US" sz="1200" dirty="0"/>
-          </a:p>
-          <a:p>
-            <a:pPr indent="0" marL="0">
-              <a:lnSpc>
-                <a:spcPct val="150000"/>
-              </a:lnSpc>
-              <a:buNone/>
-            </a:pPr>
-            <a:r>
-              <a:rPr lang="en-US" sz="1200" dirty="0">
-                <a:solidFill>
-                  <a:srgbClr val="FFFFFF"/>
-                </a:solidFill>
-              </a:rPr>
-              <a:t>### 未來研究方向 (Future Research Directions)</a:t>
-            </a:r>
-            <a:endParaRPr lang="en-US" sz="1200" dirty="0"/>
-          </a:p>
-          <a:p>
-            <a:pPr indent="0" marL="0">
-              <a:lnSpc>
-                <a:spcPct val="150000"/>
-              </a:lnSpc>
-              <a:buNone/>
-            </a:pPr>
-            <a:endParaRPr lang="en-US" sz="1200" dirty="0"/>
-          </a:p>
-          <a:p>
-            <a:pPr indent="0" marL="0">
-              <a:lnSpc>
-                <a:spcPct val="150000"/>
-              </a:lnSpc>
-              <a:buNone/>
-            </a:pPr>
-            <a:r>
-              <a:rPr lang="en-US" sz="1200" dirty="0">
-                <a:solidFill>
-                  <a:srgbClr val="FFFFFF"/>
-                </a:solidFill>
-              </a:rPr>
-              <a:t>1. **早期階段免疫治療的臨床試驗**  </a:t>
-            </a:r>
-            <a:endParaRPr lang="en-US" sz="1200" dirty="0"/>
-          </a:p>
-          <a:p>
-            <a:pPr indent="0" marL="0">
-              <a:lnSpc>
-                <a:spcPct val="150000"/>
-              </a:lnSpc>
-              <a:buNone/>
-            </a:pPr>
-            <a:r>
-              <a:rPr lang="en-US" sz="1200" dirty="0">
-                <a:solidFill>
-                  <a:srgbClr val="FFFFFF"/>
-                </a:solidFill>
-              </a:rPr>
-              <a:t>   Further clinical trials are needed to assess the efficacy of ICIs in early-stage HCC, potentially changing the treatment landscape.  </a:t>
-            </a:r>
-            <a:endParaRPr lang="en-US" sz="1200" dirty="0"/>
-          </a:p>
-          <a:p>
-            <a:pPr indent="0" marL="0">
-              <a:lnSpc>
-                <a:spcPct val="150000"/>
-              </a:lnSpc>
-              <a:buNone/>
-            </a:pPr>
-            <a:r>
-              <a:rPr lang="en-US" sz="1200" dirty="0">
-                <a:solidFill>
-                  <a:srgbClr val="FFFFFF"/>
-                </a:solidFill>
-              </a:rPr>
-              <a:t>   需要進一步的臨床試驗來評估ICIs在早期HCC中的療效，這可能會改變治療格局。</a:t>
-            </a:r>
-            <a:endParaRPr lang="en-US" sz="1200" dirty="0"/>
-          </a:p>
-          <a:p>
-            <a:pPr indent="0" marL="0">
-              <a:lnSpc>
-                <a:spcPct val="150000"/>
-              </a:lnSpc>
-              <a:buNone/>
-            </a:pPr>
-            <a:endParaRPr lang="en-US" sz="1200" dirty="0"/>
-          </a:p>
-          <a:p>
-            <a:pPr indent="0" marL="0">
-              <a:lnSpc>
-                <a:spcPct val="150000"/>
-              </a:lnSpc>
-              <a:buNone/>
-            </a:pPr>
-            <a:r>
-              <a:rPr lang="en-US" sz="1200" dirty="0">
-                <a:solidFill>
-                  <a:srgbClr val="FFFFFF"/>
-                </a:solidFill>
-              </a:rPr>
-              <a:t>2. **個性化治療的生物標記研究**  </a:t>
-            </a:r>
-            <a:endParaRPr lang="en-US" sz="1200" dirty="0"/>
-          </a:p>
-          <a:p>
-            <a:pPr indent="0" marL="0">
-              <a:lnSpc>
-                <a:spcPct val="150000"/>
-              </a:lnSpc>
-              <a:buNone/>
-            </a:pPr>
-            <a:r>
-              <a:rPr lang="en-US" sz="1200" dirty="0">
-                <a:solidFill>
-                  <a:srgbClr val="FFFFFF"/>
-                </a:solidFill>
-              </a:rPr>
-              <a:t>   Investigating biomarkers for predicting treatment responses will be crucial for developing personalized therapeutic strategies in HCC.  </a:t>
-            </a:r>
-            <a:endParaRPr lang="en-US" sz="1200" dirty="0"/>
-          </a:p>
-          <a:p>
-            <a:pPr indent="0" marL="0">
-              <a:lnSpc>
-                <a:spcPct val="150000"/>
-              </a:lnSpc>
-              <a:buNone/>
-            </a:pPr>
-            <a:r>
-              <a:rPr lang="en-US" sz="1200" dirty="0">
-                <a:solidFill>
-                  <a:srgbClr val="FFFFFF"/>
-                </a:solidFill>
-              </a:rPr>
-              <a:t>   研究預測治療反應的生物標記將對開發HCC的個性化治療策略至關重要。</a:t>
-            </a:r>
-            <a:endParaRPr lang="en-US" sz="1200" dirty="0"/>
-          </a:p>
-          <a:p>
-            <a:pPr indent="0" marL="0">
-              <a:lnSpc>
-                <a:spcPct val="150000"/>
-              </a:lnSpc>
-              <a:buNone/>
-            </a:pPr>
-            <a:endParaRPr lang="en-US" sz="1200" dirty="0"/>
-          </a:p>
-          <a:p>
-            <a:pPr indent="0" marL="0">
-              <a:lnSpc>
-                <a:spcPct val="150000"/>
-              </a:lnSpc>
-              <a:buNone/>
-            </a:pPr>
-            <a:r>
-              <a:rPr lang="en-US" sz="1200" dirty="0">
-                <a:solidFill>
-                  <a:srgbClr val="FFFFFF"/>
-                </a:solidFill>
-              </a:rPr>
-              <a:t>3. **局部消融技術的優化**  </a:t>
-            </a:r>
-            <a:endParaRPr lang="en-US" sz="1200" dirty="0"/>
-          </a:p>
-          <a:p>
-            <a:pPr indent="0" marL="0">
-              <a:lnSpc>
-                <a:spcPct val="150000"/>
-              </a:lnSpc>
-              <a:buNone/>
-            </a:pPr>
-            <a:r>
-              <a:rPr lang="en-US" sz="1200" dirty="0">
-                <a:solidFill>
-                  <a:srgbClr val="FFFFFF"/>
-                </a:solidFill>
-              </a:rPr>
-              <a:t>   Future studies should focus on optimizing local ablation techniques and their combinations with systemic therapies to maximize patient outcomes.  </a:t>
-            </a:r>
-            <a:endParaRPr lang="en-US" sz="1200" dirty="0"/>
-          </a:p>
-          <a:p>
-            <a:pPr indent="0" marL="0">
-              <a:lnSpc>
-                <a:spcPct val="150000"/>
-              </a:lnSpc>
-              <a:buNone/>
-            </a:pPr>
-            <a:r>
-              <a:rPr lang="en-US" sz="1200" dirty="0">
-                <a:solidFill>
-                  <a:srgbClr val="FFFFFF"/>
-                </a:solidFill>
-              </a:rPr>
-              <a:t>   未來的研究應集中於優化局部消融技術及其與系統性療法的結合，以最大化患者的治療結果。</a:t>
-            </a:r>
-            <a:endParaRPr lang="en-US" sz="1200" dirty="0"/>
-          </a:p>
-          <a:p>
-            <a:pPr indent="0" marL="0">
-              <a:lnSpc>
-                <a:spcPct val="150000"/>
-              </a:lnSpc>
-              <a:buNone/>
-            </a:pPr>
-            <a:endParaRPr lang="en-US" sz="1200" dirty="0"/>
-          </a:p>
-          <a:p>
-            <a:pPr indent="0" marL="0">
-              <a:lnSpc>
-                <a:spcPct val="150000"/>
-              </a:lnSpc>
-              <a:buNone/>
-            </a:pPr>
-            <a:r>
-              <a:rPr lang="en-US" sz="1200" dirty="0">
-                <a:solidFill>
-                  <a:srgbClr val="FFFFFF"/>
-                </a:solidFill>
-              </a:rPr>
-              <a:t>4. **多學科治療模式的評估**  </a:t>
-            </a:r>
-            <a:endParaRPr lang="en-US" sz="1200" dirty="0"/>
-          </a:p>
-          <a:p>
-            <a:pPr indent="0" marL="0">
-              <a:lnSpc>
-                <a:spcPct val="150000"/>
-              </a:lnSpc>
-              <a:buNone/>
-            </a:pPr>
-            <a:r>
-              <a:rPr lang="en-US" sz="1200" dirty="0">
-                <a:solidFill>
-                  <a:srgbClr val="FFFFFF"/>
-                </a:solidFill>
-              </a:rPr>
-              <a:t>   Evaluating the effectiveness of multidisciplinary treatment approaches in HCC management will provide insights into best practices and improve patient care.  </a:t>
-            </a:r>
-            <a:endParaRPr lang="en-US" sz="1200" dirty="0"/>
-          </a:p>
-          <a:p>
-            <a:pPr indent="0" marL="0">
-              <a:lnSpc>
-                <a:spcPct val="150000"/>
-              </a:lnSpc>
-              <a:buNone/>
-            </a:pPr>
-            <a:r>
-              <a:rPr lang="en-US" sz="1200" dirty="0">
-                <a:solidFill>
-                  <a:srgbClr val="FFFFFF"/>
-                </a:solidFill>
-              </a:rPr>
-              <a:t>   評估多學科治療模式在HCC管理中的有效性將提供最佳實踐的見解並改善患者護理。</a:t>
-            </a:r>
-            <a:endParaRPr lang="en-US" sz="1200" dirty="0"/>
-          </a:p>
-          <a:p>
-            <a:pPr indent="0" marL="0">
-              <a:lnSpc>
-                <a:spcPct val="150000"/>
-              </a:lnSpc>
-              <a:buNone/>
-            </a:pPr>
-            <a:endParaRPr lang="en-US" sz="1200" dirty="0"/>
-          </a:p>
-          <a:p>
-            <a:pPr indent="0" marL="0">
-              <a:lnSpc>
-                <a:spcPct val="150000"/>
-              </a:lnSpc>
-              <a:buNone/>
-            </a:pPr>
-            <a:r>
-              <a:rPr lang="en-US" sz="1200" dirty="0">
-                <a:solidFill>
-                  <a:srgbClr val="FFFFFF"/>
-                </a:solidFill>
-              </a:rPr>
-              <a:t>5. **免疫逃逸機制的深入研究**  </a:t>
-            </a:r>
-            <a:endParaRPr lang="en-US" sz="1200" dirty="0"/>
-          </a:p>
-          <a:p>
-            <a:pPr indent="0" marL="0">
-              <a:lnSpc>
-                <a:spcPct val="150000"/>
-              </a:lnSpc>
-              <a:buNone/>
-            </a:pPr>
-            <a:r>
-              <a:rPr lang="en-US" sz="1200" dirty="0">
-                <a:solidFill>
-                  <a:srgbClr val="FFFFFF"/>
-                </a:solidFill>
-              </a:rPr>
-              <a:t>   Understanding the mechanisms of immune evasion in liver cancer will be essential for developing new therapeutic strategies that enhance the efficacy of existing treatments.  </a:t>
-            </a:r>
-            <a:endParaRPr lang="en-US" sz="1200" dirty="0"/>
-          </a:p>
-          <a:p>
-            <a:pPr indent="0" marL="0">
-              <a:lnSpc>
-                <a:spcPct val="150000"/>
-              </a:lnSpc>
-              <a:buNone/>
-            </a:pPr>
-            <a:r>
-              <a:rPr lang="en-US" sz="1200" dirty="0">
-                <a:solidFill>
-                  <a:srgbClr val="FFFFFF"/>
-                </a:solidFill>
-              </a:rPr>
-              <a:t>   理解肝癌中的免疫逃逸機制對於開發增強現有治療效果的新療法至關重要。</a:t>
+              <a:t>on failed)</a:t>
             </a:r>
             <a:endParaRPr lang="en-US" sz="1200" dirty="0"/>
           </a:p>
@@ -4634,7 +3815,7 @@
                 <a:ea typeface="Arial" pitchFamily="34" charset="-122"/>
                 <a:cs typeface="Arial" pitchFamily="34" charset="-120"/>
               </a:rPr>
-              <a:t>Liver resection after atezolizumab and bevacizumab versus maintenance therapy fo…</a:t>
+              <a:t>On-demand transarterial chemoembolisation combined with atezolizumab and bevaciz…</a:t>
             </a:r>
             <a:endParaRPr lang="en-US" sz="1400" dirty="0"/>
           </a:p>
@@ -4671,7 +3852,7 @@
                 <a:ea typeface="Arial" pitchFamily="34" charset="-122"/>
                 <a:cs typeface="Arial" pitchFamily="34" charset="-120"/>
               </a:rPr>
-              <a:t>Integrating efficacy and safety profile in advanced HCC: A network meta-analysis…</a:t>
+              <a:t>Atezolizumab-Bevacizumab with or without Cisplatin-based HAIC for Unresectable H…</a:t>
             </a:r>
             <a:endParaRPr lang="en-US" sz="1400" dirty="0"/>
           </a:p>
@@ -4708,7 +3889,7 @@
                 <a:ea typeface="Arial" pitchFamily="34" charset="-122"/>
                 <a:cs typeface="Arial" pitchFamily="34" charset="-120"/>
               </a:rPr>
-              <a:t>Adjuvant and neoadjuvant therapies in HCC: Time to go perioperative?</a:t>
+              <a:t>Phase 2 Study of Futibatinib in Combination with Pembrolizumab in Patients with …</a:t>
             </a:r>
             <a:endParaRPr lang="en-US" sz="1400" dirty="0"/>
           </a:p>
@@ -4745,7 +3926,7 @@
                 <a:ea typeface="Arial" pitchFamily="34" charset="-122"/>
                 <a:cs typeface="Arial" pitchFamily="34" charset="-120"/>
               </a:rPr>
-              <a:t>Baseline circulating and tumor &amp;#x3b3;&amp;#x3b4; T cells and early circulating CD8&amp;…</a:t>
+              <a:t>… plus transarterial chemoembolization and PD-1 inhibitors as conversion therapi…</a:t>
             </a:r>
             <a:endParaRPr lang="en-US" sz="1400" dirty="0"/>
           </a:p>
@@ -4782,7 +3963,7 @@
                 <a:ea typeface="Arial" pitchFamily="34" charset="-122"/>
                 <a:cs typeface="Arial" pitchFamily="34" charset="-120"/>
               </a:rPr>
-              <a:t>… plus transarterial chemoembolization and PD-1 inhibitors as conversion therapi…</a:t>
+              <a:t>… (PD-1 inhibitor) plus lenvatinib as conversion therapy followed by sequential …</a:t>
             </a:r>
             <a:endParaRPr lang="en-US" sz="1400" dirty="0"/>
           </a:p>
@@ -4819,7 +4000,7 @@
                 <a:ea typeface="Arial" pitchFamily="34" charset="-122"/>
                 <a:cs typeface="Arial" pitchFamily="34" charset="-120"/>
               </a:rPr>
-              <a:t>… (PD-1 inhibitor) plus lenvatinib as conversion therapy followed by sequential …</a:t>
+              <a:t>Defect-Engineered BiO2-X Nanosheets Mediate Sono-Thermomechanical ECM Remodeling…</a:t>
             </a:r>
             <a:endParaRPr lang="en-US" sz="1400" dirty="0"/>
           </a:p>
@@ -4856,7 +4037,7 @@
                 <a:ea typeface="Arial" pitchFamily="34" charset="-122"/>
                 <a:cs typeface="Arial" pitchFamily="34" charset="-120"/>
               </a:rPr>
-              <a:t>A Case of Unresectable Hepatocellular Carcinoma Responding to Durvalumab Plus Tr…</a:t>
+              <a:t>Enhanced glucose uptake promotes the survival of hepatocellular carcinoma cells …</a:t>
             </a:r>
             <a:endParaRPr lang="en-US" sz="1400" dirty="0"/>
           </a:p>
@@ -4930,7 +4111,7 @@
                 <a:ea typeface="Arial" pitchFamily="34" charset="-122"/>
                 <a:cs typeface="Arial" pitchFamily="34" charset="-120"/>
               </a:rPr>
-              <a:t>Radiotherapy versus local ablation therapy for the treatment of hepatocellular c…</a:t>
+              <a:t>External beam radiotherapy versus local ablation therapy for the treatment of he…</a:t>
             </a:r>
             <a:endParaRPr lang="en-US" sz="1400" dirty="0"/>
           </a:p>
@@ -4967,7 +4148,7 @@
                 <a:ea typeface="Arial" pitchFamily="34" charset="-122"/>
                 <a:cs typeface="Arial" pitchFamily="34" charset="-120"/>
               </a:rPr>
-              <a:t>Kdm2a histone demethylase ablation restores anti-tumor immunogenicity in liver c…</a:t>
+              <a:t>Defining the role of minimally invasive surgical thermal ablation in liver malig…</a:t>
             </a:r>
             <a:endParaRPr lang="en-US" sz="1400" dirty="0"/>
           </a:p>
@@ -5122,7 +4303,7 @@
                   </a:extLst>
                 </a:hlinkClick>
               </a:rPr>
-              <a:t>Liver resection after atezolizumab and bevacizumab versus maintenance therapy for locally advanced hepatocellular carcinoma (TALENTOP): a multicentre, open-label, randomised, phase 3 trial.</a:t>
+              <a:t>On-demand transarterial chemoembolisation combined with atezolizumab and bevacizumab in patients with untreated hepatocellular carcinoma (TALENTACE): a multicentre, randomised, open-label, phase 3 trial.</a:t>
             </a:r>
             <a:endParaRPr lang="en-US" sz="2400" dirty="0"/>
           </a:p>
@@ -5158,7 +4339,7 @@
                   <a:srgbClr val="888888"/>
                 </a:solidFill>
               </a:rPr>
-              <a:t>Lancet (London, England)  ·  IF 41.6  ·  RCT Phase 3</a:t>
+              <a:t>The lancet. Gastroenterology &amp; hepatology  ·  IF 35.7  ·  RCT Phase 3  ·  🌏 Asia</a:t>
             </a:r>
             <a:endParaRPr lang="en-US" sz="1000" dirty="0"/>
           </a:p>
@@ -5201,49 +4382,7 @@
                 <a:ea typeface="Microsoft JhengHei" pitchFamily="34" charset="-122"/>
                 <a:cs typeface="Microsoft JhengHei" pitchFamily="34" charset="-120"/>
               </a:rPr>
-              <a:t>手術可延長治療失敗時間。</a:t>
-            </a:r>
-            <a:endParaRPr lang="en-US" sz="1800" dirty="0"/>
-          </a:p>
-          <a:p>
-            <a:pPr marL="342900" indent="-342900">
-              <a:spcAft>
-                <a:spcPts val="800"/>
-              </a:spcAft>
-              <a:buSzPct val="100000"/>
-              <a:buChar char="•"/>
-            </a:pPr>
-            <a:r>
-              <a:rPr lang="en-US" sz="1800" dirty="0">
-                <a:solidFill>
-                  <a:srgbClr val="333333"/>
-                </a:solidFill>
-                <a:latin typeface="Microsoft JhengHei" pitchFamily="34" charset="0"/>
-                <a:ea typeface="Microsoft JhengHei" pitchFamily="34" charset="-122"/>
-                <a:cs typeface="Microsoft JhengHei" pitchFamily="34" charset="-120"/>
-              </a:rPr>
-              <a:t>共招募489名初治患者。</a:t>
-            </a:r>
-            <a:endParaRPr lang="en-US" sz="1800" dirty="0"/>
-          </a:p>
-          <a:p>
-            <a:pPr marL="342900" indent="-342900">
-              <a:spcAft>
-                <a:spcPts val="800"/>
-              </a:spcAft>
-              <a:buSzPct val="100000"/>
-              <a:buChar char="•"/>
-            </a:pPr>
-            <a:r>
-              <a:rPr lang="en-US" sz="1800" dirty="0">
-                <a:solidFill>
-                  <a:srgbClr val="333333"/>
-                </a:solidFill>
-                <a:latin typeface="Microsoft JhengHei" pitchFamily="34" charset="0"/>
-                <a:ea typeface="Microsoft JhengHei" pitchFamily="34" charset="-122"/>
-                <a:cs typeface="Microsoft JhengHei" pitchFamily="34" charset="-120"/>
-              </a:rPr>
-              <a:t>手術組不良事件較多。</a:t>
+              <a:t>（生成失敗）</a:t>
             </a:r>
             <a:endParaRPr lang="en-US" sz="1800" dirty="0"/>
           </a:p>
@@ -5279,7 +4418,7 @@
                   <a:srgbClr val="888888"/>
                 </a:solidFill>
               </a:rPr>
-              <a:t>Sun Hui-Chuan, Zhu Xiao-Dong, Shen Feng et al.. Lancet (London, England). 2026-08-20 DOI: 10.1016/S0140-6736(26)01252-3</a:t>
+              <a:t>Kudo Masatoshi, Ogasawara Sadahisa, Liu Ruibao et al.. The lancet. Gastroenterology &amp; hepatology. 2026-08-25 DOI: 10.1016/S2468-1253(26)00212-8</a:t>
             </a:r>
             <a:endParaRPr lang="en-US" sz="800" dirty="0"/>
           </a:p>
@@ -5479,7 +4618,7 @@
                   </a:extLst>
                 </a:hlinkClick>
               </a:rPr>
-              <a:t>Integrating efficacy and safety profile in advanced HCC: A network meta-analysis of first-line systemic therapies.</a:t>
+              <a:t>Atezolizumab-Bevacizumab with or without Cisplatin-based HAIC for Unresectable HCC: A Randomized Phase 2 Trial.</a:t>
             </a:r>
             <a:endParaRPr lang="en-US" sz="2400" dirty="0"/>
           </a:p>
@@ -5515,7 +4654,7 @@
                   <a:srgbClr val="888888"/>
                 </a:solidFill>
               </a:rPr>
-              <a:t>JNCI cancer spectrum  ·  RCT Phase 3  ·  🌏 Asia</a:t>
+              <a:t>JHEP reports : innovation in hepatology  ·  IF 7.8  ·  RCT Phase 3  ·  🌏 Asia</a:t>
             </a:r>
             <a:endParaRPr lang="en-US" sz="1000" dirty="0"/>
           </a:p>
@@ -5558,91 +4697,7 @@
                 <a:ea typeface="Microsoft JhengHei" pitchFamily="34" charset="-122"/>
                 <a:cs typeface="Microsoft JhengHei" pitchFamily="34" charset="-120"/>
               </a:rPr>
-              <a:t>第一線療法的網絡Meta分析</a:t>
-            </a:r>
-            <a:endParaRPr lang="en-US" sz="1800" dirty="0"/>
-          </a:p>
-          <a:p>
-            <a:pPr marL="342900" indent="-342900">
-              <a:spcAft>
-                <a:spcPts val="800"/>
-              </a:spcAft>
-              <a:buSzPct val="100000"/>
-              <a:buChar char="•"/>
-            </a:pPr>
-            <a:r>
-              <a:rPr lang="en-US" sz="1800" dirty="0">
-                <a:solidFill>
-                  <a:srgbClr val="333333"/>
-                </a:solidFill>
-                <a:latin typeface="Microsoft JhengHei" pitchFamily="34" charset="0"/>
-                <a:ea typeface="Microsoft JhengHei" pitchFamily="34" charset="-122"/>
-                <a:cs typeface="Microsoft JhengHei" pitchFamily="34" charset="-120"/>
-              </a:rPr>
-              <a:t>分析17項研究共12,727名患者</a:t>
-            </a:r>
-            <a:endParaRPr lang="en-US" sz="1800" dirty="0"/>
-          </a:p>
-          <a:p>
-            <a:pPr marL="342900" indent="-342900">
-              <a:spcAft>
-                <a:spcPts val="800"/>
-              </a:spcAft>
-              <a:buSzPct val="100000"/>
-              <a:buChar char="•"/>
-            </a:pPr>
-            <a:r>
-              <a:rPr lang="en-US" sz="1800" dirty="0">
-                <a:solidFill>
-                  <a:srgbClr val="333333"/>
-                </a:solidFill>
-                <a:latin typeface="Microsoft JhengHei" pitchFamily="34" charset="0"/>
-                <a:ea typeface="Microsoft JhengHei" pitchFamily="34" charset="-122"/>
-                <a:cs typeface="Microsoft JhengHei" pitchFamily="34" charset="-120"/>
-              </a:rPr>
-              <a:t>Nivolumab-Ipilimumab顯示最佳整體生存率</a:t>
-            </a:r>
-            <a:endParaRPr lang="en-US" sz="1800" dirty="0"/>
-          </a:p>
-          <a:p>
-            <a:pPr marL="342900" indent="-342900">
-              <a:spcAft>
-                <a:spcPts val="800"/>
-              </a:spcAft>
-              <a:buSzPct val="100000"/>
-              <a:buChar char="•"/>
-            </a:pPr>
-            <a:r>
-              <a:rPr lang="en-US" sz="1800" dirty="0">
-                <a:solidFill>
-                  <a:srgbClr val="333333"/>
-                </a:solidFill>
-                <a:latin typeface="Microsoft JhengHei" pitchFamily="34" charset="0"/>
-                <a:ea typeface="Microsoft JhengHei" pitchFamily="34" charset="-122"/>
-                <a:cs typeface="Microsoft JhengHei" pitchFamily="34" charset="-120"/>
-              </a:rPr>
-              <a:t>亞組分析突顯治療變異</a:t>
-            </a:r>
-            <a:endParaRPr lang="en-US" sz="1800" dirty="0"/>
-          </a:p>
-          <a:p>
-            <a:pPr marL="342900" indent="-342900">
-              <a:spcAft>
-                <a:spcPts val="800"/>
-              </a:spcAft>
-              <a:buSzPct val="100000"/>
-              <a:buChar char="•"/>
-            </a:pPr>
-            <a:r>
-              <a:rPr lang="en-US" sz="1800" dirty="0">
-                <a:solidFill>
-                  <a:srgbClr val="333333"/>
-                </a:solidFill>
-                <a:latin typeface="Microsoft JhengHei" pitchFamily="34" charset="0"/>
-                <a:ea typeface="Microsoft JhengHei" pitchFamily="34" charset="-122"/>
-                <a:cs typeface="Microsoft JhengHei" pitchFamily="34" charset="-120"/>
-              </a:rPr>
-              <a:t>強調個性化HCC管理的必要性</a:t>
+              <a:t>（生成失敗）</a:t>
             </a:r>
             <a:endParaRPr lang="en-US" sz="1800" dirty="0"/>
           </a:p>
@@ -5678,7 +4733,7 @@
                   <a:srgbClr val="888888"/>
                 </a:solidFill>
               </a:rPr>
-              <a:t>Chua Wei Yu, Zhao Joseph J, Lee Choong-Kun et al.. JNCI cancer spectrum. 2026-08-21 DOI: 10.1093/jncics/pkag084</a:t>
+              <a:t>Takeuchi Yasuto, Sue Masahiko, Miyake Nozomi et al.. JHEP reports : innovation in hepatology. 2026-08-28 DOI: 10.1016/j.jhepr.2026.102002</a:t>
             </a:r>
             <a:endParaRPr lang="en-US" sz="800" dirty="0"/>
           </a:p>
@@ -5878,7 +4933,7 @@
                   </a:extLst>
                 </a:hlinkClick>
               </a:rPr>
-              <a:t>Adjuvant and neoadjuvant therapies in HCC: Time to go perioperative?</a:t>
+              <a:t>Phase 2 Study of Futibatinib in Combination with Pembrolizumab in Patients with FGF19 expressing Advanced Hepatocellular Carcinoma.</a:t>
             </a:r>
             <a:endParaRPr lang="en-US" sz="2400" dirty="0"/>
           </a:p>
@@ -5914,7 +4969,7 @@
                   <a:srgbClr val="888888"/>
                 </a:solidFill>
               </a:rPr>
-              <a:t>iScience  ·  RCT Phase 3</a:t>
+              <a:t>The oncologist  ·  RCT Phase 2</a:t>
             </a:r>
             <a:endParaRPr lang="en-US" sz="1000" dirty="0"/>
           </a:p>
@@ -5957,91 +5012,7 @@
                 <a:ea typeface="Microsoft JhengHei" pitchFamily="34" charset="-122"/>
                 <a:cs typeface="Microsoft JhengHei" pitchFamily="34" charset="-120"/>
               </a:rPr>
-              <a:t>HCC治療後復發率高。</a:t>
-            </a:r>
-            <a:endParaRPr lang="en-US" sz="1800" dirty="0"/>
-          </a:p>
-          <a:p>
-            <a:pPr marL="342900" indent="-342900">
-              <a:spcAft>
-                <a:spcPts val="800"/>
-              </a:spcAft>
-              <a:buSzPct val="100000"/>
-              <a:buChar char="•"/>
-            </a:pPr>
-            <a:r>
-              <a:rPr lang="en-US" sz="1800" dirty="0">
-                <a:solidFill>
-                  <a:srgbClr val="333333"/>
-                </a:solidFill>
-                <a:latin typeface="Microsoft JhengHei" pitchFamily="34" charset="0"/>
-                <a:ea typeface="Microsoft JhengHei" pitchFamily="34" charset="-122"/>
-                <a:cs typeface="Microsoft JhengHei" pitchFamily="34" charset="-120"/>
-              </a:rPr>
-              <a:t>ICIs在晚期HCC中有潛力。</a:t>
-            </a:r>
-            <a:endParaRPr lang="en-US" sz="1800" dirty="0"/>
-          </a:p>
-          <a:p>
-            <a:pPr marL="342900" indent="-342900">
-              <a:spcAft>
-                <a:spcPts val="800"/>
-              </a:spcAft>
-              <a:buSzPct val="100000"/>
-              <a:buChar char="•"/>
-            </a:pPr>
-            <a:r>
-              <a:rPr lang="en-US" sz="1800" dirty="0">
-                <a:solidFill>
-                  <a:srgbClr val="333333"/>
-                </a:solidFill>
-                <a:latin typeface="Microsoft JhengHei" pitchFamily="34" charset="0"/>
-                <a:ea typeface="Microsoft JhengHei" pitchFamily="34" charset="-122"/>
-                <a:cs typeface="Microsoft JhengHei" pitchFamily="34" charset="-120"/>
-              </a:rPr>
-              <a:t>新輔助療法增強免疫反應。</a:t>
-            </a:r>
-            <a:endParaRPr lang="en-US" sz="1800" dirty="0"/>
-          </a:p>
-          <a:p>
-            <a:pPr marL="342900" indent="-342900">
-              <a:spcAft>
-                <a:spcPts val="800"/>
-              </a:spcAft>
-              <a:buSzPct val="100000"/>
-              <a:buChar char="•"/>
-            </a:pPr>
-            <a:r>
-              <a:rPr lang="en-US" sz="1800" dirty="0">
-                <a:solidFill>
-                  <a:srgbClr val="333333"/>
-                </a:solidFill>
-                <a:latin typeface="Microsoft JhengHei" pitchFamily="34" charset="0"/>
-                <a:ea typeface="Microsoft JhengHei" pitchFamily="34" charset="-122"/>
-                <a:cs typeface="Microsoft JhengHei" pitchFamily="34" charset="-120"/>
-              </a:rPr>
-              <a:t>圍手術策略可能改善結果。</a:t>
-            </a:r>
-            <a:endParaRPr lang="en-US" sz="1800" dirty="0"/>
-          </a:p>
-          <a:p>
-            <a:pPr marL="342900" indent="-342900">
-              <a:spcAft>
-                <a:spcPts val="800"/>
-              </a:spcAft>
-              <a:buSzPct val="100000"/>
-              <a:buChar char="•"/>
-            </a:pPr>
-            <a:r>
-              <a:rPr lang="en-US" sz="1800" dirty="0">
-                <a:solidFill>
-                  <a:srgbClr val="333333"/>
-                </a:solidFill>
-                <a:latin typeface="Microsoft JhengHei" pitchFamily="34" charset="0"/>
-                <a:ea typeface="Microsoft JhengHei" pitchFamily="34" charset="-122"/>
-                <a:cs typeface="Microsoft JhengHei" pitchFamily="34" charset="-120"/>
-              </a:rPr>
-              <a:t>挑戰包括病人選擇和毒性。</a:t>
+              <a:t>（生成失敗）</a:t>
             </a:r>
             <a:endParaRPr lang="en-US" sz="1800" dirty="0"/>
           </a:p>
@@ -6077,7 +5048,7 @@
                   <a:srgbClr val="888888"/>
                 </a:solidFill>
               </a:rPr>
-              <a:t>Pantzios Spyridon, Germanidis Georgios, Elefsiniotis Ioannis. iScience. 2026-08-20 DOI: 10.1016/j.isci.2026.117084</a:t>
+              <a:t>Tran Nguyen H, Palmer Mathias E, Ulrich Angela et al.. The oncologist. 2026-08-25 DOI: 10.1093/oncolo/oyag343</a:t>
             </a:r>
             <a:endParaRPr lang="en-US" sz="800" dirty="0"/>
           </a:p>
@@ -6277,7 +5248,7 @@
                   </a:extLst>
                 </a:hlinkClick>
               </a:rPr>
-              <a:t>Baseline circulating and tumor &amp;#x3b3;&amp;#x3b4; T cells and early circulating CD8&amp;#x207a;PD1&amp;#x207a; expansion predict response to Atezolizumab-bevacizumab in HCC.</a:t>
+              <a:t>… plus transarterial chemoembolization and PD-1 inhibitors as conversion therapies for unresectable intermediate-advanced hepatocellular carcinoma: a phase 2 trial …</a:t>
             </a:r>
             <a:endParaRPr lang="en-US" sz="2400" dirty="0"/>
           </a:p>
@@ -6313,7 +5284,7 @@
                   <a:srgbClr val="888888"/>
                 </a:solidFill>
               </a:rPr>
-              <a:t>Clinical cancer research : an official journal of the American Association for Cancer Research  ·  IF 11.5  ·  Prospective Study</a:t>
+              <a:t>… and Targeted Therapy  ·  RCT Phase 2</a:t>
             </a:r>
             <a:endParaRPr lang="en-US" sz="1000" dirty="0"/>
           </a:p>
@@ -6356,49 +5327,7 @@
                 <a:ea typeface="Microsoft JhengHei" pitchFamily="34" charset="-122"/>
                 <a:cs typeface="Microsoft JhengHei" pitchFamily="34" charset="-120"/>
               </a:rPr>
-              <a:t>高基線γδ T細胞預測更佳結果。</a:t>
-            </a:r>
-            <a:endParaRPr lang="en-US" sz="1800" dirty="0"/>
-          </a:p>
-          <a:p>
-            <a:pPr marL="342900" indent="-342900">
-              <a:spcAft>
-                <a:spcPts val="800"/>
-              </a:spcAft>
-              <a:buSzPct val="100000"/>
-              <a:buChar char="•"/>
-            </a:pPr>
-            <a:r>
-              <a:rPr lang="en-US" sz="1800" dirty="0">
-                <a:solidFill>
-                  <a:srgbClr val="333333"/>
-                </a:solidFill>
-                <a:latin typeface="Microsoft JhengHei" pitchFamily="34" charset="0"/>
-                <a:ea typeface="Microsoft JhengHei" pitchFamily="34" charset="-122"/>
-                <a:cs typeface="Microsoft JhengHei" pitchFamily="34" charset="-120"/>
-              </a:rPr>
-              <a:t>早期CD8+PD-1+擴增與長期PFS相關。</a:t>
-            </a:r>
-            <a:endParaRPr lang="en-US" sz="1800" dirty="0"/>
-          </a:p>
-          <a:p>
-            <a:pPr marL="342900" indent="-342900">
-              <a:spcAft>
-                <a:spcPts val="800"/>
-              </a:spcAft>
-              <a:buSzPct val="100000"/>
-              <a:buChar char="•"/>
-            </a:pPr>
-            <a:r>
-              <a:rPr lang="en-US" sz="1800" dirty="0">
-                <a:solidFill>
-                  <a:srgbClr val="333333"/>
-                </a:solidFill>
-                <a:latin typeface="Microsoft JhengHei" pitchFamily="34" charset="0"/>
-                <a:ea typeface="Microsoft JhengHei" pitchFamily="34" charset="-122"/>
-                <a:cs typeface="Microsoft JhengHei" pitchFamily="34" charset="-120"/>
-              </a:rPr>
-              <a:t>增加CD8+TIGIT+細胞顯示治療抗性。</a:t>
+              <a:t>（生成失敗）</a:t>
             </a:r>
             <a:endParaRPr lang="en-US" sz="1800" dirty="0"/>
           </a:p>
@@ -6434,7 +5363,7 @@
                   <a:srgbClr val="888888"/>
                 </a:solidFill>
               </a:rPr>
-              <a:t>Galy-Fauroux Isabelle, Asif-Laidin Amna, Evain Manon et al.. Clinical cancer research : an official journal of the American Association for Cancer Research. 2026-08-17 DOI: 10.1158/1078-0432.CCR-26-1102</a:t>
+              <a:t>X Zhang, H Cai, W Peng. … and Targeted Therapy. 2026</a:t>
             </a:r>
             <a:endParaRPr lang="en-US" sz="800" dirty="0"/>
           </a:p>
@@ -6634,7 +5563,7 @@
                   </a:extLst>
                 </a:hlinkClick>
               </a:rPr>
-              <a:t>… plus transarterial chemoembolization and PD-1 inhibitors as conversion therapies for unresectable intermediate-advanced hepatocellular carcinoma: a phase 2 trial …</a:t>
+              <a:t>… (PD-1 inhibitor) plus lenvatinib as conversion therapy followed by sequential surgery (SILENSES) for advanced unresectable hepatocellular carcinoma: a phase II …</a:t>
             </a:r>
             <a:endParaRPr lang="en-US" sz="2400" dirty="0"/>
           </a:p>
@@ -6713,91 +5642,7 @@
                 <a:ea typeface="Microsoft JhengHei" pitchFamily="34" charset="-122"/>
                 <a:cs typeface="Microsoft JhengHei" pitchFamily="34" charset="-120"/>
               </a:rPr>
-              <a:t>針對不可切除HCC的組合療法</a:t>
-            </a:r>
-            <a:endParaRPr lang="en-US" sz="1800" dirty="0"/>
-          </a:p>
-          <a:p>
-            <a:pPr marL="342900" indent="-342900">
-              <a:spcAft>
-                <a:spcPts val="800"/>
-              </a:spcAft>
-              <a:buSzPct val="100000"/>
-              <a:buChar char="•"/>
-            </a:pPr>
-            <a:r>
-              <a:rPr lang="en-US" sz="1800" dirty="0">
-                <a:solidFill>
-                  <a:srgbClr val="333333"/>
-                </a:solidFill>
-                <a:latin typeface="Microsoft JhengHei" pitchFamily="34" charset="0"/>
-                <a:ea typeface="Microsoft JhengHei" pitchFamily="34" charset="-122"/>
-                <a:cs typeface="Microsoft JhengHei" pitchFamily="34" charset="-120"/>
-              </a:rPr>
-              <a:t>使用肝動脈化療栓塞(TACE)</a:t>
-            </a:r>
-            <a:endParaRPr lang="en-US" sz="1800" dirty="0"/>
-          </a:p>
-          <a:p>
-            <a:pPr marL="342900" indent="-342900">
-              <a:spcAft>
-                <a:spcPts val="800"/>
-              </a:spcAft>
-              <a:buSzPct val="100000"/>
-              <a:buChar char="•"/>
-            </a:pPr>
-            <a:r>
-              <a:rPr lang="en-US" sz="1800" dirty="0">
-                <a:solidFill>
-                  <a:srgbClr val="333333"/>
-                </a:solidFill>
-                <a:latin typeface="Microsoft JhengHei" pitchFamily="34" charset="0"/>
-                <a:ea typeface="Microsoft JhengHei" pitchFamily="34" charset="-122"/>
-                <a:cs typeface="Microsoft JhengHei" pitchFamily="34" charset="-120"/>
-              </a:rPr>
-              <a:t>PD-1抑制劑提升療效</a:t>
-            </a:r>
-            <a:endParaRPr lang="en-US" sz="1800" dirty="0"/>
-          </a:p>
-          <a:p>
-            <a:pPr marL="342900" indent="-342900">
-              <a:spcAft>
-                <a:spcPts val="800"/>
-              </a:spcAft>
-              <a:buSzPct val="100000"/>
-              <a:buChar char="•"/>
-            </a:pPr>
-            <a:r>
-              <a:rPr lang="en-US" sz="1800" dirty="0">
-                <a:solidFill>
-                  <a:srgbClr val="333333"/>
-                </a:solidFill>
-                <a:latin typeface="Microsoft JhengHei" pitchFamily="34" charset="0"/>
-                <a:ea typeface="Microsoft JhengHei" pitchFamily="34" charset="-122"/>
-                <a:cs typeface="Microsoft JhengHei" pitchFamily="34" charset="-120"/>
-              </a:rPr>
-              <a:t>第二期試驗顯示良好結果</a:t>
-            </a:r>
-            <a:endParaRPr lang="en-US" sz="1800" dirty="0"/>
-          </a:p>
-          <a:p>
-            <a:pPr marL="342900" indent="-342900">
-              <a:spcAft>
-                <a:spcPts val="800"/>
-              </a:spcAft>
-              <a:buSzPct val="100000"/>
-              <a:buChar char="•"/>
-            </a:pPr>
-            <a:r>
-              <a:rPr lang="en-US" sz="1800" dirty="0">
-                <a:solidFill>
-                  <a:srgbClr val="333333"/>
-                </a:solidFill>
-                <a:latin typeface="Microsoft JhengHei" pitchFamily="34" charset="0"/>
-                <a:ea typeface="Microsoft JhengHei" pitchFamily="34" charset="-122"/>
-                <a:cs typeface="Microsoft JhengHei" pitchFamily="34" charset="-120"/>
-              </a:rPr>
-              <a:t>轉化為可切除疾病的潛力</a:t>
+              <a:t>（生成失敗）</a:t>
             </a:r>
             <a:endParaRPr lang="en-US" sz="1800" dirty="0"/>
           </a:p>
@@ -6833,7 +5678,7 @@
                   <a:srgbClr val="888888"/>
                 </a:solidFill>
               </a:rPr>
-              <a:t>X Zhang, H Cai, W Peng. … and Targeted Therapy. 2026</a:t>
+              <a:t>S Lu, W Zhang, J Li. … and Targeted Therapy. 2026</a:t>
             </a:r>
             <a:endParaRPr lang="en-US" sz="800" dirty="0"/>
           </a:p>
@@ -7033,7 +5878,7 @@
                   </a:extLst>
                 </a:hlinkClick>
               </a:rPr>
-              <a:t>… (PD-1 inhibitor) plus lenvatinib as conversion therapy followed by sequential surgery (SILENSES) for advanced unresectable hepatocellular carcinoma: a phase II …</a:t>
+              <a:t>Defect-Engineered BiO2-X Nanosheets Mediate Sono-Thermomechanical ECM Remodeling for Hepatocellular Carcinoma Immunotherapy.</a:t>
             </a:r>
             <a:endParaRPr lang="en-US" sz="2400" dirty="0"/>
           </a:p>
@@ -7069,7 +5914,7 @@
                   <a:srgbClr val="888888"/>
                 </a:solidFill>
               </a:rPr>
-              <a:t>… and Targeted Therapy  ·  RCT Phase 2</a:t>
+              <a:t>Advanced science (Weinheim, Baden-Wurttemberg, Germany)  ·  🌏 Asia</a:t>
             </a:r>
             <a:endParaRPr lang="en-US" sz="1000" dirty="0"/>
           </a:p>
@@ -7112,91 +5957,7 @@
                 <a:ea typeface="Microsoft JhengHei" pitchFamily="34" charset="-122"/>
                 <a:cs typeface="Microsoft JhengHei" pitchFamily="34" charset="-120"/>
               </a:rPr>
-              <a:t>研究評估PD-1抑制劑加lenvatinib</a:t>
-            </a:r>
-            <a:endParaRPr lang="en-US" sz="1800" dirty="0"/>
-          </a:p>
-          <a:p>
-            <a:pPr marL="342900" indent="-342900">
-              <a:spcAft>
-                <a:spcPts val="800"/>
-              </a:spcAft>
-              <a:buSzPct val="100000"/>
-              <a:buChar char="•"/>
-            </a:pPr>
-            <a:r>
-              <a:rPr lang="en-US" sz="1800" dirty="0">
-                <a:solidFill>
-                  <a:srgbClr val="333333"/>
-                </a:solidFill>
-                <a:latin typeface="Microsoft JhengHei" pitchFamily="34" charset="0"/>
-                <a:ea typeface="Microsoft JhengHei" pitchFamily="34" charset="-122"/>
-                <a:cs typeface="Microsoft JhengHei" pitchFamily="34" charset="-120"/>
-              </a:rPr>
-              <a:t>重點在不可切除肝細胞癌</a:t>
-            </a:r>
-            <a:endParaRPr lang="en-US" sz="1800" dirty="0"/>
-          </a:p>
-          <a:p>
-            <a:pPr marL="342900" indent="-342900">
-              <a:spcAft>
-                <a:spcPts val="800"/>
-              </a:spcAft>
-              <a:buSzPct val="100000"/>
-              <a:buChar char="•"/>
-            </a:pPr>
-            <a:r>
-              <a:rPr lang="en-US" sz="1800" dirty="0">
-                <a:solidFill>
-                  <a:srgbClr val="333333"/>
-                </a:solidFill>
-                <a:latin typeface="Microsoft JhengHei" pitchFamily="34" charset="0"/>
-                <a:ea typeface="Microsoft JhengHei" pitchFamily="34" charset="-122"/>
-                <a:cs typeface="Microsoft JhengHei" pitchFamily="34" charset="-120"/>
-              </a:rPr>
-              <a:t>序列手術改善長期生存率</a:t>
-            </a:r>
-            <a:endParaRPr lang="en-US" sz="1800" dirty="0"/>
-          </a:p>
-          <a:p>
-            <a:pPr marL="342900" indent="-342900">
-              <a:spcAft>
-                <a:spcPts val="800"/>
-              </a:spcAft>
-              <a:buSzPct val="100000"/>
-              <a:buChar char="•"/>
-            </a:pPr>
-            <a:r>
-              <a:rPr lang="en-US" sz="1800" dirty="0">
-                <a:solidFill>
-                  <a:srgbClr val="333333"/>
-                </a:solidFill>
-                <a:latin typeface="Microsoft JhengHei" pitchFamily="34" charset="0"/>
-                <a:ea typeface="Microsoft JhengHei" pitchFamily="34" charset="-122"/>
-                <a:cs typeface="Microsoft JhengHei" pitchFamily="34" charset="-120"/>
-              </a:rPr>
-              <a:t>II期試驗顯示良好結果</a:t>
-            </a:r>
-            <a:endParaRPr lang="en-US" sz="1800" dirty="0"/>
-          </a:p>
-          <a:p>
-            <a:pPr marL="342900" indent="-342900">
-              <a:spcAft>
-                <a:spcPts val="800"/>
-              </a:spcAft>
-              <a:buSzPct val="100000"/>
-              <a:buChar char="•"/>
-            </a:pPr>
-            <a:r>
-              <a:rPr lang="en-US" sz="1800" dirty="0">
-                <a:solidFill>
-                  <a:srgbClr val="333333"/>
-                </a:solidFill>
-                <a:latin typeface="Microsoft JhengHei" pitchFamily="34" charset="0"/>
-                <a:ea typeface="Microsoft JhengHei" pitchFamily="34" charset="-122"/>
-                <a:cs typeface="Microsoft JhengHei" pitchFamily="34" charset="-120"/>
-              </a:rPr>
-              <a:t>可能成為晚期HCC新標準</a:t>
+              <a:t>（生成失敗）</a:t>
             </a:r>
             <a:endParaRPr lang="en-US" sz="1800" dirty="0"/>
           </a:p>
@@ -7232,7 +5993,7 @@
                   <a:srgbClr val="888888"/>
                 </a:solidFill>
               </a:rPr>
-              <a:t>S Lu, W Zhang, J Li. … and Targeted Therapy. 2026</a:t>
+              <a:t>Tian Huimin, Zhang Shen, Wu Bolin et al.. Advanced science (Weinheim, Baden-Wurttemberg, Germany). 2026-08-30 DOI: 10.1002/advs.77337</a:t>
             </a:r>
             <a:endParaRPr lang="en-US" sz="800" dirty="0"/>
           </a:p>
@@ -7432,7 +6193,7 @@
                   </a:extLst>
                 </a:hlinkClick>
               </a:rPr>
-              <a:t>A Case of Unresectable Hepatocellular Carcinoma Responding to Durvalumab Plus Tremelimumab after Lenvatinib Treatment.</a:t>
+              <a:t>Enhanced glucose uptake promotes the survival of hepatocellular carcinoma cells following incomplete radiofrequency ablation.</a:t>
             </a:r>
             <a:endParaRPr lang="en-US" sz="2400" dirty="0"/>
           </a:p>
@@ -7468,7 +6229,7 @@
                   <a:srgbClr val="888888"/>
                 </a:solidFill>
               </a:rPr>
-              <a:t>Internal medicine (Tokyo, Japan)  ·  🌏 Asia</a:t>
+              <a:t>Molecular &amp; cellular oncology  ·  🌏 Asia</a:t>
             </a:r>
             <a:endParaRPr lang="en-US" sz="1000" dirty="0"/>
           </a:p>
@@ -7511,91 +6272,7 @@
                 <a:ea typeface="Microsoft JhengHei" pitchFamily="34" charset="-122"/>
                 <a:cs typeface="Microsoft JhengHei" pitchFamily="34" charset="-120"/>
               </a:rPr>
-              <a:t>報告一例不可切除HCC</a:t>
-            </a:r>
-            <a:endParaRPr lang="en-US" sz="1800" dirty="0"/>
-          </a:p>
-          <a:p>
-            <a:pPr marL="342900" indent="-342900">
-              <a:spcAft>
-                <a:spcPts val="800"/>
-              </a:spcAft>
-              <a:buSzPct val="100000"/>
-              <a:buChar char="•"/>
-            </a:pPr>
-            <a:r>
-              <a:rPr lang="en-US" sz="1800" dirty="0">
-                <a:solidFill>
-                  <a:srgbClr val="333333"/>
-                </a:solidFill>
-                <a:latin typeface="Microsoft JhengHei" pitchFamily="34" charset="0"/>
-                <a:ea typeface="Microsoft JhengHei" pitchFamily="34" charset="-122"/>
-                <a:cs typeface="Microsoft JhengHei" pitchFamily="34" charset="-120"/>
-              </a:rPr>
-              <a:t>使用Durvalumab加Tremelimumab</a:t>
-            </a:r>
-            <a:endParaRPr lang="en-US" sz="1800" dirty="0"/>
-          </a:p>
-          <a:p>
-            <a:pPr marL="342900" indent="-342900">
-              <a:spcAft>
-                <a:spcPts val="800"/>
-              </a:spcAft>
-              <a:buSzPct val="100000"/>
-              <a:buChar char="•"/>
-            </a:pPr>
-            <a:r>
-              <a:rPr lang="en-US" sz="1800" dirty="0">
-                <a:solidFill>
-                  <a:srgbClr val="333333"/>
-                </a:solidFill>
-                <a:latin typeface="Microsoft JhengHei" pitchFamily="34" charset="0"/>
-                <a:ea typeface="Microsoft JhengHei" pitchFamily="34" charset="-122"/>
-                <a:cs typeface="Microsoft JhengHei" pitchFamily="34" charset="-120"/>
-              </a:rPr>
-              <a:t>患者對lenvatinib不耐受</a:t>
-            </a:r>
-            <a:endParaRPr lang="en-US" sz="1800" dirty="0"/>
-          </a:p>
-          <a:p>
-            <a:pPr marL="342900" indent="-342900">
-              <a:spcAft>
-                <a:spcPts val="800"/>
-              </a:spcAft>
-              <a:buSzPct val="100000"/>
-              <a:buChar char="•"/>
-            </a:pPr>
-            <a:r>
-              <a:rPr lang="en-US" sz="1800" dirty="0">
-                <a:solidFill>
-                  <a:srgbClr val="333333"/>
-                </a:solidFill>
-                <a:latin typeface="Microsoft JhengHei" pitchFamily="34" charset="0"/>
-                <a:ea typeface="Microsoft JhengHei" pitchFamily="34" charset="-122"/>
-                <a:cs typeface="Microsoft JhengHei" pitchFamily="34" charset="-120"/>
-              </a:rPr>
-              <a:t>腫瘤標記先升後降</a:t>
-            </a:r>
-            <a:endParaRPr lang="en-US" sz="1800" dirty="0"/>
-          </a:p>
-          <a:p>
-            <a:pPr marL="342900" indent="-342900">
-              <a:spcAft>
-                <a:spcPts val="800"/>
-              </a:spcAft>
-              <a:buSzPct val="100000"/>
-              <a:buChar char="•"/>
-            </a:pPr>
-            <a:r>
-              <a:rPr lang="en-US" sz="1800" dirty="0">
-                <a:solidFill>
-                  <a:srgbClr val="333333"/>
-                </a:solidFill>
-                <a:latin typeface="Microsoft JhengHei" pitchFamily="34" charset="0"/>
-                <a:ea typeface="Microsoft JhengHei" pitchFamily="34" charset="-122"/>
-                <a:cs typeface="Microsoft JhengHei" pitchFamily="34" charset="-120"/>
-              </a:rPr>
-              <a:t>影像學顯示腫瘤縮小</a:t>
+              <a:t>（生成失敗）</a:t>
             </a:r>
             <a:endParaRPr lang="en-US" sz="1800" dirty="0"/>
           </a:p>
@@ -7631,7 +6308,7 @@
                   <a:srgbClr val="888888"/>
                 </a:solidFill>
               </a:rPr>
-              <a:t>Sueda Saki, Kawaoka Tomokazu, Fujii Yasutoshi et al.. Internal medicine (Tokyo, Japan). 2026-08-19 DOI: 10.2169/internalmedicine.7369-26</a:t>
+              <a:t>Wang Xiaofeng, Li Ting, Peng Chao. Molecular &amp; cellular oncology. 2026-08-29 DOI: 10.1080/23723556.2026.2715876</a:t>
             </a:r>
             <a:endParaRPr lang="en-US" sz="800" dirty="0"/>
           </a:p>

--- a/docs/digest-zh.pptx
+++ b/docs/digest-zh.pptx
@@ -2269,7 +2269,7 @@
                   <a:srgbClr val="888888"/>
                 </a:solidFill>
               </a:rPr>
-              <a:t>2026-08-24 — 2026-08-31</a:t>
+              <a:t>2026-08-31 — 2026-09-07</a:t>
             </a:r>
             <a:endParaRPr lang="en-US" sz="1400" dirty="0"/>
           </a:p>
@@ -2460,7 +2460,7 @@
                   </a:extLst>
                 </a:hlinkClick>
               </a:rPr>
-              <a:t>Cryoablation versus radiofrequency ablation for hepatocellular carcinoma: a systematic review and meta-analysis</a:t>
+              <a:t>Perioperative tislelizumab for early-stage hepatocellular carcinoma: A phase II trial with integrated tumour microenvironment profiling and predictive modeling.</a:t>
             </a:r>
             <a:endParaRPr lang="en-US" sz="2400" dirty="0"/>
           </a:p>
@@ -2496,7 +2496,7 @@
                   <a:srgbClr val="888888"/>
                 </a:solidFill>
               </a:rPr>
-              <a:t>International Journal of …  ·  Meta-Analysis</a:t>
+              <a:t>Drug resistance updates : reviews and commentaries in antimicrobial and anticancer chemotherapy  ·  RCT Phase 2</a:t>
             </a:r>
             <a:endParaRPr lang="en-US" sz="1000" dirty="0"/>
           </a:p>
@@ -2575,7 +2575,7 @@
                   <a:srgbClr val="888888"/>
                 </a:solidFill>
               </a:rPr>
-              <a:t>K Mao, Y Wang, W Yao. International Journal of …. 2026</a:t>
+              <a:t>Chen Lu, Han Ruyu, Zhai Shujie et al.. Drug resistance updates : reviews and commentaries in antimicrobial and anticancer chemotherapy. 2026-07-23 DOI: 10.1016/j.drup.2026.101440</a:t>
             </a:r>
             <a:endParaRPr lang="en-US" sz="800" dirty="0"/>
           </a:p>
@@ -2775,7 +2775,7 @@
                   </a:extLst>
                 </a:hlinkClick>
               </a:rPr>
-              <a:t>External beam radiotherapy versus local ablation therapy for the treatment of hepatocellular carcinoma: a systematic review and meta-analysis</a:t>
+              <a:t>… plus transarterial chemoembolization and PD-1 inhibitors as conversion therapies for unresectable intermediate-advanced hepatocellular carcinoma: a phase 2 trial …</a:t>
             </a:r>
             <a:endParaRPr lang="en-US" sz="2400" dirty="0"/>
           </a:p>
@@ -2811,7 +2811,7 @@
                   <a:srgbClr val="888888"/>
                 </a:solidFill>
               </a:rPr>
-              <a:t>Clinical and Molecular …  ·  Meta-Analysis</a:t>
+              <a:t>… and Targeted Therapy  ·  RCT Phase 2</a:t>
             </a:r>
             <a:endParaRPr lang="en-US" sz="1000" dirty="0"/>
           </a:p>
@@ -2890,7 +2890,7 @@
                   <a:srgbClr val="888888"/>
                 </a:solidFill>
               </a:rPr>
-              <a:t>SH Bae, SH Choi, SM Yoon. Clinical and Molecular …</a:t>
+              <a:t>X Zhang, H Cai, W Peng. … and Targeted Therapy. 2026</a:t>
             </a:r>
             <a:endParaRPr lang="en-US" sz="800" dirty="0"/>
           </a:p>
@@ -3090,7 +3090,7 @@
                   </a:extLst>
                 </a:hlinkClick>
               </a:rPr>
-              <a:t>Defining the role of minimally invasive surgical thermal ablation in liver malignancies: A systematic review and meta-analysis of outcomes and reporting …</a:t>
+              <a:t>… (PD-1 inhibitor) plus lenvatinib as conversion therapy followed by sequential surgery (SILENSES) for advanced unresectable hepatocellular carcinoma: a phase II …</a:t>
             </a:r>
             <a:endParaRPr lang="en-US" sz="2400" dirty="0"/>
           </a:p>
@@ -3126,7 +3126,7 @@
                   <a:srgbClr val="888888"/>
                 </a:solidFill>
               </a:rPr>
-              <a:t>European Journal of …  ·  Meta-Analysis</a:t>
+              <a:t>… and Targeted Therapy  ·  RCT Phase 2</a:t>
             </a:r>
             <a:endParaRPr lang="en-US" sz="1000" dirty="0"/>
           </a:p>
@@ -3205,7 +3205,7 @@
                   <a:srgbClr val="888888"/>
                 </a:solidFill>
               </a:rPr>
-              <a:t>G Scotton, F Notte, HC Pommergaard…. European Journal of …. 2026</a:t>
+              <a:t>S Lu, W Zhang, J Li. … and Targeted Therapy. 2026</a:t>
             </a:r>
             <a:endParaRPr lang="en-US" sz="800" dirty="0"/>
           </a:p>
@@ -3815,7 +3815,7 @@
                 <a:ea typeface="Arial" pitchFamily="34" charset="-122"/>
                 <a:cs typeface="Arial" pitchFamily="34" charset="-120"/>
               </a:rPr>
-              <a:t>On-demand transarterial chemoembolisation combined with atezolizumab and bevaciz…</a:t>
+              <a:t>Durvalumab and tremelimumab, with or without lenvatinib, combined with transarte…</a:t>
             </a:r>
             <a:endParaRPr lang="en-US" sz="1400" dirty="0"/>
           </a:p>
@@ -3852,7 +3852,7 @@
                 <a:ea typeface="Arial" pitchFamily="34" charset="-122"/>
                 <a:cs typeface="Arial" pitchFamily="34" charset="-120"/>
               </a:rPr>
-              <a:t>Atezolizumab-Bevacizumab with or without Cisplatin-based HAIC for Unresectable H…</a:t>
+              <a:t>Perioperative strategies for the treatment of HCC.</a:t>
             </a:r>
             <a:endParaRPr lang="en-US" sz="1400" dirty="0"/>
           </a:p>
@@ -3889,7 +3889,7 @@
                 <a:ea typeface="Arial" pitchFamily="34" charset="-122"/>
                 <a:cs typeface="Arial" pitchFamily="34" charset="-120"/>
               </a:rPr>
-              <a:t>Phase 2 Study of Futibatinib in Combination with Pembrolizumab in Patients with …</a:t>
+              <a:t>A multicenter pilot study of nivolumab with drug-eluting bead transarterial chem…</a:t>
             </a:r>
             <a:endParaRPr lang="en-US" sz="1400" dirty="0"/>
           </a:p>
@@ -3926,7 +3926,7 @@
                 <a:ea typeface="Arial" pitchFamily="34" charset="-122"/>
                 <a:cs typeface="Arial" pitchFamily="34" charset="-120"/>
               </a:rPr>
-              <a:t>… plus transarterial chemoembolization and PD-1 inhibitors as conversion therapi…</a:t>
+              <a:t>Expanding the path to cure - a narrative review on optimizing multimodality sequ…</a:t>
             </a:r>
             <a:endParaRPr lang="en-US" sz="1400" dirty="0"/>
           </a:p>
@@ -3963,7 +3963,7 @@
                 <a:ea typeface="Arial" pitchFamily="34" charset="-122"/>
                 <a:cs typeface="Arial" pitchFamily="34" charset="-120"/>
               </a:rPr>
-              <a:t>… (PD-1 inhibitor) plus lenvatinib as conversion therapy followed by sequential …</a:t>
+              <a:t>Adaptive radiofrequency ablation using an Octopus multipurpose electrode for sma…</a:t>
             </a:r>
             <a:endParaRPr lang="en-US" sz="1400" dirty="0"/>
           </a:p>
@@ -4000,7 +4000,7 @@
                 <a:ea typeface="Arial" pitchFamily="34" charset="-122"/>
                 <a:cs typeface="Arial" pitchFamily="34" charset="-120"/>
               </a:rPr>
-              <a:t>Defect-Engineered BiO2-X Nanosheets Mediate Sono-Thermomechanical ECM Remodeling…</a:t>
+              <a:t>Clinical predictors of response to atezolizumab/bevacizumab in Child-Pugh B pati…</a:t>
             </a:r>
             <a:endParaRPr lang="en-US" sz="1400" dirty="0"/>
           </a:p>
@@ -4037,7 +4037,7 @@
                 <a:ea typeface="Arial" pitchFamily="34" charset="-122"/>
                 <a:cs typeface="Arial" pitchFamily="34" charset="-120"/>
               </a:rPr>
-              <a:t>Enhanced glucose uptake promotes the survival of hepatocellular carcinoma cells …</a:t>
+              <a:t>Spatiotemporal dynamics of the tumor microenvironment in hepatocellular carcinom…</a:t>
             </a:r>
             <a:endParaRPr lang="en-US" sz="1400" dirty="0"/>
           </a:p>
@@ -4074,7 +4074,7 @@
                 <a:ea typeface="Arial" pitchFamily="34" charset="-122"/>
                 <a:cs typeface="Arial" pitchFamily="34" charset="-120"/>
               </a:rPr>
-              <a:t>Cryoablation versus radiofrequency ablation for hepatocellular carcinoma: a syst…</a:t>
+              <a:t>Perioperative tislelizumab for early-stage hepatocellular carcinoma: A phase II …</a:t>
             </a:r>
             <a:endParaRPr lang="en-US" sz="1400" dirty="0"/>
           </a:p>
@@ -4111,7 +4111,7 @@
                 <a:ea typeface="Arial" pitchFamily="34" charset="-122"/>
                 <a:cs typeface="Arial" pitchFamily="34" charset="-120"/>
               </a:rPr>
-              <a:t>External beam radiotherapy versus local ablation therapy for the treatment of he…</a:t>
+              <a:t>… plus transarterial chemoembolization and PD-1 inhibitors as conversion therapi…</a:t>
             </a:r>
             <a:endParaRPr lang="en-US" sz="1400" dirty="0"/>
           </a:p>
@@ -4148,7 +4148,7 @@
                 <a:ea typeface="Arial" pitchFamily="34" charset="-122"/>
                 <a:cs typeface="Arial" pitchFamily="34" charset="-120"/>
               </a:rPr>
-              <a:t>Defining the role of minimally invasive surgical thermal ablation in liver malig…</a:t>
+              <a:t>… (PD-1 inhibitor) plus lenvatinib as conversion therapy followed by sequential …</a:t>
             </a:r>
             <a:endParaRPr lang="en-US" sz="1400" dirty="0"/>
           </a:p>
@@ -4303,7 +4303,7 @@
                   </a:extLst>
                 </a:hlinkClick>
               </a:rPr>
-              <a:t>On-demand transarterial chemoembolisation combined with atezolizumab and bevacizumab in patients with untreated hepatocellular carcinoma (TALENTACE): a multicentre, randomised, open-label, phase 3 trial.</a:t>
+              <a:t>Durvalumab and tremelimumab, with or without lenvatinib, combined with transarterial chemoembolisation in participants with embolisation-eligible hepatocellular carcinoma (EMERALD-3): a global, randomised, open-label, sponsor-blinded, phase 3 study.</a:t>
             </a:r>
             <a:endParaRPr lang="en-US" sz="2400" dirty="0"/>
           </a:p>
@@ -4339,7 +4339,7 @@
                   <a:srgbClr val="888888"/>
                 </a:solidFill>
               </a:rPr>
-              <a:t>The lancet. Gastroenterology &amp; hepatology  ·  IF 35.7  ·  RCT Phase 3  ·  🌏 Asia</a:t>
+              <a:t>The Lancet. Oncology  ·  IF 41.6  ·  RCT Phase 3  ·  🌏 Asia</a:t>
             </a:r>
             <a:endParaRPr lang="en-US" sz="1000" dirty="0"/>
           </a:p>
@@ -4418,7 +4418,7 @@
                   <a:srgbClr val="888888"/>
                 </a:solidFill>
               </a:rPr>
-              <a:t>Kudo Masatoshi, Ogasawara Sadahisa, Liu Ruibao et al.. The lancet. Gastroenterology &amp; hepatology. 2026-08-25 DOI: 10.1016/S2468-1253(26)00212-8</a:t>
+              <a:t>Kudo Masatoshi, Abou-Alfa Ghassan K, Ren Zhenggang et al.. The Lancet. Oncology. 2026-08-24 DOI: 10.1016/S1470-2045(26)00278-0</a:t>
             </a:r>
             <a:endParaRPr lang="en-US" sz="800" dirty="0"/>
           </a:p>
@@ -4618,7 +4618,7 @@
                   </a:extLst>
                 </a:hlinkClick>
               </a:rPr>
-              <a:t>Atezolizumab-Bevacizumab with or without Cisplatin-based HAIC for Unresectable HCC: A Randomized Phase 2 Trial.</a:t>
+              <a:t>Perioperative strategies for the treatment of HCC.</a:t>
             </a:r>
             <a:endParaRPr lang="en-US" sz="2400" dirty="0"/>
           </a:p>
@@ -4654,7 +4654,7 @@
                   <a:srgbClr val="888888"/>
                 </a:solidFill>
               </a:rPr>
-              <a:t>JHEP reports : innovation in hepatology  ·  IF 7.8  ·  RCT Phase 3  ·  🌏 Asia</a:t>
+              <a:t>JHEP reports : innovation in hepatology  ·  IF 7.8  ·  RCT Phase 2</a:t>
             </a:r>
             <a:endParaRPr lang="en-US" sz="1000" dirty="0"/>
           </a:p>
@@ -4733,7 +4733,7 @@
                   <a:srgbClr val="888888"/>
                 </a:solidFill>
               </a:rPr>
-              <a:t>Takeuchi Yasuto, Sue Masahiko, Miyake Nozomi et al.. JHEP reports : innovation in hepatology. 2026-08-28 DOI: 10.1016/j.jhepr.2026.102002</a:t>
+              <a:t>D'Alessio Antonio, Krendl Felix J, Parente Alessandro et al.. JHEP reports : innovation in hepatology. 2026-09-03 DOI: 10.1016/j.jhepr.2026.102021</a:t>
             </a:r>
             <a:endParaRPr lang="en-US" sz="800" dirty="0"/>
           </a:p>
@@ -4933,7 +4933,7 @@
                   </a:extLst>
                 </a:hlinkClick>
               </a:rPr>
-              <a:t>Phase 2 Study of Futibatinib in Combination with Pembrolizumab in Patients with FGF19 expressing Advanced Hepatocellular Carcinoma.</a:t>
+              <a:t>A multicenter pilot study of nivolumab with drug-eluting bead transarterial chemoembolization in patients with liver-limited hepatocellular carcinoma.</a:t>
             </a:r>
             <a:endParaRPr lang="en-US" sz="2400" dirty="0"/>
           </a:p>
@@ -4969,7 +4969,7 @@
                   <a:srgbClr val="888888"/>
                 </a:solidFill>
               </a:rPr>
-              <a:t>The oncologist  ·  RCT Phase 2</a:t>
+              <a:t>ESMO gastrointestinal oncology  ·  RCT Phase 3</a:t>
             </a:r>
             <a:endParaRPr lang="en-US" sz="1000" dirty="0"/>
           </a:p>
@@ -5048,7 +5048,7 @@
                   <a:srgbClr val="888888"/>
                 </a:solidFill>
               </a:rPr>
-              <a:t>Tran Nguyen H, Palmer Mathias E, Ulrich Angela et al.. The oncologist. 2026-08-25 DOI: 10.1093/oncolo/oyag343</a:t>
+              <a:t>Harding J J, Fitzpatrick O M, Chou J F et al.. ESMO gastrointestinal oncology. 2026-08-28 DOI: 10.1016/j.esmogo.2026.100402</a:t>
             </a:r>
             <a:endParaRPr lang="en-US" sz="800" dirty="0"/>
           </a:p>
@@ -5248,7 +5248,7 @@
                   </a:extLst>
                 </a:hlinkClick>
               </a:rPr>
-              <a:t>… plus transarterial chemoembolization and PD-1 inhibitors as conversion therapies for unresectable intermediate-advanced hepatocellular carcinoma: a phase 2 trial …</a:t>
+              <a:t>Expanding the path to cure - a narrative review on optimizing multimodality sequencing in HCC.</a:t>
             </a:r>
             <a:endParaRPr lang="en-US" sz="2400" dirty="0"/>
           </a:p>
@@ -5284,7 +5284,7 @@
                   <a:srgbClr val="888888"/>
                 </a:solidFill>
               </a:rPr>
-              <a:t>… and Targeted Therapy  ·  RCT Phase 2</a:t>
+              <a:t>Cancer treatment reviews  ·  RCT Phase 3</a:t>
             </a:r>
             <a:endParaRPr lang="en-US" sz="1000" dirty="0"/>
           </a:p>
@@ -5363,7 +5363,7 @@
                   <a:srgbClr val="888888"/>
                 </a:solidFill>
               </a:rPr>
-              <a:t>X Zhang, H Cai, W Peng. … and Targeted Therapy. 2026</a:t>
+              <a:t>Lim Howard J, Vogel Arndt, Dunne Emma M et al.. Cancer treatment reviews. 2026-09-06 DOI: 10.1016/j.ctrv.2026.103194</a:t>
             </a:r>
             <a:endParaRPr lang="en-US" sz="800" dirty="0"/>
           </a:p>
@@ -5563,7 +5563,7 @@
                   </a:extLst>
                 </a:hlinkClick>
               </a:rPr>
-              <a:t>… (PD-1 inhibitor) plus lenvatinib as conversion therapy followed by sequential surgery (SILENSES) for advanced unresectable hepatocellular carcinoma: a phase II …</a:t>
+              <a:t>Adaptive radiofrequency ablation using an Octopus multipurpose electrode for small hepatocellular carcinoma adjacent to critical structures: a prospective single-center pilot feasibility study.</a:t>
             </a:r>
             <a:endParaRPr lang="en-US" sz="2400" dirty="0"/>
           </a:p>
@@ -5599,7 +5599,7 @@
                   <a:srgbClr val="888888"/>
                 </a:solidFill>
               </a:rPr>
-              <a:t>… and Targeted Therapy  ·  RCT Phase 2</a:t>
+              <a:t>Ultrasonography (Seoul, Korea)  ·  Prospective Study  ·  🌏 Asia</a:t>
             </a:r>
             <a:endParaRPr lang="en-US" sz="1000" dirty="0"/>
           </a:p>
@@ -5678,7 +5678,7 @@
                   <a:srgbClr val="888888"/>
                 </a:solidFill>
               </a:rPr>
-              <a:t>S Lu, W Zhang, J Li. … and Targeted Therapy. 2026</a:t>
+              <a:t>Lee Jeong Min, Kim Jae Hyun, Jo Gyeong Deok et al.. Ultrasonography (Seoul, Korea). 2026-09-03 DOI: 10.14366/usg.26158</a:t>
             </a:r>
             <a:endParaRPr lang="en-US" sz="800" dirty="0"/>
           </a:p>
@@ -5878,7 +5878,7 @@
                   </a:extLst>
                 </a:hlinkClick>
               </a:rPr>
-              <a:t>Defect-Engineered BiO2-X Nanosheets Mediate Sono-Thermomechanical ECM Remodeling for Hepatocellular Carcinoma Immunotherapy.</a:t>
+              <a:t>Clinical predictors of response to atezolizumab/bevacizumab in Child-Pugh B patients with hepatocellular carcinoma.</a:t>
             </a:r>
             <a:endParaRPr lang="en-US" sz="2400" dirty="0"/>
           </a:p>
@@ -5914,7 +5914,7 @@
                   <a:srgbClr val="888888"/>
                 </a:solidFill>
               </a:rPr>
-              <a:t>Advanced science (Weinheim, Baden-Wurttemberg, Germany)  ·  🌏 Asia</a:t>
+              <a:t>JHEP reports : innovation in hepatology  ·  IF 7.8  ·  Retrospective Study  ·  🌏 Asia</a:t>
             </a:r>
             <a:endParaRPr lang="en-US" sz="1000" dirty="0"/>
           </a:p>
@@ -5993,7 +5993,7 @@
                   <a:srgbClr val="888888"/>
                 </a:solidFill>
               </a:rPr>
-              <a:t>Tian Huimin, Zhang Shen, Wu Bolin et al.. Advanced science (Weinheim, Baden-Wurttemberg, Germany). 2026-08-30 DOI: 10.1002/advs.77337</a:t>
+              <a:t>Odent Anne-Victoire, Campani Claudia, Bouattour Mohamed et al.. JHEP reports : innovation in hepatology. 2026-08-27 DOI: 10.1016/j.jhepr.2026.101915</a:t>
             </a:r>
             <a:endParaRPr lang="en-US" sz="800" dirty="0"/>
           </a:p>
@@ -6193,7 +6193,7 @@
                   </a:extLst>
                 </a:hlinkClick>
               </a:rPr>
-              <a:t>Enhanced glucose uptake promotes the survival of hepatocellular carcinoma cells following incomplete radiofrequency ablation.</a:t>
+              <a:t>Spatiotemporal dynamics of the tumor microenvironment in hepatocellular carcinoma during combination immunotherapy.</a:t>
             </a:r>
             <a:endParaRPr lang="en-US" sz="2400" dirty="0"/>
           </a:p>
@@ -6229,7 +6229,7 @@
                   <a:srgbClr val="888888"/>
                 </a:solidFill>
               </a:rPr>
-              <a:t>Molecular &amp; cellular oncology  ·  🌏 Asia</a:t>
+              <a:t>Hepatology communications  ·  IF 5.6  ·  🌏 Asia</a:t>
             </a:r>
             <a:endParaRPr lang="en-US" sz="1000" dirty="0"/>
           </a:p>
@@ -6308,7 +6308,7 @@
                   <a:srgbClr val="888888"/>
                 </a:solidFill>
               </a:rPr>
-              <a:t>Wang Xiaofeng, Li Ting, Peng Chao. Molecular &amp; cellular oncology. 2026-08-29 DOI: 10.1080/23723556.2026.2715876</a:t>
+              <a:t>Iwasaki Hitoshi, Itoh Shinji, Toshida Katsuya et al.. Hepatology communications. 2026-08-07 DOI: 10.1097/HC9.0000000000001014</a:t>
             </a:r>
             <a:endParaRPr lang="en-US" sz="800" dirty="0"/>
           </a:p>
